--- a/ho-so-nang-luc-BLT/HO_SO_NANG_LUC_BLT.pptx
+++ b/ho-so-nang-luc-BLT/HO_SO_NANG_LUC_BLT.pptx
@@ -132,14 +132,14 @@
   <p:extLst>
     <p:ext uri="{521415D9-36F7-43E2-AB2F-B90AF26B5E84}">
       <p14:sectionLst xmlns:p14="http://schemas.microsoft.com/office/powerpoint/2010/main">
-        <p14:section name="Mở đầu" id="{26c2cbe2-5435-2784-9045-37cc22e1cf70}">
+        <p14:section name="Mở đầu" id="{520515a1-b3d7-0381-950e-16aab9da672d}">
           <p14:sldIdLst>
             <p14:sldId id="256"/>
             <p14:sldId id="257"/>
             <p14:sldId id="258"/>
           </p14:sldIdLst>
         </p14:section>
-        <p14:section name="01 Tổng quan" id="{e35e47d5-44fc-2747-424a-152f5324c86c}">
+        <p14:section name="01 Tổng quan" id="{b2cd6b12-3929-265b-c98f-31629d2fb868}">
           <p14:sldIdLst>
             <p14:sldId id="259"/>
             <p14:sldId id="260"/>
@@ -148,39 +148,39 @@
             <p14:sldId id="263"/>
           </p14:sldIdLst>
         </p14:section>
-        <p14:section name="02 Điện nước công trình" id="{0b63af51-de95-6c5e-9ad5-5348f2f52c55}">
+        <p14:section name="02 Điện nước công trình" id="{e274f42b-5430-f19a-bb4d-c73d70c01f49}">
           <p14:sldIdLst>
             <p14:sldId id="264"/>
             <p14:sldId id="265"/>
             <p14:sldId id="266"/>
           </p14:sldIdLst>
         </p14:section>
-        <p14:section name="03 Hút sương dầu nhà xưởng" id="{21b66b15-28d0-1664-80fb-891364fc1551}">
+        <p14:section name="03 Hút sương dầu nhà xưởng" id="{7045e8b1-0b3b-89ca-35a4-3265bdd5d3aa}">
           <p14:sldIdLst>
             <p14:sldId id="267"/>
             <p14:sldId id="268"/>
             <p14:sldId id="269"/>
           </p14:sldIdLst>
         </p14:section>
-        <p14:section name="04 Bơm &amp; xử lý nước" id="{e263b8d2-e9c6-8ffa-2148-1470568bc915}">
+        <p14:section name="04 Bơm &amp; xử lý nước" id="{ef75f51d-509d-738f-12a4-e350022ed294}">
           <p14:sldIdLst>
             <p14:sldId id="270"/>
           </p14:sldIdLst>
         </p14:section>
-        <p14:section name="05 Quản trị dự án" id="{b9603bc3-fb41-8c6f-2ec6-23293c7e8c8e}">
+        <p14:section name="05 Quản trị dự án" id="{929e1f16-04b8-a96f-ae2b-56e605932ee7}">
           <p14:sldIdLst>
             <p14:sldId id="271"/>
             <p14:sldId id="272"/>
             <p14:sldId id="273"/>
           </p14:sldIdLst>
         </p14:section>
-        <p14:section name="06 Nguồn lực" id="{e2c384e7-8963-b867-74ca-342c9e025354}">
+        <p14:section name="06 Nguồn lực" id="{f981e69c-bc4b-40f3-0d24-20bf1965aa93}">
           <p14:sldIdLst>
             <p14:sldId id="274"/>
             <p14:sldId id="275"/>
           </p14:sldIdLst>
         </p14:section>
-        <p14:section name="07 Công trình tiêu biểu" id="{0bdc39f4-9c2e-c93c-e635-e04c4759787d}">
+        <p14:section name="07 Công trình tiêu biểu" id="{8ef74281-28dc-f782-8548-071d3cd20635}">
           <p14:sldIdLst>
             <p14:sldId id="276"/>
             <p14:sldId id="277"/>
@@ -188,7 +188,7 @@
             <p14:sldId id="279"/>
           </p14:sldIdLst>
         </p14:section>
-        <p14:section name="08 Cam kết &amp; liên hệ" id="{82a961f7-7350-0d98-8f46-9af212f541a7}">
+        <p14:section name="08 Cam kết &amp; liên hệ" id="{74f006b4-3b18-c029-d79d-5f421863241c}">
           <p14:sldIdLst>
             <p14:sldId id="280"/>
             <p14:sldId id="281"/>
@@ -8604,7 +8604,7 @@
         <p:spPr>
           <a:xfrm>
             <a:off x="502920" y="5760720"/>
-            <a:ext cx="3140964" cy="2743200"/>
+            <a:ext cx="3140964" cy="2651760"/>
           </a:xfrm>
           <a:prstGeom prst="rect">
             <a:avLst/>
@@ -8773,11 +8773,11 @@
         <p:spPr>
           <a:xfrm>
             <a:off x="3918204" y="5760720"/>
-            <a:ext cx="3140964" cy="2743200"/>
+            <a:ext cx="3140964" cy="2606040"/>
           </a:xfrm>
           <a:prstGeom prst="roundRect">
             <a:avLst>
-              <a:gd name="adj" fmla="val 2667"/>
+              <a:gd name="adj" fmla="val 2807"/>
             </a:avLst>
           </a:prstGeom>
           <a:solidFill>
@@ -8887,7 +8887,7 @@
       </p:sp>
       <p:pic>
         <p:nvPicPr>
-          <p:cNvPr id="11" name="photo img48.jpg" descr="Ảnh hiện trường BLT">    </p:cNvPr>
+          <p:cNvPr id="11" name="photo img61.jpg" descr="Ảnh hiện trường BLT">    </p:cNvPr>
           <p:cNvPicPr>
             <a:picLocks noChangeAspect="1"/>
           </p:cNvPicPr>
@@ -8901,8 +8901,8 @@
         </p:blipFill>
         <p:spPr>
           <a:xfrm>
-            <a:off x="502920" y="8732520"/>
-            <a:ext cx="2063496" cy="1051560"/>
+            <a:off x="502920" y="8641080"/>
+            <a:ext cx="2063496" cy="1188720"/>
           </a:xfrm>
           <a:prstGeom prst="rect">
             <a:avLst/>
@@ -8911,7 +8911,7 @@
       </p:pic>
       <p:pic>
         <p:nvPicPr>
-          <p:cNvPr id="12" name="photo img16.jpg" descr="Ảnh hiện trường BLT">    </p:cNvPr>
+          <p:cNvPr id="12" name="photo img60.jpg" descr="Ảnh hiện trường BLT">    </p:cNvPr>
           <p:cNvPicPr>
             <a:picLocks noChangeAspect="1"/>
           </p:cNvPicPr>
@@ -8925,8 +8925,8 @@
         </p:blipFill>
         <p:spPr>
           <a:xfrm>
-            <a:off x="2749296" y="8732520"/>
-            <a:ext cx="2063496" cy="1051560"/>
+            <a:off x="2749296" y="8641080"/>
+            <a:ext cx="2063496" cy="1188720"/>
           </a:xfrm>
           <a:prstGeom prst="rect">
             <a:avLst/>
@@ -8949,8 +8949,8 @@
         </p:blipFill>
         <p:spPr>
           <a:xfrm>
-            <a:off x="4995672" y="8732520"/>
-            <a:ext cx="2063496" cy="1051560"/>
+            <a:off x="4995672" y="8641080"/>
+            <a:ext cx="2063496" cy="1188720"/>
           </a:xfrm>
           <a:prstGeom prst="rect">
             <a:avLst/>
@@ -14357,7 +14357,7 @@
       </p:sp>
       <p:pic>
         <p:nvPicPr>
-          <p:cNvPr id="5" name="photo img35.jpg" descr="Đội ngũ kỹ thuật BLT – xã Hưng Nguyên, Nghệ An (04/10/2026)">    </p:cNvPr>
+          <p:cNvPr id="5" name="photo img57.jpg" descr="Đội thi công BLT tại trạm xử lý nước – Thành phố Huế (17/09/2026)">    </p:cNvPr>
           <p:cNvPicPr>
             <a:picLocks noChangeAspect="1"/>
           </p:cNvPicPr>
@@ -14411,7 +14411,7 @@
                   <a:schemeClr val="accent3"/>
                 </a:solidFill>
               </a:rPr>
-              <a:t>Đội ngũ kỹ thuật BLT – xã Hưng Nguyên, Nghệ An (04/10/2026)</a:t>
+              <a:t>Đội thi công BLT tại trạm xử lý nước – Thành phố Huế (17/09/2026)</a:t>
             </a:r>
             <a:endParaRPr lang="en-US" sz="800" dirty="0"/>
           </a:p>
@@ -23360,7 +23360,7 @@
       </p:sp>
       <p:pic>
         <p:nvPicPr>
-          <p:cNvPr id="13" name="photo img46.jpg" descr="Tập kết thiết bị trong nhà xưởng">    </p:cNvPr>
+          <p:cNvPr id="13" name="photo img56.jpg" descr="Chỉ huy và đội thi công tại trạm (19/09/2026)">    </p:cNvPr>
           <p:cNvPicPr>
             <a:picLocks noChangeAspect="1"/>
           </p:cNvPicPr>
@@ -23414,7 +23414,7 @@
                   <a:schemeClr val="accent3"/>
                 </a:solidFill>
               </a:rPr>
-              <a:t>Tập kết thiết bị trong nhà xưởng</a:t>
+              <a:t>Chỉ huy và đội thi công tại trạm (19/09/2026)</a:t>
             </a:r>
             <a:endParaRPr lang="en-US" sz="800" dirty="0"/>
           </a:p>

--- a/ho-so-nang-luc-BLT/HO_SO_NANG_LUC_BLT.pptx
+++ b/ho-so-nang-luc-BLT/HO_SO_NANG_LUC_BLT.pptx
@@ -132,14 +132,14 @@
   <p:extLst>
     <p:ext uri="{521415D9-36F7-43E2-AB2F-B90AF26B5E84}">
       <p14:sectionLst xmlns:p14="http://schemas.microsoft.com/office/powerpoint/2010/main">
-        <p14:section name="Mở đầu" id="{520515a1-b3d7-0381-950e-16aab9da672d}">
+        <p14:section name="Mở đầu" id="{40b33bb2-b6d9-e86a-0ad3-5191760a0fc4}">
           <p14:sldIdLst>
             <p14:sldId id="256"/>
             <p14:sldId id="257"/>
             <p14:sldId id="258"/>
           </p14:sldIdLst>
         </p14:section>
-        <p14:section name="01 Tổng quan" id="{b2cd6b12-3929-265b-c98f-31629d2fb868}">
+        <p14:section name="01 Tổng quan" id="{410dacaa-1005-0b01-06e4-b954eda0a175}">
           <p14:sldIdLst>
             <p14:sldId id="259"/>
             <p14:sldId id="260"/>
@@ -148,39 +148,39 @@
             <p14:sldId id="263"/>
           </p14:sldIdLst>
         </p14:section>
-        <p14:section name="02 Điện nước công trình" id="{e274f42b-5430-f19a-bb4d-c73d70c01f49}">
+        <p14:section name="02 Điện nước công trình" id="{9e76d6bf-a0ef-9e47-2ab5-0177308bd443}">
           <p14:sldIdLst>
             <p14:sldId id="264"/>
             <p14:sldId id="265"/>
             <p14:sldId id="266"/>
           </p14:sldIdLst>
         </p14:section>
-        <p14:section name="03 Hút sương dầu nhà xưởng" id="{7045e8b1-0b3b-89ca-35a4-3265bdd5d3aa}">
+        <p14:section name="03 Hút sương dầu nhà xưởng" id="{a92a3d47-b56a-9f87-eeeb-0e000621313c}">
           <p14:sldIdLst>
             <p14:sldId id="267"/>
             <p14:sldId id="268"/>
             <p14:sldId id="269"/>
           </p14:sldIdLst>
         </p14:section>
-        <p14:section name="04 Bơm &amp; xử lý nước" id="{ef75f51d-509d-738f-12a4-e350022ed294}">
+        <p14:section name="04 Bơm &amp; xử lý nước" id="{0ed2a60e-5a51-bfb5-2ff4-ff62fefeee1a}">
           <p14:sldIdLst>
             <p14:sldId id="270"/>
           </p14:sldIdLst>
         </p14:section>
-        <p14:section name="05 Quản trị dự án" id="{929e1f16-04b8-a96f-ae2b-56e605932ee7}">
+        <p14:section name="05 Quản trị dự án" id="{f9200934-b2ac-d757-e198-0ebb601adfe6}">
           <p14:sldIdLst>
             <p14:sldId id="271"/>
             <p14:sldId id="272"/>
             <p14:sldId id="273"/>
           </p14:sldIdLst>
         </p14:section>
-        <p14:section name="06 Nguồn lực" id="{f981e69c-bc4b-40f3-0d24-20bf1965aa93}">
+        <p14:section name="06 Nguồn lực" id="{37878bd4-bdef-a2bc-b9b6-422516f8ef52}">
           <p14:sldIdLst>
             <p14:sldId id="274"/>
             <p14:sldId id="275"/>
           </p14:sldIdLst>
         </p14:section>
-        <p14:section name="07 Công trình tiêu biểu" id="{8ef74281-28dc-f782-8548-071d3cd20635}">
+        <p14:section name="07 Công trình tiêu biểu" id="{404a7f33-a4d1-85f7-9684-94e897b8f9d3}">
           <p14:sldIdLst>
             <p14:sldId id="276"/>
             <p14:sldId id="277"/>
@@ -188,7 +188,7 @@
             <p14:sldId id="279"/>
           </p14:sldIdLst>
         </p14:section>
-        <p14:section name="08 Cam kết &amp; liên hệ" id="{74f006b4-3b18-c029-d79d-5f421863241c}">
+        <p14:section name="08 Cam kết &amp; liên hệ" id="{0a70edd3-066b-dbcb-e066-ddd5a2854b1e}">
           <p14:sldIdLst>
             <p14:sldId id="280"/>
             <p14:sldId id="281"/>
@@ -14319,45 +14319,9 @@
           </a:p>
         </p:txBody>
       </p:sp>
-      <p:sp>
-        <p:nvSpPr>
-          <p:cNvPr id="4" name="Text 2"/>
-          <p:cNvSpPr txBox="1"/>
-          <p:nvPr/>
-        </p:nvSpPr>
-        <p:spPr>
-          <a:xfrm>
-            <a:off x="4681728" y="1188720"/>
-            <a:ext cx="2377440" cy="219456"/>
-          </a:xfrm>
-          <a:prstGeom prst="rect">
-            <a:avLst/>
-          </a:prstGeom>
-          <a:noFill/>
-          <a:ln/>
-        </p:spPr>
-        <p:txBody>
-          <a:bodyPr wrap="square" lIns="0" tIns="0" rIns="0" bIns="0" rtlCol="0" anchor="ctr"/>
-          <a:lstStyle/>
-          <a:p>
-            <a:pPr algn="r" indent="0" marL="0">
-              <a:buNone/>
-            </a:pPr>
-            <a:r>
-              <a:rPr lang="en-US" sz="750" b="1" spc="100" kern="0" dirty="0">
-                <a:solidFill>
-                  <a:schemeClr val="accent1"/>
-                </a:solidFill>
-              </a:rPr>
-              <a:t>SỐ LIỆU – CẦN BỔ SUNG</a:t>
-            </a:r>
-            <a:endParaRPr lang="en-US" sz="750" dirty="0"/>
-          </a:p>
-        </p:txBody>
-      </p:sp>
       <p:pic>
         <p:nvPicPr>
-          <p:cNvPr id="5" name="photo img57.jpg" descr="Đội thi công BLT tại trạm xử lý nước – Thành phố Huế (17/09/2026)">    </p:cNvPr>
+          <p:cNvPr id="4" name="photo img57.jpg" descr="Đội thi công BLT tại trạm xử lý nước – Thành phố Huế (17/09/2026)">    </p:cNvPr>
           <p:cNvPicPr>
             <a:picLocks noChangeAspect="1"/>
           </p:cNvPicPr>
@@ -14381,7 +14345,7 @@
       </p:pic>
       <p:sp>
         <p:nvSpPr>
-          <p:cNvPr id="6" name="Text 3"/>
+          <p:cNvPr id="5" name="Text 2"/>
           <p:cNvSpPr txBox="1"/>
           <p:nvPr/>
         </p:nvSpPr>
@@ -14419,7 +14383,7 @@
       </p:sp>
       <p:sp>
         <p:nvSpPr>
-          <p:cNvPr id="7" name="Shape 4"/>
+          <p:cNvPr id="6" name="Shape 3"/>
           <p:cNvSpPr/>
           <p:nvPr/>
         </p:nvSpPr>
@@ -14446,7 +14410,7 @@
       </p:sp>
       <p:sp>
         <p:nvSpPr>
-          <p:cNvPr id="8" name="Text 5"/>
+          <p:cNvPr id="7" name="Text 4"/>
           <p:cNvSpPr txBox="1"/>
           <p:nvPr/>
         </p:nvSpPr>
@@ -14485,7 +14449,7 @@
       </p:sp>
       <p:sp>
         <p:nvSpPr>
-          <p:cNvPr id="9" name="Text 6"/>
+          <p:cNvPr id="8" name="Text 5"/>
           <p:cNvSpPr txBox="1"/>
           <p:nvPr/>
         </p:nvSpPr>
@@ -14521,7 +14485,7 @@
       </p:sp>
       <p:sp>
         <p:nvSpPr>
-          <p:cNvPr id="10" name="Shape 7"/>
+          <p:cNvPr id="9" name="Shape 6"/>
           <p:cNvSpPr/>
           <p:nvPr/>
         </p:nvSpPr>
@@ -14544,7 +14508,7 @@
       </p:sp>
       <p:sp>
         <p:nvSpPr>
-          <p:cNvPr id="11" name="Shape 8"/>
+          <p:cNvPr id="10" name="Shape 7"/>
           <p:cNvSpPr/>
           <p:nvPr/>
         </p:nvSpPr>
@@ -14567,7 +14531,7 @@
       </p:sp>
       <p:sp>
         <p:nvSpPr>
-          <p:cNvPr id="12" name="Shape 9"/>
+          <p:cNvPr id="11" name="Shape 8"/>
           <p:cNvSpPr/>
           <p:nvPr/>
         </p:nvSpPr>
@@ -14590,7 +14554,7 @@
       </p:sp>
       <p:sp>
         <p:nvSpPr>
-          <p:cNvPr id="13" name="Shape 10"/>
+          <p:cNvPr id="12" name="Shape 9"/>
           <p:cNvSpPr/>
           <p:nvPr/>
         </p:nvSpPr>
@@ -14617,7 +14581,7 @@
       </p:sp>
       <p:sp>
         <p:nvSpPr>
-          <p:cNvPr id="14" name="Text 11"/>
+          <p:cNvPr id="13" name="Text 10"/>
           <p:cNvSpPr txBox="1"/>
           <p:nvPr/>
         </p:nvSpPr>
@@ -14656,7 +14620,7 @@
       </p:sp>
       <p:sp>
         <p:nvSpPr>
-          <p:cNvPr id="15" name="Text 12"/>
+          <p:cNvPr id="14" name="Text 11"/>
           <p:cNvSpPr txBox="1"/>
           <p:nvPr/>
         </p:nvSpPr>
@@ -14679,12 +14643,12 @@
               <a:buNone/>
             </a:pPr>
             <a:r>
-              <a:rPr lang="en-US" sz="850" i="1" dirty="0">
-                <a:solidFill>
-                  <a:schemeClr val="accent1"/>
-                </a:solidFill>
-              </a:rPr>
-              <a:t>CẦN BỔ SUNG</a:t>
+              <a:rPr lang="en-US" sz="850" dirty="0">
+                <a:solidFill>
+                  <a:schemeClr val="accent3"/>
+                </a:solidFill>
+              </a:rPr>
+              <a:t>Bản vẽ thi công, khối lượng</a:t>
             </a:r>
             <a:endParaRPr lang="en-US" sz="850" dirty="0"/>
           </a:p>
@@ -14692,7 +14656,7 @@
       </p:sp>
       <p:sp>
         <p:nvSpPr>
-          <p:cNvPr id="16" name="Shape 13"/>
+          <p:cNvPr id="15" name="Shape 12"/>
           <p:cNvSpPr/>
           <p:nvPr/>
         </p:nvSpPr>
@@ -14715,7 +14679,7 @@
       </p:sp>
       <p:sp>
         <p:nvSpPr>
-          <p:cNvPr id="17" name="Shape 14"/>
+          <p:cNvPr id="16" name="Shape 13"/>
           <p:cNvSpPr/>
           <p:nvPr/>
         </p:nvSpPr>
@@ -14742,7 +14706,7 @@
       </p:sp>
       <p:sp>
         <p:nvSpPr>
-          <p:cNvPr id="18" name="Text 15"/>
+          <p:cNvPr id="17" name="Text 14"/>
           <p:cNvSpPr txBox="1"/>
           <p:nvPr/>
         </p:nvSpPr>
@@ -14781,7 +14745,7 @@
       </p:sp>
       <p:sp>
         <p:nvSpPr>
-          <p:cNvPr id="19" name="Text 16"/>
+          <p:cNvPr id="18" name="Text 15"/>
           <p:cNvSpPr txBox="1"/>
           <p:nvPr/>
         </p:nvSpPr>
@@ -14804,12 +14768,12 @@
               <a:buNone/>
             </a:pPr>
             <a:r>
-              <a:rPr lang="en-US" sz="850" i="1" dirty="0">
-                <a:solidFill>
-                  <a:schemeClr val="accent1"/>
-                </a:solidFill>
-              </a:rPr>
-              <a:t>CẦN BỔ SUNG</a:t>
+              <a:rPr lang="en-US" sz="850" dirty="0">
+                <a:solidFill>
+                  <a:schemeClr val="accent3"/>
+                </a:solidFill>
+              </a:rPr>
+              <a:t>Điều phối thi công, tiến độ</a:t>
             </a:r>
             <a:endParaRPr lang="en-US" sz="850" dirty="0"/>
           </a:p>
@@ -14817,7 +14781,7 @@
       </p:sp>
       <p:sp>
         <p:nvSpPr>
-          <p:cNvPr id="20" name="Shape 17"/>
+          <p:cNvPr id="19" name="Shape 16"/>
           <p:cNvSpPr/>
           <p:nvPr/>
         </p:nvSpPr>
@@ -14840,7 +14804,7 @@
       </p:sp>
       <p:sp>
         <p:nvSpPr>
-          <p:cNvPr id="21" name="Shape 18"/>
+          <p:cNvPr id="20" name="Shape 17"/>
           <p:cNvSpPr/>
           <p:nvPr/>
         </p:nvSpPr>
@@ -14867,7 +14831,7 @@
       </p:sp>
       <p:sp>
         <p:nvSpPr>
-          <p:cNvPr id="22" name="Text 19"/>
+          <p:cNvPr id="21" name="Text 18"/>
           <p:cNvSpPr txBox="1"/>
           <p:nvPr/>
         </p:nvSpPr>
@@ -14906,7 +14870,7 @@
       </p:sp>
       <p:sp>
         <p:nvSpPr>
-          <p:cNvPr id="23" name="Text 20"/>
+          <p:cNvPr id="22" name="Text 19"/>
           <p:cNvSpPr txBox="1"/>
           <p:nvPr/>
         </p:nvSpPr>
@@ -14929,12 +14893,12 @@
               <a:buNone/>
             </a:pPr>
             <a:r>
-              <a:rPr lang="en-US" sz="850" i="1" dirty="0">
-                <a:solidFill>
-                  <a:schemeClr val="accent1"/>
-                </a:solidFill>
-              </a:rPr>
-              <a:t>CẦN BỔ SUNG</a:t>
+              <a:rPr lang="en-US" sz="850" dirty="0">
+                <a:solidFill>
+                  <a:schemeClr val="accent3"/>
+                </a:solidFill>
+              </a:rPr>
+              <a:t>Mua sắm, cấp phát vật tư</a:t>
             </a:r>
             <a:endParaRPr lang="en-US" sz="850" dirty="0"/>
           </a:p>
@@ -14942,7 +14906,7 @@
       </p:sp>
       <p:sp>
         <p:nvSpPr>
-          <p:cNvPr id="24" name="Shape 21"/>
+          <p:cNvPr id="23" name="Shape 20"/>
           <p:cNvSpPr/>
           <p:nvPr/>
         </p:nvSpPr>
@@ -14965,7 +14929,7 @@
       </p:sp>
       <p:sp>
         <p:nvSpPr>
-          <p:cNvPr id="25" name="Shape 22"/>
+          <p:cNvPr id="24" name="Shape 21"/>
           <p:cNvSpPr/>
           <p:nvPr/>
         </p:nvSpPr>
@@ -14992,7 +14956,7 @@
       </p:sp>
       <p:sp>
         <p:nvSpPr>
-          <p:cNvPr id="26" name="Text 23"/>
+          <p:cNvPr id="25" name="Text 22"/>
           <p:cNvSpPr txBox="1"/>
           <p:nvPr/>
         </p:nvSpPr>
@@ -15031,7 +14995,7 @@
       </p:sp>
       <p:sp>
         <p:nvSpPr>
-          <p:cNvPr id="27" name="Text 24"/>
+          <p:cNvPr id="26" name="Text 23"/>
           <p:cNvSpPr txBox="1"/>
           <p:nvPr/>
         </p:nvSpPr>
@@ -15054,12 +15018,12 @@
               <a:buNone/>
             </a:pPr>
             <a:r>
-              <a:rPr lang="en-US" sz="850" i="1" dirty="0">
-                <a:solidFill>
-                  <a:schemeClr val="accent1"/>
-                </a:solidFill>
-              </a:rPr>
-              <a:t>CẦN BỔ SUNG</a:t>
+              <a:rPr lang="en-US" sz="850" dirty="0">
+                <a:solidFill>
+                  <a:schemeClr val="accent3"/>
+                </a:solidFill>
+              </a:rPr>
+              <a:t>Giám sát ATLĐ, PCCC</a:t>
             </a:r>
             <a:endParaRPr lang="en-US" sz="850" dirty="0"/>
           </a:p>
@@ -15067,7 +15031,7 @@
       </p:sp>
       <p:sp>
         <p:nvSpPr>
-          <p:cNvPr id="28" name="Shape 25"/>
+          <p:cNvPr id="27" name="Shape 24"/>
           <p:cNvSpPr/>
           <p:nvPr/>
         </p:nvSpPr>
@@ -15090,7 +15054,7 @@
       </p:sp>
       <p:sp>
         <p:nvSpPr>
-          <p:cNvPr id="29" name="Shape 26"/>
+          <p:cNvPr id="28" name="Shape 25"/>
           <p:cNvSpPr/>
           <p:nvPr/>
         </p:nvSpPr>
@@ -15117,7 +15081,7 @@
       </p:sp>
       <p:sp>
         <p:nvSpPr>
-          <p:cNvPr id="30" name="Text 27"/>
+          <p:cNvPr id="29" name="Text 26"/>
           <p:cNvSpPr txBox="1"/>
           <p:nvPr/>
         </p:nvSpPr>
@@ -15156,7 +15120,7 @@
       </p:sp>
       <p:sp>
         <p:nvSpPr>
-          <p:cNvPr id="31" name="Text 28"/>
+          <p:cNvPr id="30" name="Text 27"/>
           <p:cNvSpPr txBox="1"/>
           <p:nvPr/>
         </p:nvSpPr>
@@ -15179,12 +15143,12 @@
               <a:buNone/>
             </a:pPr>
             <a:r>
-              <a:rPr lang="en-US" sz="850" i="1" dirty="0">
-                <a:solidFill>
-                  <a:schemeClr val="accent1"/>
-                </a:solidFill>
-              </a:rPr>
-              <a:t>Số người: CẦN BỔ SUNG</a:t>
+              <a:rPr lang="en-US" sz="850" dirty="0">
+                <a:solidFill>
+                  <a:schemeClr val="accent3"/>
+                </a:solidFill>
+              </a:rPr>
+              <a:t>Động lực, chiếu sáng, tủ điện</a:t>
             </a:r>
             <a:endParaRPr lang="en-US" sz="850" dirty="0"/>
           </a:p>
@@ -15192,7 +15156,7 @@
       </p:sp>
       <p:sp>
         <p:nvSpPr>
-          <p:cNvPr id="32" name="Shape 29"/>
+          <p:cNvPr id="31" name="Shape 28"/>
           <p:cNvSpPr/>
           <p:nvPr/>
         </p:nvSpPr>
@@ -15219,7 +15183,7 @@
       </p:sp>
       <p:sp>
         <p:nvSpPr>
-          <p:cNvPr id="33" name="Text 30"/>
+          <p:cNvPr id="32" name="Text 29"/>
           <p:cNvSpPr txBox="1"/>
           <p:nvPr/>
         </p:nvSpPr>
@@ -15258,7 +15222,7 @@
       </p:sp>
       <p:sp>
         <p:nvSpPr>
-          <p:cNvPr id="34" name="Text 31"/>
+          <p:cNvPr id="33" name="Text 30"/>
           <p:cNvSpPr txBox="1"/>
           <p:nvPr/>
         </p:nvSpPr>
@@ -15281,12 +15245,12 @@
               <a:buNone/>
             </a:pPr>
             <a:r>
-              <a:rPr lang="en-US" sz="850" i="1" dirty="0">
-                <a:solidFill>
-                  <a:schemeClr val="accent1"/>
-                </a:solidFill>
-              </a:rPr>
-              <a:t>Số người: CẦN BỔ SUNG</a:t>
+              <a:rPr lang="en-US" sz="850" dirty="0">
+                <a:solidFill>
+                  <a:schemeClr val="accent3"/>
+                </a:solidFill>
+              </a:rPr>
+              <a:t>Ống PPR, uPVC, thiết bị vệ sinh</a:t>
             </a:r>
             <a:endParaRPr lang="en-US" sz="850" dirty="0"/>
           </a:p>
@@ -15294,7 +15258,7 @@
       </p:sp>
       <p:sp>
         <p:nvSpPr>
-          <p:cNvPr id="35" name="Shape 32"/>
+          <p:cNvPr id="34" name="Shape 31"/>
           <p:cNvSpPr/>
           <p:nvPr/>
         </p:nvSpPr>
@@ -15321,7 +15285,7 @@
       </p:sp>
       <p:sp>
         <p:nvSpPr>
-          <p:cNvPr id="36" name="Text 33"/>
+          <p:cNvPr id="35" name="Text 32"/>
           <p:cNvSpPr txBox="1"/>
           <p:nvPr/>
         </p:nvSpPr>
@@ -15352,7 +15316,7 @@
                 <a:ea typeface="Arial" pitchFamily="34" charset="-122"/>
                 <a:cs typeface="Arial" pitchFamily="34" charset="-120"/>
               </a:rPr>
-              <a:t>ĐỘI ỐNG CÔNG NGHỆ – HÚT SƯƠNG DẦU</a:t>
+              <a:t>ĐỘI ỐNG CÔNG NGHỆ</a:t>
             </a:r>
             <a:endParaRPr lang="en-US" sz="950" dirty="0"/>
           </a:p>
@@ -15360,7 +15324,7 @@
       </p:sp>
       <p:sp>
         <p:nvSpPr>
-          <p:cNvPr id="37" name="Text 34"/>
+          <p:cNvPr id="36" name="Text 33"/>
           <p:cNvSpPr txBox="1"/>
           <p:nvPr/>
         </p:nvSpPr>
@@ -15383,12 +15347,12 @@
               <a:buNone/>
             </a:pPr>
             <a:r>
-              <a:rPr lang="en-US" sz="850" i="1" dirty="0">
-                <a:solidFill>
-                  <a:schemeClr val="accent1"/>
-                </a:solidFill>
-              </a:rPr>
-              <a:t>Số người: CẦN BỔ SUNG</a:t>
+              <a:rPr lang="en-US" sz="850" dirty="0">
+                <a:solidFill>
+                  <a:schemeClr val="accent3"/>
+                </a:solidFill>
+              </a:rPr>
+              <a:t>Ống hút, máy lọc, bơm, xử lý nước</a:t>
             </a:r>
             <a:endParaRPr lang="en-US" sz="850" dirty="0"/>
           </a:p>
@@ -15396,7 +15360,7 @@
       </p:sp>
       <p:sp>
         <p:nvSpPr>
-          <p:cNvPr id="38" name="Shape 35"/>
+          <p:cNvPr id="37" name="Shape 34"/>
           <p:cNvSpPr/>
           <p:nvPr/>
         </p:nvSpPr>
@@ -15417,922 +15381,166 @@
           </a:ln>
         </p:spPr>
       </p:sp>
-      <p:graphicFrame>
-        <p:nvGraphicFramePr>
-          <p:cNvPr id="20" name="Table 0"/>
-          <p:cNvGraphicFramePr>
-            <a:graphicFrameLocks noGrp="1"/>
-          </p:cNvGraphicFramePr>
-          <p:nvPr>
-            <p:extLst>
-              <p:ext uri="{D42A27DB-BD31-4B8C-83A1-F6EECF244321}">
-                <p14:modId xmlns:p14="http://schemas.microsoft.com/office/powerpoint/2010/main" val="1579011935"/>
-              </p:ext>
-            </p:extLst>
-          </p:nvPr>
-        </p:nvGraphicFramePr>
-        <p:xfrm>
-          <a:off x="502920" y="8092440"/>
-          <a:ext cx="6556248" cy="914400"/>
-        </p:xfrm>
-        <a:graphic>
-          <a:graphicData uri="http://schemas.openxmlformats.org/drawingml/2006/table">
-            <a:tbl>
-              <a:tblPr/>
-              <a:tblGrid>
-                <a:gridCol w="1828800"/>
-                <a:gridCol w="1463040"/>
-                <a:gridCol w="1984248"/>
-                <a:gridCol w="1280160"/>
-              </a:tblGrid>
-              <a:tr h="329184">
-                <a:tc>
-                  <a:txBody>
-                    <a:bodyPr/>
-                    <a:lstStyle/>
-                    <a:p>
-                      <a:pPr indent="0" marL="0">
-                        <a:buNone/>
-                      </a:pPr>
-                      <a:r>
-                        <a:rPr lang="en-US" sz="900" b="1" dirty="0">
-                          <a:solidFill>
-                            <a:schemeClr val="bg1"/>
-                          </a:solidFill>
-                        </a:rPr>
-                        <a:t>Họ và tên</a:t>
-                      </a:r>
-                      <a:endParaRPr lang="en-US" sz="900" dirty="0"/>
-                    </a:p>
-                  </a:txBody>
-                  <a:tcPr marL="73152" marR="73152" marT="36576" marB="36576" anchor="ctr">
-                    <a:lnL w="9525" cap="flat" cmpd="sng" algn="ctr">
-                      <a:solidFill>
-                        <a:srgbClr val="C9D5E3"/>
-                      </a:solidFill>
-                      <a:prstDash val="solid"/>
-                      <a:round/>
-                      <a:headEnd type="none" w="med" len="med"/>
-                      <a:tailEnd type="none" w="med" len="med"/>
-                    </a:lnL>
-                    <a:lnR w="9525" cap="flat" cmpd="sng" algn="ctr">
-                      <a:solidFill>
-                        <a:srgbClr val="C9D5E3"/>
-                      </a:solidFill>
-                      <a:prstDash val="solid"/>
-                      <a:round/>
-                      <a:headEnd type="none" w="med" len="med"/>
-                      <a:tailEnd type="none" w="med" len="med"/>
-                    </a:lnR>
-                    <a:lnT w="9525" cap="flat" cmpd="sng" algn="ctr">
-                      <a:solidFill>
-                        <a:srgbClr val="C9D5E3"/>
-                      </a:solidFill>
-                      <a:prstDash val="solid"/>
-                      <a:round/>
-                      <a:headEnd type="none" w="med" len="med"/>
-                      <a:tailEnd type="none" w="med" len="med"/>
-                    </a:lnT>
-                    <a:lnB w="9525" cap="flat" cmpd="sng" algn="ctr">
-                      <a:solidFill>
-                        <a:srgbClr val="C9D5E3"/>
-                      </a:solidFill>
-                      <a:prstDash val="solid"/>
-                      <a:round/>
-                      <a:headEnd type="none" w="med" len="med"/>
-                      <a:tailEnd type="none" w="med" len="med"/>
-                    </a:lnB>
-                    <a:solidFill>
-                      <a:schemeClr val="tx2"/>
-                    </a:solidFill>
-                  </a:tcPr>
-                </a:tc>
-                <a:tc>
-                  <a:txBody>
-                    <a:bodyPr/>
-                    <a:lstStyle/>
-                    <a:p>
-                      <a:pPr indent="0" marL="0">
-                        <a:buNone/>
-                      </a:pPr>
-                      <a:r>
-                        <a:rPr lang="en-US" sz="900" b="1" dirty="0">
-                          <a:solidFill>
-                            <a:schemeClr val="bg1"/>
-                          </a:solidFill>
-                        </a:rPr>
-                        <a:t>Chức danh</a:t>
-                      </a:r>
-                      <a:endParaRPr lang="en-US" sz="900" dirty="0"/>
-                    </a:p>
-                  </a:txBody>
-                  <a:tcPr marL="73152" marR="73152" marT="36576" marB="36576" anchor="ctr">
-                    <a:lnL w="9525" cap="flat" cmpd="sng" algn="ctr">
-                      <a:solidFill>
-                        <a:srgbClr val="C9D5E3"/>
-                      </a:solidFill>
-                      <a:prstDash val="solid"/>
-                      <a:round/>
-                      <a:headEnd type="none" w="med" len="med"/>
-                      <a:tailEnd type="none" w="med" len="med"/>
-                    </a:lnL>
-                    <a:lnR w="9525" cap="flat" cmpd="sng" algn="ctr">
-                      <a:solidFill>
-                        <a:srgbClr val="C9D5E3"/>
-                      </a:solidFill>
-                      <a:prstDash val="solid"/>
-                      <a:round/>
-                      <a:headEnd type="none" w="med" len="med"/>
-                      <a:tailEnd type="none" w="med" len="med"/>
-                    </a:lnR>
-                    <a:lnT w="9525" cap="flat" cmpd="sng" algn="ctr">
-                      <a:solidFill>
-                        <a:srgbClr val="C9D5E3"/>
-                      </a:solidFill>
-                      <a:prstDash val="solid"/>
-                      <a:round/>
-                      <a:headEnd type="none" w="med" len="med"/>
-                      <a:tailEnd type="none" w="med" len="med"/>
-                    </a:lnT>
-                    <a:lnB w="9525" cap="flat" cmpd="sng" algn="ctr">
-                      <a:solidFill>
-                        <a:srgbClr val="C9D5E3"/>
-                      </a:solidFill>
-                      <a:prstDash val="solid"/>
-                      <a:round/>
-                      <a:headEnd type="none" w="med" len="med"/>
-                      <a:tailEnd type="none" w="med" len="med"/>
-                    </a:lnB>
-                    <a:solidFill>
-                      <a:schemeClr val="tx2"/>
-                    </a:solidFill>
-                  </a:tcPr>
-                </a:tc>
-                <a:tc>
-                  <a:txBody>
-                    <a:bodyPr/>
-                    <a:lstStyle/>
-                    <a:p>
-                      <a:pPr indent="0" marL="0">
-                        <a:buNone/>
-                      </a:pPr>
-                      <a:r>
-                        <a:rPr lang="en-US" sz="900" b="1" dirty="0">
-                          <a:solidFill>
-                            <a:schemeClr val="bg1"/>
-                          </a:solidFill>
-                        </a:rPr>
-                        <a:t>Trình độ / chứng chỉ</a:t>
-                      </a:r>
-                      <a:endParaRPr lang="en-US" sz="900" dirty="0"/>
-                    </a:p>
-                  </a:txBody>
-                  <a:tcPr marL="73152" marR="73152" marT="36576" marB="36576" anchor="ctr">
-                    <a:lnL w="9525" cap="flat" cmpd="sng" algn="ctr">
-                      <a:solidFill>
-                        <a:srgbClr val="C9D5E3"/>
-                      </a:solidFill>
-                      <a:prstDash val="solid"/>
-                      <a:round/>
-                      <a:headEnd type="none" w="med" len="med"/>
-                      <a:tailEnd type="none" w="med" len="med"/>
-                    </a:lnL>
-                    <a:lnR w="9525" cap="flat" cmpd="sng" algn="ctr">
-                      <a:solidFill>
-                        <a:srgbClr val="C9D5E3"/>
-                      </a:solidFill>
-                      <a:prstDash val="solid"/>
-                      <a:round/>
-                      <a:headEnd type="none" w="med" len="med"/>
-                      <a:tailEnd type="none" w="med" len="med"/>
-                    </a:lnR>
-                    <a:lnT w="9525" cap="flat" cmpd="sng" algn="ctr">
-                      <a:solidFill>
-                        <a:srgbClr val="C9D5E3"/>
-                      </a:solidFill>
-                      <a:prstDash val="solid"/>
-                      <a:round/>
-                      <a:headEnd type="none" w="med" len="med"/>
-                      <a:tailEnd type="none" w="med" len="med"/>
-                    </a:lnT>
-                    <a:lnB w="9525" cap="flat" cmpd="sng" algn="ctr">
-                      <a:solidFill>
-                        <a:srgbClr val="C9D5E3"/>
-                      </a:solidFill>
-                      <a:prstDash val="solid"/>
-                      <a:round/>
-                      <a:headEnd type="none" w="med" len="med"/>
-                      <a:tailEnd type="none" w="med" len="med"/>
-                    </a:lnB>
-                    <a:solidFill>
-                      <a:schemeClr val="tx2"/>
-                    </a:solidFill>
-                  </a:tcPr>
-                </a:tc>
-                <a:tc>
-                  <a:txBody>
-                    <a:bodyPr/>
-                    <a:lstStyle/>
-                    <a:p>
-                      <a:pPr indent="0" marL="0">
-                        <a:buNone/>
-                      </a:pPr>
-                      <a:r>
-                        <a:rPr lang="en-US" sz="900" b="1" dirty="0">
-                          <a:solidFill>
-                            <a:schemeClr val="bg1"/>
-                          </a:solidFill>
-                        </a:rPr>
-                        <a:t>Kinh nghiệm</a:t>
-                      </a:r>
-                      <a:endParaRPr lang="en-US" sz="900" dirty="0"/>
-                    </a:p>
-                  </a:txBody>
-                  <a:tcPr marL="73152" marR="73152" marT="36576" marB="36576" anchor="ctr">
-                    <a:lnL w="9525" cap="flat" cmpd="sng" algn="ctr">
-                      <a:solidFill>
-                        <a:srgbClr val="C9D5E3"/>
-                      </a:solidFill>
-                      <a:prstDash val="solid"/>
-                      <a:round/>
-                      <a:headEnd type="none" w="med" len="med"/>
-                      <a:tailEnd type="none" w="med" len="med"/>
-                    </a:lnL>
-                    <a:lnR w="9525" cap="flat" cmpd="sng" algn="ctr">
-                      <a:solidFill>
-                        <a:srgbClr val="C9D5E3"/>
-                      </a:solidFill>
-                      <a:prstDash val="solid"/>
-                      <a:round/>
-                      <a:headEnd type="none" w="med" len="med"/>
-                      <a:tailEnd type="none" w="med" len="med"/>
-                    </a:lnR>
-                    <a:lnT w="9525" cap="flat" cmpd="sng" algn="ctr">
-                      <a:solidFill>
-                        <a:srgbClr val="C9D5E3"/>
-                      </a:solidFill>
-                      <a:prstDash val="solid"/>
-                      <a:round/>
-                      <a:headEnd type="none" w="med" len="med"/>
-                      <a:tailEnd type="none" w="med" len="med"/>
-                    </a:lnT>
-                    <a:lnB w="9525" cap="flat" cmpd="sng" algn="ctr">
-                      <a:solidFill>
-                        <a:srgbClr val="C9D5E3"/>
-                      </a:solidFill>
-                      <a:prstDash val="solid"/>
-                      <a:round/>
-                      <a:headEnd type="none" w="med" len="med"/>
-                      <a:tailEnd type="none" w="med" len="med"/>
-                    </a:lnB>
-                    <a:solidFill>
-                      <a:schemeClr val="tx2"/>
-                    </a:solidFill>
-                  </a:tcPr>
-                </a:tc>
-              </a:tr>
-              <a:tr h="329184">
-                <a:tc>
-                  <a:txBody>
-                    <a:bodyPr/>
-                    <a:lstStyle/>
-                    <a:p>
-                      <a:pPr indent="0" marL="0">
-                        <a:buNone/>
-                      </a:pPr>
-                      <a:r>
-                        <a:rPr lang="en-US" sz="900" dirty="0">
-                          <a:solidFill>
-                            <a:srgbClr val="1B2433"/>
-                          </a:solidFill>
-                        </a:rPr>
-                        <a:t>Hồ Văn Bình</a:t>
-                      </a:r>
-                      <a:endParaRPr lang="en-US" sz="900" dirty="0"/>
-                    </a:p>
-                  </a:txBody>
-                  <a:tcPr marL="73152" marR="73152" marT="36576" marB="36576" anchor="ctr">
-                    <a:lnL w="9525" cap="flat" cmpd="sng" algn="ctr">
-                      <a:solidFill>
-                        <a:srgbClr val="C9D5E3"/>
-                      </a:solidFill>
-                      <a:prstDash val="solid"/>
-                      <a:round/>
-                      <a:headEnd type="none" w="med" len="med"/>
-                      <a:tailEnd type="none" w="med" len="med"/>
-                    </a:lnL>
-                    <a:lnR w="9525" cap="flat" cmpd="sng" algn="ctr">
-                      <a:solidFill>
-                        <a:srgbClr val="C9D5E3"/>
-                      </a:solidFill>
-                      <a:prstDash val="solid"/>
-                      <a:round/>
-                      <a:headEnd type="none" w="med" len="med"/>
-                      <a:tailEnd type="none" w="med" len="med"/>
-                    </a:lnR>
-                    <a:lnT w="9525" cap="flat" cmpd="sng" algn="ctr">
-                      <a:solidFill>
-                        <a:srgbClr val="C9D5E3"/>
-                      </a:solidFill>
-                      <a:prstDash val="solid"/>
-                      <a:round/>
-                      <a:headEnd type="none" w="med" len="med"/>
-                      <a:tailEnd type="none" w="med" len="med"/>
-                    </a:lnT>
-                    <a:lnB w="9525" cap="flat" cmpd="sng" algn="ctr">
-                      <a:solidFill>
-                        <a:srgbClr val="C9D5E3"/>
-                      </a:solidFill>
-                      <a:prstDash val="solid"/>
-                      <a:round/>
-                      <a:headEnd type="none" w="med" len="med"/>
-                      <a:tailEnd type="none" w="med" len="med"/>
-                    </a:lnB>
-                  </a:tcPr>
-                </a:tc>
-                <a:tc>
-                  <a:txBody>
-                    <a:bodyPr/>
-                    <a:lstStyle/>
-                    <a:p>
-                      <a:pPr indent="0" marL="0">
-                        <a:buNone/>
-                      </a:pPr>
-                      <a:r>
-                        <a:rPr lang="en-US" sz="900" dirty="0">
-                          <a:solidFill>
-                            <a:srgbClr val="1B2433"/>
-                          </a:solidFill>
-                        </a:rPr>
-                        <a:t>Giám đốc</a:t>
-                      </a:r>
-                      <a:endParaRPr lang="en-US" sz="900" dirty="0"/>
-                    </a:p>
-                  </a:txBody>
-                  <a:tcPr marL="73152" marR="73152" marT="36576" marB="36576" anchor="ctr">
-                    <a:lnL w="9525" cap="flat" cmpd="sng" algn="ctr">
-                      <a:solidFill>
-                        <a:srgbClr val="C9D5E3"/>
-                      </a:solidFill>
-                      <a:prstDash val="solid"/>
-                      <a:round/>
-                      <a:headEnd type="none" w="med" len="med"/>
-                      <a:tailEnd type="none" w="med" len="med"/>
-                    </a:lnL>
-                    <a:lnR w="9525" cap="flat" cmpd="sng" algn="ctr">
-                      <a:solidFill>
-                        <a:srgbClr val="C9D5E3"/>
-                      </a:solidFill>
-                      <a:prstDash val="solid"/>
-                      <a:round/>
-                      <a:headEnd type="none" w="med" len="med"/>
-                      <a:tailEnd type="none" w="med" len="med"/>
-                    </a:lnR>
-                    <a:lnT w="9525" cap="flat" cmpd="sng" algn="ctr">
-                      <a:solidFill>
-                        <a:srgbClr val="C9D5E3"/>
-                      </a:solidFill>
-                      <a:prstDash val="solid"/>
-                      <a:round/>
-                      <a:headEnd type="none" w="med" len="med"/>
-                      <a:tailEnd type="none" w="med" len="med"/>
-                    </a:lnT>
-                    <a:lnB w="9525" cap="flat" cmpd="sng" algn="ctr">
-                      <a:solidFill>
-                        <a:srgbClr val="C9D5E3"/>
-                      </a:solidFill>
-                      <a:prstDash val="solid"/>
-                      <a:round/>
-                      <a:headEnd type="none" w="med" len="med"/>
-                      <a:tailEnd type="none" w="med" len="med"/>
-                    </a:lnB>
-                  </a:tcPr>
-                </a:tc>
-                <a:tc>
-                  <a:txBody>
-                    <a:bodyPr/>
-                    <a:lstStyle/>
-                    <a:p>
-                      <a:pPr indent="0" marL="0">
-                        <a:buNone/>
-                      </a:pPr>
-                      <a:r>
-                        <a:rPr lang="en-US" sz="900" dirty="0">
-                          <a:solidFill>
-                            <a:srgbClr val="1B2433"/>
-                          </a:solidFill>
-                        </a:rPr>
-                        <a:t>CẦN BỔ SUNG</a:t>
-                      </a:r>
-                      <a:endParaRPr lang="en-US" sz="900" dirty="0"/>
-                    </a:p>
-                  </a:txBody>
-                  <a:tcPr marL="73152" marR="73152" marT="36576" marB="36576" anchor="ctr">
-                    <a:lnL w="9525" cap="flat" cmpd="sng" algn="ctr">
-                      <a:solidFill>
-                        <a:srgbClr val="C9D5E3"/>
-                      </a:solidFill>
-                      <a:prstDash val="solid"/>
-                      <a:round/>
-                      <a:headEnd type="none" w="med" len="med"/>
-                      <a:tailEnd type="none" w="med" len="med"/>
-                    </a:lnL>
-                    <a:lnR w="9525" cap="flat" cmpd="sng" algn="ctr">
-                      <a:solidFill>
-                        <a:srgbClr val="C9D5E3"/>
-                      </a:solidFill>
-                      <a:prstDash val="solid"/>
-                      <a:round/>
-                      <a:headEnd type="none" w="med" len="med"/>
-                      <a:tailEnd type="none" w="med" len="med"/>
-                    </a:lnR>
-                    <a:lnT w="9525" cap="flat" cmpd="sng" algn="ctr">
-                      <a:solidFill>
-                        <a:srgbClr val="C9D5E3"/>
-                      </a:solidFill>
-                      <a:prstDash val="solid"/>
-                      <a:round/>
-                      <a:headEnd type="none" w="med" len="med"/>
-                      <a:tailEnd type="none" w="med" len="med"/>
-                    </a:lnT>
-                    <a:lnB w="9525" cap="flat" cmpd="sng" algn="ctr">
-                      <a:solidFill>
-                        <a:srgbClr val="C9D5E3"/>
-                      </a:solidFill>
-                      <a:prstDash val="solid"/>
-                      <a:round/>
-                      <a:headEnd type="none" w="med" len="med"/>
-                      <a:tailEnd type="none" w="med" len="med"/>
-                    </a:lnB>
-                  </a:tcPr>
-                </a:tc>
-                <a:tc>
-                  <a:txBody>
-                    <a:bodyPr/>
-                    <a:lstStyle/>
-                    <a:p>
-                      <a:pPr indent="0" marL="0">
-                        <a:buNone/>
-                      </a:pPr>
-                      <a:r>
-                        <a:rPr lang="en-US" sz="900" dirty="0">
-                          <a:solidFill>
-                            <a:srgbClr val="1B2433"/>
-                          </a:solidFill>
-                        </a:rPr>
-                        <a:t>CẦN BỔ SUNG</a:t>
-                      </a:r>
-                      <a:endParaRPr lang="en-US" sz="900" dirty="0"/>
-                    </a:p>
-                  </a:txBody>
-                  <a:tcPr marL="73152" marR="73152" marT="36576" marB="36576" anchor="ctr">
-                    <a:lnL w="9525" cap="flat" cmpd="sng" algn="ctr">
-                      <a:solidFill>
-                        <a:srgbClr val="C9D5E3"/>
-                      </a:solidFill>
-                      <a:prstDash val="solid"/>
-                      <a:round/>
-                      <a:headEnd type="none" w="med" len="med"/>
-                      <a:tailEnd type="none" w="med" len="med"/>
-                    </a:lnL>
-                    <a:lnR w="9525" cap="flat" cmpd="sng" algn="ctr">
-                      <a:solidFill>
-                        <a:srgbClr val="C9D5E3"/>
-                      </a:solidFill>
-                      <a:prstDash val="solid"/>
-                      <a:round/>
-                      <a:headEnd type="none" w="med" len="med"/>
-                      <a:tailEnd type="none" w="med" len="med"/>
-                    </a:lnR>
-                    <a:lnT w="9525" cap="flat" cmpd="sng" algn="ctr">
-                      <a:solidFill>
-                        <a:srgbClr val="C9D5E3"/>
-                      </a:solidFill>
-                      <a:prstDash val="solid"/>
-                      <a:round/>
-                      <a:headEnd type="none" w="med" len="med"/>
-                      <a:tailEnd type="none" w="med" len="med"/>
-                    </a:lnT>
-                    <a:lnB w="9525" cap="flat" cmpd="sng" algn="ctr">
-                      <a:solidFill>
-                        <a:srgbClr val="C9D5E3"/>
-                      </a:solidFill>
-                      <a:prstDash val="solid"/>
-                      <a:round/>
-                      <a:headEnd type="none" w="med" len="med"/>
-                      <a:tailEnd type="none" w="med" len="med"/>
-                    </a:lnB>
-                  </a:tcPr>
-                </a:tc>
-              </a:tr>
-              <a:tr h="329184">
-                <a:tc>
-                  <a:txBody>
-                    <a:bodyPr/>
-                    <a:lstStyle/>
-                    <a:p>
-                      <a:pPr indent="0" marL="0">
-                        <a:buNone/>
-                      </a:pPr>
-                      <a:endParaRPr lang="en-US" sz="900" dirty="0"/>
-                    </a:p>
-                  </a:txBody>
-                  <a:tcPr marL="73152" marR="73152" marT="36576" marB="36576" anchor="ctr">
-                    <a:lnL w="9525" cap="flat" cmpd="sng" algn="ctr">
-                      <a:solidFill>
-                        <a:srgbClr val="C9D5E3"/>
-                      </a:solidFill>
-                      <a:prstDash val="solid"/>
-                      <a:round/>
-                      <a:headEnd type="none" w="med" len="med"/>
-                      <a:tailEnd type="none" w="med" len="med"/>
-                    </a:lnL>
-                    <a:lnR w="9525" cap="flat" cmpd="sng" algn="ctr">
-                      <a:solidFill>
-                        <a:srgbClr val="C9D5E3"/>
-                      </a:solidFill>
-                      <a:prstDash val="solid"/>
-                      <a:round/>
-                      <a:headEnd type="none" w="med" len="med"/>
-                      <a:tailEnd type="none" w="med" len="med"/>
-                    </a:lnR>
-                    <a:lnT w="9525" cap="flat" cmpd="sng" algn="ctr">
-                      <a:solidFill>
-                        <a:srgbClr val="C9D5E3"/>
-                      </a:solidFill>
-                      <a:prstDash val="solid"/>
-                      <a:round/>
-                      <a:headEnd type="none" w="med" len="med"/>
-                      <a:tailEnd type="none" w="med" len="med"/>
-                    </a:lnT>
-                    <a:lnB w="9525" cap="flat" cmpd="sng" algn="ctr">
-                      <a:solidFill>
-                        <a:srgbClr val="C9D5E3"/>
-                      </a:solidFill>
-                      <a:prstDash val="solid"/>
-                      <a:round/>
-                      <a:headEnd type="none" w="med" len="med"/>
-                      <a:tailEnd type="none" w="med" len="med"/>
-                    </a:lnB>
-                  </a:tcPr>
-                </a:tc>
-                <a:tc>
-                  <a:txBody>
-                    <a:bodyPr/>
-                    <a:lstStyle/>
-                    <a:p>
-                      <a:pPr indent="0" marL="0">
-                        <a:buNone/>
-                      </a:pPr>
-                      <a:endParaRPr lang="en-US" sz="900" dirty="0"/>
-                    </a:p>
-                  </a:txBody>
-                  <a:tcPr marL="73152" marR="73152" marT="36576" marB="36576" anchor="ctr">
-                    <a:lnL w="9525" cap="flat" cmpd="sng" algn="ctr">
-                      <a:solidFill>
-                        <a:srgbClr val="C9D5E3"/>
-                      </a:solidFill>
-                      <a:prstDash val="solid"/>
-                      <a:round/>
-                      <a:headEnd type="none" w="med" len="med"/>
-                      <a:tailEnd type="none" w="med" len="med"/>
-                    </a:lnL>
-                    <a:lnR w="9525" cap="flat" cmpd="sng" algn="ctr">
-                      <a:solidFill>
-                        <a:srgbClr val="C9D5E3"/>
-                      </a:solidFill>
-                      <a:prstDash val="solid"/>
-                      <a:round/>
-                      <a:headEnd type="none" w="med" len="med"/>
-                      <a:tailEnd type="none" w="med" len="med"/>
-                    </a:lnR>
-                    <a:lnT w="9525" cap="flat" cmpd="sng" algn="ctr">
-                      <a:solidFill>
-                        <a:srgbClr val="C9D5E3"/>
-                      </a:solidFill>
-                      <a:prstDash val="solid"/>
-                      <a:round/>
-                      <a:headEnd type="none" w="med" len="med"/>
-                      <a:tailEnd type="none" w="med" len="med"/>
-                    </a:lnT>
-                    <a:lnB w="9525" cap="flat" cmpd="sng" algn="ctr">
-                      <a:solidFill>
-                        <a:srgbClr val="C9D5E3"/>
-                      </a:solidFill>
-                      <a:prstDash val="solid"/>
-                      <a:round/>
-                      <a:headEnd type="none" w="med" len="med"/>
-                      <a:tailEnd type="none" w="med" len="med"/>
-                    </a:lnB>
-                  </a:tcPr>
-                </a:tc>
-                <a:tc>
-                  <a:txBody>
-                    <a:bodyPr/>
-                    <a:lstStyle/>
-                    <a:p>
-                      <a:pPr indent="0" marL="0">
-                        <a:buNone/>
-                      </a:pPr>
-                      <a:endParaRPr lang="en-US" sz="900" dirty="0"/>
-                    </a:p>
-                  </a:txBody>
-                  <a:tcPr marL="73152" marR="73152" marT="36576" marB="36576" anchor="ctr">
-                    <a:lnL w="9525" cap="flat" cmpd="sng" algn="ctr">
-                      <a:solidFill>
-                        <a:srgbClr val="C9D5E3"/>
-                      </a:solidFill>
-                      <a:prstDash val="solid"/>
-                      <a:round/>
-                      <a:headEnd type="none" w="med" len="med"/>
-                      <a:tailEnd type="none" w="med" len="med"/>
-                    </a:lnL>
-                    <a:lnR w="9525" cap="flat" cmpd="sng" algn="ctr">
-                      <a:solidFill>
-                        <a:srgbClr val="C9D5E3"/>
-                      </a:solidFill>
-                      <a:prstDash val="solid"/>
-                      <a:round/>
-                      <a:headEnd type="none" w="med" len="med"/>
-                      <a:tailEnd type="none" w="med" len="med"/>
-                    </a:lnR>
-                    <a:lnT w="9525" cap="flat" cmpd="sng" algn="ctr">
-                      <a:solidFill>
-                        <a:srgbClr val="C9D5E3"/>
-                      </a:solidFill>
-                      <a:prstDash val="solid"/>
-                      <a:round/>
-                      <a:headEnd type="none" w="med" len="med"/>
-                      <a:tailEnd type="none" w="med" len="med"/>
-                    </a:lnT>
-                    <a:lnB w="9525" cap="flat" cmpd="sng" algn="ctr">
-                      <a:solidFill>
-                        <a:srgbClr val="C9D5E3"/>
-                      </a:solidFill>
-                      <a:prstDash val="solid"/>
-                      <a:round/>
-                      <a:headEnd type="none" w="med" len="med"/>
-                      <a:tailEnd type="none" w="med" len="med"/>
-                    </a:lnB>
-                  </a:tcPr>
-                </a:tc>
-                <a:tc>
-                  <a:txBody>
-                    <a:bodyPr/>
-                    <a:lstStyle/>
-                    <a:p>
-                      <a:pPr indent="0" marL="0">
-                        <a:buNone/>
-                      </a:pPr>
-                      <a:endParaRPr lang="en-US" sz="900" dirty="0"/>
-                    </a:p>
-                  </a:txBody>
-                  <a:tcPr marL="73152" marR="73152" marT="36576" marB="36576" anchor="ctr">
-                    <a:lnL w="9525" cap="flat" cmpd="sng" algn="ctr">
-                      <a:solidFill>
-                        <a:srgbClr val="C9D5E3"/>
-                      </a:solidFill>
-                      <a:prstDash val="solid"/>
-                      <a:round/>
-                      <a:headEnd type="none" w="med" len="med"/>
-                      <a:tailEnd type="none" w="med" len="med"/>
-                    </a:lnL>
-                    <a:lnR w="9525" cap="flat" cmpd="sng" algn="ctr">
-                      <a:solidFill>
-                        <a:srgbClr val="C9D5E3"/>
-                      </a:solidFill>
-                      <a:prstDash val="solid"/>
-                      <a:round/>
-                      <a:headEnd type="none" w="med" len="med"/>
-                      <a:tailEnd type="none" w="med" len="med"/>
-                    </a:lnR>
-                    <a:lnT w="9525" cap="flat" cmpd="sng" algn="ctr">
-                      <a:solidFill>
-                        <a:srgbClr val="C9D5E3"/>
-                      </a:solidFill>
-                      <a:prstDash val="solid"/>
-                      <a:round/>
-                      <a:headEnd type="none" w="med" len="med"/>
-                      <a:tailEnd type="none" w="med" len="med"/>
-                    </a:lnT>
-                    <a:lnB w="9525" cap="flat" cmpd="sng" algn="ctr">
-                      <a:solidFill>
-                        <a:srgbClr val="C9D5E3"/>
-                      </a:solidFill>
-                      <a:prstDash val="solid"/>
-                      <a:round/>
-                      <a:headEnd type="none" w="med" len="med"/>
-                      <a:tailEnd type="none" w="med" len="med"/>
-                    </a:lnB>
-                  </a:tcPr>
-                </a:tc>
-              </a:tr>
-              <a:tr h="329184">
-                <a:tc>
-                  <a:txBody>
-                    <a:bodyPr/>
-                    <a:lstStyle/>
-                    <a:p>
-                      <a:pPr indent="0" marL="0">
-                        <a:buNone/>
-                      </a:pPr>
-                      <a:endParaRPr lang="en-US" sz="900" dirty="0"/>
-                    </a:p>
-                  </a:txBody>
-                  <a:tcPr marL="73152" marR="73152" marT="36576" marB="36576" anchor="ctr">
-                    <a:lnL w="9525" cap="flat" cmpd="sng" algn="ctr">
-                      <a:solidFill>
-                        <a:srgbClr val="C9D5E3"/>
-                      </a:solidFill>
-                      <a:prstDash val="solid"/>
-                      <a:round/>
-                      <a:headEnd type="none" w="med" len="med"/>
-                      <a:tailEnd type="none" w="med" len="med"/>
-                    </a:lnL>
-                    <a:lnR w="9525" cap="flat" cmpd="sng" algn="ctr">
-                      <a:solidFill>
-                        <a:srgbClr val="C9D5E3"/>
-                      </a:solidFill>
-                      <a:prstDash val="solid"/>
-                      <a:round/>
-                      <a:headEnd type="none" w="med" len="med"/>
-                      <a:tailEnd type="none" w="med" len="med"/>
-                    </a:lnR>
-                    <a:lnT w="9525" cap="flat" cmpd="sng" algn="ctr">
-                      <a:solidFill>
-                        <a:srgbClr val="C9D5E3"/>
-                      </a:solidFill>
-                      <a:prstDash val="solid"/>
-                      <a:round/>
-                      <a:headEnd type="none" w="med" len="med"/>
-                      <a:tailEnd type="none" w="med" len="med"/>
-                    </a:lnT>
-                    <a:lnB w="9525" cap="flat" cmpd="sng" algn="ctr">
-                      <a:solidFill>
-                        <a:srgbClr val="C9D5E3"/>
-                      </a:solidFill>
-                      <a:prstDash val="solid"/>
-                      <a:round/>
-                      <a:headEnd type="none" w="med" len="med"/>
-                      <a:tailEnd type="none" w="med" len="med"/>
-                    </a:lnB>
-                  </a:tcPr>
-                </a:tc>
-                <a:tc>
-                  <a:txBody>
-                    <a:bodyPr/>
-                    <a:lstStyle/>
-                    <a:p>
-                      <a:pPr indent="0" marL="0">
-                        <a:buNone/>
-                      </a:pPr>
-                      <a:endParaRPr lang="en-US" sz="900" dirty="0"/>
-                    </a:p>
-                  </a:txBody>
-                  <a:tcPr marL="73152" marR="73152" marT="36576" marB="36576" anchor="ctr">
-                    <a:lnL w="9525" cap="flat" cmpd="sng" algn="ctr">
-                      <a:solidFill>
-                        <a:srgbClr val="C9D5E3"/>
-                      </a:solidFill>
-                      <a:prstDash val="solid"/>
-                      <a:round/>
-                      <a:headEnd type="none" w="med" len="med"/>
-                      <a:tailEnd type="none" w="med" len="med"/>
-                    </a:lnL>
-                    <a:lnR w="9525" cap="flat" cmpd="sng" algn="ctr">
-                      <a:solidFill>
-                        <a:srgbClr val="C9D5E3"/>
-                      </a:solidFill>
-                      <a:prstDash val="solid"/>
-                      <a:round/>
-                      <a:headEnd type="none" w="med" len="med"/>
-                      <a:tailEnd type="none" w="med" len="med"/>
-                    </a:lnR>
-                    <a:lnT w="9525" cap="flat" cmpd="sng" algn="ctr">
-                      <a:solidFill>
-                        <a:srgbClr val="C9D5E3"/>
-                      </a:solidFill>
-                      <a:prstDash val="solid"/>
-                      <a:round/>
-                      <a:headEnd type="none" w="med" len="med"/>
-                      <a:tailEnd type="none" w="med" len="med"/>
-                    </a:lnT>
-                    <a:lnB w="9525" cap="flat" cmpd="sng" algn="ctr">
-                      <a:solidFill>
-                        <a:srgbClr val="C9D5E3"/>
-                      </a:solidFill>
-                      <a:prstDash val="solid"/>
-                      <a:round/>
-                      <a:headEnd type="none" w="med" len="med"/>
-                      <a:tailEnd type="none" w="med" len="med"/>
-                    </a:lnB>
-                  </a:tcPr>
-                </a:tc>
-                <a:tc>
-                  <a:txBody>
-                    <a:bodyPr/>
-                    <a:lstStyle/>
-                    <a:p>
-                      <a:pPr indent="0" marL="0">
-                        <a:buNone/>
-                      </a:pPr>
-                      <a:endParaRPr lang="en-US" sz="900" dirty="0"/>
-                    </a:p>
-                  </a:txBody>
-                  <a:tcPr marL="73152" marR="73152" marT="36576" marB="36576" anchor="ctr">
-                    <a:lnL w="9525" cap="flat" cmpd="sng" algn="ctr">
-                      <a:solidFill>
-                        <a:srgbClr val="C9D5E3"/>
-                      </a:solidFill>
-                      <a:prstDash val="solid"/>
-                      <a:round/>
-                      <a:headEnd type="none" w="med" len="med"/>
-                      <a:tailEnd type="none" w="med" len="med"/>
-                    </a:lnL>
-                    <a:lnR w="9525" cap="flat" cmpd="sng" algn="ctr">
-                      <a:solidFill>
-                        <a:srgbClr val="C9D5E3"/>
-                      </a:solidFill>
-                      <a:prstDash val="solid"/>
-                      <a:round/>
-                      <a:headEnd type="none" w="med" len="med"/>
-                      <a:tailEnd type="none" w="med" len="med"/>
-                    </a:lnR>
-                    <a:lnT w="9525" cap="flat" cmpd="sng" algn="ctr">
-                      <a:solidFill>
-                        <a:srgbClr val="C9D5E3"/>
-                      </a:solidFill>
-                      <a:prstDash val="solid"/>
-                      <a:round/>
-                      <a:headEnd type="none" w="med" len="med"/>
-                      <a:tailEnd type="none" w="med" len="med"/>
-                    </a:lnT>
-                    <a:lnB w="9525" cap="flat" cmpd="sng" algn="ctr">
-                      <a:solidFill>
-                        <a:srgbClr val="C9D5E3"/>
-                      </a:solidFill>
-                      <a:prstDash val="solid"/>
-                      <a:round/>
-                      <a:headEnd type="none" w="med" len="med"/>
-                      <a:tailEnd type="none" w="med" len="med"/>
-                    </a:lnB>
-                  </a:tcPr>
-                </a:tc>
-                <a:tc>
-                  <a:txBody>
-                    <a:bodyPr/>
-                    <a:lstStyle/>
-                    <a:p>
-                      <a:pPr indent="0" marL="0">
-                        <a:buNone/>
-                      </a:pPr>
-                      <a:endParaRPr lang="en-US" sz="900" dirty="0"/>
-                    </a:p>
-                  </a:txBody>
-                  <a:tcPr marL="73152" marR="73152" marT="36576" marB="36576" anchor="ctr">
-                    <a:lnL w="9525" cap="flat" cmpd="sng" algn="ctr">
-                      <a:solidFill>
-                        <a:srgbClr val="C9D5E3"/>
-                      </a:solidFill>
-                      <a:prstDash val="solid"/>
-                      <a:round/>
-                      <a:headEnd type="none" w="med" len="med"/>
-                      <a:tailEnd type="none" w="med" len="med"/>
-                    </a:lnL>
-                    <a:lnR w="9525" cap="flat" cmpd="sng" algn="ctr">
-                      <a:solidFill>
-                        <a:srgbClr val="C9D5E3"/>
-                      </a:solidFill>
-                      <a:prstDash val="solid"/>
-                      <a:round/>
-                      <a:headEnd type="none" w="med" len="med"/>
-                      <a:tailEnd type="none" w="med" len="med"/>
-                    </a:lnR>
-                    <a:lnT w="9525" cap="flat" cmpd="sng" algn="ctr">
-                      <a:solidFill>
-                        <a:srgbClr val="C9D5E3"/>
-                      </a:solidFill>
-                      <a:prstDash val="solid"/>
-                      <a:round/>
-                      <a:headEnd type="none" w="med" len="med"/>
-                      <a:tailEnd type="none" w="med" len="med"/>
-                    </a:lnT>
-                    <a:lnB w="9525" cap="flat" cmpd="sng" algn="ctr">
-                      <a:solidFill>
-                        <a:srgbClr val="C9D5E3"/>
-                      </a:solidFill>
-                      <a:prstDash val="solid"/>
-                      <a:round/>
-                      <a:headEnd type="none" w="med" len="med"/>
-                      <a:tailEnd type="none" w="med" len="med"/>
-                    </a:lnB>
-                  </a:tcPr>
-                </a:tc>
-              </a:tr>
-            </a:tbl>
-          </a:graphicData>
-        </a:graphic>
-      </p:graphicFrame>
+      <p:sp>
+        <p:nvSpPr>
+          <p:cNvPr id="38" name="Shape 35"/>
+          <p:cNvSpPr/>
+          <p:nvPr/>
+        </p:nvSpPr>
+        <p:spPr>
+          <a:xfrm>
+            <a:off x="502920" y="8092440"/>
+            <a:ext cx="6556248" cy="1691640"/>
+          </a:xfrm>
+          <a:prstGeom prst="roundRect">
+            <a:avLst>
+              <a:gd name="adj" fmla="val 4324"/>
+            </a:avLst>
+          </a:prstGeom>
+          <a:solidFill>
+            <a:schemeClr val="bg2"/>
+          </a:solidFill>
+          <a:ln w="12700">
+            <a:solidFill>
+              <a:schemeClr val="bg2"/>
+            </a:solidFill>
+            <a:prstDash val="solid"/>
+          </a:ln>
+        </p:spPr>
+      </p:sp>
+      <p:sp>
+        <p:nvSpPr>
+          <p:cNvPr id="39" name="Text 36"/>
+          <p:cNvSpPr txBox="1"/>
+          <p:nvPr/>
+        </p:nvSpPr>
+        <p:spPr>
+          <a:xfrm>
+            <a:off x="731520" y="8202168"/>
+            <a:ext cx="6099048" cy="228600"/>
+          </a:xfrm>
+          <a:prstGeom prst="rect">
+            <a:avLst/>
+          </a:prstGeom>
+          <a:noFill/>
+          <a:ln/>
+        </p:spPr>
+        <p:txBody>
+          <a:bodyPr wrap="square" lIns="0" tIns="0" rIns="0" bIns="0" rtlCol="0" anchor="ctr"/>
+          <a:lstStyle/>
+          <a:p>
+            <a:pPr indent="0" marL="0">
+              <a:buNone/>
+            </a:pPr>
+            <a:r>
+              <a:rPr lang="en-US" sz="900" b="1" spc="200" kern="0" dirty="0">
+                <a:solidFill>
+                  <a:schemeClr val="tx2"/>
+                </a:solidFill>
+                <a:latin typeface="Arial" pitchFamily="34" charset="0"/>
+                <a:ea typeface="Arial" pitchFamily="34" charset="-122"/>
+                <a:cs typeface="Arial" pitchFamily="34" charset="-120"/>
+              </a:rPr>
+              <a:t>NĂNG LỰC ĐỘI NGŨ</a:t>
+            </a:r>
+            <a:endParaRPr lang="en-US" sz="900" dirty="0"/>
+          </a:p>
+        </p:txBody>
+      </p:sp>
+      <p:sp>
+        <p:nvSpPr>
+          <p:cNvPr id="40" name="Text 37"/>
+          <p:cNvSpPr txBox="1"/>
+          <p:nvPr/>
+        </p:nvSpPr>
+        <p:spPr>
+          <a:xfrm>
+            <a:off x="731520" y="8476488"/>
+            <a:ext cx="6099048" cy="1234440"/>
+          </a:xfrm>
+          <a:prstGeom prst="rect">
+            <a:avLst/>
+          </a:prstGeom>
+          <a:noFill/>
+          <a:ln/>
+        </p:spPr>
+        <p:txBody>
+          <a:bodyPr wrap="square" lIns="0" tIns="0" rIns="0" bIns="0" rtlCol="0" anchor="t"/>
+          <a:lstStyle/>
+          <a:p>
+            <a:pPr marL="152400" indent="-152400">
+              <a:spcAft>
+                <a:spcPts val="400"/>
+              </a:spcAft>
+              <a:buSzPct val="100000"/>
+              <a:buChar char="•"/>
+            </a:pPr>
+            <a:r>
+              <a:rPr lang="en-US" sz="950" dirty="0">
+                <a:solidFill>
+                  <a:schemeClr val="tx1"/>
+                </a:solidFill>
+              </a:rPr>
+              <a:t>Lực lượng thi công 15+ người, huy động linh hoạt theo quy mô và tiến độ từng công trình</a:t>
+            </a:r>
+            <a:endParaRPr lang="en-US" sz="950" dirty="0"/>
+          </a:p>
+          <a:p>
+            <a:pPr marL="152400" indent="-152400">
+              <a:spcAft>
+                <a:spcPts val="400"/>
+              </a:spcAft>
+              <a:buSzPct val="100000"/>
+              <a:buChar char="•"/>
+            </a:pPr>
+            <a:r>
+              <a:rPr lang="en-US" sz="950" dirty="0">
+                <a:solidFill>
+                  <a:schemeClr val="tx1"/>
+                </a:solidFill>
+              </a:rPr>
+              <a:t>Thợ điện, thợ nước, thợ ống công nghệ có kinh nghiệm thi công công trình dân dụng và nhà xưởng</a:t>
+            </a:r>
+            <a:endParaRPr lang="en-US" sz="950" dirty="0"/>
+          </a:p>
+          <a:p>
+            <a:pPr marL="152400" indent="-152400">
+              <a:spcAft>
+                <a:spcPts val="400"/>
+              </a:spcAft>
+              <a:buSzPct val="100000"/>
+              <a:buChar char="•"/>
+            </a:pPr>
+            <a:r>
+              <a:rPr lang="en-US" sz="950" dirty="0">
+                <a:solidFill>
+                  <a:schemeClr val="tx1"/>
+                </a:solidFill>
+              </a:rPr>
+              <a:t>Được huấn luyện an toàn lao động, làm việc trên cao, sử dụng xe nâng người và giàn giáo</a:t>
+            </a:r>
+            <a:endParaRPr lang="en-US" sz="950" dirty="0"/>
+          </a:p>
+          <a:p>
+            <a:pPr marL="152400" indent="-152400">
+              <a:spcAft>
+                <a:spcPts val="400"/>
+              </a:spcAft>
+              <a:buSzPct val="100000"/>
+              <a:buChar char="•"/>
+            </a:pPr>
+            <a:r>
+              <a:rPr lang="en-US" sz="950" dirty="0">
+                <a:solidFill>
+                  <a:schemeClr val="tx1"/>
+                </a:solidFill>
+              </a:rPr>
+              <a:t>Sẵn sàng làm ca, tăng ca và thi công trong nhà xưởng đang vận hành</a:t>
+            </a:r>
+            <a:endParaRPr lang="en-US" sz="950" dirty="0"/>
+          </a:p>
+        </p:txBody>
+      </p:sp>
       <p:sp>
         <p:nvSpPr>
           <p:cNvPr id="25" name="Slide Number Placeholder 0"/>
@@ -17145,45 +16353,9 @@
           </a:p>
         </p:txBody>
       </p:sp>
-      <p:sp>
-        <p:nvSpPr>
-          <p:cNvPr id="4" name="Text 2"/>
-          <p:cNvSpPr txBox="1"/>
-          <p:nvPr/>
-        </p:nvSpPr>
-        <p:spPr>
-          <a:xfrm>
-            <a:off x="4681728" y="1188720"/>
-            <a:ext cx="2377440" cy="219456"/>
-          </a:xfrm>
-          <a:prstGeom prst="rect">
-            <a:avLst/>
-          </a:prstGeom>
-          <a:noFill/>
-          <a:ln/>
-        </p:spPr>
-        <p:txBody>
-          <a:bodyPr wrap="square" lIns="0" tIns="0" rIns="0" bIns="0" rtlCol="0" anchor="ctr"/>
-          <a:lstStyle/>
-          <a:p>
-            <a:pPr algn="r" indent="0" marL="0">
-              <a:buNone/>
-            </a:pPr>
-            <a:r>
-              <a:rPr lang="en-US" sz="750" b="1" spc="100" kern="0" dirty="0">
-                <a:solidFill>
-                  <a:schemeClr val="accent1"/>
-                </a:solidFill>
-              </a:rPr>
-              <a:t>SỐ LƯỢNG – CẦN BỔ SUNG</a:t>
-            </a:r>
-            <a:endParaRPr lang="en-US" sz="750" dirty="0"/>
-          </a:p>
-        </p:txBody>
-      </p:sp>
       <p:pic>
         <p:nvPicPr>
-          <p:cNvPr id="5" name="photo img28.jpg" descr="Xe nâng người cắt kéo">    </p:cNvPr>
+          <p:cNvPr id="4" name="photo img28.jpg" descr="Xe nâng người cắt kéo">    </p:cNvPr>
           <p:cNvPicPr>
             <a:picLocks noChangeAspect="1"/>
           </p:cNvPicPr>
@@ -17207,7 +16379,7 @@
       </p:pic>
       <p:sp>
         <p:nvSpPr>
-          <p:cNvPr id="6" name="Text 3"/>
+          <p:cNvPr id="5" name="Text 2"/>
           <p:cNvSpPr txBox="1"/>
           <p:nvPr/>
         </p:nvSpPr>
@@ -17245,7 +16417,7 @@
       </p:sp>
       <p:pic>
         <p:nvPicPr>
-          <p:cNvPr id="7" name="photo img13.jpg" descr="Giàn giáo di động">    </p:cNvPr>
+          <p:cNvPr id="6" name="photo img13.jpg" descr="Giàn giáo di động">    </p:cNvPr>
           <p:cNvPicPr>
             <a:picLocks noChangeAspect="1"/>
           </p:cNvPicPr>
@@ -17269,7 +16441,7 @@
       </p:pic>
       <p:sp>
         <p:nvSpPr>
-          <p:cNvPr id="8" name="Text 4"/>
+          <p:cNvPr id="7" name="Text 3"/>
           <p:cNvSpPr txBox="1"/>
           <p:nvPr/>
         </p:nvSpPr>
@@ -17307,7 +16479,7 @@
       </p:sp>
       <p:pic>
         <p:nvPicPr>
-          <p:cNvPr id="9" name="photo img10.jpg" descr="Máy cắt, dụng cụ cầm tay">    </p:cNvPr>
+          <p:cNvPr id="8" name="photo img10.jpg" descr="Máy cắt, dụng cụ cầm tay">    </p:cNvPr>
           <p:cNvPicPr>
             <a:picLocks noChangeAspect="1"/>
           </p:cNvPicPr>
@@ -17331,7 +16503,7 @@
       </p:pic>
       <p:sp>
         <p:nvSpPr>
-          <p:cNvPr id="10" name="Text 5"/>
+          <p:cNvPr id="9" name="Text 4"/>
           <p:cNvSpPr txBox="1"/>
           <p:nvPr/>
         </p:nvSpPr>
@@ -17391,9 +16563,9 @@
               <a:tblPr/>
               <a:tblGrid>
                 <a:gridCol w="502920"/>
-                <a:gridCol w="3310128"/>
-                <a:gridCol w="1371600"/>
-                <a:gridCol w="1371600"/>
+                <a:gridCol w="2743200"/>
+                <a:gridCol w="2286000"/>
+                <a:gridCol w="1024128"/>
               </a:tblGrid>
               <a:tr h="384048">
                 <a:tc>
@@ -17532,7 +16704,7 @@
                             <a:schemeClr val="bg1"/>
                           </a:solidFill>
                         </a:rPr>
-                        <a:t>Số lượng</a:t>
+                        <a:t>Công dụng</a:t>
                       </a:r>
                       <a:endParaRPr lang="en-US" sz="950" dirty="0"/>
                     </a:p>
@@ -17593,7 +16765,7 @@
                             <a:schemeClr val="bg1"/>
                           </a:solidFill>
                         </a:rPr>
-                        <a:t>Sở hữu / thuê</a:t>
+                        <a:t>Tình trạng</a:t>
                       </a:r>
                       <a:endParaRPr lang="en-US" sz="950" dirty="0"/>
                     </a:p>
@@ -17773,14 +16945,14 @@
                         <a:buNone/>
                       </a:pPr>
                       <a:r>
-                        <a:rPr lang="en-US" sz="800" i="1" dirty="0">
+                        <a:rPr lang="en-US" sz="950" dirty="0">
                           <a:solidFill>
-                            <a:schemeClr val="accent1"/>
+                            <a:srgbClr val="1B2433"/>
                           </a:solidFill>
                         </a:rPr>
-                        <a:t>CẦN BỔ SUNG</a:t>
+                        <a:t>Thi công trần cao, nhà xưởng</a:t>
                       </a:r>
-                      <a:endParaRPr lang="en-US" sz="800" dirty="0"/>
+                      <a:endParaRPr lang="en-US" sz="950" dirty="0"/>
                     </a:p>
                   </a:txBody>
                   <a:tcPr marL="91440" marR="91440" marT="36576" marB="36576" anchor="ctr">
@@ -17834,14 +17006,14 @@
                         <a:buNone/>
                       </a:pPr>
                       <a:r>
-                        <a:rPr lang="en-US" sz="800" i="1" dirty="0">
+                        <a:rPr lang="en-US" sz="950" dirty="0">
                           <a:solidFill>
-                            <a:schemeClr val="accent1"/>
+                            <a:srgbClr val="1B2433"/>
                           </a:solidFill>
                         </a:rPr>
-                        <a:t>CẦN BỔ SUNG</a:t>
+                        <a:t>Sẵn sàng</a:t>
                       </a:r>
-                      <a:endParaRPr lang="en-US" sz="800" dirty="0"/>
+                      <a:endParaRPr lang="en-US" sz="950" dirty="0"/>
                     </a:p>
                   </a:txBody>
                   <a:tcPr marL="91440" marR="91440" marT="36576" marB="36576" anchor="ctr">
@@ -18019,14 +17191,14 @@
                         <a:buNone/>
                       </a:pPr>
                       <a:r>
-                        <a:rPr lang="en-US" sz="800" i="1" dirty="0">
+                        <a:rPr lang="en-US" sz="950" dirty="0">
                           <a:solidFill>
-                            <a:schemeClr val="accent1"/>
+                            <a:srgbClr val="1B2433"/>
                           </a:solidFill>
                         </a:rPr>
-                        <a:t>CẦN BỔ SUNG</a:t>
+                        <a:t>Sàn thao tác trên cao</a:t>
                       </a:r>
-                      <a:endParaRPr lang="en-US" sz="800" dirty="0"/>
+                      <a:endParaRPr lang="en-US" sz="950" dirty="0"/>
                     </a:p>
                   </a:txBody>
                   <a:tcPr marL="91440" marR="91440" marT="36576" marB="36576" anchor="ctr">
@@ -18080,14 +17252,14 @@
                         <a:buNone/>
                       </a:pPr>
                       <a:r>
-                        <a:rPr lang="en-US" sz="800" i="1" dirty="0">
+                        <a:rPr lang="en-US" sz="950" dirty="0">
                           <a:solidFill>
-                            <a:schemeClr val="accent1"/>
+                            <a:srgbClr val="1B2433"/>
                           </a:solidFill>
                         </a:rPr>
-                        <a:t>CẦN BỔ SUNG</a:t>
+                        <a:t>Sẵn sàng</a:t>
                       </a:r>
-                      <a:endParaRPr lang="en-US" sz="800" dirty="0"/>
+                      <a:endParaRPr lang="en-US" sz="950" dirty="0"/>
                     </a:p>
                   </a:txBody>
                   <a:tcPr marL="91440" marR="91440" marT="36576" marB="36576" anchor="ctr">
@@ -18265,14 +17437,14 @@
                         <a:buNone/>
                       </a:pPr>
                       <a:r>
-                        <a:rPr lang="en-US" sz="800" i="1" dirty="0">
+                        <a:rPr lang="en-US" sz="950" dirty="0">
                           <a:solidFill>
-                            <a:schemeClr val="accent1"/>
+                            <a:srgbClr val="1B2433"/>
                           </a:solidFill>
                         </a:rPr>
-                        <a:t>CẦN BỔ SUNG</a:t>
+                        <a:t>Nối ống cấp nước</a:t>
                       </a:r>
-                      <a:endParaRPr lang="en-US" sz="800" dirty="0"/>
+                      <a:endParaRPr lang="en-US" sz="950" dirty="0"/>
                     </a:p>
                   </a:txBody>
                   <a:tcPr marL="91440" marR="91440" marT="36576" marB="36576" anchor="ctr">
@@ -18326,14 +17498,14 @@
                         <a:buNone/>
                       </a:pPr>
                       <a:r>
-                        <a:rPr lang="en-US" sz="800" i="1" dirty="0">
+                        <a:rPr lang="en-US" sz="950" dirty="0">
                           <a:solidFill>
-                            <a:schemeClr val="accent1"/>
+                            <a:srgbClr val="1B2433"/>
                           </a:solidFill>
                         </a:rPr>
-                        <a:t>CẦN BỔ SUNG</a:t>
+                        <a:t>Sẵn sàng</a:t>
                       </a:r>
-                      <a:endParaRPr lang="en-US" sz="800" dirty="0"/>
+                      <a:endParaRPr lang="en-US" sz="950" dirty="0"/>
                     </a:p>
                   </a:txBody>
                   <a:tcPr marL="91440" marR="91440" marT="36576" marB="36576" anchor="ctr">
@@ -18511,14 +17683,14 @@
                         <a:buNone/>
                       </a:pPr>
                       <a:r>
-                        <a:rPr lang="en-US" sz="800" i="1" dirty="0">
+                        <a:rPr lang="en-US" sz="950" dirty="0">
                           <a:solidFill>
-                            <a:schemeClr val="accent1"/>
+                            <a:srgbClr val="1B2433"/>
                           </a:solidFill>
                         </a:rPr>
-                        <a:t>CẦN BỔ SUNG</a:t>
+                        <a:t>Khoan lỗ xuyên sàn, tường</a:t>
                       </a:r>
-                      <a:endParaRPr lang="en-US" sz="800" dirty="0"/>
+                      <a:endParaRPr lang="en-US" sz="950" dirty="0"/>
                     </a:p>
                   </a:txBody>
                   <a:tcPr marL="91440" marR="91440" marT="36576" marB="36576" anchor="ctr">
@@ -18572,14 +17744,14 @@
                         <a:buNone/>
                       </a:pPr>
                       <a:r>
-                        <a:rPr lang="en-US" sz="800" i="1" dirty="0">
+                        <a:rPr lang="en-US" sz="950" dirty="0">
                           <a:solidFill>
-                            <a:schemeClr val="accent1"/>
+                            <a:srgbClr val="1B2433"/>
                           </a:solidFill>
                         </a:rPr>
-                        <a:t>CẦN BỔ SUNG</a:t>
+                        <a:t>Sẵn sàng</a:t>
                       </a:r>
-                      <a:endParaRPr lang="en-US" sz="800" dirty="0"/>
+                      <a:endParaRPr lang="en-US" sz="950" dirty="0"/>
                     </a:p>
                   </a:txBody>
                   <a:tcPr marL="91440" marR="91440" marT="36576" marB="36576" anchor="ctr">
@@ -18757,14 +17929,14 @@
                         <a:buNone/>
                       </a:pPr>
                       <a:r>
-                        <a:rPr lang="en-US" sz="800" i="1" dirty="0">
+                        <a:rPr lang="en-US" sz="950" dirty="0">
                           <a:solidFill>
-                            <a:schemeClr val="accent1"/>
+                            <a:srgbClr val="1B2433"/>
                           </a:solidFill>
                         </a:rPr>
-                        <a:t>CẦN BỔ SUNG</a:t>
+                        <a:t>Gia công ống, giá đỡ</a:t>
                       </a:r>
-                      <a:endParaRPr lang="en-US" sz="800" dirty="0"/>
+                      <a:endParaRPr lang="en-US" sz="950" dirty="0"/>
                     </a:p>
                   </a:txBody>
                   <a:tcPr marL="91440" marR="91440" marT="36576" marB="36576" anchor="ctr">
@@ -18818,14 +17990,14 @@
                         <a:buNone/>
                       </a:pPr>
                       <a:r>
-                        <a:rPr lang="en-US" sz="800" i="1" dirty="0">
+                        <a:rPr lang="en-US" sz="950" dirty="0">
                           <a:solidFill>
-                            <a:schemeClr val="accent1"/>
+                            <a:srgbClr val="1B2433"/>
                           </a:solidFill>
                         </a:rPr>
-                        <a:t>CẦN BỔ SUNG</a:t>
+                        <a:t>Sẵn sàng</a:t>
                       </a:r>
-                      <a:endParaRPr lang="en-US" sz="800" dirty="0"/>
+                      <a:endParaRPr lang="en-US" sz="950" dirty="0"/>
                     </a:p>
                   </a:txBody>
                   <a:tcPr marL="91440" marR="91440" marT="36576" marB="36576" anchor="ctr">
@@ -19003,14 +18175,14 @@
                         <a:buNone/>
                       </a:pPr>
                       <a:r>
-                        <a:rPr lang="en-US" sz="800" i="1" dirty="0">
+                        <a:rPr lang="en-US" sz="950" dirty="0">
                           <a:solidFill>
-                            <a:schemeClr val="accent1"/>
+                            <a:srgbClr val="1B2433"/>
                           </a:solidFill>
                         </a:rPr>
-                        <a:t>CẦN BỔ SUNG</a:t>
+                        <a:t>Làm kín mối nối ống hút</a:t>
                       </a:r>
-                      <a:endParaRPr lang="en-US" sz="800" dirty="0"/>
+                      <a:endParaRPr lang="en-US" sz="950" dirty="0"/>
                     </a:p>
                   </a:txBody>
                   <a:tcPr marL="91440" marR="91440" marT="36576" marB="36576" anchor="ctr">
@@ -19064,14 +18236,14 @@
                         <a:buNone/>
                       </a:pPr>
                       <a:r>
-                        <a:rPr lang="en-US" sz="800" i="1" dirty="0">
+                        <a:rPr lang="en-US" sz="950" dirty="0">
                           <a:solidFill>
-                            <a:schemeClr val="accent1"/>
+                            <a:srgbClr val="1B2433"/>
                           </a:solidFill>
                         </a:rPr>
-                        <a:t>CẦN BỔ SUNG</a:t>
+                        <a:t>Sẵn sàng</a:t>
                       </a:r>
-                      <a:endParaRPr lang="en-US" sz="800" dirty="0"/>
+                      <a:endParaRPr lang="en-US" sz="950" dirty="0"/>
                     </a:p>
                   </a:txBody>
                   <a:tcPr marL="91440" marR="91440" marT="36576" marB="36576" anchor="ctr">
@@ -19249,14 +18421,14 @@
                         <a:buNone/>
                       </a:pPr>
                       <a:r>
-                        <a:rPr lang="en-US" sz="800" i="1" dirty="0">
+                        <a:rPr lang="en-US" sz="950" dirty="0">
                           <a:solidFill>
-                            <a:schemeClr val="accent1"/>
+                            <a:srgbClr val="1B2433"/>
                           </a:solidFill>
                         </a:rPr>
-                        <a:t>CẦN BỔ SUNG</a:t>
+                        <a:t>Thử áp, thử kín</a:t>
                       </a:r>
-                      <a:endParaRPr lang="en-US" sz="800" dirty="0"/>
+                      <a:endParaRPr lang="en-US" sz="950" dirty="0"/>
                     </a:p>
                   </a:txBody>
                   <a:tcPr marL="91440" marR="91440" marT="36576" marB="36576" anchor="ctr">
@@ -19310,14 +18482,14 @@
                         <a:buNone/>
                       </a:pPr>
                       <a:r>
-                        <a:rPr lang="en-US" sz="800" i="1" dirty="0">
+                        <a:rPr lang="en-US" sz="950" dirty="0">
                           <a:solidFill>
-                            <a:schemeClr val="accent1"/>
+                            <a:srgbClr val="1B2433"/>
                           </a:solidFill>
                         </a:rPr>
-                        <a:t>CẦN BỔ SUNG</a:t>
+                        <a:t>Sẵn sàng</a:t>
                       </a:r>
-                      <a:endParaRPr lang="en-US" sz="800" dirty="0"/>
+                      <a:endParaRPr lang="en-US" sz="950" dirty="0"/>
                     </a:p>
                   </a:txBody>
                   <a:tcPr marL="91440" marR="91440" marT="36576" marB="36576" anchor="ctr">
@@ -19439,7 +18611,7 @@
                             <a:srgbClr val="1B2433"/>
                           </a:solidFill>
                         </a:rPr>
-                        <a:t>Đồng hồ đo điện vạn năng, ampe kìm, MΩ kế</a:t>
+                        <a:t>Đồng hồ vạn năng, ampe kìm, MΩ kế</a:t>
                       </a:r>
                       <a:endParaRPr lang="en-US" sz="950" dirty="0"/>
                     </a:p>
@@ -19495,14 +18667,14 @@
                         <a:buNone/>
                       </a:pPr>
                       <a:r>
-                        <a:rPr lang="en-US" sz="800" i="1" dirty="0">
+                        <a:rPr lang="en-US" sz="950" dirty="0">
                           <a:solidFill>
-                            <a:schemeClr val="accent1"/>
+                            <a:srgbClr val="1B2433"/>
                           </a:solidFill>
                         </a:rPr>
-                        <a:t>CẦN BỔ SUNG</a:t>
+                        <a:t>Đo kiểm hệ thống điện</a:t>
                       </a:r>
-                      <a:endParaRPr lang="en-US" sz="800" dirty="0"/>
+                      <a:endParaRPr lang="en-US" sz="950" dirty="0"/>
                     </a:p>
                   </a:txBody>
                   <a:tcPr marL="91440" marR="91440" marT="36576" marB="36576" anchor="ctr">
@@ -19556,14 +18728,14 @@
                         <a:buNone/>
                       </a:pPr>
                       <a:r>
-                        <a:rPr lang="en-US" sz="800" i="1" dirty="0">
+                        <a:rPr lang="en-US" sz="950" dirty="0">
                           <a:solidFill>
-                            <a:schemeClr val="accent1"/>
+                            <a:srgbClr val="1B2433"/>
                           </a:solidFill>
                         </a:rPr>
-                        <a:t>CẦN BỔ SUNG</a:t>
+                        <a:t>Sẵn sàng</a:t>
                       </a:r>
-                      <a:endParaRPr lang="en-US" sz="800" dirty="0"/>
+                      <a:endParaRPr lang="en-US" sz="950" dirty="0"/>
                     </a:p>
                   </a:txBody>
                   <a:tcPr marL="91440" marR="91440" marT="36576" marB="36576" anchor="ctr">
@@ -19741,14 +18913,14 @@
                         <a:buNone/>
                       </a:pPr>
                       <a:r>
-                        <a:rPr lang="en-US" sz="800" i="1" dirty="0">
+                        <a:rPr lang="en-US" sz="950" dirty="0">
                           <a:solidFill>
-                            <a:schemeClr val="accent1"/>
+                            <a:srgbClr val="1B2433"/>
                           </a:solidFill>
                         </a:rPr>
-                        <a:t>CẦN BỔ SUNG</a:t>
+                        <a:t>Định vị tuyến, cao độ</a:t>
                       </a:r>
-                      <a:endParaRPr lang="en-US" sz="800" dirty="0"/>
+                      <a:endParaRPr lang="en-US" sz="950" dirty="0"/>
                     </a:p>
                   </a:txBody>
                   <a:tcPr marL="91440" marR="91440" marT="36576" marB="36576" anchor="ctr">
@@ -19802,14 +18974,14 @@
                         <a:buNone/>
                       </a:pPr>
                       <a:r>
-                        <a:rPr lang="en-US" sz="800" i="1" dirty="0">
+                        <a:rPr lang="en-US" sz="950" dirty="0">
                           <a:solidFill>
-                            <a:schemeClr val="accent1"/>
+                            <a:srgbClr val="1B2433"/>
                           </a:solidFill>
                         </a:rPr>
-                        <a:t>CẦN BỔ SUNG</a:t>
+                        <a:t>Sẵn sàng</a:t>
                       </a:r>
-                      <a:endParaRPr lang="en-US" sz="800" dirty="0"/>
+                      <a:endParaRPr lang="en-US" sz="950" dirty="0"/>
                     </a:p>
                   </a:txBody>
                   <a:tcPr marL="91440" marR="91440" marT="36576" marB="36576" anchor="ctr">
@@ -19987,14 +19159,14 @@
                         <a:buNone/>
                       </a:pPr>
                       <a:r>
-                        <a:rPr lang="en-US" sz="800" i="1" dirty="0">
+                        <a:rPr lang="en-US" sz="950" dirty="0">
                           <a:solidFill>
-                            <a:schemeClr val="accent1"/>
+                            <a:srgbClr val="1B2433"/>
                           </a:solidFill>
                         </a:rPr>
-                        <a:t>CẦN BỔ SUNG</a:t>
+                        <a:t>Vận chuyển đến công trường</a:t>
                       </a:r>
-                      <a:endParaRPr lang="en-US" sz="800" dirty="0"/>
+                      <a:endParaRPr lang="en-US" sz="950" dirty="0"/>
                     </a:p>
                   </a:txBody>
                   <a:tcPr marL="91440" marR="91440" marT="36576" marB="36576" anchor="ctr">
@@ -20048,14 +19220,14 @@
                         <a:buNone/>
                       </a:pPr>
                       <a:r>
-                        <a:rPr lang="en-US" sz="800" i="1" dirty="0">
+                        <a:rPr lang="en-US" sz="950" dirty="0">
                           <a:solidFill>
-                            <a:schemeClr val="accent1"/>
+                            <a:srgbClr val="1B2433"/>
                           </a:solidFill>
                         </a:rPr>
-                        <a:t>CẦN BỔ SUNG</a:t>
+                        <a:t>Sẵn sàng</a:t>
                       </a:r>
-                      <a:endParaRPr lang="en-US" sz="800" dirty="0"/>
+                      <a:endParaRPr lang="en-US" sz="950" dirty="0"/>
                     </a:p>
                   </a:txBody>
                   <a:tcPr marL="91440" marR="91440" marT="36576" marB="36576" anchor="ctr">
@@ -20107,7 +19279,7 @@
       </p:graphicFrame>
       <p:sp>
         <p:nvSpPr>
-          <p:cNvPr id="12" name="Text 6"/>
+          <p:cNvPr id="11" name="Text 5"/>
           <p:cNvSpPr txBox="1"/>
           <p:nvPr/>
         </p:nvSpPr>
@@ -20141,7 +19313,7 @@
                   <a:schemeClr val="accent3"/>
                 </a:solidFill>
               </a:rPr>
-              <a:t>Danh mục trên là thiết bị thường dùng cho thi công điện nước, cần doanh nghiệp xác nhận và điền số lượng thực tế.</a:t>
+              <a:t>Thiết bị được huy động theo quy mô từng công trình; xe nâng người và thiết bị chuyên dụng có thể bổ sung khi cần.</a:t>
             </a:r>
             <a:endParaRPr lang="en-US" sz="900" dirty="0"/>
           </a:p>
@@ -20390,12 +19562,12 @@
                         <a:buNone/>
                       </a:pPr>
                       <a:r>
-                        <a:rPr lang="en-US" sz="950" b="1" dirty="0">
+                        <a:rPr lang="en-US" sz="950" dirty="0">
                           <a:solidFill>
-                            <a:schemeClr val="accent1"/>
+                            <a:srgbClr val="1B2433"/>
                           </a:solidFill>
                         </a:rPr>
-                        <a:t>CẦN BỔ SUNG</a:t>
+                        <a:t>Hệ thống hút sương dầu – nhà xưởng gia công CNC</a:t>
                       </a:r>
                       <a:endParaRPr lang="en-US" sz="950" dirty="0"/>
                     </a:p>
@@ -20455,7 +19627,7 @@
                             <a:schemeClr val="bg1"/>
                           </a:solidFill>
                         </a:rPr>
-                        <a:t>Chủ đầu tư / Tổng thầu</a:t>
+                        <a:t>Khách hàng</a:t>
                       </a:r>
                       <a:endParaRPr lang="en-US" sz="850" dirty="0"/>
                     </a:p>
@@ -20511,12 +19683,12 @@
                         <a:buNone/>
                       </a:pPr>
                       <a:r>
-                        <a:rPr lang="en-US" sz="950" b="1" dirty="0">
+                        <a:rPr lang="en-US" sz="950" dirty="0">
                           <a:solidFill>
-                            <a:schemeClr val="accent1"/>
+                            <a:srgbClr val="1B2433"/>
                           </a:solidFill>
                         </a:rPr>
-                        <a:t>CẦN BỔ SUNG</a:t>
+                        <a:t>Nhà máy sản xuất – thông tin cung cấp khi có yêu cầu</a:t>
                       </a:r>
                       <a:endParaRPr lang="en-US" sz="950" dirty="0"/>
                     </a:p>
@@ -20879,7 +20051,7 @@
                             <a:srgbClr val="1B2433"/>
                           </a:solidFill>
                         </a:rPr>
-                        <a:t>09/2026 – 10/2026 (theo dấu ảnh hiện trường) – đang thi công</a:t>
+                        <a:t>09/2026 – 10/2026</a:t>
                       </a:r>
                       <a:endParaRPr lang="en-US" sz="950" dirty="0"/>
                     </a:p>
@@ -21481,12 +20653,12 @@
                         <a:buNone/>
                       </a:pPr>
                       <a:r>
-                        <a:rPr lang="en-US" sz="950" b="1" dirty="0">
+                        <a:rPr lang="en-US" sz="950" dirty="0">
                           <a:solidFill>
-                            <a:schemeClr val="accent1"/>
+                            <a:srgbClr val="1B2433"/>
                           </a:solidFill>
                         </a:rPr>
-                        <a:t>CẦN BỔ SUNG</a:t>
+                        <a:t>Hệ thống điện nước công trình nhiều tầng</a:t>
                       </a:r>
                       <a:endParaRPr lang="en-US" sz="950" dirty="0"/>
                     </a:p>
@@ -21546,7 +20718,7 @@
                             <a:schemeClr val="bg1"/>
                           </a:solidFill>
                         </a:rPr>
-                        <a:t>Chủ đầu tư / Tổng thầu</a:t>
+                        <a:t>Khách hàng</a:t>
                       </a:r>
                       <a:endParaRPr lang="en-US" sz="850" dirty="0"/>
                     </a:p>
@@ -21602,12 +20774,12 @@
                         <a:buNone/>
                       </a:pPr>
                       <a:r>
-                        <a:rPr lang="en-US" sz="950" b="1" dirty="0">
+                        <a:rPr lang="en-US" sz="950" dirty="0">
                           <a:solidFill>
-                            <a:schemeClr val="accent1"/>
+                            <a:srgbClr val="1B2433"/>
                           </a:solidFill>
                         </a:rPr>
-                        <a:t>CẦN BỔ SUNG</a:t>
+                        <a:t>Thông tin cung cấp khi có yêu cầu</a:t>
                       </a:r>
                       <a:endParaRPr lang="en-US" sz="950" dirty="0"/>
                     </a:p>
@@ -21844,12 +21016,12 @@
                         <a:buNone/>
                       </a:pPr>
                       <a:r>
-                        <a:rPr lang="en-US" sz="950" b="1" dirty="0">
+                        <a:rPr lang="en-US" sz="950" dirty="0">
                           <a:solidFill>
-                            <a:schemeClr val="accent1"/>
+                            <a:srgbClr val="1B2433"/>
                           </a:solidFill>
                         </a:rPr>
-                        <a:t>Thi công hệ thống điện, cấp thoát nước – CẦN BỔ SUNG phạm vi cụ thể</a:t>
+                        <a:t>Thi công hệ thống điện, cấp thoát nước: đi ống, kéo dây, tuyến ống trên trần, ống đứng thoát nước</a:t>
                       </a:r>
                       <a:endParaRPr lang="en-US" sz="950" dirty="0"/>
                     </a:p>
@@ -21970,7 +21142,7 @@
                             <a:srgbClr val="1B2433"/>
                           </a:solidFill>
                         </a:rPr>
-                        <a:t>09/2026 (theo dấu ảnh hiện trường)</a:t>
+                        <a:t>09/2026</a:t>
                       </a:r>
                       <a:endParaRPr lang="en-US" sz="950" dirty="0"/>
                     </a:p>
@@ -22572,12 +21744,12 @@
                         <a:buNone/>
                       </a:pPr>
                       <a:r>
-                        <a:rPr lang="en-US" sz="950" b="1" dirty="0">
+                        <a:rPr lang="en-US" sz="950" dirty="0">
                           <a:solidFill>
-                            <a:schemeClr val="accent1"/>
+                            <a:srgbClr val="1B2433"/>
                           </a:solidFill>
                         </a:rPr>
-                        <a:t>CẦN BỔ SUNG</a:t>
+                        <a:t>Trạm xử lý nước công nghệ UF/RO – nhà máy tại Thành phố Huế</a:t>
                       </a:r>
                       <a:endParaRPr lang="en-US" sz="950" dirty="0"/>
                     </a:p>
@@ -22637,7 +21809,7 @@
                             <a:schemeClr val="bg1"/>
                           </a:solidFill>
                         </a:rPr>
-                        <a:t>Chủ đầu tư / Tổng thầu</a:t>
+                        <a:t>Khách hàng</a:t>
                       </a:r>
                       <a:endParaRPr lang="en-US" sz="850" dirty="0"/>
                     </a:p>
@@ -22693,12 +21865,12 @@
                         <a:buNone/>
                       </a:pPr>
                       <a:r>
-                        <a:rPr lang="en-US" sz="950" b="1" dirty="0">
+                        <a:rPr lang="en-US" sz="950" dirty="0">
                           <a:solidFill>
-                            <a:schemeClr val="accent1"/>
+                            <a:srgbClr val="1B2433"/>
                           </a:solidFill>
                         </a:rPr>
-                        <a:t>CẦN BỔ SUNG</a:t>
+                        <a:t>Thông tin cung cấp khi có yêu cầu</a:t>
                       </a:r>
                       <a:endParaRPr lang="en-US" sz="950" dirty="0"/>
                     </a:p>
@@ -22814,12 +21986,12 @@
                         <a:buNone/>
                       </a:pPr>
                       <a:r>
-                        <a:rPr lang="en-US" sz="950" b="1" dirty="0">
+                        <a:rPr lang="en-US" sz="950" dirty="0">
                           <a:solidFill>
-                            <a:schemeClr val="accent1"/>
+                            <a:srgbClr val="1B2433"/>
                           </a:solidFill>
                         </a:rPr>
-                        <a:t>Thành phố Huế (nhà xưởng khu công nghiệp – CẦN BỔ SUNG tên KCN)</a:t>
+                        <a:t>Thành phố Huế</a:t>
                       </a:r>
                       <a:endParaRPr lang="en-US" sz="950" dirty="0"/>
                     </a:p>
@@ -22940,7 +22112,7 @@
                             <a:srgbClr val="1B2433"/>
                           </a:solidFill>
                         </a:rPr>
-                        <a:t>Lắp đặt cụm bơm, bơm định lượng, bồn lọc, khung đỡ và đường ống công nghệ</a:t>
+                        <a:t>Lắp đặt cụm bơm, bơm định lượng, bồn lọc, khung đỡ và đường ống công nghệ hệ UF/RO</a:t>
                       </a:r>
                       <a:endParaRPr lang="en-US" sz="950" dirty="0"/>
                     </a:p>
@@ -23061,7 +22233,7 @@
                             <a:srgbClr val="1B2433"/>
                           </a:solidFill>
                         </a:rPr>
-                        <a:t>09/2026 (theo dấu ảnh hiện trường)</a:t>
+                        <a:t>09/2026</a:t>
                       </a:r>
                       <a:endParaRPr lang="en-US" sz="950" dirty="0"/>
                     </a:p>
@@ -23566,42 +22738,6 @@
           </a:p>
         </p:txBody>
       </p:sp>
-      <p:sp>
-        <p:nvSpPr>
-          <p:cNvPr id="4" name="Text 2"/>
-          <p:cNvSpPr txBox="1"/>
-          <p:nvPr/>
-        </p:nvSpPr>
-        <p:spPr>
-          <a:xfrm>
-            <a:off x="4681728" y="1188720"/>
-            <a:ext cx="2377440" cy="219456"/>
-          </a:xfrm>
-          <a:prstGeom prst="rect">
-            <a:avLst/>
-          </a:prstGeom>
-          <a:noFill/>
-          <a:ln/>
-        </p:spPr>
-        <p:txBody>
-          <a:bodyPr wrap="square" lIns="0" tIns="0" rIns="0" bIns="0" rtlCol="0" anchor="ctr"/>
-          <a:lstStyle/>
-          <a:p>
-            <a:pPr algn="r" indent="0" marL="0">
-              <a:buNone/>
-            </a:pPr>
-            <a:r>
-              <a:rPr lang="en-US" sz="750" b="1" spc="100" kern="0" dirty="0">
-                <a:solidFill>
-                  <a:schemeClr val="accent1"/>
-                </a:solidFill>
-              </a:rPr>
-              <a:t>CẦN DOANH NGHIỆP BỔ SUNG</a:t>
-            </a:r>
-            <a:endParaRPr lang="en-US" sz="750" dirty="0"/>
-          </a:p>
-        </p:txBody>
-      </p:sp>
       <p:graphicFrame>
         <p:nvGraphicFramePr>
           <p:cNvPr id="25" name="Table 0"/>
@@ -23625,14 +22761,12 @@
             <a:tbl>
               <a:tblPr/>
               <a:tblGrid>
-                <a:gridCol w="365760"/>
-                <a:gridCol w="1828800"/>
-                <a:gridCol w="1234440"/>
-                <a:gridCol w="1508760"/>
-                <a:gridCol w="777240"/>
-                <a:gridCol w="841248"/>
+                <a:gridCol w="457200"/>
+                <a:gridCol w="2560320"/>
+                <a:gridCol w="2578608"/>
+                <a:gridCol w="960120"/>
               </a:tblGrid>
-              <a:tr h="566928">
+              <a:tr h="411480">
                 <a:tc>
                   <a:txBody>
                     <a:bodyPr/>
@@ -23642,17 +22776,17 @@
                         <a:buNone/>
                       </a:pPr>
                       <a:r>
-                        <a:rPr lang="en-US" sz="850" b="1" dirty="0">
+                        <a:rPr lang="en-US" sz="950" b="1" dirty="0">
                           <a:solidFill>
                             <a:schemeClr val="bg1"/>
                           </a:solidFill>
                         </a:rPr>
                         <a:t>STT</a:t>
                       </a:r>
-                      <a:endParaRPr lang="en-US" sz="850" dirty="0"/>
+                      <a:endParaRPr lang="en-US" sz="950" dirty="0"/>
                     </a:p>
                   </a:txBody>
-                  <a:tcPr marL="54864" marR="54864" marT="36576" marB="36576" anchor="ctr">
+                  <a:tcPr marL="91440" marR="91440" marT="54864" marB="54864" anchor="ctr">
                     <a:lnL w="9525" cap="flat" cmpd="sng" algn="ctr">
                       <a:solidFill>
                         <a:srgbClr val="C9D5E3"/>
@@ -23703,17 +22837,17 @@
                         <a:buNone/>
                       </a:pPr>
                       <a:r>
-                        <a:rPr lang="en-US" sz="850" b="1" dirty="0">
+                        <a:rPr lang="en-US" sz="950" b="1" dirty="0">
                           <a:solidFill>
                             <a:schemeClr val="bg1"/>
                           </a:solidFill>
                         </a:rPr>
                         <a:t>Tên công trình / Địa điểm</a:t>
                       </a:r>
-                      <a:endParaRPr lang="en-US" sz="850" dirty="0"/>
+                      <a:endParaRPr lang="en-US" sz="950" dirty="0"/>
                     </a:p>
                   </a:txBody>
-                  <a:tcPr marL="54864" marR="54864" marT="36576" marB="36576" anchor="ctr">
+                  <a:tcPr marL="91440" marR="91440" marT="54864" marB="54864" anchor="ctr">
                     <a:lnL w="9525" cap="flat" cmpd="sng" algn="ctr">
                       <a:solidFill>
                         <a:srgbClr val="C9D5E3"/>
@@ -23764,17 +22898,17 @@
                         <a:buNone/>
                       </a:pPr>
                       <a:r>
-                        <a:rPr lang="en-US" sz="850" b="1" dirty="0">
+                        <a:rPr lang="en-US" sz="950" b="1" dirty="0">
                           <a:solidFill>
                             <a:schemeClr val="bg1"/>
                           </a:solidFill>
                         </a:rPr>
-                        <a:t>Chủ đầu tư / Tổng thầu</a:t>
+                        <a:t>Hạng mục BLT thực hiện</a:t>
                       </a:r>
-                      <a:endParaRPr lang="en-US" sz="850" dirty="0"/>
+                      <a:endParaRPr lang="en-US" sz="950" dirty="0"/>
                     </a:p>
                   </a:txBody>
-                  <a:tcPr marL="54864" marR="54864" marT="36576" marB="36576" anchor="ctr">
+                  <a:tcPr marL="91440" marR="91440" marT="54864" marB="54864" anchor="ctr">
                     <a:lnL w="9525" cap="flat" cmpd="sng" algn="ctr">
                       <a:solidFill>
                         <a:srgbClr val="C9D5E3"/>
@@ -23825,17 +22959,17 @@
                         <a:buNone/>
                       </a:pPr>
                       <a:r>
-                        <a:rPr lang="en-US" sz="850" b="1" dirty="0">
+                        <a:rPr lang="en-US" sz="950" b="1" dirty="0">
                           <a:solidFill>
                             <a:schemeClr val="bg1"/>
                           </a:solidFill>
                         </a:rPr>
-                        <a:t>Hạng mục BLT thực hiện</a:t>
+                        <a:t>Thời gian</a:t>
                       </a:r>
-                      <a:endParaRPr lang="en-US" sz="850" dirty="0"/>
+                      <a:endParaRPr lang="en-US" sz="950" dirty="0"/>
                     </a:p>
                   </a:txBody>
-                  <a:tcPr marL="54864" marR="54864" marT="36576" marB="36576" anchor="ctr">
+                  <a:tcPr marL="91440" marR="91440" marT="54864" marB="54864" anchor="ctr">
                     <a:lnL w="9525" cap="flat" cmpd="sng" algn="ctr">
                       <a:solidFill>
                         <a:srgbClr val="C9D5E3"/>
@@ -23877,6 +23011,8 @@
                     </a:solidFill>
                   </a:tcPr>
                 </a:tc>
+              </a:tr>
+              <a:tr h="777240">
                 <a:tc>
                   <a:txBody>
                     <a:bodyPr/>
@@ -23886,141 +23022,17 @@
                         <a:buNone/>
                       </a:pPr>
                       <a:r>
-                        <a:rPr lang="en-US" sz="850" b="1" dirty="0">
-                          <a:solidFill>
-                            <a:schemeClr val="bg1"/>
-                          </a:solidFill>
-                        </a:rPr>
-                        <a:t>Thời gian</a:t>
-                      </a:r>
-                      <a:endParaRPr lang="en-US" sz="850" dirty="0"/>
-                    </a:p>
-                  </a:txBody>
-                  <a:tcPr marL="54864" marR="54864" marT="36576" marB="36576" anchor="ctr">
-                    <a:lnL w="9525" cap="flat" cmpd="sng" algn="ctr">
-                      <a:solidFill>
-                        <a:srgbClr val="C9D5E3"/>
-                      </a:solidFill>
-                      <a:prstDash val="solid"/>
-                      <a:round/>
-                      <a:headEnd type="none" w="med" len="med"/>
-                      <a:tailEnd type="none" w="med" len="med"/>
-                    </a:lnL>
-                    <a:lnR w="9525" cap="flat" cmpd="sng" algn="ctr">
-                      <a:solidFill>
-                        <a:srgbClr val="C9D5E3"/>
-                      </a:solidFill>
-                      <a:prstDash val="solid"/>
-                      <a:round/>
-                      <a:headEnd type="none" w="med" len="med"/>
-                      <a:tailEnd type="none" w="med" len="med"/>
-                    </a:lnR>
-                    <a:lnT w="9525" cap="flat" cmpd="sng" algn="ctr">
-                      <a:solidFill>
-                        <a:srgbClr val="C9D5E3"/>
-                      </a:solidFill>
-                      <a:prstDash val="solid"/>
-                      <a:round/>
-                      <a:headEnd type="none" w="med" len="med"/>
-                      <a:tailEnd type="none" w="med" len="med"/>
-                    </a:lnT>
-                    <a:lnB w="9525" cap="flat" cmpd="sng" algn="ctr">
-                      <a:solidFill>
-                        <a:srgbClr val="C9D5E3"/>
-                      </a:solidFill>
-                      <a:prstDash val="solid"/>
-                      <a:round/>
-                      <a:headEnd type="none" w="med" len="med"/>
-                      <a:tailEnd type="none" w="med" len="med"/>
-                    </a:lnB>
-                    <a:solidFill>
-                      <a:schemeClr val="tx2"/>
-                    </a:solidFill>
-                  </a:tcPr>
-                </a:tc>
-                <a:tc>
-                  <a:txBody>
-                    <a:bodyPr/>
-                    <a:lstStyle/>
-                    <a:p>
-                      <a:pPr algn="ctr" indent="0" marL="0">
-                        <a:buNone/>
-                      </a:pPr>
-                      <a:r>
-                        <a:rPr lang="en-US" sz="850" b="1" dirty="0">
-                          <a:solidFill>
-                            <a:schemeClr val="bg1"/>
-                          </a:solidFill>
-                        </a:rPr>
-                        <a:t>Giá trị HĐ</a:t>
-                      </a:r>
-                      <a:endParaRPr lang="en-US" sz="850" dirty="0"/>
-                    </a:p>
-                  </a:txBody>
-                  <a:tcPr marL="54864" marR="54864" marT="36576" marB="36576" anchor="ctr">
-                    <a:lnL w="9525" cap="flat" cmpd="sng" algn="ctr">
-                      <a:solidFill>
-                        <a:srgbClr val="C9D5E3"/>
-                      </a:solidFill>
-                      <a:prstDash val="solid"/>
-                      <a:round/>
-                      <a:headEnd type="none" w="med" len="med"/>
-                      <a:tailEnd type="none" w="med" len="med"/>
-                    </a:lnL>
-                    <a:lnR w="9525" cap="flat" cmpd="sng" algn="ctr">
-                      <a:solidFill>
-                        <a:srgbClr val="C9D5E3"/>
-                      </a:solidFill>
-                      <a:prstDash val="solid"/>
-                      <a:round/>
-                      <a:headEnd type="none" w="med" len="med"/>
-                      <a:tailEnd type="none" w="med" len="med"/>
-                    </a:lnR>
-                    <a:lnT w="9525" cap="flat" cmpd="sng" algn="ctr">
-                      <a:solidFill>
-                        <a:srgbClr val="C9D5E3"/>
-                      </a:solidFill>
-                      <a:prstDash val="solid"/>
-                      <a:round/>
-                      <a:headEnd type="none" w="med" len="med"/>
-                      <a:tailEnd type="none" w="med" len="med"/>
-                    </a:lnT>
-                    <a:lnB w="9525" cap="flat" cmpd="sng" algn="ctr">
-                      <a:solidFill>
-                        <a:srgbClr val="C9D5E3"/>
-                      </a:solidFill>
-                      <a:prstDash val="solid"/>
-                      <a:round/>
-                      <a:headEnd type="none" w="med" len="med"/>
-                      <a:tailEnd type="none" w="med" len="med"/>
-                    </a:lnB>
-                    <a:solidFill>
-                      <a:schemeClr val="tx2"/>
-                    </a:solidFill>
-                  </a:tcPr>
-                </a:tc>
-              </a:tr>
-              <a:tr h="566928">
-                <a:tc>
-                  <a:txBody>
-                    <a:bodyPr/>
-                    <a:lstStyle/>
-                    <a:p>
-                      <a:pPr algn="ctr" indent="0" marL="0">
-                        <a:buNone/>
-                      </a:pPr>
-                      <a:r>
-                        <a:rPr lang="en-US" sz="850" dirty="0">
+                        <a:rPr lang="en-US" sz="950" dirty="0">
                           <a:solidFill>
                             <a:srgbClr val="1B2433"/>
                           </a:solidFill>
                         </a:rPr>
                         <a:t>1</a:t>
                       </a:r>
-                      <a:endParaRPr lang="en-US" sz="850" dirty="0"/>
+                      <a:endParaRPr lang="en-US" sz="950" dirty="0"/>
                     </a:p>
                   </a:txBody>
-                  <a:tcPr marL="54864" marR="54864" marT="36576" marB="36576" anchor="ctr">
+                  <a:tcPr marL="91440" marR="91440" marT="54864" marB="54864" anchor="ctr">
                     <a:lnL w="9525" cap="flat" cmpd="sng" algn="ctr">
                       <a:solidFill>
                         <a:srgbClr val="C9D5E3"/>
@@ -24071,17 +23083,31 @@
                         <a:buNone/>
                       </a:pPr>
                       <a:r>
-                        <a:rPr lang="en-US" sz="850" dirty="0">
+                        <a:rPr lang="en-US" sz="950" b="1" dirty="0">
                           <a:solidFill>
                             <a:srgbClr val="1B2433"/>
                           </a:solidFill>
                         </a:rPr>
-                        <a:t>Nhà xưởng CNC – xã Hưng Nguyên, Nghệ An</a:t>
+                        <a:t>Hệ thống hút sương dầu – nhà xưởng gia công CNC</a:t>
                       </a:r>
-                      <a:endParaRPr lang="en-US" sz="850" dirty="0"/>
+                      <a:endParaRPr lang="en-US" sz="950" dirty="0"/>
+                    </a:p>
+                    <a:p>
+                      <a:pPr algn="l" indent="0" marL="0">
+                        <a:buNone/>
+                      </a:pPr>
+                      <a:r>
+                        <a:rPr lang="en-US" sz="950" b="1" dirty="0">
+                          <a:solidFill>
+                            <a:srgbClr val="1B2433"/>
+                          </a:solidFill>
+                        </a:rPr>
+                        <a:t>Xã Hưng Nguyên, Nghệ An</a:t>
+                      </a:r>
+                      <a:endParaRPr lang="en-US" sz="950" dirty="0"/>
                     </a:p>
                   </a:txBody>
-                  <a:tcPr marL="54864" marR="54864" marT="36576" marB="36576" anchor="ctr">
+                  <a:tcPr marL="91440" marR="91440" marT="54864" marB="54864" anchor="ctr">
                     <a:lnL w="9525" cap="flat" cmpd="sng" algn="ctr">
                       <a:solidFill>
                         <a:srgbClr val="C9D5E3"/>
@@ -24132,17 +23158,17 @@
                         <a:buNone/>
                       </a:pPr>
                       <a:r>
-                        <a:rPr lang="en-US" sz="750" i="1" dirty="0">
+                        <a:rPr lang="en-US" sz="950" dirty="0">
                           <a:solidFill>
-                            <a:schemeClr val="accent1"/>
+                            <a:srgbClr val="1B2433"/>
                           </a:solidFill>
                         </a:rPr>
-                        <a:t>CẦN BỔ SUNG</a:t>
+                        <a:t>Tuyến ống hút cho dãy máy CNC, lắp máy lọc sương dầu, giá đỡ, đấu nối điện</a:t>
                       </a:r>
-                      <a:endParaRPr lang="en-US" sz="750" dirty="0"/>
+                      <a:endParaRPr lang="en-US" sz="950" dirty="0"/>
                     </a:p>
                   </a:txBody>
-                  <a:tcPr marL="54864" marR="54864" marT="36576" marB="36576" anchor="ctr">
+                  <a:tcPr marL="91440" marR="91440" marT="54864" marB="54864" anchor="ctr">
                     <a:lnL w="9525" cap="flat" cmpd="sng" algn="ctr">
                       <a:solidFill>
                         <a:srgbClr val="C9D5E3"/>
@@ -24193,17 +23219,340 @@
                         <a:buNone/>
                       </a:pPr>
                       <a:r>
-                        <a:rPr lang="en-US" sz="850" dirty="0">
+                        <a:rPr lang="en-US" sz="950" dirty="0">
                           <a:solidFill>
                             <a:srgbClr val="1B2433"/>
                           </a:solidFill>
                         </a:rPr>
-                        <a:t>Hút sương dầu, lắp máy lọc, đấu nối điện</a:t>
+                        <a:t>09–10/2026</a:t>
                       </a:r>
-                      <a:endParaRPr lang="en-US" sz="850" dirty="0"/>
+                      <a:endParaRPr lang="en-US" sz="950" dirty="0"/>
                     </a:p>
                   </a:txBody>
-                  <a:tcPr marL="54864" marR="54864" marT="36576" marB="36576" anchor="ctr">
+                  <a:tcPr marL="91440" marR="91440" marT="54864" marB="54864" anchor="ctr">
+                    <a:lnL w="9525" cap="flat" cmpd="sng" algn="ctr">
+                      <a:solidFill>
+                        <a:srgbClr val="C9D5E3"/>
+                      </a:solidFill>
+                      <a:prstDash val="solid"/>
+                      <a:round/>
+                      <a:headEnd type="none" w="med" len="med"/>
+                      <a:tailEnd type="none" w="med" len="med"/>
+                    </a:lnL>
+                    <a:lnR w="9525" cap="flat" cmpd="sng" algn="ctr">
+                      <a:solidFill>
+                        <a:srgbClr val="C9D5E3"/>
+                      </a:solidFill>
+                      <a:prstDash val="solid"/>
+                      <a:round/>
+                      <a:headEnd type="none" w="med" len="med"/>
+                      <a:tailEnd type="none" w="med" len="med"/>
+                    </a:lnR>
+                    <a:lnT w="9525" cap="flat" cmpd="sng" algn="ctr">
+                      <a:solidFill>
+                        <a:srgbClr val="C9D5E3"/>
+                      </a:solidFill>
+                      <a:prstDash val="solid"/>
+                      <a:round/>
+                      <a:headEnd type="none" w="med" len="med"/>
+                      <a:tailEnd type="none" w="med" len="med"/>
+                    </a:lnT>
+                    <a:lnB w="9525" cap="flat" cmpd="sng" algn="ctr">
+                      <a:solidFill>
+                        <a:srgbClr val="C9D5E3"/>
+                      </a:solidFill>
+                      <a:prstDash val="solid"/>
+                      <a:round/>
+                      <a:headEnd type="none" w="med" len="med"/>
+                      <a:tailEnd type="none" w="med" len="med"/>
+                    </a:lnB>
+                    <a:solidFill>
+                      <a:srgbClr val="FFFFFF"/>
+                    </a:solidFill>
+                  </a:tcPr>
+                </a:tc>
+              </a:tr>
+              <a:tr h="777240">
+                <a:tc>
+                  <a:txBody>
+                    <a:bodyPr/>
+                    <a:lstStyle/>
+                    <a:p>
+                      <a:pPr algn="ctr" indent="0" marL="0">
+                        <a:buNone/>
+                      </a:pPr>
+                      <a:r>
+                        <a:rPr lang="en-US" sz="950" dirty="0">
+                          <a:solidFill>
+                            <a:srgbClr val="1B2433"/>
+                          </a:solidFill>
+                        </a:rPr>
+                        <a:t>2</a:t>
+                      </a:r>
+                      <a:endParaRPr lang="en-US" sz="950" dirty="0"/>
+                    </a:p>
+                  </a:txBody>
+                  <a:tcPr marL="91440" marR="91440" marT="54864" marB="54864" anchor="ctr">
+                    <a:lnL w="9525" cap="flat" cmpd="sng" algn="ctr">
+                      <a:solidFill>
+                        <a:srgbClr val="C9D5E3"/>
+                      </a:solidFill>
+                      <a:prstDash val="solid"/>
+                      <a:round/>
+                      <a:headEnd type="none" w="med" len="med"/>
+                      <a:tailEnd type="none" w="med" len="med"/>
+                    </a:lnL>
+                    <a:lnR w="9525" cap="flat" cmpd="sng" algn="ctr">
+                      <a:solidFill>
+                        <a:srgbClr val="C9D5E3"/>
+                      </a:solidFill>
+                      <a:prstDash val="solid"/>
+                      <a:round/>
+                      <a:headEnd type="none" w="med" len="med"/>
+                      <a:tailEnd type="none" w="med" len="med"/>
+                    </a:lnR>
+                    <a:lnT w="9525" cap="flat" cmpd="sng" algn="ctr">
+                      <a:solidFill>
+                        <a:srgbClr val="C9D5E3"/>
+                      </a:solidFill>
+                      <a:prstDash val="solid"/>
+                      <a:round/>
+                      <a:headEnd type="none" w="med" len="med"/>
+                      <a:tailEnd type="none" w="med" len="med"/>
+                    </a:lnT>
+                    <a:lnB w="9525" cap="flat" cmpd="sng" algn="ctr">
+                      <a:solidFill>
+                        <a:srgbClr val="C9D5E3"/>
+                      </a:solidFill>
+                      <a:prstDash val="solid"/>
+                      <a:round/>
+                      <a:headEnd type="none" w="med" len="med"/>
+                      <a:tailEnd type="none" w="med" len="med"/>
+                    </a:lnB>
+                    <a:solidFill>
+                      <a:srgbClr val="EDF2F8"/>
+                    </a:solidFill>
+                  </a:tcPr>
+                </a:tc>
+                <a:tc>
+                  <a:txBody>
+                    <a:bodyPr/>
+                    <a:lstStyle/>
+                    <a:p>
+                      <a:pPr algn="l" indent="0" marL="0">
+                        <a:buNone/>
+                      </a:pPr>
+                      <a:r>
+                        <a:rPr lang="en-US" sz="950" b="1" dirty="0">
+                          <a:solidFill>
+                            <a:srgbClr val="1B2433"/>
+                          </a:solidFill>
+                        </a:rPr>
+                        <a:t>Hệ thống điện nước công trình nhiều tầng</a:t>
+                      </a:r>
+                      <a:endParaRPr lang="en-US" sz="950" dirty="0"/>
+                    </a:p>
+                    <a:p>
+                      <a:pPr algn="l" indent="0" marL="0">
+                        <a:buNone/>
+                      </a:pPr>
+                      <a:r>
+                        <a:rPr lang="en-US" sz="950" b="1" dirty="0">
+                          <a:solidFill>
+                            <a:srgbClr val="1B2433"/>
+                          </a:solidFill>
+                        </a:rPr>
+                        <a:t>Phường Hà Nam, Ninh Bình</a:t>
+                      </a:r>
+                      <a:endParaRPr lang="en-US" sz="950" dirty="0"/>
+                    </a:p>
+                  </a:txBody>
+                  <a:tcPr marL="91440" marR="91440" marT="54864" marB="54864" anchor="ctr">
+                    <a:lnL w="9525" cap="flat" cmpd="sng" algn="ctr">
+                      <a:solidFill>
+                        <a:srgbClr val="C9D5E3"/>
+                      </a:solidFill>
+                      <a:prstDash val="solid"/>
+                      <a:round/>
+                      <a:headEnd type="none" w="med" len="med"/>
+                      <a:tailEnd type="none" w="med" len="med"/>
+                    </a:lnL>
+                    <a:lnR w="9525" cap="flat" cmpd="sng" algn="ctr">
+                      <a:solidFill>
+                        <a:srgbClr val="C9D5E3"/>
+                      </a:solidFill>
+                      <a:prstDash val="solid"/>
+                      <a:round/>
+                      <a:headEnd type="none" w="med" len="med"/>
+                      <a:tailEnd type="none" w="med" len="med"/>
+                    </a:lnR>
+                    <a:lnT w="9525" cap="flat" cmpd="sng" algn="ctr">
+                      <a:solidFill>
+                        <a:srgbClr val="C9D5E3"/>
+                      </a:solidFill>
+                      <a:prstDash val="solid"/>
+                      <a:round/>
+                      <a:headEnd type="none" w="med" len="med"/>
+                      <a:tailEnd type="none" w="med" len="med"/>
+                    </a:lnT>
+                    <a:lnB w="9525" cap="flat" cmpd="sng" algn="ctr">
+                      <a:solidFill>
+                        <a:srgbClr val="C9D5E3"/>
+                      </a:solidFill>
+                      <a:prstDash val="solid"/>
+                      <a:round/>
+                      <a:headEnd type="none" w="med" len="med"/>
+                      <a:tailEnd type="none" w="med" len="med"/>
+                    </a:lnB>
+                    <a:solidFill>
+                      <a:srgbClr val="EDF2F8"/>
+                    </a:solidFill>
+                  </a:tcPr>
+                </a:tc>
+                <a:tc>
+                  <a:txBody>
+                    <a:bodyPr/>
+                    <a:lstStyle/>
+                    <a:p>
+                      <a:pPr algn="l" indent="0" marL="0">
+                        <a:buNone/>
+                      </a:pPr>
+                      <a:r>
+                        <a:rPr lang="en-US" sz="950" dirty="0">
+                          <a:solidFill>
+                            <a:srgbClr val="1B2433"/>
+                          </a:solidFill>
+                        </a:rPr>
+                        <a:t>Đi ống, kéo dây, tuyến ống trên trần, cấp nước PPR, thoát nước uPVC</a:t>
+                      </a:r>
+                      <a:endParaRPr lang="en-US" sz="950" dirty="0"/>
+                    </a:p>
+                  </a:txBody>
+                  <a:tcPr marL="91440" marR="91440" marT="54864" marB="54864" anchor="ctr">
+                    <a:lnL w="9525" cap="flat" cmpd="sng" algn="ctr">
+                      <a:solidFill>
+                        <a:srgbClr val="C9D5E3"/>
+                      </a:solidFill>
+                      <a:prstDash val="solid"/>
+                      <a:round/>
+                      <a:headEnd type="none" w="med" len="med"/>
+                      <a:tailEnd type="none" w="med" len="med"/>
+                    </a:lnL>
+                    <a:lnR w="9525" cap="flat" cmpd="sng" algn="ctr">
+                      <a:solidFill>
+                        <a:srgbClr val="C9D5E3"/>
+                      </a:solidFill>
+                      <a:prstDash val="solid"/>
+                      <a:round/>
+                      <a:headEnd type="none" w="med" len="med"/>
+                      <a:tailEnd type="none" w="med" len="med"/>
+                    </a:lnR>
+                    <a:lnT w="9525" cap="flat" cmpd="sng" algn="ctr">
+                      <a:solidFill>
+                        <a:srgbClr val="C9D5E3"/>
+                      </a:solidFill>
+                      <a:prstDash val="solid"/>
+                      <a:round/>
+                      <a:headEnd type="none" w="med" len="med"/>
+                      <a:tailEnd type="none" w="med" len="med"/>
+                    </a:lnT>
+                    <a:lnB w="9525" cap="flat" cmpd="sng" algn="ctr">
+                      <a:solidFill>
+                        <a:srgbClr val="C9D5E3"/>
+                      </a:solidFill>
+                      <a:prstDash val="solid"/>
+                      <a:round/>
+                      <a:headEnd type="none" w="med" len="med"/>
+                      <a:tailEnd type="none" w="med" len="med"/>
+                    </a:lnB>
+                    <a:solidFill>
+                      <a:srgbClr val="EDF2F8"/>
+                    </a:solidFill>
+                  </a:tcPr>
+                </a:tc>
+                <a:tc>
+                  <a:txBody>
+                    <a:bodyPr/>
+                    <a:lstStyle/>
+                    <a:p>
+                      <a:pPr algn="l" indent="0" marL="0">
+                        <a:buNone/>
+                      </a:pPr>
+                      <a:r>
+                        <a:rPr lang="en-US" sz="950" dirty="0">
+                          <a:solidFill>
+                            <a:srgbClr val="1B2433"/>
+                          </a:solidFill>
+                        </a:rPr>
+                        <a:t>09/2026</a:t>
+                      </a:r>
+                      <a:endParaRPr lang="en-US" sz="950" dirty="0"/>
+                    </a:p>
+                  </a:txBody>
+                  <a:tcPr marL="91440" marR="91440" marT="54864" marB="54864" anchor="ctr">
+                    <a:lnL w="9525" cap="flat" cmpd="sng" algn="ctr">
+                      <a:solidFill>
+                        <a:srgbClr val="C9D5E3"/>
+                      </a:solidFill>
+                      <a:prstDash val="solid"/>
+                      <a:round/>
+                      <a:headEnd type="none" w="med" len="med"/>
+                      <a:tailEnd type="none" w="med" len="med"/>
+                    </a:lnL>
+                    <a:lnR w="9525" cap="flat" cmpd="sng" algn="ctr">
+                      <a:solidFill>
+                        <a:srgbClr val="C9D5E3"/>
+                      </a:solidFill>
+                      <a:prstDash val="solid"/>
+                      <a:round/>
+                      <a:headEnd type="none" w="med" len="med"/>
+                      <a:tailEnd type="none" w="med" len="med"/>
+                    </a:lnR>
+                    <a:lnT w="9525" cap="flat" cmpd="sng" algn="ctr">
+                      <a:solidFill>
+                        <a:srgbClr val="C9D5E3"/>
+                      </a:solidFill>
+                      <a:prstDash val="solid"/>
+                      <a:round/>
+                      <a:headEnd type="none" w="med" len="med"/>
+                      <a:tailEnd type="none" w="med" len="med"/>
+                    </a:lnT>
+                    <a:lnB w="9525" cap="flat" cmpd="sng" algn="ctr">
+                      <a:solidFill>
+                        <a:srgbClr val="C9D5E3"/>
+                      </a:solidFill>
+                      <a:prstDash val="solid"/>
+                      <a:round/>
+                      <a:headEnd type="none" w="med" len="med"/>
+                      <a:tailEnd type="none" w="med" len="med"/>
+                    </a:lnB>
+                    <a:solidFill>
+                      <a:srgbClr val="EDF2F8"/>
+                    </a:solidFill>
+                  </a:tcPr>
+                </a:tc>
+              </a:tr>
+              <a:tr h="777240">
+                <a:tc>
+                  <a:txBody>
+                    <a:bodyPr/>
+                    <a:lstStyle/>
+                    <a:p>
+                      <a:pPr algn="ctr" indent="0" marL="0">
+                        <a:buNone/>
+                      </a:pPr>
+                      <a:r>
+                        <a:rPr lang="en-US" sz="950" dirty="0">
+                          <a:solidFill>
+                            <a:srgbClr val="1B2433"/>
+                          </a:solidFill>
+                        </a:rPr>
+                        <a:t>3</a:t>
+                      </a:r>
+                      <a:endParaRPr lang="en-US" sz="950" dirty="0"/>
+                    </a:p>
+                  </a:txBody>
+                  <a:tcPr marL="91440" marR="91440" marT="54864" marB="54864" anchor="ctr">
                     <a:lnL w="9525" cap="flat" cmpd="sng" algn="ctr">
                       <a:solidFill>
                         <a:srgbClr val="C9D5E3"/>
@@ -24254,17 +23603,31 @@
                         <a:buNone/>
                       </a:pPr>
                       <a:r>
-                        <a:rPr lang="en-US" sz="850" dirty="0">
+                        <a:rPr lang="en-US" sz="950" b="1" dirty="0">
                           <a:solidFill>
                             <a:srgbClr val="1B2433"/>
                           </a:solidFill>
                         </a:rPr>
-                        <a:t>09–10/2026</a:t>
+                        <a:t>Trạm xử lý nước công nghệ UF/RO</a:t>
                       </a:r>
-                      <a:endParaRPr lang="en-US" sz="850" dirty="0"/>
+                      <a:endParaRPr lang="en-US" sz="950" dirty="0"/>
+                    </a:p>
+                    <a:p>
+                      <a:pPr algn="l" indent="0" marL="0">
+                        <a:buNone/>
+                      </a:pPr>
+                      <a:r>
+                        <a:rPr lang="en-US" sz="950" b="1" dirty="0">
+                          <a:solidFill>
+                            <a:srgbClr val="1B2433"/>
+                          </a:solidFill>
+                        </a:rPr>
+                        <a:t>Thành phố Huế</a:t>
+                      </a:r>
+                      <a:endParaRPr lang="en-US" sz="950" dirty="0"/>
                     </a:p>
                   </a:txBody>
-                  <a:tcPr marL="54864" marR="54864" marT="36576" marB="36576" anchor="ctr">
+                  <a:tcPr marL="91440" marR="91440" marT="54864" marB="54864" anchor="ctr">
                     <a:lnL w="9525" cap="flat" cmpd="sng" algn="ctr">
                       <a:solidFill>
                         <a:srgbClr val="C9D5E3"/>
@@ -24315,448 +23678,17 @@
                         <a:buNone/>
                       </a:pPr>
                       <a:r>
-                        <a:rPr lang="en-US" sz="750" i="1" dirty="0">
-                          <a:solidFill>
-                            <a:schemeClr val="accent1"/>
-                          </a:solidFill>
-                        </a:rPr>
-                        <a:t>CẦN BỔ SUNG</a:t>
-                      </a:r>
-                      <a:endParaRPr lang="en-US" sz="750" dirty="0"/>
-                    </a:p>
-                  </a:txBody>
-                  <a:tcPr marL="54864" marR="54864" marT="36576" marB="36576" anchor="ctr">
-                    <a:lnL w="9525" cap="flat" cmpd="sng" algn="ctr">
-                      <a:solidFill>
-                        <a:srgbClr val="C9D5E3"/>
-                      </a:solidFill>
-                      <a:prstDash val="solid"/>
-                      <a:round/>
-                      <a:headEnd type="none" w="med" len="med"/>
-                      <a:tailEnd type="none" w="med" len="med"/>
-                    </a:lnL>
-                    <a:lnR w="9525" cap="flat" cmpd="sng" algn="ctr">
-                      <a:solidFill>
-                        <a:srgbClr val="C9D5E3"/>
-                      </a:solidFill>
-                      <a:prstDash val="solid"/>
-                      <a:round/>
-                      <a:headEnd type="none" w="med" len="med"/>
-                      <a:tailEnd type="none" w="med" len="med"/>
-                    </a:lnR>
-                    <a:lnT w="9525" cap="flat" cmpd="sng" algn="ctr">
-                      <a:solidFill>
-                        <a:srgbClr val="C9D5E3"/>
-                      </a:solidFill>
-                      <a:prstDash val="solid"/>
-                      <a:round/>
-                      <a:headEnd type="none" w="med" len="med"/>
-                      <a:tailEnd type="none" w="med" len="med"/>
-                    </a:lnT>
-                    <a:lnB w="9525" cap="flat" cmpd="sng" algn="ctr">
-                      <a:solidFill>
-                        <a:srgbClr val="C9D5E3"/>
-                      </a:solidFill>
-                      <a:prstDash val="solid"/>
-                      <a:round/>
-                      <a:headEnd type="none" w="med" len="med"/>
-                      <a:tailEnd type="none" w="med" len="med"/>
-                    </a:lnB>
-                    <a:solidFill>
-                      <a:srgbClr val="FFFFFF"/>
-                    </a:solidFill>
-                  </a:tcPr>
-                </a:tc>
-              </a:tr>
-              <a:tr h="566928">
-                <a:tc>
-                  <a:txBody>
-                    <a:bodyPr/>
-                    <a:lstStyle/>
-                    <a:p>
-                      <a:pPr algn="ctr" indent="0" marL="0">
-                        <a:buNone/>
-                      </a:pPr>
-                      <a:r>
-                        <a:rPr lang="en-US" sz="850" dirty="0">
+                        <a:rPr lang="en-US" sz="950" dirty="0">
                           <a:solidFill>
                             <a:srgbClr val="1B2433"/>
                           </a:solidFill>
                         </a:rPr>
-                        <a:t>2</a:t>
+                        <a:t>Cụm bơm, bơm định lượng, bồn lọc, khung đỡ, đường ống công nghệ</a:t>
                       </a:r>
-                      <a:endParaRPr lang="en-US" sz="850" dirty="0"/>
+                      <a:endParaRPr lang="en-US" sz="950" dirty="0"/>
                     </a:p>
                   </a:txBody>
-                  <a:tcPr marL="54864" marR="54864" marT="36576" marB="36576" anchor="ctr">
-                    <a:lnL w="9525" cap="flat" cmpd="sng" algn="ctr">
-                      <a:solidFill>
-                        <a:srgbClr val="C9D5E3"/>
-                      </a:solidFill>
-                      <a:prstDash val="solid"/>
-                      <a:round/>
-                      <a:headEnd type="none" w="med" len="med"/>
-                      <a:tailEnd type="none" w="med" len="med"/>
-                    </a:lnL>
-                    <a:lnR w="9525" cap="flat" cmpd="sng" algn="ctr">
-                      <a:solidFill>
-                        <a:srgbClr val="C9D5E3"/>
-                      </a:solidFill>
-                      <a:prstDash val="solid"/>
-                      <a:round/>
-                      <a:headEnd type="none" w="med" len="med"/>
-                      <a:tailEnd type="none" w="med" len="med"/>
-                    </a:lnR>
-                    <a:lnT w="9525" cap="flat" cmpd="sng" algn="ctr">
-                      <a:solidFill>
-                        <a:srgbClr val="C9D5E3"/>
-                      </a:solidFill>
-                      <a:prstDash val="solid"/>
-                      <a:round/>
-                      <a:headEnd type="none" w="med" len="med"/>
-                      <a:tailEnd type="none" w="med" len="med"/>
-                    </a:lnT>
-                    <a:lnB w="9525" cap="flat" cmpd="sng" algn="ctr">
-                      <a:solidFill>
-                        <a:srgbClr val="C9D5E3"/>
-                      </a:solidFill>
-                      <a:prstDash val="solid"/>
-                      <a:round/>
-                      <a:headEnd type="none" w="med" len="med"/>
-                      <a:tailEnd type="none" w="med" len="med"/>
-                    </a:lnB>
-                    <a:solidFill>
-                      <a:srgbClr val="EDF2F8"/>
-                    </a:solidFill>
-                  </a:tcPr>
-                </a:tc>
-                <a:tc>
-                  <a:txBody>
-                    <a:bodyPr/>
-                    <a:lstStyle/>
-                    <a:p>
-                      <a:pPr algn="l" indent="0" marL="0">
-                        <a:buNone/>
-                      </a:pPr>
-                      <a:r>
-                        <a:rPr lang="en-US" sz="850" dirty="0">
-                          <a:solidFill>
-                            <a:srgbClr val="1B2433"/>
-                          </a:solidFill>
-                        </a:rPr>
-                        <a:t>Công trình nhiều tầng – P. Hà Nam, Ninh Bình</a:t>
-                      </a:r>
-                      <a:endParaRPr lang="en-US" sz="850" dirty="0"/>
-                    </a:p>
-                  </a:txBody>
-                  <a:tcPr marL="54864" marR="54864" marT="36576" marB="36576" anchor="ctr">
-                    <a:lnL w="9525" cap="flat" cmpd="sng" algn="ctr">
-                      <a:solidFill>
-                        <a:srgbClr val="C9D5E3"/>
-                      </a:solidFill>
-                      <a:prstDash val="solid"/>
-                      <a:round/>
-                      <a:headEnd type="none" w="med" len="med"/>
-                      <a:tailEnd type="none" w="med" len="med"/>
-                    </a:lnL>
-                    <a:lnR w="9525" cap="flat" cmpd="sng" algn="ctr">
-                      <a:solidFill>
-                        <a:srgbClr val="C9D5E3"/>
-                      </a:solidFill>
-                      <a:prstDash val="solid"/>
-                      <a:round/>
-                      <a:headEnd type="none" w="med" len="med"/>
-                      <a:tailEnd type="none" w="med" len="med"/>
-                    </a:lnR>
-                    <a:lnT w="9525" cap="flat" cmpd="sng" algn="ctr">
-                      <a:solidFill>
-                        <a:srgbClr val="C9D5E3"/>
-                      </a:solidFill>
-                      <a:prstDash val="solid"/>
-                      <a:round/>
-                      <a:headEnd type="none" w="med" len="med"/>
-                      <a:tailEnd type="none" w="med" len="med"/>
-                    </a:lnT>
-                    <a:lnB w="9525" cap="flat" cmpd="sng" algn="ctr">
-                      <a:solidFill>
-                        <a:srgbClr val="C9D5E3"/>
-                      </a:solidFill>
-                      <a:prstDash val="solid"/>
-                      <a:round/>
-                      <a:headEnd type="none" w="med" len="med"/>
-                      <a:tailEnd type="none" w="med" len="med"/>
-                    </a:lnB>
-                    <a:solidFill>
-                      <a:srgbClr val="EDF2F8"/>
-                    </a:solidFill>
-                  </a:tcPr>
-                </a:tc>
-                <a:tc>
-                  <a:txBody>
-                    <a:bodyPr/>
-                    <a:lstStyle/>
-                    <a:p>
-                      <a:pPr algn="l" indent="0" marL="0">
-                        <a:buNone/>
-                      </a:pPr>
-                      <a:r>
-                        <a:rPr lang="en-US" sz="750" i="1" dirty="0">
-                          <a:solidFill>
-                            <a:schemeClr val="accent1"/>
-                          </a:solidFill>
-                        </a:rPr>
-                        <a:t>CẦN BỔ SUNG</a:t>
-                      </a:r>
-                      <a:endParaRPr lang="en-US" sz="750" dirty="0"/>
-                    </a:p>
-                  </a:txBody>
-                  <a:tcPr marL="54864" marR="54864" marT="36576" marB="36576" anchor="ctr">
-                    <a:lnL w="9525" cap="flat" cmpd="sng" algn="ctr">
-                      <a:solidFill>
-                        <a:srgbClr val="C9D5E3"/>
-                      </a:solidFill>
-                      <a:prstDash val="solid"/>
-                      <a:round/>
-                      <a:headEnd type="none" w="med" len="med"/>
-                      <a:tailEnd type="none" w="med" len="med"/>
-                    </a:lnL>
-                    <a:lnR w="9525" cap="flat" cmpd="sng" algn="ctr">
-                      <a:solidFill>
-                        <a:srgbClr val="C9D5E3"/>
-                      </a:solidFill>
-                      <a:prstDash val="solid"/>
-                      <a:round/>
-                      <a:headEnd type="none" w="med" len="med"/>
-                      <a:tailEnd type="none" w="med" len="med"/>
-                    </a:lnR>
-                    <a:lnT w="9525" cap="flat" cmpd="sng" algn="ctr">
-                      <a:solidFill>
-                        <a:srgbClr val="C9D5E3"/>
-                      </a:solidFill>
-                      <a:prstDash val="solid"/>
-                      <a:round/>
-                      <a:headEnd type="none" w="med" len="med"/>
-                      <a:tailEnd type="none" w="med" len="med"/>
-                    </a:lnT>
-                    <a:lnB w="9525" cap="flat" cmpd="sng" algn="ctr">
-                      <a:solidFill>
-                        <a:srgbClr val="C9D5E3"/>
-                      </a:solidFill>
-                      <a:prstDash val="solid"/>
-                      <a:round/>
-                      <a:headEnd type="none" w="med" len="med"/>
-                      <a:tailEnd type="none" w="med" len="med"/>
-                    </a:lnB>
-                    <a:solidFill>
-                      <a:srgbClr val="EDF2F8"/>
-                    </a:solidFill>
-                  </a:tcPr>
-                </a:tc>
-                <a:tc>
-                  <a:txBody>
-                    <a:bodyPr/>
-                    <a:lstStyle/>
-                    <a:p>
-                      <a:pPr algn="l" indent="0" marL="0">
-                        <a:buNone/>
-                      </a:pPr>
-                      <a:r>
-                        <a:rPr lang="en-US" sz="850" dirty="0">
-                          <a:solidFill>
-                            <a:srgbClr val="1B2433"/>
-                          </a:solidFill>
-                        </a:rPr>
-                        <a:t>Điện, cấp thoát nước</a:t>
-                      </a:r>
-                      <a:endParaRPr lang="en-US" sz="850" dirty="0"/>
-                    </a:p>
-                  </a:txBody>
-                  <a:tcPr marL="54864" marR="54864" marT="36576" marB="36576" anchor="ctr">
-                    <a:lnL w="9525" cap="flat" cmpd="sng" algn="ctr">
-                      <a:solidFill>
-                        <a:srgbClr val="C9D5E3"/>
-                      </a:solidFill>
-                      <a:prstDash val="solid"/>
-                      <a:round/>
-                      <a:headEnd type="none" w="med" len="med"/>
-                      <a:tailEnd type="none" w="med" len="med"/>
-                    </a:lnL>
-                    <a:lnR w="9525" cap="flat" cmpd="sng" algn="ctr">
-                      <a:solidFill>
-                        <a:srgbClr val="C9D5E3"/>
-                      </a:solidFill>
-                      <a:prstDash val="solid"/>
-                      <a:round/>
-                      <a:headEnd type="none" w="med" len="med"/>
-                      <a:tailEnd type="none" w="med" len="med"/>
-                    </a:lnR>
-                    <a:lnT w="9525" cap="flat" cmpd="sng" algn="ctr">
-                      <a:solidFill>
-                        <a:srgbClr val="C9D5E3"/>
-                      </a:solidFill>
-                      <a:prstDash val="solid"/>
-                      <a:round/>
-                      <a:headEnd type="none" w="med" len="med"/>
-                      <a:tailEnd type="none" w="med" len="med"/>
-                    </a:lnT>
-                    <a:lnB w="9525" cap="flat" cmpd="sng" algn="ctr">
-                      <a:solidFill>
-                        <a:srgbClr val="C9D5E3"/>
-                      </a:solidFill>
-                      <a:prstDash val="solid"/>
-                      <a:round/>
-                      <a:headEnd type="none" w="med" len="med"/>
-                      <a:tailEnd type="none" w="med" len="med"/>
-                    </a:lnB>
-                    <a:solidFill>
-                      <a:srgbClr val="EDF2F8"/>
-                    </a:solidFill>
-                  </a:tcPr>
-                </a:tc>
-                <a:tc>
-                  <a:txBody>
-                    <a:bodyPr/>
-                    <a:lstStyle/>
-                    <a:p>
-                      <a:pPr algn="l" indent="0" marL="0">
-                        <a:buNone/>
-                      </a:pPr>
-                      <a:r>
-                        <a:rPr lang="en-US" sz="850" dirty="0">
-                          <a:solidFill>
-                            <a:srgbClr val="1B2433"/>
-                          </a:solidFill>
-                        </a:rPr>
-                        <a:t>09/2026</a:t>
-                      </a:r>
-                      <a:endParaRPr lang="en-US" sz="850" dirty="0"/>
-                    </a:p>
-                  </a:txBody>
-                  <a:tcPr marL="54864" marR="54864" marT="36576" marB="36576" anchor="ctr">
-                    <a:lnL w="9525" cap="flat" cmpd="sng" algn="ctr">
-                      <a:solidFill>
-                        <a:srgbClr val="C9D5E3"/>
-                      </a:solidFill>
-                      <a:prstDash val="solid"/>
-                      <a:round/>
-                      <a:headEnd type="none" w="med" len="med"/>
-                      <a:tailEnd type="none" w="med" len="med"/>
-                    </a:lnL>
-                    <a:lnR w="9525" cap="flat" cmpd="sng" algn="ctr">
-                      <a:solidFill>
-                        <a:srgbClr val="C9D5E3"/>
-                      </a:solidFill>
-                      <a:prstDash val="solid"/>
-                      <a:round/>
-                      <a:headEnd type="none" w="med" len="med"/>
-                      <a:tailEnd type="none" w="med" len="med"/>
-                    </a:lnR>
-                    <a:lnT w="9525" cap="flat" cmpd="sng" algn="ctr">
-                      <a:solidFill>
-                        <a:srgbClr val="C9D5E3"/>
-                      </a:solidFill>
-                      <a:prstDash val="solid"/>
-                      <a:round/>
-                      <a:headEnd type="none" w="med" len="med"/>
-                      <a:tailEnd type="none" w="med" len="med"/>
-                    </a:lnT>
-                    <a:lnB w="9525" cap="flat" cmpd="sng" algn="ctr">
-                      <a:solidFill>
-                        <a:srgbClr val="C9D5E3"/>
-                      </a:solidFill>
-                      <a:prstDash val="solid"/>
-                      <a:round/>
-                      <a:headEnd type="none" w="med" len="med"/>
-                      <a:tailEnd type="none" w="med" len="med"/>
-                    </a:lnB>
-                    <a:solidFill>
-                      <a:srgbClr val="EDF2F8"/>
-                    </a:solidFill>
-                  </a:tcPr>
-                </a:tc>
-                <a:tc>
-                  <a:txBody>
-                    <a:bodyPr/>
-                    <a:lstStyle/>
-                    <a:p>
-                      <a:pPr algn="l" indent="0" marL="0">
-                        <a:buNone/>
-                      </a:pPr>
-                      <a:r>
-                        <a:rPr lang="en-US" sz="750" i="1" dirty="0">
-                          <a:solidFill>
-                            <a:schemeClr val="accent1"/>
-                          </a:solidFill>
-                        </a:rPr>
-                        <a:t>CẦN BỔ SUNG</a:t>
-                      </a:r>
-                      <a:endParaRPr lang="en-US" sz="750" dirty="0"/>
-                    </a:p>
-                  </a:txBody>
-                  <a:tcPr marL="54864" marR="54864" marT="36576" marB="36576" anchor="ctr">
-                    <a:lnL w="9525" cap="flat" cmpd="sng" algn="ctr">
-                      <a:solidFill>
-                        <a:srgbClr val="C9D5E3"/>
-                      </a:solidFill>
-                      <a:prstDash val="solid"/>
-                      <a:round/>
-                      <a:headEnd type="none" w="med" len="med"/>
-                      <a:tailEnd type="none" w="med" len="med"/>
-                    </a:lnL>
-                    <a:lnR w="9525" cap="flat" cmpd="sng" algn="ctr">
-                      <a:solidFill>
-                        <a:srgbClr val="C9D5E3"/>
-                      </a:solidFill>
-                      <a:prstDash val="solid"/>
-                      <a:round/>
-                      <a:headEnd type="none" w="med" len="med"/>
-                      <a:tailEnd type="none" w="med" len="med"/>
-                    </a:lnR>
-                    <a:lnT w="9525" cap="flat" cmpd="sng" algn="ctr">
-                      <a:solidFill>
-                        <a:srgbClr val="C9D5E3"/>
-                      </a:solidFill>
-                      <a:prstDash val="solid"/>
-                      <a:round/>
-                      <a:headEnd type="none" w="med" len="med"/>
-                      <a:tailEnd type="none" w="med" len="med"/>
-                    </a:lnT>
-                    <a:lnB w="9525" cap="flat" cmpd="sng" algn="ctr">
-                      <a:solidFill>
-                        <a:srgbClr val="C9D5E3"/>
-                      </a:solidFill>
-                      <a:prstDash val="solid"/>
-                      <a:round/>
-                      <a:headEnd type="none" w="med" len="med"/>
-                      <a:tailEnd type="none" w="med" len="med"/>
-                    </a:lnB>
-                    <a:solidFill>
-                      <a:srgbClr val="EDF2F8"/>
-                    </a:solidFill>
-                  </a:tcPr>
-                </a:tc>
-              </a:tr>
-              <a:tr h="566928">
-                <a:tc>
-                  <a:txBody>
-                    <a:bodyPr/>
-                    <a:lstStyle/>
-                    <a:p>
-                      <a:pPr algn="ctr" indent="0" marL="0">
-                        <a:buNone/>
-                      </a:pPr>
-                      <a:r>
-                        <a:rPr lang="en-US" sz="850" dirty="0">
-                          <a:solidFill>
-                            <a:srgbClr val="1B2433"/>
-                          </a:solidFill>
-                        </a:rPr>
-                        <a:t>3</a:t>
-                      </a:r>
-                      <a:endParaRPr lang="en-US" sz="850" dirty="0"/>
-                    </a:p>
-                  </a:txBody>
-                  <a:tcPr marL="54864" marR="54864" marT="36576" marB="36576" anchor="ctr">
+                  <a:tcPr marL="91440" marR="91440" marT="54864" marB="54864" anchor="ctr">
                     <a:lnL w="9525" cap="flat" cmpd="sng" algn="ctr">
                       <a:solidFill>
                         <a:srgbClr val="C9D5E3"/>
@@ -24807,200 +23739,17 @@
                         <a:buNone/>
                       </a:pPr>
                       <a:r>
-                        <a:rPr lang="en-US" sz="850" dirty="0">
-                          <a:solidFill>
-                            <a:srgbClr val="1B2433"/>
-                          </a:solidFill>
-                        </a:rPr>
-                        <a:t>Trạm xử lý nước – TP. Huế</a:t>
-                      </a:r>
-                      <a:endParaRPr lang="en-US" sz="850" dirty="0"/>
-                    </a:p>
-                  </a:txBody>
-                  <a:tcPr marL="54864" marR="54864" marT="36576" marB="36576" anchor="ctr">
-                    <a:lnL w="9525" cap="flat" cmpd="sng" algn="ctr">
-                      <a:solidFill>
-                        <a:srgbClr val="C9D5E3"/>
-                      </a:solidFill>
-                      <a:prstDash val="solid"/>
-                      <a:round/>
-                      <a:headEnd type="none" w="med" len="med"/>
-                      <a:tailEnd type="none" w="med" len="med"/>
-                    </a:lnL>
-                    <a:lnR w="9525" cap="flat" cmpd="sng" algn="ctr">
-                      <a:solidFill>
-                        <a:srgbClr val="C9D5E3"/>
-                      </a:solidFill>
-                      <a:prstDash val="solid"/>
-                      <a:round/>
-                      <a:headEnd type="none" w="med" len="med"/>
-                      <a:tailEnd type="none" w="med" len="med"/>
-                    </a:lnR>
-                    <a:lnT w="9525" cap="flat" cmpd="sng" algn="ctr">
-                      <a:solidFill>
-                        <a:srgbClr val="C9D5E3"/>
-                      </a:solidFill>
-                      <a:prstDash val="solid"/>
-                      <a:round/>
-                      <a:headEnd type="none" w="med" len="med"/>
-                      <a:tailEnd type="none" w="med" len="med"/>
-                    </a:lnT>
-                    <a:lnB w="9525" cap="flat" cmpd="sng" algn="ctr">
-                      <a:solidFill>
-                        <a:srgbClr val="C9D5E3"/>
-                      </a:solidFill>
-                      <a:prstDash val="solid"/>
-                      <a:round/>
-                      <a:headEnd type="none" w="med" len="med"/>
-                      <a:tailEnd type="none" w="med" len="med"/>
-                    </a:lnB>
-                    <a:solidFill>
-                      <a:srgbClr val="FFFFFF"/>
-                    </a:solidFill>
-                  </a:tcPr>
-                </a:tc>
-                <a:tc>
-                  <a:txBody>
-                    <a:bodyPr/>
-                    <a:lstStyle/>
-                    <a:p>
-                      <a:pPr algn="l" indent="0" marL="0">
-                        <a:buNone/>
-                      </a:pPr>
-                      <a:r>
-                        <a:rPr lang="en-US" sz="750" i="1" dirty="0">
-                          <a:solidFill>
-                            <a:schemeClr val="accent1"/>
-                          </a:solidFill>
-                        </a:rPr>
-                        <a:t>CẦN BỔ SUNG</a:t>
-                      </a:r>
-                      <a:endParaRPr lang="en-US" sz="750" dirty="0"/>
-                    </a:p>
-                  </a:txBody>
-                  <a:tcPr marL="54864" marR="54864" marT="36576" marB="36576" anchor="ctr">
-                    <a:lnL w="9525" cap="flat" cmpd="sng" algn="ctr">
-                      <a:solidFill>
-                        <a:srgbClr val="C9D5E3"/>
-                      </a:solidFill>
-                      <a:prstDash val="solid"/>
-                      <a:round/>
-                      <a:headEnd type="none" w="med" len="med"/>
-                      <a:tailEnd type="none" w="med" len="med"/>
-                    </a:lnL>
-                    <a:lnR w="9525" cap="flat" cmpd="sng" algn="ctr">
-                      <a:solidFill>
-                        <a:srgbClr val="C9D5E3"/>
-                      </a:solidFill>
-                      <a:prstDash val="solid"/>
-                      <a:round/>
-                      <a:headEnd type="none" w="med" len="med"/>
-                      <a:tailEnd type="none" w="med" len="med"/>
-                    </a:lnR>
-                    <a:lnT w="9525" cap="flat" cmpd="sng" algn="ctr">
-                      <a:solidFill>
-                        <a:srgbClr val="C9D5E3"/>
-                      </a:solidFill>
-                      <a:prstDash val="solid"/>
-                      <a:round/>
-                      <a:headEnd type="none" w="med" len="med"/>
-                      <a:tailEnd type="none" w="med" len="med"/>
-                    </a:lnT>
-                    <a:lnB w="9525" cap="flat" cmpd="sng" algn="ctr">
-                      <a:solidFill>
-                        <a:srgbClr val="C9D5E3"/>
-                      </a:solidFill>
-                      <a:prstDash val="solid"/>
-                      <a:round/>
-                      <a:headEnd type="none" w="med" len="med"/>
-                      <a:tailEnd type="none" w="med" len="med"/>
-                    </a:lnB>
-                    <a:solidFill>
-                      <a:srgbClr val="FFFFFF"/>
-                    </a:solidFill>
-                  </a:tcPr>
-                </a:tc>
-                <a:tc>
-                  <a:txBody>
-                    <a:bodyPr/>
-                    <a:lstStyle/>
-                    <a:p>
-                      <a:pPr algn="l" indent="0" marL="0">
-                        <a:buNone/>
-                      </a:pPr>
-                      <a:r>
-                        <a:rPr lang="en-US" sz="850" dirty="0">
-                          <a:solidFill>
-                            <a:srgbClr val="1B2433"/>
-                          </a:solidFill>
-                        </a:rPr>
-                        <a:t>Bơm, bơm định lượng, bồn lọc, khung đỡ, đường ống</a:t>
-                      </a:r>
-                      <a:endParaRPr lang="en-US" sz="850" dirty="0"/>
-                    </a:p>
-                  </a:txBody>
-                  <a:tcPr marL="54864" marR="54864" marT="36576" marB="36576" anchor="ctr">
-                    <a:lnL w="9525" cap="flat" cmpd="sng" algn="ctr">
-                      <a:solidFill>
-                        <a:srgbClr val="C9D5E3"/>
-                      </a:solidFill>
-                      <a:prstDash val="solid"/>
-                      <a:round/>
-                      <a:headEnd type="none" w="med" len="med"/>
-                      <a:tailEnd type="none" w="med" len="med"/>
-                    </a:lnL>
-                    <a:lnR w="9525" cap="flat" cmpd="sng" algn="ctr">
-                      <a:solidFill>
-                        <a:srgbClr val="C9D5E3"/>
-                      </a:solidFill>
-                      <a:prstDash val="solid"/>
-                      <a:round/>
-                      <a:headEnd type="none" w="med" len="med"/>
-                      <a:tailEnd type="none" w="med" len="med"/>
-                    </a:lnR>
-                    <a:lnT w="9525" cap="flat" cmpd="sng" algn="ctr">
-                      <a:solidFill>
-                        <a:srgbClr val="C9D5E3"/>
-                      </a:solidFill>
-                      <a:prstDash val="solid"/>
-                      <a:round/>
-                      <a:headEnd type="none" w="med" len="med"/>
-                      <a:tailEnd type="none" w="med" len="med"/>
-                    </a:lnT>
-                    <a:lnB w="9525" cap="flat" cmpd="sng" algn="ctr">
-                      <a:solidFill>
-                        <a:srgbClr val="C9D5E3"/>
-                      </a:solidFill>
-                      <a:prstDash val="solid"/>
-                      <a:round/>
-                      <a:headEnd type="none" w="med" len="med"/>
-                      <a:tailEnd type="none" w="med" len="med"/>
-                    </a:lnB>
-                    <a:solidFill>
-                      <a:srgbClr val="FFFFFF"/>
-                    </a:solidFill>
-                  </a:tcPr>
-                </a:tc>
-                <a:tc>
-                  <a:txBody>
-                    <a:bodyPr/>
-                    <a:lstStyle/>
-                    <a:p>
-                      <a:pPr algn="l" indent="0" marL="0">
-                        <a:buNone/>
-                      </a:pPr>
-                      <a:r>
-                        <a:rPr lang="en-US" sz="850" dirty="0">
+                        <a:rPr lang="en-US" sz="950" dirty="0">
                           <a:solidFill>
                             <a:srgbClr val="1B2433"/>
                           </a:solidFill>
                         </a:rPr>
                         <a:t>09/2026</a:t>
                       </a:r>
-                      <a:endParaRPr lang="en-US" sz="850" dirty="0"/>
+                      <a:endParaRPr lang="en-US" sz="950" dirty="0"/>
                     </a:p>
                   </a:txBody>
-                  <a:tcPr marL="54864" marR="54864" marT="36576" marB="36576" anchor="ctr">
+                  <a:tcPr marL="91440" marR="91440" marT="54864" marB="54864" anchor="ctr">
                     <a:lnL w="9525" cap="flat" cmpd="sng" algn="ctr">
                       <a:solidFill>
                         <a:srgbClr val="C9D5E3"/>
@@ -25039,2363 +23788,6 @@
                     </a:lnB>
                     <a:solidFill>
                       <a:srgbClr val="FFFFFF"/>
-                    </a:solidFill>
-                  </a:tcPr>
-                </a:tc>
-                <a:tc>
-                  <a:txBody>
-                    <a:bodyPr/>
-                    <a:lstStyle/>
-                    <a:p>
-                      <a:pPr algn="l" indent="0" marL="0">
-                        <a:buNone/>
-                      </a:pPr>
-                      <a:r>
-                        <a:rPr lang="en-US" sz="750" i="1" dirty="0">
-                          <a:solidFill>
-                            <a:schemeClr val="accent1"/>
-                          </a:solidFill>
-                        </a:rPr>
-                        <a:t>CẦN BỔ SUNG</a:t>
-                      </a:r>
-                      <a:endParaRPr lang="en-US" sz="750" dirty="0"/>
-                    </a:p>
-                  </a:txBody>
-                  <a:tcPr marL="54864" marR="54864" marT="36576" marB="36576" anchor="ctr">
-                    <a:lnL w="9525" cap="flat" cmpd="sng" algn="ctr">
-                      <a:solidFill>
-                        <a:srgbClr val="C9D5E3"/>
-                      </a:solidFill>
-                      <a:prstDash val="solid"/>
-                      <a:round/>
-                      <a:headEnd type="none" w="med" len="med"/>
-                      <a:tailEnd type="none" w="med" len="med"/>
-                    </a:lnL>
-                    <a:lnR w="9525" cap="flat" cmpd="sng" algn="ctr">
-                      <a:solidFill>
-                        <a:srgbClr val="C9D5E3"/>
-                      </a:solidFill>
-                      <a:prstDash val="solid"/>
-                      <a:round/>
-                      <a:headEnd type="none" w="med" len="med"/>
-                      <a:tailEnd type="none" w="med" len="med"/>
-                    </a:lnR>
-                    <a:lnT w="9525" cap="flat" cmpd="sng" algn="ctr">
-                      <a:solidFill>
-                        <a:srgbClr val="C9D5E3"/>
-                      </a:solidFill>
-                      <a:prstDash val="solid"/>
-                      <a:round/>
-                      <a:headEnd type="none" w="med" len="med"/>
-                      <a:tailEnd type="none" w="med" len="med"/>
-                    </a:lnT>
-                    <a:lnB w="9525" cap="flat" cmpd="sng" algn="ctr">
-                      <a:solidFill>
-                        <a:srgbClr val="C9D5E3"/>
-                      </a:solidFill>
-                      <a:prstDash val="solid"/>
-                      <a:round/>
-                      <a:headEnd type="none" w="med" len="med"/>
-                      <a:tailEnd type="none" w="med" len="med"/>
-                    </a:lnB>
-                    <a:solidFill>
-                      <a:srgbClr val="FFFFFF"/>
-                    </a:solidFill>
-                  </a:tcPr>
-                </a:tc>
-              </a:tr>
-              <a:tr h="566928">
-                <a:tc>
-                  <a:txBody>
-                    <a:bodyPr/>
-                    <a:lstStyle/>
-                    <a:p>
-                      <a:pPr algn="ctr" indent="0" marL="0">
-                        <a:buNone/>
-                      </a:pPr>
-                      <a:r>
-                        <a:rPr lang="en-US" sz="850" dirty="0">
-                          <a:solidFill>
-                            <a:srgbClr val="1B2433"/>
-                          </a:solidFill>
-                        </a:rPr>
-                        <a:t>4</a:t>
-                      </a:r>
-                      <a:endParaRPr lang="en-US" sz="850" dirty="0"/>
-                    </a:p>
-                  </a:txBody>
-                  <a:tcPr marL="54864" marR="54864" marT="36576" marB="36576" anchor="ctr">
-                    <a:lnL w="9525" cap="flat" cmpd="sng" algn="ctr">
-                      <a:solidFill>
-                        <a:srgbClr val="C9D5E3"/>
-                      </a:solidFill>
-                      <a:prstDash val="solid"/>
-                      <a:round/>
-                      <a:headEnd type="none" w="med" len="med"/>
-                      <a:tailEnd type="none" w="med" len="med"/>
-                    </a:lnL>
-                    <a:lnR w="9525" cap="flat" cmpd="sng" algn="ctr">
-                      <a:solidFill>
-                        <a:srgbClr val="C9D5E3"/>
-                      </a:solidFill>
-                      <a:prstDash val="solid"/>
-                      <a:round/>
-                      <a:headEnd type="none" w="med" len="med"/>
-                      <a:tailEnd type="none" w="med" len="med"/>
-                    </a:lnR>
-                    <a:lnT w="9525" cap="flat" cmpd="sng" algn="ctr">
-                      <a:solidFill>
-                        <a:srgbClr val="C9D5E3"/>
-                      </a:solidFill>
-                      <a:prstDash val="solid"/>
-                      <a:round/>
-                      <a:headEnd type="none" w="med" len="med"/>
-                      <a:tailEnd type="none" w="med" len="med"/>
-                    </a:lnT>
-                    <a:lnB w="9525" cap="flat" cmpd="sng" algn="ctr">
-                      <a:solidFill>
-                        <a:srgbClr val="C9D5E3"/>
-                      </a:solidFill>
-                      <a:prstDash val="solid"/>
-                      <a:round/>
-                      <a:headEnd type="none" w="med" len="med"/>
-                      <a:tailEnd type="none" w="med" len="med"/>
-                    </a:lnB>
-                    <a:solidFill>
-                      <a:srgbClr val="EDF2F8"/>
-                    </a:solidFill>
-                  </a:tcPr>
-                </a:tc>
-                <a:tc>
-                  <a:txBody>
-                    <a:bodyPr/>
-                    <a:lstStyle/>
-                    <a:p>
-                      <a:pPr algn="l" indent="0" marL="0">
-                        <a:buNone/>
-                      </a:pPr>
-                      <a:endParaRPr lang="en-US" sz="850" dirty="0"/>
-                    </a:p>
-                  </a:txBody>
-                  <a:tcPr marL="54864" marR="54864" marT="36576" marB="36576" anchor="ctr">
-                    <a:lnL w="9525" cap="flat" cmpd="sng" algn="ctr">
-                      <a:solidFill>
-                        <a:srgbClr val="C9D5E3"/>
-                      </a:solidFill>
-                      <a:prstDash val="solid"/>
-                      <a:round/>
-                      <a:headEnd type="none" w="med" len="med"/>
-                      <a:tailEnd type="none" w="med" len="med"/>
-                    </a:lnL>
-                    <a:lnR w="9525" cap="flat" cmpd="sng" algn="ctr">
-                      <a:solidFill>
-                        <a:srgbClr val="C9D5E3"/>
-                      </a:solidFill>
-                      <a:prstDash val="solid"/>
-                      <a:round/>
-                      <a:headEnd type="none" w="med" len="med"/>
-                      <a:tailEnd type="none" w="med" len="med"/>
-                    </a:lnR>
-                    <a:lnT w="9525" cap="flat" cmpd="sng" algn="ctr">
-                      <a:solidFill>
-                        <a:srgbClr val="C9D5E3"/>
-                      </a:solidFill>
-                      <a:prstDash val="solid"/>
-                      <a:round/>
-                      <a:headEnd type="none" w="med" len="med"/>
-                      <a:tailEnd type="none" w="med" len="med"/>
-                    </a:lnT>
-                    <a:lnB w="9525" cap="flat" cmpd="sng" algn="ctr">
-                      <a:solidFill>
-                        <a:srgbClr val="C9D5E3"/>
-                      </a:solidFill>
-                      <a:prstDash val="solid"/>
-                      <a:round/>
-                      <a:headEnd type="none" w="med" len="med"/>
-                      <a:tailEnd type="none" w="med" len="med"/>
-                    </a:lnB>
-                    <a:solidFill>
-                      <a:srgbClr val="EDF2F8"/>
-                    </a:solidFill>
-                  </a:tcPr>
-                </a:tc>
-                <a:tc>
-                  <a:txBody>
-                    <a:bodyPr/>
-                    <a:lstStyle/>
-                    <a:p>
-                      <a:pPr algn="l" indent="0" marL="0">
-                        <a:buNone/>
-                      </a:pPr>
-                      <a:endParaRPr lang="en-US" sz="850" dirty="0"/>
-                    </a:p>
-                  </a:txBody>
-                  <a:tcPr marL="54864" marR="54864" marT="36576" marB="36576" anchor="ctr">
-                    <a:lnL w="9525" cap="flat" cmpd="sng" algn="ctr">
-                      <a:solidFill>
-                        <a:srgbClr val="C9D5E3"/>
-                      </a:solidFill>
-                      <a:prstDash val="solid"/>
-                      <a:round/>
-                      <a:headEnd type="none" w="med" len="med"/>
-                      <a:tailEnd type="none" w="med" len="med"/>
-                    </a:lnL>
-                    <a:lnR w="9525" cap="flat" cmpd="sng" algn="ctr">
-                      <a:solidFill>
-                        <a:srgbClr val="C9D5E3"/>
-                      </a:solidFill>
-                      <a:prstDash val="solid"/>
-                      <a:round/>
-                      <a:headEnd type="none" w="med" len="med"/>
-                      <a:tailEnd type="none" w="med" len="med"/>
-                    </a:lnR>
-                    <a:lnT w="9525" cap="flat" cmpd="sng" algn="ctr">
-                      <a:solidFill>
-                        <a:srgbClr val="C9D5E3"/>
-                      </a:solidFill>
-                      <a:prstDash val="solid"/>
-                      <a:round/>
-                      <a:headEnd type="none" w="med" len="med"/>
-                      <a:tailEnd type="none" w="med" len="med"/>
-                    </a:lnT>
-                    <a:lnB w="9525" cap="flat" cmpd="sng" algn="ctr">
-                      <a:solidFill>
-                        <a:srgbClr val="C9D5E3"/>
-                      </a:solidFill>
-                      <a:prstDash val="solid"/>
-                      <a:round/>
-                      <a:headEnd type="none" w="med" len="med"/>
-                      <a:tailEnd type="none" w="med" len="med"/>
-                    </a:lnB>
-                    <a:solidFill>
-                      <a:srgbClr val="EDF2F8"/>
-                    </a:solidFill>
-                  </a:tcPr>
-                </a:tc>
-                <a:tc>
-                  <a:txBody>
-                    <a:bodyPr/>
-                    <a:lstStyle/>
-                    <a:p>
-                      <a:pPr algn="l" indent="0" marL="0">
-                        <a:buNone/>
-                      </a:pPr>
-                      <a:endParaRPr lang="en-US" sz="850" dirty="0"/>
-                    </a:p>
-                  </a:txBody>
-                  <a:tcPr marL="54864" marR="54864" marT="36576" marB="36576" anchor="ctr">
-                    <a:lnL w="9525" cap="flat" cmpd="sng" algn="ctr">
-                      <a:solidFill>
-                        <a:srgbClr val="C9D5E3"/>
-                      </a:solidFill>
-                      <a:prstDash val="solid"/>
-                      <a:round/>
-                      <a:headEnd type="none" w="med" len="med"/>
-                      <a:tailEnd type="none" w="med" len="med"/>
-                    </a:lnL>
-                    <a:lnR w="9525" cap="flat" cmpd="sng" algn="ctr">
-                      <a:solidFill>
-                        <a:srgbClr val="C9D5E3"/>
-                      </a:solidFill>
-                      <a:prstDash val="solid"/>
-                      <a:round/>
-                      <a:headEnd type="none" w="med" len="med"/>
-                      <a:tailEnd type="none" w="med" len="med"/>
-                    </a:lnR>
-                    <a:lnT w="9525" cap="flat" cmpd="sng" algn="ctr">
-                      <a:solidFill>
-                        <a:srgbClr val="C9D5E3"/>
-                      </a:solidFill>
-                      <a:prstDash val="solid"/>
-                      <a:round/>
-                      <a:headEnd type="none" w="med" len="med"/>
-                      <a:tailEnd type="none" w="med" len="med"/>
-                    </a:lnT>
-                    <a:lnB w="9525" cap="flat" cmpd="sng" algn="ctr">
-                      <a:solidFill>
-                        <a:srgbClr val="C9D5E3"/>
-                      </a:solidFill>
-                      <a:prstDash val="solid"/>
-                      <a:round/>
-                      <a:headEnd type="none" w="med" len="med"/>
-                      <a:tailEnd type="none" w="med" len="med"/>
-                    </a:lnB>
-                    <a:solidFill>
-                      <a:srgbClr val="EDF2F8"/>
-                    </a:solidFill>
-                  </a:tcPr>
-                </a:tc>
-                <a:tc>
-                  <a:txBody>
-                    <a:bodyPr/>
-                    <a:lstStyle/>
-                    <a:p>
-                      <a:pPr algn="l" indent="0" marL="0">
-                        <a:buNone/>
-                      </a:pPr>
-                      <a:endParaRPr lang="en-US" sz="850" dirty="0"/>
-                    </a:p>
-                  </a:txBody>
-                  <a:tcPr marL="54864" marR="54864" marT="36576" marB="36576" anchor="ctr">
-                    <a:lnL w="9525" cap="flat" cmpd="sng" algn="ctr">
-                      <a:solidFill>
-                        <a:srgbClr val="C9D5E3"/>
-                      </a:solidFill>
-                      <a:prstDash val="solid"/>
-                      <a:round/>
-                      <a:headEnd type="none" w="med" len="med"/>
-                      <a:tailEnd type="none" w="med" len="med"/>
-                    </a:lnL>
-                    <a:lnR w="9525" cap="flat" cmpd="sng" algn="ctr">
-                      <a:solidFill>
-                        <a:srgbClr val="C9D5E3"/>
-                      </a:solidFill>
-                      <a:prstDash val="solid"/>
-                      <a:round/>
-                      <a:headEnd type="none" w="med" len="med"/>
-                      <a:tailEnd type="none" w="med" len="med"/>
-                    </a:lnR>
-                    <a:lnT w="9525" cap="flat" cmpd="sng" algn="ctr">
-                      <a:solidFill>
-                        <a:srgbClr val="C9D5E3"/>
-                      </a:solidFill>
-                      <a:prstDash val="solid"/>
-                      <a:round/>
-                      <a:headEnd type="none" w="med" len="med"/>
-                      <a:tailEnd type="none" w="med" len="med"/>
-                    </a:lnT>
-                    <a:lnB w="9525" cap="flat" cmpd="sng" algn="ctr">
-                      <a:solidFill>
-                        <a:srgbClr val="C9D5E3"/>
-                      </a:solidFill>
-                      <a:prstDash val="solid"/>
-                      <a:round/>
-                      <a:headEnd type="none" w="med" len="med"/>
-                      <a:tailEnd type="none" w="med" len="med"/>
-                    </a:lnB>
-                    <a:solidFill>
-                      <a:srgbClr val="EDF2F8"/>
-                    </a:solidFill>
-                  </a:tcPr>
-                </a:tc>
-                <a:tc>
-                  <a:txBody>
-                    <a:bodyPr/>
-                    <a:lstStyle/>
-                    <a:p>
-                      <a:pPr algn="l" indent="0" marL="0">
-                        <a:buNone/>
-                      </a:pPr>
-                      <a:endParaRPr lang="en-US" sz="850" dirty="0"/>
-                    </a:p>
-                  </a:txBody>
-                  <a:tcPr marL="54864" marR="54864" marT="36576" marB="36576" anchor="ctr">
-                    <a:lnL w="9525" cap="flat" cmpd="sng" algn="ctr">
-                      <a:solidFill>
-                        <a:srgbClr val="C9D5E3"/>
-                      </a:solidFill>
-                      <a:prstDash val="solid"/>
-                      <a:round/>
-                      <a:headEnd type="none" w="med" len="med"/>
-                      <a:tailEnd type="none" w="med" len="med"/>
-                    </a:lnL>
-                    <a:lnR w="9525" cap="flat" cmpd="sng" algn="ctr">
-                      <a:solidFill>
-                        <a:srgbClr val="C9D5E3"/>
-                      </a:solidFill>
-                      <a:prstDash val="solid"/>
-                      <a:round/>
-                      <a:headEnd type="none" w="med" len="med"/>
-                      <a:tailEnd type="none" w="med" len="med"/>
-                    </a:lnR>
-                    <a:lnT w="9525" cap="flat" cmpd="sng" algn="ctr">
-                      <a:solidFill>
-                        <a:srgbClr val="C9D5E3"/>
-                      </a:solidFill>
-                      <a:prstDash val="solid"/>
-                      <a:round/>
-                      <a:headEnd type="none" w="med" len="med"/>
-                      <a:tailEnd type="none" w="med" len="med"/>
-                    </a:lnT>
-                    <a:lnB w="9525" cap="flat" cmpd="sng" algn="ctr">
-                      <a:solidFill>
-                        <a:srgbClr val="C9D5E3"/>
-                      </a:solidFill>
-                      <a:prstDash val="solid"/>
-                      <a:round/>
-                      <a:headEnd type="none" w="med" len="med"/>
-                      <a:tailEnd type="none" w="med" len="med"/>
-                    </a:lnB>
-                    <a:solidFill>
-                      <a:srgbClr val="EDF2F8"/>
-                    </a:solidFill>
-                  </a:tcPr>
-                </a:tc>
-              </a:tr>
-              <a:tr h="566928">
-                <a:tc>
-                  <a:txBody>
-                    <a:bodyPr/>
-                    <a:lstStyle/>
-                    <a:p>
-                      <a:pPr algn="ctr" indent="0" marL="0">
-                        <a:buNone/>
-                      </a:pPr>
-                      <a:r>
-                        <a:rPr lang="en-US" sz="850" dirty="0">
-                          <a:solidFill>
-                            <a:srgbClr val="1B2433"/>
-                          </a:solidFill>
-                        </a:rPr>
-                        <a:t>5</a:t>
-                      </a:r>
-                      <a:endParaRPr lang="en-US" sz="850" dirty="0"/>
-                    </a:p>
-                  </a:txBody>
-                  <a:tcPr marL="54864" marR="54864" marT="36576" marB="36576" anchor="ctr">
-                    <a:lnL w="9525" cap="flat" cmpd="sng" algn="ctr">
-                      <a:solidFill>
-                        <a:srgbClr val="C9D5E3"/>
-                      </a:solidFill>
-                      <a:prstDash val="solid"/>
-                      <a:round/>
-                      <a:headEnd type="none" w="med" len="med"/>
-                      <a:tailEnd type="none" w="med" len="med"/>
-                    </a:lnL>
-                    <a:lnR w="9525" cap="flat" cmpd="sng" algn="ctr">
-                      <a:solidFill>
-                        <a:srgbClr val="C9D5E3"/>
-                      </a:solidFill>
-                      <a:prstDash val="solid"/>
-                      <a:round/>
-                      <a:headEnd type="none" w="med" len="med"/>
-                      <a:tailEnd type="none" w="med" len="med"/>
-                    </a:lnR>
-                    <a:lnT w="9525" cap="flat" cmpd="sng" algn="ctr">
-                      <a:solidFill>
-                        <a:srgbClr val="C9D5E3"/>
-                      </a:solidFill>
-                      <a:prstDash val="solid"/>
-                      <a:round/>
-                      <a:headEnd type="none" w="med" len="med"/>
-                      <a:tailEnd type="none" w="med" len="med"/>
-                    </a:lnT>
-                    <a:lnB w="9525" cap="flat" cmpd="sng" algn="ctr">
-                      <a:solidFill>
-                        <a:srgbClr val="C9D5E3"/>
-                      </a:solidFill>
-                      <a:prstDash val="solid"/>
-                      <a:round/>
-                      <a:headEnd type="none" w="med" len="med"/>
-                      <a:tailEnd type="none" w="med" len="med"/>
-                    </a:lnB>
-                    <a:solidFill>
-                      <a:srgbClr val="FFFFFF"/>
-                    </a:solidFill>
-                  </a:tcPr>
-                </a:tc>
-                <a:tc>
-                  <a:txBody>
-                    <a:bodyPr/>
-                    <a:lstStyle/>
-                    <a:p>
-                      <a:pPr algn="l" indent="0" marL="0">
-                        <a:buNone/>
-                      </a:pPr>
-                      <a:endParaRPr lang="en-US" sz="850" dirty="0"/>
-                    </a:p>
-                  </a:txBody>
-                  <a:tcPr marL="54864" marR="54864" marT="36576" marB="36576" anchor="ctr">
-                    <a:lnL w="9525" cap="flat" cmpd="sng" algn="ctr">
-                      <a:solidFill>
-                        <a:srgbClr val="C9D5E3"/>
-                      </a:solidFill>
-                      <a:prstDash val="solid"/>
-                      <a:round/>
-                      <a:headEnd type="none" w="med" len="med"/>
-                      <a:tailEnd type="none" w="med" len="med"/>
-                    </a:lnL>
-                    <a:lnR w="9525" cap="flat" cmpd="sng" algn="ctr">
-                      <a:solidFill>
-                        <a:srgbClr val="C9D5E3"/>
-                      </a:solidFill>
-                      <a:prstDash val="solid"/>
-                      <a:round/>
-                      <a:headEnd type="none" w="med" len="med"/>
-                      <a:tailEnd type="none" w="med" len="med"/>
-                    </a:lnR>
-                    <a:lnT w="9525" cap="flat" cmpd="sng" algn="ctr">
-                      <a:solidFill>
-                        <a:srgbClr val="C9D5E3"/>
-                      </a:solidFill>
-                      <a:prstDash val="solid"/>
-                      <a:round/>
-                      <a:headEnd type="none" w="med" len="med"/>
-                      <a:tailEnd type="none" w="med" len="med"/>
-                    </a:lnT>
-                    <a:lnB w="9525" cap="flat" cmpd="sng" algn="ctr">
-                      <a:solidFill>
-                        <a:srgbClr val="C9D5E3"/>
-                      </a:solidFill>
-                      <a:prstDash val="solid"/>
-                      <a:round/>
-                      <a:headEnd type="none" w="med" len="med"/>
-                      <a:tailEnd type="none" w="med" len="med"/>
-                    </a:lnB>
-                    <a:solidFill>
-                      <a:srgbClr val="FFFFFF"/>
-                    </a:solidFill>
-                  </a:tcPr>
-                </a:tc>
-                <a:tc>
-                  <a:txBody>
-                    <a:bodyPr/>
-                    <a:lstStyle/>
-                    <a:p>
-                      <a:pPr algn="l" indent="0" marL="0">
-                        <a:buNone/>
-                      </a:pPr>
-                      <a:endParaRPr lang="en-US" sz="850" dirty="0"/>
-                    </a:p>
-                  </a:txBody>
-                  <a:tcPr marL="54864" marR="54864" marT="36576" marB="36576" anchor="ctr">
-                    <a:lnL w="9525" cap="flat" cmpd="sng" algn="ctr">
-                      <a:solidFill>
-                        <a:srgbClr val="C9D5E3"/>
-                      </a:solidFill>
-                      <a:prstDash val="solid"/>
-                      <a:round/>
-                      <a:headEnd type="none" w="med" len="med"/>
-                      <a:tailEnd type="none" w="med" len="med"/>
-                    </a:lnL>
-                    <a:lnR w="9525" cap="flat" cmpd="sng" algn="ctr">
-                      <a:solidFill>
-                        <a:srgbClr val="C9D5E3"/>
-                      </a:solidFill>
-                      <a:prstDash val="solid"/>
-                      <a:round/>
-                      <a:headEnd type="none" w="med" len="med"/>
-                      <a:tailEnd type="none" w="med" len="med"/>
-                    </a:lnR>
-                    <a:lnT w="9525" cap="flat" cmpd="sng" algn="ctr">
-                      <a:solidFill>
-                        <a:srgbClr val="C9D5E3"/>
-                      </a:solidFill>
-                      <a:prstDash val="solid"/>
-                      <a:round/>
-                      <a:headEnd type="none" w="med" len="med"/>
-                      <a:tailEnd type="none" w="med" len="med"/>
-                    </a:lnT>
-                    <a:lnB w="9525" cap="flat" cmpd="sng" algn="ctr">
-                      <a:solidFill>
-                        <a:srgbClr val="C9D5E3"/>
-                      </a:solidFill>
-                      <a:prstDash val="solid"/>
-                      <a:round/>
-                      <a:headEnd type="none" w="med" len="med"/>
-                      <a:tailEnd type="none" w="med" len="med"/>
-                    </a:lnB>
-                    <a:solidFill>
-                      <a:srgbClr val="FFFFFF"/>
-                    </a:solidFill>
-                  </a:tcPr>
-                </a:tc>
-                <a:tc>
-                  <a:txBody>
-                    <a:bodyPr/>
-                    <a:lstStyle/>
-                    <a:p>
-                      <a:pPr algn="l" indent="0" marL="0">
-                        <a:buNone/>
-                      </a:pPr>
-                      <a:endParaRPr lang="en-US" sz="850" dirty="0"/>
-                    </a:p>
-                  </a:txBody>
-                  <a:tcPr marL="54864" marR="54864" marT="36576" marB="36576" anchor="ctr">
-                    <a:lnL w="9525" cap="flat" cmpd="sng" algn="ctr">
-                      <a:solidFill>
-                        <a:srgbClr val="C9D5E3"/>
-                      </a:solidFill>
-                      <a:prstDash val="solid"/>
-                      <a:round/>
-                      <a:headEnd type="none" w="med" len="med"/>
-                      <a:tailEnd type="none" w="med" len="med"/>
-                    </a:lnL>
-                    <a:lnR w="9525" cap="flat" cmpd="sng" algn="ctr">
-                      <a:solidFill>
-                        <a:srgbClr val="C9D5E3"/>
-                      </a:solidFill>
-                      <a:prstDash val="solid"/>
-                      <a:round/>
-                      <a:headEnd type="none" w="med" len="med"/>
-                      <a:tailEnd type="none" w="med" len="med"/>
-                    </a:lnR>
-                    <a:lnT w="9525" cap="flat" cmpd="sng" algn="ctr">
-                      <a:solidFill>
-                        <a:srgbClr val="C9D5E3"/>
-                      </a:solidFill>
-                      <a:prstDash val="solid"/>
-                      <a:round/>
-                      <a:headEnd type="none" w="med" len="med"/>
-                      <a:tailEnd type="none" w="med" len="med"/>
-                    </a:lnT>
-                    <a:lnB w="9525" cap="flat" cmpd="sng" algn="ctr">
-                      <a:solidFill>
-                        <a:srgbClr val="C9D5E3"/>
-                      </a:solidFill>
-                      <a:prstDash val="solid"/>
-                      <a:round/>
-                      <a:headEnd type="none" w="med" len="med"/>
-                      <a:tailEnd type="none" w="med" len="med"/>
-                    </a:lnB>
-                    <a:solidFill>
-                      <a:srgbClr val="FFFFFF"/>
-                    </a:solidFill>
-                  </a:tcPr>
-                </a:tc>
-                <a:tc>
-                  <a:txBody>
-                    <a:bodyPr/>
-                    <a:lstStyle/>
-                    <a:p>
-                      <a:pPr algn="l" indent="0" marL="0">
-                        <a:buNone/>
-                      </a:pPr>
-                      <a:endParaRPr lang="en-US" sz="850" dirty="0"/>
-                    </a:p>
-                  </a:txBody>
-                  <a:tcPr marL="54864" marR="54864" marT="36576" marB="36576" anchor="ctr">
-                    <a:lnL w="9525" cap="flat" cmpd="sng" algn="ctr">
-                      <a:solidFill>
-                        <a:srgbClr val="C9D5E3"/>
-                      </a:solidFill>
-                      <a:prstDash val="solid"/>
-                      <a:round/>
-                      <a:headEnd type="none" w="med" len="med"/>
-                      <a:tailEnd type="none" w="med" len="med"/>
-                    </a:lnL>
-                    <a:lnR w="9525" cap="flat" cmpd="sng" algn="ctr">
-                      <a:solidFill>
-                        <a:srgbClr val="C9D5E3"/>
-                      </a:solidFill>
-                      <a:prstDash val="solid"/>
-                      <a:round/>
-                      <a:headEnd type="none" w="med" len="med"/>
-                      <a:tailEnd type="none" w="med" len="med"/>
-                    </a:lnR>
-                    <a:lnT w="9525" cap="flat" cmpd="sng" algn="ctr">
-                      <a:solidFill>
-                        <a:srgbClr val="C9D5E3"/>
-                      </a:solidFill>
-                      <a:prstDash val="solid"/>
-                      <a:round/>
-                      <a:headEnd type="none" w="med" len="med"/>
-                      <a:tailEnd type="none" w="med" len="med"/>
-                    </a:lnT>
-                    <a:lnB w="9525" cap="flat" cmpd="sng" algn="ctr">
-                      <a:solidFill>
-                        <a:srgbClr val="C9D5E3"/>
-                      </a:solidFill>
-                      <a:prstDash val="solid"/>
-                      <a:round/>
-                      <a:headEnd type="none" w="med" len="med"/>
-                      <a:tailEnd type="none" w="med" len="med"/>
-                    </a:lnB>
-                    <a:solidFill>
-                      <a:srgbClr val="FFFFFF"/>
-                    </a:solidFill>
-                  </a:tcPr>
-                </a:tc>
-                <a:tc>
-                  <a:txBody>
-                    <a:bodyPr/>
-                    <a:lstStyle/>
-                    <a:p>
-                      <a:pPr algn="l" indent="0" marL="0">
-                        <a:buNone/>
-                      </a:pPr>
-                      <a:endParaRPr lang="en-US" sz="850" dirty="0"/>
-                    </a:p>
-                  </a:txBody>
-                  <a:tcPr marL="54864" marR="54864" marT="36576" marB="36576" anchor="ctr">
-                    <a:lnL w="9525" cap="flat" cmpd="sng" algn="ctr">
-                      <a:solidFill>
-                        <a:srgbClr val="C9D5E3"/>
-                      </a:solidFill>
-                      <a:prstDash val="solid"/>
-                      <a:round/>
-                      <a:headEnd type="none" w="med" len="med"/>
-                      <a:tailEnd type="none" w="med" len="med"/>
-                    </a:lnL>
-                    <a:lnR w="9525" cap="flat" cmpd="sng" algn="ctr">
-                      <a:solidFill>
-                        <a:srgbClr val="C9D5E3"/>
-                      </a:solidFill>
-                      <a:prstDash val="solid"/>
-                      <a:round/>
-                      <a:headEnd type="none" w="med" len="med"/>
-                      <a:tailEnd type="none" w="med" len="med"/>
-                    </a:lnR>
-                    <a:lnT w="9525" cap="flat" cmpd="sng" algn="ctr">
-                      <a:solidFill>
-                        <a:srgbClr val="C9D5E3"/>
-                      </a:solidFill>
-                      <a:prstDash val="solid"/>
-                      <a:round/>
-                      <a:headEnd type="none" w="med" len="med"/>
-                      <a:tailEnd type="none" w="med" len="med"/>
-                    </a:lnT>
-                    <a:lnB w="9525" cap="flat" cmpd="sng" algn="ctr">
-                      <a:solidFill>
-                        <a:srgbClr val="C9D5E3"/>
-                      </a:solidFill>
-                      <a:prstDash val="solid"/>
-                      <a:round/>
-                      <a:headEnd type="none" w="med" len="med"/>
-                      <a:tailEnd type="none" w="med" len="med"/>
-                    </a:lnB>
-                    <a:solidFill>
-                      <a:srgbClr val="FFFFFF"/>
-                    </a:solidFill>
-                  </a:tcPr>
-                </a:tc>
-              </a:tr>
-              <a:tr h="566928">
-                <a:tc>
-                  <a:txBody>
-                    <a:bodyPr/>
-                    <a:lstStyle/>
-                    <a:p>
-                      <a:pPr algn="ctr" indent="0" marL="0">
-                        <a:buNone/>
-                      </a:pPr>
-                      <a:r>
-                        <a:rPr lang="en-US" sz="850" dirty="0">
-                          <a:solidFill>
-                            <a:srgbClr val="1B2433"/>
-                          </a:solidFill>
-                        </a:rPr>
-                        <a:t>6</a:t>
-                      </a:r>
-                      <a:endParaRPr lang="en-US" sz="850" dirty="0"/>
-                    </a:p>
-                  </a:txBody>
-                  <a:tcPr marL="54864" marR="54864" marT="36576" marB="36576" anchor="ctr">
-                    <a:lnL w="9525" cap="flat" cmpd="sng" algn="ctr">
-                      <a:solidFill>
-                        <a:srgbClr val="C9D5E3"/>
-                      </a:solidFill>
-                      <a:prstDash val="solid"/>
-                      <a:round/>
-                      <a:headEnd type="none" w="med" len="med"/>
-                      <a:tailEnd type="none" w="med" len="med"/>
-                    </a:lnL>
-                    <a:lnR w="9525" cap="flat" cmpd="sng" algn="ctr">
-                      <a:solidFill>
-                        <a:srgbClr val="C9D5E3"/>
-                      </a:solidFill>
-                      <a:prstDash val="solid"/>
-                      <a:round/>
-                      <a:headEnd type="none" w="med" len="med"/>
-                      <a:tailEnd type="none" w="med" len="med"/>
-                    </a:lnR>
-                    <a:lnT w="9525" cap="flat" cmpd="sng" algn="ctr">
-                      <a:solidFill>
-                        <a:srgbClr val="C9D5E3"/>
-                      </a:solidFill>
-                      <a:prstDash val="solid"/>
-                      <a:round/>
-                      <a:headEnd type="none" w="med" len="med"/>
-                      <a:tailEnd type="none" w="med" len="med"/>
-                    </a:lnT>
-                    <a:lnB w="9525" cap="flat" cmpd="sng" algn="ctr">
-                      <a:solidFill>
-                        <a:srgbClr val="C9D5E3"/>
-                      </a:solidFill>
-                      <a:prstDash val="solid"/>
-                      <a:round/>
-                      <a:headEnd type="none" w="med" len="med"/>
-                      <a:tailEnd type="none" w="med" len="med"/>
-                    </a:lnB>
-                    <a:solidFill>
-                      <a:srgbClr val="EDF2F8"/>
-                    </a:solidFill>
-                  </a:tcPr>
-                </a:tc>
-                <a:tc>
-                  <a:txBody>
-                    <a:bodyPr/>
-                    <a:lstStyle/>
-                    <a:p>
-                      <a:pPr algn="l" indent="0" marL="0">
-                        <a:buNone/>
-                      </a:pPr>
-                      <a:endParaRPr lang="en-US" sz="850" dirty="0"/>
-                    </a:p>
-                  </a:txBody>
-                  <a:tcPr marL="54864" marR="54864" marT="36576" marB="36576" anchor="ctr">
-                    <a:lnL w="9525" cap="flat" cmpd="sng" algn="ctr">
-                      <a:solidFill>
-                        <a:srgbClr val="C9D5E3"/>
-                      </a:solidFill>
-                      <a:prstDash val="solid"/>
-                      <a:round/>
-                      <a:headEnd type="none" w="med" len="med"/>
-                      <a:tailEnd type="none" w="med" len="med"/>
-                    </a:lnL>
-                    <a:lnR w="9525" cap="flat" cmpd="sng" algn="ctr">
-                      <a:solidFill>
-                        <a:srgbClr val="C9D5E3"/>
-                      </a:solidFill>
-                      <a:prstDash val="solid"/>
-                      <a:round/>
-                      <a:headEnd type="none" w="med" len="med"/>
-                      <a:tailEnd type="none" w="med" len="med"/>
-                    </a:lnR>
-                    <a:lnT w="9525" cap="flat" cmpd="sng" algn="ctr">
-                      <a:solidFill>
-                        <a:srgbClr val="C9D5E3"/>
-                      </a:solidFill>
-                      <a:prstDash val="solid"/>
-                      <a:round/>
-                      <a:headEnd type="none" w="med" len="med"/>
-                      <a:tailEnd type="none" w="med" len="med"/>
-                    </a:lnT>
-                    <a:lnB w="9525" cap="flat" cmpd="sng" algn="ctr">
-                      <a:solidFill>
-                        <a:srgbClr val="C9D5E3"/>
-                      </a:solidFill>
-                      <a:prstDash val="solid"/>
-                      <a:round/>
-                      <a:headEnd type="none" w="med" len="med"/>
-                      <a:tailEnd type="none" w="med" len="med"/>
-                    </a:lnB>
-                    <a:solidFill>
-                      <a:srgbClr val="EDF2F8"/>
-                    </a:solidFill>
-                  </a:tcPr>
-                </a:tc>
-                <a:tc>
-                  <a:txBody>
-                    <a:bodyPr/>
-                    <a:lstStyle/>
-                    <a:p>
-                      <a:pPr algn="l" indent="0" marL="0">
-                        <a:buNone/>
-                      </a:pPr>
-                      <a:endParaRPr lang="en-US" sz="850" dirty="0"/>
-                    </a:p>
-                  </a:txBody>
-                  <a:tcPr marL="54864" marR="54864" marT="36576" marB="36576" anchor="ctr">
-                    <a:lnL w="9525" cap="flat" cmpd="sng" algn="ctr">
-                      <a:solidFill>
-                        <a:srgbClr val="C9D5E3"/>
-                      </a:solidFill>
-                      <a:prstDash val="solid"/>
-                      <a:round/>
-                      <a:headEnd type="none" w="med" len="med"/>
-                      <a:tailEnd type="none" w="med" len="med"/>
-                    </a:lnL>
-                    <a:lnR w="9525" cap="flat" cmpd="sng" algn="ctr">
-                      <a:solidFill>
-                        <a:srgbClr val="C9D5E3"/>
-                      </a:solidFill>
-                      <a:prstDash val="solid"/>
-                      <a:round/>
-                      <a:headEnd type="none" w="med" len="med"/>
-                      <a:tailEnd type="none" w="med" len="med"/>
-                    </a:lnR>
-                    <a:lnT w="9525" cap="flat" cmpd="sng" algn="ctr">
-                      <a:solidFill>
-                        <a:srgbClr val="C9D5E3"/>
-                      </a:solidFill>
-                      <a:prstDash val="solid"/>
-                      <a:round/>
-                      <a:headEnd type="none" w="med" len="med"/>
-                      <a:tailEnd type="none" w="med" len="med"/>
-                    </a:lnT>
-                    <a:lnB w="9525" cap="flat" cmpd="sng" algn="ctr">
-                      <a:solidFill>
-                        <a:srgbClr val="C9D5E3"/>
-                      </a:solidFill>
-                      <a:prstDash val="solid"/>
-                      <a:round/>
-                      <a:headEnd type="none" w="med" len="med"/>
-                      <a:tailEnd type="none" w="med" len="med"/>
-                    </a:lnB>
-                    <a:solidFill>
-                      <a:srgbClr val="EDF2F8"/>
-                    </a:solidFill>
-                  </a:tcPr>
-                </a:tc>
-                <a:tc>
-                  <a:txBody>
-                    <a:bodyPr/>
-                    <a:lstStyle/>
-                    <a:p>
-                      <a:pPr algn="l" indent="0" marL="0">
-                        <a:buNone/>
-                      </a:pPr>
-                      <a:endParaRPr lang="en-US" sz="850" dirty="0"/>
-                    </a:p>
-                  </a:txBody>
-                  <a:tcPr marL="54864" marR="54864" marT="36576" marB="36576" anchor="ctr">
-                    <a:lnL w="9525" cap="flat" cmpd="sng" algn="ctr">
-                      <a:solidFill>
-                        <a:srgbClr val="C9D5E3"/>
-                      </a:solidFill>
-                      <a:prstDash val="solid"/>
-                      <a:round/>
-                      <a:headEnd type="none" w="med" len="med"/>
-                      <a:tailEnd type="none" w="med" len="med"/>
-                    </a:lnL>
-                    <a:lnR w="9525" cap="flat" cmpd="sng" algn="ctr">
-                      <a:solidFill>
-                        <a:srgbClr val="C9D5E3"/>
-                      </a:solidFill>
-                      <a:prstDash val="solid"/>
-                      <a:round/>
-                      <a:headEnd type="none" w="med" len="med"/>
-                      <a:tailEnd type="none" w="med" len="med"/>
-                    </a:lnR>
-                    <a:lnT w="9525" cap="flat" cmpd="sng" algn="ctr">
-                      <a:solidFill>
-                        <a:srgbClr val="C9D5E3"/>
-                      </a:solidFill>
-                      <a:prstDash val="solid"/>
-                      <a:round/>
-                      <a:headEnd type="none" w="med" len="med"/>
-                      <a:tailEnd type="none" w="med" len="med"/>
-                    </a:lnT>
-                    <a:lnB w="9525" cap="flat" cmpd="sng" algn="ctr">
-                      <a:solidFill>
-                        <a:srgbClr val="C9D5E3"/>
-                      </a:solidFill>
-                      <a:prstDash val="solid"/>
-                      <a:round/>
-                      <a:headEnd type="none" w="med" len="med"/>
-                      <a:tailEnd type="none" w="med" len="med"/>
-                    </a:lnB>
-                    <a:solidFill>
-                      <a:srgbClr val="EDF2F8"/>
-                    </a:solidFill>
-                  </a:tcPr>
-                </a:tc>
-                <a:tc>
-                  <a:txBody>
-                    <a:bodyPr/>
-                    <a:lstStyle/>
-                    <a:p>
-                      <a:pPr algn="l" indent="0" marL="0">
-                        <a:buNone/>
-                      </a:pPr>
-                      <a:endParaRPr lang="en-US" sz="850" dirty="0"/>
-                    </a:p>
-                  </a:txBody>
-                  <a:tcPr marL="54864" marR="54864" marT="36576" marB="36576" anchor="ctr">
-                    <a:lnL w="9525" cap="flat" cmpd="sng" algn="ctr">
-                      <a:solidFill>
-                        <a:srgbClr val="C9D5E3"/>
-                      </a:solidFill>
-                      <a:prstDash val="solid"/>
-                      <a:round/>
-                      <a:headEnd type="none" w="med" len="med"/>
-                      <a:tailEnd type="none" w="med" len="med"/>
-                    </a:lnL>
-                    <a:lnR w="9525" cap="flat" cmpd="sng" algn="ctr">
-                      <a:solidFill>
-                        <a:srgbClr val="C9D5E3"/>
-                      </a:solidFill>
-                      <a:prstDash val="solid"/>
-                      <a:round/>
-                      <a:headEnd type="none" w="med" len="med"/>
-                      <a:tailEnd type="none" w="med" len="med"/>
-                    </a:lnR>
-                    <a:lnT w="9525" cap="flat" cmpd="sng" algn="ctr">
-                      <a:solidFill>
-                        <a:srgbClr val="C9D5E3"/>
-                      </a:solidFill>
-                      <a:prstDash val="solid"/>
-                      <a:round/>
-                      <a:headEnd type="none" w="med" len="med"/>
-                      <a:tailEnd type="none" w="med" len="med"/>
-                    </a:lnT>
-                    <a:lnB w="9525" cap="flat" cmpd="sng" algn="ctr">
-                      <a:solidFill>
-                        <a:srgbClr val="C9D5E3"/>
-                      </a:solidFill>
-                      <a:prstDash val="solid"/>
-                      <a:round/>
-                      <a:headEnd type="none" w="med" len="med"/>
-                      <a:tailEnd type="none" w="med" len="med"/>
-                    </a:lnB>
-                    <a:solidFill>
-                      <a:srgbClr val="EDF2F8"/>
-                    </a:solidFill>
-                  </a:tcPr>
-                </a:tc>
-                <a:tc>
-                  <a:txBody>
-                    <a:bodyPr/>
-                    <a:lstStyle/>
-                    <a:p>
-                      <a:pPr algn="l" indent="0" marL="0">
-                        <a:buNone/>
-                      </a:pPr>
-                      <a:endParaRPr lang="en-US" sz="850" dirty="0"/>
-                    </a:p>
-                  </a:txBody>
-                  <a:tcPr marL="54864" marR="54864" marT="36576" marB="36576" anchor="ctr">
-                    <a:lnL w="9525" cap="flat" cmpd="sng" algn="ctr">
-                      <a:solidFill>
-                        <a:srgbClr val="C9D5E3"/>
-                      </a:solidFill>
-                      <a:prstDash val="solid"/>
-                      <a:round/>
-                      <a:headEnd type="none" w="med" len="med"/>
-                      <a:tailEnd type="none" w="med" len="med"/>
-                    </a:lnL>
-                    <a:lnR w="9525" cap="flat" cmpd="sng" algn="ctr">
-                      <a:solidFill>
-                        <a:srgbClr val="C9D5E3"/>
-                      </a:solidFill>
-                      <a:prstDash val="solid"/>
-                      <a:round/>
-                      <a:headEnd type="none" w="med" len="med"/>
-                      <a:tailEnd type="none" w="med" len="med"/>
-                    </a:lnR>
-                    <a:lnT w="9525" cap="flat" cmpd="sng" algn="ctr">
-                      <a:solidFill>
-                        <a:srgbClr val="C9D5E3"/>
-                      </a:solidFill>
-                      <a:prstDash val="solid"/>
-                      <a:round/>
-                      <a:headEnd type="none" w="med" len="med"/>
-                      <a:tailEnd type="none" w="med" len="med"/>
-                    </a:lnT>
-                    <a:lnB w="9525" cap="flat" cmpd="sng" algn="ctr">
-                      <a:solidFill>
-                        <a:srgbClr val="C9D5E3"/>
-                      </a:solidFill>
-                      <a:prstDash val="solid"/>
-                      <a:round/>
-                      <a:headEnd type="none" w="med" len="med"/>
-                      <a:tailEnd type="none" w="med" len="med"/>
-                    </a:lnB>
-                    <a:solidFill>
-                      <a:srgbClr val="EDF2F8"/>
-                    </a:solidFill>
-                  </a:tcPr>
-                </a:tc>
-              </a:tr>
-              <a:tr h="566928">
-                <a:tc>
-                  <a:txBody>
-                    <a:bodyPr/>
-                    <a:lstStyle/>
-                    <a:p>
-                      <a:pPr algn="ctr" indent="0" marL="0">
-                        <a:buNone/>
-                      </a:pPr>
-                      <a:r>
-                        <a:rPr lang="en-US" sz="850" dirty="0">
-                          <a:solidFill>
-                            <a:srgbClr val="1B2433"/>
-                          </a:solidFill>
-                        </a:rPr>
-                        <a:t>7</a:t>
-                      </a:r>
-                      <a:endParaRPr lang="en-US" sz="850" dirty="0"/>
-                    </a:p>
-                  </a:txBody>
-                  <a:tcPr marL="54864" marR="54864" marT="36576" marB="36576" anchor="ctr">
-                    <a:lnL w="9525" cap="flat" cmpd="sng" algn="ctr">
-                      <a:solidFill>
-                        <a:srgbClr val="C9D5E3"/>
-                      </a:solidFill>
-                      <a:prstDash val="solid"/>
-                      <a:round/>
-                      <a:headEnd type="none" w="med" len="med"/>
-                      <a:tailEnd type="none" w="med" len="med"/>
-                    </a:lnL>
-                    <a:lnR w="9525" cap="flat" cmpd="sng" algn="ctr">
-                      <a:solidFill>
-                        <a:srgbClr val="C9D5E3"/>
-                      </a:solidFill>
-                      <a:prstDash val="solid"/>
-                      <a:round/>
-                      <a:headEnd type="none" w="med" len="med"/>
-                      <a:tailEnd type="none" w="med" len="med"/>
-                    </a:lnR>
-                    <a:lnT w="9525" cap="flat" cmpd="sng" algn="ctr">
-                      <a:solidFill>
-                        <a:srgbClr val="C9D5E3"/>
-                      </a:solidFill>
-                      <a:prstDash val="solid"/>
-                      <a:round/>
-                      <a:headEnd type="none" w="med" len="med"/>
-                      <a:tailEnd type="none" w="med" len="med"/>
-                    </a:lnT>
-                    <a:lnB w="9525" cap="flat" cmpd="sng" algn="ctr">
-                      <a:solidFill>
-                        <a:srgbClr val="C9D5E3"/>
-                      </a:solidFill>
-                      <a:prstDash val="solid"/>
-                      <a:round/>
-                      <a:headEnd type="none" w="med" len="med"/>
-                      <a:tailEnd type="none" w="med" len="med"/>
-                    </a:lnB>
-                    <a:solidFill>
-                      <a:srgbClr val="FFFFFF"/>
-                    </a:solidFill>
-                  </a:tcPr>
-                </a:tc>
-                <a:tc>
-                  <a:txBody>
-                    <a:bodyPr/>
-                    <a:lstStyle/>
-                    <a:p>
-                      <a:pPr algn="l" indent="0" marL="0">
-                        <a:buNone/>
-                      </a:pPr>
-                      <a:endParaRPr lang="en-US" sz="850" dirty="0"/>
-                    </a:p>
-                  </a:txBody>
-                  <a:tcPr marL="54864" marR="54864" marT="36576" marB="36576" anchor="ctr">
-                    <a:lnL w="9525" cap="flat" cmpd="sng" algn="ctr">
-                      <a:solidFill>
-                        <a:srgbClr val="C9D5E3"/>
-                      </a:solidFill>
-                      <a:prstDash val="solid"/>
-                      <a:round/>
-                      <a:headEnd type="none" w="med" len="med"/>
-                      <a:tailEnd type="none" w="med" len="med"/>
-                    </a:lnL>
-                    <a:lnR w="9525" cap="flat" cmpd="sng" algn="ctr">
-                      <a:solidFill>
-                        <a:srgbClr val="C9D5E3"/>
-                      </a:solidFill>
-                      <a:prstDash val="solid"/>
-                      <a:round/>
-                      <a:headEnd type="none" w="med" len="med"/>
-                      <a:tailEnd type="none" w="med" len="med"/>
-                    </a:lnR>
-                    <a:lnT w="9525" cap="flat" cmpd="sng" algn="ctr">
-                      <a:solidFill>
-                        <a:srgbClr val="C9D5E3"/>
-                      </a:solidFill>
-                      <a:prstDash val="solid"/>
-                      <a:round/>
-                      <a:headEnd type="none" w="med" len="med"/>
-                      <a:tailEnd type="none" w="med" len="med"/>
-                    </a:lnT>
-                    <a:lnB w="9525" cap="flat" cmpd="sng" algn="ctr">
-                      <a:solidFill>
-                        <a:srgbClr val="C9D5E3"/>
-                      </a:solidFill>
-                      <a:prstDash val="solid"/>
-                      <a:round/>
-                      <a:headEnd type="none" w="med" len="med"/>
-                      <a:tailEnd type="none" w="med" len="med"/>
-                    </a:lnB>
-                    <a:solidFill>
-                      <a:srgbClr val="FFFFFF"/>
-                    </a:solidFill>
-                  </a:tcPr>
-                </a:tc>
-                <a:tc>
-                  <a:txBody>
-                    <a:bodyPr/>
-                    <a:lstStyle/>
-                    <a:p>
-                      <a:pPr algn="l" indent="0" marL="0">
-                        <a:buNone/>
-                      </a:pPr>
-                      <a:endParaRPr lang="en-US" sz="850" dirty="0"/>
-                    </a:p>
-                  </a:txBody>
-                  <a:tcPr marL="54864" marR="54864" marT="36576" marB="36576" anchor="ctr">
-                    <a:lnL w="9525" cap="flat" cmpd="sng" algn="ctr">
-                      <a:solidFill>
-                        <a:srgbClr val="C9D5E3"/>
-                      </a:solidFill>
-                      <a:prstDash val="solid"/>
-                      <a:round/>
-                      <a:headEnd type="none" w="med" len="med"/>
-                      <a:tailEnd type="none" w="med" len="med"/>
-                    </a:lnL>
-                    <a:lnR w="9525" cap="flat" cmpd="sng" algn="ctr">
-                      <a:solidFill>
-                        <a:srgbClr val="C9D5E3"/>
-                      </a:solidFill>
-                      <a:prstDash val="solid"/>
-                      <a:round/>
-                      <a:headEnd type="none" w="med" len="med"/>
-                      <a:tailEnd type="none" w="med" len="med"/>
-                    </a:lnR>
-                    <a:lnT w="9525" cap="flat" cmpd="sng" algn="ctr">
-                      <a:solidFill>
-                        <a:srgbClr val="C9D5E3"/>
-                      </a:solidFill>
-                      <a:prstDash val="solid"/>
-                      <a:round/>
-                      <a:headEnd type="none" w="med" len="med"/>
-                      <a:tailEnd type="none" w="med" len="med"/>
-                    </a:lnT>
-                    <a:lnB w="9525" cap="flat" cmpd="sng" algn="ctr">
-                      <a:solidFill>
-                        <a:srgbClr val="C9D5E3"/>
-                      </a:solidFill>
-                      <a:prstDash val="solid"/>
-                      <a:round/>
-                      <a:headEnd type="none" w="med" len="med"/>
-                      <a:tailEnd type="none" w="med" len="med"/>
-                    </a:lnB>
-                    <a:solidFill>
-                      <a:srgbClr val="FFFFFF"/>
-                    </a:solidFill>
-                  </a:tcPr>
-                </a:tc>
-                <a:tc>
-                  <a:txBody>
-                    <a:bodyPr/>
-                    <a:lstStyle/>
-                    <a:p>
-                      <a:pPr algn="l" indent="0" marL="0">
-                        <a:buNone/>
-                      </a:pPr>
-                      <a:endParaRPr lang="en-US" sz="850" dirty="0"/>
-                    </a:p>
-                  </a:txBody>
-                  <a:tcPr marL="54864" marR="54864" marT="36576" marB="36576" anchor="ctr">
-                    <a:lnL w="9525" cap="flat" cmpd="sng" algn="ctr">
-                      <a:solidFill>
-                        <a:srgbClr val="C9D5E3"/>
-                      </a:solidFill>
-                      <a:prstDash val="solid"/>
-                      <a:round/>
-                      <a:headEnd type="none" w="med" len="med"/>
-                      <a:tailEnd type="none" w="med" len="med"/>
-                    </a:lnL>
-                    <a:lnR w="9525" cap="flat" cmpd="sng" algn="ctr">
-                      <a:solidFill>
-                        <a:srgbClr val="C9D5E3"/>
-                      </a:solidFill>
-                      <a:prstDash val="solid"/>
-                      <a:round/>
-                      <a:headEnd type="none" w="med" len="med"/>
-                      <a:tailEnd type="none" w="med" len="med"/>
-                    </a:lnR>
-                    <a:lnT w="9525" cap="flat" cmpd="sng" algn="ctr">
-                      <a:solidFill>
-                        <a:srgbClr val="C9D5E3"/>
-                      </a:solidFill>
-                      <a:prstDash val="solid"/>
-                      <a:round/>
-                      <a:headEnd type="none" w="med" len="med"/>
-                      <a:tailEnd type="none" w="med" len="med"/>
-                    </a:lnT>
-                    <a:lnB w="9525" cap="flat" cmpd="sng" algn="ctr">
-                      <a:solidFill>
-                        <a:srgbClr val="C9D5E3"/>
-                      </a:solidFill>
-                      <a:prstDash val="solid"/>
-                      <a:round/>
-                      <a:headEnd type="none" w="med" len="med"/>
-                      <a:tailEnd type="none" w="med" len="med"/>
-                    </a:lnB>
-                    <a:solidFill>
-                      <a:srgbClr val="FFFFFF"/>
-                    </a:solidFill>
-                  </a:tcPr>
-                </a:tc>
-                <a:tc>
-                  <a:txBody>
-                    <a:bodyPr/>
-                    <a:lstStyle/>
-                    <a:p>
-                      <a:pPr algn="l" indent="0" marL="0">
-                        <a:buNone/>
-                      </a:pPr>
-                      <a:endParaRPr lang="en-US" sz="850" dirty="0"/>
-                    </a:p>
-                  </a:txBody>
-                  <a:tcPr marL="54864" marR="54864" marT="36576" marB="36576" anchor="ctr">
-                    <a:lnL w="9525" cap="flat" cmpd="sng" algn="ctr">
-                      <a:solidFill>
-                        <a:srgbClr val="C9D5E3"/>
-                      </a:solidFill>
-                      <a:prstDash val="solid"/>
-                      <a:round/>
-                      <a:headEnd type="none" w="med" len="med"/>
-                      <a:tailEnd type="none" w="med" len="med"/>
-                    </a:lnL>
-                    <a:lnR w="9525" cap="flat" cmpd="sng" algn="ctr">
-                      <a:solidFill>
-                        <a:srgbClr val="C9D5E3"/>
-                      </a:solidFill>
-                      <a:prstDash val="solid"/>
-                      <a:round/>
-                      <a:headEnd type="none" w="med" len="med"/>
-                      <a:tailEnd type="none" w="med" len="med"/>
-                    </a:lnR>
-                    <a:lnT w="9525" cap="flat" cmpd="sng" algn="ctr">
-                      <a:solidFill>
-                        <a:srgbClr val="C9D5E3"/>
-                      </a:solidFill>
-                      <a:prstDash val="solid"/>
-                      <a:round/>
-                      <a:headEnd type="none" w="med" len="med"/>
-                      <a:tailEnd type="none" w="med" len="med"/>
-                    </a:lnT>
-                    <a:lnB w="9525" cap="flat" cmpd="sng" algn="ctr">
-                      <a:solidFill>
-                        <a:srgbClr val="C9D5E3"/>
-                      </a:solidFill>
-                      <a:prstDash val="solid"/>
-                      <a:round/>
-                      <a:headEnd type="none" w="med" len="med"/>
-                      <a:tailEnd type="none" w="med" len="med"/>
-                    </a:lnB>
-                    <a:solidFill>
-                      <a:srgbClr val="FFFFFF"/>
-                    </a:solidFill>
-                  </a:tcPr>
-                </a:tc>
-                <a:tc>
-                  <a:txBody>
-                    <a:bodyPr/>
-                    <a:lstStyle/>
-                    <a:p>
-                      <a:pPr algn="l" indent="0" marL="0">
-                        <a:buNone/>
-                      </a:pPr>
-                      <a:endParaRPr lang="en-US" sz="850" dirty="0"/>
-                    </a:p>
-                  </a:txBody>
-                  <a:tcPr marL="54864" marR="54864" marT="36576" marB="36576" anchor="ctr">
-                    <a:lnL w="9525" cap="flat" cmpd="sng" algn="ctr">
-                      <a:solidFill>
-                        <a:srgbClr val="C9D5E3"/>
-                      </a:solidFill>
-                      <a:prstDash val="solid"/>
-                      <a:round/>
-                      <a:headEnd type="none" w="med" len="med"/>
-                      <a:tailEnd type="none" w="med" len="med"/>
-                    </a:lnL>
-                    <a:lnR w="9525" cap="flat" cmpd="sng" algn="ctr">
-                      <a:solidFill>
-                        <a:srgbClr val="C9D5E3"/>
-                      </a:solidFill>
-                      <a:prstDash val="solid"/>
-                      <a:round/>
-                      <a:headEnd type="none" w="med" len="med"/>
-                      <a:tailEnd type="none" w="med" len="med"/>
-                    </a:lnR>
-                    <a:lnT w="9525" cap="flat" cmpd="sng" algn="ctr">
-                      <a:solidFill>
-                        <a:srgbClr val="C9D5E3"/>
-                      </a:solidFill>
-                      <a:prstDash val="solid"/>
-                      <a:round/>
-                      <a:headEnd type="none" w="med" len="med"/>
-                      <a:tailEnd type="none" w="med" len="med"/>
-                    </a:lnT>
-                    <a:lnB w="9525" cap="flat" cmpd="sng" algn="ctr">
-                      <a:solidFill>
-                        <a:srgbClr val="C9D5E3"/>
-                      </a:solidFill>
-                      <a:prstDash val="solid"/>
-                      <a:round/>
-                      <a:headEnd type="none" w="med" len="med"/>
-                      <a:tailEnd type="none" w="med" len="med"/>
-                    </a:lnB>
-                    <a:solidFill>
-                      <a:srgbClr val="FFFFFF"/>
-                    </a:solidFill>
-                  </a:tcPr>
-                </a:tc>
-              </a:tr>
-              <a:tr h="566928">
-                <a:tc>
-                  <a:txBody>
-                    <a:bodyPr/>
-                    <a:lstStyle/>
-                    <a:p>
-                      <a:pPr algn="ctr" indent="0" marL="0">
-                        <a:buNone/>
-                      </a:pPr>
-                      <a:r>
-                        <a:rPr lang="en-US" sz="850" dirty="0">
-                          <a:solidFill>
-                            <a:srgbClr val="1B2433"/>
-                          </a:solidFill>
-                        </a:rPr>
-                        <a:t>8</a:t>
-                      </a:r>
-                      <a:endParaRPr lang="en-US" sz="850" dirty="0"/>
-                    </a:p>
-                  </a:txBody>
-                  <a:tcPr marL="54864" marR="54864" marT="36576" marB="36576" anchor="ctr">
-                    <a:lnL w="9525" cap="flat" cmpd="sng" algn="ctr">
-                      <a:solidFill>
-                        <a:srgbClr val="C9D5E3"/>
-                      </a:solidFill>
-                      <a:prstDash val="solid"/>
-                      <a:round/>
-                      <a:headEnd type="none" w="med" len="med"/>
-                      <a:tailEnd type="none" w="med" len="med"/>
-                    </a:lnL>
-                    <a:lnR w="9525" cap="flat" cmpd="sng" algn="ctr">
-                      <a:solidFill>
-                        <a:srgbClr val="C9D5E3"/>
-                      </a:solidFill>
-                      <a:prstDash val="solid"/>
-                      <a:round/>
-                      <a:headEnd type="none" w="med" len="med"/>
-                      <a:tailEnd type="none" w="med" len="med"/>
-                    </a:lnR>
-                    <a:lnT w="9525" cap="flat" cmpd="sng" algn="ctr">
-                      <a:solidFill>
-                        <a:srgbClr val="C9D5E3"/>
-                      </a:solidFill>
-                      <a:prstDash val="solid"/>
-                      <a:round/>
-                      <a:headEnd type="none" w="med" len="med"/>
-                      <a:tailEnd type="none" w="med" len="med"/>
-                    </a:lnT>
-                    <a:lnB w="9525" cap="flat" cmpd="sng" algn="ctr">
-                      <a:solidFill>
-                        <a:srgbClr val="C9D5E3"/>
-                      </a:solidFill>
-                      <a:prstDash val="solid"/>
-                      <a:round/>
-                      <a:headEnd type="none" w="med" len="med"/>
-                      <a:tailEnd type="none" w="med" len="med"/>
-                    </a:lnB>
-                    <a:solidFill>
-                      <a:srgbClr val="EDF2F8"/>
-                    </a:solidFill>
-                  </a:tcPr>
-                </a:tc>
-                <a:tc>
-                  <a:txBody>
-                    <a:bodyPr/>
-                    <a:lstStyle/>
-                    <a:p>
-                      <a:pPr algn="l" indent="0" marL="0">
-                        <a:buNone/>
-                      </a:pPr>
-                      <a:endParaRPr lang="en-US" sz="850" dirty="0"/>
-                    </a:p>
-                  </a:txBody>
-                  <a:tcPr marL="54864" marR="54864" marT="36576" marB="36576" anchor="ctr">
-                    <a:lnL w="9525" cap="flat" cmpd="sng" algn="ctr">
-                      <a:solidFill>
-                        <a:srgbClr val="C9D5E3"/>
-                      </a:solidFill>
-                      <a:prstDash val="solid"/>
-                      <a:round/>
-                      <a:headEnd type="none" w="med" len="med"/>
-                      <a:tailEnd type="none" w="med" len="med"/>
-                    </a:lnL>
-                    <a:lnR w="9525" cap="flat" cmpd="sng" algn="ctr">
-                      <a:solidFill>
-                        <a:srgbClr val="C9D5E3"/>
-                      </a:solidFill>
-                      <a:prstDash val="solid"/>
-                      <a:round/>
-                      <a:headEnd type="none" w="med" len="med"/>
-                      <a:tailEnd type="none" w="med" len="med"/>
-                    </a:lnR>
-                    <a:lnT w="9525" cap="flat" cmpd="sng" algn="ctr">
-                      <a:solidFill>
-                        <a:srgbClr val="C9D5E3"/>
-                      </a:solidFill>
-                      <a:prstDash val="solid"/>
-                      <a:round/>
-                      <a:headEnd type="none" w="med" len="med"/>
-                      <a:tailEnd type="none" w="med" len="med"/>
-                    </a:lnT>
-                    <a:lnB w="9525" cap="flat" cmpd="sng" algn="ctr">
-                      <a:solidFill>
-                        <a:srgbClr val="C9D5E3"/>
-                      </a:solidFill>
-                      <a:prstDash val="solid"/>
-                      <a:round/>
-                      <a:headEnd type="none" w="med" len="med"/>
-                      <a:tailEnd type="none" w="med" len="med"/>
-                    </a:lnB>
-                    <a:solidFill>
-                      <a:srgbClr val="EDF2F8"/>
-                    </a:solidFill>
-                  </a:tcPr>
-                </a:tc>
-                <a:tc>
-                  <a:txBody>
-                    <a:bodyPr/>
-                    <a:lstStyle/>
-                    <a:p>
-                      <a:pPr algn="l" indent="0" marL="0">
-                        <a:buNone/>
-                      </a:pPr>
-                      <a:endParaRPr lang="en-US" sz="850" dirty="0"/>
-                    </a:p>
-                  </a:txBody>
-                  <a:tcPr marL="54864" marR="54864" marT="36576" marB="36576" anchor="ctr">
-                    <a:lnL w="9525" cap="flat" cmpd="sng" algn="ctr">
-                      <a:solidFill>
-                        <a:srgbClr val="C9D5E3"/>
-                      </a:solidFill>
-                      <a:prstDash val="solid"/>
-                      <a:round/>
-                      <a:headEnd type="none" w="med" len="med"/>
-                      <a:tailEnd type="none" w="med" len="med"/>
-                    </a:lnL>
-                    <a:lnR w="9525" cap="flat" cmpd="sng" algn="ctr">
-                      <a:solidFill>
-                        <a:srgbClr val="C9D5E3"/>
-                      </a:solidFill>
-                      <a:prstDash val="solid"/>
-                      <a:round/>
-                      <a:headEnd type="none" w="med" len="med"/>
-                      <a:tailEnd type="none" w="med" len="med"/>
-                    </a:lnR>
-                    <a:lnT w="9525" cap="flat" cmpd="sng" algn="ctr">
-                      <a:solidFill>
-                        <a:srgbClr val="C9D5E3"/>
-                      </a:solidFill>
-                      <a:prstDash val="solid"/>
-                      <a:round/>
-                      <a:headEnd type="none" w="med" len="med"/>
-                      <a:tailEnd type="none" w="med" len="med"/>
-                    </a:lnT>
-                    <a:lnB w="9525" cap="flat" cmpd="sng" algn="ctr">
-                      <a:solidFill>
-                        <a:srgbClr val="C9D5E3"/>
-                      </a:solidFill>
-                      <a:prstDash val="solid"/>
-                      <a:round/>
-                      <a:headEnd type="none" w="med" len="med"/>
-                      <a:tailEnd type="none" w="med" len="med"/>
-                    </a:lnB>
-                    <a:solidFill>
-                      <a:srgbClr val="EDF2F8"/>
-                    </a:solidFill>
-                  </a:tcPr>
-                </a:tc>
-                <a:tc>
-                  <a:txBody>
-                    <a:bodyPr/>
-                    <a:lstStyle/>
-                    <a:p>
-                      <a:pPr algn="l" indent="0" marL="0">
-                        <a:buNone/>
-                      </a:pPr>
-                      <a:endParaRPr lang="en-US" sz="850" dirty="0"/>
-                    </a:p>
-                  </a:txBody>
-                  <a:tcPr marL="54864" marR="54864" marT="36576" marB="36576" anchor="ctr">
-                    <a:lnL w="9525" cap="flat" cmpd="sng" algn="ctr">
-                      <a:solidFill>
-                        <a:srgbClr val="C9D5E3"/>
-                      </a:solidFill>
-                      <a:prstDash val="solid"/>
-                      <a:round/>
-                      <a:headEnd type="none" w="med" len="med"/>
-                      <a:tailEnd type="none" w="med" len="med"/>
-                    </a:lnL>
-                    <a:lnR w="9525" cap="flat" cmpd="sng" algn="ctr">
-                      <a:solidFill>
-                        <a:srgbClr val="C9D5E3"/>
-                      </a:solidFill>
-                      <a:prstDash val="solid"/>
-                      <a:round/>
-                      <a:headEnd type="none" w="med" len="med"/>
-                      <a:tailEnd type="none" w="med" len="med"/>
-                    </a:lnR>
-                    <a:lnT w="9525" cap="flat" cmpd="sng" algn="ctr">
-                      <a:solidFill>
-                        <a:srgbClr val="C9D5E3"/>
-                      </a:solidFill>
-                      <a:prstDash val="solid"/>
-                      <a:round/>
-                      <a:headEnd type="none" w="med" len="med"/>
-                      <a:tailEnd type="none" w="med" len="med"/>
-                    </a:lnT>
-                    <a:lnB w="9525" cap="flat" cmpd="sng" algn="ctr">
-                      <a:solidFill>
-                        <a:srgbClr val="C9D5E3"/>
-                      </a:solidFill>
-                      <a:prstDash val="solid"/>
-                      <a:round/>
-                      <a:headEnd type="none" w="med" len="med"/>
-                      <a:tailEnd type="none" w="med" len="med"/>
-                    </a:lnB>
-                    <a:solidFill>
-                      <a:srgbClr val="EDF2F8"/>
-                    </a:solidFill>
-                  </a:tcPr>
-                </a:tc>
-                <a:tc>
-                  <a:txBody>
-                    <a:bodyPr/>
-                    <a:lstStyle/>
-                    <a:p>
-                      <a:pPr algn="l" indent="0" marL="0">
-                        <a:buNone/>
-                      </a:pPr>
-                      <a:endParaRPr lang="en-US" sz="850" dirty="0"/>
-                    </a:p>
-                  </a:txBody>
-                  <a:tcPr marL="54864" marR="54864" marT="36576" marB="36576" anchor="ctr">
-                    <a:lnL w="9525" cap="flat" cmpd="sng" algn="ctr">
-                      <a:solidFill>
-                        <a:srgbClr val="C9D5E3"/>
-                      </a:solidFill>
-                      <a:prstDash val="solid"/>
-                      <a:round/>
-                      <a:headEnd type="none" w="med" len="med"/>
-                      <a:tailEnd type="none" w="med" len="med"/>
-                    </a:lnL>
-                    <a:lnR w="9525" cap="flat" cmpd="sng" algn="ctr">
-                      <a:solidFill>
-                        <a:srgbClr val="C9D5E3"/>
-                      </a:solidFill>
-                      <a:prstDash val="solid"/>
-                      <a:round/>
-                      <a:headEnd type="none" w="med" len="med"/>
-                      <a:tailEnd type="none" w="med" len="med"/>
-                    </a:lnR>
-                    <a:lnT w="9525" cap="flat" cmpd="sng" algn="ctr">
-                      <a:solidFill>
-                        <a:srgbClr val="C9D5E3"/>
-                      </a:solidFill>
-                      <a:prstDash val="solid"/>
-                      <a:round/>
-                      <a:headEnd type="none" w="med" len="med"/>
-                      <a:tailEnd type="none" w="med" len="med"/>
-                    </a:lnT>
-                    <a:lnB w="9525" cap="flat" cmpd="sng" algn="ctr">
-                      <a:solidFill>
-                        <a:srgbClr val="C9D5E3"/>
-                      </a:solidFill>
-                      <a:prstDash val="solid"/>
-                      <a:round/>
-                      <a:headEnd type="none" w="med" len="med"/>
-                      <a:tailEnd type="none" w="med" len="med"/>
-                    </a:lnB>
-                    <a:solidFill>
-                      <a:srgbClr val="EDF2F8"/>
-                    </a:solidFill>
-                  </a:tcPr>
-                </a:tc>
-                <a:tc>
-                  <a:txBody>
-                    <a:bodyPr/>
-                    <a:lstStyle/>
-                    <a:p>
-                      <a:pPr algn="l" indent="0" marL="0">
-                        <a:buNone/>
-                      </a:pPr>
-                      <a:endParaRPr lang="en-US" sz="850" dirty="0"/>
-                    </a:p>
-                  </a:txBody>
-                  <a:tcPr marL="54864" marR="54864" marT="36576" marB="36576" anchor="ctr">
-                    <a:lnL w="9525" cap="flat" cmpd="sng" algn="ctr">
-                      <a:solidFill>
-                        <a:srgbClr val="C9D5E3"/>
-                      </a:solidFill>
-                      <a:prstDash val="solid"/>
-                      <a:round/>
-                      <a:headEnd type="none" w="med" len="med"/>
-                      <a:tailEnd type="none" w="med" len="med"/>
-                    </a:lnL>
-                    <a:lnR w="9525" cap="flat" cmpd="sng" algn="ctr">
-                      <a:solidFill>
-                        <a:srgbClr val="C9D5E3"/>
-                      </a:solidFill>
-                      <a:prstDash val="solid"/>
-                      <a:round/>
-                      <a:headEnd type="none" w="med" len="med"/>
-                      <a:tailEnd type="none" w="med" len="med"/>
-                    </a:lnR>
-                    <a:lnT w="9525" cap="flat" cmpd="sng" algn="ctr">
-                      <a:solidFill>
-                        <a:srgbClr val="C9D5E3"/>
-                      </a:solidFill>
-                      <a:prstDash val="solid"/>
-                      <a:round/>
-                      <a:headEnd type="none" w="med" len="med"/>
-                      <a:tailEnd type="none" w="med" len="med"/>
-                    </a:lnT>
-                    <a:lnB w="9525" cap="flat" cmpd="sng" algn="ctr">
-                      <a:solidFill>
-                        <a:srgbClr val="C9D5E3"/>
-                      </a:solidFill>
-                      <a:prstDash val="solid"/>
-                      <a:round/>
-                      <a:headEnd type="none" w="med" len="med"/>
-                      <a:tailEnd type="none" w="med" len="med"/>
-                    </a:lnB>
-                    <a:solidFill>
-                      <a:srgbClr val="EDF2F8"/>
-                    </a:solidFill>
-                  </a:tcPr>
-                </a:tc>
-              </a:tr>
-              <a:tr h="566928">
-                <a:tc>
-                  <a:txBody>
-                    <a:bodyPr/>
-                    <a:lstStyle/>
-                    <a:p>
-                      <a:pPr algn="ctr" indent="0" marL="0">
-                        <a:buNone/>
-                      </a:pPr>
-                      <a:r>
-                        <a:rPr lang="en-US" sz="850" dirty="0">
-                          <a:solidFill>
-                            <a:srgbClr val="1B2433"/>
-                          </a:solidFill>
-                        </a:rPr>
-                        <a:t>9</a:t>
-                      </a:r>
-                      <a:endParaRPr lang="en-US" sz="850" dirty="0"/>
-                    </a:p>
-                  </a:txBody>
-                  <a:tcPr marL="54864" marR="54864" marT="36576" marB="36576" anchor="ctr">
-                    <a:lnL w="9525" cap="flat" cmpd="sng" algn="ctr">
-                      <a:solidFill>
-                        <a:srgbClr val="C9D5E3"/>
-                      </a:solidFill>
-                      <a:prstDash val="solid"/>
-                      <a:round/>
-                      <a:headEnd type="none" w="med" len="med"/>
-                      <a:tailEnd type="none" w="med" len="med"/>
-                    </a:lnL>
-                    <a:lnR w="9525" cap="flat" cmpd="sng" algn="ctr">
-                      <a:solidFill>
-                        <a:srgbClr val="C9D5E3"/>
-                      </a:solidFill>
-                      <a:prstDash val="solid"/>
-                      <a:round/>
-                      <a:headEnd type="none" w="med" len="med"/>
-                      <a:tailEnd type="none" w="med" len="med"/>
-                    </a:lnR>
-                    <a:lnT w="9525" cap="flat" cmpd="sng" algn="ctr">
-                      <a:solidFill>
-                        <a:srgbClr val="C9D5E3"/>
-                      </a:solidFill>
-                      <a:prstDash val="solid"/>
-                      <a:round/>
-                      <a:headEnd type="none" w="med" len="med"/>
-                      <a:tailEnd type="none" w="med" len="med"/>
-                    </a:lnT>
-                    <a:lnB w="9525" cap="flat" cmpd="sng" algn="ctr">
-                      <a:solidFill>
-                        <a:srgbClr val="C9D5E3"/>
-                      </a:solidFill>
-                      <a:prstDash val="solid"/>
-                      <a:round/>
-                      <a:headEnd type="none" w="med" len="med"/>
-                      <a:tailEnd type="none" w="med" len="med"/>
-                    </a:lnB>
-                    <a:solidFill>
-                      <a:srgbClr val="FFFFFF"/>
-                    </a:solidFill>
-                  </a:tcPr>
-                </a:tc>
-                <a:tc>
-                  <a:txBody>
-                    <a:bodyPr/>
-                    <a:lstStyle/>
-                    <a:p>
-                      <a:pPr algn="l" indent="0" marL="0">
-                        <a:buNone/>
-                      </a:pPr>
-                      <a:endParaRPr lang="en-US" sz="850" dirty="0"/>
-                    </a:p>
-                  </a:txBody>
-                  <a:tcPr marL="54864" marR="54864" marT="36576" marB="36576" anchor="ctr">
-                    <a:lnL w="9525" cap="flat" cmpd="sng" algn="ctr">
-                      <a:solidFill>
-                        <a:srgbClr val="C9D5E3"/>
-                      </a:solidFill>
-                      <a:prstDash val="solid"/>
-                      <a:round/>
-                      <a:headEnd type="none" w="med" len="med"/>
-                      <a:tailEnd type="none" w="med" len="med"/>
-                    </a:lnL>
-                    <a:lnR w="9525" cap="flat" cmpd="sng" algn="ctr">
-                      <a:solidFill>
-                        <a:srgbClr val="C9D5E3"/>
-                      </a:solidFill>
-                      <a:prstDash val="solid"/>
-                      <a:round/>
-                      <a:headEnd type="none" w="med" len="med"/>
-                      <a:tailEnd type="none" w="med" len="med"/>
-                    </a:lnR>
-                    <a:lnT w="9525" cap="flat" cmpd="sng" algn="ctr">
-                      <a:solidFill>
-                        <a:srgbClr val="C9D5E3"/>
-                      </a:solidFill>
-                      <a:prstDash val="solid"/>
-                      <a:round/>
-                      <a:headEnd type="none" w="med" len="med"/>
-                      <a:tailEnd type="none" w="med" len="med"/>
-                    </a:lnT>
-                    <a:lnB w="9525" cap="flat" cmpd="sng" algn="ctr">
-                      <a:solidFill>
-                        <a:srgbClr val="C9D5E3"/>
-                      </a:solidFill>
-                      <a:prstDash val="solid"/>
-                      <a:round/>
-                      <a:headEnd type="none" w="med" len="med"/>
-                      <a:tailEnd type="none" w="med" len="med"/>
-                    </a:lnB>
-                    <a:solidFill>
-                      <a:srgbClr val="FFFFFF"/>
-                    </a:solidFill>
-                  </a:tcPr>
-                </a:tc>
-                <a:tc>
-                  <a:txBody>
-                    <a:bodyPr/>
-                    <a:lstStyle/>
-                    <a:p>
-                      <a:pPr algn="l" indent="0" marL="0">
-                        <a:buNone/>
-                      </a:pPr>
-                      <a:endParaRPr lang="en-US" sz="850" dirty="0"/>
-                    </a:p>
-                  </a:txBody>
-                  <a:tcPr marL="54864" marR="54864" marT="36576" marB="36576" anchor="ctr">
-                    <a:lnL w="9525" cap="flat" cmpd="sng" algn="ctr">
-                      <a:solidFill>
-                        <a:srgbClr val="C9D5E3"/>
-                      </a:solidFill>
-                      <a:prstDash val="solid"/>
-                      <a:round/>
-                      <a:headEnd type="none" w="med" len="med"/>
-                      <a:tailEnd type="none" w="med" len="med"/>
-                    </a:lnL>
-                    <a:lnR w="9525" cap="flat" cmpd="sng" algn="ctr">
-                      <a:solidFill>
-                        <a:srgbClr val="C9D5E3"/>
-                      </a:solidFill>
-                      <a:prstDash val="solid"/>
-                      <a:round/>
-                      <a:headEnd type="none" w="med" len="med"/>
-                      <a:tailEnd type="none" w="med" len="med"/>
-                    </a:lnR>
-                    <a:lnT w="9525" cap="flat" cmpd="sng" algn="ctr">
-                      <a:solidFill>
-                        <a:srgbClr val="C9D5E3"/>
-                      </a:solidFill>
-                      <a:prstDash val="solid"/>
-                      <a:round/>
-                      <a:headEnd type="none" w="med" len="med"/>
-                      <a:tailEnd type="none" w="med" len="med"/>
-                    </a:lnT>
-                    <a:lnB w="9525" cap="flat" cmpd="sng" algn="ctr">
-                      <a:solidFill>
-                        <a:srgbClr val="C9D5E3"/>
-                      </a:solidFill>
-                      <a:prstDash val="solid"/>
-                      <a:round/>
-                      <a:headEnd type="none" w="med" len="med"/>
-                      <a:tailEnd type="none" w="med" len="med"/>
-                    </a:lnB>
-                    <a:solidFill>
-                      <a:srgbClr val="FFFFFF"/>
-                    </a:solidFill>
-                  </a:tcPr>
-                </a:tc>
-                <a:tc>
-                  <a:txBody>
-                    <a:bodyPr/>
-                    <a:lstStyle/>
-                    <a:p>
-                      <a:pPr algn="l" indent="0" marL="0">
-                        <a:buNone/>
-                      </a:pPr>
-                      <a:endParaRPr lang="en-US" sz="850" dirty="0"/>
-                    </a:p>
-                  </a:txBody>
-                  <a:tcPr marL="54864" marR="54864" marT="36576" marB="36576" anchor="ctr">
-                    <a:lnL w="9525" cap="flat" cmpd="sng" algn="ctr">
-                      <a:solidFill>
-                        <a:srgbClr val="C9D5E3"/>
-                      </a:solidFill>
-                      <a:prstDash val="solid"/>
-                      <a:round/>
-                      <a:headEnd type="none" w="med" len="med"/>
-                      <a:tailEnd type="none" w="med" len="med"/>
-                    </a:lnL>
-                    <a:lnR w="9525" cap="flat" cmpd="sng" algn="ctr">
-                      <a:solidFill>
-                        <a:srgbClr val="C9D5E3"/>
-                      </a:solidFill>
-                      <a:prstDash val="solid"/>
-                      <a:round/>
-                      <a:headEnd type="none" w="med" len="med"/>
-                      <a:tailEnd type="none" w="med" len="med"/>
-                    </a:lnR>
-                    <a:lnT w="9525" cap="flat" cmpd="sng" algn="ctr">
-                      <a:solidFill>
-                        <a:srgbClr val="C9D5E3"/>
-                      </a:solidFill>
-                      <a:prstDash val="solid"/>
-                      <a:round/>
-                      <a:headEnd type="none" w="med" len="med"/>
-                      <a:tailEnd type="none" w="med" len="med"/>
-                    </a:lnT>
-                    <a:lnB w="9525" cap="flat" cmpd="sng" algn="ctr">
-                      <a:solidFill>
-                        <a:srgbClr val="C9D5E3"/>
-                      </a:solidFill>
-                      <a:prstDash val="solid"/>
-                      <a:round/>
-                      <a:headEnd type="none" w="med" len="med"/>
-                      <a:tailEnd type="none" w="med" len="med"/>
-                    </a:lnB>
-                    <a:solidFill>
-                      <a:srgbClr val="FFFFFF"/>
-                    </a:solidFill>
-                  </a:tcPr>
-                </a:tc>
-                <a:tc>
-                  <a:txBody>
-                    <a:bodyPr/>
-                    <a:lstStyle/>
-                    <a:p>
-                      <a:pPr algn="l" indent="0" marL="0">
-                        <a:buNone/>
-                      </a:pPr>
-                      <a:endParaRPr lang="en-US" sz="850" dirty="0"/>
-                    </a:p>
-                  </a:txBody>
-                  <a:tcPr marL="54864" marR="54864" marT="36576" marB="36576" anchor="ctr">
-                    <a:lnL w="9525" cap="flat" cmpd="sng" algn="ctr">
-                      <a:solidFill>
-                        <a:srgbClr val="C9D5E3"/>
-                      </a:solidFill>
-                      <a:prstDash val="solid"/>
-                      <a:round/>
-                      <a:headEnd type="none" w="med" len="med"/>
-                      <a:tailEnd type="none" w="med" len="med"/>
-                    </a:lnL>
-                    <a:lnR w="9525" cap="flat" cmpd="sng" algn="ctr">
-                      <a:solidFill>
-                        <a:srgbClr val="C9D5E3"/>
-                      </a:solidFill>
-                      <a:prstDash val="solid"/>
-                      <a:round/>
-                      <a:headEnd type="none" w="med" len="med"/>
-                      <a:tailEnd type="none" w="med" len="med"/>
-                    </a:lnR>
-                    <a:lnT w="9525" cap="flat" cmpd="sng" algn="ctr">
-                      <a:solidFill>
-                        <a:srgbClr val="C9D5E3"/>
-                      </a:solidFill>
-                      <a:prstDash val="solid"/>
-                      <a:round/>
-                      <a:headEnd type="none" w="med" len="med"/>
-                      <a:tailEnd type="none" w="med" len="med"/>
-                    </a:lnT>
-                    <a:lnB w="9525" cap="flat" cmpd="sng" algn="ctr">
-                      <a:solidFill>
-                        <a:srgbClr val="C9D5E3"/>
-                      </a:solidFill>
-                      <a:prstDash val="solid"/>
-                      <a:round/>
-                      <a:headEnd type="none" w="med" len="med"/>
-                      <a:tailEnd type="none" w="med" len="med"/>
-                    </a:lnB>
-                    <a:solidFill>
-                      <a:srgbClr val="FFFFFF"/>
-                    </a:solidFill>
-                  </a:tcPr>
-                </a:tc>
-                <a:tc>
-                  <a:txBody>
-                    <a:bodyPr/>
-                    <a:lstStyle/>
-                    <a:p>
-                      <a:pPr algn="l" indent="0" marL="0">
-                        <a:buNone/>
-                      </a:pPr>
-                      <a:endParaRPr lang="en-US" sz="850" dirty="0"/>
-                    </a:p>
-                  </a:txBody>
-                  <a:tcPr marL="54864" marR="54864" marT="36576" marB="36576" anchor="ctr">
-                    <a:lnL w="9525" cap="flat" cmpd="sng" algn="ctr">
-                      <a:solidFill>
-                        <a:srgbClr val="C9D5E3"/>
-                      </a:solidFill>
-                      <a:prstDash val="solid"/>
-                      <a:round/>
-                      <a:headEnd type="none" w="med" len="med"/>
-                      <a:tailEnd type="none" w="med" len="med"/>
-                    </a:lnL>
-                    <a:lnR w="9525" cap="flat" cmpd="sng" algn="ctr">
-                      <a:solidFill>
-                        <a:srgbClr val="C9D5E3"/>
-                      </a:solidFill>
-                      <a:prstDash val="solid"/>
-                      <a:round/>
-                      <a:headEnd type="none" w="med" len="med"/>
-                      <a:tailEnd type="none" w="med" len="med"/>
-                    </a:lnR>
-                    <a:lnT w="9525" cap="flat" cmpd="sng" algn="ctr">
-                      <a:solidFill>
-                        <a:srgbClr val="C9D5E3"/>
-                      </a:solidFill>
-                      <a:prstDash val="solid"/>
-                      <a:round/>
-                      <a:headEnd type="none" w="med" len="med"/>
-                      <a:tailEnd type="none" w="med" len="med"/>
-                    </a:lnT>
-                    <a:lnB w="9525" cap="flat" cmpd="sng" algn="ctr">
-                      <a:solidFill>
-                        <a:srgbClr val="C9D5E3"/>
-                      </a:solidFill>
-                      <a:prstDash val="solid"/>
-                      <a:round/>
-                      <a:headEnd type="none" w="med" len="med"/>
-                      <a:tailEnd type="none" w="med" len="med"/>
-                    </a:lnB>
-                    <a:solidFill>
-                      <a:srgbClr val="FFFFFF"/>
-                    </a:solidFill>
-                  </a:tcPr>
-                </a:tc>
-              </a:tr>
-              <a:tr h="566928">
-                <a:tc>
-                  <a:txBody>
-                    <a:bodyPr/>
-                    <a:lstStyle/>
-                    <a:p>
-                      <a:pPr algn="ctr" indent="0" marL="0">
-                        <a:buNone/>
-                      </a:pPr>
-                      <a:r>
-                        <a:rPr lang="en-US" sz="850" dirty="0">
-                          <a:solidFill>
-                            <a:srgbClr val="1B2433"/>
-                          </a:solidFill>
-                        </a:rPr>
-                        <a:t>10</a:t>
-                      </a:r>
-                      <a:endParaRPr lang="en-US" sz="850" dirty="0"/>
-                    </a:p>
-                  </a:txBody>
-                  <a:tcPr marL="54864" marR="54864" marT="36576" marB="36576" anchor="ctr">
-                    <a:lnL w="9525" cap="flat" cmpd="sng" algn="ctr">
-                      <a:solidFill>
-                        <a:srgbClr val="C9D5E3"/>
-                      </a:solidFill>
-                      <a:prstDash val="solid"/>
-                      <a:round/>
-                      <a:headEnd type="none" w="med" len="med"/>
-                      <a:tailEnd type="none" w="med" len="med"/>
-                    </a:lnL>
-                    <a:lnR w="9525" cap="flat" cmpd="sng" algn="ctr">
-                      <a:solidFill>
-                        <a:srgbClr val="C9D5E3"/>
-                      </a:solidFill>
-                      <a:prstDash val="solid"/>
-                      <a:round/>
-                      <a:headEnd type="none" w="med" len="med"/>
-                      <a:tailEnd type="none" w="med" len="med"/>
-                    </a:lnR>
-                    <a:lnT w="9525" cap="flat" cmpd="sng" algn="ctr">
-                      <a:solidFill>
-                        <a:srgbClr val="C9D5E3"/>
-                      </a:solidFill>
-                      <a:prstDash val="solid"/>
-                      <a:round/>
-                      <a:headEnd type="none" w="med" len="med"/>
-                      <a:tailEnd type="none" w="med" len="med"/>
-                    </a:lnT>
-                    <a:lnB w="9525" cap="flat" cmpd="sng" algn="ctr">
-                      <a:solidFill>
-                        <a:srgbClr val="C9D5E3"/>
-                      </a:solidFill>
-                      <a:prstDash val="solid"/>
-                      <a:round/>
-                      <a:headEnd type="none" w="med" len="med"/>
-                      <a:tailEnd type="none" w="med" len="med"/>
-                    </a:lnB>
-                    <a:solidFill>
-                      <a:srgbClr val="EDF2F8"/>
-                    </a:solidFill>
-                  </a:tcPr>
-                </a:tc>
-                <a:tc>
-                  <a:txBody>
-                    <a:bodyPr/>
-                    <a:lstStyle/>
-                    <a:p>
-                      <a:pPr algn="l" indent="0" marL="0">
-                        <a:buNone/>
-                      </a:pPr>
-                      <a:endParaRPr lang="en-US" sz="850" dirty="0"/>
-                    </a:p>
-                  </a:txBody>
-                  <a:tcPr marL="54864" marR="54864" marT="36576" marB="36576" anchor="ctr">
-                    <a:lnL w="9525" cap="flat" cmpd="sng" algn="ctr">
-                      <a:solidFill>
-                        <a:srgbClr val="C9D5E3"/>
-                      </a:solidFill>
-                      <a:prstDash val="solid"/>
-                      <a:round/>
-                      <a:headEnd type="none" w="med" len="med"/>
-                      <a:tailEnd type="none" w="med" len="med"/>
-                    </a:lnL>
-                    <a:lnR w="9525" cap="flat" cmpd="sng" algn="ctr">
-                      <a:solidFill>
-                        <a:srgbClr val="C9D5E3"/>
-                      </a:solidFill>
-                      <a:prstDash val="solid"/>
-                      <a:round/>
-                      <a:headEnd type="none" w="med" len="med"/>
-                      <a:tailEnd type="none" w="med" len="med"/>
-                    </a:lnR>
-                    <a:lnT w="9525" cap="flat" cmpd="sng" algn="ctr">
-                      <a:solidFill>
-                        <a:srgbClr val="C9D5E3"/>
-                      </a:solidFill>
-                      <a:prstDash val="solid"/>
-                      <a:round/>
-                      <a:headEnd type="none" w="med" len="med"/>
-                      <a:tailEnd type="none" w="med" len="med"/>
-                    </a:lnT>
-                    <a:lnB w="9525" cap="flat" cmpd="sng" algn="ctr">
-                      <a:solidFill>
-                        <a:srgbClr val="C9D5E3"/>
-                      </a:solidFill>
-                      <a:prstDash val="solid"/>
-                      <a:round/>
-                      <a:headEnd type="none" w="med" len="med"/>
-                      <a:tailEnd type="none" w="med" len="med"/>
-                    </a:lnB>
-                    <a:solidFill>
-                      <a:srgbClr val="EDF2F8"/>
-                    </a:solidFill>
-                  </a:tcPr>
-                </a:tc>
-                <a:tc>
-                  <a:txBody>
-                    <a:bodyPr/>
-                    <a:lstStyle/>
-                    <a:p>
-                      <a:pPr algn="l" indent="0" marL="0">
-                        <a:buNone/>
-                      </a:pPr>
-                      <a:endParaRPr lang="en-US" sz="850" dirty="0"/>
-                    </a:p>
-                  </a:txBody>
-                  <a:tcPr marL="54864" marR="54864" marT="36576" marB="36576" anchor="ctr">
-                    <a:lnL w="9525" cap="flat" cmpd="sng" algn="ctr">
-                      <a:solidFill>
-                        <a:srgbClr val="C9D5E3"/>
-                      </a:solidFill>
-                      <a:prstDash val="solid"/>
-                      <a:round/>
-                      <a:headEnd type="none" w="med" len="med"/>
-                      <a:tailEnd type="none" w="med" len="med"/>
-                    </a:lnL>
-                    <a:lnR w="9525" cap="flat" cmpd="sng" algn="ctr">
-                      <a:solidFill>
-                        <a:srgbClr val="C9D5E3"/>
-                      </a:solidFill>
-                      <a:prstDash val="solid"/>
-                      <a:round/>
-                      <a:headEnd type="none" w="med" len="med"/>
-                      <a:tailEnd type="none" w="med" len="med"/>
-                    </a:lnR>
-                    <a:lnT w="9525" cap="flat" cmpd="sng" algn="ctr">
-                      <a:solidFill>
-                        <a:srgbClr val="C9D5E3"/>
-                      </a:solidFill>
-                      <a:prstDash val="solid"/>
-                      <a:round/>
-                      <a:headEnd type="none" w="med" len="med"/>
-                      <a:tailEnd type="none" w="med" len="med"/>
-                    </a:lnT>
-                    <a:lnB w="9525" cap="flat" cmpd="sng" algn="ctr">
-                      <a:solidFill>
-                        <a:srgbClr val="C9D5E3"/>
-                      </a:solidFill>
-                      <a:prstDash val="solid"/>
-                      <a:round/>
-                      <a:headEnd type="none" w="med" len="med"/>
-                      <a:tailEnd type="none" w="med" len="med"/>
-                    </a:lnB>
-                    <a:solidFill>
-                      <a:srgbClr val="EDF2F8"/>
-                    </a:solidFill>
-                  </a:tcPr>
-                </a:tc>
-                <a:tc>
-                  <a:txBody>
-                    <a:bodyPr/>
-                    <a:lstStyle/>
-                    <a:p>
-                      <a:pPr algn="l" indent="0" marL="0">
-                        <a:buNone/>
-                      </a:pPr>
-                      <a:endParaRPr lang="en-US" sz="850" dirty="0"/>
-                    </a:p>
-                  </a:txBody>
-                  <a:tcPr marL="54864" marR="54864" marT="36576" marB="36576" anchor="ctr">
-                    <a:lnL w="9525" cap="flat" cmpd="sng" algn="ctr">
-                      <a:solidFill>
-                        <a:srgbClr val="C9D5E3"/>
-                      </a:solidFill>
-                      <a:prstDash val="solid"/>
-                      <a:round/>
-                      <a:headEnd type="none" w="med" len="med"/>
-                      <a:tailEnd type="none" w="med" len="med"/>
-                    </a:lnL>
-                    <a:lnR w="9525" cap="flat" cmpd="sng" algn="ctr">
-                      <a:solidFill>
-                        <a:srgbClr val="C9D5E3"/>
-                      </a:solidFill>
-                      <a:prstDash val="solid"/>
-                      <a:round/>
-                      <a:headEnd type="none" w="med" len="med"/>
-                      <a:tailEnd type="none" w="med" len="med"/>
-                    </a:lnR>
-                    <a:lnT w="9525" cap="flat" cmpd="sng" algn="ctr">
-                      <a:solidFill>
-                        <a:srgbClr val="C9D5E3"/>
-                      </a:solidFill>
-                      <a:prstDash val="solid"/>
-                      <a:round/>
-                      <a:headEnd type="none" w="med" len="med"/>
-                      <a:tailEnd type="none" w="med" len="med"/>
-                    </a:lnT>
-                    <a:lnB w="9525" cap="flat" cmpd="sng" algn="ctr">
-                      <a:solidFill>
-                        <a:srgbClr val="C9D5E3"/>
-                      </a:solidFill>
-                      <a:prstDash val="solid"/>
-                      <a:round/>
-                      <a:headEnd type="none" w="med" len="med"/>
-                      <a:tailEnd type="none" w="med" len="med"/>
-                    </a:lnB>
-                    <a:solidFill>
-                      <a:srgbClr val="EDF2F8"/>
-                    </a:solidFill>
-                  </a:tcPr>
-                </a:tc>
-                <a:tc>
-                  <a:txBody>
-                    <a:bodyPr/>
-                    <a:lstStyle/>
-                    <a:p>
-                      <a:pPr algn="l" indent="0" marL="0">
-                        <a:buNone/>
-                      </a:pPr>
-                      <a:endParaRPr lang="en-US" sz="850" dirty="0"/>
-                    </a:p>
-                  </a:txBody>
-                  <a:tcPr marL="54864" marR="54864" marT="36576" marB="36576" anchor="ctr">
-                    <a:lnL w="9525" cap="flat" cmpd="sng" algn="ctr">
-                      <a:solidFill>
-                        <a:srgbClr val="C9D5E3"/>
-                      </a:solidFill>
-                      <a:prstDash val="solid"/>
-                      <a:round/>
-                      <a:headEnd type="none" w="med" len="med"/>
-                      <a:tailEnd type="none" w="med" len="med"/>
-                    </a:lnL>
-                    <a:lnR w="9525" cap="flat" cmpd="sng" algn="ctr">
-                      <a:solidFill>
-                        <a:srgbClr val="C9D5E3"/>
-                      </a:solidFill>
-                      <a:prstDash val="solid"/>
-                      <a:round/>
-                      <a:headEnd type="none" w="med" len="med"/>
-                      <a:tailEnd type="none" w="med" len="med"/>
-                    </a:lnR>
-                    <a:lnT w="9525" cap="flat" cmpd="sng" algn="ctr">
-                      <a:solidFill>
-                        <a:srgbClr val="C9D5E3"/>
-                      </a:solidFill>
-                      <a:prstDash val="solid"/>
-                      <a:round/>
-                      <a:headEnd type="none" w="med" len="med"/>
-                      <a:tailEnd type="none" w="med" len="med"/>
-                    </a:lnT>
-                    <a:lnB w="9525" cap="flat" cmpd="sng" algn="ctr">
-                      <a:solidFill>
-                        <a:srgbClr val="C9D5E3"/>
-                      </a:solidFill>
-                      <a:prstDash val="solid"/>
-                      <a:round/>
-                      <a:headEnd type="none" w="med" len="med"/>
-                      <a:tailEnd type="none" w="med" len="med"/>
-                    </a:lnB>
-                    <a:solidFill>
-                      <a:srgbClr val="EDF2F8"/>
-                    </a:solidFill>
-                  </a:tcPr>
-                </a:tc>
-                <a:tc>
-                  <a:txBody>
-                    <a:bodyPr/>
-                    <a:lstStyle/>
-                    <a:p>
-                      <a:pPr algn="l" indent="0" marL="0">
-                        <a:buNone/>
-                      </a:pPr>
-                      <a:endParaRPr lang="en-US" sz="850" dirty="0"/>
-                    </a:p>
-                  </a:txBody>
-                  <a:tcPr marL="54864" marR="54864" marT="36576" marB="36576" anchor="ctr">
-                    <a:lnL w="9525" cap="flat" cmpd="sng" algn="ctr">
-                      <a:solidFill>
-                        <a:srgbClr val="C9D5E3"/>
-                      </a:solidFill>
-                      <a:prstDash val="solid"/>
-                      <a:round/>
-                      <a:headEnd type="none" w="med" len="med"/>
-                      <a:tailEnd type="none" w="med" len="med"/>
-                    </a:lnL>
-                    <a:lnR w="9525" cap="flat" cmpd="sng" algn="ctr">
-                      <a:solidFill>
-                        <a:srgbClr val="C9D5E3"/>
-                      </a:solidFill>
-                      <a:prstDash val="solid"/>
-                      <a:round/>
-                      <a:headEnd type="none" w="med" len="med"/>
-                      <a:tailEnd type="none" w="med" len="med"/>
-                    </a:lnR>
-                    <a:lnT w="9525" cap="flat" cmpd="sng" algn="ctr">
-                      <a:solidFill>
-                        <a:srgbClr val="C9D5E3"/>
-                      </a:solidFill>
-                      <a:prstDash val="solid"/>
-                      <a:round/>
-                      <a:headEnd type="none" w="med" len="med"/>
-                      <a:tailEnd type="none" w="med" len="med"/>
-                    </a:lnT>
-                    <a:lnB w="9525" cap="flat" cmpd="sng" algn="ctr">
-                      <a:solidFill>
-                        <a:srgbClr val="C9D5E3"/>
-                      </a:solidFill>
-                      <a:prstDash val="solid"/>
-                      <a:round/>
-                      <a:headEnd type="none" w="med" len="med"/>
-                      <a:tailEnd type="none" w="med" len="med"/>
-                    </a:lnB>
-                    <a:solidFill>
-                      <a:srgbClr val="EDF2F8"/>
                     </a:solidFill>
                   </a:tcPr>
                 </a:tc>
@@ -27404,9 +23796,195 @@
           </a:graphicData>
         </a:graphic>
       </p:graphicFrame>
-      <p:sp>
-        <p:nvSpPr>
-          <p:cNvPr id="6" name="Shape 3"/>
+      <p:pic>
+        <p:nvPicPr>
+          <p:cNvPr id="5" name="photo img19.jpg" descr="Nghệ An – hút sương dầu">    </p:cNvPr>
+          <p:cNvPicPr>
+            <a:picLocks noChangeAspect="1"/>
+          </p:cNvPicPr>
+          <p:nvPr/>
+        </p:nvPicPr>
+        <p:blipFill>
+          <a:blip r:embed="rId1"/>
+          <a:stretch>
+            <a:fillRect/>
+          </a:stretch>
+        </p:blipFill>
+        <p:spPr>
+          <a:xfrm>
+            <a:off x="502920" y="4892040"/>
+            <a:ext cx="2063496" cy="2926080"/>
+          </a:xfrm>
+          <a:prstGeom prst="rect">
+            <a:avLst/>
+          </a:prstGeom>
+        </p:spPr>
+      </p:pic>
+      <p:sp>
+        <p:nvSpPr>
+          <p:cNvPr id="6" name="Text 2"/>
+          <p:cNvSpPr txBox="1"/>
+          <p:nvPr/>
+        </p:nvSpPr>
+        <p:spPr>
+          <a:xfrm>
+            <a:off x="502920" y="7854696"/>
+            <a:ext cx="2063496" cy="201168"/>
+          </a:xfrm>
+          <a:prstGeom prst="rect">
+            <a:avLst/>
+          </a:prstGeom>
+          <a:noFill/>
+          <a:ln/>
+        </p:spPr>
+        <p:txBody>
+          <a:bodyPr wrap="square" lIns="0" tIns="0" rIns="0" bIns="0" rtlCol="0" anchor="ctr">
+            <a:normAutofit/>
+          </a:bodyPr>
+          <a:lstStyle/>
+          <a:p>
+            <a:pPr indent="0" marL="0">
+              <a:buNone/>
+            </a:pPr>
+            <a:r>
+              <a:rPr lang="en-US" sz="800" i="1" dirty="0">
+                <a:solidFill>
+                  <a:schemeClr val="accent3"/>
+                </a:solidFill>
+              </a:rPr>
+              <a:t>Nghệ An – hút sương dầu</a:t>
+            </a:r>
+            <a:endParaRPr lang="en-US" sz="800" dirty="0"/>
+          </a:p>
+        </p:txBody>
+      </p:sp>
+      <p:pic>
+        <p:nvPicPr>
+          <p:cNvPr id="7" name="photo img07.jpg" descr="Ninh Bình – điện nước">    </p:cNvPr>
+          <p:cNvPicPr>
+            <a:picLocks noChangeAspect="1"/>
+          </p:cNvPicPr>
+          <p:nvPr/>
+        </p:nvPicPr>
+        <p:blipFill>
+          <a:blip r:embed="rId2"/>
+          <a:stretch>
+            <a:fillRect/>
+          </a:stretch>
+        </p:blipFill>
+        <p:spPr>
+          <a:xfrm>
+            <a:off x="2749296" y="4892040"/>
+            <a:ext cx="2063496" cy="2926080"/>
+          </a:xfrm>
+          <a:prstGeom prst="rect">
+            <a:avLst/>
+          </a:prstGeom>
+        </p:spPr>
+      </p:pic>
+      <p:sp>
+        <p:nvSpPr>
+          <p:cNvPr id="8" name="Text 3"/>
+          <p:cNvSpPr txBox="1"/>
+          <p:nvPr/>
+        </p:nvSpPr>
+        <p:spPr>
+          <a:xfrm>
+            <a:off x="2749296" y="7854696"/>
+            <a:ext cx="2063496" cy="201168"/>
+          </a:xfrm>
+          <a:prstGeom prst="rect">
+            <a:avLst/>
+          </a:prstGeom>
+          <a:noFill/>
+          <a:ln/>
+        </p:spPr>
+        <p:txBody>
+          <a:bodyPr wrap="square" lIns="0" tIns="0" rIns="0" bIns="0" rtlCol="0" anchor="ctr">
+            <a:normAutofit/>
+          </a:bodyPr>
+          <a:lstStyle/>
+          <a:p>
+            <a:pPr indent="0" marL="0">
+              <a:buNone/>
+            </a:pPr>
+            <a:r>
+              <a:rPr lang="en-US" sz="800" i="1" dirty="0">
+                <a:solidFill>
+                  <a:schemeClr val="accent3"/>
+                </a:solidFill>
+              </a:rPr>
+              <a:t>Ninh Bình – điện nước</a:t>
+            </a:r>
+            <a:endParaRPr lang="en-US" sz="800" dirty="0"/>
+          </a:p>
+        </p:txBody>
+      </p:sp>
+      <p:pic>
+        <p:nvPicPr>
+          <p:cNvPr id="9" name="photo img61.jpg" descr="Huế – xử lý nước UF/RO">    </p:cNvPr>
+          <p:cNvPicPr>
+            <a:picLocks noChangeAspect="1"/>
+          </p:cNvPicPr>
+          <p:nvPr/>
+        </p:nvPicPr>
+        <p:blipFill>
+          <a:blip r:embed="rId3"/>
+          <a:stretch>
+            <a:fillRect/>
+          </a:stretch>
+        </p:blipFill>
+        <p:spPr>
+          <a:xfrm>
+            <a:off x="4995672" y="4892040"/>
+            <a:ext cx="2063496" cy="2926080"/>
+          </a:xfrm>
+          <a:prstGeom prst="rect">
+            <a:avLst/>
+          </a:prstGeom>
+        </p:spPr>
+      </p:pic>
+      <p:sp>
+        <p:nvSpPr>
+          <p:cNvPr id="10" name="Text 4"/>
+          <p:cNvSpPr txBox="1"/>
+          <p:nvPr/>
+        </p:nvSpPr>
+        <p:spPr>
+          <a:xfrm>
+            <a:off x="4995672" y="7854696"/>
+            <a:ext cx="2063496" cy="201168"/>
+          </a:xfrm>
+          <a:prstGeom prst="rect">
+            <a:avLst/>
+          </a:prstGeom>
+          <a:noFill/>
+          <a:ln/>
+        </p:spPr>
+        <p:txBody>
+          <a:bodyPr wrap="square" lIns="0" tIns="0" rIns="0" bIns="0" rtlCol="0" anchor="ctr">
+            <a:normAutofit/>
+          </a:bodyPr>
+          <a:lstStyle/>
+          <a:p>
+            <a:pPr indent="0" marL="0">
+              <a:buNone/>
+            </a:pPr>
+            <a:r>
+              <a:rPr lang="en-US" sz="800" i="1" dirty="0">
+                <a:solidFill>
+                  <a:schemeClr val="accent3"/>
+                </a:solidFill>
+              </a:rPr>
+              <a:t>Huế – xử lý nước UF/RO</a:t>
+            </a:r>
+            <a:endParaRPr lang="en-US" sz="800" dirty="0"/>
+          </a:p>
+        </p:txBody>
+      </p:sp>
+      <p:sp>
+        <p:nvSpPr>
+          <p:cNvPr id="11" name="Shape 5"/>
           <p:cNvSpPr/>
           <p:nvPr/>
         </p:nvSpPr>
@@ -27433,7 +24011,7 @@
       </p:sp>
       <p:sp>
         <p:nvSpPr>
-          <p:cNvPr id="7" name="Text 4"/>
+          <p:cNvPr id="12" name="Text 6"/>
           <p:cNvSpPr txBox="1"/>
           <p:nvPr/>
         </p:nvSpPr>
@@ -27464,7 +24042,7 @@
                 <a:ea typeface="Arial" pitchFamily="34" charset="-122"/>
                 <a:cs typeface="Arial" pitchFamily="34" charset="-120"/>
               </a:rPr>
-              <a:t>HỒ SƠ ĐÍNH KÈM (NẾU CÓ)</a:t>
+              <a:t>HỒ SƠ CUNG CẤP KHI CÓ YÊU CẦU</a:t>
             </a:r>
             <a:endParaRPr lang="en-US" sz="900" dirty="0"/>
           </a:p>
@@ -27472,7 +24050,7 @@
       </p:sp>
       <p:sp>
         <p:nvSpPr>
-          <p:cNvPr id="8" name="Text 5"/>
+          <p:cNvPr id="13" name="Text 7"/>
           <p:cNvSpPr txBox="1"/>
           <p:nvPr/>
         </p:nvSpPr>
@@ -27504,7 +24082,7 @@
                   <a:schemeClr val="tx1"/>
                 </a:solidFill>
               </a:rPr>
-              <a:t>Bản sao hợp đồng, biên bản nghiệm thu, thanh lý hợp đồng tiêu biểu</a:t>
+              <a:t>Hợp đồng, biên bản nghiệm thu, thanh lý hợp đồng của các công trình</a:t>
             </a:r>
             <a:endParaRPr lang="en-US" sz="950" dirty="0"/>
           </a:p>
@@ -27522,7 +24100,7 @@
                   <a:schemeClr val="tx1"/>
                 </a:solidFill>
               </a:rPr>
-              <a:t>Thư xác nhận / đánh giá của chủ đầu tư, tổng thầu</a:t>
+              <a:t>Thông tin chủ đầu tư, tổng thầu để Quý khách tham khảo, xác minh</a:t>
             </a:r>
             <a:endParaRPr lang="en-US" sz="950" dirty="0"/>
           </a:p>
@@ -27540,7 +24118,7 @@
                   <a:schemeClr val="tx1"/>
                 </a:solidFill>
               </a:rPr>
-              <a:t>Chứng chỉ an toàn lao động, chứng chỉ hành nghề của nhân sự chủ chốt</a:t>
+              <a:t>Giấy chứng nhận đăng ký doanh nghiệp, chứng chỉ an toàn lao động của nhân sự</a:t>
             </a:r>
             <a:endParaRPr lang="en-US" sz="950" dirty="0"/>
           </a:p>
@@ -28555,7 +25133,7 @@
                   <a:schemeClr val="tx1"/>
                 </a:solidFill>
               </a:rPr>
-              <a:t>Bảo hành theo hợp đồng (thời hạn: CẦN BỔ SUNG); phản hồi sự cố nhanh chóng.</a:t>
+              <a:t>Bảo hành 12 tháng kể từ ngày nghiệm thu bàn giao (hoặc theo hợp đồng); phản hồi sự cố nhanh chóng.</a:t>
             </a:r>
             <a:endParaRPr lang="en-US" sz="950" dirty="0"/>
           </a:p>
@@ -31449,7 +28027,7 @@
                   <a:schemeClr val="tx1"/>
                 </a:solidFill>
               </a:rPr>
-              <a:t>BLT là đơn vị thi công chuyên sâu về hệ thống kỹ thuật công trình: điện, cấp thoát nước, đường ống công nghệ, hệ thống hút sương dầu – lọc khí cho nhà xưởng và hệ thống bơm – xử lý nước. Đội ngũ của chúng tôi đang trực tiếp thi công tại nhiều công trình ở Nghệ An, Ninh Bình và Thừa Thiên Huế, từ công trình nhiều tầng đến nhà xưởng sản xuất đang vận hành.</a:t>
+              <a:t>BLT là đơn vị thi công chuyên sâu về hệ thống kỹ thuật công trình: điện, cấp thoát nước, đường ống công nghệ, hệ thống hút sương dầu – lọc khí cho nhà xưởng và hệ thống bơm – xử lý nước. Đội ngũ của chúng tôi đang trực tiếp thi công tại nhiều công trình ở Nghệ An, Ninh Bình và Thành phố Huế, từ công trình nhiều tầng đến nhà xưởng sản xuất đang vận hành.</a:t>
             </a:r>
             <a:endParaRPr lang="en-US" sz="1150" dirty="0"/>
           </a:p>
@@ -32167,13 +28745,13 @@
             </a:avLst>
           </a:prstGeom>
           <a:solidFill>
-            <a:schemeClr val="bg1"/>
+            <a:schemeClr val="tx2"/>
           </a:solidFill>
           <a:ln w="12700">
             <a:solidFill>
-              <a:schemeClr val="accent1"/>
+              <a:schemeClr val="tx2"/>
             </a:solidFill>
-            <a:prstDash val="dash"/>
+            <a:prstDash val="solid"/>
           </a:ln>
         </p:spPr>
       </p:sp>
@@ -32202,7 +28780,7 @@
               <a:buNone/>
             </a:pPr>
             <a:r>
-              <a:rPr lang="en-US" sz="1200" b="1" dirty="0">
+              <a:rPr lang="en-US" sz="3000" b="1" dirty="0">
                 <a:solidFill>
                   <a:schemeClr val="accent1"/>
                 </a:solidFill>
@@ -32210,9 +28788,9 @@
                 <a:ea typeface="Arial" pitchFamily="34" charset="-122"/>
                 <a:cs typeface="Arial" pitchFamily="34" charset="-120"/>
               </a:rPr>
-              <a:t>CẦN BỔ SUNG</a:t>
-            </a:r>
-            <a:endParaRPr lang="en-US" sz="1200" dirty="0"/>
+              <a:t>15+</a:t>
+            </a:r>
+            <a:endParaRPr lang="en-US" sz="3000" dirty="0"/>
           </a:p>
         </p:txBody>
       </p:sp>
@@ -32243,10 +28821,10 @@
             <a:r>
               <a:rPr lang="en-US" sz="850" b="1" spc="100" kern="0" dirty="0">
                 <a:solidFill>
-                  <a:schemeClr val="tx2"/>
-                </a:solidFill>
-              </a:rPr>
-              <a:t>VỐN ĐIỀU LỆ</a:t>
+                  <a:schemeClr val="bg1"/>
+                </a:solidFill>
+              </a:rPr>
+              <a:t>NHÂN SỰ THI CÔNG</a:t>
             </a:r>
             <a:endParaRPr lang="en-US" sz="850" dirty="0"/>
           </a:p>
@@ -32279,10 +28857,10 @@
             <a:r>
               <a:rPr lang="en-US" sz="800" dirty="0">
                 <a:solidFill>
-                  <a:schemeClr val="accent3"/>
-                </a:solidFill>
-              </a:rPr>
-              <a:t>Theo giấy ĐKDN</a:t>
+                  <a:schemeClr val="accent4"/>
+                </a:solidFill>
+              </a:rPr>
+              <a:t>huy động linh hoạt theo tiến độ</a:t>
             </a:r>
             <a:endParaRPr lang="en-US" sz="800" dirty="0"/>
           </a:p>
@@ -32738,42 +29316,6 @@
               <a:t>Chuẩn hóa hồ sơ kỹ thuật, nghiệm thu và bảo hành</a:t>
             </a:r>
             <a:endParaRPr lang="en-US" sz="950" dirty="0"/>
-          </a:p>
-        </p:txBody>
-      </p:sp>
-      <p:sp>
-        <p:nvSpPr>
-          <p:cNvPr id="30" name="Text 26"/>
-          <p:cNvSpPr txBox="1"/>
-          <p:nvPr/>
-        </p:nvSpPr>
-        <p:spPr>
-          <a:xfrm>
-            <a:off x="4681728" y="7296912"/>
-            <a:ext cx="2377440" cy="219456"/>
-          </a:xfrm>
-          <a:prstGeom prst="rect">
-            <a:avLst/>
-          </a:prstGeom>
-          <a:noFill/>
-          <a:ln/>
-        </p:spPr>
-        <p:txBody>
-          <a:bodyPr wrap="square" lIns="0" tIns="0" rIns="0" bIns="0" rtlCol="0" anchor="ctr"/>
-          <a:lstStyle/>
-          <a:p>
-            <a:pPr algn="r" indent="0" marL="0">
-              <a:buNone/>
-            </a:pPr>
-            <a:r>
-              <a:rPr lang="en-US" sz="750" b="1" spc="100" kern="0" dirty="0">
-                <a:solidFill>
-                  <a:schemeClr val="accent1"/>
-                </a:solidFill>
-              </a:rPr>
-              <a:t>ĐỊNH HƯỚNG: DỰ THẢO – CẦN DUYỆT</a:t>
-            </a:r>
-            <a:endParaRPr lang="en-US" sz="750" dirty="0"/>
           </a:p>
         </p:txBody>
       </p:sp>
@@ -33383,254 +29925,12 @@
                         <a:buNone/>
                       </a:pPr>
                       <a:r>
-                        <a:rPr lang="en-US" sz="1000" b="1" i="1" dirty="0">
+                        <a:rPr lang="en-US" sz="1000" dirty="0">
                           <a:solidFill>
-                            <a:schemeClr val="accent1"/>
+                            <a:schemeClr val="tx1"/>
                           </a:solidFill>
                         </a:rPr>
-                        <a:t>Công ty TNHH – CẦN BỔ SUNG (1 hay 2 thành viên)</a:t>
-                      </a:r>
-                      <a:endParaRPr lang="en-US" sz="1000" dirty="0"/>
-                    </a:p>
-                  </a:txBody>
-                  <a:tcPr marL="109728" marR="109728" marT="64008" marB="64008" anchor="ctr">
-                    <a:lnL w="9525" cap="flat" cmpd="sng" algn="ctr">
-                      <a:solidFill>
-                        <a:srgbClr val="C9D5E3"/>
-                      </a:solidFill>
-                      <a:prstDash val="solid"/>
-                      <a:round/>
-                      <a:headEnd type="none" w="med" len="med"/>
-                      <a:tailEnd type="none" w="med" len="med"/>
-                    </a:lnL>
-                    <a:lnR w="9525" cap="flat" cmpd="sng" algn="ctr">
-                      <a:solidFill>
-                        <a:srgbClr val="C9D5E3"/>
-                      </a:solidFill>
-                      <a:prstDash val="solid"/>
-                      <a:round/>
-                      <a:headEnd type="none" w="med" len="med"/>
-                      <a:tailEnd type="none" w="med" len="med"/>
-                    </a:lnR>
-                    <a:lnT w="9525" cap="flat" cmpd="sng" algn="ctr">
-                      <a:solidFill>
-                        <a:srgbClr val="C9D5E3"/>
-                      </a:solidFill>
-                      <a:prstDash val="solid"/>
-                      <a:round/>
-                      <a:headEnd type="none" w="med" len="med"/>
-                      <a:tailEnd type="none" w="med" len="med"/>
-                    </a:lnT>
-                    <a:lnB w="9525" cap="flat" cmpd="sng" algn="ctr">
-                      <a:solidFill>
-                        <a:srgbClr val="C9D5E3"/>
-                      </a:solidFill>
-                      <a:prstDash val="solid"/>
-                      <a:round/>
-                      <a:headEnd type="none" w="med" len="med"/>
-                      <a:tailEnd type="none" w="med" len="med"/>
-                    </a:lnB>
-                  </a:tcPr>
-                </a:tc>
-              </a:tr>
-              <a:tr h="384048">
-                <a:tc>
-                  <a:txBody>
-                    <a:bodyPr/>
-                    <a:lstStyle/>
-                    <a:p>
-                      <a:pPr indent="0" marL="0">
-                        <a:buNone/>
-                      </a:pPr>
-                      <a:r>
-                        <a:rPr lang="en-US" sz="1000" b="1" dirty="0">
-                          <a:solidFill>
-                            <a:schemeClr val="tx2"/>
-                          </a:solidFill>
-                        </a:rPr>
-                        <a:t>Ngày đăng ký lần đầu</a:t>
-                      </a:r>
-                      <a:endParaRPr lang="en-US" sz="1000" dirty="0"/>
-                    </a:p>
-                  </a:txBody>
-                  <a:tcPr marL="109728" marR="109728" marT="64008" marB="64008" anchor="ctr">
-                    <a:lnL w="9525" cap="flat" cmpd="sng" algn="ctr">
-                      <a:solidFill>
-                        <a:srgbClr val="C9D5E3"/>
-                      </a:solidFill>
-                      <a:prstDash val="solid"/>
-                      <a:round/>
-                      <a:headEnd type="none" w="med" len="med"/>
-                      <a:tailEnd type="none" w="med" len="med"/>
-                    </a:lnL>
-                    <a:lnR w="9525" cap="flat" cmpd="sng" algn="ctr">
-                      <a:solidFill>
-                        <a:srgbClr val="C9D5E3"/>
-                      </a:solidFill>
-                      <a:prstDash val="solid"/>
-                      <a:round/>
-                      <a:headEnd type="none" w="med" len="med"/>
-                      <a:tailEnd type="none" w="med" len="med"/>
-                    </a:lnR>
-                    <a:lnT w="9525" cap="flat" cmpd="sng" algn="ctr">
-                      <a:solidFill>
-                        <a:srgbClr val="C9D5E3"/>
-                      </a:solidFill>
-                      <a:prstDash val="solid"/>
-                      <a:round/>
-                      <a:headEnd type="none" w="med" len="med"/>
-                      <a:tailEnd type="none" w="med" len="med"/>
-                    </a:lnT>
-                    <a:lnB w="9525" cap="flat" cmpd="sng" algn="ctr">
-                      <a:solidFill>
-                        <a:srgbClr val="C9D5E3"/>
-                      </a:solidFill>
-                      <a:prstDash val="solid"/>
-                      <a:round/>
-                      <a:headEnd type="none" w="med" len="med"/>
-                      <a:tailEnd type="none" w="med" len="med"/>
-                    </a:lnB>
-                    <a:solidFill>
-                      <a:schemeClr val="bg2"/>
-                    </a:solidFill>
-                  </a:tcPr>
-                </a:tc>
-                <a:tc>
-                  <a:txBody>
-                    <a:bodyPr/>
-                    <a:lstStyle/>
-                    <a:p>
-                      <a:pPr indent="0" marL="0">
-                        <a:buNone/>
-                      </a:pPr>
-                      <a:r>
-                        <a:rPr lang="en-US" sz="1000" b="1" i="1" dirty="0">
-                          <a:solidFill>
-                            <a:schemeClr val="accent1"/>
-                          </a:solidFill>
-                        </a:rPr>
-                        <a:t>CẦN BỔ SUNG</a:t>
-                      </a:r>
-                      <a:endParaRPr lang="en-US" sz="1000" dirty="0"/>
-                    </a:p>
-                  </a:txBody>
-                  <a:tcPr marL="109728" marR="109728" marT="64008" marB="64008" anchor="ctr">
-                    <a:lnL w="9525" cap="flat" cmpd="sng" algn="ctr">
-                      <a:solidFill>
-                        <a:srgbClr val="C9D5E3"/>
-                      </a:solidFill>
-                      <a:prstDash val="solid"/>
-                      <a:round/>
-                      <a:headEnd type="none" w="med" len="med"/>
-                      <a:tailEnd type="none" w="med" len="med"/>
-                    </a:lnL>
-                    <a:lnR w="9525" cap="flat" cmpd="sng" algn="ctr">
-                      <a:solidFill>
-                        <a:srgbClr val="C9D5E3"/>
-                      </a:solidFill>
-                      <a:prstDash val="solid"/>
-                      <a:round/>
-                      <a:headEnd type="none" w="med" len="med"/>
-                      <a:tailEnd type="none" w="med" len="med"/>
-                    </a:lnR>
-                    <a:lnT w="9525" cap="flat" cmpd="sng" algn="ctr">
-                      <a:solidFill>
-                        <a:srgbClr val="C9D5E3"/>
-                      </a:solidFill>
-                      <a:prstDash val="solid"/>
-                      <a:round/>
-                      <a:headEnd type="none" w="med" len="med"/>
-                      <a:tailEnd type="none" w="med" len="med"/>
-                    </a:lnT>
-                    <a:lnB w="9525" cap="flat" cmpd="sng" algn="ctr">
-                      <a:solidFill>
-                        <a:srgbClr val="C9D5E3"/>
-                      </a:solidFill>
-                      <a:prstDash val="solid"/>
-                      <a:round/>
-                      <a:headEnd type="none" w="med" len="med"/>
-                      <a:tailEnd type="none" w="med" len="med"/>
-                    </a:lnB>
-                  </a:tcPr>
-                </a:tc>
-              </a:tr>
-              <a:tr h="384048">
-                <a:tc>
-                  <a:txBody>
-                    <a:bodyPr/>
-                    <a:lstStyle/>
-                    <a:p>
-                      <a:pPr indent="0" marL="0">
-                        <a:buNone/>
-                      </a:pPr>
-                      <a:r>
-                        <a:rPr lang="en-US" sz="1000" b="1" dirty="0">
-                          <a:solidFill>
-                            <a:schemeClr val="tx2"/>
-                          </a:solidFill>
-                        </a:rPr>
-                        <a:t>Vốn điều lệ</a:t>
-                      </a:r>
-                      <a:endParaRPr lang="en-US" sz="1000" dirty="0"/>
-                    </a:p>
-                  </a:txBody>
-                  <a:tcPr marL="109728" marR="109728" marT="64008" marB="64008" anchor="ctr">
-                    <a:lnL w="9525" cap="flat" cmpd="sng" algn="ctr">
-                      <a:solidFill>
-                        <a:srgbClr val="C9D5E3"/>
-                      </a:solidFill>
-                      <a:prstDash val="solid"/>
-                      <a:round/>
-                      <a:headEnd type="none" w="med" len="med"/>
-                      <a:tailEnd type="none" w="med" len="med"/>
-                    </a:lnL>
-                    <a:lnR w="9525" cap="flat" cmpd="sng" algn="ctr">
-                      <a:solidFill>
-                        <a:srgbClr val="C9D5E3"/>
-                      </a:solidFill>
-                      <a:prstDash val="solid"/>
-                      <a:round/>
-                      <a:headEnd type="none" w="med" len="med"/>
-                      <a:tailEnd type="none" w="med" len="med"/>
-                    </a:lnR>
-                    <a:lnT w="9525" cap="flat" cmpd="sng" algn="ctr">
-                      <a:solidFill>
-                        <a:srgbClr val="C9D5E3"/>
-                      </a:solidFill>
-                      <a:prstDash val="solid"/>
-                      <a:round/>
-                      <a:headEnd type="none" w="med" len="med"/>
-                      <a:tailEnd type="none" w="med" len="med"/>
-                    </a:lnT>
-                    <a:lnB w="9525" cap="flat" cmpd="sng" algn="ctr">
-                      <a:solidFill>
-                        <a:srgbClr val="C9D5E3"/>
-                      </a:solidFill>
-                      <a:prstDash val="solid"/>
-                      <a:round/>
-                      <a:headEnd type="none" w="med" len="med"/>
-                      <a:tailEnd type="none" w="med" len="med"/>
-                    </a:lnB>
-                    <a:solidFill>
-                      <a:schemeClr val="bg2"/>
-                    </a:solidFill>
-                  </a:tcPr>
-                </a:tc>
-                <a:tc>
-                  <a:txBody>
-                    <a:bodyPr/>
-                    <a:lstStyle/>
-                    <a:p>
-                      <a:pPr indent="0" marL="0">
-                        <a:buNone/>
-                      </a:pPr>
-                      <a:r>
-                        <a:rPr lang="en-US" sz="1000" b="1" i="1" dirty="0">
-                          <a:solidFill>
-                            <a:schemeClr val="accent1"/>
-                          </a:solidFill>
-                        </a:rPr>
-                        <a:t>CẦN BỔ SUNG</a:t>
+                        <a:t>Công ty trách nhiệm hữu hạn</a:t>
                       </a:r>
                       <a:endParaRPr lang="en-US" sz="1000" dirty="0"/>
                     </a:p>
@@ -34292,7 +30592,7 @@
         </p:nvSpPr>
         <p:spPr>
           <a:xfrm>
-            <a:off x="502920" y="6446520"/>
+            <a:off x="502920" y="5532120"/>
             <a:ext cx="6556248" cy="228600"/>
           </a:xfrm>
           <a:prstGeom prst="rect">
@@ -34338,7 +30638,7 @@
           </p:nvPr>
         </p:nvGraphicFramePr>
         <p:xfrm>
-          <a:off x="502920" y="6720840"/>
+          <a:off x="502920" y="5806440"/>
           <a:ext cx="6556248" cy="914400"/>
         </p:xfrm>
         <a:graphic>
@@ -34724,7 +31024,7 @@
         </p:nvSpPr>
         <p:spPr>
           <a:xfrm>
-            <a:off x="502920" y="8092440"/>
+            <a:off x="502920" y="7269480"/>
             <a:ext cx="6556248" cy="228600"/>
           </a:xfrm>
           <a:prstGeom prst="rect">
@@ -34749,7 +31049,7 @@
                 <a:ea typeface="Arial" pitchFamily="34" charset="-122"/>
                 <a:cs typeface="Arial" pitchFamily="34" charset="-120"/>
               </a:rPr>
-              <a:t>NGÀNH NGHỀ ĐĂNG KÝ</a:t>
+              <a:t>LĨNH VỰC HOẠT ĐỘNG CHÍNH</a:t>
             </a:r>
             <a:endParaRPr lang="en-US" sz="900" dirty="0"/>
           </a:p>
@@ -34763,22 +31063,22 @@
         </p:nvSpPr>
         <p:spPr>
           <a:xfrm>
-            <a:off x="502920" y="8366760"/>
-            <a:ext cx="6556248" cy="1463040"/>
+            <a:off x="502920" y="7543800"/>
+            <a:ext cx="6556248" cy="2103120"/>
           </a:xfrm>
           <a:prstGeom prst="roundRect">
             <a:avLst>
-              <a:gd name="adj" fmla="val 5000"/>
+              <a:gd name="adj" fmla="val 3478"/>
             </a:avLst>
           </a:prstGeom>
           <a:solidFill>
-            <a:schemeClr val="bg1"/>
+            <a:schemeClr val="bg2"/>
           </a:solidFill>
           <a:ln w="12700">
             <a:solidFill>
-              <a:schemeClr val="accent1"/>
+              <a:schemeClr val="bg2"/>
             </a:solidFill>
-            <a:prstDash val="dash"/>
+            <a:prstDash val="solid"/>
           </a:ln>
         </p:spPr>
       </p:sp>
@@ -34790,8 +31090,8 @@
         </p:nvSpPr>
         <p:spPr>
           <a:xfrm>
-            <a:off x="685800" y="8503920"/>
-            <a:ext cx="6190488" cy="1234440"/>
+            <a:off x="731520" y="7680960"/>
+            <a:ext cx="6099048" cy="1874520"/>
           </a:xfrm>
           <a:prstGeom prst="rect">
             <a:avLst/>
@@ -34803,41 +31103,94 @@
           <a:bodyPr wrap="square" lIns="0" tIns="0" rIns="0" bIns="0" rtlCol="0" anchor="t"/>
           <a:lstStyle/>
           <a:p>
-            <a:pPr algn="l" indent="0" marL="0">
-              <a:lnSpc>
-                <a:spcPct val="110000"/>
-              </a:lnSpc>
+            <a:pPr marL="152400" indent="-152400">
               <a:spcAft>
-                <a:spcPts val="600"/>
+                <a:spcPts val="500"/>
               </a:spcAft>
-              <a:buNone/>
-            </a:pPr>
-            <a:r>
-              <a:rPr lang="en-US" sz="950" b="1" dirty="0">
-                <a:solidFill>
-                  <a:schemeClr val="accent1"/>
-                </a:solidFill>
-              </a:rPr>
-              <a:t>CẦN BỔ SUNG: </a:t>
-            </a:r>
-            <a:pPr algn="l" indent="0" marL="0">
-              <a:lnSpc>
-                <a:spcPct val="110000"/>
-              </a:lnSpc>
+              <a:buSzPct val="100000"/>
+              <a:buChar char="•"/>
+            </a:pPr>
+            <a:r>
+              <a:rPr lang="en-US" sz="1000" dirty="0">
+                <a:solidFill>
+                  <a:schemeClr val="tx1"/>
+                </a:solidFill>
+              </a:rPr>
+              <a:t>Lắp đặt hệ thống điện động lực, điện chiếu sáng, tủ điện, máng – thang cáp</a:t>
+            </a:r>
+            <a:endParaRPr lang="en-US" sz="1000" dirty="0"/>
+          </a:p>
+          <a:p>
+            <a:pPr marL="152400" indent="-152400">
               <a:spcAft>
-                <a:spcPts val="600"/>
+                <a:spcPts val="500"/>
               </a:spcAft>
-              <a:buNone/>
-            </a:pPr>
-            <a:r>
-              <a:rPr lang="en-US" sz="950" dirty="0">
+              <a:buSzPct val="100000"/>
+              <a:buChar char="•"/>
+            </a:pPr>
+            <a:r>
+              <a:rPr lang="en-US" sz="1000" dirty="0">
                 <a:solidFill>
                   <a:schemeClr val="tx1"/>
                 </a:solidFill>
               </a:rPr>
-              <a:t>liệt kê mã ngành theo Giấy chứng nhận đăng ký doanh nghiệp, đặc biệt ngành chính. Dự kiến gồm: 4321 – Lắp đặt hệ thống điện; 4322 – Lắp đặt hệ thống cấp, thoát nước, lò sưởi và điều hoà không khí; 4329 – Lắp đặt hệ thống xây dựng khác; 3320 – Lắp đặt máy móc và thiết bị công nghiệp. Mã ngành chính thức cần đối chiếu với giấy phép trước khi phát hành.</a:t>
-            </a:r>
-            <a:endParaRPr lang="en-US" sz="950" dirty="0"/>
+              <a:t>Lắp đặt hệ thống cấp, thoát nước công trình dân dụng và công nghiệp</a:t>
+            </a:r>
+            <a:endParaRPr lang="en-US" sz="1000" dirty="0"/>
+          </a:p>
+          <a:p>
+            <a:pPr marL="152400" indent="-152400">
+              <a:spcAft>
+                <a:spcPts val="500"/>
+              </a:spcAft>
+              <a:buSzPct val="100000"/>
+              <a:buChar char="•"/>
+            </a:pPr>
+            <a:r>
+              <a:rPr lang="en-US" sz="1000" dirty="0">
+                <a:solidFill>
+                  <a:schemeClr val="tx1"/>
+                </a:solidFill>
+              </a:rPr>
+              <a:t>Lắp đặt hệ thống đường ống công nghệ, hút sương dầu – lọc khí nhà xưởng</a:t>
+            </a:r>
+            <a:endParaRPr lang="en-US" sz="1000" dirty="0"/>
+          </a:p>
+          <a:p>
+            <a:pPr marL="152400" indent="-152400">
+              <a:spcAft>
+                <a:spcPts val="500"/>
+              </a:spcAft>
+              <a:buSzPct val="100000"/>
+              <a:buChar char="•"/>
+            </a:pPr>
+            <a:r>
+              <a:rPr lang="en-US" sz="1000" dirty="0">
+                <a:solidFill>
+                  <a:schemeClr val="tx1"/>
+                </a:solidFill>
+              </a:rPr>
+              <a:t>Lắp đặt máy móc, thiết bị công nghiệp: bơm, bồn lọc, thiết bị xử lý nước</a:t>
+            </a:r>
+            <a:endParaRPr lang="en-US" sz="1000" dirty="0"/>
+          </a:p>
+          <a:p>
+            <a:pPr marL="152400" indent="-152400">
+              <a:spcAft>
+                <a:spcPts val="500"/>
+              </a:spcAft>
+              <a:buSzPct val="100000"/>
+              <a:buChar char="•"/>
+            </a:pPr>
+            <a:r>
+              <a:rPr lang="en-US" sz="1000" dirty="0">
+                <a:solidFill>
+                  <a:schemeClr val="tx1"/>
+                </a:solidFill>
+              </a:rPr>
+              <a:t>Bảo trì, sửa chữa, cải tạo hệ thống kỹ thuật công trình</a:t>
+            </a:r>
+            <a:endParaRPr lang="en-US" sz="1000" dirty="0"/>
           </a:p>
         </p:txBody>
       </p:sp>
@@ -34989,43 +31342,7 @@
       </p:sp>
       <p:sp>
         <p:nvSpPr>
-          <p:cNvPr id="4" name="Text 2"/>
-          <p:cNvSpPr txBox="1"/>
-          <p:nvPr/>
-        </p:nvSpPr>
-        <p:spPr>
-          <a:xfrm>
-            <a:off x="4681728" y="1188720"/>
-            <a:ext cx="2377440" cy="219456"/>
-          </a:xfrm>
-          <a:prstGeom prst="rect">
-            <a:avLst/>
-          </a:prstGeom>
-          <a:noFill/>
-          <a:ln/>
-        </p:spPr>
-        <p:txBody>
-          <a:bodyPr wrap="square" lIns="0" tIns="0" rIns="0" bIns="0" rtlCol="0" anchor="ctr"/>
-          <a:lstStyle/>
-          <a:p>
-            <a:pPr algn="r" indent="0" marL="0">
-              <a:buNone/>
-            </a:pPr>
-            <a:r>
-              <a:rPr lang="en-US" sz="750" b="1" spc="100" kern="0" dirty="0">
-                <a:solidFill>
-                  <a:schemeClr val="accent1"/>
-                </a:solidFill>
-              </a:rPr>
-              <a:t>DỰ THẢO – CẦN DOANH NGHIỆP DUYỆT</a:t>
-            </a:r>
-            <a:endParaRPr lang="en-US" sz="750" dirty="0"/>
-          </a:p>
-        </p:txBody>
-      </p:sp>
-      <p:sp>
-        <p:nvSpPr>
-          <p:cNvPr id="5" name="Shape 3"/>
+          <p:cNvPr id="4" name="Shape 2"/>
           <p:cNvSpPr/>
           <p:nvPr/>
         </p:nvSpPr>
@@ -35052,7 +31369,7 @@
       </p:sp>
       <p:sp>
         <p:nvSpPr>
-          <p:cNvPr id="6" name="Text 4"/>
+          <p:cNvPr id="5" name="Text 3"/>
           <p:cNvSpPr txBox="1"/>
           <p:nvPr/>
         </p:nvSpPr>
@@ -35091,7 +31408,7 @@
       </p:sp>
       <p:sp>
         <p:nvSpPr>
-          <p:cNvPr id="7" name="Text 5"/>
+          <p:cNvPr id="6" name="Text 4"/>
           <p:cNvSpPr txBox="1"/>
           <p:nvPr/>
         </p:nvSpPr>
@@ -35133,7 +31450,7 @@
       </p:sp>
       <p:sp>
         <p:nvSpPr>
-          <p:cNvPr id="8" name="Shape 6"/>
+          <p:cNvPr id="7" name="Shape 5"/>
           <p:cNvSpPr/>
           <p:nvPr/>
         </p:nvSpPr>
@@ -35160,7 +31477,7 @@
       </p:sp>
       <p:sp>
         <p:nvSpPr>
-          <p:cNvPr id="9" name="Text 7"/>
+          <p:cNvPr id="8" name="Text 6"/>
           <p:cNvSpPr txBox="1"/>
           <p:nvPr/>
         </p:nvSpPr>
@@ -35199,7 +31516,7 @@
       </p:sp>
       <p:sp>
         <p:nvSpPr>
-          <p:cNvPr id="10" name="Text 8"/>
+          <p:cNvPr id="9" name="Text 7"/>
           <p:cNvSpPr txBox="1"/>
           <p:nvPr/>
         </p:nvSpPr>
@@ -35241,7 +31558,7 @@
       </p:sp>
       <p:sp>
         <p:nvSpPr>
-          <p:cNvPr id="11" name="Text 9"/>
+          <p:cNvPr id="10" name="Text 8"/>
           <p:cNvSpPr txBox="1"/>
           <p:nvPr/>
         </p:nvSpPr>
@@ -35280,7 +31597,7 @@
       </p:sp>
       <p:sp>
         <p:nvSpPr>
-          <p:cNvPr id="12" name="Shape 10"/>
+          <p:cNvPr id="11" name="Shape 9"/>
           <p:cNvSpPr/>
           <p:nvPr/>
         </p:nvSpPr>
@@ -35307,7 +31624,7 @@
       </p:sp>
       <p:sp>
         <p:nvSpPr>
-          <p:cNvPr id="13" name="Shape 11"/>
+          <p:cNvPr id="12" name="Shape 10"/>
           <p:cNvSpPr/>
           <p:nvPr/>
         </p:nvSpPr>
@@ -35332,7 +31649,7 @@
       </p:sp>
       <p:sp>
         <p:nvSpPr>
-          <p:cNvPr id="14" name="Text 12"/>
+          <p:cNvPr id="13" name="Text 11"/>
           <p:cNvSpPr txBox="1"/>
           <p:nvPr/>
         </p:nvSpPr>
@@ -35371,7 +31688,7 @@
       </p:sp>
       <p:sp>
         <p:nvSpPr>
-          <p:cNvPr id="15" name="Text 13"/>
+          <p:cNvPr id="14" name="Text 12"/>
           <p:cNvSpPr txBox="1"/>
           <p:nvPr/>
         </p:nvSpPr>
@@ -35410,7 +31727,7 @@
       </p:sp>
       <p:sp>
         <p:nvSpPr>
-          <p:cNvPr id="16" name="Text 14"/>
+          <p:cNvPr id="15" name="Text 13"/>
           <p:cNvSpPr txBox="1"/>
           <p:nvPr/>
         </p:nvSpPr>
@@ -35449,7 +31766,7 @@
       </p:sp>
       <p:sp>
         <p:nvSpPr>
-          <p:cNvPr id="17" name="Shape 15"/>
+          <p:cNvPr id="16" name="Shape 14"/>
           <p:cNvSpPr/>
           <p:nvPr/>
         </p:nvSpPr>
@@ -35476,7 +31793,7 @@
       </p:sp>
       <p:sp>
         <p:nvSpPr>
-          <p:cNvPr id="18" name="Shape 16"/>
+          <p:cNvPr id="17" name="Shape 15"/>
           <p:cNvSpPr/>
           <p:nvPr/>
         </p:nvSpPr>
@@ -35501,7 +31818,7 @@
       </p:sp>
       <p:sp>
         <p:nvSpPr>
-          <p:cNvPr id="19" name="Text 17"/>
+          <p:cNvPr id="18" name="Text 16"/>
           <p:cNvSpPr txBox="1"/>
           <p:nvPr/>
         </p:nvSpPr>
@@ -35540,7 +31857,7 @@
       </p:sp>
       <p:sp>
         <p:nvSpPr>
-          <p:cNvPr id="20" name="Text 18"/>
+          <p:cNvPr id="19" name="Text 17"/>
           <p:cNvSpPr txBox="1"/>
           <p:nvPr/>
         </p:nvSpPr>
@@ -35579,7 +31896,7 @@
       </p:sp>
       <p:sp>
         <p:nvSpPr>
-          <p:cNvPr id="21" name="Text 19"/>
+          <p:cNvPr id="20" name="Text 18"/>
           <p:cNvSpPr txBox="1"/>
           <p:nvPr/>
         </p:nvSpPr>
@@ -35618,7 +31935,7 @@
       </p:sp>
       <p:sp>
         <p:nvSpPr>
-          <p:cNvPr id="22" name="Shape 20"/>
+          <p:cNvPr id="21" name="Shape 19"/>
           <p:cNvSpPr/>
           <p:nvPr/>
         </p:nvSpPr>
@@ -35645,7 +31962,7 @@
       </p:sp>
       <p:sp>
         <p:nvSpPr>
-          <p:cNvPr id="23" name="Shape 21"/>
+          <p:cNvPr id="22" name="Shape 20"/>
           <p:cNvSpPr/>
           <p:nvPr/>
         </p:nvSpPr>
@@ -35670,7 +31987,7 @@
       </p:sp>
       <p:sp>
         <p:nvSpPr>
-          <p:cNvPr id="24" name="Text 22"/>
+          <p:cNvPr id="23" name="Text 21"/>
           <p:cNvSpPr txBox="1"/>
           <p:nvPr/>
         </p:nvSpPr>
@@ -35709,7 +32026,7 @@
       </p:sp>
       <p:sp>
         <p:nvSpPr>
-          <p:cNvPr id="25" name="Text 23"/>
+          <p:cNvPr id="24" name="Text 22"/>
           <p:cNvSpPr txBox="1"/>
           <p:nvPr/>
         </p:nvSpPr>
@@ -35748,7 +32065,7 @@
       </p:sp>
       <p:sp>
         <p:nvSpPr>
-          <p:cNvPr id="26" name="Text 24"/>
+          <p:cNvPr id="25" name="Text 23"/>
           <p:cNvSpPr txBox="1"/>
           <p:nvPr/>
         </p:nvSpPr>
@@ -35787,7 +32104,7 @@
       </p:sp>
       <p:sp>
         <p:nvSpPr>
-          <p:cNvPr id="27" name="Shape 25"/>
+          <p:cNvPr id="26" name="Shape 24"/>
           <p:cNvSpPr/>
           <p:nvPr/>
         </p:nvSpPr>
@@ -35814,7 +32131,7 @@
       </p:sp>
       <p:sp>
         <p:nvSpPr>
-          <p:cNvPr id="28" name="Shape 26"/>
+          <p:cNvPr id="27" name="Shape 25"/>
           <p:cNvSpPr/>
           <p:nvPr/>
         </p:nvSpPr>
@@ -35839,7 +32156,7 @@
       </p:sp>
       <p:sp>
         <p:nvSpPr>
-          <p:cNvPr id="29" name="Text 27"/>
+          <p:cNvPr id="28" name="Text 26"/>
           <p:cNvSpPr txBox="1"/>
           <p:nvPr/>
         </p:nvSpPr>
@@ -35878,7 +32195,7 @@
       </p:sp>
       <p:sp>
         <p:nvSpPr>
-          <p:cNvPr id="30" name="Text 28"/>
+          <p:cNvPr id="29" name="Text 27"/>
           <p:cNvSpPr txBox="1"/>
           <p:nvPr/>
         </p:nvSpPr>
@@ -35917,7 +32234,7 @@
       </p:sp>
       <p:sp>
         <p:nvSpPr>
-          <p:cNvPr id="31" name="Text 29"/>
+          <p:cNvPr id="30" name="Text 28"/>
           <p:cNvSpPr txBox="1"/>
           <p:nvPr/>
         </p:nvSpPr>
@@ -35956,7 +32273,7 @@
       </p:sp>
       <p:sp>
         <p:nvSpPr>
-          <p:cNvPr id="32" name="Shape 30"/>
+          <p:cNvPr id="31" name="Shape 29"/>
           <p:cNvSpPr/>
           <p:nvPr/>
         </p:nvSpPr>
@@ -35983,7 +32300,7 @@
       </p:sp>
       <p:sp>
         <p:nvSpPr>
-          <p:cNvPr id="33" name="Shape 31"/>
+          <p:cNvPr id="32" name="Shape 30"/>
           <p:cNvSpPr/>
           <p:nvPr/>
         </p:nvSpPr>
@@ -36008,7 +32325,7 @@
       </p:sp>
       <p:sp>
         <p:nvSpPr>
-          <p:cNvPr id="34" name="Text 32"/>
+          <p:cNvPr id="33" name="Text 31"/>
           <p:cNvSpPr txBox="1"/>
           <p:nvPr/>
         </p:nvSpPr>
@@ -36047,7 +32364,7 @@
       </p:sp>
       <p:sp>
         <p:nvSpPr>
-          <p:cNvPr id="35" name="Text 33"/>
+          <p:cNvPr id="34" name="Text 32"/>
           <p:cNvSpPr txBox="1"/>
           <p:nvPr/>
         </p:nvSpPr>
@@ -36086,7 +32403,7 @@
       </p:sp>
       <p:sp>
         <p:nvSpPr>
-          <p:cNvPr id="36" name="Text 34"/>
+          <p:cNvPr id="35" name="Text 33"/>
           <p:cNvSpPr txBox="1"/>
           <p:nvPr/>
         </p:nvSpPr>
@@ -36125,7 +32442,7 @@
       </p:sp>
       <p:sp>
         <p:nvSpPr>
-          <p:cNvPr id="37" name="Shape 35"/>
+          <p:cNvPr id="36" name="Shape 34"/>
           <p:cNvSpPr/>
           <p:nvPr/>
         </p:nvSpPr>
@@ -36152,7 +32469,7 @@
       </p:sp>
       <p:sp>
         <p:nvSpPr>
-          <p:cNvPr id="38" name="Shape 36"/>
+          <p:cNvPr id="37" name="Shape 35"/>
           <p:cNvSpPr/>
           <p:nvPr/>
         </p:nvSpPr>
@@ -36177,7 +32494,7 @@
       </p:sp>
       <p:sp>
         <p:nvSpPr>
-          <p:cNvPr id="39" name="Text 37"/>
+          <p:cNvPr id="38" name="Text 36"/>
           <p:cNvSpPr txBox="1"/>
           <p:nvPr/>
         </p:nvSpPr>
@@ -36216,7 +32533,7 @@
       </p:sp>
       <p:sp>
         <p:nvSpPr>
-          <p:cNvPr id="40" name="Text 38"/>
+          <p:cNvPr id="39" name="Text 37"/>
           <p:cNvSpPr txBox="1"/>
           <p:nvPr/>
         </p:nvSpPr>
@@ -36255,7 +32572,7 @@
       </p:sp>
       <p:sp>
         <p:nvSpPr>
-          <p:cNvPr id="41" name="Text 39"/>
+          <p:cNvPr id="40" name="Text 38"/>
           <p:cNvSpPr txBox="1"/>
           <p:nvPr/>
         </p:nvSpPr>
@@ -36294,7 +32611,7 @@
       </p:sp>
       <p:pic>
         <p:nvPicPr>
-          <p:cNvPr id="42" name="photo img45.jpg" descr="Đội thi công BLT tại trạm xử lý nước, Thành phố Huế (09/2026)">    </p:cNvPr>
+          <p:cNvPr id="41" name="photo img45.jpg" descr="Đội thi công BLT tại trạm xử lý nước, Thành phố Huế (09/2026)">    </p:cNvPr>
           <p:cNvPicPr>
             <a:picLocks noChangeAspect="1"/>
           </p:cNvPicPr>
@@ -36318,7 +32635,7 @@
       </p:pic>
       <p:sp>
         <p:nvSpPr>
-          <p:cNvPr id="43" name="Text 40"/>
+          <p:cNvPr id="42" name="Text 39"/>
           <p:cNvSpPr txBox="1"/>
           <p:nvPr/>
         </p:nvSpPr>
@@ -36502,43 +32819,7 @@
       </p:sp>
       <p:sp>
         <p:nvSpPr>
-          <p:cNvPr id="4" name="Text 2"/>
-          <p:cNvSpPr txBox="1"/>
-          <p:nvPr/>
-        </p:nvSpPr>
-        <p:spPr>
-          <a:xfrm>
-            <a:off x="4681728" y="1188720"/>
-            <a:ext cx="2377440" cy="219456"/>
-          </a:xfrm>
-          <a:prstGeom prst="rect">
-            <a:avLst/>
-          </a:prstGeom>
-          <a:noFill/>
-          <a:ln/>
-        </p:spPr>
-        <p:txBody>
-          <a:bodyPr wrap="square" lIns="0" tIns="0" rIns="0" bIns="0" rtlCol="0" anchor="ctr"/>
-          <a:lstStyle/>
-          <a:p>
-            <a:pPr algn="r" indent="0" marL="0">
-              <a:buNone/>
-            </a:pPr>
-            <a:r>
-              <a:rPr lang="en-US" sz="750" b="1" spc="100" kern="0" dirty="0">
-                <a:solidFill>
-                  <a:schemeClr val="accent1"/>
-                </a:solidFill>
-              </a:rPr>
-              <a:t>DỰ THẢO – CẦN XÁC NHẬN</a:t>
-            </a:r>
-            <a:endParaRPr lang="en-US" sz="750" dirty="0"/>
-          </a:p>
-        </p:txBody>
-      </p:sp>
-      <p:sp>
-        <p:nvSpPr>
-          <p:cNvPr id="5" name="Shape 3"/>
+          <p:cNvPr id="4" name="Shape 2"/>
           <p:cNvSpPr/>
           <p:nvPr/>
         </p:nvSpPr>
@@ -36565,7 +32846,7 @@
       </p:sp>
       <p:pic>
         <p:nvPicPr>
-          <p:cNvPr id="6" name="photo img12.jpg" descr="Ảnh hiện trường BLT">    </p:cNvPr>
+          <p:cNvPr id="5" name="photo img12.jpg" descr="Ảnh hiện trường BLT">    </p:cNvPr>
           <p:cNvPicPr>
             <a:picLocks noChangeAspect="1"/>
           </p:cNvPicPr>
@@ -36589,7 +32870,7 @@
       </p:pic>
       <p:sp>
         <p:nvSpPr>
-          <p:cNvPr id="7" name="Shape 4"/>
+          <p:cNvPr id="6" name="Shape 3"/>
           <p:cNvSpPr/>
           <p:nvPr/>
         </p:nvSpPr>
@@ -36614,7 +32895,7 @@
       </p:sp>
       <p:sp>
         <p:nvSpPr>
-          <p:cNvPr id="8" name="Text 5"/>
+          <p:cNvPr id="7" name="Text 4"/>
           <p:cNvSpPr txBox="1"/>
           <p:nvPr/>
         </p:nvSpPr>
@@ -36653,7 +32934,7 @@
       </p:sp>
       <p:sp>
         <p:nvSpPr>
-          <p:cNvPr id="9" name="Text 6"/>
+          <p:cNvPr id="8" name="Text 5"/>
           <p:cNvSpPr txBox="1"/>
           <p:nvPr/>
         </p:nvSpPr>
@@ -36692,7 +32973,7 @@
       </p:sp>
       <p:sp>
         <p:nvSpPr>
-          <p:cNvPr id="10" name="Text 7"/>
+          <p:cNvPr id="9" name="Text 6"/>
           <p:cNvSpPr txBox="1"/>
           <p:nvPr/>
         </p:nvSpPr>
@@ -36786,7 +33067,7 @@
       </p:sp>
       <p:sp>
         <p:nvSpPr>
-          <p:cNvPr id="11" name="Shape 8"/>
+          <p:cNvPr id="10" name="Shape 7"/>
           <p:cNvSpPr/>
           <p:nvPr/>
         </p:nvSpPr>
@@ -36813,7 +33094,7 @@
       </p:sp>
       <p:pic>
         <p:nvPicPr>
-          <p:cNvPr id="12" name="photo img04.jpg" descr="Ảnh hiện trường BLT">    </p:cNvPr>
+          <p:cNvPr id="11" name="photo img04.jpg" descr="Ảnh hiện trường BLT">    </p:cNvPr>
           <p:cNvPicPr>
             <a:picLocks noChangeAspect="1"/>
           </p:cNvPicPr>
@@ -36837,7 +33118,7 @@
       </p:pic>
       <p:sp>
         <p:nvSpPr>
-          <p:cNvPr id="13" name="Shape 9"/>
+          <p:cNvPr id="12" name="Shape 8"/>
           <p:cNvSpPr/>
           <p:nvPr/>
         </p:nvSpPr>
@@ -36862,7 +33143,7 @@
       </p:sp>
       <p:sp>
         <p:nvSpPr>
-          <p:cNvPr id="14" name="Text 10"/>
+          <p:cNvPr id="13" name="Text 9"/>
           <p:cNvSpPr txBox="1"/>
           <p:nvPr/>
         </p:nvSpPr>
@@ -36901,7 +33182,7 @@
       </p:sp>
       <p:sp>
         <p:nvSpPr>
-          <p:cNvPr id="15" name="Text 11"/>
+          <p:cNvPr id="14" name="Text 10"/>
           <p:cNvSpPr txBox="1"/>
           <p:nvPr/>
         </p:nvSpPr>
@@ -36940,7 +33221,7 @@
       </p:sp>
       <p:sp>
         <p:nvSpPr>
-          <p:cNvPr id="16" name="Text 12"/>
+          <p:cNvPr id="15" name="Text 11"/>
           <p:cNvSpPr txBox="1"/>
           <p:nvPr/>
         </p:nvSpPr>
@@ -37034,7 +33315,7 @@
       </p:sp>
       <p:sp>
         <p:nvSpPr>
-          <p:cNvPr id="17" name="Shape 13"/>
+          <p:cNvPr id="16" name="Shape 12"/>
           <p:cNvSpPr/>
           <p:nvPr/>
         </p:nvSpPr>
@@ -37061,7 +33342,7 @@
       </p:sp>
       <p:pic>
         <p:nvPicPr>
-          <p:cNvPr id="18" name="photo img24.jpg" descr="Ảnh hiện trường BLT">    </p:cNvPr>
+          <p:cNvPr id="17" name="photo img24.jpg" descr="Ảnh hiện trường BLT">    </p:cNvPr>
           <p:cNvPicPr>
             <a:picLocks noChangeAspect="1"/>
           </p:cNvPicPr>
@@ -37085,7 +33366,7 @@
       </p:pic>
       <p:sp>
         <p:nvSpPr>
-          <p:cNvPr id="19" name="Shape 14"/>
+          <p:cNvPr id="18" name="Shape 13"/>
           <p:cNvSpPr/>
           <p:nvPr/>
         </p:nvSpPr>
@@ -37110,7 +33391,7 @@
       </p:sp>
       <p:sp>
         <p:nvSpPr>
-          <p:cNvPr id="20" name="Text 15"/>
+          <p:cNvPr id="19" name="Text 14"/>
           <p:cNvSpPr txBox="1"/>
           <p:nvPr/>
         </p:nvSpPr>
@@ -37149,7 +33430,7 @@
       </p:sp>
       <p:sp>
         <p:nvSpPr>
-          <p:cNvPr id="21" name="Text 16"/>
+          <p:cNvPr id="20" name="Text 15"/>
           <p:cNvSpPr txBox="1"/>
           <p:nvPr/>
         </p:nvSpPr>
@@ -37188,7 +33469,7 @@
       </p:sp>
       <p:sp>
         <p:nvSpPr>
-          <p:cNvPr id="22" name="Text 17"/>
+          <p:cNvPr id="21" name="Text 16"/>
           <p:cNvSpPr txBox="1"/>
           <p:nvPr/>
         </p:nvSpPr>
@@ -37282,7 +33563,7 @@
       </p:sp>
       <p:sp>
         <p:nvSpPr>
-          <p:cNvPr id="23" name="Shape 18"/>
+          <p:cNvPr id="22" name="Shape 17"/>
           <p:cNvSpPr/>
           <p:nvPr/>
         </p:nvSpPr>
@@ -37309,7 +33590,7 @@
       </p:sp>
       <p:pic>
         <p:nvPicPr>
-          <p:cNvPr id="24" name="photo img16.jpg" descr="Ảnh hiện trường BLT">    </p:cNvPr>
+          <p:cNvPr id="23" name="photo img16.jpg" descr="Ảnh hiện trường BLT">    </p:cNvPr>
           <p:cNvPicPr>
             <a:picLocks noChangeAspect="1"/>
           </p:cNvPicPr>
@@ -37333,7 +33614,7 @@
       </p:pic>
       <p:sp>
         <p:nvSpPr>
-          <p:cNvPr id="25" name="Shape 19"/>
+          <p:cNvPr id="24" name="Shape 18"/>
           <p:cNvSpPr/>
           <p:nvPr/>
         </p:nvSpPr>
@@ -37358,7 +33639,7 @@
       </p:sp>
       <p:sp>
         <p:nvSpPr>
-          <p:cNvPr id="26" name="Text 20"/>
+          <p:cNvPr id="25" name="Text 19"/>
           <p:cNvSpPr txBox="1"/>
           <p:nvPr/>
         </p:nvSpPr>
@@ -37397,7 +33678,7 @@
       </p:sp>
       <p:sp>
         <p:nvSpPr>
-          <p:cNvPr id="27" name="Text 21"/>
+          <p:cNvPr id="26" name="Text 20"/>
           <p:cNvSpPr txBox="1"/>
           <p:nvPr/>
         </p:nvSpPr>
@@ -37436,7 +33717,7 @@
       </p:sp>
       <p:sp>
         <p:nvSpPr>
-          <p:cNvPr id="28" name="Text 22"/>
+          <p:cNvPr id="27" name="Text 21"/>
           <p:cNvSpPr txBox="1"/>
           <p:nvPr/>
         </p:nvSpPr>

--- a/ho-so-nang-luc-BLT/HO_SO_NANG_LUC_BLT.pptx
+++ b/ho-so-nang-luc-BLT/HO_SO_NANG_LUC_BLT.pptx
@@ -132,14 +132,14 @@
   <p:extLst>
     <p:ext uri="{521415D9-36F7-43E2-AB2F-B90AF26B5E84}">
       <p14:sectionLst xmlns:p14="http://schemas.microsoft.com/office/powerpoint/2010/main">
-        <p14:section name="Mở đầu" id="{40b33bb2-b6d9-e86a-0ad3-5191760a0fc4}">
+        <p14:section name="Mở đầu" id="{2ec8ac14-cd5b-1cf6-96d5-baa4130c9a40}">
           <p14:sldIdLst>
             <p14:sldId id="256"/>
             <p14:sldId id="257"/>
             <p14:sldId id="258"/>
           </p14:sldIdLst>
         </p14:section>
-        <p14:section name="01 Tổng quan" id="{410dacaa-1005-0b01-06e4-b954eda0a175}">
+        <p14:section name="01 Tổng quan" id="{a9abe568-a6f5-5364-a6ae-d792b97546b9}">
           <p14:sldIdLst>
             <p14:sldId id="259"/>
             <p14:sldId id="260"/>
@@ -148,39 +148,39 @@
             <p14:sldId id="263"/>
           </p14:sldIdLst>
         </p14:section>
-        <p14:section name="02 Điện nước công trình" id="{9e76d6bf-a0ef-9e47-2ab5-0177308bd443}">
+        <p14:section name="02 Điện nước công trình" id="{66584b92-fd91-1a86-5927-ddd2a464c842}">
           <p14:sldIdLst>
             <p14:sldId id="264"/>
             <p14:sldId id="265"/>
             <p14:sldId id="266"/>
           </p14:sldIdLst>
         </p14:section>
-        <p14:section name="03 Hút sương dầu nhà xưởng" id="{a92a3d47-b56a-9f87-eeeb-0e000621313c}">
+        <p14:section name="03 Hút sương dầu nhà xưởng" id="{2dd76863-574d-d2d5-0410-d47ca529832e}">
           <p14:sldIdLst>
             <p14:sldId id="267"/>
             <p14:sldId id="268"/>
             <p14:sldId id="269"/>
           </p14:sldIdLst>
         </p14:section>
-        <p14:section name="04 Bơm &amp; xử lý nước" id="{0ed2a60e-5a51-bfb5-2ff4-ff62fefeee1a}">
+        <p14:section name="04 Bơm &amp; xử lý nước" id="{3239c8a7-1416-305b-2bc5-e2b06065fb82}">
           <p14:sldIdLst>
             <p14:sldId id="270"/>
           </p14:sldIdLst>
         </p14:section>
-        <p14:section name="05 Quản trị dự án" id="{f9200934-b2ac-d757-e198-0ebb601adfe6}">
+        <p14:section name="05 Quản trị dự án" id="{b2df1781-af03-e34c-749c-8a17c35e14ca}">
           <p14:sldIdLst>
             <p14:sldId id="271"/>
             <p14:sldId id="272"/>
             <p14:sldId id="273"/>
           </p14:sldIdLst>
         </p14:section>
-        <p14:section name="06 Nguồn lực" id="{37878bd4-bdef-a2bc-b9b6-422516f8ef52}">
+        <p14:section name="06 Nguồn lực" id="{4d54e0ed-3836-55df-d266-c496a339a5f3}">
           <p14:sldIdLst>
             <p14:sldId id="274"/>
             <p14:sldId id="275"/>
           </p14:sldIdLst>
         </p14:section>
-        <p14:section name="07 Công trình tiêu biểu" id="{404a7f33-a4d1-85f7-9684-94e897b8f9d3}">
+        <p14:section name="07 Công trình tiêu biểu" id="{a0cf37b7-1fc9-6446-e1ff-1ec7d6432dd9}">
           <p14:sldIdLst>
             <p14:sldId id="276"/>
             <p14:sldId id="277"/>
@@ -188,7 +188,7 @@
             <p14:sldId id="279"/>
           </p14:sldIdLst>
         </p14:section>
-        <p14:section name="08 Cam kết &amp; liên hệ" id="{0a70edd3-066b-dbcb-e066-ddd5a2854b1e}">
+        <p14:section name="08 Cam kết &amp; liên hệ" id="{ee14ec3e-3f4f-88af-a773-a6c799bd40ac}">
           <p14:sldIdLst>
             <p14:sldId id="280"/>
             <p14:sldId id="281"/>
@@ -15481,7 +15481,7 @@
                   <a:schemeClr val="tx1"/>
                 </a:solidFill>
               </a:rPr>
-              <a:t>Lực lượng thi công 15+ người, huy động linh hoạt theo quy mô và tiến độ từng công trình</a:t>
+              <a:t>Đội ngũ 50 người gồm cán bộ kỹ thuật, chỉ huy công trường và công nhân lành nghề, huy động linh hoạt theo tiến độ</a:t>
             </a:r>
             <a:endParaRPr lang="en-US" sz="950" dirty="0"/>
           </a:p>
@@ -28027,7 +28027,7 @@
                   <a:schemeClr val="tx1"/>
                 </a:solidFill>
               </a:rPr>
-              <a:t>BLT là đơn vị thi công chuyên sâu về hệ thống kỹ thuật công trình: điện, cấp thoát nước, đường ống công nghệ, hệ thống hút sương dầu – lọc khí cho nhà xưởng và hệ thống bơm – xử lý nước. Đội ngũ của chúng tôi đang trực tiếp thi công tại nhiều công trình ở Nghệ An, Ninh Bình và Thành phố Huế, từ công trình nhiều tầng đến nhà xưởng sản xuất đang vận hành.</a:t>
+              <a:t>BLT là đơn vị thi công chuyên sâu về hệ thống kỹ thuật công trình: điện, cấp thoát nước, đường ống công nghệ, hệ thống hút sương dầu – lọc khí cho nhà xưởng và hệ thống bơm – xử lý nước. Đội ngũ 50 người của chúng tôi đang trực tiếp thi công tại nhiều công trình ở Nghệ An, Ninh Bình và Thành phố Huế, từ công trình nhiều tầng đến nhà xưởng sản xuất đang vận hành.</a:t>
             </a:r>
             <a:endParaRPr lang="en-US" sz="1150" dirty="0"/>
           </a:p>
@@ -28788,7 +28788,7 @@
                 <a:ea typeface="Arial" pitchFamily="34" charset="-122"/>
                 <a:cs typeface="Arial" pitchFamily="34" charset="-120"/>
               </a:rPr>
-              <a:t>15+</a:t>
+              <a:t>50</a:t>
             </a:r>
             <a:endParaRPr lang="en-US" sz="3000" dirty="0"/>
           </a:p>
@@ -28824,7 +28824,7 @@
                   <a:schemeClr val="bg1"/>
                 </a:solidFill>
               </a:rPr>
-              <a:t>NHÂN SỰ THI CÔNG</a:t>
+              <a:t>NHÂN SỰ</a:t>
             </a:r>
             <a:endParaRPr lang="en-US" sz="850" dirty="0"/>
           </a:p>
@@ -28860,7 +28860,7 @@
                   <a:schemeClr val="accent4"/>
                 </a:solidFill>
               </a:rPr>
-              <a:t>huy động linh hoạt theo tiến độ</a:t>
+              <a:t>kỹ thuật, chỉ huy và công nhân thi công</a:t>
             </a:r>
             <a:endParaRPr lang="en-US" sz="800" dirty="0"/>
           </a:p>

--- a/ho-so-nang-luc-BLT/HO_SO_NANG_LUC_BLT.pptx
+++ b/ho-so-nang-luc-BLT/HO_SO_NANG_LUC_BLT.pptx
@@ -132,14 +132,14 @@
   <p:extLst>
     <p:ext uri="{521415D9-36F7-43E2-AB2F-B90AF26B5E84}">
       <p14:sectionLst xmlns:p14="http://schemas.microsoft.com/office/powerpoint/2010/main">
-        <p14:section name="Mở đầu" id="{2ec8ac14-cd5b-1cf6-96d5-baa4130c9a40}">
+        <p14:section name="Mở đầu" id="{55715496-9de9-e922-bdf8-e0140192ff91}">
           <p14:sldIdLst>
             <p14:sldId id="256"/>
             <p14:sldId id="257"/>
             <p14:sldId id="258"/>
           </p14:sldIdLst>
         </p14:section>
-        <p14:section name="01 Tổng quan" id="{a9abe568-a6f5-5364-a6ae-d792b97546b9}">
+        <p14:section name="01 Tổng quan" id="{17fca54e-8d1d-380a-b214-b40fe5da3ae4}">
           <p14:sldIdLst>
             <p14:sldId id="259"/>
             <p14:sldId id="260"/>
@@ -148,39 +148,39 @@
             <p14:sldId id="263"/>
           </p14:sldIdLst>
         </p14:section>
-        <p14:section name="02 Điện nước công trình" id="{66584b92-fd91-1a86-5927-ddd2a464c842}">
+        <p14:section name="02 Điện nước công trình" id="{92e6f1a4-c17d-7018-feb0-1258c2413746}">
           <p14:sldIdLst>
             <p14:sldId id="264"/>
             <p14:sldId id="265"/>
             <p14:sldId id="266"/>
           </p14:sldIdLst>
         </p14:section>
-        <p14:section name="03 Hút sương dầu nhà xưởng" id="{2dd76863-574d-d2d5-0410-d47ca529832e}">
+        <p14:section name="03 Hút sương dầu nhà xưởng" id="{33c11192-cb4c-2084-34a2-43e17a0098c7}">
           <p14:sldIdLst>
             <p14:sldId id="267"/>
             <p14:sldId id="268"/>
             <p14:sldId id="269"/>
           </p14:sldIdLst>
         </p14:section>
-        <p14:section name="04 Bơm &amp; xử lý nước" id="{3239c8a7-1416-305b-2bc5-e2b06065fb82}">
+        <p14:section name="04 Bơm &amp; xử lý nước" id="{9fe28723-a0df-e9df-b913-1e83ea03b5b2}">
           <p14:sldIdLst>
             <p14:sldId id="270"/>
           </p14:sldIdLst>
         </p14:section>
-        <p14:section name="05 Quản trị dự án" id="{b2df1781-af03-e34c-749c-8a17c35e14ca}">
+        <p14:section name="05 Quản trị dự án" id="{cdfde152-a3c2-26dd-29b1-6f65f5c527ae}">
           <p14:sldIdLst>
             <p14:sldId id="271"/>
             <p14:sldId id="272"/>
             <p14:sldId id="273"/>
           </p14:sldIdLst>
         </p14:section>
-        <p14:section name="06 Nguồn lực" id="{4d54e0ed-3836-55df-d266-c496a339a5f3}">
+        <p14:section name="06 Nguồn lực" id="{77766e98-97c0-d22b-6c15-5ee7c3cb9951}">
           <p14:sldIdLst>
             <p14:sldId id="274"/>
             <p14:sldId id="275"/>
           </p14:sldIdLst>
         </p14:section>
-        <p14:section name="07 Công trình tiêu biểu" id="{a0cf37b7-1fc9-6446-e1ff-1ec7d6432dd9}">
+        <p14:section name="07 Công trình tiêu biểu" id="{d11c1036-f9d9-a780-485d-0947a8e2abca}">
           <p14:sldIdLst>
             <p14:sldId id="276"/>
             <p14:sldId id="277"/>
@@ -188,7 +188,7 @@
             <p14:sldId id="279"/>
           </p14:sldIdLst>
         </p14:section>
-        <p14:section name="08 Cam kết &amp; liên hệ" id="{ee14ec3e-3f4f-88af-a773-a6c799bd40ac}">
+        <p14:section name="08 Cam kết &amp; liên hệ" id="{adde38f6-93e1-9292-1e23-4767d8fea2ba}">
           <p14:sldIdLst>
             <p14:sldId id="280"/>
             <p14:sldId id="281"/>
@@ -3574,7 +3574,7 @@
       </p:grpSpPr>
       <p:pic>
         <p:nvPicPr>
-          <p:cNvPr id="2" name="cover photo" descr="preencoded.png">    </p:cNvPr>
+          <p:cNvPr id="2" name="cover team img57.jpg" descr="Đội ngũ công nhân BLT">    </p:cNvPr>
           <p:cNvPicPr>
             <a:picLocks noChangeAspect="1"/>
           </p:cNvPicPr>
@@ -3589,45 +3589,16 @@
         <p:spPr>
           <a:xfrm>
             <a:off x="0" y="0"/>
-            <a:ext cx="7562088" cy="6583680"/>
+            <a:ext cx="7562088" cy="3977640"/>
           </a:xfrm>
           <a:prstGeom prst="rect">
             <a:avLst/>
           </a:prstGeom>
         </p:spPr>
       </p:pic>
-      <p:sp>
-        <p:nvSpPr>
-          <p:cNvPr id="3" name="Shape 0"/>
-          <p:cNvSpPr/>
-          <p:nvPr/>
-        </p:nvSpPr>
-        <p:spPr>
-          <a:xfrm>
-            <a:off x="0" y="0"/>
-            <a:ext cx="7562088" cy="6583680"/>
-          </a:xfrm>
-          <a:prstGeom prst="rect">
-            <a:avLst/>
-          </a:prstGeom>
-          <a:solidFill>
-            <a:schemeClr val="tx2">
-              <a:alpha val="30000"/>
-            </a:schemeClr>
-          </a:solidFill>
-          <a:ln w="12700">
-            <a:solidFill>
-              <a:schemeClr val="tx2">
-                <a:alpha val="0"/>
-              </a:schemeClr>
-            </a:solidFill>
-            <a:prstDash val="solid"/>
-          </a:ln>
-        </p:spPr>
-      </p:sp>
       <p:pic>
         <p:nvPicPr>
-          <p:cNvPr id="4" name="logo" descr="preencoded.png">    </p:cNvPr>
+          <p:cNvPr id="3" name="cover team img45.jpg" descr="Đội ngũ công nhân BLT">    </p:cNvPr>
           <p:cNvPicPr>
             <a:picLocks noChangeAspect="1"/>
           </p:cNvPicPr>
@@ -3641,17 +3612,131 @@
         </p:blipFill>
         <p:spPr>
           <a:xfrm>
-            <a:off x="502920" y="457200"/>
-            <a:ext cx="1143000" cy="1143000"/>
+            <a:off x="0" y="4050792"/>
+            <a:ext cx="2471928" cy="2532888"/>
           </a:xfrm>
           <a:prstGeom prst="rect">
             <a:avLst/>
           </a:prstGeom>
         </p:spPr>
       </p:pic>
-      <p:sp>
-        <p:nvSpPr>
-          <p:cNvPr id="5" name="Shape 1"/>
+      <p:pic>
+        <p:nvPicPr>
+          <p:cNvPr id="4" name="cover team img35.jpg" descr="Đội ngũ công nhân BLT">    </p:cNvPr>
+          <p:cNvPicPr>
+            <a:picLocks noChangeAspect="1"/>
+          </p:cNvPicPr>
+          <p:nvPr/>
+        </p:nvPicPr>
+        <p:blipFill>
+          <a:blip r:embed="rId3"/>
+          <a:stretch>
+            <a:fillRect/>
+          </a:stretch>
+        </p:blipFill>
+        <p:spPr>
+          <a:xfrm>
+            <a:off x="2545080" y="4050792"/>
+            <a:ext cx="2471928" cy="2532888"/>
+          </a:xfrm>
+          <a:prstGeom prst="rect">
+            <a:avLst/>
+          </a:prstGeom>
+        </p:spPr>
+      </p:pic>
+      <p:pic>
+        <p:nvPicPr>
+          <p:cNvPr id="5" name="cover team img56.jpg" descr="Đội ngũ công nhân BLT">    </p:cNvPr>
+          <p:cNvPicPr>
+            <a:picLocks noChangeAspect="1"/>
+          </p:cNvPicPr>
+          <p:nvPr/>
+        </p:nvPicPr>
+        <p:blipFill>
+          <a:blip r:embed="rId4"/>
+          <a:stretch>
+            <a:fillRect/>
+          </a:stretch>
+        </p:blipFill>
+        <p:spPr>
+          <a:xfrm>
+            <a:off x="5090160" y="4050792"/>
+            <a:ext cx="2471928" cy="2532888"/>
+          </a:xfrm>
+          <a:prstGeom prst="rect">
+            <a:avLst/>
+          </a:prstGeom>
+        </p:spPr>
+      </p:pic>
+      <p:sp>
+        <p:nvSpPr>
+          <p:cNvPr id="6" name="Shape 0"/>
+          <p:cNvSpPr/>
+          <p:nvPr/>
+        </p:nvSpPr>
+        <p:spPr>
+          <a:xfrm>
+            <a:off x="4544568" y="3364992"/>
+            <a:ext cx="2514600" cy="457200"/>
+          </a:xfrm>
+          <a:prstGeom prst="roundRect">
+            <a:avLst>
+              <a:gd name="adj" fmla="val 16000"/>
+            </a:avLst>
+          </a:prstGeom>
+          <a:solidFill>
+            <a:schemeClr val="accent1"/>
+          </a:solidFill>
+          <a:ln w="12700">
+            <a:solidFill>
+              <a:schemeClr val="accent1"/>
+            </a:solidFill>
+            <a:prstDash val="solid"/>
+          </a:ln>
+        </p:spPr>
+      </p:sp>
+      <p:sp>
+        <p:nvSpPr>
+          <p:cNvPr id="7" name="Text 1"/>
+          <p:cNvSpPr txBox="1"/>
+          <p:nvPr/>
+        </p:nvSpPr>
+        <p:spPr>
+          <a:xfrm>
+            <a:off x="4544568" y="3364992"/>
+            <a:ext cx="2514600" cy="457200"/>
+          </a:xfrm>
+          <a:prstGeom prst="rect">
+            <a:avLst/>
+          </a:prstGeom>
+          <a:noFill/>
+          <a:ln/>
+        </p:spPr>
+        <p:txBody>
+          <a:bodyPr wrap="square" lIns="0" tIns="0" rIns="0" bIns="0" rtlCol="0" anchor="ctr"/>
+          <a:lstStyle/>
+          <a:p>
+            <a:pPr algn="ctr" indent="0" marL="0">
+              <a:buNone/>
+            </a:pPr>
+            <a:r>
+              <a:rPr lang="en-US" sz="1400" b="1" spc="100" kern="0" dirty="0">
+                <a:solidFill>
+                  <a:schemeClr val="bg1"/>
+                </a:solidFill>
+                <a:latin typeface="Arial" pitchFamily="34" charset="0"/>
+                <a:ea typeface="Arial" pitchFamily="34" charset="-122"/>
+                <a:cs typeface="Arial" pitchFamily="34" charset="-120"/>
+              </a:rPr>
+              <a:t>ĐỘI NGŨ 50 NHÂN SỰ</a:t>
+            </a:r>
+            <a:endParaRPr lang="en-US" sz="1400" dirty="0"/>
+          </a:p>
+        </p:txBody>
+      </p:sp>
+      <p:sp>
+        <p:nvSpPr>
+          <p:cNvPr id="8" name="Shape 2"/>
           <p:cNvSpPr/>
           <p:nvPr/>
         </p:nvSpPr>
@@ -3674,16 +3759,40 @@
           </a:ln>
         </p:spPr>
       </p:sp>
-      <p:sp>
-        <p:nvSpPr>
-          <p:cNvPr id="6" name="Text 2"/>
+      <p:pic>
+        <p:nvPicPr>
+          <p:cNvPr id="9" name="logo" descr="preencoded.png">    </p:cNvPr>
+          <p:cNvPicPr>
+            <a:picLocks noChangeAspect="1"/>
+          </p:cNvPicPr>
+          <p:nvPr/>
+        </p:nvPicPr>
+        <p:blipFill>
+          <a:blip r:embed="rId5"/>
+          <a:stretch>
+            <a:fillRect/>
+          </a:stretch>
+        </p:blipFill>
+        <p:spPr>
+          <a:xfrm>
+            <a:off x="6007608" y="6903720"/>
+            <a:ext cx="1051560" cy="1051560"/>
+          </a:xfrm>
+          <a:prstGeom prst="rect">
+            <a:avLst/>
+          </a:prstGeom>
+        </p:spPr>
+      </p:pic>
+      <p:sp>
+        <p:nvSpPr>
+          <p:cNvPr id="10" name="Text 3"/>
           <p:cNvSpPr txBox="1"/>
           <p:nvPr/>
         </p:nvSpPr>
         <p:spPr>
           <a:xfrm>
             <a:off x="502920" y="6903720"/>
-            <a:ext cx="6556248" cy="274320"/>
+            <a:ext cx="4937760" cy="274320"/>
           </a:xfrm>
           <a:prstGeom prst="rect">
             <a:avLst/>
@@ -3715,14 +3824,14 @@
       </p:sp>
       <p:sp>
         <p:nvSpPr>
-          <p:cNvPr id="7" name="Text 3"/>
+          <p:cNvPr id="11" name="Text 4"/>
           <p:cNvSpPr txBox="1"/>
           <p:nvPr/>
         </p:nvSpPr>
         <p:spPr>
           <a:xfrm>
             <a:off x="502920" y="7178040"/>
-            <a:ext cx="6556248" cy="411480"/>
+            <a:ext cx="4937760" cy="411480"/>
           </a:xfrm>
           <a:prstGeom prst="rect">
             <a:avLst/>
@@ -3754,7 +3863,7 @@
       </p:sp>
       <p:sp>
         <p:nvSpPr>
-          <p:cNvPr id="8" name="Text 4"/>
+          <p:cNvPr id="12" name="Text 5"/>
           <p:cNvSpPr txBox="1"/>
           <p:nvPr/>
         </p:nvSpPr>
@@ -3807,7 +3916,7 @@
       </p:sp>
       <p:sp>
         <p:nvSpPr>
-          <p:cNvPr id="9" name="Text 5"/>
+          <p:cNvPr id="13" name="Text 6"/>
           <p:cNvSpPr txBox="1"/>
           <p:nvPr/>
         </p:nvSpPr>
@@ -3843,7 +3952,7 @@
       </p:sp>
       <p:sp>
         <p:nvSpPr>
-          <p:cNvPr id="10" name="Text 6"/>
+          <p:cNvPr id="14" name="Text 7"/>
           <p:cNvSpPr txBox="1"/>
           <p:nvPr/>
         </p:nvSpPr>
@@ -3879,7 +3988,7 @@
       </p:sp>
       <p:sp>
         <p:nvSpPr>
-          <p:cNvPr id="11" name="Text 7"/>
+          <p:cNvPr id="15" name="Text 8"/>
           <p:cNvSpPr txBox="1"/>
           <p:nvPr/>
         </p:nvSpPr>
@@ -3915,7 +4024,7 @@
       </p:sp>
       <p:sp>
         <p:nvSpPr>
-          <p:cNvPr id="12" name="Text 8"/>
+          <p:cNvPr id="16" name="Text 9"/>
           <p:cNvSpPr txBox="1"/>
           <p:nvPr/>
         </p:nvSpPr>

--- a/ho-so-nang-luc-BLT/HO_SO_NANG_LUC_BLT.pptx
+++ b/ho-so-nang-luc-BLT/HO_SO_NANG_LUC_BLT.pptx
@@ -132,14 +132,14 @@
   <p:extLst>
     <p:ext uri="{521415D9-36F7-43E2-AB2F-B90AF26B5E84}">
       <p14:sectionLst xmlns:p14="http://schemas.microsoft.com/office/powerpoint/2010/main">
-        <p14:section name="Mở đầu" id="{55715496-9de9-e922-bdf8-e0140192ff91}">
+        <p14:section name="Mở đầu" id="{4a27b49f-14f7-d116-363b-8b4b3f418060}">
           <p14:sldIdLst>
             <p14:sldId id="256"/>
             <p14:sldId id="257"/>
             <p14:sldId id="258"/>
           </p14:sldIdLst>
         </p14:section>
-        <p14:section name="01 Tổng quan" id="{17fca54e-8d1d-380a-b214-b40fe5da3ae4}">
+        <p14:section name="01 Tổng quan" id="{31e3abc5-57c4-fada-442d-c61aa42356be}">
           <p14:sldIdLst>
             <p14:sldId id="259"/>
             <p14:sldId id="260"/>
@@ -148,39 +148,39 @@
             <p14:sldId id="263"/>
           </p14:sldIdLst>
         </p14:section>
-        <p14:section name="02 Điện nước công trình" id="{92e6f1a4-c17d-7018-feb0-1258c2413746}">
+        <p14:section name="02 Điện nước công trình" id="{73013b9b-c3e7-1522-b6db-543fff4305ed}">
           <p14:sldIdLst>
             <p14:sldId id="264"/>
             <p14:sldId id="265"/>
             <p14:sldId id="266"/>
           </p14:sldIdLst>
         </p14:section>
-        <p14:section name="03 Hút sương dầu nhà xưởng" id="{33c11192-cb4c-2084-34a2-43e17a0098c7}">
+        <p14:section name="03 Hút sương dầu nhà xưởng" id="{a3335cf2-3af5-15f6-3b04-01b4d8675f49}">
           <p14:sldIdLst>
             <p14:sldId id="267"/>
             <p14:sldId id="268"/>
             <p14:sldId id="269"/>
           </p14:sldIdLst>
         </p14:section>
-        <p14:section name="04 Bơm &amp; xử lý nước" id="{9fe28723-a0df-e9df-b913-1e83ea03b5b2}">
+        <p14:section name="04 Bơm &amp; xử lý nước" id="{d2966d91-82c4-c081-6ba4-d4ae11a0682a}">
           <p14:sldIdLst>
             <p14:sldId id="270"/>
           </p14:sldIdLst>
         </p14:section>
-        <p14:section name="05 Quản trị dự án" id="{cdfde152-a3c2-26dd-29b1-6f65f5c527ae}">
+        <p14:section name="05 Quản trị dự án" id="{16cd0b7e-ed3b-fbd7-8c53-aceba35b0d5c}">
           <p14:sldIdLst>
             <p14:sldId id="271"/>
             <p14:sldId id="272"/>
             <p14:sldId id="273"/>
           </p14:sldIdLst>
         </p14:section>
-        <p14:section name="06 Nguồn lực" id="{77766e98-97c0-d22b-6c15-5ee7c3cb9951}">
+        <p14:section name="06 Nguồn lực" id="{f988fe43-436d-d3c0-8703-b6c0e13cbb12}">
           <p14:sldIdLst>
             <p14:sldId id="274"/>
             <p14:sldId id="275"/>
           </p14:sldIdLst>
         </p14:section>
-        <p14:section name="07 Công trình tiêu biểu" id="{d11c1036-f9d9-a780-485d-0947a8e2abca}">
+        <p14:section name="07 Công trình tiêu biểu" id="{4bc1d3fe-58e2-8edf-c3fc-d47bfa743cf7}">
           <p14:sldIdLst>
             <p14:sldId id="276"/>
             <p14:sldId id="277"/>
@@ -188,7 +188,7 @@
             <p14:sldId id="279"/>
           </p14:sldIdLst>
         </p14:section>
-        <p14:section name="08 Cam kết &amp; liên hệ" id="{adde38f6-93e1-9292-1e23-4767d8fea2ba}">
+        <p14:section name="08 Cam kết &amp; liên hệ" id="{04dc08d5-69f2-e4bc-85f3-8974fb8439e3}">
           <p14:sldIdLst>
             <p14:sldId id="280"/>
             <p14:sldId id="281"/>
@@ -3622,7 +3622,7 @@
       </p:pic>
       <p:pic>
         <p:nvPicPr>
-          <p:cNvPr id="4" name="cover team img35.jpg" descr="Đội ngũ công nhân BLT">    </p:cNvPr>
+          <p:cNvPr id="4" name="cover team qt_team.jpg" descr="Đội ngũ công nhân BLT">    </p:cNvPr>
           <p:cNvPicPr>
             <a:picLocks noChangeAspect="1"/>
           </p:cNvPicPr>
@@ -34005,16 +34005,131 @@
         <p:spPr>
           <a:xfrm>
             <a:off x="0" y="0"/>
-            <a:ext cx="7562088" cy="6766560"/>
+            <a:ext cx="4114800" cy="6766560"/>
           </a:xfrm>
           <a:prstGeom prst="rect">
             <a:avLst/>
           </a:prstGeom>
         </p:spPr>
       </p:pic>
-      <p:sp>
-        <p:nvSpPr>
-          <p:cNvPr id="3" name="Text 0"/>
+      <p:pic>
+        <p:nvPicPr>
+          <p:cNvPr id="3" name="photo render_nha.jpg" descr="Ảnh hiện trường BLT">    </p:cNvPr>
+          <p:cNvPicPr>
+            <a:picLocks noChangeAspect="1"/>
+          </p:cNvPicPr>
+          <p:nvPr/>
+        </p:nvPicPr>
+        <p:blipFill>
+          <a:blip r:embed="rId2"/>
+          <a:stretch>
+            <a:fillRect/>
+          </a:stretch>
+        </p:blipFill>
+        <p:spPr>
+          <a:xfrm>
+            <a:off x="4187952" y="0"/>
+            <a:ext cx="3374136" cy="3346704"/>
+          </a:xfrm>
+          <a:prstGeom prst="rect">
+            <a:avLst/>
+          </a:prstGeom>
+        </p:spPr>
+      </p:pic>
+      <p:pic>
+        <p:nvPicPr>
+          <p:cNvPr id="4" name="photo img08.jpg" descr="Ảnh hiện trường BLT">    </p:cNvPr>
+          <p:cNvPicPr>
+            <a:picLocks noChangeAspect="1"/>
+          </p:cNvPicPr>
+          <p:nvPr/>
+        </p:nvPicPr>
+        <p:blipFill>
+          <a:blip r:embed="rId3"/>
+          <a:stretch>
+            <a:fillRect/>
+          </a:stretch>
+        </p:blipFill>
+        <p:spPr>
+          <a:xfrm>
+            <a:off x="4187952" y="3419856"/>
+            <a:ext cx="3374136" cy="3346704"/>
+          </a:xfrm>
+          <a:prstGeom prst="rect">
+            <a:avLst/>
+          </a:prstGeom>
+        </p:spPr>
+      </p:pic>
+      <p:sp>
+        <p:nvSpPr>
+          <p:cNvPr id="5" name="Shape 0"/>
+          <p:cNvSpPr/>
+          <p:nvPr/>
+        </p:nvSpPr>
+        <p:spPr>
+          <a:xfrm>
+            <a:off x="4370832" y="2926080"/>
+            <a:ext cx="1600200" cy="274320"/>
+          </a:xfrm>
+          <a:prstGeom prst="roundRect">
+            <a:avLst>
+              <a:gd name="adj" fmla="val 16667"/>
+            </a:avLst>
+          </a:prstGeom>
+          <a:solidFill>
+            <a:schemeClr val="tx2">
+              <a:alpha val="85000"/>
+            </a:schemeClr>
+          </a:solidFill>
+          <a:ln w="12700">
+            <a:solidFill>
+              <a:schemeClr val="tx2">
+                <a:alpha val="0"/>
+              </a:schemeClr>
+            </a:solidFill>
+            <a:prstDash val="solid"/>
+          </a:ln>
+        </p:spPr>
+      </p:sp>
+      <p:sp>
+        <p:nvSpPr>
+          <p:cNvPr id="6" name="Text 1"/>
+          <p:cNvSpPr txBox="1"/>
+          <p:nvPr/>
+        </p:nvSpPr>
+        <p:spPr>
+          <a:xfrm>
+            <a:off x="4370832" y="2926080"/>
+            <a:ext cx="1600200" cy="274320"/>
+          </a:xfrm>
+          <a:prstGeom prst="rect">
+            <a:avLst/>
+          </a:prstGeom>
+          <a:noFill/>
+          <a:ln/>
+        </p:spPr>
+        <p:txBody>
+          <a:bodyPr wrap="square" lIns="0" tIns="0" rIns="0" bIns="0" rtlCol="0" anchor="ctr"/>
+          <a:lstStyle/>
+          <a:p>
+            <a:pPr algn="ctr" indent="0" marL="0">
+              <a:buNone/>
+            </a:pPr>
+            <a:r>
+              <a:rPr lang="en-US" sz="750" b="1" spc="100" kern="0" dirty="0">
+                <a:solidFill>
+                  <a:schemeClr val="bg1"/>
+                </a:solidFill>
+              </a:rPr>
+              <a:t>PHỐI CẢNH MINH HỌA</a:t>
+            </a:r>
+            <a:endParaRPr lang="en-US" sz="750" dirty="0"/>
+          </a:p>
+        </p:txBody>
+      </p:sp>
+      <p:sp>
+        <p:nvSpPr>
+          <p:cNvPr id="7" name="Text 2"/>
           <p:cNvSpPr txBox="1"/>
           <p:nvPr/>
         </p:nvSpPr>
@@ -34050,7 +34165,7 @@
       </p:sp>
       <p:sp>
         <p:nvSpPr>
-          <p:cNvPr id="4" name="Text 1"/>
+          <p:cNvPr id="8" name="Text 3"/>
           <p:cNvSpPr txBox="1"/>
           <p:nvPr/>
         </p:nvSpPr>
@@ -34106,7 +34221,7 @@
       </p:sp>
       <p:sp>
         <p:nvSpPr>
-          <p:cNvPr id="5" name="Text 2"/>
+          <p:cNvPr id="9" name="Text 4"/>
           <p:cNvSpPr txBox="1"/>
           <p:nvPr/>
         </p:nvSpPr>

--- a/ho-so-nang-luc-BLT/HO_SO_NANG_LUC_BLT.pptx
+++ b/ho-so-nang-luc-BLT/HO_SO_NANG_LUC_BLT.pptx
@@ -132,14 +132,14 @@
   <p:extLst>
     <p:ext uri="{521415D9-36F7-43E2-AB2F-B90AF26B5E84}">
       <p14:sectionLst xmlns:p14="http://schemas.microsoft.com/office/powerpoint/2010/main">
-        <p14:section name="Mở đầu" id="{4a27b49f-14f7-d116-363b-8b4b3f418060}">
+        <p14:section name="Mở đầu" id="{b6b3af05-bf6d-c949-7b6c-c6400a4dfc2e}">
           <p14:sldIdLst>
             <p14:sldId id="256"/>
             <p14:sldId id="257"/>
             <p14:sldId id="258"/>
           </p14:sldIdLst>
         </p14:section>
-        <p14:section name="01 Tổng quan" id="{31e3abc5-57c4-fada-442d-c61aa42356be}">
+        <p14:section name="01 Tổng quan" id="{b9b22ee0-a47f-af3d-93f7-0c4d99af6aa4}">
           <p14:sldIdLst>
             <p14:sldId id="259"/>
             <p14:sldId id="260"/>
@@ -148,39 +148,39 @@
             <p14:sldId id="263"/>
           </p14:sldIdLst>
         </p14:section>
-        <p14:section name="02 Điện nước công trình" id="{73013b9b-c3e7-1522-b6db-543fff4305ed}">
+        <p14:section name="02 Điện nước công trình" id="{a4986891-b793-c7f3-7755-49189c0df814}">
           <p14:sldIdLst>
             <p14:sldId id="264"/>
             <p14:sldId id="265"/>
             <p14:sldId id="266"/>
           </p14:sldIdLst>
         </p14:section>
-        <p14:section name="03 Hút sương dầu nhà xưởng" id="{a3335cf2-3af5-15f6-3b04-01b4d8675f49}">
+        <p14:section name="03 Hút sương dầu nhà xưởng" id="{ca5af126-9ec2-b3f8-1818-1df6b6dd6de1}">
           <p14:sldIdLst>
             <p14:sldId id="267"/>
             <p14:sldId id="268"/>
             <p14:sldId id="269"/>
           </p14:sldIdLst>
         </p14:section>
-        <p14:section name="04 Bơm &amp; xử lý nước" id="{d2966d91-82c4-c081-6ba4-d4ae11a0682a}">
+        <p14:section name="04 Bơm &amp; xử lý nước" id="{3fceb4b8-2bd8-f7c9-322a-b7af08013cde}">
           <p14:sldIdLst>
             <p14:sldId id="270"/>
           </p14:sldIdLst>
         </p14:section>
-        <p14:section name="05 Quản trị dự án" id="{16cd0b7e-ed3b-fbd7-8c53-aceba35b0d5c}">
+        <p14:section name="05 Quản trị dự án" id="{ce89f80e-fbb1-c3dd-c4c1-e6026c5020a9}">
           <p14:sldIdLst>
             <p14:sldId id="271"/>
             <p14:sldId id="272"/>
             <p14:sldId id="273"/>
           </p14:sldIdLst>
         </p14:section>
-        <p14:section name="06 Nguồn lực" id="{f988fe43-436d-d3c0-8703-b6c0e13cbb12}">
+        <p14:section name="06 Nguồn lực" id="{737d82a7-68bb-2897-af92-492a2bc6435b}">
           <p14:sldIdLst>
             <p14:sldId id="274"/>
             <p14:sldId id="275"/>
           </p14:sldIdLst>
         </p14:section>
-        <p14:section name="07 Công trình tiêu biểu" id="{4bc1d3fe-58e2-8edf-c3fc-d47bfa743cf7}">
+        <p14:section name="07 Công trình tiêu biểu" id="{1103b9cc-30b3-10ad-e67c-6473b52ce642}">
           <p14:sldIdLst>
             <p14:sldId id="276"/>
             <p14:sldId id="277"/>
@@ -188,7 +188,7 @@
             <p14:sldId id="279"/>
           </p14:sldIdLst>
         </p14:section>
-        <p14:section name="08 Cam kết &amp; liên hệ" id="{04dc08d5-69f2-e4bc-85f3-8974fb8439e3}">
+        <p14:section name="08 Cam kết &amp; liên hệ" id="{856cabb8-a502-b117-753e-e0d0d0a36498}">
           <p14:sldIdLst>
             <p14:sldId id="280"/>
             <p14:sldId id="281"/>
@@ -7727,7 +7727,7 @@
       </p:sp>
       <p:pic>
         <p:nvPicPr>
-          <p:cNvPr id="6" name="photo img30.jpg" descr="Máy lọc trên giá đỡ cột">    </p:cNvPr>
+          <p:cNvPr id="6" name="photo img26.jpg" descr="Hoàn thiện máy lọc trên giá đỡ">    </p:cNvPr>
           <p:cNvPicPr>
             <a:picLocks noChangeAspect="1"/>
           </p:cNvPicPr>
@@ -7742,7 +7742,7 @@
         <p:spPr>
           <a:xfrm>
             <a:off x="502920" y="5120640"/>
-            <a:ext cx="2063496" cy="2377440"/>
+            <a:ext cx="1536192" cy="2377440"/>
           </a:xfrm>
           <a:prstGeom prst="rect">
             <a:avLst/>
@@ -7758,7 +7758,7 @@
         <p:spPr>
           <a:xfrm>
             <a:off x="502920" y="7534656"/>
-            <a:ext cx="2063496" cy="201168"/>
+            <a:ext cx="1536192" cy="201168"/>
           </a:xfrm>
           <a:prstGeom prst="rect">
             <a:avLst/>
@@ -7781,7 +7781,7 @@
                   <a:schemeClr val="accent3"/>
                 </a:solidFill>
               </a:rPr>
-              <a:t>Máy lọc trên giá đỡ cột</a:t>
+              <a:t>Hoàn thiện máy lọc trên giá đỡ</a:t>
             </a:r>
             <a:endParaRPr lang="en-US" sz="800" dirty="0"/>
           </a:p>
@@ -7789,7 +7789,7 @@
       </p:sp>
       <p:pic>
         <p:nvPicPr>
-          <p:cNvPr id="8" name="photo img29.jpg" descr="Gia công giá đỡ thép">    </p:cNvPr>
+          <p:cNvPr id="8" name="photo img30.jpg" descr="Máy lọc trên giá đỡ cột">    </p:cNvPr>
           <p:cNvPicPr>
             <a:picLocks noChangeAspect="1"/>
           </p:cNvPicPr>
@@ -7803,8 +7803,8 @@
         </p:blipFill>
         <p:spPr>
           <a:xfrm>
-            <a:off x="2749296" y="5120640"/>
-            <a:ext cx="2063496" cy="2377440"/>
+            <a:off x="2176272" y="5120640"/>
+            <a:ext cx="1536192" cy="2377440"/>
           </a:xfrm>
           <a:prstGeom prst="rect">
             <a:avLst/>
@@ -7819,8 +7819,8 @@
         </p:nvSpPr>
         <p:spPr>
           <a:xfrm>
-            <a:off x="2749296" y="7534656"/>
-            <a:ext cx="2063496" cy="201168"/>
+            <a:off x="2176272" y="7534656"/>
+            <a:ext cx="1536192" cy="201168"/>
           </a:xfrm>
           <a:prstGeom prst="rect">
             <a:avLst/>
@@ -7843,7 +7843,7 @@
                   <a:schemeClr val="accent3"/>
                 </a:solidFill>
               </a:rPr>
-              <a:t>Gia công giá đỡ thép</a:t>
+              <a:t>Máy lọc trên giá đỡ cột</a:t>
             </a:r>
             <a:endParaRPr lang="en-US" sz="800" dirty="0"/>
           </a:p>
@@ -7851,7 +7851,7 @@
       </p:sp>
       <p:pic>
         <p:nvPicPr>
-          <p:cNvPr id="10" name="photo img33.jpg" descr="Bơm keo làm kín mối nối">    </p:cNvPr>
+          <p:cNvPr id="10" name="photo img29.jpg" descr="Gia công giá đỡ thép">    </p:cNvPr>
           <p:cNvPicPr>
             <a:picLocks noChangeAspect="1"/>
           </p:cNvPicPr>
@@ -7865,8 +7865,8 @@
         </p:blipFill>
         <p:spPr>
           <a:xfrm>
-            <a:off x="4995672" y="5120640"/>
-            <a:ext cx="2063496" cy="2377440"/>
+            <a:off x="3849624" y="5120640"/>
+            <a:ext cx="1536192" cy="2377440"/>
           </a:xfrm>
           <a:prstGeom prst="rect">
             <a:avLst/>
@@ -7881,8 +7881,8 @@
         </p:nvSpPr>
         <p:spPr>
           <a:xfrm>
-            <a:off x="4995672" y="7534656"/>
-            <a:ext cx="2063496" cy="201168"/>
+            <a:off x="3849624" y="7534656"/>
+            <a:ext cx="1536192" cy="201168"/>
           </a:xfrm>
           <a:prstGeom prst="rect">
             <a:avLst/>
@@ -7905,6 +7905,68 @@
                   <a:schemeClr val="accent3"/>
                 </a:solidFill>
               </a:rPr>
+              <a:t>Gia công giá đỡ thép</a:t>
+            </a:r>
+            <a:endParaRPr lang="en-US" sz="800" dirty="0"/>
+          </a:p>
+        </p:txBody>
+      </p:sp>
+      <p:pic>
+        <p:nvPicPr>
+          <p:cNvPr id="12" name="photo img33.jpg" descr="Bơm keo làm kín mối nối">    </p:cNvPr>
+          <p:cNvPicPr>
+            <a:picLocks noChangeAspect="1"/>
+          </p:cNvPicPr>
+          <p:nvPr/>
+        </p:nvPicPr>
+        <p:blipFill>
+          <a:blip r:embed="rId5"/>
+          <a:stretch>
+            <a:fillRect/>
+          </a:stretch>
+        </p:blipFill>
+        <p:spPr>
+          <a:xfrm>
+            <a:off x="5522976" y="5120640"/>
+            <a:ext cx="1536192" cy="2377440"/>
+          </a:xfrm>
+          <a:prstGeom prst="rect">
+            <a:avLst/>
+          </a:prstGeom>
+        </p:spPr>
+      </p:pic>
+      <p:sp>
+        <p:nvSpPr>
+          <p:cNvPr id="13" name="Text 6"/>
+          <p:cNvSpPr txBox="1"/>
+          <p:nvPr/>
+        </p:nvSpPr>
+        <p:spPr>
+          <a:xfrm>
+            <a:off x="5522976" y="7534656"/>
+            <a:ext cx="1536192" cy="201168"/>
+          </a:xfrm>
+          <a:prstGeom prst="rect">
+            <a:avLst/>
+          </a:prstGeom>
+          <a:noFill/>
+          <a:ln/>
+        </p:spPr>
+        <p:txBody>
+          <a:bodyPr wrap="square" lIns="0" tIns="0" rIns="0" bIns="0" rtlCol="0" anchor="ctr">
+            <a:normAutofit/>
+          </a:bodyPr>
+          <a:lstStyle/>
+          <a:p>
+            <a:pPr indent="0" marL="0">
+              <a:buNone/>
+            </a:pPr>
+            <a:r>
+              <a:rPr lang="en-US" sz="800" i="1" dirty="0">
+                <a:solidFill>
+                  <a:schemeClr val="accent3"/>
+                </a:solidFill>
+              </a:rPr>
               <a:t>Bơm keo làm kín mối nối</a:t>
             </a:r>
             <a:endParaRPr lang="en-US" sz="800" dirty="0"/>
@@ -7913,7 +7975,7 @@
       </p:sp>
       <p:sp>
         <p:nvSpPr>
-          <p:cNvPr id="12" name="Text 6"/>
+          <p:cNvPr id="14" name="Text 7"/>
           <p:cNvSpPr txBox="1"/>
           <p:nvPr/>
         </p:nvSpPr>
@@ -7952,7 +8014,7 @@
       </p:sp>
       <p:sp>
         <p:nvSpPr>
-          <p:cNvPr id="13" name="Shape 7"/>
+          <p:cNvPr id="15" name="Shape 8"/>
           <p:cNvSpPr/>
           <p:nvPr/>
         </p:nvSpPr>
@@ -7979,7 +8041,7 @@
       </p:sp>
       <p:sp>
         <p:nvSpPr>
-          <p:cNvPr id="14" name="Shape 8"/>
+          <p:cNvPr id="16" name="Shape 9"/>
           <p:cNvSpPr/>
           <p:nvPr/>
         </p:nvSpPr>
@@ -8004,7 +8066,7 @@
       </p:sp>
       <p:sp>
         <p:nvSpPr>
-          <p:cNvPr id="15" name="Text 9"/>
+          <p:cNvPr id="17" name="Text 10"/>
           <p:cNvSpPr txBox="1"/>
           <p:nvPr/>
         </p:nvSpPr>
@@ -8043,7 +8105,7 @@
       </p:sp>
       <p:sp>
         <p:nvSpPr>
-          <p:cNvPr id="16" name="Text 10"/>
+          <p:cNvPr id="18" name="Text 11"/>
           <p:cNvSpPr txBox="1"/>
           <p:nvPr/>
         </p:nvSpPr>
@@ -8082,7 +8144,7 @@
       </p:sp>
       <p:sp>
         <p:nvSpPr>
-          <p:cNvPr id="17" name="Text 11"/>
+          <p:cNvPr id="19" name="Text 12"/>
           <p:cNvSpPr txBox="1"/>
           <p:nvPr/>
         </p:nvSpPr>
@@ -8121,7 +8183,7 @@
       </p:sp>
       <p:sp>
         <p:nvSpPr>
-          <p:cNvPr id="18" name="Shape 12"/>
+          <p:cNvPr id="20" name="Shape 13"/>
           <p:cNvSpPr/>
           <p:nvPr/>
         </p:nvSpPr>
@@ -8148,7 +8210,7 @@
       </p:sp>
       <p:sp>
         <p:nvSpPr>
-          <p:cNvPr id="19" name="Shape 13"/>
+          <p:cNvPr id="21" name="Shape 14"/>
           <p:cNvSpPr/>
           <p:nvPr/>
         </p:nvSpPr>
@@ -8173,7 +8235,7 @@
       </p:sp>
       <p:sp>
         <p:nvSpPr>
-          <p:cNvPr id="20" name="Text 14"/>
+          <p:cNvPr id="22" name="Text 15"/>
           <p:cNvSpPr txBox="1"/>
           <p:nvPr/>
         </p:nvSpPr>
@@ -8212,7 +8274,7 @@
       </p:sp>
       <p:sp>
         <p:nvSpPr>
-          <p:cNvPr id="21" name="Text 15"/>
+          <p:cNvPr id="23" name="Text 16"/>
           <p:cNvSpPr txBox="1"/>
           <p:nvPr/>
         </p:nvSpPr>
@@ -8251,7 +8313,7 @@
       </p:sp>
       <p:sp>
         <p:nvSpPr>
-          <p:cNvPr id="22" name="Text 16"/>
+          <p:cNvPr id="24" name="Text 17"/>
           <p:cNvSpPr txBox="1"/>
           <p:nvPr/>
         </p:nvSpPr>
@@ -8290,7 +8352,7 @@
       </p:sp>
       <p:sp>
         <p:nvSpPr>
-          <p:cNvPr id="23" name="Shape 17"/>
+          <p:cNvPr id="25" name="Shape 18"/>
           <p:cNvSpPr/>
           <p:nvPr/>
         </p:nvSpPr>
@@ -8317,7 +8379,7 @@
       </p:sp>
       <p:sp>
         <p:nvSpPr>
-          <p:cNvPr id="24" name="Shape 18"/>
+          <p:cNvPr id="26" name="Shape 19"/>
           <p:cNvSpPr/>
           <p:nvPr/>
         </p:nvSpPr>
@@ -8342,7 +8404,7 @@
       </p:sp>
       <p:sp>
         <p:nvSpPr>
-          <p:cNvPr id="25" name="Text 19"/>
+          <p:cNvPr id="27" name="Text 20"/>
           <p:cNvSpPr txBox="1"/>
           <p:nvPr/>
         </p:nvSpPr>
@@ -8381,7 +8443,7 @@
       </p:sp>
       <p:sp>
         <p:nvSpPr>
-          <p:cNvPr id="26" name="Text 20"/>
+          <p:cNvPr id="28" name="Text 21"/>
           <p:cNvSpPr txBox="1"/>
           <p:nvPr/>
         </p:nvSpPr>
@@ -8420,7 +8482,7 @@
       </p:sp>
       <p:sp>
         <p:nvSpPr>
-          <p:cNvPr id="27" name="Text 21"/>
+          <p:cNvPr id="29" name="Text 22"/>
           <p:cNvSpPr txBox="1"/>
           <p:nvPr/>
         </p:nvSpPr>

--- a/ho-so-nang-luc-BLT/HO_SO_NANG_LUC_BLT.pptx
+++ b/ho-so-nang-luc-BLT/HO_SO_NANG_LUC_BLT.pptx
@@ -132,14 +132,14 @@
   <p:extLst>
     <p:ext uri="{521415D9-36F7-43E2-AB2F-B90AF26B5E84}">
       <p14:sectionLst xmlns:p14="http://schemas.microsoft.com/office/powerpoint/2010/main">
-        <p14:section name="Mở đầu" id="{b6b3af05-bf6d-c949-7b6c-c6400a4dfc2e}">
+        <p14:section name="Mở đầu" id="{27cd69b8-5d94-0a91-8c6d-a58dd4d0d0ee}">
           <p14:sldIdLst>
             <p14:sldId id="256"/>
             <p14:sldId id="257"/>
             <p14:sldId id="258"/>
           </p14:sldIdLst>
         </p14:section>
-        <p14:section name="01 Tổng quan" id="{b9b22ee0-a47f-af3d-93f7-0c4d99af6aa4}">
+        <p14:section name="01 Tổng quan" id="{9cde1d9b-c4d8-c2cc-6163-19b41e274200}">
           <p14:sldIdLst>
             <p14:sldId id="259"/>
             <p14:sldId id="260"/>
@@ -148,39 +148,39 @@
             <p14:sldId id="263"/>
           </p14:sldIdLst>
         </p14:section>
-        <p14:section name="02 Điện nước công trình" id="{a4986891-b793-c7f3-7755-49189c0df814}">
+        <p14:section name="02 Điện nước công trình" id="{98ccb3cd-94e9-4a7d-99d9-53275ca8cbb1}">
           <p14:sldIdLst>
             <p14:sldId id="264"/>
             <p14:sldId id="265"/>
             <p14:sldId id="266"/>
           </p14:sldIdLst>
         </p14:section>
-        <p14:section name="03 Hút sương dầu nhà xưởng" id="{ca5af126-9ec2-b3f8-1818-1df6b6dd6de1}">
+        <p14:section name="03 Hút sương dầu nhà xưởng" id="{7ab66364-b84f-3acd-1e12-4ffadb8c22d0}">
           <p14:sldIdLst>
             <p14:sldId id="267"/>
             <p14:sldId id="268"/>
             <p14:sldId id="269"/>
           </p14:sldIdLst>
         </p14:section>
-        <p14:section name="04 Bơm &amp; xử lý nước" id="{3fceb4b8-2bd8-f7c9-322a-b7af08013cde}">
+        <p14:section name="04 Bơm &amp; xử lý nước" id="{ec8f1167-8296-2fda-68f1-628e927e8bc1}">
           <p14:sldIdLst>
             <p14:sldId id="270"/>
           </p14:sldIdLst>
         </p14:section>
-        <p14:section name="05 Quản trị dự án" id="{ce89f80e-fbb1-c3dd-c4c1-e6026c5020a9}">
+        <p14:section name="05 Quản trị dự án" id="{22dd7fe4-232f-18e0-787d-ee3af76ab44c}">
           <p14:sldIdLst>
             <p14:sldId id="271"/>
             <p14:sldId id="272"/>
             <p14:sldId id="273"/>
           </p14:sldIdLst>
         </p14:section>
-        <p14:section name="06 Nguồn lực" id="{737d82a7-68bb-2897-af92-492a2bc6435b}">
+        <p14:section name="06 Nguồn lực" id="{5c35c788-511c-4df4-382b-a2da2f5a8eef}">
           <p14:sldIdLst>
             <p14:sldId id="274"/>
             <p14:sldId id="275"/>
           </p14:sldIdLst>
         </p14:section>
-        <p14:section name="07 Công trình tiêu biểu" id="{1103b9cc-30b3-10ad-e67c-6473b52ce642}">
+        <p14:section name="07 Công trình tiêu biểu" id="{87157b3f-e221-469f-7ce9-6dd26054cb2d}">
           <p14:sldIdLst>
             <p14:sldId id="276"/>
             <p14:sldId id="277"/>
@@ -188,7 +188,7 @@
             <p14:sldId id="279"/>
           </p14:sldIdLst>
         </p14:section>
-        <p14:section name="08 Cam kết &amp; liên hệ" id="{856cabb8-a502-b117-753e-e0d0d0a36498}">
+        <p14:section name="08 Cam kết &amp; liên hệ" id="{80156dc7-746c-3659-adaf-65bffb8f1d1b}">
           <p14:sldIdLst>
             <p14:sldId id="280"/>
             <p14:sldId id="281"/>
@@ -3944,7 +3944,21 @@
                   <a:schemeClr val="accent4"/>
                 </a:solidFill>
               </a:rPr>
-              <a:t>HỆ THỐNG ĐIỆN  •  CẤP THOÁT NƯỚC  •  HÚT SƯƠNG DẦU – XỬ LÝ KHÍ NHÀ XƯỞNG  •  BƠM &amp; XỬ LÝ NƯỚC</a:t>
+              <a:t>HỆ THỐNG ĐIỆN  •  CẤP THOÁT NƯỚC  •  BƠM &amp; XỬ LÝ NƯỚC</a:t>
+            </a:r>
+            <a:endParaRPr lang="en-US" sz="1000" dirty="0"/>
+          </a:p>
+          <a:p>
+            <a:pPr indent="0" marL="0">
+              <a:buNone/>
+            </a:pPr>
+            <a:r>
+              <a:rPr lang="en-US" sz="1000" b="1" spc="100" kern="0" dirty="0">
+                <a:solidFill>
+                  <a:schemeClr val="accent4"/>
+                </a:solidFill>
+              </a:rPr>
+              <a:t>HÚT SƯƠNG DẦU – XỬ LÝ KHÍ NHÀ XƯỞNG</a:t>
             </a:r>
             <a:endParaRPr lang="en-US" sz="1000" dirty="0"/>
           </a:p>
@@ -4176,7 +4190,7 @@
         <p:spPr>
           <a:xfrm>
             <a:off x="502920" y="1463040"/>
-            <a:ext cx="3186684" cy="2194560"/>
+            <a:ext cx="3186684" cy="2514600"/>
           </a:xfrm>
           <a:prstGeom prst="rect">
             <a:avLst/>
@@ -4191,7 +4205,7 @@
         </p:nvSpPr>
         <p:spPr>
           <a:xfrm>
-            <a:off x="502920" y="3694176"/>
+            <a:off x="502920" y="4014216"/>
             <a:ext cx="3186684" cy="201168"/>
           </a:xfrm>
           <a:prstGeom prst="rect">
@@ -4238,7 +4252,7 @@
         <p:spPr>
           <a:xfrm>
             <a:off x="3872484" y="1463040"/>
-            <a:ext cx="3186684" cy="2194560"/>
+            <a:ext cx="3186684" cy="2514600"/>
           </a:xfrm>
           <a:prstGeom prst="rect">
             <a:avLst/>
@@ -4253,7 +4267,7 @@
         </p:nvSpPr>
         <p:spPr>
           <a:xfrm>
-            <a:off x="3872484" y="3694176"/>
+            <a:off x="3872484" y="4014216"/>
             <a:ext cx="3186684" cy="201168"/>
           </a:xfrm>
           <a:prstGeom prst="rect">
@@ -4285,7 +4299,7 @@
       </p:sp>
       <p:pic>
         <p:nvPicPr>
-          <p:cNvPr id="8" name="photo img12.jpg" descr="Tuyến ống, giá treo trên trần">    </p:cNvPr>
+          <p:cNvPr id="8" name="photo img03.jpg" descr="Đi ống luồn dây dưới sàn – Hà Nam, Ninh Bình">    </p:cNvPr>
           <p:cNvPicPr>
             <a:picLocks noChangeAspect="1"/>
           </p:cNvPicPr>
@@ -4299,8 +4313,8 @@
         </p:blipFill>
         <p:spPr>
           <a:xfrm>
-            <a:off x="502920" y="3977640"/>
-            <a:ext cx="3186684" cy="2194560"/>
+            <a:off x="502920" y="4297680"/>
+            <a:ext cx="3186684" cy="2514600"/>
           </a:xfrm>
           <a:prstGeom prst="rect">
             <a:avLst/>
@@ -4315,7 +4329,7 @@
         </p:nvSpPr>
         <p:spPr>
           <a:xfrm>
-            <a:off x="502920" y="6208776"/>
+            <a:off x="502920" y="6848856"/>
             <a:ext cx="3186684" cy="201168"/>
           </a:xfrm>
           <a:prstGeom prst="rect">
@@ -4339,7 +4353,7 @@
                   <a:schemeClr val="accent3"/>
                 </a:solidFill>
               </a:rPr>
-              <a:t>Tuyến ống, giá treo trên trần</a:t>
+              <a:t>Đi ống luồn dây dưới sàn – Hà Nam, Ninh Bình</a:t>
             </a:r>
             <a:endParaRPr lang="en-US" sz="800" dirty="0"/>
           </a:p>
@@ -4361,8 +4375,8 @@
         </p:blipFill>
         <p:spPr>
           <a:xfrm>
-            <a:off x="3872484" y="3977640"/>
-            <a:ext cx="3186684" cy="2194560"/>
+            <a:off x="3872484" y="4297680"/>
+            <a:ext cx="3186684" cy="2514600"/>
           </a:xfrm>
           <a:prstGeom prst="rect">
             <a:avLst/>
@@ -4377,7 +4391,7 @@
         </p:nvSpPr>
         <p:spPr>
           <a:xfrm>
-            <a:off x="3872484" y="6208776"/>
+            <a:off x="3872484" y="6848856"/>
             <a:ext cx="3186684" cy="201168"/>
           </a:xfrm>
           <a:prstGeom prst="rect">
@@ -4415,7 +4429,7 @@
         </p:nvSpPr>
         <p:spPr>
           <a:xfrm>
-            <a:off x="502920" y="6537960"/>
+            <a:off x="502920" y="7178040"/>
             <a:ext cx="3186684" cy="228600"/>
           </a:xfrm>
           <a:prstGeom prst="rect">
@@ -4448,187 +4462,18 @@
       </p:sp>
       <p:sp>
         <p:nvSpPr>
-          <p:cNvPr id="13" name="Text 7"/>
-          <p:cNvSpPr txBox="1"/>
-          <p:nvPr/>
-        </p:nvSpPr>
-        <p:spPr>
-          <a:xfrm>
-            <a:off x="502920" y="6812280"/>
-            <a:ext cx="3186684" cy="2926080"/>
-          </a:xfrm>
-          <a:prstGeom prst="rect">
-            <a:avLst/>
-          </a:prstGeom>
-          <a:noFill/>
-          <a:ln/>
-        </p:spPr>
-        <p:txBody>
-          <a:bodyPr wrap="square" lIns="0" tIns="0" rIns="0" bIns="0" rtlCol="0" anchor="t"/>
-          <a:lstStyle/>
-          <a:p>
-            <a:pPr marL="152400" indent="-152400">
-              <a:spcAft>
-                <a:spcPts val="400"/>
-              </a:spcAft>
-              <a:buSzPct val="100000"/>
-              <a:buChar char="•"/>
-            </a:pPr>
-            <a:r>
-              <a:rPr lang="en-US" sz="1000" dirty="0">
-                <a:solidFill>
-                  <a:schemeClr val="tx1"/>
-                </a:solidFill>
-              </a:rPr>
-              <a:t>Đi ống luồn dây âm tường, âm sàn, nổi trần</a:t>
-            </a:r>
-            <a:endParaRPr lang="en-US" sz="1000" dirty="0"/>
-          </a:p>
-          <a:p>
-            <a:pPr marL="152400" indent="-152400">
-              <a:spcAft>
-                <a:spcPts val="400"/>
-              </a:spcAft>
-              <a:buSzPct val="100000"/>
-              <a:buChar char="•"/>
-            </a:pPr>
-            <a:r>
-              <a:rPr lang="en-US" sz="1000" dirty="0">
-                <a:solidFill>
-                  <a:schemeClr val="tx1"/>
-                </a:solidFill>
-              </a:rPr>
-              <a:t>Lắp đặt máng cáp, thang cáp, giá treo</a:t>
-            </a:r>
-            <a:endParaRPr lang="en-US" sz="1000" dirty="0"/>
-          </a:p>
-          <a:p>
-            <a:pPr marL="152400" indent="-152400">
-              <a:spcAft>
-                <a:spcPts val="400"/>
-              </a:spcAft>
-              <a:buSzPct val="100000"/>
-              <a:buChar char="•"/>
-            </a:pPr>
-            <a:r>
-              <a:rPr lang="en-US" sz="1000" dirty="0">
-                <a:solidFill>
-                  <a:schemeClr val="tx1"/>
-                </a:solidFill>
-              </a:rPr>
-              <a:t>Kéo rải cáp động lực, cáp chiếu sáng, ổ cắm</a:t>
-            </a:r>
-            <a:endParaRPr lang="en-US" sz="1000" dirty="0"/>
-          </a:p>
-          <a:p>
-            <a:pPr marL="152400" indent="-152400">
-              <a:spcAft>
-                <a:spcPts val="400"/>
-              </a:spcAft>
-              <a:buSzPct val="100000"/>
-              <a:buChar char="•"/>
-            </a:pPr>
-            <a:r>
-              <a:rPr lang="en-US" sz="1000" dirty="0">
-                <a:solidFill>
-                  <a:schemeClr val="tx1"/>
-                </a:solidFill>
-              </a:rPr>
-              <a:t>Lắp đặt tủ điện tổng, tủ tầng, tủ thiết bị</a:t>
-            </a:r>
-            <a:endParaRPr lang="en-US" sz="1000" dirty="0"/>
-          </a:p>
-          <a:p>
-            <a:pPr marL="152400" indent="-152400">
-              <a:spcAft>
-                <a:spcPts val="400"/>
-              </a:spcAft>
-              <a:buSzPct val="100000"/>
-              <a:buChar char="•"/>
-            </a:pPr>
-            <a:r>
-              <a:rPr lang="en-US" sz="1000" dirty="0">
-                <a:solidFill>
-                  <a:schemeClr val="tx1"/>
-                </a:solidFill>
-              </a:rPr>
-              <a:t>Lắp đèn, công tắc, ổ cắm và thiết bị điện</a:t>
-            </a:r>
-            <a:endParaRPr lang="en-US" sz="1000" dirty="0"/>
-          </a:p>
-          <a:p>
-            <a:pPr marL="152400" indent="-152400">
-              <a:spcAft>
-                <a:spcPts val="400"/>
-              </a:spcAft>
-              <a:buSzPct val="100000"/>
-              <a:buChar char="•"/>
-            </a:pPr>
-            <a:r>
-              <a:rPr lang="en-US" sz="1000" dirty="0">
-                <a:solidFill>
-                  <a:schemeClr val="tx1"/>
-                </a:solidFill>
-              </a:rPr>
-              <a:t>Cấp nguồn cho máy móc, thiết bị nhà xưởng</a:t>
-            </a:r>
-            <a:endParaRPr lang="en-US" sz="1000" dirty="0"/>
-          </a:p>
-        </p:txBody>
-      </p:sp>
-      <p:sp>
-        <p:nvSpPr>
-          <p:cNvPr id="14" name="Text 8"/>
-          <p:cNvSpPr txBox="1"/>
-          <p:nvPr/>
-        </p:nvSpPr>
-        <p:spPr>
-          <a:xfrm>
-            <a:off x="3872484" y="6537960"/>
-            <a:ext cx="3186684" cy="228600"/>
-          </a:xfrm>
-          <a:prstGeom prst="rect">
-            <a:avLst/>
-          </a:prstGeom>
-          <a:noFill/>
-          <a:ln/>
-        </p:spPr>
-        <p:txBody>
-          <a:bodyPr wrap="square" lIns="0" tIns="0" rIns="0" bIns="0" rtlCol="0" anchor="ctr"/>
-          <a:lstStyle/>
-          <a:p>
-            <a:pPr indent="0" marL="0">
-              <a:buNone/>
-            </a:pPr>
-            <a:r>
-              <a:rPr lang="en-US" sz="900" b="1" spc="200" kern="0" dirty="0">
-                <a:solidFill>
-                  <a:schemeClr val="accent1"/>
-                </a:solidFill>
-                <a:latin typeface="Arial" pitchFamily="34" charset="0"/>
-                <a:ea typeface="Arial" pitchFamily="34" charset="-122"/>
-                <a:cs typeface="Arial" pitchFamily="34" charset="-120"/>
-              </a:rPr>
-              <a:t>ĐIỂM KIỂM SOÁT</a:t>
-            </a:r>
-            <a:endParaRPr lang="en-US" sz="900" dirty="0"/>
-          </a:p>
-        </p:txBody>
-      </p:sp>
-      <p:sp>
-        <p:nvSpPr>
-          <p:cNvPr id="15" name="Shape 9"/>
+          <p:cNvPr id="13" name="Shape 7"/>
           <p:cNvSpPr/>
           <p:nvPr/>
         </p:nvSpPr>
         <p:spPr>
           <a:xfrm>
-            <a:off x="3872484" y="6812280"/>
-            <a:ext cx="3186684" cy="2880360"/>
+            <a:off x="502920" y="7452360"/>
+            <a:ext cx="3186684" cy="2240280"/>
           </a:xfrm>
           <a:prstGeom prst="roundRect">
             <a:avLst>
-              <a:gd name="adj" fmla="val 2540"/>
+              <a:gd name="adj" fmla="val 3265"/>
             </a:avLst>
           </a:prstGeom>
           <a:solidFill>
@@ -4644,14 +4489,210 @@
       </p:sp>
       <p:sp>
         <p:nvSpPr>
-          <p:cNvPr id="16" name="Text 10"/>
-          <p:cNvSpPr txBox="1"/>
-          <p:nvPr/>
-        </p:nvSpPr>
-        <p:spPr>
-          <a:xfrm>
-            <a:off x="4009644" y="6949440"/>
-            <a:ext cx="2912364" cy="2651760"/>
+          <p:cNvPr id="14" name="Text 8"/>
+          <p:cNvSpPr txBox="1"/>
+          <p:nvPr/>
+        </p:nvSpPr>
+        <p:spPr>
+          <a:xfrm>
+            <a:off x="640080" y="7589520"/>
+            <a:ext cx="2912364" cy="2011680"/>
+          </a:xfrm>
+          <a:prstGeom prst="rect">
+            <a:avLst/>
+          </a:prstGeom>
+          <a:noFill/>
+          <a:ln/>
+        </p:spPr>
+        <p:txBody>
+          <a:bodyPr wrap="square" lIns="0" tIns="0" rIns="0" bIns="0" rtlCol="0" anchor="t"/>
+          <a:lstStyle/>
+          <a:p>
+            <a:pPr marL="152400" indent="-152400">
+              <a:spcAft>
+                <a:spcPts val="400"/>
+              </a:spcAft>
+              <a:buSzPct val="100000"/>
+              <a:buChar char="•"/>
+            </a:pPr>
+            <a:r>
+              <a:rPr lang="en-US" sz="950" dirty="0">
+                <a:solidFill>
+                  <a:schemeClr val="tx1"/>
+                </a:solidFill>
+              </a:rPr>
+              <a:t>Đi ống luồn dây âm tường, âm sàn, nổi trần</a:t>
+            </a:r>
+            <a:endParaRPr lang="en-US" sz="950" dirty="0"/>
+          </a:p>
+          <a:p>
+            <a:pPr marL="152400" indent="-152400">
+              <a:spcAft>
+                <a:spcPts val="400"/>
+              </a:spcAft>
+              <a:buSzPct val="100000"/>
+              <a:buChar char="•"/>
+            </a:pPr>
+            <a:r>
+              <a:rPr lang="en-US" sz="950" dirty="0">
+                <a:solidFill>
+                  <a:schemeClr val="tx1"/>
+                </a:solidFill>
+              </a:rPr>
+              <a:t>Lắp đặt máng cáp, thang cáp, giá treo</a:t>
+            </a:r>
+            <a:endParaRPr lang="en-US" sz="950" dirty="0"/>
+          </a:p>
+          <a:p>
+            <a:pPr marL="152400" indent="-152400">
+              <a:spcAft>
+                <a:spcPts val="400"/>
+              </a:spcAft>
+              <a:buSzPct val="100000"/>
+              <a:buChar char="•"/>
+            </a:pPr>
+            <a:r>
+              <a:rPr lang="en-US" sz="950" dirty="0">
+                <a:solidFill>
+                  <a:schemeClr val="tx1"/>
+                </a:solidFill>
+              </a:rPr>
+              <a:t>Kéo rải cáp động lực, cáp chiếu sáng, ổ cắm</a:t>
+            </a:r>
+            <a:endParaRPr lang="en-US" sz="950" dirty="0"/>
+          </a:p>
+          <a:p>
+            <a:pPr marL="152400" indent="-152400">
+              <a:spcAft>
+                <a:spcPts val="400"/>
+              </a:spcAft>
+              <a:buSzPct val="100000"/>
+              <a:buChar char="•"/>
+            </a:pPr>
+            <a:r>
+              <a:rPr lang="en-US" sz="950" dirty="0">
+                <a:solidFill>
+                  <a:schemeClr val="tx1"/>
+                </a:solidFill>
+              </a:rPr>
+              <a:t>Lắp đặt tủ điện tổng, tủ tầng, tủ thiết bị</a:t>
+            </a:r>
+            <a:endParaRPr lang="en-US" sz="950" dirty="0"/>
+          </a:p>
+          <a:p>
+            <a:pPr marL="152400" indent="-152400">
+              <a:spcAft>
+                <a:spcPts val="400"/>
+              </a:spcAft>
+              <a:buSzPct val="100000"/>
+              <a:buChar char="•"/>
+            </a:pPr>
+            <a:r>
+              <a:rPr lang="en-US" sz="950" dirty="0">
+                <a:solidFill>
+                  <a:schemeClr val="tx1"/>
+                </a:solidFill>
+              </a:rPr>
+              <a:t>Lắp đèn, công tắc, ổ cắm và thiết bị điện</a:t>
+            </a:r>
+            <a:endParaRPr lang="en-US" sz="950" dirty="0"/>
+          </a:p>
+          <a:p>
+            <a:pPr marL="152400" indent="-152400">
+              <a:spcAft>
+                <a:spcPts val="400"/>
+              </a:spcAft>
+              <a:buSzPct val="100000"/>
+              <a:buChar char="•"/>
+            </a:pPr>
+            <a:r>
+              <a:rPr lang="en-US" sz="950" dirty="0">
+                <a:solidFill>
+                  <a:schemeClr val="tx1"/>
+                </a:solidFill>
+              </a:rPr>
+              <a:t>Cấp nguồn cho máy móc, thiết bị nhà xưởng</a:t>
+            </a:r>
+            <a:endParaRPr lang="en-US" sz="950" dirty="0"/>
+          </a:p>
+        </p:txBody>
+      </p:sp>
+      <p:sp>
+        <p:nvSpPr>
+          <p:cNvPr id="15" name="Text 9"/>
+          <p:cNvSpPr txBox="1"/>
+          <p:nvPr/>
+        </p:nvSpPr>
+        <p:spPr>
+          <a:xfrm>
+            <a:off x="3872484" y="7178040"/>
+            <a:ext cx="3186684" cy="228600"/>
+          </a:xfrm>
+          <a:prstGeom prst="rect">
+            <a:avLst/>
+          </a:prstGeom>
+          <a:noFill/>
+          <a:ln/>
+        </p:spPr>
+        <p:txBody>
+          <a:bodyPr wrap="square" lIns="0" tIns="0" rIns="0" bIns="0" rtlCol="0" anchor="ctr"/>
+          <a:lstStyle/>
+          <a:p>
+            <a:pPr indent="0" marL="0">
+              <a:buNone/>
+            </a:pPr>
+            <a:r>
+              <a:rPr lang="en-US" sz="900" b="1" spc="200" kern="0" dirty="0">
+                <a:solidFill>
+                  <a:schemeClr val="accent1"/>
+                </a:solidFill>
+                <a:latin typeface="Arial" pitchFamily="34" charset="0"/>
+                <a:ea typeface="Arial" pitchFamily="34" charset="-122"/>
+                <a:cs typeface="Arial" pitchFamily="34" charset="-120"/>
+              </a:rPr>
+              <a:t>ĐIỂM KIỂM SOÁT</a:t>
+            </a:r>
+            <a:endParaRPr lang="en-US" sz="900" dirty="0"/>
+          </a:p>
+        </p:txBody>
+      </p:sp>
+      <p:sp>
+        <p:nvSpPr>
+          <p:cNvPr id="16" name="Shape 10"/>
+          <p:cNvSpPr/>
+          <p:nvPr/>
+        </p:nvSpPr>
+        <p:spPr>
+          <a:xfrm>
+            <a:off x="3872484" y="7452360"/>
+            <a:ext cx="3186684" cy="2240280"/>
+          </a:xfrm>
+          <a:prstGeom prst="roundRect">
+            <a:avLst>
+              <a:gd name="adj" fmla="val 3265"/>
+            </a:avLst>
+          </a:prstGeom>
+          <a:solidFill>
+            <a:schemeClr val="bg2"/>
+          </a:solidFill>
+          <a:ln w="12700">
+            <a:solidFill>
+              <a:schemeClr val="bg2"/>
+            </a:solidFill>
+            <a:prstDash val="solid"/>
+          </a:ln>
+        </p:spPr>
+      </p:sp>
+      <p:sp>
+        <p:nvSpPr>
+          <p:cNvPr id="17" name="Text 11"/>
+          <p:cNvSpPr txBox="1"/>
+          <p:nvPr/>
+        </p:nvSpPr>
+        <p:spPr>
+          <a:xfrm>
+            <a:off x="4009644" y="7589520"/>
+            <a:ext cx="2912364" cy="2011680"/>
           </a:xfrm>
           <a:prstGeom prst="rect">
             <a:avLst/>
@@ -4982,7 +5023,7 @@
       </p:sp>
       <p:pic>
         <p:nvPicPr>
-          <p:cNvPr id="6" name="photo img15.jpg" descr="Tuyến cấp nước PPR, van khoá">    </p:cNvPr>
+          <p:cNvPr id="6" name="photo img77.jpg" descr="Tuyến ống thoát nước tầng hầm">    </p:cNvPr>
           <p:cNvPicPr>
             <a:picLocks noChangeAspect="1"/>
           </p:cNvPicPr>
@@ -4997,7 +5038,7 @@
         <p:spPr>
           <a:xfrm>
             <a:off x="502920" y="4846320"/>
-            <a:ext cx="2063496" cy="1737360"/>
+            <a:ext cx="3186684" cy="2377440"/>
           </a:xfrm>
           <a:prstGeom prst="rect">
             <a:avLst/>
@@ -5012,8 +5053,8 @@
         </p:nvSpPr>
         <p:spPr>
           <a:xfrm>
-            <a:off x="502920" y="6620256"/>
-            <a:ext cx="2063496" cy="201168"/>
+            <a:off x="502920" y="7260336"/>
+            <a:ext cx="3186684" cy="201168"/>
           </a:xfrm>
           <a:prstGeom prst="rect">
             <a:avLst/>
@@ -5036,7 +5077,7 @@
                   <a:schemeClr val="accent3"/>
                 </a:solidFill>
               </a:rPr>
-              <a:t>Tuyến cấp nước PPR, van khoá</a:t>
+              <a:t>Tuyến ống thoát nước tầng hầm</a:t>
             </a:r>
             <a:endParaRPr lang="en-US" sz="800" dirty="0"/>
           </a:p>
@@ -5044,7 +5085,7 @@
       </p:sp>
       <p:pic>
         <p:nvPicPr>
-          <p:cNvPr id="8" name="photo img13.jpg" descr="Đi ống cấp nước trên giàn giáo">    </p:cNvPr>
+          <p:cNvPr id="8" name="photo img37.jpg" descr="Tuyến ống, giá treo tầng hầm">    </p:cNvPr>
           <p:cNvPicPr>
             <a:picLocks noChangeAspect="1"/>
           </p:cNvPicPr>
@@ -5058,8 +5099,8 @@
         </p:blipFill>
         <p:spPr>
           <a:xfrm>
-            <a:off x="2749296" y="4846320"/>
-            <a:ext cx="2063496" cy="1737360"/>
+            <a:off x="3872484" y="4846320"/>
+            <a:ext cx="3186684" cy="2377440"/>
           </a:xfrm>
           <a:prstGeom prst="rect">
             <a:avLst/>
@@ -5074,8 +5115,8 @@
         </p:nvSpPr>
         <p:spPr>
           <a:xfrm>
-            <a:off x="2749296" y="6620256"/>
-            <a:ext cx="2063496" cy="201168"/>
+            <a:off x="3872484" y="7260336"/>
+            <a:ext cx="3186684" cy="201168"/>
           </a:xfrm>
           <a:prstGeom prst="rect">
             <a:avLst/>
@@ -5098,83 +5139,21 @@
                   <a:schemeClr val="accent3"/>
                 </a:solidFill>
               </a:rPr>
-              <a:t>Đi ống cấp nước trên giàn giáo</a:t>
+              <a:t>Tuyến ống, giá treo tầng hầm</a:t>
             </a:r>
             <a:endParaRPr lang="en-US" sz="800" dirty="0"/>
           </a:p>
         </p:txBody>
       </p:sp>
-      <p:pic>
-        <p:nvPicPr>
-          <p:cNvPr id="10" name="photo img37.jpg" descr="Tuyến ống tầng hầm">    </p:cNvPr>
-          <p:cNvPicPr>
-            <a:picLocks noChangeAspect="1"/>
-          </p:cNvPicPr>
-          <p:nvPr/>
-        </p:nvPicPr>
-        <p:blipFill>
-          <a:blip r:embed="rId4"/>
-          <a:stretch>
-            <a:fillRect/>
-          </a:stretch>
-        </p:blipFill>
-        <p:spPr>
-          <a:xfrm>
-            <a:off x="4995672" y="4846320"/>
-            <a:ext cx="2063496" cy="1737360"/>
-          </a:xfrm>
-          <a:prstGeom prst="rect">
-            <a:avLst/>
-          </a:prstGeom>
-        </p:spPr>
-      </p:pic>
-      <p:sp>
-        <p:nvSpPr>
-          <p:cNvPr id="11" name="Text 5"/>
-          <p:cNvSpPr txBox="1"/>
-          <p:nvPr/>
-        </p:nvSpPr>
-        <p:spPr>
-          <a:xfrm>
-            <a:off x="4995672" y="6620256"/>
-            <a:ext cx="2063496" cy="201168"/>
-          </a:xfrm>
-          <a:prstGeom prst="rect">
-            <a:avLst/>
-          </a:prstGeom>
-          <a:noFill/>
-          <a:ln/>
-        </p:spPr>
-        <p:txBody>
-          <a:bodyPr wrap="square" lIns="0" tIns="0" rIns="0" bIns="0" rtlCol="0" anchor="ctr">
-            <a:normAutofit/>
-          </a:bodyPr>
-          <a:lstStyle/>
-          <a:p>
-            <a:pPr indent="0" marL="0">
-              <a:buNone/>
-            </a:pPr>
-            <a:r>
-              <a:rPr lang="en-US" sz="800" i="1" dirty="0">
-                <a:solidFill>
-                  <a:schemeClr val="accent3"/>
-                </a:solidFill>
-              </a:rPr>
-              <a:t>Tuyến ống tầng hầm</a:t>
-            </a:r>
-            <a:endParaRPr lang="en-US" sz="800" dirty="0"/>
-          </a:p>
-        </p:txBody>
-      </p:sp>
-      <p:sp>
-        <p:nvSpPr>
-          <p:cNvPr id="12" name="Shape 6"/>
+      <p:sp>
+        <p:nvSpPr>
+          <p:cNvPr id="10" name="Shape 5"/>
           <p:cNvSpPr/>
           <p:nvPr/>
         </p:nvSpPr>
         <p:spPr>
           <a:xfrm>
-            <a:off x="502920" y="6995160"/>
+            <a:off x="502920" y="7635240"/>
             <a:ext cx="3186684" cy="960120"/>
           </a:xfrm>
           <a:prstGeom prst="roundRect">
@@ -5195,13 +5174,13 @@
       </p:sp>
       <p:sp>
         <p:nvSpPr>
-          <p:cNvPr id="13" name="Shape 7"/>
+          <p:cNvPr id="11" name="Shape 6"/>
           <p:cNvSpPr/>
           <p:nvPr/>
         </p:nvSpPr>
         <p:spPr>
           <a:xfrm>
-            <a:off x="640080" y="7132320"/>
+            <a:off x="640080" y="7772400"/>
             <a:ext cx="365760" cy="365760"/>
           </a:xfrm>
           <a:prstGeom prst="ellipse">
@@ -5220,13 +5199,13 @@
       </p:sp>
       <p:sp>
         <p:nvSpPr>
-          <p:cNvPr id="14" name="Text 8"/>
-          <p:cNvSpPr txBox="1"/>
-          <p:nvPr/>
-        </p:nvSpPr>
-        <p:spPr>
-          <a:xfrm>
-            <a:off x="640080" y="7132320"/>
+          <p:cNvPr id="12" name="Text 7"/>
+          <p:cNvSpPr txBox="1"/>
+          <p:nvPr/>
+        </p:nvSpPr>
+        <p:spPr>
+          <a:xfrm>
+            <a:off x="640080" y="7772400"/>
             <a:ext cx="365760" cy="365760"/>
           </a:xfrm>
           <a:prstGeom prst="rect">
@@ -5259,13 +5238,13 @@
       </p:sp>
       <p:sp>
         <p:nvSpPr>
-          <p:cNvPr id="15" name="Text 9"/>
-          <p:cNvSpPr txBox="1"/>
-          <p:nvPr/>
-        </p:nvSpPr>
-        <p:spPr>
-          <a:xfrm>
-            <a:off x="1097280" y="7114032"/>
+          <p:cNvPr id="13" name="Text 8"/>
+          <p:cNvSpPr txBox="1"/>
+          <p:nvPr/>
+        </p:nvSpPr>
+        <p:spPr>
+          <a:xfrm>
+            <a:off x="1097280" y="7754112"/>
             <a:ext cx="2455164" cy="402336"/>
           </a:xfrm>
           <a:prstGeom prst="rect">
@@ -5298,13 +5277,13 @@
       </p:sp>
       <p:sp>
         <p:nvSpPr>
-          <p:cNvPr id="16" name="Text 10"/>
-          <p:cNvSpPr txBox="1"/>
-          <p:nvPr/>
-        </p:nvSpPr>
-        <p:spPr>
-          <a:xfrm>
-            <a:off x="1097280" y="7543800"/>
+          <p:cNvPr id="14" name="Text 9"/>
+          <p:cNvSpPr txBox="1"/>
+          <p:nvPr/>
+        </p:nvSpPr>
+        <p:spPr>
+          <a:xfrm>
+            <a:off x="1097280" y="8183880"/>
             <a:ext cx="2455164" cy="320040"/>
           </a:xfrm>
           <a:prstGeom prst="rect">
@@ -5337,13 +5316,13 @@
       </p:sp>
       <p:sp>
         <p:nvSpPr>
-          <p:cNvPr id="17" name="Shape 11"/>
+          <p:cNvPr id="15" name="Shape 10"/>
           <p:cNvSpPr/>
           <p:nvPr/>
         </p:nvSpPr>
         <p:spPr>
           <a:xfrm>
-            <a:off x="3872484" y="6995160"/>
+            <a:off x="3872484" y="7635240"/>
             <a:ext cx="3186684" cy="960120"/>
           </a:xfrm>
           <a:prstGeom prst="roundRect">
@@ -5364,13 +5343,13 @@
       </p:sp>
       <p:sp>
         <p:nvSpPr>
-          <p:cNvPr id="18" name="Shape 12"/>
+          <p:cNvPr id="16" name="Shape 11"/>
           <p:cNvSpPr/>
           <p:nvPr/>
         </p:nvSpPr>
         <p:spPr>
           <a:xfrm>
-            <a:off x="4009644" y="7132320"/>
+            <a:off x="4009644" y="7772400"/>
             <a:ext cx="365760" cy="365760"/>
           </a:xfrm>
           <a:prstGeom prst="ellipse">
@@ -5389,13 +5368,13 @@
       </p:sp>
       <p:sp>
         <p:nvSpPr>
-          <p:cNvPr id="19" name="Text 13"/>
-          <p:cNvSpPr txBox="1"/>
-          <p:nvPr/>
-        </p:nvSpPr>
-        <p:spPr>
-          <a:xfrm>
-            <a:off x="4009644" y="7132320"/>
+          <p:cNvPr id="17" name="Text 12"/>
+          <p:cNvSpPr txBox="1"/>
+          <p:nvPr/>
+        </p:nvSpPr>
+        <p:spPr>
+          <a:xfrm>
+            <a:off x="4009644" y="7772400"/>
             <a:ext cx="365760" cy="365760"/>
           </a:xfrm>
           <a:prstGeom prst="rect">
@@ -5428,13 +5407,13 @@
       </p:sp>
       <p:sp>
         <p:nvSpPr>
-          <p:cNvPr id="20" name="Text 14"/>
-          <p:cNvSpPr txBox="1"/>
-          <p:nvPr/>
-        </p:nvSpPr>
-        <p:spPr>
-          <a:xfrm>
-            <a:off x="4466844" y="7114032"/>
+          <p:cNvPr id="18" name="Text 13"/>
+          <p:cNvSpPr txBox="1"/>
+          <p:nvPr/>
+        </p:nvSpPr>
+        <p:spPr>
+          <a:xfrm>
+            <a:off x="4466844" y="7754112"/>
             <a:ext cx="2455164" cy="402336"/>
           </a:xfrm>
           <a:prstGeom prst="rect">
@@ -5467,13 +5446,13 @@
       </p:sp>
       <p:sp>
         <p:nvSpPr>
-          <p:cNvPr id="21" name="Text 15"/>
-          <p:cNvSpPr txBox="1"/>
-          <p:nvPr/>
-        </p:nvSpPr>
-        <p:spPr>
-          <a:xfrm>
-            <a:off x="4466844" y="7543800"/>
+          <p:cNvPr id="19" name="Text 14"/>
+          <p:cNvSpPr txBox="1"/>
+          <p:nvPr/>
+        </p:nvSpPr>
+        <p:spPr>
+          <a:xfrm>
+            <a:off x="4466844" y="8183880"/>
             <a:ext cx="2455164" cy="320040"/>
           </a:xfrm>
           <a:prstGeom prst="rect">
@@ -5506,13 +5485,13 @@
       </p:sp>
       <p:sp>
         <p:nvSpPr>
-          <p:cNvPr id="22" name="Shape 16"/>
+          <p:cNvPr id="20" name="Shape 15"/>
           <p:cNvSpPr/>
           <p:nvPr/>
         </p:nvSpPr>
         <p:spPr>
           <a:xfrm>
-            <a:off x="502920" y="8092440"/>
+            <a:off x="502920" y="8732520"/>
             <a:ext cx="3186684" cy="960120"/>
           </a:xfrm>
           <a:prstGeom prst="roundRect">
@@ -5533,13 +5512,13 @@
       </p:sp>
       <p:sp>
         <p:nvSpPr>
-          <p:cNvPr id="23" name="Shape 17"/>
+          <p:cNvPr id="21" name="Shape 16"/>
           <p:cNvSpPr/>
           <p:nvPr/>
         </p:nvSpPr>
         <p:spPr>
           <a:xfrm>
-            <a:off x="640080" y="8229600"/>
+            <a:off x="640080" y="8869680"/>
             <a:ext cx="365760" cy="365760"/>
           </a:xfrm>
           <a:prstGeom prst="ellipse">
@@ -5558,13 +5537,13 @@
       </p:sp>
       <p:sp>
         <p:nvSpPr>
-          <p:cNvPr id="24" name="Text 18"/>
-          <p:cNvSpPr txBox="1"/>
-          <p:nvPr/>
-        </p:nvSpPr>
-        <p:spPr>
-          <a:xfrm>
-            <a:off x="640080" y="8229600"/>
+          <p:cNvPr id="22" name="Text 17"/>
+          <p:cNvSpPr txBox="1"/>
+          <p:nvPr/>
+        </p:nvSpPr>
+        <p:spPr>
+          <a:xfrm>
+            <a:off x="640080" y="8869680"/>
             <a:ext cx="365760" cy="365760"/>
           </a:xfrm>
           <a:prstGeom prst="rect">
@@ -5597,13 +5576,13 @@
       </p:sp>
       <p:sp>
         <p:nvSpPr>
-          <p:cNvPr id="25" name="Text 19"/>
-          <p:cNvSpPr txBox="1"/>
-          <p:nvPr/>
-        </p:nvSpPr>
-        <p:spPr>
-          <a:xfrm>
-            <a:off x="1097280" y="8211312"/>
+          <p:cNvPr id="23" name="Text 18"/>
+          <p:cNvSpPr txBox="1"/>
+          <p:nvPr/>
+        </p:nvSpPr>
+        <p:spPr>
+          <a:xfrm>
+            <a:off x="1097280" y="8851392"/>
             <a:ext cx="2455164" cy="402336"/>
           </a:xfrm>
           <a:prstGeom prst="rect">
@@ -5636,13 +5615,13 @@
       </p:sp>
       <p:sp>
         <p:nvSpPr>
-          <p:cNvPr id="26" name="Text 20"/>
-          <p:cNvSpPr txBox="1"/>
-          <p:nvPr/>
-        </p:nvSpPr>
-        <p:spPr>
-          <a:xfrm>
-            <a:off x="1097280" y="8641080"/>
+          <p:cNvPr id="24" name="Text 19"/>
+          <p:cNvSpPr txBox="1"/>
+          <p:nvPr/>
+        </p:nvSpPr>
+        <p:spPr>
+          <a:xfrm>
+            <a:off x="1097280" y="9281160"/>
             <a:ext cx="2455164" cy="320040"/>
           </a:xfrm>
           <a:prstGeom prst="rect">
@@ -5675,13 +5654,13 @@
       </p:sp>
       <p:sp>
         <p:nvSpPr>
-          <p:cNvPr id="27" name="Shape 21"/>
+          <p:cNvPr id="25" name="Shape 20"/>
           <p:cNvSpPr/>
           <p:nvPr/>
         </p:nvSpPr>
         <p:spPr>
           <a:xfrm>
-            <a:off x="3872484" y="8092440"/>
+            <a:off x="3872484" y="8732520"/>
             <a:ext cx="3186684" cy="960120"/>
           </a:xfrm>
           <a:prstGeom prst="roundRect">
@@ -5702,13 +5681,13 @@
       </p:sp>
       <p:sp>
         <p:nvSpPr>
-          <p:cNvPr id="28" name="Shape 22"/>
+          <p:cNvPr id="26" name="Shape 21"/>
           <p:cNvSpPr/>
           <p:nvPr/>
         </p:nvSpPr>
         <p:spPr>
           <a:xfrm>
-            <a:off x="4009644" y="8229600"/>
+            <a:off x="4009644" y="8869680"/>
             <a:ext cx="365760" cy="365760"/>
           </a:xfrm>
           <a:prstGeom prst="ellipse">
@@ -5727,13 +5706,13 @@
       </p:sp>
       <p:sp>
         <p:nvSpPr>
-          <p:cNvPr id="29" name="Text 23"/>
-          <p:cNvSpPr txBox="1"/>
-          <p:nvPr/>
-        </p:nvSpPr>
-        <p:spPr>
-          <a:xfrm>
-            <a:off x="4009644" y="8229600"/>
+          <p:cNvPr id="27" name="Text 22"/>
+          <p:cNvSpPr txBox="1"/>
+          <p:nvPr/>
+        </p:nvSpPr>
+        <p:spPr>
+          <a:xfrm>
+            <a:off x="4009644" y="8869680"/>
             <a:ext cx="365760" cy="365760"/>
           </a:xfrm>
           <a:prstGeom prst="rect">
@@ -5766,13 +5745,13 @@
       </p:sp>
       <p:sp>
         <p:nvSpPr>
-          <p:cNvPr id="30" name="Text 24"/>
-          <p:cNvSpPr txBox="1"/>
-          <p:nvPr/>
-        </p:nvSpPr>
-        <p:spPr>
-          <a:xfrm>
-            <a:off x="4466844" y="8211312"/>
+          <p:cNvPr id="28" name="Text 23"/>
+          <p:cNvSpPr txBox="1"/>
+          <p:nvPr/>
+        </p:nvSpPr>
+        <p:spPr>
+          <a:xfrm>
+            <a:off x="4466844" y="8851392"/>
             <a:ext cx="2455164" cy="402336"/>
           </a:xfrm>
           <a:prstGeom prst="rect">
@@ -5805,13 +5784,13 @@
       </p:sp>
       <p:sp>
         <p:nvSpPr>
-          <p:cNvPr id="31" name="Text 25"/>
-          <p:cNvSpPr txBox="1"/>
-          <p:nvPr/>
-        </p:nvSpPr>
-        <p:spPr>
-          <a:xfrm>
-            <a:off x="4466844" y="8641080"/>
+          <p:cNvPr id="29" name="Text 24"/>
+          <p:cNvSpPr txBox="1"/>
+          <p:nvPr/>
+        </p:nvSpPr>
+        <p:spPr>
+          <a:xfrm>
+            <a:off x="4466844" y="9281160"/>
             <a:ext cx="2455164" cy="320040"/>
           </a:xfrm>
           <a:prstGeom prst="rect">
@@ -6404,7 +6383,7 @@
       </p:sp>
       <p:pic>
         <p:nvPicPr>
-          <p:cNvPr id="10" name="photo img24.jpg" descr="Ống mềm nối từ máy CNC lên tuyến chính">    </p:cNvPr>
+          <p:cNvPr id="10" name="photo img40.jpg" descr="Thi công tuyến ống trên xe nâng người">    </p:cNvPr>
           <p:cNvPicPr>
             <a:picLocks noChangeAspect="1"/>
           </p:cNvPicPr>
@@ -6458,7 +6437,7 @@
                   <a:schemeClr val="accent3"/>
                 </a:solidFill>
               </a:rPr>
-              <a:t>Ống mềm nối từ máy CNC lên tuyến chính</a:t>
+              <a:t>Thi công tuyến ống trên xe nâng người</a:t>
             </a:r>
             <a:endParaRPr lang="en-US" sz="800" dirty="0"/>
           </a:p>
@@ -7742,7 +7721,7 @@
         <p:spPr>
           <a:xfrm>
             <a:off x="502920" y="5120640"/>
-            <a:ext cx="1536192" cy="2377440"/>
+            <a:ext cx="2063496" cy="2377440"/>
           </a:xfrm>
           <a:prstGeom prst="rect">
             <a:avLst/>
@@ -7758,7 +7737,7 @@
         <p:spPr>
           <a:xfrm>
             <a:off x="502920" y="7534656"/>
-            <a:ext cx="1536192" cy="201168"/>
+            <a:ext cx="2063496" cy="201168"/>
           </a:xfrm>
           <a:prstGeom prst="rect">
             <a:avLst/>
@@ -7803,8 +7782,8 @@
         </p:blipFill>
         <p:spPr>
           <a:xfrm>
-            <a:off x="2176272" y="5120640"/>
-            <a:ext cx="1536192" cy="2377440"/>
+            <a:off x="2749296" y="5120640"/>
+            <a:ext cx="2063496" cy="2377440"/>
           </a:xfrm>
           <a:prstGeom prst="rect">
             <a:avLst/>
@@ -7819,8 +7798,8 @@
         </p:nvSpPr>
         <p:spPr>
           <a:xfrm>
-            <a:off x="2176272" y="7534656"/>
-            <a:ext cx="1536192" cy="201168"/>
+            <a:off x="2749296" y="7534656"/>
+            <a:ext cx="2063496" cy="201168"/>
           </a:xfrm>
           <a:prstGeom prst="rect">
             <a:avLst/>
@@ -7865,8 +7844,8 @@
         </p:blipFill>
         <p:spPr>
           <a:xfrm>
-            <a:off x="3849624" y="5120640"/>
-            <a:ext cx="1536192" cy="2377440"/>
+            <a:off x="4995672" y="5120640"/>
+            <a:ext cx="2063496" cy="2377440"/>
           </a:xfrm>
           <a:prstGeom prst="rect">
             <a:avLst/>
@@ -7881,8 +7860,8 @@
         </p:nvSpPr>
         <p:spPr>
           <a:xfrm>
-            <a:off x="3849624" y="7534656"/>
-            <a:ext cx="1536192" cy="201168"/>
+            <a:off x="4995672" y="7534656"/>
+            <a:ext cx="2063496" cy="201168"/>
           </a:xfrm>
           <a:prstGeom prst="rect">
             <a:avLst/>
@@ -7911,71 +7890,9 @@
           </a:p>
         </p:txBody>
       </p:sp>
-      <p:pic>
-        <p:nvPicPr>
-          <p:cNvPr id="12" name="photo img33.jpg" descr="Bơm keo làm kín mối nối">    </p:cNvPr>
-          <p:cNvPicPr>
-            <a:picLocks noChangeAspect="1"/>
-          </p:cNvPicPr>
-          <p:nvPr/>
-        </p:nvPicPr>
-        <p:blipFill>
-          <a:blip r:embed="rId5"/>
-          <a:stretch>
-            <a:fillRect/>
-          </a:stretch>
-        </p:blipFill>
-        <p:spPr>
-          <a:xfrm>
-            <a:off x="5522976" y="5120640"/>
-            <a:ext cx="1536192" cy="2377440"/>
-          </a:xfrm>
-          <a:prstGeom prst="rect">
-            <a:avLst/>
-          </a:prstGeom>
-        </p:spPr>
-      </p:pic>
-      <p:sp>
-        <p:nvSpPr>
-          <p:cNvPr id="13" name="Text 6"/>
-          <p:cNvSpPr txBox="1"/>
-          <p:nvPr/>
-        </p:nvSpPr>
-        <p:spPr>
-          <a:xfrm>
-            <a:off x="5522976" y="7534656"/>
-            <a:ext cx="1536192" cy="201168"/>
-          </a:xfrm>
-          <a:prstGeom prst="rect">
-            <a:avLst/>
-          </a:prstGeom>
-          <a:noFill/>
-          <a:ln/>
-        </p:spPr>
-        <p:txBody>
-          <a:bodyPr wrap="square" lIns="0" tIns="0" rIns="0" bIns="0" rtlCol="0" anchor="ctr">
-            <a:normAutofit/>
-          </a:bodyPr>
-          <a:lstStyle/>
-          <a:p>
-            <a:pPr indent="0" marL="0">
-              <a:buNone/>
-            </a:pPr>
-            <a:r>
-              <a:rPr lang="en-US" sz="800" i="1" dirty="0">
-                <a:solidFill>
-                  <a:schemeClr val="accent3"/>
-                </a:solidFill>
-              </a:rPr>
-              <a:t>Bơm keo làm kín mối nối</a:t>
-            </a:r>
-            <a:endParaRPr lang="en-US" sz="800" dirty="0"/>
-          </a:p>
-        </p:txBody>
-      </p:sp>
-      <p:sp>
-        <p:nvSpPr>
-          <p:cNvPr id="14" name="Text 7"/>
+      <p:sp>
+        <p:nvSpPr>
+          <p:cNvPr id="12" name="Text 6"/>
           <p:cNvSpPr txBox="1"/>
           <p:nvPr/>
         </p:nvSpPr>
@@ -8014,7 +7931,7 @@
       </p:sp>
       <p:sp>
         <p:nvSpPr>
-          <p:cNvPr id="15" name="Shape 8"/>
+          <p:cNvPr id="13" name="Shape 7"/>
           <p:cNvSpPr/>
           <p:nvPr/>
         </p:nvSpPr>
@@ -8041,7 +7958,7 @@
       </p:sp>
       <p:sp>
         <p:nvSpPr>
-          <p:cNvPr id="16" name="Shape 9"/>
+          <p:cNvPr id="14" name="Shape 8"/>
           <p:cNvSpPr/>
           <p:nvPr/>
         </p:nvSpPr>
@@ -8066,7 +7983,7 @@
       </p:sp>
       <p:sp>
         <p:nvSpPr>
-          <p:cNvPr id="17" name="Text 10"/>
+          <p:cNvPr id="15" name="Text 9"/>
           <p:cNvSpPr txBox="1"/>
           <p:nvPr/>
         </p:nvSpPr>
@@ -8105,7 +8022,7 @@
       </p:sp>
       <p:sp>
         <p:nvSpPr>
-          <p:cNvPr id="18" name="Text 11"/>
+          <p:cNvPr id="16" name="Text 10"/>
           <p:cNvSpPr txBox="1"/>
           <p:nvPr/>
         </p:nvSpPr>
@@ -8144,7 +8061,7 @@
       </p:sp>
       <p:sp>
         <p:nvSpPr>
-          <p:cNvPr id="19" name="Text 12"/>
+          <p:cNvPr id="17" name="Text 11"/>
           <p:cNvSpPr txBox="1"/>
           <p:nvPr/>
         </p:nvSpPr>
@@ -8183,7 +8100,7 @@
       </p:sp>
       <p:sp>
         <p:nvSpPr>
-          <p:cNvPr id="20" name="Shape 13"/>
+          <p:cNvPr id="18" name="Shape 12"/>
           <p:cNvSpPr/>
           <p:nvPr/>
         </p:nvSpPr>
@@ -8210,7 +8127,7 @@
       </p:sp>
       <p:sp>
         <p:nvSpPr>
-          <p:cNvPr id="21" name="Shape 14"/>
+          <p:cNvPr id="19" name="Shape 13"/>
           <p:cNvSpPr/>
           <p:nvPr/>
         </p:nvSpPr>
@@ -8235,7 +8152,7 @@
       </p:sp>
       <p:sp>
         <p:nvSpPr>
-          <p:cNvPr id="22" name="Text 15"/>
+          <p:cNvPr id="20" name="Text 14"/>
           <p:cNvSpPr txBox="1"/>
           <p:nvPr/>
         </p:nvSpPr>
@@ -8274,7 +8191,7 @@
       </p:sp>
       <p:sp>
         <p:nvSpPr>
-          <p:cNvPr id="23" name="Text 16"/>
+          <p:cNvPr id="21" name="Text 15"/>
           <p:cNvSpPr txBox="1"/>
           <p:nvPr/>
         </p:nvSpPr>
@@ -8313,7 +8230,7 @@
       </p:sp>
       <p:sp>
         <p:nvSpPr>
-          <p:cNvPr id="24" name="Text 17"/>
+          <p:cNvPr id="22" name="Text 16"/>
           <p:cNvSpPr txBox="1"/>
           <p:nvPr/>
         </p:nvSpPr>
@@ -8352,7 +8269,7 @@
       </p:sp>
       <p:sp>
         <p:nvSpPr>
-          <p:cNvPr id="25" name="Shape 18"/>
+          <p:cNvPr id="23" name="Shape 17"/>
           <p:cNvSpPr/>
           <p:nvPr/>
         </p:nvSpPr>
@@ -8379,7 +8296,7 @@
       </p:sp>
       <p:sp>
         <p:nvSpPr>
-          <p:cNvPr id="26" name="Shape 19"/>
+          <p:cNvPr id="24" name="Shape 18"/>
           <p:cNvSpPr/>
           <p:nvPr/>
         </p:nvSpPr>
@@ -8404,7 +8321,7 @@
       </p:sp>
       <p:sp>
         <p:nvSpPr>
-          <p:cNvPr id="27" name="Text 20"/>
+          <p:cNvPr id="25" name="Text 19"/>
           <p:cNvSpPr txBox="1"/>
           <p:nvPr/>
         </p:nvSpPr>
@@ -8443,7 +8360,7 @@
       </p:sp>
       <p:sp>
         <p:nvSpPr>
-          <p:cNvPr id="28" name="Text 21"/>
+          <p:cNvPr id="26" name="Text 20"/>
           <p:cNvSpPr txBox="1"/>
           <p:nvPr/>
         </p:nvSpPr>
@@ -8482,7 +8399,7 @@
       </p:sp>
       <p:sp>
         <p:nvSpPr>
-          <p:cNvPr id="29" name="Text 22"/>
+          <p:cNvPr id="27" name="Text 21"/>
           <p:cNvSpPr txBox="1"/>
           <p:nvPr/>
         </p:nvSpPr>
@@ -8682,7 +8599,7 @@
         <p:spPr>
           <a:xfrm>
             <a:off x="502920" y="1463040"/>
-            <a:ext cx="6556248" cy="3657600"/>
+            <a:ext cx="6556248" cy="5394960"/>
           </a:xfrm>
           <a:prstGeom prst="rect">
             <a:avLst/>
@@ -8697,7 +8614,7 @@
         </p:nvSpPr>
         <p:spPr>
           <a:xfrm>
-            <a:off x="502920" y="5157216"/>
+            <a:off x="502920" y="6894576"/>
             <a:ext cx="6556248" cy="201168"/>
           </a:xfrm>
           <a:prstGeom prst="rect">
@@ -8735,7 +8652,7 @@
         </p:nvSpPr>
         <p:spPr>
           <a:xfrm>
-            <a:off x="502920" y="5486400"/>
+            <a:off x="502920" y="7269480"/>
             <a:ext cx="3140964" cy="228600"/>
           </a:xfrm>
           <a:prstGeom prst="rect">
@@ -8768,187 +8685,18 @@
       </p:sp>
       <p:sp>
         <p:nvSpPr>
-          <p:cNvPr id="7" name="Text 4"/>
-          <p:cNvSpPr txBox="1"/>
-          <p:nvPr/>
-        </p:nvSpPr>
-        <p:spPr>
-          <a:xfrm>
-            <a:off x="502920" y="5760720"/>
-            <a:ext cx="3140964" cy="2651760"/>
-          </a:xfrm>
-          <a:prstGeom prst="rect">
-            <a:avLst/>
-          </a:prstGeom>
-          <a:noFill/>
-          <a:ln/>
-        </p:spPr>
-        <p:txBody>
-          <a:bodyPr wrap="square" lIns="0" tIns="0" rIns="0" bIns="0" rtlCol="0" anchor="t"/>
-          <a:lstStyle/>
-          <a:p>
-            <a:pPr marL="152400" indent="-152400">
-              <a:spcAft>
-                <a:spcPts val="400"/>
-              </a:spcAft>
-              <a:buSzPct val="100000"/>
-              <a:buChar char="•"/>
-            </a:pPr>
-            <a:r>
-              <a:rPr lang="en-US" sz="1000" dirty="0">
-                <a:solidFill>
-                  <a:schemeClr val="tx1"/>
-                </a:solidFill>
-              </a:rPr>
-              <a:t>Lắp đặt bơm ly tâm, bơm định lượng hóa chất</a:t>
-            </a:r>
-            <a:endParaRPr lang="en-US" sz="1000" dirty="0"/>
-          </a:p>
-          <a:p>
-            <a:pPr marL="152400" indent="-152400">
-              <a:spcAft>
-                <a:spcPts val="400"/>
-              </a:spcAft>
-              <a:buSzPct val="100000"/>
-              <a:buChar char="•"/>
-            </a:pPr>
-            <a:r>
-              <a:rPr lang="en-US" sz="1000" dirty="0">
-                <a:solidFill>
-                  <a:schemeClr val="tx1"/>
-                </a:solidFill>
-              </a:rPr>
-              <a:t>Lắp bồn chứa, cột lọc, lọc túi, cụm màng lọc</a:t>
-            </a:r>
-            <a:endParaRPr lang="en-US" sz="1000" dirty="0"/>
-          </a:p>
-          <a:p>
-            <a:pPr marL="152400" indent="-152400">
-              <a:spcAft>
-                <a:spcPts val="400"/>
-              </a:spcAft>
-              <a:buSzPct val="100000"/>
-              <a:buChar char="•"/>
-            </a:pPr>
-            <a:r>
-              <a:rPr lang="en-US" sz="1000" dirty="0">
-                <a:solidFill>
-                  <a:schemeClr val="tx1"/>
-                </a:solidFill>
-              </a:rPr>
-              <a:t>Đường ống uPVC / PVC công nghiệp, mặt bích</a:t>
-            </a:r>
-            <a:endParaRPr lang="en-US" sz="1000" dirty="0"/>
-          </a:p>
-          <a:p>
-            <a:pPr marL="152400" indent="-152400">
-              <a:spcAft>
-                <a:spcPts val="400"/>
-              </a:spcAft>
-              <a:buSzPct val="100000"/>
-              <a:buChar char="•"/>
-            </a:pPr>
-            <a:r>
-              <a:rPr lang="en-US" sz="1000" dirty="0">
-                <a:solidFill>
-                  <a:schemeClr val="tx1"/>
-                </a:solidFill>
-              </a:rPr>
-              <a:t>Van bi, van một chiều, đồng hồ áp, lưu lượng kế</a:t>
-            </a:r>
-            <a:endParaRPr lang="en-US" sz="1000" dirty="0"/>
-          </a:p>
-          <a:p>
-            <a:pPr marL="152400" indent="-152400">
-              <a:spcAft>
-                <a:spcPts val="400"/>
-              </a:spcAft>
-              <a:buSzPct val="100000"/>
-              <a:buChar char="•"/>
-            </a:pPr>
-            <a:r>
-              <a:rPr lang="en-US" sz="1000" dirty="0">
-                <a:solidFill>
-                  <a:schemeClr val="tx1"/>
-                </a:solidFill>
-              </a:rPr>
-              <a:t>Khung đỡ ống, sàn thao tác, giá đỡ thiết bị</a:t>
-            </a:r>
-            <a:endParaRPr lang="en-US" sz="1000" dirty="0"/>
-          </a:p>
-          <a:p>
-            <a:pPr marL="152400" indent="-152400">
-              <a:spcAft>
-                <a:spcPts val="400"/>
-              </a:spcAft>
-              <a:buSzPct val="100000"/>
-              <a:buChar char="•"/>
-            </a:pPr>
-            <a:r>
-              <a:rPr lang="en-US" sz="1000" dirty="0">
-                <a:solidFill>
-                  <a:schemeClr val="tx1"/>
-                </a:solidFill>
-              </a:rPr>
-              <a:t>Đấu nối tủ điện điều khiển bơm</a:t>
-            </a:r>
-            <a:endParaRPr lang="en-US" sz="1000" dirty="0"/>
-          </a:p>
-        </p:txBody>
-      </p:sp>
-      <p:sp>
-        <p:nvSpPr>
-          <p:cNvPr id="8" name="Text 5"/>
-          <p:cNvSpPr txBox="1"/>
-          <p:nvPr/>
-        </p:nvSpPr>
-        <p:spPr>
-          <a:xfrm>
-            <a:off x="3918204" y="5486400"/>
-            <a:ext cx="3140964" cy="228600"/>
-          </a:xfrm>
-          <a:prstGeom prst="rect">
-            <a:avLst/>
-          </a:prstGeom>
-          <a:noFill/>
-          <a:ln/>
-        </p:spPr>
-        <p:txBody>
-          <a:bodyPr wrap="square" lIns="0" tIns="0" rIns="0" bIns="0" rtlCol="0" anchor="ctr"/>
-          <a:lstStyle/>
-          <a:p>
-            <a:pPr indent="0" marL="0">
-              <a:buNone/>
-            </a:pPr>
-            <a:r>
-              <a:rPr lang="en-US" sz="900" b="1" spc="200" kern="0" dirty="0">
-                <a:solidFill>
-                  <a:schemeClr val="accent1"/>
-                </a:solidFill>
-                <a:latin typeface="Arial" pitchFamily="34" charset="0"/>
-                <a:ea typeface="Arial" pitchFamily="34" charset="-122"/>
-                <a:cs typeface="Arial" pitchFamily="34" charset="-120"/>
-              </a:rPr>
-              <a:t>CHẠY THỬ &amp; BÀN GIAO</a:t>
-            </a:r>
-            <a:endParaRPr lang="en-US" sz="900" dirty="0"/>
-          </a:p>
-        </p:txBody>
-      </p:sp>
-      <p:sp>
-        <p:nvSpPr>
-          <p:cNvPr id="9" name="Shape 6"/>
+          <p:cNvPr id="7" name="Shape 4"/>
           <p:cNvSpPr/>
           <p:nvPr/>
         </p:nvSpPr>
         <p:spPr>
           <a:xfrm>
-            <a:off x="3918204" y="5760720"/>
-            <a:ext cx="3140964" cy="2606040"/>
+            <a:off x="502920" y="7543800"/>
+            <a:ext cx="3140964" cy="1874520"/>
           </a:xfrm>
           <a:prstGeom prst="roundRect">
             <a:avLst>
-              <a:gd name="adj" fmla="val 2807"/>
+              <a:gd name="adj" fmla="val 3902"/>
             </a:avLst>
           </a:prstGeom>
           <a:solidFill>
@@ -8964,14 +8712,14 @@
       </p:sp>
       <p:sp>
         <p:nvSpPr>
-          <p:cNvPr id="10" name="Text 7"/>
-          <p:cNvSpPr txBox="1"/>
-          <p:nvPr/>
-        </p:nvSpPr>
-        <p:spPr>
-          <a:xfrm>
-            <a:off x="4055364" y="5897880"/>
-            <a:ext cx="2866644" cy="2468880"/>
+          <p:cNvPr id="8" name="Text 5"/>
+          <p:cNvSpPr txBox="1"/>
+          <p:nvPr/>
+        </p:nvSpPr>
+        <p:spPr>
+          <a:xfrm>
+            <a:off x="640080" y="7680960"/>
+            <a:ext cx="2866644" cy="1645920"/>
           </a:xfrm>
           <a:prstGeom prst="rect">
             <a:avLst/>
@@ -8985,7 +8733,7 @@
           <a:p>
             <a:pPr marL="152400" indent="-152400">
               <a:spcAft>
-                <a:spcPts val="400"/>
+                <a:spcPts val="700"/>
               </a:spcAft>
               <a:buSzPct val="100000"/>
               <a:buChar char="•"/>
@@ -8996,14 +8744,14 @@
                   <a:schemeClr val="tx1"/>
                 </a:solidFill>
               </a:rPr>
-              <a:t>Thử kín đường ống, mặt bích, van</a:t>
+              <a:t>Lắp đặt bơm ly tâm, bơm định lượng hóa chất</a:t>
             </a:r>
             <a:endParaRPr lang="en-US" sz="1000" dirty="0"/>
           </a:p>
           <a:p>
             <a:pPr marL="152400" indent="-152400">
               <a:spcAft>
-                <a:spcPts val="400"/>
+                <a:spcPts val="700"/>
               </a:spcAft>
               <a:buSzPct val="100000"/>
               <a:buChar char="•"/>
@@ -9014,14 +8762,14 @@
                   <a:schemeClr val="tx1"/>
                 </a:solidFill>
               </a:rPr>
-              <a:t>Kiểm tra chiều quay, dòng điện, độ rung bơm</a:t>
+              <a:t>Lắp bồn chứa, cột lọc, lọc túi, cụm màng lọc</a:t>
             </a:r>
             <a:endParaRPr lang="en-US" sz="1000" dirty="0"/>
           </a:p>
           <a:p>
             <a:pPr marL="152400" indent="-152400">
               <a:spcAft>
-                <a:spcPts val="400"/>
+                <a:spcPts val="700"/>
               </a:spcAft>
               <a:buSzPct val="100000"/>
               <a:buChar char="•"/>
@@ -9032,14 +8780,14 @@
                   <a:schemeClr val="tx1"/>
                 </a:solidFill>
               </a:rPr>
-              <a:t>Cân chỉnh áp suất và lưu lượng</a:t>
+              <a:t>Đường ống uPVC / PVC công nghiệp, mặt bích</a:t>
             </a:r>
             <a:endParaRPr lang="en-US" sz="1000" dirty="0"/>
           </a:p>
           <a:p>
             <a:pPr marL="152400" indent="-152400">
               <a:spcAft>
-                <a:spcPts val="400"/>
+                <a:spcPts val="700"/>
               </a:spcAft>
               <a:buSzPct val="100000"/>
               <a:buChar char="•"/>
@@ -9050,84 +8798,244 @@
                   <a:schemeClr val="tx1"/>
                 </a:solidFill>
               </a:rPr>
-              <a:t>Hướng dẫn vận hành, lập biên bản bàn giao</a:t>
+              <a:t>Van bi, van một chiều, đồng hồ áp, lưu lượng kế</a:t>
             </a:r>
             <a:endParaRPr lang="en-US" sz="1000" dirty="0"/>
           </a:p>
-        </p:txBody>
-      </p:sp>
-      <p:pic>
-        <p:nvPicPr>
-          <p:cNvPr id="11" name="photo img61.jpg" descr="Ảnh hiện trường BLT">    </p:cNvPr>
-          <p:cNvPicPr>
-            <a:picLocks noChangeAspect="1"/>
-          </p:cNvPicPr>
-          <p:nvPr/>
-        </p:nvPicPr>
-        <p:blipFill>
-          <a:blip r:embed="rId2"/>
-          <a:stretch>
-            <a:fillRect/>
-          </a:stretch>
-        </p:blipFill>
-        <p:spPr>
-          <a:xfrm>
-            <a:off x="502920" y="8641080"/>
-            <a:ext cx="2063496" cy="1188720"/>
-          </a:xfrm>
-          <a:prstGeom prst="rect">
-            <a:avLst/>
-          </a:prstGeom>
-        </p:spPr>
-      </p:pic>
-      <p:pic>
-        <p:nvPicPr>
-          <p:cNvPr id="12" name="photo img60.jpg" descr="Ảnh hiện trường BLT">    </p:cNvPr>
-          <p:cNvPicPr>
-            <a:picLocks noChangeAspect="1"/>
-          </p:cNvPicPr>
-          <p:nvPr/>
-        </p:nvPicPr>
-        <p:blipFill>
-          <a:blip r:embed="rId3"/>
-          <a:stretch>
-            <a:fillRect/>
-          </a:stretch>
-        </p:blipFill>
-        <p:spPr>
-          <a:xfrm>
-            <a:off x="2749296" y="8641080"/>
-            <a:ext cx="2063496" cy="1188720"/>
-          </a:xfrm>
-          <a:prstGeom prst="rect">
-            <a:avLst/>
-          </a:prstGeom>
-        </p:spPr>
-      </p:pic>
-      <p:pic>
-        <p:nvPicPr>
-          <p:cNvPr id="13" name="photo img43.jpg" descr="Ảnh hiện trường BLT">    </p:cNvPr>
-          <p:cNvPicPr>
-            <a:picLocks noChangeAspect="1"/>
-          </p:cNvPicPr>
-          <p:nvPr/>
-        </p:nvPicPr>
-        <p:blipFill>
-          <a:blip r:embed="rId4"/>
-          <a:stretch>
-            <a:fillRect/>
-          </a:stretch>
-        </p:blipFill>
-        <p:spPr>
-          <a:xfrm>
-            <a:off x="4995672" y="8641080"/>
-            <a:ext cx="2063496" cy="1188720"/>
-          </a:xfrm>
-          <a:prstGeom prst="rect">
-            <a:avLst/>
-          </a:prstGeom>
-        </p:spPr>
-      </p:pic>
+          <a:p>
+            <a:pPr marL="152400" indent="-152400">
+              <a:spcAft>
+                <a:spcPts val="700"/>
+              </a:spcAft>
+              <a:buSzPct val="100000"/>
+              <a:buChar char="•"/>
+            </a:pPr>
+            <a:r>
+              <a:rPr lang="en-US" sz="1000" dirty="0">
+                <a:solidFill>
+                  <a:schemeClr val="tx1"/>
+                </a:solidFill>
+              </a:rPr>
+              <a:t>Khung đỡ ống, sàn thao tác, giá đỡ thiết bị</a:t>
+            </a:r>
+            <a:endParaRPr lang="en-US" sz="1000" dirty="0"/>
+          </a:p>
+          <a:p>
+            <a:pPr marL="152400" indent="-152400">
+              <a:spcAft>
+                <a:spcPts val="700"/>
+              </a:spcAft>
+              <a:buSzPct val="100000"/>
+              <a:buChar char="•"/>
+            </a:pPr>
+            <a:r>
+              <a:rPr lang="en-US" sz="1000" dirty="0">
+                <a:solidFill>
+                  <a:schemeClr val="tx1"/>
+                </a:solidFill>
+              </a:rPr>
+              <a:t>Đấu nối tủ điện điều khiển bơm</a:t>
+            </a:r>
+            <a:endParaRPr lang="en-US" sz="1000" dirty="0"/>
+          </a:p>
+        </p:txBody>
+      </p:sp>
+      <p:sp>
+        <p:nvSpPr>
+          <p:cNvPr id="9" name="Text 6"/>
+          <p:cNvSpPr txBox="1"/>
+          <p:nvPr/>
+        </p:nvSpPr>
+        <p:spPr>
+          <a:xfrm>
+            <a:off x="3918204" y="7269480"/>
+            <a:ext cx="3140964" cy="228600"/>
+          </a:xfrm>
+          <a:prstGeom prst="rect">
+            <a:avLst/>
+          </a:prstGeom>
+          <a:noFill/>
+          <a:ln/>
+        </p:spPr>
+        <p:txBody>
+          <a:bodyPr wrap="square" lIns="0" tIns="0" rIns="0" bIns="0" rtlCol="0" anchor="ctr"/>
+          <a:lstStyle/>
+          <a:p>
+            <a:pPr indent="0" marL="0">
+              <a:buNone/>
+            </a:pPr>
+            <a:r>
+              <a:rPr lang="en-US" sz="900" b="1" spc="200" kern="0" dirty="0">
+                <a:solidFill>
+                  <a:schemeClr val="accent1"/>
+                </a:solidFill>
+                <a:latin typeface="Arial" pitchFamily="34" charset="0"/>
+                <a:ea typeface="Arial" pitchFamily="34" charset="-122"/>
+                <a:cs typeface="Arial" pitchFamily="34" charset="-120"/>
+              </a:rPr>
+              <a:t>CHẠY THỬ &amp; BÀN GIAO</a:t>
+            </a:r>
+            <a:endParaRPr lang="en-US" sz="900" dirty="0"/>
+          </a:p>
+        </p:txBody>
+      </p:sp>
+      <p:sp>
+        <p:nvSpPr>
+          <p:cNvPr id="10" name="Shape 7"/>
+          <p:cNvSpPr/>
+          <p:nvPr/>
+        </p:nvSpPr>
+        <p:spPr>
+          <a:xfrm>
+            <a:off x="3918204" y="7543800"/>
+            <a:ext cx="3140964" cy="1874520"/>
+          </a:xfrm>
+          <a:prstGeom prst="roundRect">
+            <a:avLst>
+              <a:gd name="adj" fmla="val 3902"/>
+            </a:avLst>
+          </a:prstGeom>
+          <a:solidFill>
+            <a:schemeClr val="bg2"/>
+          </a:solidFill>
+          <a:ln w="12700">
+            <a:solidFill>
+              <a:schemeClr val="bg2"/>
+            </a:solidFill>
+            <a:prstDash val="solid"/>
+          </a:ln>
+        </p:spPr>
+      </p:sp>
+      <p:sp>
+        <p:nvSpPr>
+          <p:cNvPr id="11" name="Text 8"/>
+          <p:cNvSpPr txBox="1"/>
+          <p:nvPr/>
+        </p:nvSpPr>
+        <p:spPr>
+          <a:xfrm>
+            <a:off x="4055364" y="7680960"/>
+            <a:ext cx="2866644" cy="1645920"/>
+          </a:xfrm>
+          <a:prstGeom prst="rect">
+            <a:avLst/>
+          </a:prstGeom>
+          <a:noFill/>
+          <a:ln/>
+        </p:spPr>
+        <p:txBody>
+          <a:bodyPr wrap="square" lIns="0" tIns="0" rIns="0" bIns="0" rtlCol="0" anchor="t"/>
+          <a:lstStyle/>
+          <a:p>
+            <a:pPr marL="152400" indent="-152400">
+              <a:spcAft>
+                <a:spcPts val="700"/>
+              </a:spcAft>
+              <a:buSzPct val="100000"/>
+              <a:buChar char="•"/>
+            </a:pPr>
+            <a:r>
+              <a:rPr lang="en-US" sz="1000" dirty="0">
+                <a:solidFill>
+                  <a:schemeClr val="tx1"/>
+                </a:solidFill>
+              </a:rPr>
+              <a:t>Súc rửa, vệ sinh đường ống trước vận hành</a:t>
+            </a:r>
+            <a:endParaRPr lang="en-US" sz="1000" dirty="0"/>
+          </a:p>
+          <a:p>
+            <a:pPr marL="152400" indent="-152400">
+              <a:spcAft>
+                <a:spcPts val="700"/>
+              </a:spcAft>
+              <a:buSzPct val="100000"/>
+              <a:buChar char="•"/>
+            </a:pPr>
+            <a:r>
+              <a:rPr lang="en-US" sz="1000" dirty="0">
+                <a:solidFill>
+                  <a:schemeClr val="tx1"/>
+                </a:solidFill>
+              </a:rPr>
+              <a:t>Thử kín đường ống, mặt bích, van</a:t>
+            </a:r>
+            <a:endParaRPr lang="en-US" sz="1000" dirty="0"/>
+          </a:p>
+          <a:p>
+            <a:pPr marL="152400" indent="-152400">
+              <a:spcAft>
+                <a:spcPts val="700"/>
+              </a:spcAft>
+              <a:buSzPct val="100000"/>
+              <a:buChar char="•"/>
+            </a:pPr>
+            <a:r>
+              <a:rPr lang="en-US" sz="1000" dirty="0">
+                <a:solidFill>
+                  <a:schemeClr val="tx1"/>
+                </a:solidFill>
+              </a:rPr>
+              <a:t>Kiểm tra chiều quay, dòng điện, độ rung bơm</a:t>
+            </a:r>
+            <a:endParaRPr lang="en-US" sz="1000" dirty="0"/>
+          </a:p>
+          <a:p>
+            <a:pPr marL="152400" indent="-152400">
+              <a:spcAft>
+                <a:spcPts val="700"/>
+              </a:spcAft>
+              <a:buSzPct val="100000"/>
+              <a:buChar char="•"/>
+            </a:pPr>
+            <a:r>
+              <a:rPr lang="en-US" sz="1000" dirty="0">
+                <a:solidFill>
+                  <a:schemeClr val="tx1"/>
+                </a:solidFill>
+              </a:rPr>
+              <a:t>Cân chỉnh áp suất và lưu lượng</a:t>
+            </a:r>
+            <a:endParaRPr lang="en-US" sz="1000" dirty="0"/>
+          </a:p>
+          <a:p>
+            <a:pPr marL="152400" indent="-152400">
+              <a:spcAft>
+                <a:spcPts val="700"/>
+              </a:spcAft>
+              <a:buSzPct val="100000"/>
+              <a:buChar char="•"/>
+            </a:pPr>
+            <a:r>
+              <a:rPr lang="en-US" sz="1000" dirty="0">
+                <a:solidFill>
+                  <a:schemeClr val="tx1"/>
+                </a:solidFill>
+              </a:rPr>
+              <a:t>Hướng dẫn vận hành cho nhân sự nhà máy</a:t>
+            </a:r>
+            <a:endParaRPr lang="en-US" sz="1000" dirty="0"/>
+          </a:p>
+          <a:p>
+            <a:pPr marL="152400" indent="-152400">
+              <a:spcAft>
+                <a:spcPts val="700"/>
+              </a:spcAft>
+              <a:buSzPct val="100000"/>
+              <a:buChar char="•"/>
+            </a:pPr>
+            <a:r>
+              <a:rPr lang="en-US" sz="1000" dirty="0">
+                <a:solidFill>
+                  <a:schemeClr val="tx1"/>
+                </a:solidFill>
+              </a:rPr>
+              <a:t>Bàn giao hồ sơ hoàn công, biên bản nghiệm thu</a:t>
+            </a:r>
+            <a:endParaRPr lang="en-US" sz="1000" dirty="0"/>
+          </a:p>
+        </p:txBody>
+      </p:sp>
       <p:sp>
         <p:nvSpPr>
           <p:cNvPr id="25" name="Slide Number Placeholder 0"/>
@@ -12808,7 +12716,7 @@
       </p:sp>
       <p:pic>
         <p:nvPicPr>
-          <p:cNvPr id="4" name="photo img17.jpg" descr="Thi công trên xe nâng người">    </p:cNvPr>
+          <p:cNvPr id="4" name="photo img17.jpg" descr="Thi công trên xe nâng người có lan can – Nghệ An">    </p:cNvPr>
           <p:cNvPicPr>
             <a:picLocks noChangeAspect="1"/>
           </p:cNvPicPr>
@@ -12823,7 +12731,7 @@
         <p:spPr>
           <a:xfrm>
             <a:off x="502920" y="1463040"/>
-            <a:ext cx="2063496" cy="2651760"/>
+            <a:ext cx="3186684" cy="2651760"/>
           </a:xfrm>
           <a:prstGeom prst="rect">
             <a:avLst/>
@@ -12839,7 +12747,7 @@
         <p:spPr>
           <a:xfrm>
             <a:off x="502920" y="4151376"/>
-            <a:ext cx="2063496" cy="201168"/>
+            <a:ext cx="3186684" cy="201168"/>
           </a:xfrm>
           <a:prstGeom prst="rect">
             <a:avLst/>
@@ -12862,7 +12770,7 @@
                   <a:schemeClr val="accent3"/>
                 </a:solidFill>
               </a:rPr>
-              <a:t>Thi công trên xe nâng người</a:t>
+              <a:t>Thi công trên xe nâng người có lan can – Nghệ An</a:t>
             </a:r>
             <a:endParaRPr lang="en-US" sz="800" dirty="0"/>
           </a:p>
@@ -12870,7 +12778,7 @@
       </p:sp>
       <p:pic>
         <p:nvPicPr>
-          <p:cNvPr id="6" name="photo img22.jpg" descr="Mũ, áo phản quang, dây đai an toàn">    </p:cNvPr>
+          <p:cNvPr id="6" name="photo img09.jpg" descr="Thao tác trên sàn công tác giàn giáo – Ninh Bình">    </p:cNvPr>
           <p:cNvPicPr>
             <a:picLocks noChangeAspect="1"/>
           </p:cNvPicPr>
@@ -12884,8 +12792,8 @@
         </p:blipFill>
         <p:spPr>
           <a:xfrm>
-            <a:off x="2749296" y="1463040"/>
-            <a:ext cx="2063496" cy="2651760"/>
+            <a:off x="3872484" y="1463040"/>
+            <a:ext cx="3186684" cy="2651760"/>
           </a:xfrm>
           <a:prstGeom prst="rect">
             <a:avLst/>
@@ -12900,8 +12808,8 @@
         </p:nvSpPr>
         <p:spPr>
           <a:xfrm>
-            <a:off x="2749296" y="4151376"/>
-            <a:ext cx="2063496" cy="201168"/>
+            <a:off x="3872484" y="4151376"/>
+            <a:ext cx="3186684" cy="201168"/>
           </a:xfrm>
           <a:prstGeom prst="rect">
             <a:avLst/>
@@ -12924,77 +12832,15 @@
                   <a:schemeClr val="accent3"/>
                 </a:solidFill>
               </a:rPr>
-              <a:t>Mũ, áo phản quang, dây đai an toàn</a:t>
+              <a:t>Thao tác trên sàn công tác giàn giáo – Ninh Bình</a:t>
             </a:r>
             <a:endParaRPr lang="en-US" sz="800" dirty="0"/>
           </a:p>
         </p:txBody>
       </p:sp>
-      <p:pic>
-        <p:nvPicPr>
-          <p:cNvPr id="8" name="photo img09.jpg" descr="Thao tác trên sàn công tác giàn giáo">    </p:cNvPr>
-          <p:cNvPicPr>
-            <a:picLocks noChangeAspect="1"/>
-          </p:cNvPicPr>
-          <p:nvPr/>
-        </p:nvPicPr>
-        <p:blipFill>
-          <a:blip r:embed="rId3"/>
-          <a:stretch>
-            <a:fillRect/>
-          </a:stretch>
-        </p:blipFill>
-        <p:spPr>
-          <a:xfrm>
-            <a:off x="4995672" y="1463040"/>
-            <a:ext cx="2063496" cy="2651760"/>
-          </a:xfrm>
-          <a:prstGeom prst="rect">
-            <a:avLst/>
-          </a:prstGeom>
-        </p:spPr>
-      </p:pic>
-      <p:sp>
-        <p:nvSpPr>
-          <p:cNvPr id="9" name="Text 4"/>
-          <p:cNvSpPr txBox="1"/>
-          <p:nvPr/>
-        </p:nvSpPr>
-        <p:spPr>
-          <a:xfrm>
-            <a:off x="4995672" y="4151376"/>
-            <a:ext cx="2063496" cy="201168"/>
-          </a:xfrm>
-          <a:prstGeom prst="rect">
-            <a:avLst/>
-          </a:prstGeom>
-          <a:noFill/>
-          <a:ln/>
-        </p:spPr>
-        <p:txBody>
-          <a:bodyPr wrap="square" lIns="0" tIns="0" rIns="0" bIns="0" rtlCol="0" anchor="ctr">
-            <a:normAutofit/>
-          </a:bodyPr>
-          <a:lstStyle/>
-          <a:p>
-            <a:pPr indent="0" marL="0">
-              <a:buNone/>
-            </a:pPr>
-            <a:r>
-              <a:rPr lang="en-US" sz="800" i="1" dirty="0">
-                <a:solidFill>
-                  <a:schemeClr val="accent3"/>
-                </a:solidFill>
-              </a:rPr>
-              <a:t>Thao tác trên sàn công tác giàn giáo</a:t>
-            </a:r>
-            <a:endParaRPr lang="en-US" sz="800" dirty="0"/>
-          </a:p>
-        </p:txBody>
-      </p:sp>
-      <p:sp>
-        <p:nvSpPr>
-          <p:cNvPr id="10" name="Shape 5"/>
+      <p:sp>
+        <p:nvSpPr>
+          <p:cNvPr id="8" name="Shape 4"/>
           <p:cNvSpPr/>
           <p:nvPr/>
         </p:nvSpPr>
@@ -13021,7 +12867,7 @@
       </p:sp>
       <p:sp>
         <p:nvSpPr>
-          <p:cNvPr id="11" name="Shape 6"/>
+          <p:cNvPr id="9" name="Shape 5"/>
           <p:cNvSpPr/>
           <p:nvPr/>
         </p:nvSpPr>
@@ -13046,7 +12892,7 @@
       </p:sp>
       <p:sp>
         <p:nvSpPr>
-          <p:cNvPr id="12" name="Text 7"/>
+          <p:cNvPr id="10" name="Text 6"/>
           <p:cNvSpPr txBox="1"/>
           <p:nvPr/>
         </p:nvSpPr>
@@ -13085,7 +12931,7 @@
       </p:sp>
       <p:sp>
         <p:nvSpPr>
-          <p:cNvPr id="13" name="Text 8"/>
+          <p:cNvPr id="11" name="Text 7"/>
           <p:cNvSpPr txBox="1"/>
           <p:nvPr/>
         </p:nvSpPr>
@@ -13124,7 +12970,7 @@
       </p:sp>
       <p:sp>
         <p:nvSpPr>
-          <p:cNvPr id="14" name="Text 9"/>
+          <p:cNvPr id="12" name="Text 8"/>
           <p:cNvSpPr txBox="1"/>
           <p:nvPr/>
         </p:nvSpPr>
@@ -13163,7 +13009,7 @@
       </p:sp>
       <p:sp>
         <p:nvSpPr>
-          <p:cNvPr id="15" name="Shape 10"/>
+          <p:cNvPr id="13" name="Shape 9"/>
           <p:cNvSpPr/>
           <p:nvPr/>
         </p:nvSpPr>
@@ -13190,7 +13036,7 @@
       </p:sp>
       <p:sp>
         <p:nvSpPr>
-          <p:cNvPr id="16" name="Shape 11"/>
+          <p:cNvPr id="14" name="Shape 10"/>
           <p:cNvSpPr/>
           <p:nvPr/>
         </p:nvSpPr>
@@ -13215,7 +13061,7 @@
       </p:sp>
       <p:sp>
         <p:nvSpPr>
-          <p:cNvPr id="17" name="Text 12"/>
+          <p:cNvPr id="15" name="Text 11"/>
           <p:cNvSpPr txBox="1"/>
           <p:nvPr/>
         </p:nvSpPr>
@@ -13254,7 +13100,7 @@
       </p:sp>
       <p:sp>
         <p:nvSpPr>
-          <p:cNvPr id="18" name="Text 13"/>
+          <p:cNvPr id="16" name="Text 12"/>
           <p:cNvSpPr txBox="1"/>
           <p:nvPr/>
         </p:nvSpPr>
@@ -13293,7 +13139,7 @@
       </p:sp>
       <p:sp>
         <p:nvSpPr>
-          <p:cNvPr id="19" name="Text 14"/>
+          <p:cNvPr id="17" name="Text 13"/>
           <p:cNvSpPr txBox="1"/>
           <p:nvPr/>
         </p:nvSpPr>
@@ -13332,7 +13178,7 @@
       </p:sp>
       <p:sp>
         <p:nvSpPr>
-          <p:cNvPr id="20" name="Shape 15"/>
+          <p:cNvPr id="18" name="Shape 14"/>
           <p:cNvSpPr/>
           <p:nvPr/>
         </p:nvSpPr>
@@ -13359,7 +13205,7 @@
       </p:sp>
       <p:sp>
         <p:nvSpPr>
-          <p:cNvPr id="21" name="Shape 16"/>
+          <p:cNvPr id="19" name="Shape 15"/>
           <p:cNvSpPr/>
           <p:nvPr/>
         </p:nvSpPr>
@@ -13384,7 +13230,7 @@
       </p:sp>
       <p:sp>
         <p:nvSpPr>
-          <p:cNvPr id="22" name="Text 17"/>
+          <p:cNvPr id="20" name="Text 16"/>
           <p:cNvSpPr txBox="1"/>
           <p:nvPr/>
         </p:nvSpPr>
@@ -13423,7 +13269,7 @@
       </p:sp>
       <p:sp>
         <p:nvSpPr>
-          <p:cNvPr id="23" name="Text 18"/>
+          <p:cNvPr id="21" name="Text 17"/>
           <p:cNvSpPr txBox="1"/>
           <p:nvPr/>
         </p:nvSpPr>
@@ -13462,7 +13308,7 @@
       </p:sp>
       <p:sp>
         <p:nvSpPr>
-          <p:cNvPr id="24" name="Text 19"/>
+          <p:cNvPr id="22" name="Text 18"/>
           <p:cNvSpPr txBox="1"/>
           <p:nvPr/>
         </p:nvSpPr>
@@ -13501,7 +13347,7 @@
       </p:sp>
       <p:sp>
         <p:nvSpPr>
-          <p:cNvPr id="25" name="Shape 20"/>
+          <p:cNvPr id="23" name="Shape 19"/>
           <p:cNvSpPr/>
           <p:nvPr/>
         </p:nvSpPr>
@@ -13528,7 +13374,7 @@
       </p:sp>
       <p:sp>
         <p:nvSpPr>
-          <p:cNvPr id="26" name="Shape 21"/>
+          <p:cNvPr id="24" name="Shape 20"/>
           <p:cNvSpPr/>
           <p:nvPr/>
         </p:nvSpPr>
@@ -13553,7 +13399,7 @@
       </p:sp>
       <p:sp>
         <p:nvSpPr>
-          <p:cNvPr id="27" name="Text 22"/>
+          <p:cNvPr id="25" name="Text 21"/>
           <p:cNvSpPr txBox="1"/>
           <p:nvPr/>
         </p:nvSpPr>
@@ -13592,7 +13438,7 @@
       </p:sp>
       <p:sp>
         <p:nvSpPr>
-          <p:cNvPr id="28" name="Text 23"/>
+          <p:cNvPr id="26" name="Text 22"/>
           <p:cNvSpPr txBox="1"/>
           <p:nvPr/>
         </p:nvSpPr>
@@ -13631,7 +13477,7 @@
       </p:sp>
       <p:sp>
         <p:nvSpPr>
-          <p:cNvPr id="29" name="Text 24"/>
+          <p:cNvPr id="27" name="Text 23"/>
           <p:cNvSpPr txBox="1"/>
           <p:nvPr/>
         </p:nvSpPr>
@@ -13670,7 +13516,7 @@
       </p:sp>
       <p:sp>
         <p:nvSpPr>
-          <p:cNvPr id="30" name="Shape 25"/>
+          <p:cNvPr id="28" name="Shape 24"/>
           <p:cNvSpPr/>
           <p:nvPr/>
         </p:nvSpPr>
@@ -13697,7 +13543,7 @@
       </p:sp>
       <p:sp>
         <p:nvSpPr>
-          <p:cNvPr id="31" name="Shape 26"/>
+          <p:cNvPr id="29" name="Shape 25"/>
           <p:cNvSpPr/>
           <p:nvPr/>
         </p:nvSpPr>
@@ -13722,7 +13568,7 @@
       </p:sp>
       <p:sp>
         <p:nvSpPr>
-          <p:cNvPr id="32" name="Text 27"/>
+          <p:cNvPr id="30" name="Text 26"/>
           <p:cNvSpPr txBox="1"/>
           <p:nvPr/>
         </p:nvSpPr>
@@ -13761,7 +13607,7 @@
       </p:sp>
       <p:sp>
         <p:nvSpPr>
-          <p:cNvPr id="33" name="Text 28"/>
+          <p:cNvPr id="31" name="Text 27"/>
           <p:cNvSpPr txBox="1"/>
           <p:nvPr/>
         </p:nvSpPr>
@@ -13800,7 +13646,7 @@
       </p:sp>
       <p:sp>
         <p:nvSpPr>
-          <p:cNvPr id="34" name="Text 29"/>
+          <p:cNvPr id="32" name="Text 28"/>
           <p:cNvSpPr txBox="1"/>
           <p:nvPr/>
         </p:nvSpPr>
@@ -13839,7 +13685,7 @@
       </p:sp>
       <p:sp>
         <p:nvSpPr>
-          <p:cNvPr id="35" name="Shape 30"/>
+          <p:cNvPr id="33" name="Shape 29"/>
           <p:cNvSpPr/>
           <p:nvPr/>
         </p:nvSpPr>
@@ -13866,7 +13712,7 @@
       </p:sp>
       <p:sp>
         <p:nvSpPr>
-          <p:cNvPr id="36" name="Shape 31"/>
+          <p:cNvPr id="34" name="Shape 30"/>
           <p:cNvSpPr/>
           <p:nvPr/>
         </p:nvSpPr>
@@ -13891,7 +13737,7 @@
       </p:sp>
       <p:sp>
         <p:nvSpPr>
-          <p:cNvPr id="37" name="Text 32"/>
+          <p:cNvPr id="35" name="Text 31"/>
           <p:cNvSpPr txBox="1"/>
           <p:nvPr/>
         </p:nvSpPr>
@@ -13930,7 +13776,7 @@
       </p:sp>
       <p:sp>
         <p:nvSpPr>
-          <p:cNvPr id="38" name="Text 33"/>
+          <p:cNvPr id="36" name="Text 32"/>
           <p:cNvSpPr txBox="1"/>
           <p:nvPr/>
         </p:nvSpPr>
@@ -13969,7 +13815,7 @@
       </p:sp>
       <p:sp>
         <p:nvSpPr>
-          <p:cNvPr id="39" name="Text 34"/>
+          <p:cNvPr id="37" name="Text 33"/>
           <p:cNvSpPr txBox="1"/>
           <p:nvPr/>
         </p:nvSpPr>
@@ -14008,7 +13854,7 @@
       </p:sp>
       <p:sp>
         <p:nvSpPr>
-          <p:cNvPr id="40" name="Shape 35"/>
+          <p:cNvPr id="38" name="Shape 34"/>
           <p:cNvSpPr/>
           <p:nvPr/>
         </p:nvSpPr>
@@ -14035,7 +13881,7 @@
       </p:sp>
       <p:sp>
         <p:nvSpPr>
-          <p:cNvPr id="41" name="Shape 36"/>
+          <p:cNvPr id="39" name="Shape 35"/>
           <p:cNvSpPr/>
           <p:nvPr/>
         </p:nvSpPr>
@@ -14060,7 +13906,7 @@
       </p:sp>
       <p:sp>
         <p:nvSpPr>
-          <p:cNvPr id="42" name="Text 37"/>
+          <p:cNvPr id="40" name="Text 36"/>
           <p:cNvSpPr txBox="1"/>
           <p:nvPr/>
         </p:nvSpPr>
@@ -14099,7 +13945,7 @@
       </p:sp>
       <p:sp>
         <p:nvSpPr>
-          <p:cNvPr id="43" name="Text 38"/>
+          <p:cNvPr id="41" name="Text 37"/>
           <p:cNvSpPr txBox="1"/>
           <p:nvPr/>
         </p:nvSpPr>
@@ -14138,7 +13984,7 @@
       </p:sp>
       <p:sp>
         <p:nvSpPr>
-          <p:cNvPr id="44" name="Text 39"/>
+          <p:cNvPr id="42" name="Text 38"/>
           <p:cNvSpPr txBox="1"/>
           <p:nvPr/>
         </p:nvSpPr>
@@ -14177,7 +14023,7 @@
       </p:sp>
       <p:sp>
         <p:nvSpPr>
-          <p:cNvPr id="45" name="Shape 40"/>
+          <p:cNvPr id="43" name="Shape 39"/>
           <p:cNvSpPr/>
           <p:nvPr/>
         </p:nvSpPr>
@@ -14204,7 +14050,7 @@
       </p:sp>
       <p:sp>
         <p:nvSpPr>
-          <p:cNvPr id="46" name="Shape 41"/>
+          <p:cNvPr id="44" name="Shape 40"/>
           <p:cNvSpPr/>
           <p:nvPr/>
         </p:nvSpPr>
@@ -14229,7 +14075,7 @@
       </p:sp>
       <p:sp>
         <p:nvSpPr>
-          <p:cNvPr id="47" name="Text 42"/>
+          <p:cNvPr id="45" name="Text 41"/>
           <p:cNvSpPr txBox="1"/>
           <p:nvPr/>
         </p:nvSpPr>
@@ -14268,7 +14114,7 @@
       </p:sp>
       <p:sp>
         <p:nvSpPr>
-          <p:cNvPr id="48" name="Text 43"/>
+          <p:cNvPr id="46" name="Text 42"/>
           <p:cNvSpPr txBox="1"/>
           <p:nvPr/>
         </p:nvSpPr>
@@ -14307,7 +14153,7 @@
       </p:sp>
       <p:sp>
         <p:nvSpPr>
-          <p:cNvPr id="49" name="Text 44"/>
+          <p:cNvPr id="47" name="Text 43"/>
           <p:cNvSpPr txBox="1"/>
           <p:nvPr/>
         </p:nvSpPr>
@@ -14490,82 +14336,20 @@
           </a:p>
         </p:txBody>
       </p:sp>
-      <p:pic>
-        <p:nvPicPr>
-          <p:cNvPr id="4" name="photo img57.jpg" descr="Đội thi công BLT tại trạm xử lý nước – Thành phố Huế (17/09/2026)">    </p:cNvPr>
-          <p:cNvPicPr>
-            <a:picLocks noChangeAspect="1"/>
-          </p:cNvPicPr>
-          <p:nvPr/>
-        </p:nvPicPr>
-        <p:blipFill>
-          <a:blip r:embed="rId1"/>
-          <a:stretch>
-            <a:fillRect/>
-          </a:stretch>
-        </p:blipFill>
+      <p:sp>
+        <p:nvSpPr>
+          <p:cNvPr id="4" name="Shape 2"/>
+          <p:cNvSpPr/>
+          <p:nvPr/>
+        </p:nvSpPr>
         <p:spPr>
           <a:xfrm>
             <a:off x="502920" y="1463040"/>
-            <a:ext cx="6556248" cy="2926080"/>
-          </a:xfrm>
-          <a:prstGeom prst="rect">
-            <a:avLst/>
-          </a:prstGeom>
-        </p:spPr>
-      </p:pic>
-      <p:sp>
-        <p:nvSpPr>
-          <p:cNvPr id="5" name="Text 2"/>
-          <p:cNvSpPr txBox="1"/>
-          <p:nvPr/>
-        </p:nvSpPr>
-        <p:spPr>
-          <a:xfrm>
-            <a:off x="502920" y="4425696"/>
-            <a:ext cx="6556248" cy="201168"/>
-          </a:xfrm>
-          <a:prstGeom prst="rect">
-            <a:avLst/>
-          </a:prstGeom>
-          <a:noFill/>
-          <a:ln/>
-        </p:spPr>
-        <p:txBody>
-          <a:bodyPr wrap="square" lIns="0" tIns="0" rIns="0" bIns="0" rtlCol="0" anchor="ctr">
-            <a:normAutofit/>
-          </a:bodyPr>
-          <a:lstStyle/>
-          <a:p>
-            <a:pPr indent="0" marL="0">
-              <a:buNone/>
-            </a:pPr>
-            <a:r>
-              <a:rPr lang="en-US" sz="800" i="1" dirty="0">
-                <a:solidFill>
-                  <a:schemeClr val="accent3"/>
-                </a:solidFill>
-              </a:rPr>
-              <a:t>Đội thi công BLT tại trạm xử lý nước – Thành phố Huế (17/09/2026)</a:t>
-            </a:r>
-            <a:endParaRPr lang="en-US" sz="800" dirty="0"/>
-          </a:p>
-        </p:txBody>
-      </p:sp>
-      <p:sp>
-        <p:nvSpPr>
-          <p:cNvPr id="6" name="Shape 3"/>
-          <p:cNvSpPr/>
-          <p:nvPr/>
-        </p:nvSpPr>
-        <p:spPr>
-          <a:xfrm>
-            <a:off x="2500884" y="4709160"/>
-            <a:ext cx="2560320" cy="777240"/>
+            <a:ext cx="2063496" cy="2651760"/>
           </a:xfrm>
           <a:prstGeom prst="roundRect">
             <a:avLst>
-              <a:gd name="adj" fmla="val 7059"/>
+              <a:gd name="adj" fmla="val 3545"/>
             </a:avLst>
           </a:prstGeom>
           <a:solidFill>
@@ -14581,14 +14365,14 @@
       </p:sp>
       <p:sp>
         <p:nvSpPr>
-          <p:cNvPr id="7" name="Text 4"/>
-          <p:cNvSpPr txBox="1"/>
-          <p:nvPr/>
-        </p:nvSpPr>
-        <p:spPr>
-          <a:xfrm>
-            <a:off x="2574036" y="4782312"/>
-            <a:ext cx="2414016" cy="292608"/>
+          <p:cNvPr id="5" name="Text 3"/>
+          <p:cNvSpPr txBox="1"/>
+          <p:nvPr/>
+        </p:nvSpPr>
+        <p:spPr>
+          <a:xfrm>
+            <a:off x="640080" y="1645920"/>
+            <a:ext cx="1789176" cy="914400"/>
           </a:xfrm>
           <a:prstGeom prst="rect">
             <a:avLst/>
@@ -14604,14 +14388,437 @@
               <a:buNone/>
             </a:pPr>
             <a:r>
-              <a:rPr lang="en-US" sz="950" b="1" dirty="0">
-                <a:solidFill>
-                  <a:schemeClr val="bg1"/>
+              <a:rPr lang="en-US" sz="4800" b="1" dirty="0">
+                <a:solidFill>
+                  <a:schemeClr val="accent1"/>
                 </a:solidFill>
                 <a:latin typeface="Arial" pitchFamily="34" charset="0"/>
                 <a:ea typeface="Arial" pitchFamily="34" charset="-122"/>
                 <a:cs typeface="Arial" pitchFamily="34" charset="-120"/>
               </a:rPr>
+              <a:t>50</a:t>
+            </a:r>
+            <a:endParaRPr lang="en-US" sz="4800" dirty="0"/>
+          </a:p>
+        </p:txBody>
+      </p:sp>
+      <p:sp>
+        <p:nvSpPr>
+          <p:cNvPr id="6" name="Text 4"/>
+          <p:cNvSpPr txBox="1"/>
+          <p:nvPr/>
+        </p:nvSpPr>
+        <p:spPr>
+          <a:xfrm>
+            <a:off x="640080" y="2606040"/>
+            <a:ext cx="1789176" cy="320040"/>
+          </a:xfrm>
+          <a:prstGeom prst="rect">
+            <a:avLst/>
+          </a:prstGeom>
+          <a:noFill/>
+          <a:ln/>
+        </p:spPr>
+        <p:txBody>
+          <a:bodyPr wrap="square" lIns="0" tIns="0" rIns="0" bIns="0" rtlCol="0" anchor="ctr"/>
+          <a:lstStyle/>
+          <a:p>
+            <a:pPr algn="ctr" indent="0" marL="0">
+              <a:buNone/>
+            </a:pPr>
+            <a:r>
+              <a:rPr lang="en-US" sz="1200" b="1" spc="200" kern="0" dirty="0">
+                <a:solidFill>
+                  <a:schemeClr val="bg1"/>
+                </a:solidFill>
+                <a:latin typeface="Arial" pitchFamily="34" charset="0"/>
+                <a:ea typeface="Arial" pitchFamily="34" charset="-122"/>
+                <a:cs typeface="Arial" pitchFamily="34" charset="-120"/>
+              </a:rPr>
+              <a:t>NHÂN SỰ</a:t>
+            </a:r>
+            <a:endParaRPr lang="en-US" sz="1200" dirty="0"/>
+          </a:p>
+        </p:txBody>
+      </p:sp>
+      <p:sp>
+        <p:nvSpPr>
+          <p:cNvPr id="7" name="Text 5"/>
+          <p:cNvSpPr txBox="1"/>
+          <p:nvPr/>
+        </p:nvSpPr>
+        <p:spPr>
+          <a:xfrm>
+            <a:off x="685800" y="3017520"/>
+            <a:ext cx="1697736" cy="914400"/>
+          </a:xfrm>
+          <a:prstGeom prst="rect">
+            <a:avLst/>
+          </a:prstGeom>
+          <a:noFill/>
+          <a:ln/>
+        </p:spPr>
+        <p:txBody>
+          <a:bodyPr wrap="square" lIns="0" tIns="0" rIns="0" bIns="0" rtlCol="0" anchor="t"/>
+          <a:lstStyle/>
+          <a:p>
+            <a:pPr algn="ctr" indent="0" marL="0">
+              <a:buNone/>
+            </a:pPr>
+            <a:r>
+              <a:rPr lang="en-US" sz="950" dirty="0">
+                <a:solidFill>
+                  <a:schemeClr val="accent4"/>
+                </a:solidFill>
+              </a:rPr>
+              <a:t>Cán bộ kỹ thuật, chỉ huy công trường và công nhân lành nghề</a:t>
+            </a:r>
+            <a:endParaRPr lang="en-US" sz="950" dirty="0"/>
+          </a:p>
+        </p:txBody>
+      </p:sp>
+      <p:sp>
+        <p:nvSpPr>
+          <p:cNvPr id="8" name="Shape 6"/>
+          <p:cNvSpPr/>
+          <p:nvPr/>
+        </p:nvSpPr>
+        <p:spPr>
+          <a:xfrm>
+            <a:off x="2749296" y="1463040"/>
+            <a:ext cx="2063496" cy="2651760"/>
+          </a:xfrm>
+          <a:prstGeom prst="roundRect">
+            <a:avLst>
+              <a:gd name="adj" fmla="val 3545"/>
+            </a:avLst>
+          </a:prstGeom>
+          <a:solidFill>
+            <a:schemeClr val="tx2"/>
+          </a:solidFill>
+          <a:ln w="12700">
+            <a:solidFill>
+              <a:schemeClr val="tx2"/>
+            </a:solidFill>
+            <a:prstDash val="solid"/>
+          </a:ln>
+        </p:spPr>
+      </p:sp>
+      <p:sp>
+        <p:nvSpPr>
+          <p:cNvPr id="9" name="Text 7"/>
+          <p:cNvSpPr txBox="1"/>
+          <p:nvPr/>
+        </p:nvSpPr>
+        <p:spPr>
+          <a:xfrm>
+            <a:off x="2886456" y="1645920"/>
+            <a:ext cx="1789176" cy="914400"/>
+          </a:xfrm>
+          <a:prstGeom prst="rect">
+            <a:avLst/>
+          </a:prstGeom>
+          <a:noFill/>
+          <a:ln/>
+        </p:spPr>
+        <p:txBody>
+          <a:bodyPr wrap="square" lIns="0" tIns="0" rIns="0" bIns="0" rtlCol="0" anchor="ctr"/>
+          <a:lstStyle/>
+          <a:p>
+            <a:pPr algn="ctr" indent="0" marL="0">
+              <a:buNone/>
+            </a:pPr>
+            <a:r>
+              <a:rPr lang="en-US" sz="4800" b="1" dirty="0">
+                <a:solidFill>
+                  <a:schemeClr val="accent1"/>
+                </a:solidFill>
+                <a:latin typeface="Arial" pitchFamily="34" charset="0"/>
+                <a:ea typeface="Arial" pitchFamily="34" charset="-122"/>
+                <a:cs typeface="Arial" pitchFamily="34" charset="-120"/>
+              </a:rPr>
+              <a:t>4</a:t>
+            </a:r>
+            <a:endParaRPr lang="en-US" sz="4800" dirty="0"/>
+          </a:p>
+        </p:txBody>
+      </p:sp>
+      <p:sp>
+        <p:nvSpPr>
+          <p:cNvPr id="10" name="Text 8"/>
+          <p:cNvSpPr txBox="1"/>
+          <p:nvPr/>
+        </p:nvSpPr>
+        <p:spPr>
+          <a:xfrm>
+            <a:off x="2886456" y="2606040"/>
+            <a:ext cx="1789176" cy="320040"/>
+          </a:xfrm>
+          <a:prstGeom prst="rect">
+            <a:avLst/>
+          </a:prstGeom>
+          <a:noFill/>
+          <a:ln/>
+        </p:spPr>
+        <p:txBody>
+          <a:bodyPr wrap="square" lIns="0" tIns="0" rIns="0" bIns="0" rtlCol="0" anchor="ctr"/>
+          <a:lstStyle/>
+          <a:p>
+            <a:pPr algn="ctr" indent="0" marL="0">
+              <a:buNone/>
+            </a:pPr>
+            <a:r>
+              <a:rPr lang="en-US" sz="1200" b="1" spc="200" kern="0" dirty="0">
+                <a:solidFill>
+                  <a:schemeClr val="bg1"/>
+                </a:solidFill>
+                <a:latin typeface="Arial" pitchFamily="34" charset="0"/>
+                <a:ea typeface="Arial" pitchFamily="34" charset="-122"/>
+                <a:cs typeface="Arial" pitchFamily="34" charset="-120"/>
+              </a:rPr>
+              <a:t>BỘ PHẬN</a:t>
+            </a:r>
+            <a:endParaRPr lang="en-US" sz="1200" dirty="0"/>
+          </a:p>
+        </p:txBody>
+      </p:sp>
+      <p:sp>
+        <p:nvSpPr>
+          <p:cNvPr id="11" name="Text 9"/>
+          <p:cNvSpPr txBox="1"/>
+          <p:nvPr/>
+        </p:nvSpPr>
+        <p:spPr>
+          <a:xfrm>
+            <a:off x="2932176" y="3017520"/>
+            <a:ext cx="1697736" cy="914400"/>
+          </a:xfrm>
+          <a:prstGeom prst="rect">
+            <a:avLst/>
+          </a:prstGeom>
+          <a:noFill/>
+          <a:ln/>
+        </p:spPr>
+        <p:txBody>
+          <a:bodyPr wrap="square" lIns="0" tIns="0" rIns="0" bIns="0" rtlCol="0" anchor="t"/>
+          <a:lstStyle/>
+          <a:p>
+            <a:pPr algn="ctr" indent="0" marL="0">
+              <a:buNone/>
+            </a:pPr>
+            <a:r>
+              <a:rPr lang="en-US" sz="950" dirty="0">
+                <a:solidFill>
+                  <a:schemeClr val="accent4"/>
+                </a:solidFill>
+              </a:rPr>
+              <a:t>Kỹ thuật – dự toán, chỉ huy công trường, vật tư, an toàn lao động</a:t>
+            </a:r>
+            <a:endParaRPr lang="en-US" sz="950" dirty="0"/>
+          </a:p>
+        </p:txBody>
+      </p:sp>
+      <p:sp>
+        <p:nvSpPr>
+          <p:cNvPr id="12" name="Shape 10"/>
+          <p:cNvSpPr/>
+          <p:nvPr/>
+        </p:nvSpPr>
+        <p:spPr>
+          <a:xfrm>
+            <a:off x="4995672" y="1463040"/>
+            <a:ext cx="2063496" cy="2651760"/>
+          </a:xfrm>
+          <a:prstGeom prst="roundRect">
+            <a:avLst>
+              <a:gd name="adj" fmla="val 3545"/>
+            </a:avLst>
+          </a:prstGeom>
+          <a:solidFill>
+            <a:schemeClr val="tx2"/>
+          </a:solidFill>
+          <a:ln w="12700">
+            <a:solidFill>
+              <a:schemeClr val="tx2"/>
+            </a:solidFill>
+            <a:prstDash val="solid"/>
+          </a:ln>
+        </p:spPr>
+      </p:sp>
+      <p:sp>
+        <p:nvSpPr>
+          <p:cNvPr id="13" name="Text 11"/>
+          <p:cNvSpPr txBox="1"/>
+          <p:nvPr/>
+        </p:nvSpPr>
+        <p:spPr>
+          <a:xfrm>
+            <a:off x="5132832" y="1645920"/>
+            <a:ext cx="1789176" cy="914400"/>
+          </a:xfrm>
+          <a:prstGeom prst="rect">
+            <a:avLst/>
+          </a:prstGeom>
+          <a:noFill/>
+          <a:ln/>
+        </p:spPr>
+        <p:txBody>
+          <a:bodyPr wrap="square" lIns="0" tIns="0" rIns="0" bIns="0" rtlCol="0" anchor="ctr"/>
+          <a:lstStyle/>
+          <a:p>
+            <a:pPr algn="ctr" indent="0" marL="0">
+              <a:buNone/>
+            </a:pPr>
+            <a:r>
+              <a:rPr lang="en-US" sz="4800" b="1" dirty="0">
+                <a:solidFill>
+                  <a:schemeClr val="accent1"/>
+                </a:solidFill>
+                <a:latin typeface="Arial" pitchFamily="34" charset="0"/>
+                <a:ea typeface="Arial" pitchFamily="34" charset="-122"/>
+                <a:cs typeface="Arial" pitchFamily="34" charset="-120"/>
+              </a:rPr>
+              <a:t>3</a:t>
+            </a:r>
+            <a:endParaRPr lang="en-US" sz="4800" dirty="0"/>
+          </a:p>
+        </p:txBody>
+      </p:sp>
+      <p:sp>
+        <p:nvSpPr>
+          <p:cNvPr id="14" name="Text 12"/>
+          <p:cNvSpPr txBox="1"/>
+          <p:nvPr/>
+        </p:nvSpPr>
+        <p:spPr>
+          <a:xfrm>
+            <a:off x="5132832" y="2606040"/>
+            <a:ext cx="1789176" cy="320040"/>
+          </a:xfrm>
+          <a:prstGeom prst="rect">
+            <a:avLst/>
+          </a:prstGeom>
+          <a:noFill/>
+          <a:ln/>
+        </p:spPr>
+        <p:txBody>
+          <a:bodyPr wrap="square" lIns="0" tIns="0" rIns="0" bIns="0" rtlCol="0" anchor="ctr"/>
+          <a:lstStyle/>
+          <a:p>
+            <a:pPr algn="ctr" indent="0" marL="0">
+              <a:buNone/>
+            </a:pPr>
+            <a:r>
+              <a:rPr lang="en-US" sz="1200" b="1" spc="200" kern="0" dirty="0">
+                <a:solidFill>
+                  <a:schemeClr val="bg1"/>
+                </a:solidFill>
+                <a:latin typeface="Arial" pitchFamily="34" charset="0"/>
+                <a:ea typeface="Arial" pitchFamily="34" charset="-122"/>
+                <a:cs typeface="Arial" pitchFamily="34" charset="-120"/>
+              </a:rPr>
+              <a:t>ĐỘI THI CÔNG</a:t>
+            </a:r>
+            <a:endParaRPr lang="en-US" sz="1200" dirty="0"/>
+          </a:p>
+        </p:txBody>
+      </p:sp>
+      <p:sp>
+        <p:nvSpPr>
+          <p:cNvPr id="15" name="Text 13"/>
+          <p:cNvSpPr txBox="1"/>
+          <p:nvPr/>
+        </p:nvSpPr>
+        <p:spPr>
+          <a:xfrm>
+            <a:off x="5178552" y="3017520"/>
+            <a:ext cx="1697736" cy="914400"/>
+          </a:xfrm>
+          <a:prstGeom prst="rect">
+            <a:avLst/>
+          </a:prstGeom>
+          <a:noFill/>
+          <a:ln/>
+        </p:spPr>
+        <p:txBody>
+          <a:bodyPr wrap="square" lIns="0" tIns="0" rIns="0" bIns="0" rtlCol="0" anchor="t"/>
+          <a:lstStyle/>
+          <a:p>
+            <a:pPr algn="ctr" indent="0" marL="0">
+              <a:buNone/>
+            </a:pPr>
+            <a:r>
+              <a:rPr lang="en-US" sz="950" dirty="0">
+                <a:solidFill>
+                  <a:schemeClr val="accent4"/>
+                </a:solidFill>
+              </a:rPr>
+              <a:t>Điện • Cấp thoát nước • Ống công nghệ – hút sương dầu</a:t>
+            </a:r>
+            <a:endParaRPr lang="en-US" sz="950" dirty="0"/>
+          </a:p>
+        </p:txBody>
+      </p:sp>
+      <p:sp>
+        <p:nvSpPr>
+          <p:cNvPr id="16" name="Shape 14"/>
+          <p:cNvSpPr/>
+          <p:nvPr/>
+        </p:nvSpPr>
+        <p:spPr>
+          <a:xfrm>
+            <a:off x="2500884" y="4709160"/>
+            <a:ext cx="2560320" cy="777240"/>
+          </a:xfrm>
+          <a:prstGeom prst="roundRect">
+            <a:avLst>
+              <a:gd name="adj" fmla="val 7059"/>
+            </a:avLst>
+          </a:prstGeom>
+          <a:solidFill>
+            <a:schemeClr val="tx2"/>
+          </a:solidFill>
+          <a:ln w="12700">
+            <a:solidFill>
+              <a:schemeClr val="tx2"/>
+            </a:solidFill>
+            <a:prstDash val="solid"/>
+          </a:ln>
+        </p:spPr>
+      </p:sp>
+      <p:sp>
+        <p:nvSpPr>
+          <p:cNvPr id="17" name="Text 15"/>
+          <p:cNvSpPr txBox="1"/>
+          <p:nvPr/>
+        </p:nvSpPr>
+        <p:spPr>
+          <a:xfrm>
+            <a:off x="2574036" y="4782312"/>
+            <a:ext cx="2414016" cy="292608"/>
+          </a:xfrm>
+          <a:prstGeom prst="rect">
+            <a:avLst/>
+          </a:prstGeom>
+          <a:noFill/>
+          <a:ln/>
+        </p:spPr>
+        <p:txBody>
+          <a:bodyPr wrap="square" lIns="0" tIns="0" rIns="0" bIns="0" rtlCol="0" anchor="ctr"/>
+          <a:lstStyle/>
+          <a:p>
+            <a:pPr algn="ctr" indent="0" marL="0">
+              <a:buNone/>
+            </a:pPr>
+            <a:r>
+              <a:rPr lang="en-US" sz="950" b="1" dirty="0">
+                <a:solidFill>
+                  <a:schemeClr val="bg1"/>
+                </a:solidFill>
+                <a:latin typeface="Arial" pitchFamily="34" charset="0"/>
+                <a:ea typeface="Arial" pitchFamily="34" charset="-122"/>
+                <a:cs typeface="Arial" pitchFamily="34" charset="-120"/>
+              </a:rPr>
               <a:t>GIÁM ĐỐC</a:t>
             </a:r>
             <a:endParaRPr lang="en-US" sz="950" dirty="0"/>
@@ -14620,7 +14827,7 @@
       </p:sp>
       <p:sp>
         <p:nvSpPr>
-          <p:cNvPr id="8" name="Text 5"/>
+          <p:cNvPr id="18" name="Text 16"/>
           <p:cNvSpPr txBox="1"/>
           <p:nvPr/>
         </p:nvSpPr>
@@ -14656,7 +14863,7 @@
       </p:sp>
       <p:sp>
         <p:nvSpPr>
-          <p:cNvPr id="9" name="Shape 6"/>
+          <p:cNvPr id="19" name="Shape 17"/>
           <p:cNvSpPr/>
           <p:nvPr/>
         </p:nvSpPr>
@@ -14679,7 +14886,7 @@
       </p:sp>
       <p:sp>
         <p:nvSpPr>
-          <p:cNvPr id="10" name="Shape 7"/>
+          <p:cNvPr id="20" name="Shape 18"/>
           <p:cNvSpPr/>
           <p:nvPr/>
         </p:nvSpPr>
@@ -14702,7 +14909,7 @@
       </p:sp>
       <p:sp>
         <p:nvSpPr>
-          <p:cNvPr id="11" name="Shape 8"/>
+          <p:cNvPr id="21" name="Shape 19"/>
           <p:cNvSpPr/>
           <p:nvPr/>
         </p:nvSpPr>
@@ -14725,7 +14932,7 @@
       </p:sp>
       <p:sp>
         <p:nvSpPr>
-          <p:cNvPr id="12" name="Shape 9"/>
+          <p:cNvPr id="22" name="Shape 20"/>
           <p:cNvSpPr/>
           <p:nvPr/>
         </p:nvSpPr>
@@ -14752,7 +14959,7 @@
       </p:sp>
       <p:sp>
         <p:nvSpPr>
-          <p:cNvPr id="13" name="Text 10"/>
+          <p:cNvPr id="23" name="Text 21"/>
           <p:cNvSpPr txBox="1"/>
           <p:nvPr/>
         </p:nvSpPr>
@@ -14791,7 +14998,7 @@
       </p:sp>
       <p:sp>
         <p:nvSpPr>
-          <p:cNvPr id="14" name="Text 11"/>
+          <p:cNvPr id="24" name="Text 22"/>
           <p:cNvSpPr txBox="1"/>
           <p:nvPr/>
         </p:nvSpPr>
@@ -14827,7 +15034,7 @@
       </p:sp>
       <p:sp>
         <p:nvSpPr>
-          <p:cNvPr id="15" name="Shape 12"/>
+          <p:cNvPr id="25" name="Shape 23"/>
           <p:cNvSpPr/>
           <p:nvPr/>
         </p:nvSpPr>
@@ -14850,7 +15057,7 @@
       </p:sp>
       <p:sp>
         <p:nvSpPr>
-          <p:cNvPr id="16" name="Shape 13"/>
+          <p:cNvPr id="26" name="Shape 24"/>
           <p:cNvSpPr/>
           <p:nvPr/>
         </p:nvSpPr>
@@ -14877,7 +15084,7 @@
       </p:sp>
       <p:sp>
         <p:nvSpPr>
-          <p:cNvPr id="17" name="Text 14"/>
+          <p:cNvPr id="27" name="Text 25"/>
           <p:cNvSpPr txBox="1"/>
           <p:nvPr/>
         </p:nvSpPr>
@@ -14916,7 +15123,7 @@
       </p:sp>
       <p:sp>
         <p:nvSpPr>
-          <p:cNvPr id="18" name="Text 15"/>
+          <p:cNvPr id="28" name="Text 26"/>
           <p:cNvSpPr txBox="1"/>
           <p:nvPr/>
         </p:nvSpPr>
@@ -14952,7 +15159,7 @@
       </p:sp>
       <p:sp>
         <p:nvSpPr>
-          <p:cNvPr id="19" name="Shape 16"/>
+          <p:cNvPr id="29" name="Shape 27"/>
           <p:cNvSpPr/>
           <p:nvPr/>
         </p:nvSpPr>
@@ -14975,7 +15182,7 @@
       </p:sp>
       <p:sp>
         <p:nvSpPr>
-          <p:cNvPr id="20" name="Shape 17"/>
+          <p:cNvPr id="30" name="Shape 28"/>
           <p:cNvSpPr/>
           <p:nvPr/>
         </p:nvSpPr>
@@ -15002,7 +15209,7 @@
       </p:sp>
       <p:sp>
         <p:nvSpPr>
-          <p:cNvPr id="21" name="Text 18"/>
+          <p:cNvPr id="31" name="Text 29"/>
           <p:cNvSpPr txBox="1"/>
           <p:nvPr/>
         </p:nvSpPr>
@@ -15041,7 +15248,7 @@
       </p:sp>
       <p:sp>
         <p:nvSpPr>
-          <p:cNvPr id="22" name="Text 19"/>
+          <p:cNvPr id="32" name="Text 30"/>
           <p:cNvSpPr txBox="1"/>
           <p:nvPr/>
         </p:nvSpPr>
@@ -15077,7 +15284,7 @@
       </p:sp>
       <p:sp>
         <p:nvSpPr>
-          <p:cNvPr id="23" name="Shape 20"/>
+          <p:cNvPr id="33" name="Shape 31"/>
           <p:cNvSpPr/>
           <p:nvPr/>
         </p:nvSpPr>
@@ -15100,7 +15307,7 @@
       </p:sp>
       <p:sp>
         <p:nvSpPr>
-          <p:cNvPr id="24" name="Shape 21"/>
+          <p:cNvPr id="34" name="Shape 32"/>
           <p:cNvSpPr/>
           <p:nvPr/>
         </p:nvSpPr>
@@ -15127,7 +15334,7 @@
       </p:sp>
       <p:sp>
         <p:nvSpPr>
-          <p:cNvPr id="25" name="Text 22"/>
+          <p:cNvPr id="35" name="Text 33"/>
           <p:cNvSpPr txBox="1"/>
           <p:nvPr/>
         </p:nvSpPr>
@@ -15166,7 +15373,7 @@
       </p:sp>
       <p:sp>
         <p:nvSpPr>
-          <p:cNvPr id="26" name="Text 23"/>
+          <p:cNvPr id="36" name="Text 34"/>
           <p:cNvSpPr txBox="1"/>
           <p:nvPr/>
         </p:nvSpPr>
@@ -15202,14 +15409,14 @@
       </p:sp>
       <p:sp>
         <p:nvSpPr>
-          <p:cNvPr id="27" name="Shape 24"/>
+          <p:cNvPr id="37" name="Shape 35"/>
           <p:cNvSpPr/>
           <p:nvPr/>
         </p:nvSpPr>
         <p:spPr>
           <a:xfrm>
-            <a:off x="3781044" y="6766560"/>
-            <a:ext cx="0" cy="274320"/>
+            <a:off x="3781044" y="5760720"/>
+            <a:ext cx="0" cy="1143000"/>
           </a:xfrm>
           <a:prstGeom prst="line">
             <a:avLst/>
@@ -15225,7 +15432,7 @@
       </p:sp>
       <p:sp>
         <p:nvSpPr>
-          <p:cNvPr id="28" name="Shape 25"/>
+          <p:cNvPr id="38" name="Shape 36"/>
           <p:cNvSpPr/>
           <p:nvPr/>
         </p:nvSpPr>
@@ -15252,7 +15459,7 @@
       </p:sp>
       <p:sp>
         <p:nvSpPr>
-          <p:cNvPr id="29" name="Text 26"/>
+          <p:cNvPr id="39" name="Text 37"/>
           <p:cNvSpPr txBox="1"/>
           <p:nvPr/>
         </p:nvSpPr>
@@ -15291,7 +15498,7 @@
       </p:sp>
       <p:sp>
         <p:nvSpPr>
-          <p:cNvPr id="30" name="Text 27"/>
+          <p:cNvPr id="40" name="Text 38"/>
           <p:cNvSpPr txBox="1"/>
           <p:nvPr/>
         </p:nvSpPr>
@@ -15327,7 +15534,7 @@
       </p:sp>
       <p:sp>
         <p:nvSpPr>
-          <p:cNvPr id="31" name="Shape 28"/>
+          <p:cNvPr id="41" name="Shape 39"/>
           <p:cNvSpPr/>
           <p:nvPr/>
         </p:nvSpPr>
@@ -15354,7 +15561,7 @@
       </p:sp>
       <p:sp>
         <p:nvSpPr>
-          <p:cNvPr id="32" name="Text 29"/>
+          <p:cNvPr id="42" name="Text 40"/>
           <p:cNvSpPr txBox="1"/>
           <p:nvPr/>
         </p:nvSpPr>
@@ -15393,7 +15600,7 @@
       </p:sp>
       <p:sp>
         <p:nvSpPr>
-          <p:cNvPr id="33" name="Text 30"/>
+          <p:cNvPr id="43" name="Text 41"/>
           <p:cNvSpPr txBox="1"/>
           <p:nvPr/>
         </p:nvSpPr>
@@ -15429,7 +15636,7 @@
       </p:sp>
       <p:sp>
         <p:nvSpPr>
-          <p:cNvPr id="34" name="Shape 31"/>
+          <p:cNvPr id="44" name="Shape 42"/>
           <p:cNvSpPr/>
           <p:nvPr/>
         </p:nvSpPr>
@@ -15456,7 +15663,7 @@
       </p:sp>
       <p:sp>
         <p:nvSpPr>
-          <p:cNvPr id="35" name="Text 32"/>
+          <p:cNvPr id="45" name="Text 43"/>
           <p:cNvSpPr txBox="1"/>
           <p:nvPr/>
         </p:nvSpPr>
@@ -15495,7 +15702,7 @@
       </p:sp>
       <p:sp>
         <p:nvSpPr>
-          <p:cNvPr id="36" name="Text 33"/>
+          <p:cNvPr id="46" name="Text 44"/>
           <p:cNvSpPr txBox="1"/>
           <p:nvPr/>
         </p:nvSpPr>
@@ -15531,13 +15738,13 @@
       </p:sp>
       <p:sp>
         <p:nvSpPr>
-          <p:cNvPr id="37" name="Shape 34"/>
+          <p:cNvPr id="47" name="Shape 45"/>
           <p:cNvSpPr/>
           <p:nvPr/>
         </p:nvSpPr>
         <p:spPr>
           <a:xfrm>
-            <a:off x="1549908" y="7040880"/>
+            <a:off x="1549908" y="6903720"/>
             <a:ext cx="4462272" cy="0"/>
           </a:xfrm>
           <a:prstGeom prst="line">
@@ -15554,7 +15761,76 @@
       </p:sp>
       <p:sp>
         <p:nvSpPr>
-          <p:cNvPr id="38" name="Shape 35"/>
+          <p:cNvPr id="48" name="Shape 46"/>
+          <p:cNvSpPr/>
+          <p:nvPr/>
+        </p:nvSpPr>
+        <p:spPr>
+          <a:xfrm>
+            <a:off x="1549908" y="6903720"/>
+            <a:ext cx="0" cy="137160"/>
+          </a:xfrm>
+          <a:prstGeom prst="line">
+            <a:avLst/>
+          </a:prstGeom>
+          <a:noFill/>
+          <a:ln w="12700">
+            <a:solidFill>
+              <a:schemeClr val="accent3"/>
+            </a:solidFill>
+            <a:prstDash val="solid"/>
+          </a:ln>
+        </p:spPr>
+      </p:sp>
+      <p:sp>
+        <p:nvSpPr>
+          <p:cNvPr id="49" name="Shape 47"/>
+          <p:cNvSpPr/>
+          <p:nvPr/>
+        </p:nvSpPr>
+        <p:spPr>
+          <a:xfrm>
+            <a:off x="3781044" y="6903720"/>
+            <a:ext cx="0" cy="137160"/>
+          </a:xfrm>
+          <a:prstGeom prst="line">
+            <a:avLst/>
+          </a:prstGeom>
+          <a:noFill/>
+          <a:ln w="12700">
+            <a:solidFill>
+              <a:schemeClr val="accent3"/>
+            </a:solidFill>
+            <a:prstDash val="solid"/>
+          </a:ln>
+        </p:spPr>
+      </p:sp>
+      <p:sp>
+        <p:nvSpPr>
+          <p:cNvPr id="50" name="Shape 48"/>
+          <p:cNvSpPr/>
+          <p:nvPr/>
+        </p:nvSpPr>
+        <p:spPr>
+          <a:xfrm>
+            <a:off x="6012180" y="6903720"/>
+            <a:ext cx="0" cy="137160"/>
+          </a:xfrm>
+          <a:prstGeom prst="line">
+            <a:avLst/>
+          </a:prstGeom>
+          <a:noFill/>
+          <a:ln w="12700">
+            <a:solidFill>
+              <a:schemeClr val="accent3"/>
+            </a:solidFill>
+            <a:prstDash val="solid"/>
+          </a:ln>
+        </p:spPr>
+      </p:sp>
+      <p:sp>
+        <p:nvSpPr>
+          <p:cNvPr id="51" name="Shape 49"/>
           <p:cNvSpPr/>
           <p:nvPr/>
         </p:nvSpPr>
@@ -15581,7 +15857,7 @@
       </p:sp>
       <p:sp>
         <p:nvSpPr>
-          <p:cNvPr id="39" name="Text 36"/>
+          <p:cNvPr id="52" name="Text 50"/>
           <p:cNvSpPr txBox="1"/>
           <p:nvPr/>
         </p:nvSpPr>
@@ -15620,7 +15896,7 @@
       </p:sp>
       <p:sp>
         <p:nvSpPr>
-          <p:cNvPr id="40" name="Text 37"/>
+          <p:cNvPr id="53" name="Text 51"/>
           <p:cNvSpPr txBox="1"/>
           <p:nvPr/>
         </p:nvSpPr>
@@ -16526,7 +16802,7 @@
       </p:sp>
       <p:pic>
         <p:nvPicPr>
-          <p:cNvPr id="4" name="photo img28.jpg" descr="Xe nâng người cắt kéo">    </p:cNvPr>
+          <p:cNvPr id="4" name="photo img28.jpg" descr="Xe nâng người cắt kéo tại nhà xưởng">    </p:cNvPr>
           <p:cNvPicPr>
             <a:picLocks noChangeAspect="1"/>
           </p:cNvPicPr>
@@ -16541,7 +16817,7 @@
         <p:spPr>
           <a:xfrm>
             <a:off x="502920" y="1463040"/>
-            <a:ext cx="2063496" cy="2377440"/>
+            <a:ext cx="3186684" cy="2377440"/>
           </a:xfrm>
           <a:prstGeom prst="rect">
             <a:avLst/>
@@ -16557,7 +16833,7 @@
         <p:spPr>
           <a:xfrm>
             <a:off x="502920" y="3877056"/>
-            <a:ext cx="2063496" cy="201168"/>
+            <a:ext cx="3186684" cy="201168"/>
           </a:xfrm>
           <a:prstGeom prst="rect">
             <a:avLst/>
@@ -16580,133 +16856,169 @@
                   <a:schemeClr val="accent3"/>
                 </a:solidFill>
               </a:rPr>
-              <a:t>Xe nâng người cắt kéo</a:t>
+              <a:t>Xe nâng người cắt kéo tại nhà xưởng</a:t>
             </a:r>
             <a:endParaRPr lang="en-US" sz="800" dirty="0"/>
           </a:p>
         </p:txBody>
       </p:sp>
-      <p:pic>
-        <p:nvPicPr>
-          <p:cNvPr id="6" name="photo img13.jpg" descr="Giàn giáo di động">    </p:cNvPr>
-          <p:cNvPicPr>
-            <a:picLocks noChangeAspect="1"/>
-          </p:cNvPicPr>
-          <p:nvPr/>
-        </p:nvPicPr>
-        <p:blipFill>
-          <a:blip r:embed="rId2"/>
-          <a:stretch>
-            <a:fillRect/>
-          </a:stretch>
-        </p:blipFill>
-        <p:spPr>
-          <a:xfrm>
-            <a:off x="2749296" y="1463040"/>
-            <a:ext cx="2063496" cy="2377440"/>
-          </a:xfrm>
-          <a:prstGeom prst="rect">
-            <a:avLst/>
-          </a:prstGeom>
-        </p:spPr>
-      </p:pic>
-      <p:sp>
-        <p:nvSpPr>
-          <p:cNvPr id="7" name="Text 3"/>
-          <p:cNvSpPr txBox="1"/>
-          <p:nvPr/>
-        </p:nvSpPr>
-        <p:spPr>
-          <a:xfrm>
-            <a:off x="2749296" y="3877056"/>
-            <a:ext cx="2063496" cy="201168"/>
-          </a:xfrm>
-          <a:prstGeom prst="rect">
-            <a:avLst/>
-          </a:prstGeom>
-          <a:noFill/>
-          <a:ln/>
-        </p:spPr>
-        <p:txBody>
-          <a:bodyPr wrap="square" lIns="0" tIns="0" rIns="0" bIns="0" rtlCol="0" anchor="ctr">
-            <a:normAutofit/>
-          </a:bodyPr>
+      <p:sp>
+        <p:nvSpPr>
+          <p:cNvPr id="6" name="Shape 3"/>
+          <p:cNvSpPr/>
+          <p:nvPr/>
+        </p:nvSpPr>
+        <p:spPr>
+          <a:xfrm>
+            <a:off x="3872484" y="1463040"/>
+            <a:ext cx="3186684" cy="2377440"/>
+          </a:xfrm>
+          <a:prstGeom prst="roundRect">
+            <a:avLst>
+              <a:gd name="adj" fmla="val 3077"/>
+            </a:avLst>
+          </a:prstGeom>
+          <a:solidFill>
+            <a:schemeClr val="tx2"/>
+          </a:solidFill>
+          <a:ln w="12700">
+            <a:solidFill>
+              <a:schemeClr val="tx2"/>
+            </a:solidFill>
+            <a:prstDash val="solid"/>
+          </a:ln>
+        </p:spPr>
+      </p:sp>
+      <p:sp>
+        <p:nvSpPr>
+          <p:cNvPr id="7" name="Text 4"/>
+          <p:cNvSpPr txBox="1"/>
+          <p:nvPr/>
+        </p:nvSpPr>
+        <p:spPr>
+          <a:xfrm>
+            <a:off x="4101084" y="1627632"/>
+            <a:ext cx="2729484" cy="274320"/>
+          </a:xfrm>
+          <a:prstGeom prst="rect">
+            <a:avLst/>
+          </a:prstGeom>
+          <a:noFill/>
+          <a:ln/>
+        </p:spPr>
+        <p:txBody>
+          <a:bodyPr wrap="square" lIns="0" tIns="0" rIns="0" bIns="0" rtlCol="0" anchor="ctr"/>
           <a:lstStyle/>
           <a:p>
             <a:pPr indent="0" marL="0">
               <a:buNone/>
             </a:pPr>
             <a:r>
-              <a:rPr lang="en-US" sz="800" i="1" dirty="0">
-                <a:solidFill>
-                  <a:schemeClr val="accent3"/>
-                </a:solidFill>
-              </a:rPr>
-              <a:t>Giàn giáo di động</a:t>
-            </a:r>
-            <a:endParaRPr lang="en-US" sz="800" dirty="0"/>
-          </a:p>
-        </p:txBody>
-      </p:sp>
-      <p:pic>
-        <p:nvPicPr>
-          <p:cNvPr id="8" name="photo img10.jpg" descr="Máy cắt, dụng cụ cầm tay">    </p:cNvPr>
-          <p:cNvPicPr>
-            <a:picLocks noChangeAspect="1"/>
-          </p:cNvPicPr>
-          <p:nvPr/>
-        </p:nvPicPr>
-        <p:blipFill>
-          <a:blip r:embed="rId3"/>
-          <a:stretch>
-            <a:fillRect/>
-          </a:stretch>
-        </p:blipFill>
-        <p:spPr>
-          <a:xfrm>
-            <a:off x="4995672" y="1463040"/>
-            <a:ext cx="2063496" cy="2377440"/>
-          </a:xfrm>
-          <a:prstGeom prst="rect">
-            <a:avLst/>
-          </a:prstGeom>
-        </p:spPr>
-      </p:pic>
-      <p:sp>
-        <p:nvSpPr>
-          <p:cNvPr id="9" name="Text 4"/>
-          <p:cNvSpPr txBox="1"/>
-          <p:nvPr/>
-        </p:nvSpPr>
-        <p:spPr>
-          <a:xfrm>
-            <a:off x="4995672" y="3877056"/>
-            <a:ext cx="2063496" cy="201168"/>
-          </a:xfrm>
-          <a:prstGeom prst="rect">
-            <a:avLst/>
-          </a:prstGeom>
-          <a:noFill/>
-          <a:ln/>
-        </p:spPr>
-        <p:txBody>
-          <a:bodyPr wrap="square" lIns="0" tIns="0" rIns="0" bIns="0" rtlCol="0" anchor="ctr">
-            <a:normAutofit/>
-          </a:bodyPr>
-          <a:lstStyle/>
-          <a:p>
-            <a:pPr indent="0" marL="0">
-              <a:buNone/>
-            </a:pPr>
-            <a:r>
-              <a:rPr lang="en-US" sz="800" i="1" dirty="0">
-                <a:solidFill>
-                  <a:schemeClr val="accent3"/>
-                </a:solidFill>
-              </a:rPr>
-              <a:t>Máy cắt, dụng cụ cầm tay</a:t>
-            </a:r>
-            <a:endParaRPr lang="en-US" sz="800" dirty="0"/>
+              <a:rPr lang="en-US" sz="1200" b="1" spc="100" kern="0" dirty="0">
+                <a:solidFill>
+                  <a:schemeClr val="accent1"/>
+                </a:solidFill>
+                <a:latin typeface="Arial" pitchFamily="34" charset="0"/>
+                <a:ea typeface="Arial" pitchFamily="34" charset="-122"/>
+                <a:cs typeface="Arial" pitchFamily="34" charset="-120"/>
+              </a:rPr>
+              <a:t>CHỦ ĐỘNG THIẾT BỊ</a:t>
+            </a:r>
+            <a:endParaRPr lang="en-US" sz="1200" dirty="0"/>
+          </a:p>
+        </p:txBody>
+      </p:sp>
+      <p:sp>
+        <p:nvSpPr>
+          <p:cNvPr id="8" name="Text 5"/>
+          <p:cNvSpPr txBox="1"/>
+          <p:nvPr/>
+        </p:nvSpPr>
+        <p:spPr>
+          <a:xfrm>
+            <a:off x="4101084" y="2011680"/>
+            <a:ext cx="2729484" cy="1691640"/>
+          </a:xfrm>
+          <a:prstGeom prst="rect">
+            <a:avLst/>
+          </a:prstGeom>
+          <a:noFill/>
+          <a:ln/>
+        </p:spPr>
+        <p:txBody>
+          <a:bodyPr wrap="square" lIns="0" tIns="0" rIns="0" bIns="0" rtlCol="0" anchor="t"/>
+          <a:lstStyle/>
+          <a:p>
+            <a:pPr marL="152400" indent="-152400">
+              <a:spcAft>
+                <a:spcPts val="500"/>
+              </a:spcAft>
+              <a:buSzPct val="100000"/>
+              <a:buChar char="•"/>
+            </a:pPr>
+            <a:r>
+              <a:rPr lang="en-US" sz="1000" dirty="0">
+                <a:solidFill>
+                  <a:schemeClr val="bg1"/>
+                </a:solidFill>
+              </a:rPr>
+              <a:t>Thiết bị làm việc trên cao cho trần nhà xưởng</a:t>
+            </a:r>
+            <a:endParaRPr lang="en-US" sz="1000" dirty="0"/>
+          </a:p>
+          <a:p>
+            <a:pPr marL="152400" indent="-152400">
+              <a:spcAft>
+                <a:spcPts val="500"/>
+              </a:spcAft>
+              <a:buSzPct val="100000"/>
+              <a:buChar char="•"/>
+            </a:pPr>
+            <a:r>
+              <a:rPr lang="en-US" sz="1000" dirty="0">
+                <a:solidFill>
+                  <a:schemeClr val="bg1"/>
+                </a:solidFill>
+              </a:rPr>
+              <a:t>Máy hàn PPR, máy khoan, máy cắt chuyên dụng</a:t>
+            </a:r>
+            <a:endParaRPr lang="en-US" sz="1000" dirty="0"/>
+          </a:p>
+          <a:p>
+            <a:pPr marL="152400" indent="-152400">
+              <a:spcAft>
+                <a:spcPts val="500"/>
+              </a:spcAft>
+              <a:buSzPct val="100000"/>
+              <a:buChar char="•"/>
+            </a:pPr>
+            <a:r>
+              <a:rPr lang="en-US" sz="1000" dirty="0">
+                <a:solidFill>
+                  <a:schemeClr val="bg1"/>
+                </a:solidFill>
+              </a:rPr>
+              <a:t>Dụng cụ đo kiểm điện, bơm thử áp lực</a:t>
+            </a:r>
+            <a:endParaRPr lang="en-US" sz="1000" dirty="0"/>
+          </a:p>
+          <a:p>
+            <a:pPr marL="152400" indent="-152400">
+              <a:spcAft>
+                <a:spcPts val="500"/>
+              </a:spcAft>
+              <a:buSzPct val="100000"/>
+              <a:buChar char="•"/>
+            </a:pPr>
+            <a:r>
+              <a:rPr lang="en-US" sz="1000" dirty="0">
+                <a:solidFill>
+                  <a:schemeClr val="bg1"/>
+                </a:solidFill>
+              </a:rPr>
+              <a:t>Huy động thêm theo quy mô công trình</a:t>
+            </a:r>
+            <a:endParaRPr lang="en-US" sz="1000" dirty="0"/>
           </a:p>
         </p:txBody>
       </p:sp>
@@ -19450,7 +19762,7 @@
       </p:graphicFrame>
       <p:sp>
         <p:nvSpPr>
-          <p:cNvPr id="11" name="Text 5"/>
+          <p:cNvPr id="10" name="Text 6"/>
           <p:cNvSpPr txBox="1"/>
           <p:nvPr/>
         </p:nvSpPr>
@@ -20288,7 +20600,7 @@
         <p:spPr>
           <a:xfrm>
             <a:off x="502920" y="3200400"/>
-            <a:ext cx="3186684" cy="3108960"/>
+            <a:ext cx="2063496" cy="4343400"/>
           </a:xfrm>
           <a:prstGeom prst="rect">
             <a:avLst/>
@@ -20303,8 +20615,8 @@
         </p:nvSpPr>
         <p:spPr>
           <a:xfrm>
-            <a:off x="502920" y="6345936"/>
-            <a:ext cx="3186684" cy="201168"/>
+            <a:off x="502920" y="7580376"/>
+            <a:ext cx="2063496" cy="201168"/>
           </a:xfrm>
           <a:prstGeom prst="rect">
             <a:avLst/>
@@ -20335,7 +20647,7 @@
       </p:sp>
       <p:pic>
         <p:nvPicPr>
-          <p:cNvPr id="7" name="photo img34.jpg" descr="Lắp máy lọc sương dầu trên đầu máy">    </p:cNvPr>
+          <p:cNvPr id="7" name="photo img25.jpg" descr="Máy lọc lắp trên giá đỡ cột">    </p:cNvPr>
           <p:cNvPicPr>
             <a:picLocks noChangeAspect="1"/>
           </p:cNvPicPr>
@@ -20349,8 +20661,8 @@
         </p:blipFill>
         <p:spPr>
           <a:xfrm>
-            <a:off x="3872484" y="3200400"/>
-            <a:ext cx="3186684" cy="3108960"/>
+            <a:off x="2749296" y="3200400"/>
+            <a:ext cx="2063496" cy="4343400"/>
           </a:xfrm>
           <a:prstGeom prst="rect">
             <a:avLst/>
@@ -20365,8 +20677,8 @@
         </p:nvSpPr>
         <p:spPr>
           <a:xfrm>
-            <a:off x="3872484" y="6345936"/>
-            <a:ext cx="3186684" cy="201168"/>
+            <a:off x="2749296" y="7580376"/>
+            <a:ext cx="2063496" cy="201168"/>
           </a:xfrm>
           <a:prstGeom prst="rect">
             <a:avLst/>
@@ -20389,7 +20701,7 @@
                   <a:schemeClr val="accent3"/>
                 </a:solidFill>
               </a:rPr>
-              <a:t>Lắp máy lọc sương dầu trên đầu máy</a:t>
+              <a:t>Máy lọc lắp trên giá đỡ cột</a:t>
             </a:r>
             <a:endParaRPr lang="en-US" sz="800" dirty="0"/>
           </a:p>
@@ -20397,7 +20709,7 @@
       </p:sp>
       <p:pic>
         <p:nvPicPr>
-          <p:cNvPr id="9" name="photo img40.jpg" descr="Thi công tuyến ống trên cao">    </p:cNvPr>
+          <p:cNvPr id="9" name="photo img39.jpg" descr="Đấu nối ống mềm xuống máy CNC">    </p:cNvPr>
           <p:cNvPicPr>
             <a:picLocks noChangeAspect="1"/>
           </p:cNvPicPr>
@@ -20411,8 +20723,8 @@
         </p:blipFill>
         <p:spPr>
           <a:xfrm>
-            <a:off x="502920" y="6675120"/>
-            <a:ext cx="2063496" cy="2926080"/>
+            <a:off x="4995672" y="3200400"/>
+            <a:ext cx="2063496" cy="4343400"/>
           </a:xfrm>
           <a:prstGeom prst="rect">
             <a:avLst/>
@@ -20427,7 +20739,7 @@
         </p:nvSpPr>
         <p:spPr>
           <a:xfrm>
-            <a:off x="502920" y="9637776"/>
+            <a:off x="4995672" y="7580376"/>
             <a:ext cx="2063496" cy="201168"/>
           </a:xfrm>
           <a:prstGeom prst="rect">
@@ -20451,133 +20763,169 @@
                   <a:schemeClr val="accent3"/>
                 </a:solidFill>
               </a:rPr>
-              <a:t>Thi công tuyến ống trên cao</a:t>
+              <a:t>Đấu nối ống mềm xuống máy CNC</a:t>
             </a:r>
             <a:endParaRPr lang="en-US" sz="800" dirty="0"/>
           </a:p>
         </p:txBody>
       </p:sp>
-      <p:pic>
-        <p:nvPicPr>
-          <p:cNvPr id="11" name="photo img25.jpg" descr="Máy lọc lắp trên giá đỡ cột">    </p:cNvPr>
-          <p:cNvPicPr>
-            <a:picLocks noChangeAspect="1"/>
-          </p:cNvPicPr>
-          <p:nvPr/>
-        </p:nvPicPr>
-        <p:blipFill>
-          <a:blip r:embed="rId4"/>
-          <a:stretch>
-            <a:fillRect/>
-          </a:stretch>
-        </p:blipFill>
-        <p:spPr>
-          <a:xfrm>
-            <a:off x="2749296" y="6675120"/>
-            <a:ext cx="2063496" cy="2926080"/>
-          </a:xfrm>
-          <a:prstGeom prst="rect">
-            <a:avLst/>
-          </a:prstGeom>
-        </p:spPr>
-      </p:pic>
-      <p:sp>
-        <p:nvSpPr>
-          <p:cNvPr id="12" name="Text 5"/>
-          <p:cNvSpPr txBox="1"/>
-          <p:nvPr/>
-        </p:nvSpPr>
-        <p:spPr>
-          <a:xfrm>
-            <a:off x="2749296" y="9637776"/>
-            <a:ext cx="2063496" cy="201168"/>
-          </a:xfrm>
-          <a:prstGeom prst="rect">
-            <a:avLst/>
-          </a:prstGeom>
-          <a:noFill/>
-          <a:ln/>
-        </p:spPr>
-        <p:txBody>
-          <a:bodyPr wrap="square" lIns="0" tIns="0" rIns="0" bIns="0" rtlCol="0" anchor="ctr">
-            <a:normAutofit/>
-          </a:bodyPr>
+      <p:sp>
+        <p:nvSpPr>
+          <p:cNvPr id="11" name="Shape 5"/>
+          <p:cNvSpPr/>
+          <p:nvPr/>
+        </p:nvSpPr>
+        <p:spPr>
+          <a:xfrm>
+            <a:off x="502920" y="8001000"/>
+            <a:ext cx="6556248" cy="1691640"/>
+          </a:xfrm>
+          <a:prstGeom prst="roundRect">
+            <a:avLst>
+              <a:gd name="adj" fmla="val 4324"/>
+            </a:avLst>
+          </a:prstGeom>
+          <a:solidFill>
+            <a:schemeClr val="bg2"/>
+          </a:solidFill>
+          <a:ln w="12700">
+            <a:solidFill>
+              <a:schemeClr val="bg2"/>
+            </a:solidFill>
+            <a:prstDash val="solid"/>
+          </a:ln>
+        </p:spPr>
+      </p:sp>
+      <p:sp>
+        <p:nvSpPr>
+          <p:cNvPr id="12" name="Text 6"/>
+          <p:cNvSpPr txBox="1"/>
+          <p:nvPr/>
+        </p:nvSpPr>
+        <p:spPr>
+          <a:xfrm>
+            <a:off x="731520" y="8119872"/>
+            <a:ext cx="6099048" cy="228600"/>
+          </a:xfrm>
+          <a:prstGeom prst="rect">
+            <a:avLst/>
+          </a:prstGeom>
+          <a:noFill/>
+          <a:ln/>
+        </p:spPr>
+        <p:txBody>
+          <a:bodyPr wrap="square" lIns="0" tIns="0" rIns="0" bIns="0" rtlCol="0" anchor="ctr"/>
           <a:lstStyle/>
           <a:p>
             <a:pPr indent="0" marL="0">
               <a:buNone/>
             </a:pPr>
             <a:r>
-              <a:rPr lang="en-US" sz="800" i="1" dirty="0">
-                <a:solidFill>
-                  <a:schemeClr val="accent3"/>
-                </a:solidFill>
-              </a:rPr>
-              <a:t>Máy lọc lắp trên giá đỡ cột</a:t>
-            </a:r>
-            <a:endParaRPr lang="en-US" sz="800" dirty="0"/>
-          </a:p>
-        </p:txBody>
-      </p:sp>
-      <p:pic>
-        <p:nvPicPr>
-          <p:cNvPr id="13" name="photo img39.jpg" descr="Đấu nối ống mềm xuống máy CNC">    </p:cNvPr>
-          <p:cNvPicPr>
-            <a:picLocks noChangeAspect="1"/>
-          </p:cNvPicPr>
-          <p:nvPr/>
-        </p:nvPicPr>
-        <p:blipFill>
-          <a:blip r:embed="rId5"/>
-          <a:stretch>
-            <a:fillRect/>
-          </a:stretch>
-        </p:blipFill>
-        <p:spPr>
-          <a:xfrm>
-            <a:off x="4995672" y="6675120"/>
-            <a:ext cx="2063496" cy="2926080"/>
-          </a:xfrm>
-          <a:prstGeom prst="rect">
-            <a:avLst/>
-          </a:prstGeom>
-        </p:spPr>
-      </p:pic>
-      <p:sp>
-        <p:nvSpPr>
-          <p:cNvPr id="14" name="Text 6"/>
-          <p:cNvSpPr txBox="1"/>
-          <p:nvPr/>
-        </p:nvSpPr>
-        <p:spPr>
-          <a:xfrm>
-            <a:off x="4995672" y="9637776"/>
-            <a:ext cx="2063496" cy="201168"/>
-          </a:xfrm>
-          <a:prstGeom prst="rect">
-            <a:avLst/>
-          </a:prstGeom>
-          <a:noFill/>
-          <a:ln/>
-        </p:spPr>
-        <p:txBody>
-          <a:bodyPr wrap="square" lIns="0" tIns="0" rIns="0" bIns="0" rtlCol="0" anchor="ctr">
-            <a:normAutofit/>
-          </a:bodyPr>
-          <a:lstStyle/>
-          <a:p>
-            <a:pPr indent="0" marL="0">
-              <a:buNone/>
-            </a:pPr>
-            <a:r>
-              <a:rPr lang="en-US" sz="800" i="1" dirty="0">
-                <a:solidFill>
-                  <a:schemeClr val="accent3"/>
-                </a:solidFill>
-              </a:rPr>
-              <a:t>Đấu nối ống mềm xuống máy CNC</a:t>
-            </a:r>
-            <a:endParaRPr lang="en-US" sz="800" dirty="0"/>
+              <a:rPr lang="en-US" sz="900" b="1" spc="200" kern="0" dirty="0">
+                <a:solidFill>
+                  <a:schemeClr val="tx2"/>
+                </a:solidFill>
+                <a:latin typeface="Arial" pitchFamily="34" charset="0"/>
+                <a:ea typeface="Arial" pitchFamily="34" charset="-122"/>
+                <a:cs typeface="Arial" pitchFamily="34" charset="-120"/>
+              </a:rPr>
+              <a:t>CÔNG VIỆC BLT ĐÃ THỰC HIỆN</a:t>
+            </a:r>
+            <a:endParaRPr lang="en-US" sz="900" dirty="0"/>
+          </a:p>
+        </p:txBody>
+      </p:sp>
+      <p:sp>
+        <p:nvSpPr>
+          <p:cNvPr id="13" name="Text 7"/>
+          <p:cNvSpPr txBox="1"/>
+          <p:nvPr/>
+        </p:nvSpPr>
+        <p:spPr>
+          <a:xfrm>
+            <a:off x="731520" y="8394192"/>
+            <a:ext cx="6099048" cy="1234440"/>
+          </a:xfrm>
+          <a:prstGeom prst="rect">
+            <a:avLst/>
+          </a:prstGeom>
+          <a:noFill/>
+          <a:ln/>
+        </p:spPr>
+        <p:txBody>
+          <a:bodyPr wrap="square" lIns="0" tIns="0" rIns="0" bIns="0" rtlCol="0" anchor="t"/>
+          <a:lstStyle/>
+          <a:p>
+            <a:pPr marL="152400" indent="-152400">
+              <a:spcAft>
+                <a:spcPts val="500"/>
+              </a:spcAft>
+              <a:buSzPct val="100000"/>
+              <a:buChar char="•"/>
+            </a:pPr>
+            <a:r>
+              <a:rPr lang="en-US" sz="1000" dirty="0">
+                <a:solidFill>
+                  <a:schemeClr val="tx1"/>
+                </a:solidFill>
+              </a:rPr>
+              <a:t>Khảo sát vị trí máy CNC, cao độ trần, lập tuyến ống hút chính và nhánh</a:t>
+            </a:r>
+            <a:endParaRPr lang="en-US" sz="1000" dirty="0"/>
+          </a:p>
+          <a:p>
+            <a:pPr marL="152400" indent="-152400">
+              <a:spcAft>
+                <a:spcPts val="500"/>
+              </a:spcAft>
+              <a:buSzPct val="100000"/>
+              <a:buChar char="•"/>
+            </a:pPr>
+            <a:r>
+              <a:rPr lang="en-US" sz="1000" dirty="0">
+                <a:solidFill>
+                  <a:schemeClr val="tx1"/>
+                </a:solidFill>
+              </a:rPr>
+              <a:t>Lắp ty treo, giá đỡ; thi công tuyến ống hút, co, chạc, ống mềm xuống từng máy</a:t>
+            </a:r>
+            <a:endParaRPr lang="en-US" sz="1000" dirty="0"/>
+          </a:p>
+          <a:p>
+            <a:pPr marL="152400" indent="-152400">
+              <a:spcAft>
+                <a:spcPts val="500"/>
+              </a:spcAft>
+              <a:buSzPct val="100000"/>
+              <a:buChar char="•"/>
+            </a:pPr>
+            <a:r>
+              <a:rPr lang="en-US" sz="1000" dirty="0">
+                <a:solidFill>
+                  <a:schemeClr val="tx1"/>
+                </a:solidFill>
+              </a:rPr>
+              <a:t>Lắp đặt máy lọc sương dầu trên đầu máy và trên giá đỡ thép tại cột</a:t>
+            </a:r>
+            <a:endParaRPr lang="en-US" sz="1000" dirty="0"/>
+          </a:p>
+          <a:p>
+            <a:pPr marL="152400" indent="-152400">
+              <a:spcAft>
+                <a:spcPts val="500"/>
+              </a:spcAft>
+              <a:buSzPct val="100000"/>
+              <a:buChar char="•"/>
+            </a:pPr>
+            <a:r>
+              <a:rPr lang="en-US" sz="1000" dirty="0">
+                <a:solidFill>
+                  <a:schemeClr val="tx1"/>
+                </a:solidFill>
+              </a:rPr>
+              <a:t>Làm kín mối nối, đấu nối nguồn điện, chạy thử và bàn giao từng khu vực</a:t>
+            </a:r>
+            <a:endParaRPr lang="en-US" sz="1000" dirty="0"/>
           </a:p>
         </p:txBody>
       </p:sp>
@@ -21503,7 +21851,7 @@
         <p:spPr>
           <a:xfrm>
             <a:off x="502920" y="6675120"/>
-            <a:ext cx="2063496" cy="2926080"/>
+            <a:ext cx="3186684" cy="2926080"/>
           </a:xfrm>
           <a:prstGeom prst="rect">
             <a:avLst/>
@@ -21519,7 +21867,7 @@
         <p:spPr>
           <a:xfrm>
             <a:off x="502920" y="9637776"/>
-            <a:ext cx="2063496" cy="201168"/>
+            <a:ext cx="3186684" cy="201168"/>
           </a:xfrm>
           <a:prstGeom prst="rect">
             <a:avLst/>
@@ -21564,8 +21912,8 @@
         </p:blipFill>
         <p:spPr>
           <a:xfrm>
-            <a:off x="2749296" y="6675120"/>
-            <a:ext cx="2063496" cy="2926080"/>
+            <a:off x="3872484" y="6675120"/>
+            <a:ext cx="3186684" cy="2926080"/>
           </a:xfrm>
           <a:prstGeom prst="rect">
             <a:avLst/>
@@ -21580,8 +21928,8 @@
         </p:nvSpPr>
         <p:spPr>
           <a:xfrm>
-            <a:off x="2749296" y="9637776"/>
-            <a:ext cx="2063496" cy="201168"/>
+            <a:off x="3872484" y="9637776"/>
+            <a:ext cx="3186684" cy="201168"/>
           </a:xfrm>
           <a:prstGeom prst="rect">
             <a:avLst/>
@@ -21605,68 +21953,6 @@
                 </a:solidFill>
               </a:rPr>
               <a:t>Tập kết vật tư ống, phụ kiện</a:t>
-            </a:r>
-            <a:endParaRPr lang="en-US" sz="800" dirty="0"/>
-          </a:p>
-        </p:txBody>
-      </p:sp>
-      <p:pic>
-        <p:nvPicPr>
-          <p:cNvPr id="13" name="photo img41.jpg" descr="Kéo ống trên xe nâng người">    </p:cNvPr>
-          <p:cNvPicPr>
-            <a:picLocks noChangeAspect="1"/>
-          </p:cNvPicPr>
-          <p:nvPr/>
-        </p:nvPicPr>
-        <p:blipFill>
-          <a:blip r:embed="rId5"/>
-          <a:stretch>
-            <a:fillRect/>
-          </a:stretch>
-        </p:blipFill>
-        <p:spPr>
-          <a:xfrm>
-            <a:off x="4995672" y="6675120"/>
-            <a:ext cx="2063496" cy="2926080"/>
-          </a:xfrm>
-          <a:prstGeom prst="rect">
-            <a:avLst/>
-          </a:prstGeom>
-        </p:spPr>
-      </p:pic>
-      <p:sp>
-        <p:nvSpPr>
-          <p:cNvPr id="14" name="Text 6"/>
-          <p:cNvSpPr txBox="1"/>
-          <p:nvPr/>
-        </p:nvSpPr>
-        <p:spPr>
-          <a:xfrm>
-            <a:off x="4995672" y="9637776"/>
-            <a:ext cx="2063496" cy="201168"/>
-          </a:xfrm>
-          <a:prstGeom prst="rect">
-            <a:avLst/>
-          </a:prstGeom>
-          <a:noFill/>
-          <a:ln/>
-        </p:spPr>
-        <p:txBody>
-          <a:bodyPr wrap="square" lIns="0" tIns="0" rIns="0" bIns="0" rtlCol="0" anchor="ctr">
-            <a:normAutofit/>
-          </a:bodyPr>
-          <a:lstStyle/>
-          <a:p>
-            <a:pPr indent="0" marL="0">
-              <a:buNone/>
-            </a:pPr>
-            <a:r>
-              <a:rPr lang="en-US" sz="800" i="1" dirty="0">
-                <a:solidFill>
-                  <a:schemeClr val="accent3"/>
-                </a:solidFill>
-              </a:rPr>
-              <a:t>Kéo ống trên xe nâng người</a:t>
             </a:r>
             <a:endParaRPr lang="en-US" sz="800" dirty="0"/>
           </a:p>
@@ -22455,7 +22741,7 @@
       </p:graphicFrame>
       <p:pic>
         <p:nvPicPr>
-          <p:cNvPr id="5" name="photo img45.jpg" descr="Đội BLT tiếp nhận, mở kiện thiết bị">    </p:cNvPr>
+          <p:cNvPr id="5" name="photo img48.jpg" descr="Lắp bơm định lượng hóa chất">    </p:cNvPr>
           <p:cNvPicPr>
             <a:picLocks noChangeAspect="1"/>
           </p:cNvPicPr>
@@ -22509,7 +22795,7 @@
                   <a:schemeClr val="accent3"/>
                 </a:solidFill>
               </a:rPr>
-              <a:t>Đội BLT tiếp nhận, mở kiện thiết bị</a:t>
+              <a:t>Lắp bơm định lượng hóa chất</a:t>
             </a:r>
             <a:endParaRPr lang="en-US" sz="800" dirty="0"/>
           </a:p>
@@ -22594,7 +22880,7 @@
         <p:spPr>
           <a:xfrm>
             <a:off x="502920" y="6309360"/>
-            <a:ext cx="2063496" cy="3291840"/>
+            <a:ext cx="3186684" cy="3291840"/>
           </a:xfrm>
           <a:prstGeom prst="rect">
             <a:avLst/>
@@ -22610,7 +22896,7 @@
         <p:spPr>
           <a:xfrm>
             <a:off x="502920" y="9637776"/>
-            <a:ext cx="2063496" cy="201168"/>
+            <a:ext cx="3186684" cy="201168"/>
           </a:xfrm>
           <a:prstGeom prst="rect">
             <a:avLst/>
@@ -22641,7 +22927,7 @@
       </p:sp>
       <p:pic>
         <p:nvPicPr>
-          <p:cNvPr id="11" name="photo img48.jpg" descr="Lắp bơm định lượng hóa chất">    </p:cNvPr>
+          <p:cNvPr id="11" name="photo img60.jpg" descr="Bồn hóa chất, máy khuấy và hệ màng UF/RO">    </p:cNvPr>
           <p:cNvPicPr>
             <a:picLocks noChangeAspect="1"/>
           </p:cNvPicPr>
@@ -22655,8 +22941,8 @@
         </p:blipFill>
         <p:spPr>
           <a:xfrm>
-            <a:off x="2749296" y="6309360"/>
-            <a:ext cx="2063496" cy="3291840"/>
+            <a:off x="3872484" y="6309360"/>
+            <a:ext cx="3186684" cy="3291840"/>
           </a:xfrm>
           <a:prstGeom prst="rect">
             <a:avLst/>
@@ -22671,8 +22957,8 @@
         </p:nvSpPr>
         <p:spPr>
           <a:xfrm>
-            <a:off x="2749296" y="9637776"/>
-            <a:ext cx="2063496" cy="201168"/>
+            <a:off x="3872484" y="9637776"/>
+            <a:ext cx="3186684" cy="201168"/>
           </a:xfrm>
           <a:prstGeom prst="rect">
             <a:avLst/>
@@ -22695,69 +22981,7 @@
                   <a:schemeClr val="accent3"/>
                 </a:solidFill>
               </a:rPr>
-              <a:t>Lắp bơm định lượng hóa chất</a:t>
-            </a:r>
-            <a:endParaRPr lang="en-US" sz="800" dirty="0"/>
-          </a:p>
-        </p:txBody>
-      </p:sp>
-      <p:pic>
-        <p:nvPicPr>
-          <p:cNvPr id="13" name="photo img56.jpg" descr="Chỉ huy và đội thi công tại trạm (19/09/2026)">    </p:cNvPr>
-          <p:cNvPicPr>
-            <a:picLocks noChangeAspect="1"/>
-          </p:cNvPicPr>
-          <p:nvPr/>
-        </p:nvPicPr>
-        <p:blipFill>
-          <a:blip r:embed="rId5"/>
-          <a:stretch>
-            <a:fillRect/>
-          </a:stretch>
-        </p:blipFill>
-        <p:spPr>
-          <a:xfrm>
-            <a:off x="4995672" y="6309360"/>
-            <a:ext cx="2063496" cy="3291840"/>
-          </a:xfrm>
-          <a:prstGeom prst="rect">
-            <a:avLst/>
-          </a:prstGeom>
-        </p:spPr>
-      </p:pic>
-      <p:sp>
-        <p:nvSpPr>
-          <p:cNvPr id="14" name="Text 6"/>
-          <p:cNvSpPr txBox="1"/>
-          <p:nvPr/>
-        </p:nvSpPr>
-        <p:spPr>
-          <a:xfrm>
-            <a:off x="4995672" y="9637776"/>
-            <a:ext cx="2063496" cy="201168"/>
-          </a:xfrm>
-          <a:prstGeom prst="rect">
-            <a:avLst/>
-          </a:prstGeom>
-          <a:noFill/>
-          <a:ln/>
-        </p:spPr>
-        <p:txBody>
-          <a:bodyPr wrap="square" lIns="0" tIns="0" rIns="0" bIns="0" rtlCol="0" anchor="ctr">
-            <a:normAutofit/>
-          </a:bodyPr>
-          <a:lstStyle/>
-          <a:p>
-            <a:pPr indent="0" marL="0">
-              <a:buNone/>
-            </a:pPr>
-            <a:r>
-              <a:rPr lang="en-US" sz="800" i="1" dirty="0">
-                <a:solidFill>
-                  <a:schemeClr val="accent3"/>
-                </a:solidFill>
-              </a:rPr>
-              <a:t>Chỉ huy và đội thi công tại trạm (19/09/2026)</a:t>
+              <a:t>Bồn hóa chất, máy khuấy và hệ màng UF/RO</a:t>
             </a:r>
             <a:endParaRPr lang="en-US" sz="800" dirty="0"/>
           </a:p>
@@ -22937,7 +23161,7 @@
                 <a:gridCol w="2578608"/>
                 <a:gridCol w="960120"/>
               </a:tblGrid>
-              <a:tr h="411480">
+              <a:tr h="457200">
                 <a:tc>
                   <a:txBody>
                     <a:bodyPr/>
@@ -23183,7 +23407,7 @@
                   </a:tcPr>
                 </a:tc>
               </a:tr>
-              <a:tr h="777240">
+              <a:tr h="914400">
                 <a:tc>
                   <a:txBody>
                     <a:bodyPr/>
@@ -23443,7 +23667,7 @@
                   </a:tcPr>
                 </a:tc>
               </a:tr>
-              <a:tr h="777240">
+              <a:tr h="914400">
                 <a:tc>
                   <a:txBody>
                     <a:bodyPr/>
@@ -23703,7 +23927,7 @@
                   </a:tcPr>
                 </a:tc>
               </a:tr>
-              <a:tr h="777240">
+              <a:tr h="914400">
                 <a:tc>
                   <a:txBody>
                     <a:bodyPr/>
@@ -23967,195 +24191,762 @@
           </a:graphicData>
         </a:graphic>
       </p:graphicFrame>
-      <p:pic>
-        <p:nvPicPr>
-          <p:cNvPr id="5" name="photo img19.jpg" descr="Nghệ An – hút sương dầu">    </p:cNvPr>
-          <p:cNvPicPr>
-            <a:picLocks noChangeAspect="1"/>
-          </p:cNvPicPr>
-          <p:nvPr/>
-        </p:nvPicPr>
-        <p:blipFill>
-          <a:blip r:embed="rId1"/>
-          <a:stretch>
-            <a:fillRect/>
-          </a:stretch>
-        </p:blipFill>
-        <p:spPr>
-          <a:xfrm>
-            <a:off x="502920" y="4892040"/>
-            <a:ext cx="2063496" cy="2926080"/>
-          </a:xfrm>
-          <a:prstGeom prst="rect">
-            <a:avLst/>
-          </a:prstGeom>
-        </p:spPr>
-      </p:pic>
-      <p:sp>
-        <p:nvSpPr>
-          <p:cNvPr id="6" name="Text 2"/>
-          <p:cNvSpPr txBox="1"/>
-          <p:nvPr/>
-        </p:nvSpPr>
-        <p:spPr>
-          <a:xfrm>
-            <a:off x="502920" y="7854696"/>
-            <a:ext cx="2063496" cy="201168"/>
-          </a:xfrm>
-          <a:prstGeom prst="rect">
-            <a:avLst/>
-          </a:prstGeom>
-          <a:noFill/>
-          <a:ln/>
-        </p:spPr>
-        <p:txBody>
-          <a:bodyPr wrap="square" lIns="0" tIns="0" rIns="0" bIns="0" rtlCol="0" anchor="ctr">
-            <a:normAutofit/>
-          </a:bodyPr>
+      <p:sp>
+        <p:nvSpPr>
+          <p:cNvPr id="5" name="Text 2"/>
+          <p:cNvSpPr txBox="1"/>
+          <p:nvPr/>
+        </p:nvSpPr>
+        <p:spPr>
+          <a:xfrm>
+            <a:off x="502920" y="5120640"/>
+            <a:ext cx="6556248" cy="228600"/>
+          </a:xfrm>
+          <a:prstGeom prst="rect">
+            <a:avLst/>
+          </a:prstGeom>
+          <a:noFill/>
+          <a:ln/>
+        </p:spPr>
+        <p:txBody>
+          <a:bodyPr wrap="square" lIns="0" tIns="0" rIns="0" bIns="0" rtlCol="0" anchor="ctr"/>
           <a:lstStyle/>
           <a:p>
             <a:pPr indent="0" marL="0">
               <a:buNone/>
             </a:pPr>
             <a:r>
-              <a:rPr lang="en-US" sz="800" i="1" dirty="0">
-                <a:solidFill>
-                  <a:schemeClr val="accent3"/>
-                </a:solidFill>
-              </a:rPr>
-              <a:t>Nghệ An – hút sương dầu</a:t>
-            </a:r>
-            <a:endParaRPr lang="en-US" sz="800" dirty="0"/>
-          </a:p>
-        </p:txBody>
-      </p:sp>
-      <p:pic>
-        <p:nvPicPr>
-          <p:cNvPr id="7" name="photo img07.jpg" descr="Ninh Bình – điện nước">    </p:cNvPr>
-          <p:cNvPicPr>
-            <a:picLocks noChangeAspect="1"/>
-          </p:cNvPicPr>
-          <p:nvPr/>
-        </p:nvPicPr>
-        <p:blipFill>
-          <a:blip r:embed="rId2"/>
-          <a:stretch>
-            <a:fillRect/>
-          </a:stretch>
-        </p:blipFill>
-        <p:spPr>
-          <a:xfrm>
-            <a:off x="2749296" y="4892040"/>
-            <a:ext cx="2063496" cy="2926080"/>
-          </a:xfrm>
-          <a:prstGeom prst="rect">
-            <a:avLst/>
-          </a:prstGeom>
-        </p:spPr>
-      </p:pic>
-      <p:sp>
-        <p:nvSpPr>
-          <p:cNvPr id="8" name="Text 3"/>
-          <p:cNvSpPr txBox="1"/>
-          <p:nvPr/>
-        </p:nvSpPr>
-        <p:spPr>
-          <a:xfrm>
-            <a:off x="2749296" y="7854696"/>
-            <a:ext cx="2063496" cy="201168"/>
-          </a:xfrm>
-          <a:prstGeom prst="rect">
-            <a:avLst/>
-          </a:prstGeom>
-          <a:noFill/>
-          <a:ln/>
-        </p:spPr>
-        <p:txBody>
-          <a:bodyPr wrap="square" lIns="0" tIns="0" rIns="0" bIns="0" rtlCol="0" anchor="ctr">
-            <a:normAutofit/>
-          </a:bodyPr>
+              <a:rPr lang="en-US" sz="900" b="1" spc="200" kern="0" dirty="0">
+                <a:solidFill>
+                  <a:schemeClr val="accent1"/>
+                </a:solidFill>
+                <a:latin typeface="Arial" pitchFamily="34" charset="0"/>
+                <a:ea typeface="Arial" pitchFamily="34" charset="-122"/>
+                <a:cs typeface="Arial" pitchFamily="34" charset="-120"/>
+              </a:rPr>
+              <a:t>ĐỊA BÀN THI CÔNG 2026</a:t>
+            </a:r>
+            <a:endParaRPr lang="en-US" sz="900" dirty="0"/>
+          </a:p>
+        </p:txBody>
+      </p:sp>
+      <p:sp>
+        <p:nvSpPr>
+          <p:cNvPr id="6" name="Shape 3"/>
+          <p:cNvSpPr/>
+          <p:nvPr/>
+        </p:nvSpPr>
+        <p:spPr>
+          <a:xfrm>
+            <a:off x="502920" y="5394960"/>
+            <a:ext cx="2063496" cy="2377440"/>
+          </a:xfrm>
+          <a:prstGeom prst="roundRect">
+            <a:avLst>
+              <a:gd name="adj" fmla="val 3545"/>
+            </a:avLst>
+          </a:prstGeom>
+          <a:solidFill>
+            <a:schemeClr val="tx2"/>
+          </a:solidFill>
+          <a:ln w="12700">
+            <a:solidFill>
+              <a:schemeClr val="tx2"/>
+            </a:solidFill>
+            <a:prstDash val="solid"/>
+          </a:ln>
+        </p:spPr>
+      </p:sp>
+      <p:sp>
+        <p:nvSpPr>
+          <p:cNvPr id="7" name="Shape 4"/>
+          <p:cNvSpPr/>
+          <p:nvPr/>
+        </p:nvSpPr>
+        <p:spPr>
+          <a:xfrm>
+            <a:off x="685800" y="5559552"/>
+            <a:ext cx="411480" cy="411480"/>
+          </a:xfrm>
+          <a:prstGeom prst="ellipse">
+            <a:avLst/>
+          </a:prstGeom>
+          <a:solidFill>
+            <a:schemeClr val="accent1"/>
+          </a:solidFill>
+          <a:ln w="12700">
+            <a:solidFill>
+              <a:schemeClr val="accent1"/>
+            </a:solidFill>
+            <a:prstDash val="solid"/>
+          </a:ln>
+        </p:spPr>
+      </p:sp>
+      <p:sp>
+        <p:nvSpPr>
+          <p:cNvPr id="8" name="Text 5"/>
+          <p:cNvSpPr txBox="1"/>
+          <p:nvPr/>
+        </p:nvSpPr>
+        <p:spPr>
+          <a:xfrm>
+            <a:off x="685800" y="5559552"/>
+            <a:ext cx="411480" cy="411480"/>
+          </a:xfrm>
+          <a:prstGeom prst="rect">
+            <a:avLst/>
+          </a:prstGeom>
+          <a:noFill/>
+          <a:ln/>
+        </p:spPr>
+        <p:txBody>
+          <a:bodyPr wrap="square" lIns="0" tIns="0" rIns="0" bIns="0" rtlCol="0" anchor="ctr"/>
+          <a:lstStyle/>
+          <a:p>
+            <a:pPr algn="ctr" indent="0" marL="0">
+              <a:buNone/>
+            </a:pPr>
+            <a:r>
+              <a:rPr lang="en-US" sz="1050" b="1" dirty="0">
+                <a:solidFill>
+                  <a:schemeClr val="bg1"/>
+                </a:solidFill>
+                <a:latin typeface="Arial" pitchFamily="34" charset="0"/>
+                <a:ea typeface="Arial" pitchFamily="34" charset="-122"/>
+                <a:cs typeface="Arial" pitchFamily="34" charset="-120"/>
+              </a:rPr>
+              <a:t>01</a:t>
+            </a:r>
+            <a:endParaRPr lang="en-US" sz="1050" dirty="0"/>
+          </a:p>
+        </p:txBody>
+      </p:sp>
+      <p:sp>
+        <p:nvSpPr>
+          <p:cNvPr id="9" name="Text 6"/>
+          <p:cNvSpPr txBox="1"/>
+          <p:nvPr/>
+        </p:nvSpPr>
+        <p:spPr>
+          <a:xfrm>
+            <a:off x="685800" y="6080760"/>
+            <a:ext cx="1697736" cy="365760"/>
+          </a:xfrm>
+          <a:prstGeom prst="rect">
+            <a:avLst/>
+          </a:prstGeom>
+          <a:noFill/>
+          <a:ln/>
+        </p:spPr>
+        <p:txBody>
+          <a:bodyPr wrap="square" lIns="0" tIns="0" rIns="0" bIns="0" rtlCol="0" anchor="ctr"/>
           <a:lstStyle/>
           <a:p>
             <a:pPr indent="0" marL="0">
               <a:buNone/>
             </a:pPr>
             <a:r>
-              <a:rPr lang="en-US" sz="800" i="1" dirty="0">
-                <a:solidFill>
-                  <a:schemeClr val="accent3"/>
-                </a:solidFill>
-              </a:rPr>
-              <a:t>Ninh Bình – điện nước</a:t>
-            </a:r>
-            <a:endParaRPr lang="en-US" sz="800" dirty="0"/>
-          </a:p>
-        </p:txBody>
-      </p:sp>
-      <p:pic>
-        <p:nvPicPr>
-          <p:cNvPr id="9" name="photo img61.jpg" descr="Huế – xử lý nước UF/RO">    </p:cNvPr>
-          <p:cNvPicPr>
-            <a:picLocks noChangeAspect="1"/>
-          </p:cNvPicPr>
-          <p:nvPr/>
-        </p:nvPicPr>
-        <p:blipFill>
-          <a:blip r:embed="rId3"/>
-          <a:stretch>
-            <a:fillRect/>
-          </a:stretch>
-        </p:blipFill>
-        <p:spPr>
-          <a:xfrm>
-            <a:off x="4995672" y="4892040"/>
-            <a:ext cx="2063496" cy="2926080"/>
-          </a:xfrm>
-          <a:prstGeom prst="rect">
-            <a:avLst/>
-          </a:prstGeom>
-        </p:spPr>
-      </p:pic>
-      <p:sp>
-        <p:nvSpPr>
-          <p:cNvPr id="10" name="Text 4"/>
-          <p:cNvSpPr txBox="1"/>
-          <p:nvPr/>
-        </p:nvSpPr>
-        <p:spPr>
-          <a:xfrm>
-            <a:off x="4995672" y="7854696"/>
-            <a:ext cx="2063496" cy="201168"/>
-          </a:xfrm>
-          <a:prstGeom prst="rect">
-            <a:avLst/>
-          </a:prstGeom>
-          <a:noFill/>
-          <a:ln/>
-        </p:spPr>
-        <p:txBody>
-          <a:bodyPr wrap="square" lIns="0" tIns="0" rIns="0" bIns="0" rtlCol="0" anchor="ctr">
-            <a:normAutofit/>
-          </a:bodyPr>
+              <a:rPr lang="en-US" sz="1600" b="1" dirty="0">
+                <a:solidFill>
+                  <a:schemeClr val="accent1"/>
+                </a:solidFill>
+                <a:latin typeface="Arial" pitchFamily="34" charset="0"/>
+                <a:ea typeface="Arial" pitchFamily="34" charset="-122"/>
+                <a:cs typeface="Arial" pitchFamily="34" charset="-120"/>
+              </a:rPr>
+              <a:t>NGHỆ AN</a:t>
+            </a:r>
+            <a:endParaRPr lang="en-US" sz="1600" dirty="0"/>
+          </a:p>
+        </p:txBody>
+      </p:sp>
+      <p:sp>
+        <p:nvSpPr>
+          <p:cNvPr id="10" name="Text 7"/>
+          <p:cNvSpPr txBox="1"/>
+          <p:nvPr/>
+        </p:nvSpPr>
+        <p:spPr>
+          <a:xfrm>
+            <a:off x="685800" y="6492240"/>
+            <a:ext cx="1697736" cy="457200"/>
+          </a:xfrm>
+          <a:prstGeom prst="rect">
+            <a:avLst/>
+          </a:prstGeom>
+          <a:noFill/>
+          <a:ln/>
+        </p:spPr>
+        <p:txBody>
+          <a:bodyPr wrap="square" lIns="0" tIns="0" rIns="0" bIns="0" rtlCol="0" anchor="t"/>
           <a:lstStyle/>
           <a:p>
             <a:pPr indent="0" marL="0">
               <a:buNone/>
             </a:pPr>
             <a:r>
-              <a:rPr lang="en-US" sz="800" i="1" dirty="0">
-                <a:solidFill>
-                  <a:schemeClr val="accent3"/>
-                </a:solidFill>
-              </a:rPr>
-              <a:t>Huế – xử lý nước UF/RO</a:t>
-            </a:r>
-            <a:endParaRPr lang="en-US" sz="800" dirty="0"/>
-          </a:p>
-        </p:txBody>
-      </p:sp>
-      <p:sp>
-        <p:nvSpPr>
-          <p:cNvPr id="11" name="Shape 5"/>
+              <a:rPr lang="en-US" sz="1050" b="1" dirty="0">
+                <a:solidFill>
+                  <a:schemeClr val="bg1"/>
+                </a:solidFill>
+              </a:rPr>
+              <a:t>Nhà xưởng gia công CNC</a:t>
+            </a:r>
+            <a:endParaRPr lang="en-US" sz="1050" dirty="0"/>
+          </a:p>
+        </p:txBody>
+      </p:sp>
+      <p:sp>
+        <p:nvSpPr>
+          <p:cNvPr id="11" name="Text 8"/>
+          <p:cNvSpPr txBox="1"/>
+          <p:nvPr/>
+        </p:nvSpPr>
+        <p:spPr>
+          <a:xfrm>
+            <a:off x="685800" y="6949440"/>
+            <a:ext cx="1697736" cy="411480"/>
+          </a:xfrm>
+          <a:prstGeom prst="rect">
+            <a:avLst/>
+          </a:prstGeom>
+          <a:noFill/>
+          <a:ln/>
+        </p:spPr>
+        <p:txBody>
+          <a:bodyPr wrap="square" lIns="0" tIns="0" rIns="0" bIns="0" rtlCol="0" anchor="t"/>
+          <a:lstStyle/>
+          <a:p>
+            <a:pPr indent="0" marL="0">
+              <a:buNone/>
+            </a:pPr>
+            <a:r>
+              <a:rPr lang="en-US" sz="900" dirty="0">
+                <a:solidFill>
+                  <a:schemeClr val="accent4"/>
+                </a:solidFill>
+              </a:rPr>
+              <a:t>Hút sương dầu, máy lọc, điện</a:t>
+            </a:r>
+            <a:endParaRPr lang="en-US" sz="900" dirty="0"/>
+          </a:p>
+        </p:txBody>
+      </p:sp>
+      <p:sp>
+        <p:nvSpPr>
+          <p:cNvPr id="12" name="Text 9"/>
+          <p:cNvSpPr txBox="1"/>
+          <p:nvPr/>
+        </p:nvSpPr>
+        <p:spPr>
+          <a:xfrm>
+            <a:off x="685800" y="7388352"/>
+            <a:ext cx="1697736" cy="256032"/>
+          </a:xfrm>
+          <a:prstGeom prst="rect">
+            <a:avLst/>
+          </a:prstGeom>
+          <a:noFill/>
+          <a:ln/>
+        </p:spPr>
+        <p:txBody>
+          <a:bodyPr wrap="square" lIns="0" tIns="0" rIns="0" bIns="0" rtlCol="0" anchor="ctr"/>
+          <a:lstStyle/>
+          <a:p>
+            <a:pPr indent="0" marL="0">
+              <a:buNone/>
+            </a:pPr>
+            <a:r>
+              <a:rPr lang="en-US" sz="900" b="1" dirty="0">
+                <a:solidFill>
+                  <a:schemeClr val="accent6"/>
+                </a:solidFill>
+              </a:rPr>
+              <a:t>09–10/2026</a:t>
+            </a:r>
+            <a:endParaRPr lang="en-US" sz="900" dirty="0"/>
+          </a:p>
+        </p:txBody>
+      </p:sp>
+      <p:sp>
+        <p:nvSpPr>
+          <p:cNvPr id="13" name="Shape 10"/>
+          <p:cNvSpPr/>
+          <p:nvPr/>
+        </p:nvSpPr>
+        <p:spPr>
+          <a:xfrm>
+            <a:off x="2749296" y="5394960"/>
+            <a:ext cx="2063496" cy="2377440"/>
+          </a:xfrm>
+          <a:prstGeom prst="roundRect">
+            <a:avLst>
+              <a:gd name="adj" fmla="val 3545"/>
+            </a:avLst>
+          </a:prstGeom>
+          <a:solidFill>
+            <a:schemeClr val="tx2"/>
+          </a:solidFill>
+          <a:ln w="12700">
+            <a:solidFill>
+              <a:schemeClr val="tx2"/>
+            </a:solidFill>
+            <a:prstDash val="solid"/>
+          </a:ln>
+        </p:spPr>
+      </p:sp>
+      <p:sp>
+        <p:nvSpPr>
+          <p:cNvPr id="14" name="Shape 11"/>
+          <p:cNvSpPr/>
+          <p:nvPr/>
+        </p:nvSpPr>
+        <p:spPr>
+          <a:xfrm>
+            <a:off x="2932176" y="5559552"/>
+            <a:ext cx="411480" cy="411480"/>
+          </a:xfrm>
+          <a:prstGeom prst="ellipse">
+            <a:avLst/>
+          </a:prstGeom>
+          <a:solidFill>
+            <a:schemeClr val="accent1"/>
+          </a:solidFill>
+          <a:ln w="12700">
+            <a:solidFill>
+              <a:schemeClr val="accent1"/>
+            </a:solidFill>
+            <a:prstDash val="solid"/>
+          </a:ln>
+        </p:spPr>
+      </p:sp>
+      <p:sp>
+        <p:nvSpPr>
+          <p:cNvPr id="15" name="Text 12"/>
+          <p:cNvSpPr txBox="1"/>
+          <p:nvPr/>
+        </p:nvSpPr>
+        <p:spPr>
+          <a:xfrm>
+            <a:off x="2932176" y="5559552"/>
+            <a:ext cx="411480" cy="411480"/>
+          </a:xfrm>
+          <a:prstGeom prst="rect">
+            <a:avLst/>
+          </a:prstGeom>
+          <a:noFill/>
+          <a:ln/>
+        </p:spPr>
+        <p:txBody>
+          <a:bodyPr wrap="square" lIns="0" tIns="0" rIns="0" bIns="0" rtlCol="0" anchor="ctr"/>
+          <a:lstStyle/>
+          <a:p>
+            <a:pPr algn="ctr" indent="0" marL="0">
+              <a:buNone/>
+            </a:pPr>
+            <a:r>
+              <a:rPr lang="en-US" sz="1050" b="1" dirty="0">
+                <a:solidFill>
+                  <a:schemeClr val="bg1"/>
+                </a:solidFill>
+                <a:latin typeface="Arial" pitchFamily="34" charset="0"/>
+                <a:ea typeface="Arial" pitchFamily="34" charset="-122"/>
+                <a:cs typeface="Arial" pitchFamily="34" charset="-120"/>
+              </a:rPr>
+              <a:t>02</a:t>
+            </a:r>
+            <a:endParaRPr lang="en-US" sz="1050" dirty="0"/>
+          </a:p>
+        </p:txBody>
+      </p:sp>
+      <p:sp>
+        <p:nvSpPr>
+          <p:cNvPr id="16" name="Text 13"/>
+          <p:cNvSpPr txBox="1"/>
+          <p:nvPr/>
+        </p:nvSpPr>
+        <p:spPr>
+          <a:xfrm>
+            <a:off x="2932176" y="6080760"/>
+            <a:ext cx="1697736" cy="365760"/>
+          </a:xfrm>
+          <a:prstGeom prst="rect">
+            <a:avLst/>
+          </a:prstGeom>
+          <a:noFill/>
+          <a:ln/>
+        </p:spPr>
+        <p:txBody>
+          <a:bodyPr wrap="square" lIns="0" tIns="0" rIns="0" bIns="0" rtlCol="0" anchor="ctr"/>
+          <a:lstStyle/>
+          <a:p>
+            <a:pPr indent="0" marL="0">
+              <a:buNone/>
+            </a:pPr>
+            <a:r>
+              <a:rPr lang="en-US" sz="1600" b="1" dirty="0">
+                <a:solidFill>
+                  <a:schemeClr val="accent1"/>
+                </a:solidFill>
+                <a:latin typeface="Arial" pitchFamily="34" charset="0"/>
+                <a:ea typeface="Arial" pitchFamily="34" charset="-122"/>
+                <a:cs typeface="Arial" pitchFamily="34" charset="-120"/>
+              </a:rPr>
+              <a:t>NINH BÌNH</a:t>
+            </a:r>
+            <a:endParaRPr lang="en-US" sz="1600" dirty="0"/>
+          </a:p>
+        </p:txBody>
+      </p:sp>
+      <p:sp>
+        <p:nvSpPr>
+          <p:cNvPr id="17" name="Text 14"/>
+          <p:cNvSpPr txBox="1"/>
+          <p:nvPr/>
+        </p:nvSpPr>
+        <p:spPr>
+          <a:xfrm>
+            <a:off x="2932176" y="6492240"/>
+            <a:ext cx="1697736" cy="457200"/>
+          </a:xfrm>
+          <a:prstGeom prst="rect">
+            <a:avLst/>
+          </a:prstGeom>
+          <a:noFill/>
+          <a:ln/>
+        </p:spPr>
+        <p:txBody>
+          <a:bodyPr wrap="square" lIns="0" tIns="0" rIns="0" bIns="0" rtlCol="0" anchor="t"/>
+          <a:lstStyle/>
+          <a:p>
+            <a:pPr indent="0" marL="0">
+              <a:buNone/>
+            </a:pPr>
+            <a:r>
+              <a:rPr lang="en-US" sz="1050" b="1" dirty="0">
+                <a:solidFill>
+                  <a:schemeClr val="bg1"/>
+                </a:solidFill>
+              </a:rPr>
+              <a:t>Công trình nhiều tầng</a:t>
+            </a:r>
+            <a:endParaRPr lang="en-US" sz="1050" dirty="0"/>
+          </a:p>
+        </p:txBody>
+      </p:sp>
+      <p:sp>
+        <p:nvSpPr>
+          <p:cNvPr id="18" name="Text 15"/>
+          <p:cNvSpPr txBox="1"/>
+          <p:nvPr/>
+        </p:nvSpPr>
+        <p:spPr>
+          <a:xfrm>
+            <a:off x="2932176" y="6949440"/>
+            <a:ext cx="1697736" cy="411480"/>
+          </a:xfrm>
+          <a:prstGeom prst="rect">
+            <a:avLst/>
+          </a:prstGeom>
+          <a:noFill/>
+          <a:ln/>
+        </p:spPr>
+        <p:txBody>
+          <a:bodyPr wrap="square" lIns="0" tIns="0" rIns="0" bIns="0" rtlCol="0" anchor="t"/>
+          <a:lstStyle/>
+          <a:p>
+            <a:pPr indent="0" marL="0">
+              <a:buNone/>
+            </a:pPr>
+            <a:r>
+              <a:rPr lang="en-US" sz="900" dirty="0">
+                <a:solidFill>
+                  <a:schemeClr val="accent4"/>
+                </a:solidFill>
+              </a:rPr>
+              <a:t>Điện, cấp thoát nước</a:t>
+            </a:r>
+            <a:endParaRPr lang="en-US" sz="900" dirty="0"/>
+          </a:p>
+        </p:txBody>
+      </p:sp>
+      <p:sp>
+        <p:nvSpPr>
+          <p:cNvPr id="19" name="Text 16"/>
+          <p:cNvSpPr txBox="1"/>
+          <p:nvPr/>
+        </p:nvSpPr>
+        <p:spPr>
+          <a:xfrm>
+            <a:off x="2932176" y="7388352"/>
+            <a:ext cx="1697736" cy="256032"/>
+          </a:xfrm>
+          <a:prstGeom prst="rect">
+            <a:avLst/>
+          </a:prstGeom>
+          <a:noFill/>
+          <a:ln/>
+        </p:spPr>
+        <p:txBody>
+          <a:bodyPr wrap="square" lIns="0" tIns="0" rIns="0" bIns="0" rtlCol="0" anchor="ctr"/>
+          <a:lstStyle/>
+          <a:p>
+            <a:pPr indent="0" marL="0">
+              <a:buNone/>
+            </a:pPr>
+            <a:r>
+              <a:rPr lang="en-US" sz="900" b="1" dirty="0">
+                <a:solidFill>
+                  <a:schemeClr val="accent6"/>
+                </a:solidFill>
+              </a:rPr>
+              <a:t>09/2026</a:t>
+            </a:r>
+            <a:endParaRPr lang="en-US" sz="900" dirty="0"/>
+          </a:p>
+        </p:txBody>
+      </p:sp>
+      <p:sp>
+        <p:nvSpPr>
+          <p:cNvPr id="20" name="Shape 17"/>
+          <p:cNvSpPr/>
+          <p:nvPr/>
+        </p:nvSpPr>
+        <p:spPr>
+          <a:xfrm>
+            <a:off x="4995672" y="5394960"/>
+            <a:ext cx="2063496" cy="2377440"/>
+          </a:xfrm>
+          <a:prstGeom prst="roundRect">
+            <a:avLst>
+              <a:gd name="adj" fmla="val 3545"/>
+            </a:avLst>
+          </a:prstGeom>
+          <a:solidFill>
+            <a:schemeClr val="tx2"/>
+          </a:solidFill>
+          <a:ln w="12700">
+            <a:solidFill>
+              <a:schemeClr val="tx2"/>
+            </a:solidFill>
+            <a:prstDash val="solid"/>
+          </a:ln>
+        </p:spPr>
+      </p:sp>
+      <p:sp>
+        <p:nvSpPr>
+          <p:cNvPr id="21" name="Shape 18"/>
+          <p:cNvSpPr/>
+          <p:nvPr/>
+        </p:nvSpPr>
+        <p:spPr>
+          <a:xfrm>
+            <a:off x="5178552" y="5559552"/>
+            <a:ext cx="411480" cy="411480"/>
+          </a:xfrm>
+          <a:prstGeom prst="ellipse">
+            <a:avLst/>
+          </a:prstGeom>
+          <a:solidFill>
+            <a:schemeClr val="accent1"/>
+          </a:solidFill>
+          <a:ln w="12700">
+            <a:solidFill>
+              <a:schemeClr val="accent1"/>
+            </a:solidFill>
+            <a:prstDash val="solid"/>
+          </a:ln>
+        </p:spPr>
+      </p:sp>
+      <p:sp>
+        <p:nvSpPr>
+          <p:cNvPr id="22" name="Text 19"/>
+          <p:cNvSpPr txBox="1"/>
+          <p:nvPr/>
+        </p:nvSpPr>
+        <p:spPr>
+          <a:xfrm>
+            <a:off x="5178552" y="5559552"/>
+            <a:ext cx="411480" cy="411480"/>
+          </a:xfrm>
+          <a:prstGeom prst="rect">
+            <a:avLst/>
+          </a:prstGeom>
+          <a:noFill/>
+          <a:ln/>
+        </p:spPr>
+        <p:txBody>
+          <a:bodyPr wrap="square" lIns="0" tIns="0" rIns="0" bIns="0" rtlCol="0" anchor="ctr"/>
+          <a:lstStyle/>
+          <a:p>
+            <a:pPr algn="ctr" indent="0" marL="0">
+              <a:buNone/>
+            </a:pPr>
+            <a:r>
+              <a:rPr lang="en-US" sz="1050" b="1" dirty="0">
+                <a:solidFill>
+                  <a:schemeClr val="bg1"/>
+                </a:solidFill>
+                <a:latin typeface="Arial" pitchFamily="34" charset="0"/>
+                <a:ea typeface="Arial" pitchFamily="34" charset="-122"/>
+                <a:cs typeface="Arial" pitchFamily="34" charset="-120"/>
+              </a:rPr>
+              <a:t>03</a:t>
+            </a:r>
+            <a:endParaRPr lang="en-US" sz="1050" dirty="0"/>
+          </a:p>
+        </p:txBody>
+      </p:sp>
+      <p:sp>
+        <p:nvSpPr>
+          <p:cNvPr id="23" name="Text 20"/>
+          <p:cNvSpPr txBox="1"/>
+          <p:nvPr/>
+        </p:nvSpPr>
+        <p:spPr>
+          <a:xfrm>
+            <a:off x="5178552" y="6080760"/>
+            <a:ext cx="1697736" cy="365760"/>
+          </a:xfrm>
+          <a:prstGeom prst="rect">
+            <a:avLst/>
+          </a:prstGeom>
+          <a:noFill/>
+          <a:ln/>
+        </p:spPr>
+        <p:txBody>
+          <a:bodyPr wrap="square" lIns="0" tIns="0" rIns="0" bIns="0" rtlCol="0" anchor="ctr"/>
+          <a:lstStyle/>
+          <a:p>
+            <a:pPr indent="0" marL="0">
+              <a:buNone/>
+            </a:pPr>
+            <a:r>
+              <a:rPr lang="en-US" sz="1600" b="1" dirty="0">
+                <a:solidFill>
+                  <a:schemeClr val="accent1"/>
+                </a:solidFill>
+                <a:latin typeface="Arial" pitchFamily="34" charset="0"/>
+                <a:ea typeface="Arial" pitchFamily="34" charset="-122"/>
+                <a:cs typeface="Arial" pitchFamily="34" charset="-120"/>
+              </a:rPr>
+              <a:t>TP. HUẾ</a:t>
+            </a:r>
+            <a:endParaRPr lang="en-US" sz="1600" dirty="0"/>
+          </a:p>
+        </p:txBody>
+      </p:sp>
+      <p:sp>
+        <p:nvSpPr>
+          <p:cNvPr id="24" name="Text 21"/>
+          <p:cNvSpPr txBox="1"/>
+          <p:nvPr/>
+        </p:nvSpPr>
+        <p:spPr>
+          <a:xfrm>
+            <a:off x="5178552" y="6492240"/>
+            <a:ext cx="1697736" cy="457200"/>
+          </a:xfrm>
+          <a:prstGeom prst="rect">
+            <a:avLst/>
+          </a:prstGeom>
+          <a:noFill/>
+          <a:ln/>
+        </p:spPr>
+        <p:txBody>
+          <a:bodyPr wrap="square" lIns="0" tIns="0" rIns="0" bIns="0" rtlCol="0" anchor="t"/>
+          <a:lstStyle/>
+          <a:p>
+            <a:pPr indent="0" marL="0">
+              <a:buNone/>
+            </a:pPr>
+            <a:r>
+              <a:rPr lang="en-US" sz="1050" b="1" dirty="0">
+                <a:solidFill>
+                  <a:schemeClr val="bg1"/>
+                </a:solidFill>
+              </a:rPr>
+              <a:t>Trạm xử lý nước UF/RO</a:t>
+            </a:r>
+            <a:endParaRPr lang="en-US" sz="1050" dirty="0"/>
+          </a:p>
+        </p:txBody>
+      </p:sp>
+      <p:sp>
+        <p:nvSpPr>
+          <p:cNvPr id="25" name="Text 22"/>
+          <p:cNvSpPr txBox="1"/>
+          <p:nvPr/>
+        </p:nvSpPr>
+        <p:spPr>
+          <a:xfrm>
+            <a:off x="5178552" y="6949440"/>
+            <a:ext cx="1697736" cy="411480"/>
+          </a:xfrm>
+          <a:prstGeom prst="rect">
+            <a:avLst/>
+          </a:prstGeom>
+          <a:noFill/>
+          <a:ln/>
+        </p:spPr>
+        <p:txBody>
+          <a:bodyPr wrap="square" lIns="0" tIns="0" rIns="0" bIns="0" rtlCol="0" anchor="t"/>
+          <a:lstStyle/>
+          <a:p>
+            <a:pPr indent="0" marL="0">
+              <a:buNone/>
+            </a:pPr>
+            <a:r>
+              <a:rPr lang="en-US" sz="900" dirty="0">
+                <a:solidFill>
+                  <a:schemeClr val="accent4"/>
+                </a:solidFill>
+              </a:rPr>
+              <a:t>Bơm, bồn lọc, ống công nghệ</a:t>
+            </a:r>
+            <a:endParaRPr lang="en-US" sz="900" dirty="0"/>
+          </a:p>
+        </p:txBody>
+      </p:sp>
+      <p:sp>
+        <p:nvSpPr>
+          <p:cNvPr id="26" name="Text 23"/>
+          <p:cNvSpPr txBox="1"/>
+          <p:nvPr/>
+        </p:nvSpPr>
+        <p:spPr>
+          <a:xfrm>
+            <a:off x="5178552" y="7388352"/>
+            <a:ext cx="1697736" cy="256032"/>
+          </a:xfrm>
+          <a:prstGeom prst="rect">
+            <a:avLst/>
+          </a:prstGeom>
+          <a:noFill/>
+          <a:ln/>
+        </p:spPr>
+        <p:txBody>
+          <a:bodyPr wrap="square" lIns="0" tIns="0" rIns="0" bIns="0" rtlCol="0" anchor="ctr"/>
+          <a:lstStyle/>
+          <a:p>
+            <a:pPr indent="0" marL="0">
+              <a:buNone/>
+            </a:pPr>
+            <a:r>
+              <a:rPr lang="en-US" sz="900" b="1" dirty="0">
+                <a:solidFill>
+                  <a:schemeClr val="accent6"/>
+                </a:solidFill>
+              </a:rPr>
+              <a:t>09/2026</a:t>
+            </a:r>
+            <a:endParaRPr lang="en-US" sz="900" dirty="0"/>
+          </a:p>
+        </p:txBody>
+      </p:sp>
+      <p:sp>
+        <p:nvSpPr>
+          <p:cNvPr id="27" name="Shape 24"/>
           <p:cNvSpPr/>
           <p:nvPr/>
         </p:nvSpPr>
@@ -24182,7 +24973,7 @@
       </p:sp>
       <p:sp>
         <p:nvSpPr>
-          <p:cNvPr id="12" name="Text 6"/>
+          <p:cNvPr id="28" name="Text 25"/>
           <p:cNvSpPr txBox="1"/>
           <p:nvPr/>
         </p:nvSpPr>
@@ -24221,7 +25012,7 @@
       </p:sp>
       <p:sp>
         <p:nvSpPr>
-          <p:cNvPr id="13" name="Text 7"/>
+          <p:cNvPr id="29" name="Text 26"/>
           <p:cNvSpPr txBox="1"/>
           <p:nvPr/>
         </p:nvSpPr>
@@ -24441,44 +25232,150 @@
           </a:p>
         </p:txBody>
       </p:sp>
-      <p:pic>
-        <p:nvPicPr>
-          <p:cNvPr id="4" name="photo img36.jpg" descr="Ảnh hiện trường BLT">    </p:cNvPr>
-          <p:cNvPicPr>
-            <a:picLocks noChangeAspect="1"/>
-          </p:cNvPicPr>
-          <p:nvPr/>
-        </p:nvPicPr>
-        <p:blipFill>
-          <a:blip r:embed="rId1"/>
-          <a:stretch>
-            <a:fillRect/>
-          </a:stretch>
-        </p:blipFill>
+      <p:sp>
+        <p:nvSpPr>
+          <p:cNvPr id="4" name="Shape 2"/>
+          <p:cNvSpPr/>
+          <p:nvPr/>
+        </p:nvSpPr>
         <p:spPr>
           <a:xfrm>
             <a:off x="502920" y="1463040"/>
-            <a:ext cx="6556248" cy="3291840"/>
-          </a:xfrm>
-          <a:prstGeom prst="rect">
-            <a:avLst/>
-          </a:prstGeom>
-        </p:spPr>
-      </p:pic>
-      <p:sp>
-        <p:nvSpPr>
-          <p:cNvPr id="5" name="Shape 2"/>
-          <p:cNvSpPr/>
-          <p:nvPr/>
-        </p:nvSpPr>
-        <p:spPr>
-          <a:xfrm>
-            <a:off x="502920" y="5074920"/>
-            <a:ext cx="3186684" cy="1417320"/>
+            <a:ext cx="6556248" cy="1463040"/>
           </a:xfrm>
           <a:prstGeom prst="roundRect">
             <a:avLst>
-              <a:gd name="adj" fmla="val 5161"/>
+              <a:gd name="adj" fmla="val 5000"/>
+            </a:avLst>
+          </a:prstGeom>
+          <a:solidFill>
+            <a:schemeClr val="tx2"/>
+          </a:solidFill>
+          <a:ln w="12700">
+            <a:solidFill>
+              <a:schemeClr val="tx2"/>
+            </a:solidFill>
+            <a:prstDash val="solid"/>
+          </a:ln>
+        </p:spPr>
+      </p:sp>
+      <p:sp>
+        <p:nvSpPr>
+          <p:cNvPr id="5" name="Text 3"/>
+          <p:cNvSpPr txBox="1"/>
+          <p:nvPr/>
+        </p:nvSpPr>
+        <p:spPr>
+          <a:xfrm>
+            <a:off x="822960" y="1645920"/>
+            <a:ext cx="5916168" cy="548640"/>
+          </a:xfrm>
+          <a:prstGeom prst="rect">
+            <a:avLst/>
+          </a:prstGeom>
+          <a:noFill/>
+          <a:ln/>
+        </p:spPr>
+        <p:txBody>
+          <a:bodyPr wrap="square" lIns="0" tIns="0" rIns="0" bIns="0" rtlCol="0" anchor="ctr"/>
+          <a:lstStyle/>
+          <a:p>
+            <a:pPr indent="0" marL="0">
+              <a:buNone/>
+            </a:pPr>
+            <a:r>
+              <a:rPr lang="en-US" sz="1700" b="1" dirty="0">
+                <a:solidFill>
+                  <a:schemeClr val="bg1"/>
+                </a:solidFill>
+                <a:latin typeface="Arial" pitchFamily="34" charset="0"/>
+                <a:ea typeface="Arial" pitchFamily="34" charset="-122"/>
+                <a:cs typeface="Arial" pitchFamily="34" charset="-120"/>
+              </a:rPr>
+              <a:t>“Giải pháp điện nước – </a:t>
+            </a:r>
+            <a:pPr indent="0" marL="0">
+              <a:buNone/>
+            </a:pPr>
+            <a:r>
+              <a:rPr lang="en-US" sz="1700" b="1" dirty="0">
+                <a:solidFill>
+                  <a:schemeClr val="accent1"/>
+                </a:solidFill>
+                <a:latin typeface="Arial" pitchFamily="34" charset="0"/>
+                <a:ea typeface="Arial" pitchFamily="34" charset="-122"/>
+                <a:cs typeface="Arial" pitchFamily="34" charset="-120"/>
+              </a:rPr>
+              <a:t>Uy tín &amp; Chất lượng</a:t>
+            </a:r>
+            <a:pPr indent="0" marL="0">
+              <a:buNone/>
+            </a:pPr>
+            <a:r>
+              <a:rPr lang="en-US" sz="1700" b="1" dirty="0">
+                <a:solidFill>
+                  <a:schemeClr val="bg1"/>
+                </a:solidFill>
+                <a:latin typeface="Arial" pitchFamily="34" charset="0"/>
+                <a:ea typeface="Arial" pitchFamily="34" charset="-122"/>
+                <a:cs typeface="Arial" pitchFamily="34" charset="-120"/>
+              </a:rPr>
+              <a:t>”</a:t>
+            </a:r>
+            <a:endParaRPr lang="en-US" sz="1700" dirty="0"/>
+          </a:p>
+        </p:txBody>
+      </p:sp>
+      <p:sp>
+        <p:nvSpPr>
+          <p:cNvPr id="6" name="Text 4"/>
+          <p:cNvSpPr txBox="1"/>
+          <p:nvPr/>
+        </p:nvSpPr>
+        <p:spPr>
+          <a:xfrm>
+            <a:off x="822960" y="2331720"/>
+            <a:ext cx="5916168" cy="411480"/>
+          </a:xfrm>
+          <a:prstGeom prst="rect">
+            <a:avLst/>
+          </a:prstGeom>
+          <a:noFill/>
+          <a:ln/>
+        </p:spPr>
+        <p:txBody>
+          <a:bodyPr wrap="square" lIns="0" tIns="0" rIns="0" bIns="0" rtlCol="0" anchor="t"/>
+          <a:lstStyle/>
+          <a:p>
+            <a:pPr indent="0" marL="0">
+              <a:buNone/>
+            </a:pPr>
+            <a:r>
+              <a:rPr lang="en-US" sz="1100" i="1" dirty="0">
+                <a:solidFill>
+                  <a:schemeClr val="accent6"/>
+                </a:solidFill>
+              </a:rPr>
+              <a:t>Mỗi công trình BLT nhận là một cam kết về chất lượng, tiến độ và an toàn.</a:t>
+            </a:r>
+            <a:endParaRPr lang="en-US" sz="1100" dirty="0"/>
+          </a:p>
+        </p:txBody>
+      </p:sp>
+      <p:sp>
+        <p:nvSpPr>
+          <p:cNvPr id="7" name="Shape 5"/>
+          <p:cNvSpPr/>
+          <p:nvPr/>
+        </p:nvSpPr>
+        <p:spPr>
+          <a:xfrm>
+            <a:off x="502920" y="3200400"/>
+            <a:ext cx="3186684" cy="1325880"/>
+          </a:xfrm>
+          <a:prstGeom prst="roundRect">
+            <a:avLst>
+              <a:gd name="adj" fmla="val 5517"/>
             </a:avLst>
           </a:prstGeom>
           <a:solidFill>
@@ -24494,13 +25391,13 @@
       </p:sp>
       <p:sp>
         <p:nvSpPr>
-          <p:cNvPr id="6" name="Shape 3"/>
+          <p:cNvPr id="8" name="Shape 6"/>
           <p:cNvSpPr/>
           <p:nvPr/>
         </p:nvSpPr>
         <p:spPr>
           <a:xfrm>
-            <a:off x="640080" y="5212080"/>
+            <a:off x="640080" y="3337560"/>
             <a:ext cx="365760" cy="365760"/>
           </a:xfrm>
           <a:prstGeom prst="ellipse">
@@ -24519,13 +25416,13 @@
       </p:sp>
       <p:sp>
         <p:nvSpPr>
-          <p:cNvPr id="7" name="Text 4"/>
-          <p:cNvSpPr txBox="1"/>
-          <p:nvPr/>
-        </p:nvSpPr>
-        <p:spPr>
-          <a:xfrm>
-            <a:off x="640080" y="5212080"/>
+          <p:cNvPr id="9" name="Text 7"/>
+          <p:cNvSpPr txBox="1"/>
+          <p:nvPr/>
+        </p:nvSpPr>
+        <p:spPr>
+          <a:xfrm>
+            <a:off x="640080" y="3337560"/>
             <a:ext cx="365760" cy="365760"/>
           </a:xfrm>
           <a:prstGeom prst="rect">
@@ -24558,13 +25455,13 @@
       </p:sp>
       <p:sp>
         <p:nvSpPr>
-          <p:cNvPr id="8" name="Text 5"/>
-          <p:cNvSpPr txBox="1"/>
-          <p:nvPr/>
-        </p:nvSpPr>
-        <p:spPr>
-          <a:xfrm>
-            <a:off x="1097280" y="5193792"/>
+          <p:cNvPr id="10" name="Text 8"/>
+          <p:cNvSpPr txBox="1"/>
+          <p:nvPr/>
+        </p:nvSpPr>
+        <p:spPr>
+          <a:xfrm>
+            <a:off x="1097280" y="3319272"/>
             <a:ext cx="2455164" cy="402336"/>
           </a:xfrm>
           <a:prstGeom prst="rect">
@@ -24597,14 +25494,14 @@
       </p:sp>
       <p:sp>
         <p:nvSpPr>
-          <p:cNvPr id="9" name="Text 6"/>
-          <p:cNvSpPr txBox="1"/>
-          <p:nvPr/>
-        </p:nvSpPr>
-        <p:spPr>
-          <a:xfrm>
-            <a:off x="1097280" y="5623560"/>
-            <a:ext cx="2455164" cy="777240"/>
+          <p:cNvPr id="11" name="Text 9"/>
+          <p:cNvSpPr txBox="1"/>
+          <p:nvPr/>
+        </p:nvSpPr>
+        <p:spPr>
+          <a:xfrm>
+            <a:off x="1097280" y="3749040"/>
+            <a:ext cx="2455164" cy="685800"/>
           </a:xfrm>
           <a:prstGeom prst="rect">
             <a:avLst/>
@@ -24636,18 +25533,18 @@
       </p:sp>
       <p:sp>
         <p:nvSpPr>
-          <p:cNvPr id="10" name="Shape 7"/>
+          <p:cNvPr id="12" name="Shape 10"/>
           <p:cNvSpPr/>
           <p:nvPr/>
         </p:nvSpPr>
         <p:spPr>
           <a:xfrm>
-            <a:off x="3872484" y="5074920"/>
-            <a:ext cx="3186684" cy="1417320"/>
+            <a:off x="3872484" y="3200400"/>
+            <a:ext cx="3186684" cy="1325880"/>
           </a:xfrm>
           <a:prstGeom prst="roundRect">
             <a:avLst>
-              <a:gd name="adj" fmla="val 5161"/>
+              <a:gd name="adj" fmla="val 5517"/>
             </a:avLst>
           </a:prstGeom>
           <a:solidFill>
@@ -24663,13 +25560,13 @@
       </p:sp>
       <p:sp>
         <p:nvSpPr>
-          <p:cNvPr id="11" name="Shape 8"/>
+          <p:cNvPr id="13" name="Shape 11"/>
           <p:cNvSpPr/>
           <p:nvPr/>
         </p:nvSpPr>
         <p:spPr>
           <a:xfrm>
-            <a:off x="4009644" y="5212080"/>
+            <a:off x="4009644" y="3337560"/>
             <a:ext cx="365760" cy="365760"/>
           </a:xfrm>
           <a:prstGeom prst="ellipse">
@@ -24688,13 +25585,13 @@
       </p:sp>
       <p:sp>
         <p:nvSpPr>
-          <p:cNvPr id="12" name="Text 9"/>
-          <p:cNvSpPr txBox="1"/>
-          <p:nvPr/>
-        </p:nvSpPr>
-        <p:spPr>
-          <a:xfrm>
-            <a:off x="4009644" y="5212080"/>
+          <p:cNvPr id="14" name="Text 12"/>
+          <p:cNvSpPr txBox="1"/>
+          <p:nvPr/>
+        </p:nvSpPr>
+        <p:spPr>
+          <a:xfrm>
+            <a:off x="4009644" y="3337560"/>
             <a:ext cx="365760" cy="365760"/>
           </a:xfrm>
           <a:prstGeom prst="rect">
@@ -24727,13 +25624,13 @@
       </p:sp>
       <p:sp>
         <p:nvSpPr>
-          <p:cNvPr id="13" name="Text 10"/>
-          <p:cNvSpPr txBox="1"/>
-          <p:nvPr/>
-        </p:nvSpPr>
-        <p:spPr>
-          <a:xfrm>
-            <a:off x="4466844" y="5193792"/>
+          <p:cNvPr id="15" name="Text 13"/>
+          <p:cNvSpPr txBox="1"/>
+          <p:nvPr/>
+        </p:nvSpPr>
+        <p:spPr>
+          <a:xfrm>
+            <a:off x="4466844" y="3319272"/>
             <a:ext cx="2455164" cy="402336"/>
           </a:xfrm>
           <a:prstGeom prst="rect">
@@ -24766,14 +25663,14 @@
       </p:sp>
       <p:sp>
         <p:nvSpPr>
-          <p:cNvPr id="14" name="Text 11"/>
-          <p:cNvSpPr txBox="1"/>
-          <p:nvPr/>
-        </p:nvSpPr>
-        <p:spPr>
-          <a:xfrm>
-            <a:off x="4466844" y="5623560"/>
-            <a:ext cx="2455164" cy="777240"/>
+          <p:cNvPr id="16" name="Text 14"/>
+          <p:cNvSpPr txBox="1"/>
+          <p:nvPr/>
+        </p:nvSpPr>
+        <p:spPr>
+          <a:xfrm>
+            <a:off x="4466844" y="3749040"/>
+            <a:ext cx="2455164" cy="685800"/>
           </a:xfrm>
           <a:prstGeom prst="rect">
             <a:avLst/>
@@ -24805,18 +25702,18 @@
       </p:sp>
       <p:sp>
         <p:nvSpPr>
-          <p:cNvPr id="15" name="Shape 12"/>
+          <p:cNvPr id="17" name="Shape 15"/>
           <p:cNvSpPr/>
           <p:nvPr/>
         </p:nvSpPr>
         <p:spPr>
           <a:xfrm>
-            <a:off x="502920" y="6656832"/>
-            <a:ext cx="3186684" cy="1417320"/>
+            <a:off x="502920" y="4690872"/>
+            <a:ext cx="3186684" cy="1325880"/>
           </a:xfrm>
           <a:prstGeom prst="roundRect">
             <a:avLst>
-              <a:gd name="adj" fmla="val 5161"/>
+              <a:gd name="adj" fmla="val 5517"/>
             </a:avLst>
           </a:prstGeom>
           <a:solidFill>
@@ -24832,13 +25729,13 @@
       </p:sp>
       <p:sp>
         <p:nvSpPr>
-          <p:cNvPr id="16" name="Shape 13"/>
+          <p:cNvPr id="18" name="Shape 16"/>
           <p:cNvSpPr/>
           <p:nvPr/>
         </p:nvSpPr>
         <p:spPr>
           <a:xfrm>
-            <a:off x="640080" y="6793992"/>
+            <a:off x="640080" y="4828032"/>
             <a:ext cx="365760" cy="365760"/>
           </a:xfrm>
           <a:prstGeom prst="ellipse">
@@ -24857,13 +25754,13 @@
       </p:sp>
       <p:sp>
         <p:nvSpPr>
-          <p:cNvPr id="17" name="Text 14"/>
-          <p:cNvSpPr txBox="1"/>
-          <p:nvPr/>
-        </p:nvSpPr>
-        <p:spPr>
-          <a:xfrm>
-            <a:off x="640080" y="6793992"/>
+          <p:cNvPr id="19" name="Text 17"/>
+          <p:cNvSpPr txBox="1"/>
+          <p:nvPr/>
+        </p:nvSpPr>
+        <p:spPr>
+          <a:xfrm>
+            <a:off x="640080" y="4828032"/>
             <a:ext cx="365760" cy="365760"/>
           </a:xfrm>
           <a:prstGeom prst="rect">
@@ -24896,13 +25793,13 @@
       </p:sp>
       <p:sp>
         <p:nvSpPr>
-          <p:cNvPr id="18" name="Text 15"/>
-          <p:cNvSpPr txBox="1"/>
-          <p:nvPr/>
-        </p:nvSpPr>
-        <p:spPr>
-          <a:xfrm>
-            <a:off x="1097280" y="6775704"/>
+          <p:cNvPr id="20" name="Text 18"/>
+          <p:cNvSpPr txBox="1"/>
+          <p:nvPr/>
+        </p:nvSpPr>
+        <p:spPr>
+          <a:xfrm>
+            <a:off x="1097280" y="4809744"/>
             <a:ext cx="2455164" cy="402336"/>
           </a:xfrm>
           <a:prstGeom prst="rect">
@@ -24935,14 +25832,14 @@
       </p:sp>
       <p:sp>
         <p:nvSpPr>
-          <p:cNvPr id="19" name="Text 16"/>
-          <p:cNvSpPr txBox="1"/>
-          <p:nvPr/>
-        </p:nvSpPr>
-        <p:spPr>
-          <a:xfrm>
-            <a:off x="1097280" y="7205472"/>
-            <a:ext cx="2455164" cy="777240"/>
+          <p:cNvPr id="21" name="Text 19"/>
+          <p:cNvSpPr txBox="1"/>
+          <p:nvPr/>
+        </p:nvSpPr>
+        <p:spPr>
+          <a:xfrm>
+            <a:off x="1097280" y="5239512"/>
+            <a:ext cx="2455164" cy="685800"/>
           </a:xfrm>
           <a:prstGeom prst="rect">
             <a:avLst/>
@@ -24974,18 +25871,18 @@
       </p:sp>
       <p:sp>
         <p:nvSpPr>
-          <p:cNvPr id="20" name="Shape 17"/>
+          <p:cNvPr id="22" name="Shape 20"/>
           <p:cNvSpPr/>
           <p:nvPr/>
         </p:nvSpPr>
         <p:spPr>
           <a:xfrm>
-            <a:off x="3872484" y="6656832"/>
-            <a:ext cx="3186684" cy="1417320"/>
+            <a:off x="3872484" y="4690872"/>
+            <a:ext cx="3186684" cy="1325880"/>
           </a:xfrm>
           <a:prstGeom prst="roundRect">
             <a:avLst>
-              <a:gd name="adj" fmla="val 5161"/>
+              <a:gd name="adj" fmla="val 5517"/>
             </a:avLst>
           </a:prstGeom>
           <a:solidFill>
@@ -25001,13 +25898,13 @@
       </p:sp>
       <p:sp>
         <p:nvSpPr>
-          <p:cNvPr id="21" name="Shape 18"/>
+          <p:cNvPr id="23" name="Shape 21"/>
           <p:cNvSpPr/>
           <p:nvPr/>
         </p:nvSpPr>
         <p:spPr>
           <a:xfrm>
-            <a:off x="4009644" y="6793992"/>
+            <a:off x="4009644" y="4828032"/>
             <a:ext cx="365760" cy="365760"/>
           </a:xfrm>
           <a:prstGeom prst="ellipse">
@@ -25026,13 +25923,13 @@
       </p:sp>
       <p:sp>
         <p:nvSpPr>
-          <p:cNvPr id="22" name="Text 19"/>
-          <p:cNvSpPr txBox="1"/>
-          <p:nvPr/>
-        </p:nvSpPr>
-        <p:spPr>
-          <a:xfrm>
-            <a:off x="4009644" y="6793992"/>
+          <p:cNvPr id="24" name="Text 22"/>
+          <p:cNvSpPr txBox="1"/>
+          <p:nvPr/>
+        </p:nvSpPr>
+        <p:spPr>
+          <a:xfrm>
+            <a:off x="4009644" y="4828032"/>
             <a:ext cx="365760" cy="365760"/>
           </a:xfrm>
           <a:prstGeom prst="rect">
@@ -25065,13 +25962,13 @@
       </p:sp>
       <p:sp>
         <p:nvSpPr>
-          <p:cNvPr id="23" name="Text 20"/>
-          <p:cNvSpPr txBox="1"/>
-          <p:nvPr/>
-        </p:nvSpPr>
-        <p:spPr>
-          <a:xfrm>
-            <a:off x="4466844" y="6775704"/>
+          <p:cNvPr id="25" name="Text 23"/>
+          <p:cNvSpPr txBox="1"/>
+          <p:nvPr/>
+        </p:nvSpPr>
+        <p:spPr>
+          <a:xfrm>
+            <a:off x="4466844" y="4809744"/>
             <a:ext cx="2455164" cy="402336"/>
           </a:xfrm>
           <a:prstGeom prst="rect">
@@ -25104,14 +26001,14 @@
       </p:sp>
       <p:sp>
         <p:nvSpPr>
-          <p:cNvPr id="24" name="Text 21"/>
-          <p:cNvSpPr txBox="1"/>
-          <p:nvPr/>
-        </p:nvSpPr>
-        <p:spPr>
-          <a:xfrm>
-            <a:off x="4466844" y="7205472"/>
-            <a:ext cx="2455164" cy="777240"/>
+          <p:cNvPr id="26" name="Text 24"/>
+          <p:cNvSpPr txBox="1"/>
+          <p:nvPr/>
+        </p:nvSpPr>
+        <p:spPr>
+          <a:xfrm>
+            <a:off x="4466844" y="5239512"/>
+            <a:ext cx="2455164" cy="685800"/>
           </a:xfrm>
           <a:prstGeom prst="rect">
             <a:avLst/>
@@ -25143,18 +26040,18 @@
       </p:sp>
       <p:sp>
         <p:nvSpPr>
-          <p:cNvPr id="25" name="Shape 22"/>
+          <p:cNvPr id="27" name="Shape 25"/>
           <p:cNvSpPr/>
           <p:nvPr/>
         </p:nvSpPr>
         <p:spPr>
           <a:xfrm>
-            <a:off x="502920" y="8238744"/>
-            <a:ext cx="3186684" cy="1417320"/>
+            <a:off x="502920" y="6181344"/>
+            <a:ext cx="3186684" cy="1325880"/>
           </a:xfrm>
           <a:prstGeom prst="roundRect">
             <a:avLst>
-              <a:gd name="adj" fmla="val 5161"/>
+              <a:gd name="adj" fmla="val 5517"/>
             </a:avLst>
           </a:prstGeom>
           <a:solidFill>
@@ -25170,13 +26067,13 @@
       </p:sp>
       <p:sp>
         <p:nvSpPr>
-          <p:cNvPr id="26" name="Shape 23"/>
+          <p:cNvPr id="28" name="Shape 26"/>
           <p:cNvSpPr/>
           <p:nvPr/>
         </p:nvSpPr>
         <p:spPr>
           <a:xfrm>
-            <a:off x="640080" y="8375904"/>
+            <a:off x="640080" y="6318504"/>
             <a:ext cx="365760" cy="365760"/>
           </a:xfrm>
           <a:prstGeom prst="ellipse">
@@ -25195,13 +26092,13 @@
       </p:sp>
       <p:sp>
         <p:nvSpPr>
-          <p:cNvPr id="27" name="Text 24"/>
-          <p:cNvSpPr txBox="1"/>
-          <p:nvPr/>
-        </p:nvSpPr>
-        <p:spPr>
-          <a:xfrm>
-            <a:off x="640080" y="8375904"/>
+          <p:cNvPr id="29" name="Text 27"/>
+          <p:cNvSpPr txBox="1"/>
+          <p:nvPr/>
+        </p:nvSpPr>
+        <p:spPr>
+          <a:xfrm>
+            <a:off x="640080" y="6318504"/>
             <a:ext cx="365760" cy="365760"/>
           </a:xfrm>
           <a:prstGeom prst="rect">
@@ -25234,13 +26131,13 @@
       </p:sp>
       <p:sp>
         <p:nvSpPr>
-          <p:cNvPr id="28" name="Text 25"/>
-          <p:cNvSpPr txBox="1"/>
-          <p:nvPr/>
-        </p:nvSpPr>
-        <p:spPr>
-          <a:xfrm>
-            <a:off x="1097280" y="8357616"/>
+          <p:cNvPr id="30" name="Text 28"/>
+          <p:cNvSpPr txBox="1"/>
+          <p:nvPr/>
+        </p:nvSpPr>
+        <p:spPr>
+          <a:xfrm>
+            <a:off x="1097280" y="6300216"/>
             <a:ext cx="2455164" cy="402336"/>
           </a:xfrm>
           <a:prstGeom prst="rect">
@@ -25273,14 +26170,14 @@
       </p:sp>
       <p:sp>
         <p:nvSpPr>
-          <p:cNvPr id="29" name="Text 26"/>
-          <p:cNvSpPr txBox="1"/>
-          <p:nvPr/>
-        </p:nvSpPr>
-        <p:spPr>
-          <a:xfrm>
-            <a:off x="1097280" y="8787384"/>
-            <a:ext cx="2455164" cy="777240"/>
+          <p:cNvPr id="31" name="Text 29"/>
+          <p:cNvSpPr txBox="1"/>
+          <p:nvPr/>
+        </p:nvSpPr>
+        <p:spPr>
+          <a:xfrm>
+            <a:off x="1097280" y="6729984"/>
+            <a:ext cx="2455164" cy="685800"/>
           </a:xfrm>
           <a:prstGeom prst="rect">
             <a:avLst/>
@@ -25312,18 +26209,18 @@
       </p:sp>
       <p:sp>
         <p:nvSpPr>
-          <p:cNvPr id="30" name="Shape 27"/>
+          <p:cNvPr id="32" name="Shape 30"/>
           <p:cNvSpPr/>
           <p:nvPr/>
         </p:nvSpPr>
         <p:spPr>
           <a:xfrm>
-            <a:off x="3872484" y="8238744"/>
-            <a:ext cx="3186684" cy="1417320"/>
+            <a:off x="3872484" y="6181344"/>
+            <a:ext cx="3186684" cy="1325880"/>
           </a:xfrm>
           <a:prstGeom prst="roundRect">
             <a:avLst>
-              <a:gd name="adj" fmla="val 5161"/>
+              <a:gd name="adj" fmla="val 5517"/>
             </a:avLst>
           </a:prstGeom>
           <a:solidFill>
@@ -25339,13 +26236,13 @@
       </p:sp>
       <p:sp>
         <p:nvSpPr>
-          <p:cNvPr id="31" name="Shape 28"/>
+          <p:cNvPr id="33" name="Shape 31"/>
           <p:cNvSpPr/>
           <p:nvPr/>
         </p:nvSpPr>
         <p:spPr>
           <a:xfrm>
-            <a:off x="4009644" y="8375904"/>
+            <a:off x="4009644" y="6318504"/>
             <a:ext cx="365760" cy="365760"/>
           </a:xfrm>
           <a:prstGeom prst="ellipse">
@@ -25364,13 +26261,13 @@
       </p:sp>
       <p:sp>
         <p:nvSpPr>
-          <p:cNvPr id="32" name="Text 29"/>
-          <p:cNvSpPr txBox="1"/>
-          <p:nvPr/>
-        </p:nvSpPr>
-        <p:spPr>
-          <a:xfrm>
-            <a:off x="4009644" y="8375904"/>
+          <p:cNvPr id="34" name="Text 32"/>
+          <p:cNvSpPr txBox="1"/>
+          <p:nvPr/>
+        </p:nvSpPr>
+        <p:spPr>
+          <a:xfrm>
+            <a:off x="4009644" y="6318504"/>
             <a:ext cx="365760" cy="365760"/>
           </a:xfrm>
           <a:prstGeom prst="rect">
@@ -25403,13 +26300,13 @@
       </p:sp>
       <p:sp>
         <p:nvSpPr>
-          <p:cNvPr id="33" name="Text 30"/>
-          <p:cNvSpPr txBox="1"/>
-          <p:nvPr/>
-        </p:nvSpPr>
-        <p:spPr>
-          <a:xfrm>
-            <a:off x="4466844" y="8357616"/>
+          <p:cNvPr id="35" name="Text 33"/>
+          <p:cNvSpPr txBox="1"/>
+          <p:nvPr/>
+        </p:nvSpPr>
+        <p:spPr>
+          <a:xfrm>
+            <a:off x="4466844" y="6300216"/>
             <a:ext cx="2455164" cy="402336"/>
           </a:xfrm>
           <a:prstGeom prst="rect">
@@ -25442,14 +26339,14 @@
       </p:sp>
       <p:sp>
         <p:nvSpPr>
-          <p:cNvPr id="34" name="Text 31"/>
-          <p:cNvSpPr txBox="1"/>
-          <p:nvPr/>
-        </p:nvSpPr>
-        <p:spPr>
-          <a:xfrm>
-            <a:off x="4466844" y="8787384"/>
-            <a:ext cx="2455164" cy="777240"/>
+          <p:cNvPr id="36" name="Text 34"/>
+          <p:cNvSpPr txBox="1"/>
+          <p:nvPr/>
+        </p:nvSpPr>
+        <p:spPr>
+          <a:xfrm>
+            <a:off x="4466844" y="6729984"/>
+            <a:ext cx="2455164" cy="685800"/>
           </a:xfrm>
           <a:prstGeom prst="rect">
             <a:avLst/>
@@ -25476,6 +26373,220 @@
               <a:t>Hỗ trợ bảo trì, sửa chữa, cải tạo, mở rộng hệ thống sau bàn giao.</a:t>
             </a:r>
             <a:endParaRPr lang="en-US" sz="950" dirty="0"/>
+          </a:p>
+        </p:txBody>
+      </p:sp>
+      <p:sp>
+        <p:nvSpPr>
+          <p:cNvPr id="37" name="Shape 35"/>
+          <p:cNvSpPr/>
+          <p:nvPr/>
+        </p:nvSpPr>
+        <p:spPr>
+          <a:xfrm>
+            <a:off x="502920" y="7863840"/>
+            <a:ext cx="6556248" cy="1828800"/>
+          </a:xfrm>
+          <a:prstGeom prst="roundRect">
+            <a:avLst>
+              <a:gd name="adj" fmla="val 4000"/>
+            </a:avLst>
+          </a:prstGeom>
+          <a:solidFill>
+            <a:schemeClr val="bg2"/>
+          </a:solidFill>
+          <a:ln w="15875">
+            <a:solidFill>
+              <a:schemeClr val="accent1"/>
+            </a:solidFill>
+            <a:prstDash val="solid"/>
+          </a:ln>
+        </p:spPr>
+      </p:sp>
+      <p:sp>
+        <p:nvSpPr>
+          <p:cNvPr id="38" name="Text 36"/>
+          <p:cNvSpPr txBox="1"/>
+          <p:nvPr/>
+        </p:nvSpPr>
+        <p:spPr>
+          <a:xfrm>
+            <a:off x="777240" y="8028432"/>
+            <a:ext cx="6007608" cy="228600"/>
+          </a:xfrm>
+          <a:prstGeom prst="rect">
+            <a:avLst/>
+          </a:prstGeom>
+          <a:noFill/>
+          <a:ln/>
+        </p:spPr>
+        <p:txBody>
+          <a:bodyPr wrap="square" lIns="0" tIns="0" rIns="0" bIns="0" rtlCol="0" anchor="ctr"/>
+          <a:lstStyle/>
+          <a:p>
+            <a:pPr indent="0" marL="0">
+              <a:buNone/>
+            </a:pPr>
+            <a:r>
+              <a:rPr lang="en-US" sz="900" b="1" spc="200" kern="0" dirty="0">
+                <a:solidFill>
+                  <a:schemeClr val="tx2"/>
+                </a:solidFill>
+                <a:latin typeface="Arial" pitchFamily="34" charset="0"/>
+                <a:ea typeface="Arial" pitchFamily="34" charset="-122"/>
+                <a:cs typeface="Arial" pitchFamily="34" charset="-120"/>
+              </a:rPr>
+              <a:t>LIÊN HỆ KHẢO SÁT – TƯ VẤN – BÁO GIÁ</a:t>
+            </a:r>
+            <a:endParaRPr lang="en-US" sz="900" dirty="0"/>
+          </a:p>
+        </p:txBody>
+      </p:sp>
+      <p:sp>
+        <p:nvSpPr>
+          <p:cNvPr id="39" name="Text 37"/>
+          <p:cNvSpPr txBox="1"/>
+          <p:nvPr/>
+        </p:nvSpPr>
+        <p:spPr>
+          <a:xfrm>
+            <a:off x="777240" y="8321040"/>
+            <a:ext cx="3108960" cy="548640"/>
+          </a:xfrm>
+          <a:prstGeom prst="rect">
+            <a:avLst/>
+          </a:prstGeom>
+          <a:noFill/>
+          <a:ln/>
+        </p:spPr>
+        <p:txBody>
+          <a:bodyPr wrap="square" lIns="0" tIns="0" rIns="0" bIns="0" rtlCol="0" anchor="ctr"/>
+          <a:lstStyle/>
+          <a:p>
+            <a:pPr indent="0" marL="0">
+              <a:buNone/>
+            </a:pPr>
+            <a:r>
+              <a:rPr lang="en-US" sz="2800" b="1" dirty="0">
+                <a:solidFill>
+                  <a:schemeClr val="accent1"/>
+                </a:solidFill>
+                <a:latin typeface="Arial" pitchFamily="34" charset="0"/>
+                <a:ea typeface="Arial" pitchFamily="34" charset="-122"/>
+                <a:cs typeface="Arial" pitchFamily="34" charset="-120"/>
+              </a:rPr>
+              <a:t>0984 586 089</a:t>
+            </a:r>
+            <a:endParaRPr lang="en-US" sz="2800" dirty="0"/>
+          </a:p>
+        </p:txBody>
+      </p:sp>
+      <p:sp>
+        <p:nvSpPr>
+          <p:cNvPr id="40" name="Text 38"/>
+          <p:cNvSpPr txBox="1"/>
+          <p:nvPr/>
+        </p:nvSpPr>
+        <p:spPr>
+          <a:xfrm>
+            <a:off x="3977640" y="8275320"/>
+            <a:ext cx="2807208" cy="731520"/>
+          </a:xfrm>
+          <a:prstGeom prst="rect">
+            <a:avLst/>
+          </a:prstGeom>
+          <a:noFill/>
+          <a:ln/>
+        </p:spPr>
+        <p:txBody>
+          <a:bodyPr wrap="square" lIns="0" tIns="0" rIns="0" bIns="0" rtlCol="0" anchor="ctr"/>
+          <a:lstStyle/>
+          <a:p>
+            <a:pPr indent="0" marL="0">
+              <a:spcAft>
+                <a:spcPts val="300"/>
+              </a:spcAft>
+              <a:buNone/>
+            </a:pPr>
+            <a:r>
+              <a:rPr lang="en-US" sz="1000" b="1" dirty="0">
+                <a:solidFill>
+                  <a:schemeClr val="tx1"/>
+                </a:solidFill>
+              </a:rPr>
+              <a:t>Ông HỒ VĂN BÌNH – Giám đốc</a:t>
+            </a:r>
+            <a:endParaRPr lang="en-US" sz="1000" dirty="0"/>
+          </a:p>
+          <a:p>
+            <a:pPr indent="0" marL="0">
+              <a:spcAft>
+                <a:spcPts val="300"/>
+              </a:spcAft>
+              <a:buNone/>
+            </a:pPr>
+            <a:r>
+              <a:rPr lang="en-US" sz="1000" dirty="0">
+                <a:solidFill>
+                  <a:schemeClr val="tx1"/>
+                </a:solidFill>
+              </a:rPr>
+              <a:t>hobinh150589@gmail.com</a:t>
+            </a:r>
+            <a:endParaRPr lang="en-US" sz="1000" dirty="0"/>
+          </a:p>
+          <a:p>
+            <a:pPr indent="0" marL="0">
+              <a:spcAft>
+                <a:spcPts val="300"/>
+              </a:spcAft>
+              <a:buNone/>
+            </a:pPr>
+            <a:r>
+              <a:rPr lang="en-US" sz="1000" dirty="0">
+                <a:solidFill>
+                  <a:schemeClr val="tx1"/>
+                </a:solidFill>
+              </a:rPr>
+              <a:t>Điện • Cấp thoát nước • Hút sương dầu • Bơm &amp; xử lý nước</a:t>
+            </a:r>
+            <a:endParaRPr lang="en-US" sz="1000" dirty="0"/>
+          </a:p>
+        </p:txBody>
+      </p:sp>
+      <p:sp>
+        <p:nvSpPr>
+          <p:cNvPr id="41" name="Text 39"/>
+          <p:cNvSpPr txBox="1"/>
+          <p:nvPr/>
+        </p:nvSpPr>
+        <p:spPr>
+          <a:xfrm>
+            <a:off x="777240" y="9098280"/>
+            <a:ext cx="6007608" cy="411480"/>
+          </a:xfrm>
+          <a:prstGeom prst="rect">
+            <a:avLst/>
+          </a:prstGeom>
+          <a:noFill/>
+          <a:ln/>
+        </p:spPr>
+        <p:txBody>
+          <a:bodyPr wrap="square" lIns="0" tIns="0" rIns="0" bIns="0" rtlCol="0" anchor="t"/>
+          <a:lstStyle/>
+          <a:p>
+            <a:pPr indent="0" marL="0">
+              <a:buNone/>
+            </a:pPr>
+            <a:r>
+              <a:rPr lang="en-US" sz="900" dirty="0">
+                <a:solidFill>
+                  <a:schemeClr val="accent3"/>
+                </a:solidFill>
+              </a:rPr>
+              <a:t>Số 2A đường Nguyễn Khánh Toàn, khối Trường Phúc, phường Trường Vinh, tỉnh Nghệ An, Việt Nam</a:t>
+            </a:r>
+            <a:endParaRPr lang="en-US" sz="900" dirty="0"/>
           </a:p>
         </p:txBody>
       </p:sp>
@@ -25551,7 +26662,7 @@
       </p:grpSpPr>
       <p:pic>
         <p:nvPicPr>
-          <p:cNvPr id="2" name="photo img27.jpg" descr="Ảnh hiện trường BLT">    </p:cNvPr>
+          <p:cNvPr id="2" name="logo" descr="preencoded.png">    </p:cNvPr>
           <p:cNvPicPr>
             <a:picLocks noChangeAspect="1"/>
           </p:cNvPicPr>
@@ -25565,8 +26676,8 @@
         </p:blipFill>
         <p:spPr>
           <a:xfrm>
-            <a:off x="0" y="0"/>
-            <a:ext cx="7562088" cy="4206240"/>
+            <a:off x="2775204" y="1371600"/>
+            <a:ext cx="2011680" cy="2011680"/>
           </a:xfrm>
           <a:prstGeom prst="rect">
             <a:avLst/>
@@ -25575,60 +26686,7 @@
       </p:pic>
       <p:sp>
         <p:nvSpPr>
-          <p:cNvPr id="3" name="Shape 0"/>
-          <p:cNvSpPr/>
-          <p:nvPr/>
-        </p:nvSpPr>
-        <p:spPr>
-          <a:xfrm>
-            <a:off x="0" y="0"/>
-            <a:ext cx="7562088" cy="4206240"/>
-          </a:xfrm>
-          <a:prstGeom prst="rect">
-            <a:avLst/>
-          </a:prstGeom>
-          <a:solidFill>
-            <a:schemeClr val="tx2">
-              <a:alpha val="55000"/>
-            </a:schemeClr>
-          </a:solidFill>
-          <a:ln w="12700">
-            <a:solidFill>
-              <a:schemeClr val="tx2">
-                <a:alpha val="0"/>
-              </a:schemeClr>
-            </a:solidFill>
-            <a:prstDash val="solid"/>
-          </a:ln>
-        </p:spPr>
-      </p:sp>
-      <p:pic>
-        <p:nvPicPr>
-          <p:cNvPr id="4" name="logo" descr="preencoded.png">    </p:cNvPr>
-          <p:cNvPicPr>
-            <a:picLocks noChangeAspect="1"/>
-          </p:cNvPicPr>
-          <p:nvPr/>
-        </p:nvPicPr>
-        <p:blipFill>
-          <a:blip r:embed="rId2"/>
-          <a:stretch>
-            <a:fillRect/>
-          </a:stretch>
-        </p:blipFill>
-        <p:spPr>
-          <a:xfrm>
-            <a:off x="2958084" y="1280160"/>
-            <a:ext cx="1645920" cy="1645920"/>
-          </a:xfrm>
-          <a:prstGeom prst="rect">
-            <a:avLst/>
-          </a:prstGeom>
-        </p:spPr>
-      </p:pic>
-      <p:sp>
-        <p:nvSpPr>
-          <p:cNvPr id="5" name="Text 1"/>
+          <p:cNvPr id="3" name="Text 0"/>
           <p:cNvSpPr txBox="1"/>
           <p:nvPr/>
         </p:nvSpPr>
@@ -25667,7 +26725,7 @@
       </p:sp>
       <p:sp>
         <p:nvSpPr>
-          <p:cNvPr id="6" name="Text 2"/>
+          <p:cNvPr id="4" name="Text 1"/>
           <p:cNvSpPr txBox="1"/>
           <p:nvPr/>
         </p:nvSpPr>
@@ -25703,7 +26761,7 @@
       </p:sp>
       <p:sp>
         <p:nvSpPr>
-          <p:cNvPr id="7" name="Text 3"/>
+          <p:cNvPr id="5" name="Text 2"/>
           <p:cNvSpPr txBox="1"/>
           <p:nvPr/>
         </p:nvSpPr>
@@ -25739,7 +26797,7 @@
       </p:sp>
       <p:sp>
         <p:nvSpPr>
-          <p:cNvPr id="8" name="Text 4"/>
+          <p:cNvPr id="6" name="Text 3"/>
           <p:cNvSpPr txBox="1"/>
           <p:nvPr/>
         </p:nvSpPr>
@@ -25775,7 +26833,7 @@
       </p:sp>
       <p:sp>
         <p:nvSpPr>
-          <p:cNvPr id="9" name="Text 5"/>
+          <p:cNvPr id="7" name="Text 4"/>
           <p:cNvSpPr txBox="1"/>
           <p:nvPr/>
         </p:nvSpPr>
@@ -25811,7 +26869,7 @@
       </p:sp>
       <p:sp>
         <p:nvSpPr>
-          <p:cNvPr id="10" name="Text 6"/>
+          <p:cNvPr id="8" name="Text 5"/>
           <p:cNvSpPr txBox="1"/>
           <p:nvPr/>
         </p:nvSpPr>
@@ -25847,7 +26905,7 @@
       </p:sp>
       <p:sp>
         <p:nvSpPr>
-          <p:cNvPr id="11" name="Text 7"/>
+          <p:cNvPr id="9" name="Text 6"/>
           <p:cNvSpPr txBox="1"/>
           <p:nvPr/>
         </p:nvSpPr>
@@ -25883,7 +26941,7 @@
       </p:sp>
       <p:sp>
         <p:nvSpPr>
-          <p:cNvPr id="12" name="Text 8"/>
+          <p:cNvPr id="10" name="Text 7"/>
           <p:cNvSpPr txBox="1"/>
           <p:nvPr/>
         </p:nvSpPr>
@@ -25919,7 +26977,7 @@
       </p:sp>
       <p:sp>
         <p:nvSpPr>
-          <p:cNvPr id="13" name="Text 9"/>
+          <p:cNvPr id="11" name="Text 8"/>
           <p:cNvSpPr txBox="1"/>
           <p:nvPr/>
         </p:nvSpPr>
@@ -25955,7 +27013,7 @@
       </p:sp>
       <p:sp>
         <p:nvSpPr>
-          <p:cNvPr id="14" name="Text 10"/>
+          <p:cNvPr id="12" name="Text 9"/>
           <p:cNvSpPr txBox="1"/>
           <p:nvPr/>
         </p:nvSpPr>
@@ -25991,7 +27049,7 @@
       </p:sp>
       <p:sp>
         <p:nvSpPr>
-          <p:cNvPr id="15" name="Text 11"/>
+          <p:cNvPr id="13" name="Text 10"/>
           <p:cNvSpPr txBox="1"/>
           <p:nvPr/>
         </p:nvSpPr>
@@ -26027,7 +27085,7 @@
       </p:sp>
       <p:sp>
         <p:nvSpPr>
-          <p:cNvPr id="16" name="Text 12"/>
+          <p:cNvPr id="14" name="Text 11"/>
           <p:cNvSpPr txBox="1"/>
           <p:nvPr/>
         </p:nvSpPr>
@@ -26063,7 +27121,7 @@
       </p:sp>
       <p:sp>
         <p:nvSpPr>
-          <p:cNvPr id="17" name="Text 13"/>
+          <p:cNvPr id="15" name="Text 12"/>
           <p:cNvSpPr txBox="1"/>
           <p:nvPr/>
         </p:nvSpPr>
@@ -26099,7 +27157,7 @@
       </p:sp>
       <p:sp>
         <p:nvSpPr>
-          <p:cNvPr id="18" name="Text 14"/>
+          <p:cNvPr id="16" name="Text 13"/>
           <p:cNvSpPr txBox="1"/>
           <p:nvPr/>
         </p:nvSpPr>
@@ -26135,7 +27193,7 @@
       </p:sp>
       <p:sp>
         <p:nvSpPr>
-          <p:cNvPr id="19" name="Text 15"/>
+          <p:cNvPr id="17" name="Text 14"/>
           <p:cNvSpPr txBox="1"/>
           <p:nvPr/>
         </p:nvSpPr>
@@ -26171,7 +27229,7 @@
       </p:sp>
       <p:sp>
         <p:nvSpPr>
-          <p:cNvPr id="20" name="Text 16"/>
+          <p:cNvPr id="18" name="Text 15"/>
           <p:cNvSpPr txBox="1"/>
           <p:nvPr/>
         </p:nvSpPr>
@@ -26367,7 +27425,7 @@
       </p:sp>
       <p:pic>
         <p:nvPicPr>
-          <p:cNvPr id="4" name="photo img33.jpg" descr="Ảnh hiện trường BLT">    </p:cNvPr>
+          <p:cNvPr id="4" name="photo img33_top.jpg" descr="Ảnh hiện trường BLT">    </p:cNvPr>
           <p:cNvPicPr>
             <a:picLocks noChangeAspect="1"/>
           </p:cNvPicPr>
@@ -28062,7 +29120,7 @@
       </p:sp>
       <p:pic>
         <p:nvPicPr>
-          <p:cNvPr id="4" name="photo img35.jpg" descr="Đội ngũ kỹ thuật BLT tại công trường – xã Hưng Nguyên, Nghệ An (10/2026)">    </p:cNvPr>
+          <p:cNvPr id="4" name="photo img79.jpg" descr="Đội thi công BLT tại nhà xưởng gia công CNC – Hưng Nguyên, Nghệ An">    </p:cNvPr>
           <p:cNvPicPr>
             <a:picLocks noChangeAspect="1"/>
           </p:cNvPicPr>
@@ -28116,7 +29174,7 @@
                   <a:schemeClr val="accent3"/>
                 </a:solidFill>
               </a:rPr>
-              <a:t>Đội ngũ kỹ thuật BLT tại công trường – xã Hưng Nguyên, Nghệ An (10/2026)</a:t>
+              <a:t>Đội thi công BLT tại nhà xưởng gia công CNC – Hưng Nguyên, Nghệ An</a:t>
             </a:r>
             <a:endParaRPr lang="en-US" sz="800" dirty="0"/>
           </a:p>
@@ -29182,7 +30240,7 @@
       </p:sp>
       <p:pic>
         <p:nvPicPr>
-          <p:cNvPr id="24" name="photo img07.jpg" descr="Thi công trên xe nâng người – Hà Nam, Ninh Bình">    </p:cNvPr>
+          <p:cNvPr id="24" name="photo img74.jpg" descr="Lắp giá đỡ thép trên xe nâng người – Hưng Nguyên, Nghệ An">    </p:cNvPr>
           <p:cNvPicPr>
             <a:picLocks noChangeAspect="1"/>
           </p:cNvPicPr>
@@ -29236,7 +30294,7 @@
                   <a:schemeClr val="accent3"/>
                 </a:solidFill>
               </a:rPr>
-              <a:t>Thi công trên xe nâng người – Hà Nam, Ninh Bình</a:t>
+              <a:t>Lắp giá đỡ thép trên xe nâng người – Hưng Nguyên, Nghệ An</a:t>
             </a:r>
             <a:endParaRPr lang="en-US" sz="800" dirty="0"/>
           </a:p>
@@ -32782,7 +33840,7 @@
       </p:sp>
       <p:pic>
         <p:nvPicPr>
-          <p:cNvPr id="41" name="photo img45.jpg" descr="Đội thi công BLT tại trạm xử lý nước, Thành phố Huế (09/2026)">    </p:cNvPr>
+          <p:cNvPr id="41" name="photo img46_c.jpg" descr="Tập kết thiết bị tại nhà máy – Thành phố Huế (09/2026)">    </p:cNvPr>
           <p:cNvPicPr>
             <a:picLocks noChangeAspect="1"/>
           </p:cNvPicPr>
@@ -32836,7 +33894,7 @@
                   <a:schemeClr val="accent3"/>
                 </a:solidFill>
               </a:rPr>
-              <a:t>Đội thi công BLT tại trạm xử lý nước, Thành phố Huế (09/2026)</a:t>
+              <a:t>Tập kết thiết bị tại nhà máy – Thành phố Huế (09/2026)</a:t>
             </a:r>
             <a:endParaRPr lang="en-US" sz="800" dirty="0"/>
           </a:p>
@@ -33047,7 +34105,7 @@
         </p:nvSpPr>
         <p:spPr>
           <a:xfrm>
-            <a:off x="685800" y="2990088"/>
+            <a:off x="3044952" y="2990088"/>
             <a:ext cx="438912" cy="438912"/>
           </a:xfrm>
           <a:prstGeom prst="ellipse">
@@ -33072,7 +34130,7 @@
         </p:nvSpPr>
         <p:spPr>
           <a:xfrm>
-            <a:off x="685800" y="2990088"/>
+            <a:off x="3044952" y="2990088"/>
             <a:ext cx="438912" cy="438912"/>
           </a:xfrm>
           <a:prstGeom prst="rect">
@@ -33265,7 +34323,7 @@
       </p:sp>
       <p:pic>
         <p:nvPicPr>
-          <p:cNvPr id="11" name="photo img04.jpg" descr="Ảnh hiện trường BLT">    </p:cNvPr>
+          <p:cNvPr id="11" name="photo img15.jpg" descr="Ảnh hiện trường BLT">    </p:cNvPr>
           <p:cNvPicPr>
             <a:picLocks noChangeAspect="1"/>
           </p:cNvPicPr>
@@ -33295,7 +34353,7 @@
         </p:nvSpPr>
         <p:spPr>
           <a:xfrm>
-            <a:off x="4078224" y="2990088"/>
+            <a:off x="6437376" y="2990088"/>
             <a:ext cx="438912" cy="438912"/>
           </a:xfrm>
           <a:prstGeom prst="ellipse">
@@ -33320,7 +34378,7 @@
         </p:nvSpPr>
         <p:spPr>
           <a:xfrm>
-            <a:off x="4078224" y="2990088"/>
+            <a:off x="6437376" y="2990088"/>
             <a:ext cx="438912" cy="438912"/>
           </a:xfrm>
           <a:prstGeom prst="rect">
@@ -33543,7 +34601,7 @@
         </p:nvSpPr>
         <p:spPr>
           <a:xfrm>
-            <a:off x="685800" y="7287768"/>
+            <a:off x="3044952" y="7287768"/>
             <a:ext cx="438912" cy="438912"/>
           </a:xfrm>
           <a:prstGeom prst="ellipse">
@@ -33568,7 +34626,7 @@
         </p:nvSpPr>
         <p:spPr>
           <a:xfrm>
-            <a:off x="685800" y="7287768"/>
+            <a:off x="3044952" y="7287768"/>
             <a:ext cx="438912" cy="438912"/>
           </a:xfrm>
           <a:prstGeom prst="rect">
@@ -33761,7 +34819,7 @@
       </p:sp>
       <p:pic>
         <p:nvPicPr>
-          <p:cNvPr id="23" name="photo img16.jpg" descr="Ảnh hiện trường BLT">    </p:cNvPr>
+          <p:cNvPr id="23" name="photo img61.jpg" descr="Ảnh hiện trường BLT">    </p:cNvPr>
           <p:cNvPicPr>
             <a:picLocks noChangeAspect="1"/>
           </p:cNvPicPr>
@@ -33791,7 +34849,7 @@
         </p:nvSpPr>
         <p:spPr>
           <a:xfrm>
-            <a:off x="4078224" y="7287768"/>
+            <a:off x="6437376" y="7287768"/>
             <a:ext cx="438912" cy="438912"/>
           </a:xfrm>
           <a:prstGeom prst="ellipse">
@@ -33816,7 +34874,7 @@
         </p:nvSpPr>
         <p:spPr>
           <a:xfrm>
-            <a:off x="4078224" y="7287768"/>
+            <a:off x="6437376" y="7287768"/>
             <a:ext cx="438912" cy="438912"/>
           </a:xfrm>
           <a:prstGeom prst="rect">

--- a/ho-so-nang-luc-BLT/HO_SO_NANG_LUC_BLT.pptx
+++ b/ho-so-nang-luc-BLT/HO_SO_NANG_LUC_BLT.pptx
@@ -132,14 +132,14 @@
   <p:extLst>
     <p:ext uri="{521415D9-36F7-43E2-AB2F-B90AF26B5E84}">
       <p14:sectionLst xmlns:p14="http://schemas.microsoft.com/office/powerpoint/2010/main">
-        <p14:section name="Mở đầu" id="{27cd69b8-5d94-0a91-8c6d-a58dd4d0d0ee}">
+        <p14:section name="Mở đầu" id="{2e8ac25b-04ae-7a4a-465d-5a9aee80bbab}">
           <p14:sldIdLst>
             <p14:sldId id="256"/>
             <p14:sldId id="257"/>
             <p14:sldId id="258"/>
           </p14:sldIdLst>
         </p14:section>
-        <p14:section name="01 Tổng quan" id="{9cde1d9b-c4d8-c2cc-6163-19b41e274200}">
+        <p14:section name="01 Tổng quan" id="{1a5fdbac-4f18-999f-c492-7de02233f7b4}">
           <p14:sldIdLst>
             <p14:sldId id="259"/>
             <p14:sldId id="260"/>
@@ -148,39 +148,39 @@
             <p14:sldId id="263"/>
           </p14:sldIdLst>
         </p14:section>
-        <p14:section name="02 Điện nước công trình" id="{98ccb3cd-94e9-4a7d-99d9-53275ca8cbb1}">
+        <p14:section name="02 Điện nước công trình" id="{aade84d3-c1f4-50e8-2a3e-0386d078c779}">
           <p14:sldIdLst>
             <p14:sldId id="264"/>
             <p14:sldId id="265"/>
             <p14:sldId id="266"/>
           </p14:sldIdLst>
         </p14:section>
-        <p14:section name="03 Hút sương dầu nhà xưởng" id="{7ab66364-b84f-3acd-1e12-4ffadb8c22d0}">
+        <p14:section name="03 Hút sương dầu nhà xưởng" id="{8d0d0a72-32d7-9386-264c-966fa6c5a677}">
           <p14:sldIdLst>
             <p14:sldId id="267"/>
             <p14:sldId id="268"/>
             <p14:sldId id="269"/>
           </p14:sldIdLst>
         </p14:section>
-        <p14:section name="04 Bơm &amp; xử lý nước" id="{ec8f1167-8296-2fda-68f1-628e927e8bc1}">
+        <p14:section name="04 Bơm &amp; xử lý nước" id="{191684f8-1231-5318-b79d-90e12b5ace0e}">
           <p14:sldIdLst>
             <p14:sldId id="270"/>
           </p14:sldIdLst>
         </p14:section>
-        <p14:section name="05 Quản trị dự án" id="{22dd7fe4-232f-18e0-787d-ee3af76ab44c}">
+        <p14:section name="05 Quản trị dự án" id="{e97ce6ce-550a-c6b4-cbea-146b30dffdba}">
           <p14:sldIdLst>
             <p14:sldId id="271"/>
             <p14:sldId id="272"/>
             <p14:sldId id="273"/>
           </p14:sldIdLst>
         </p14:section>
-        <p14:section name="06 Nguồn lực" id="{5c35c788-511c-4df4-382b-a2da2f5a8eef}">
+        <p14:section name="06 Nguồn lực" id="{abe803dd-9157-b66f-10d3-2f9d33b0c325}">
           <p14:sldIdLst>
             <p14:sldId id="274"/>
             <p14:sldId id="275"/>
           </p14:sldIdLst>
         </p14:section>
-        <p14:section name="07 Công trình tiêu biểu" id="{87157b3f-e221-469f-7ce9-6dd26054cb2d}">
+        <p14:section name="07 Công trình tiêu biểu" id="{14b75113-42e2-9d27-99de-ae994a78eca1}">
           <p14:sldIdLst>
             <p14:sldId id="276"/>
             <p14:sldId id="277"/>
@@ -188,7 +188,7 @@
             <p14:sldId id="279"/>
           </p14:sldIdLst>
         </p14:section>
-        <p14:section name="08 Cam kết &amp; liên hệ" id="{80156dc7-746c-3659-adaf-65bffb8f1d1b}">
+        <p14:section name="08 Cam kết &amp; liên hệ" id="{749a0013-182c-e872-96b9-64660d5a57ab}">
           <p14:sldIdLst>
             <p14:sldId id="280"/>
             <p14:sldId id="281"/>
@@ -3574,7 +3574,7 @@
       </p:grpSpPr>
       <p:pic>
         <p:nvPicPr>
-          <p:cNvPr id="2" name="cover team img57.jpg" descr="Đội ngũ công nhân BLT">    </p:cNvPr>
+          <p:cNvPr id="2" name="cover team img56_cov.jpg" descr="Đội ngũ công nhân BLT">    </p:cNvPr>
           <p:cNvPicPr>
             <a:picLocks noChangeAspect="1"/>
           </p:cNvPicPr>
@@ -3589,7 +3589,7 @@
         <p:spPr>
           <a:xfrm>
             <a:off x="0" y="0"/>
-            <a:ext cx="7562088" cy="3977640"/>
+            <a:ext cx="3749040" cy="6583680"/>
           </a:xfrm>
           <a:prstGeom prst="rect">
             <a:avLst/>
@@ -3612,8 +3612,8 @@
         </p:blipFill>
         <p:spPr>
           <a:xfrm>
-            <a:off x="0" y="4050792"/>
-            <a:ext cx="2471928" cy="2532888"/>
+            <a:off x="3822192" y="0"/>
+            <a:ext cx="3739896" cy="3255264"/>
           </a:xfrm>
           <a:prstGeom prst="rect">
             <a:avLst/>
@@ -3636,17 +3636,42 @@
         </p:blipFill>
         <p:spPr>
           <a:xfrm>
-            <a:off x="2545080" y="4050792"/>
-            <a:ext cx="2471928" cy="2532888"/>
+            <a:off x="3822192" y="3328416"/>
+            <a:ext cx="3739896" cy="3255264"/>
           </a:xfrm>
           <a:prstGeom prst="rect">
             <a:avLst/>
           </a:prstGeom>
         </p:spPr>
       </p:pic>
+      <p:sp>
+        <p:nvSpPr>
+          <p:cNvPr id="5" name="Shape 0"/>
+          <p:cNvSpPr/>
+          <p:nvPr/>
+        </p:nvSpPr>
+        <p:spPr>
+          <a:xfrm>
+            <a:off x="0" y="6583680"/>
+            <a:ext cx="7562088" cy="4105656"/>
+          </a:xfrm>
+          <a:prstGeom prst="rect">
+            <a:avLst/>
+          </a:prstGeom>
+          <a:solidFill>
+            <a:schemeClr val="tx2"/>
+          </a:solidFill>
+          <a:ln w="12700">
+            <a:solidFill>
+              <a:schemeClr val="tx2"/>
+            </a:solidFill>
+            <a:prstDash val="solid"/>
+          </a:ln>
+        </p:spPr>
+      </p:sp>
       <p:pic>
         <p:nvPicPr>
-          <p:cNvPr id="5" name="cover team img56.jpg" descr="Đội ngũ công nhân BLT">    </p:cNvPr>
+          <p:cNvPr id="6" name="logo" descr="preencoded.png">    </p:cNvPr>
           <p:cNvPicPr>
             <a:picLocks noChangeAspect="1"/>
           </p:cNvPicPr>
@@ -3660,8 +3685,8 @@
         </p:blipFill>
         <p:spPr>
           <a:xfrm>
-            <a:off x="5090160" y="4050792"/>
-            <a:ext cx="2471928" cy="2532888"/>
+            <a:off x="6007608" y="7040880"/>
+            <a:ext cx="1051560" cy="1051560"/>
           </a:xfrm>
           <a:prstGeom prst="rect">
             <a:avLst/>
@@ -3670,13 +3695,13 @@
       </p:pic>
       <p:sp>
         <p:nvSpPr>
-          <p:cNvPr id="6" name="Shape 0"/>
+          <p:cNvPr id="7" name="Shape 1"/>
           <p:cNvSpPr/>
           <p:nvPr/>
         </p:nvSpPr>
         <p:spPr>
           <a:xfrm>
-            <a:off x="4544568" y="3364992"/>
+            <a:off x="4544568" y="6355080"/>
             <a:ext cx="2514600" cy="457200"/>
           </a:xfrm>
           <a:prstGeom prst="roundRect">
@@ -3697,13 +3722,13 @@
       </p:sp>
       <p:sp>
         <p:nvSpPr>
-          <p:cNvPr id="7" name="Text 1"/>
-          <p:cNvSpPr txBox="1"/>
-          <p:nvPr/>
-        </p:nvSpPr>
-        <p:spPr>
-          <a:xfrm>
-            <a:off x="4544568" y="3364992"/>
+          <p:cNvPr id="8" name="Text 2"/>
+          <p:cNvSpPr txBox="1"/>
+          <p:nvPr/>
+        </p:nvSpPr>
+        <p:spPr>
+          <a:xfrm>
+            <a:off x="4544568" y="6355080"/>
             <a:ext cx="2514600" cy="457200"/>
           </a:xfrm>
           <a:prstGeom prst="rect">
@@ -3736,56 +3761,7 @@
       </p:sp>
       <p:sp>
         <p:nvSpPr>
-          <p:cNvPr id="8" name="Shape 2"/>
-          <p:cNvSpPr/>
-          <p:nvPr/>
-        </p:nvSpPr>
-        <p:spPr>
-          <a:xfrm>
-            <a:off x="0" y="6583680"/>
-            <a:ext cx="7562088" cy="4105656"/>
-          </a:xfrm>
-          <a:prstGeom prst="rect">
-            <a:avLst/>
-          </a:prstGeom>
-          <a:solidFill>
-            <a:schemeClr val="tx2"/>
-          </a:solidFill>
-          <a:ln w="12700">
-            <a:solidFill>
-              <a:schemeClr val="tx2"/>
-            </a:solidFill>
-            <a:prstDash val="solid"/>
-          </a:ln>
-        </p:spPr>
-      </p:sp>
-      <p:pic>
-        <p:nvPicPr>
-          <p:cNvPr id="9" name="logo" descr="preencoded.png">    </p:cNvPr>
-          <p:cNvPicPr>
-            <a:picLocks noChangeAspect="1"/>
-          </p:cNvPicPr>
-          <p:nvPr/>
-        </p:nvPicPr>
-        <p:blipFill>
-          <a:blip r:embed="rId5"/>
-          <a:stretch>
-            <a:fillRect/>
-          </a:stretch>
-        </p:blipFill>
-        <p:spPr>
-          <a:xfrm>
-            <a:off x="6007608" y="6903720"/>
-            <a:ext cx="1051560" cy="1051560"/>
-          </a:xfrm>
-          <a:prstGeom prst="rect">
-            <a:avLst/>
-          </a:prstGeom>
-        </p:spPr>
-      </p:pic>
-      <p:sp>
-        <p:nvSpPr>
-          <p:cNvPr id="10" name="Text 3"/>
+          <p:cNvPr id="9" name="Text 3"/>
           <p:cNvSpPr txBox="1"/>
           <p:nvPr/>
         </p:nvSpPr>
@@ -3824,7 +3800,7 @@
       </p:sp>
       <p:sp>
         <p:nvSpPr>
-          <p:cNvPr id="11" name="Text 4"/>
+          <p:cNvPr id="10" name="Text 4"/>
           <p:cNvSpPr txBox="1"/>
           <p:nvPr/>
         </p:nvSpPr>
@@ -3863,7 +3839,7 @@
       </p:sp>
       <p:sp>
         <p:nvSpPr>
-          <p:cNvPr id="12" name="Text 5"/>
+          <p:cNvPr id="11" name="Text 5"/>
           <p:cNvSpPr txBox="1"/>
           <p:nvPr/>
         </p:nvSpPr>
@@ -3916,7 +3892,7 @@
       </p:sp>
       <p:sp>
         <p:nvSpPr>
-          <p:cNvPr id="13" name="Text 6"/>
+          <p:cNvPr id="12" name="Text 6"/>
           <p:cNvSpPr txBox="1"/>
           <p:nvPr/>
         </p:nvSpPr>
@@ -3966,7 +3942,7 @@
       </p:sp>
       <p:sp>
         <p:nvSpPr>
-          <p:cNvPr id="14" name="Text 7"/>
+          <p:cNvPr id="13" name="Text 7"/>
           <p:cNvSpPr txBox="1"/>
           <p:nvPr/>
         </p:nvSpPr>
@@ -4002,7 +3978,7 @@
       </p:sp>
       <p:sp>
         <p:nvSpPr>
-          <p:cNvPr id="15" name="Text 8"/>
+          <p:cNvPr id="14" name="Text 8"/>
           <p:cNvSpPr txBox="1"/>
           <p:nvPr/>
         </p:nvSpPr>
@@ -4038,7 +4014,7 @@
       </p:sp>
       <p:sp>
         <p:nvSpPr>
-          <p:cNvPr id="16" name="Text 9"/>
+          <p:cNvPr id="15" name="Text 9"/>
           <p:cNvSpPr txBox="1"/>
           <p:nvPr/>
         </p:nvSpPr>

--- a/ho-so-nang-luc-BLT/HO_SO_NANG_LUC_BLT.pptx
+++ b/ho-so-nang-luc-BLT/HO_SO_NANG_LUC_BLT.pptx
@@ -132,14 +132,14 @@
   <p:extLst>
     <p:ext uri="{521415D9-36F7-43E2-AB2F-B90AF26B5E84}">
       <p14:sectionLst xmlns:p14="http://schemas.microsoft.com/office/powerpoint/2010/main">
-        <p14:section name="Mở đầu" id="{2e8ac25b-04ae-7a4a-465d-5a9aee80bbab}">
+        <p14:section name="Mở đầu" id="{597f9ff5-9b2f-a2d9-7065-065be2b3af12}">
           <p14:sldIdLst>
             <p14:sldId id="256"/>
             <p14:sldId id="257"/>
             <p14:sldId id="258"/>
           </p14:sldIdLst>
         </p14:section>
-        <p14:section name="01 Tổng quan" id="{1a5fdbac-4f18-999f-c492-7de02233f7b4}">
+        <p14:section name="01 Tổng quan" id="{04ce6e18-7ec5-9088-1a40-36031a8ef2a0}">
           <p14:sldIdLst>
             <p14:sldId id="259"/>
             <p14:sldId id="260"/>
@@ -148,39 +148,39 @@
             <p14:sldId id="263"/>
           </p14:sldIdLst>
         </p14:section>
-        <p14:section name="02 Điện nước công trình" id="{aade84d3-c1f4-50e8-2a3e-0386d078c779}">
+        <p14:section name="02 Điện nước công trình" id="{77b3b7d6-2843-7372-fbfc-a5277d80e7bf}">
           <p14:sldIdLst>
             <p14:sldId id="264"/>
             <p14:sldId id="265"/>
             <p14:sldId id="266"/>
           </p14:sldIdLst>
         </p14:section>
-        <p14:section name="03 Hút sương dầu nhà xưởng" id="{8d0d0a72-32d7-9386-264c-966fa6c5a677}">
+        <p14:section name="03 Hút sương dầu nhà xưởng" id="{596f0819-d33e-d7a1-ab72-6a1b040e3e14}">
           <p14:sldIdLst>
             <p14:sldId id="267"/>
             <p14:sldId id="268"/>
             <p14:sldId id="269"/>
           </p14:sldIdLst>
         </p14:section>
-        <p14:section name="04 Bơm &amp; xử lý nước" id="{191684f8-1231-5318-b79d-90e12b5ace0e}">
+        <p14:section name="04 Bơm &amp; xử lý nước" id="{82c3b68f-ea19-abb4-d0c8-5776b10da299}">
           <p14:sldIdLst>
             <p14:sldId id="270"/>
           </p14:sldIdLst>
         </p14:section>
-        <p14:section name="05 Quản trị dự án" id="{e97ce6ce-550a-c6b4-cbea-146b30dffdba}">
+        <p14:section name="05 Quản trị dự án" id="{88691ed8-1214-11e0-55d9-d9c8f630ec9f}">
           <p14:sldIdLst>
             <p14:sldId id="271"/>
             <p14:sldId id="272"/>
             <p14:sldId id="273"/>
           </p14:sldIdLst>
         </p14:section>
-        <p14:section name="06 Nguồn lực" id="{abe803dd-9157-b66f-10d3-2f9d33b0c325}">
+        <p14:section name="06 Nguồn lực" id="{ac2e4181-29e4-b233-37f7-809dcfe9b873}">
           <p14:sldIdLst>
             <p14:sldId id="274"/>
             <p14:sldId id="275"/>
           </p14:sldIdLst>
         </p14:section>
-        <p14:section name="07 Công trình tiêu biểu" id="{14b75113-42e2-9d27-99de-ae994a78eca1}">
+        <p14:section name="07 Công trình tiêu biểu" id="{6c88a69c-94cf-4273-e8af-5597bd8fabb1}">
           <p14:sldIdLst>
             <p14:sldId id="276"/>
             <p14:sldId id="277"/>
@@ -188,7 +188,7 @@
             <p14:sldId id="279"/>
           </p14:sldIdLst>
         </p14:section>
-        <p14:section name="08 Cam kết &amp; liên hệ" id="{749a0013-182c-e872-96b9-64660d5a57ab}">
+        <p14:section name="08 Cam kết &amp; liên hệ" id="{7329ba14-29a3-f5d1-9de2-6d4390f9e434}">
           <p14:sldIdLst>
             <p14:sldId id="280"/>
             <p14:sldId id="281"/>
@@ -16036,7 +16036,7 @@
       </p:grpSpPr>
       <p:pic>
         <p:nvPicPr>
-          <p:cNvPr id="2" name="photo img13.jpg" descr="Ảnh hiện trường BLT">    </p:cNvPr>
+          <p:cNvPr id="2" name="photo img36.jpg" descr="Ảnh hiện trường BLT">    </p:cNvPr>
           <p:cNvPicPr>
             <a:picLocks noChangeAspect="1"/>
           </p:cNvPicPr>
@@ -16051,7 +16051,7 @@
         <p:spPr>
           <a:xfrm>
             <a:off x="0" y="0"/>
-            <a:ext cx="7562088" cy="4937760"/>
+            <a:ext cx="7562088" cy="5669280"/>
           </a:xfrm>
           <a:prstGeom prst="rect">
             <a:avLst/>
@@ -16066,7 +16066,7 @@
         </p:nvSpPr>
         <p:spPr>
           <a:xfrm>
-            <a:off x="502920" y="5349240"/>
+            <a:off x="502920" y="5943600"/>
             <a:ext cx="6556248" cy="228600"/>
           </a:xfrm>
           <a:prstGeom prst="rect">
@@ -16105,8 +16105,8 @@
         </p:nvSpPr>
         <p:spPr>
           <a:xfrm>
-            <a:off x="502920" y="5623560"/>
-            <a:ext cx="6556248" cy="1188720"/>
+            <a:off x="502920" y="6199632"/>
+            <a:ext cx="6556248" cy="1097280"/>
           </a:xfrm>
           <a:prstGeom prst="rect">
             <a:avLst/>
@@ -16161,8 +16161,8 @@
         </p:nvSpPr>
         <p:spPr>
           <a:xfrm>
-            <a:off x="502920" y="6903720"/>
-            <a:ext cx="6556248" cy="731520"/>
+            <a:off x="502920" y="7360920"/>
+            <a:ext cx="6556248" cy="685800"/>
           </a:xfrm>
           <a:prstGeom prst="rect">
             <a:avLst/>
@@ -16203,7 +16203,7 @@
         </p:nvSpPr>
         <p:spPr>
           <a:xfrm>
-            <a:off x="502920" y="7863840"/>
+            <a:off x="502920" y="8183880"/>
             <a:ext cx="457200" cy="457200"/>
           </a:xfrm>
           <a:prstGeom prst="ellipse">
@@ -16228,7 +16228,7 @@
         </p:nvSpPr>
         <p:spPr>
           <a:xfrm>
-            <a:off x="502920" y="7863840"/>
+            <a:off x="502920" y="8183880"/>
             <a:ext cx="457200" cy="457200"/>
           </a:xfrm>
           <a:prstGeom prst="rect">
@@ -16267,7 +16267,7 @@
         </p:nvSpPr>
         <p:spPr>
           <a:xfrm>
-            <a:off x="502920" y="8412480"/>
+            <a:off x="502920" y="8732520"/>
             <a:ext cx="2063496" cy="274320"/>
           </a:xfrm>
           <a:prstGeom prst="rect">
@@ -16306,8 +16306,8 @@
         </p:nvSpPr>
         <p:spPr>
           <a:xfrm>
-            <a:off x="502920" y="8686800"/>
-            <a:ext cx="2063496" cy="822960"/>
+            <a:off x="502920" y="9034272"/>
+            <a:ext cx="2063496" cy="731520"/>
           </a:xfrm>
           <a:prstGeom prst="rect">
             <a:avLst/>
@@ -16348,7 +16348,7 @@
         </p:nvSpPr>
         <p:spPr>
           <a:xfrm>
-            <a:off x="2749296" y="7863840"/>
+            <a:off x="2749296" y="8183880"/>
             <a:ext cx="457200" cy="457200"/>
           </a:xfrm>
           <a:prstGeom prst="ellipse">
@@ -16373,7 +16373,7 @@
         </p:nvSpPr>
         <p:spPr>
           <a:xfrm>
-            <a:off x="2749296" y="7863840"/>
+            <a:off x="2749296" y="8183880"/>
             <a:ext cx="457200" cy="457200"/>
           </a:xfrm>
           <a:prstGeom prst="rect">
@@ -16412,7 +16412,7 @@
         </p:nvSpPr>
         <p:spPr>
           <a:xfrm>
-            <a:off x="2749296" y="8412480"/>
+            <a:off x="2749296" y="8732520"/>
             <a:ext cx="2063496" cy="274320"/>
           </a:xfrm>
           <a:prstGeom prst="rect">
@@ -16451,8 +16451,8 @@
         </p:nvSpPr>
         <p:spPr>
           <a:xfrm>
-            <a:off x="2749296" y="8686800"/>
-            <a:ext cx="2063496" cy="822960"/>
+            <a:off x="2749296" y="9034272"/>
+            <a:ext cx="2063496" cy="731520"/>
           </a:xfrm>
           <a:prstGeom prst="rect">
             <a:avLst/>
@@ -16493,7 +16493,7 @@
         </p:nvSpPr>
         <p:spPr>
           <a:xfrm>
-            <a:off x="4995672" y="7863840"/>
+            <a:off x="4995672" y="8183880"/>
             <a:ext cx="457200" cy="457200"/>
           </a:xfrm>
           <a:prstGeom prst="ellipse">
@@ -16518,7 +16518,7 @@
         </p:nvSpPr>
         <p:spPr>
           <a:xfrm>
-            <a:off x="4995672" y="7863840"/>
+            <a:off x="4995672" y="8183880"/>
             <a:ext cx="457200" cy="457200"/>
           </a:xfrm>
           <a:prstGeom prst="rect">
@@ -16557,7 +16557,7 @@
         </p:nvSpPr>
         <p:spPr>
           <a:xfrm>
-            <a:off x="4995672" y="8412480"/>
+            <a:off x="4995672" y="8732520"/>
             <a:ext cx="2063496" cy="274320"/>
           </a:xfrm>
           <a:prstGeom prst="rect">
@@ -16596,8 +16596,8 @@
         </p:nvSpPr>
         <p:spPr>
           <a:xfrm>
-            <a:off x="4995672" y="8686800"/>
-            <a:ext cx="2063496" cy="822960"/>
+            <a:off x="4995672" y="9034272"/>
+            <a:ext cx="2063496" cy="731520"/>
           </a:xfrm>
           <a:prstGeom prst="rect">
             <a:avLst/>
@@ -30154,7 +30154,7 @@
       </p:sp>
       <p:pic>
         <p:nvPicPr>
-          <p:cNvPr id="22" name="photo img36.jpg" descr="Lắp máy lọc sương dầu – Hưng Nguyên, Nghệ An">    </p:cNvPr>
+          <p:cNvPr id="22" name="photo img74_wide.jpg" descr="Đội BLT lắp giá đỡ thép trên xe nâng người – Hưng Nguyên, Nghệ An">    </p:cNvPr>
           <p:cNvPicPr>
             <a:picLocks noChangeAspect="1"/>
           </p:cNvPicPr>
@@ -30168,8 +30168,8 @@
         </p:blipFill>
         <p:spPr>
           <a:xfrm>
-            <a:off x="502920" y="4526280"/>
-            <a:ext cx="3200400" cy="2377440"/>
+            <a:off x="502920" y="4206240"/>
+            <a:ext cx="6556248" cy="2926080"/>
           </a:xfrm>
           <a:prstGeom prst="rect">
             <a:avLst/>
@@ -30184,8 +30184,8 @@
         </p:nvSpPr>
         <p:spPr>
           <a:xfrm>
-            <a:off x="502920" y="6940296"/>
-            <a:ext cx="3200400" cy="201168"/>
+            <a:off x="502920" y="7168896"/>
+            <a:ext cx="6556248" cy="201168"/>
           </a:xfrm>
           <a:prstGeom prst="rect">
             <a:avLst/>
@@ -30208,83 +30208,21 @@
                   <a:schemeClr val="accent3"/>
                 </a:solidFill>
               </a:rPr>
-              <a:t>Lắp máy lọc sương dầu – Hưng Nguyên, Nghệ An</a:t>
+              <a:t>Đội BLT lắp giá đỡ thép trên xe nâng người – Hưng Nguyên, Nghệ An</a:t>
             </a:r>
             <a:endParaRPr lang="en-US" sz="800" dirty="0"/>
           </a:p>
         </p:txBody>
       </p:sp>
-      <p:pic>
-        <p:nvPicPr>
-          <p:cNvPr id="24" name="photo img74.jpg" descr="Lắp giá đỡ thép trên xe nâng người – Hưng Nguyên, Nghệ An">    </p:cNvPr>
-          <p:cNvPicPr>
-            <a:picLocks noChangeAspect="1"/>
-          </p:cNvPicPr>
-          <p:nvPr/>
-        </p:nvPicPr>
-        <p:blipFill>
-          <a:blip r:embed="rId2"/>
-          <a:stretch>
-            <a:fillRect/>
-          </a:stretch>
-        </p:blipFill>
-        <p:spPr>
-          <a:xfrm>
-            <a:off x="3858768" y="4526280"/>
-            <a:ext cx="3200400" cy="2377440"/>
-          </a:xfrm>
-          <a:prstGeom prst="rect">
-            <a:avLst/>
-          </a:prstGeom>
-        </p:spPr>
-      </p:pic>
-      <p:sp>
-        <p:nvSpPr>
-          <p:cNvPr id="25" name="Text 21"/>
-          <p:cNvSpPr txBox="1"/>
-          <p:nvPr/>
-        </p:nvSpPr>
-        <p:spPr>
-          <a:xfrm>
-            <a:off x="3858768" y="6940296"/>
-            <a:ext cx="3200400" cy="201168"/>
-          </a:xfrm>
-          <a:prstGeom prst="rect">
-            <a:avLst/>
-          </a:prstGeom>
-          <a:noFill/>
-          <a:ln/>
-        </p:spPr>
-        <p:txBody>
-          <a:bodyPr wrap="square" lIns="0" tIns="0" rIns="0" bIns="0" rtlCol="0" anchor="ctr">
-            <a:normAutofit/>
-          </a:bodyPr>
-          <a:lstStyle/>
-          <a:p>
-            <a:pPr indent="0" marL="0">
-              <a:buNone/>
-            </a:pPr>
-            <a:r>
-              <a:rPr lang="en-US" sz="800" i="1" dirty="0">
-                <a:solidFill>
-                  <a:schemeClr val="accent3"/>
-                </a:solidFill>
-              </a:rPr>
-              <a:t>Lắp giá đỡ thép trên xe nâng người – Hưng Nguyên, Nghệ An</a:t>
-            </a:r>
-            <a:endParaRPr lang="en-US" sz="800" dirty="0"/>
-          </a:p>
-        </p:txBody>
-      </p:sp>
-      <p:sp>
-        <p:nvSpPr>
-          <p:cNvPr id="26" name="Text 22"/>
-          <p:cNvSpPr txBox="1"/>
-          <p:nvPr/>
-        </p:nvSpPr>
-        <p:spPr>
-          <a:xfrm>
-            <a:off x="502920" y="7315200"/>
+      <p:sp>
+        <p:nvSpPr>
+          <p:cNvPr id="24" name="Text 21"/>
+          <p:cNvSpPr txBox="1"/>
+          <p:nvPr/>
+        </p:nvSpPr>
+        <p:spPr>
+          <a:xfrm>
+            <a:off x="502920" y="7635240"/>
             <a:ext cx="3108960" cy="228600"/>
           </a:xfrm>
           <a:prstGeom prst="rect">
@@ -30317,14 +30255,14 @@
       </p:sp>
       <p:sp>
         <p:nvSpPr>
-          <p:cNvPr id="27" name="Text 23"/>
-          <p:cNvSpPr txBox="1"/>
-          <p:nvPr/>
-        </p:nvSpPr>
-        <p:spPr>
-          <a:xfrm>
-            <a:off x="502920" y="7589520"/>
-            <a:ext cx="3200400" cy="2286000"/>
+          <p:cNvPr id="25" name="Text 22"/>
+          <p:cNvSpPr txBox="1"/>
+          <p:nvPr/>
+        </p:nvSpPr>
+        <p:spPr>
+          <a:xfrm>
+            <a:off x="502920" y="7909560"/>
+            <a:ext cx="3200400" cy="2011680"/>
           </a:xfrm>
           <a:prstGeom prst="rect">
             <a:avLst/>
@@ -30411,13 +30349,13 @@
       </p:sp>
       <p:sp>
         <p:nvSpPr>
-          <p:cNvPr id="28" name="Text 24"/>
-          <p:cNvSpPr txBox="1"/>
-          <p:nvPr/>
-        </p:nvSpPr>
-        <p:spPr>
-          <a:xfrm>
-            <a:off x="3858768" y="7315200"/>
+          <p:cNvPr id="26" name="Text 23"/>
+          <p:cNvSpPr txBox="1"/>
+          <p:nvPr/>
+        </p:nvSpPr>
+        <p:spPr>
+          <a:xfrm>
+            <a:off x="3858768" y="7635240"/>
             <a:ext cx="3108960" cy="228600"/>
           </a:xfrm>
           <a:prstGeom prst="rect">
@@ -30450,14 +30388,14 @@
       </p:sp>
       <p:sp>
         <p:nvSpPr>
-          <p:cNvPr id="29" name="Text 25"/>
-          <p:cNvSpPr txBox="1"/>
-          <p:nvPr/>
-        </p:nvSpPr>
-        <p:spPr>
-          <a:xfrm>
-            <a:off x="3858768" y="7589520"/>
-            <a:ext cx="3200400" cy="2286000"/>
+          <p:cNvPr id="27" name="Text 24"/>
+          <p:cNvSpPr txBox="1"/>
+          <p:nvPr/>
+        </p:nvSpPr>
+        <p:spPr>
+          <a:xfrm>
+            <a:off x="3858768" y="7909560"/>
+            <a:ext cx="3200400" cy="2011680"/>
           </a:xfrm>
           <a:prstGeom prst="rect">
             <a:avLst/>

--- a/ho-so-nang-luc-BLT/HO_SO_NANG_LUC_BLT.pptx
+++ b/ho-so-nang-luc-BLT/HO_SO_NANG_LUC_BLT.pptx
@@ -132,14 +132,14 @@
   <p:extLst>
     <p:ext uri="{521415D9-36F7-43E2-AB2F-B90AF26B5E84}">
       <p14:sectionLst xmlns:p14="http://schemas.microsoft.com/office/powerpoint/2010/main">
-        <p14:section name="Mở đầu" id="{597f9ff5-9b2f-a2d9-7065-065be2b3af12}">
+        <p14:section name="Mở đầu" id="{19dfa5f3-b608-e72f-8776-642710ee261e}">
           <p14:sldIdLst>
             <p14:sldId id="256"/>
             <p14:sldId id="257"/>
             <p14:sldId id="258"/>
           </p14:sldIdLst>
         </p14:section>
-        <p14:section name="01 Tổng quan" id="{04ce6e18-7ec5-9088-1a40-36031a8ef2a0}">
+        <p14:section name="01 Tổng quan" id="{e9e5db81-ae41-abed-d305-286ef1f787a3}">
           <p14:sldIdLst>
             <p14:sldId id="259"/>
             <p14:sldId id="260"/>
@@ -148,39 +148,39 @@
             <p14:sldId id="263"/>
           </p14:sldIdLst>
         </p14:section>
-        <p14:section name="02 Điện nước công trình" id="{77b3b7d6-2843-7372-fbfc-a5277d80e7bf}">
+        <p14:section name="02 Điện nước công trình" id="{8675cc9b-05b1-77c9-ad8d-2067faaa07b4}">
           <p14:sldIdLst>
             <p14:sldId id="264"/>
             <p14:sldId id="265"/>
             <p14:sldId id="266"/>
           </p14:sldIdLst>
         </p14:section>
-        <p14:section name="03 Hút sương dầu nhà xưởng" id="{596f0819-d33e-d7a1-ab72-6a1b040e3e14}">
+        <p14:section name="03 Hút sương dầu nhà xưởng" id="{fa9cf539-6568-d5a3-4bb7-e67529b179ad}">
           <p14:sldIdLst>
             <p14:sldId id="267"/>
             <p14:sldId id="268"/>
             <p14:sldId id="269"/>
           </p14:sldIdLst>
         </p14:section>
-        <p14:section name="04 Bơm &amp; xử lý nước" id="{82c3b68f-ea19-abb4-d0c8-5776b10da299}">
+        <p14:section name="04 Bơm &amp; xử lý nước" id="{bd7950e4-df5c-8170-02ae-e86ec30d22da}">
           <p14:sldIdLst>
             <p14:sldId id="270"/>
           </p14:sldIdLst>
         </p14:section>
-        <p14:section name="05 Quản trị dự án" id="{88691ed8-1214-11e0-55d9-d9c8f630ec9f}">
+        <p14:section name="05 Quản trị dự án" id="{a268219a-9005-e449-f998-092717f87fff}">
           <p14:sldIdLst>
             <p14:sldId id="271"/>
             <p14:sldId id="272"/>
             <p14:sldId id="273"/>
           </p14:sldIdLst>
         </p14:section>
-        <p14:section name="06 Nguồn lực" id="{ac2e4181-29e4-b233-37f7-809dcfe9b873}">
+        <p14:section name="06 Nguồn lực" id="{82069a71-d559-1cd8-0162-7fba3de01eee}">
           <p14:sldIdLst>
             <p14:sldId id="274"/>
             <p14:sldId id="275"/>
           </p14:sldIdLst>
         </p14:section>
-        <p14:section name="07 Công trình tiêu biểu" id="{6c88a69c-94cf-4273-e8af-5597bd8fabb1}">
+        <p14:section name="07 Công trình tiêu biểu" id="{6c0a7e47-4f36-a894-e382-c145a6c7b5f5}">
           <p14:sldIdLst>
             <p14:sldId id="276"/>
             <p14:sldId id="277"/>
@@ -188,7 +188,7 @@
             <p14:sldId id="279"/>
           </p14:sldIdLst>
         </p14:section>
-        <p14:section name="08 Cam kết &amp; liên hệ" id="{7329ba14-29a3-f5d1-9de2-6d4390f9e434}">
+        <p14:section name="08 Cam kết &amp; liên hệ" id="{cffa540f-d4ce-ff54-b263-6fd1f2b4bccb}">
           <p14:sldIdLst>
             <p14:sldId id="280"/>
             <p14:sldId id="281"/>
@@ -4151,7 +4151,7 @@
       </p:sp>
       <p:pic>
         <p:nvPicPr>
-          <p:cNvPr id="4" name="photo img14.jpg" descr="Thi công trên trần bằng xe nâng người">    </p:cNvPr>
+          <p:cNvPr id="4" name="photo img10.jpg" descr="Gia công ống luồn dây tại hiện trường – Hà Nam, Ninh Bình">    </p:cNvPr>
           <p:cNvPicPr>
             <a:picLocks noChangeAspect="1"/>
           </p:cNvPicPr>
@@ -4166,7 +4166,7 @@
         <p:spPr>
           <a:xfrm>
             <a:off x="502920" y="1463040"/>
-            <a:ext cx="3186684" cy="2514600"/>
+            <a:ext cx="6556248" cy="2926080"/>
           </a:xfrm>
           <a:prstGeom prst="rect">
             <a:avLst/>
@@ -4181,8 +4181,8 @@
         </p:nvSpPr>
         <p:spPr>
           <a:xfrm>
-            <a:off x="502920" y="4014216"/>
-            <a:ext cx="3186684" cy="201168"/>
+            <a:off x="502920" y="4425696"/>
+            <a:ext cx="6556248" cy="201168"/>
           </a:xfrm>
           <a:prstGeom prst="rect">
             <a:avLst/>
@@ -4205,7 +4205,7 @@
                   <a:schemeClr val="accent3"/>
                 </a:solidFill>
               </a:rPr>
-              <a:t>Thi công trên trần bằng xe nâng người</a:t>
+              <a:t>Gia công ống luồn dây tại hiện trường – Hà Nam, Ninh Bình</a:t>
             </a:r>
             <a:endParaRPr lang="en-US" sz="800" dirty="0"/>
           </a:p>
@@ -4213,7 +4213,7 @@
       </p:sp>
       <p:pic>
         <p:nvPicPr>
-          <p:cNvPr id="6" name="photo img10.jpg" descr="Gia công ống luồn dây tại hiện trường">    </p:cNvPr>
+          <p:cNvPr id="6" name="photo img03.jpg" descr="Đi ống luồn dây dưới sàn">    </p:cNvPr>
           <p:cNvPicPr>
             <a:picLocks noChangeAspect="1"/>
           </p:cNvPicPr>
@@ -4227,8 +4227,8 @@
         </p:blipFill>
         <p:spPr>
           <a:xfrm>
-            <a:off x="3872484" y="1463040"/>
-            <a:ext cx="3186684" cy="2514600"/>
+            <a:off x="502920" y="4754880"/>
+            <a:ext cx="3186684" cy="2057400"/>
           </a:xfrm>
           <a:prstGeom prst="rect">
             <a:avLst/>
@@ -4243,7 +4243,7 @@
         </p:nvSpPr>
         <p:spPr>
           <a:xfrm>
-            <a:off x="3872484" y="4014216"/>
+            <a:off x="502920" y="6848856"/>
             <a:ext cx="3186684" cy="201168"/>
           </a:xfrm>
           <a:prstGeom prst="rect">
@@ -4267,7 +4267,7 @@
                   <a:schemeClr val="accent3"/>
                 </a:solidFill>
               </a:rPr>
-              <a:t>Gia công ống luồn dây tại hiện trường</a:t>
+              <a:t>Đi ống luồn dây dưới sàn</a:t>
             </a:r>
             <a:endParaRPr lang="en-US" sz="800" dirty="0"/>
           </a:p>
@@ -4275,7 +4275,7 @@
       </p:sp>
       <p:pic>
         <p:nvPicPr>
-          <p:cNvPr id="8" name="photo img03.jpg" descr="Đi ống luồn dây dưới sàn – Hà Nam, Ninh Bình">    </p:cNvPr>
+          <p:cNvPr id="8" name="photo img20.jpg" descr="Lắp giá đỡ, tuyến ống trên cao">    </p:cNvPr>
           <p:cNvPicPr>
             <a:picLocks noChangeAspect="1"/>
           </p:cNvPicPr>
@@ -4289,8 +4289,8 @@
         </p:blipFill>
         <p:spPr>
           <a:xfrm>
-            <a:off x="502920" y="4297680"/>
-            <a:ext cx="3186684" cy="2514600"/>
+            <a:off x="3872484" y="4754880"/>
+            <a:ext cx="3186684" cy="2057400"/>
           </a:xfrm>
           <a:prstGeom prst="rect">
             <a:avLst/>
@@ -4305,7 +4305,7 @@
         </p:nvSpPr>
         <p:spPr>
           <a:xfrm>
-            <a:off x="502920" y="6848856"/>
+            <a:off x="3872484" y="6848856"/>
             <a:ext cx="3186684" cy="201168"/>
           </a:xfrm>
           <a:prstGeom prst="rect">
@@ -4329,77 +4329,15 @@
                   <a:schemeClr val="accent3"/>
                 </a:solidFill>
               </a:rPr>
-              <a:t>Đi ống luồn dây dưới sàn – Hà Nam, Ninh Bình</a:t>
+              <a:t>Lắp giá đỡ, tuyến ống trên cao</a:t>
             </a:r>
             <a:endParaRPr lang="en-US" sz="800" dirty="0"/>
           </a:p>
         </p:txBody>
       </p:sp>
-      <p:pic>
-        <p:nvPicPr>
-          <p:cNvPr id="10" name="photo img20.jpg" descr="Lắp giá đỡ, tuyến ống trên cao – Hà Nam, Ninh Bình">    </p:cNvPr>
-          <p:cNvPicPr>
-            <a:picLocks noChangeAspect="1"/>
-          </p:cNvPicPr>
-          <p:nvPr/>
-        </p:nvPicPr>
-        <p:blipFill>
-          <a:blip r:embed="rId4"/>
-          <a:stretch>
-            <a:fillRect/>
-          </a:stretch>
-        </p:blipFill>
-        <p:spPr>
-          <a:xfrm>
-            <a:off x="3872484" y="4297680"/>
-            <a:ext cx="3186684" cy="2514600"/>
-          </a:xfrm>
-          <a:prstGeom prst="rect">
-            <a:avLst/>
-          </a:prstGeom>
-        </p:spPr>
-      </p:pic>
-      <p:sp>
-        <p:nvSpPr>
-          <p:cNvPr id="11" name="Text 5"/>
-          <p:cNvSpPr txBox="1"/>
-          <p:nvPr/>
-        </p:nvSpPr>
-        <p:spPr>
-          <a:xfrm>
-            <a:off x="3872484" y="6848856"/>
-            <a:ext cx="3186684" cy="201168"/>
-          </a:xfrm>
-          <a:prstGeom prst="rect">
-            <a:avLst/>
-          </a:prstGeom>
-          <a:noFill/>
-          <a:ln/>
-        </p:spPr>
-        <p:txBody>
-          <a:bodyPr wrap="square" lIns="0" tIns="0" rIns="0" bIns="0" rtlCol="0" anchor="ctr">
-            <a:normAutofit/>
-          </a:bodyPr>
-          <a:lstStyle/>
-          <a:p>
-            <a:pPr indent="0" marL="0">
-              <a:buNone/>
-            </a:pPr>
-            <a:r>
-              <a:rPr lang="en-US" sz="800" i="1" dirty="0">
-                <a:solidFill>
-                  <a:schemeClr val="accent3"/>
-                </a:solidFill>
-              </a:rPr>
-              <a:t>Lắp giá đỡ, tuyến ống trên cao – Hà Nam, Ninh Bình</a:t>
-            </a:r>
-            <a:endParaRPr lang="en-US" sz="800" dirty="0"/>
-          </a:p>
-        </p:txBody>
-      </p:sp>
-      <p:sp>
-        <p:nvSpPr>
-          <p:cNvPr id="12" name="Text 6"/>
+      <p:sp>
+        <p:nvSpPr>
+          <p:cNvPr id="10" name="Text 5"/>
           <p:cNvSpPr txBox="1"/>
           <p:nvPr/>
         </p:nvSpPr>
@@ -4438,7 +4376,7 @@
       </p:sp>
       <p:sp>
         <p:nvSpPr>
-          <p:cNvPr id="13" name="Shape 7"/>
+          <p:cNvPr id="11" name="Shape 6"/>
           <p:cNvSpPr/>
           <p:nvPr/>
         </p:nvSpPr>
@@ -4465,7 +4403,7 @@
       </p:sp>
       <p:sp>
         <p:nvSpPr>
-          <p:cNvPr id="14" name="Text 8"/>
+          <p:cNvPr id="12" name="Text 7"/>
           <p:cNvSpPr txBox="1"/>
           <p:nvPr/>
         </p:nvSpPr>
@@ -4595,7 +4533,7 @@
       </p:sp>
       <p:sp>
         <p:nvSpPr>
-          <p:cNvPr id="15" name="Text 9"/>
+          <p:cNvPr id="13" name="Text 8"/>
           <p:cNvSpPr txBox="1"/>
           <p:nvPr/>
         </p:nvSpPr>
@@ -4634,7 +4572,7 @@
       </p:sp>
       <p:sp>
         <p:nvSpPr>
-          <p:cNvPr id="16" name="Shape 10"/>
+          <p:cNvPr id="14" name="Shape 9"/>
           <p:cNvSpPr/>
           <p:nvPr/>
         </p:nvSpPr>
@@ -4661,7 +4599,7 @@
       </p:sp>
       <p:sp>
         <p:nvSpPr>
-          <p:cNvPr id="17" name="Text 11"/>
+          <p:cNvPr id="15" name="Text 10"/>
           <p:cNvSpPr txBox="1"/>
           <p:nvPr/>
         </p:nvSpPr>
@@ -8560,7 +8498,7 @@
       </p:sp>
       <p:pic>
         <p:nvPicPr>
-          <p:cNvPr id="4" name="photo img38.jpg" descr="Khung đỡ và tuyến ống công nghệ trạm xử lý nước – Thành phố Huế (09/2026)">    </p:cNvPr>
+          <p:cNvPr id="4" name="photo img60.jpg" descr="Bồn hóa chất, máy khuấy, bơm định lượng và hệ màng UF/RO – Thành phố Huế (09/2026)">    </p:cNvPr>
           <p:cNvPicPr>
             <a:picLocks noChangeAspect="1"/>
           </p:cNvPicPr>
@@ -8614,7 +8552,7 @@
                   <a:schemeClr val="accent3"/>
                 </a:solidFill>
               </a:rPr>
-              <a:t>Khung đỡ và tuyến ống công nghệ trạm xử lý nước – Thành phố Huế (09/2026)</a:t>
+              <a:t>Bồn hóa chất, máy khuấy, bơm định lượng và hệ màng UF/RO – Thành phố Huế (09/2026)</a:t>
             </a:r>
             <a:endParaRPr lang="en-US" sz="800" dirty="0"/>
           </a:p>
@@ -22717,7 +22655,7 @@
       </p:graphicFrame>
       <p:pic>
         <p:nvPicPr>
-          <p:cNvPr id="5" name="photo img48.jpg" descr="Lắp bơm định lượng hóa chất">    </p:cNvPr>
+          <p:cNvPr id="5" name="photo img16.jpg" descr="Lắp đặt cụm bơm, van và đồng hồ áp">    </p:cNvPr>
           <p:cNvPicPr>
             <a:picLocks noChangeAspect="1"/>
           </p:cNvPicPr>
@@ -22732,7 +22670,7 @@
         <p:spPr>
           <a:xfrm>
             <a:off x="502920" y="3200400"/>
-            <a:ext cx="3186684" cy="2743200"/>
+            <a:ext cx="6556248" cy="3017520"/>
           </a:xfrm>
           <a:prstGeom prst="rect">
             <a:avLst/>
@@ -22747,8 +22685,8 @@
         </p:nvSpPr>
         <p:spPr>
           <a:xfrm>
-            <a:off x="502920" y="5980176"/>
-            <a:ext cx="3186684" cy="201168"/>
+            <a:off x="502920" y="6254496"/>
+            <a:ext cx="6556248" cy="201168"/>
           </a:xfrm>
           <a:prstGeom prst="rect">
             <a:avLst/>
@@ -22771,7 +22709,7 @@
                   <a:schemeClr val="accent3"/>
                 </a:solidFill>
               </a:rPr>
-              <a:t>Lắp bơm định lượng hóa chất</a:t>
+              <a:t>Lắp đặt cụm bơm, van và đồng hồ áp</a:t>
             </a:r>
             <a:endParaRPr lang="en-US" sz="800" dirty="0"/>
           </a:p>
@@ -22779,7 +22717,7 @@
       </p:sp>
       <p:pic>
         <p:nvPicPr>
-          <p:cNvPr id="7" name="photo img16.jpg" descr="Lắp đặt cụm bơm, van và đồng hồ áp">    </p:cNvPr>
+          <p:cNvPr id="7" name="photo img48.jpg" descr="Lắp bơm định lượng hóa chất">    </p:cNvPr>
           <p:cNvPicPr>
             <a:picLocks noChangeAspect="1"/>
           </p:cNvPicPr>
@@ -22793,8 +22731,8 @@
         </p:blipFill>
         <p:spPr>
           <a:xfrm>
-            <a:off x="3872484" y="3200400"/>
-            <a:ext cx="3186684" cy="2743200"/>
+            <a:off x="502920" y="6583680"/>
+            <a:ext cx="3186684" cy="3017520"/>
           </a:xfrm>
           <a:prstGeom prst="rect">
             <a:avLst/>
@@ -22809,7 +22747,7 @@
         </p:nvSpPr>
         <p:spPr>
           <a:xfrm>
-            <a:off x="3872484" y="5980176"/>
+            <a:off x="502920" y="9637776"/>
             <a:ext cx="3186684" cy="201168"/>
           </a:xfrm>
           <a:prstGeom prst="rect">
@@ -22833,7 +22771,7 @@
                   <a:schemeClr val="accent3"/>
                 </a:solidFill>
               </a:rPr>
-              <a:t>Lắp đặt cụm bơm, van và đồng hồ áp</a:t>
+              <a:t>Lắp bơm định lượng hóa chất</a:t>
             </a:r>
             <a:endParaRPr lang="en-US" sz="800" dirty="0"/>
           </a:p>
@@ -22855,8 +22793,8 @@
         </p:blipFill>
         <p:spPr>
           <a:xfrm>
-            <a:off x="502920" y="6309360"/>
-            <a:ext cx="3186684" cy="3291840"/>
+            <a:off x="3872484" y="6583680"/>
+            <a:ext cx="3186684" cy="3017520"/>
           </a:xfrm>
           <a:prstGeom prst="rect">
             <a:avLst/>
@@ -22871,7 +22809,7 @@
         </p:nvSpPr>
         <p:spPr>
           <a:xfrm>
-            <a:off x="502920" y="9637776"/>
+            <a:off x="3872484" y="9637776"/>
             <a:ext cx="3186684" cy="201168"/>
           </a:xfrm>
           <a:prstGeom prst="rect">
@@ -22896,68 +22834,6 @@
                 </a:solidFill>
               </a:rPr>
               <a:t>Thi công khung đỡ ống trên cao</a:t>
-            </a:r>
-            <a:endParaRPr lang="en-US" sz="800" dirty="0"/>
-          </a:p>
-        </p:txBody>
-      </p:sp>
-      <p:pic>
-        <p:nvPicPr>
-          <p:cNvPr id="11" name="photo img60.jpg" descr="Bồn hóa chất, máy khuấy và hệ màng UF/RO">    </p:cNvPr>
-          <p:cNvPicPr>
-            <a:picLocks noChangeAspect="1"/>
-          </p:cNvPicPr>
-          <p:nvPr/>
-        </p:nvPicPr>
-        <p:blipFill>
-          <a:blip r:embed="rId4"/>
-          <a:stretch>
-            <a:fillRect/>
-          </a:stretch>
-        </p:blipFill>
-        <p:spPr>
-          <a:xfrm>
-            <a:off x="3872484" y="6309360"/>
-            <a:ext cx="3186684" cy="3291840"/>
-          </a:xfrm>
-          <a:prstGeom prst="rect">
-            <a:avLst/>
-          </a:prstGeom>
-        </p:spPr>
-      </p:pic>
-      <p:sp>
-        <p:nvSpPr>
-          <p:cNvPr id="12" name="Text 5"/>
-          <p:cNvSpPr txBox="1"/>
-          <p:nvPr/>
-        </p:nvSpPr>
-        <p:spPr>
-          <a:xfrm>
-            <a:off x="3872484" y="9637776"/>
-            <a:ext cx="3186684" cy="201168"/>
-          </a:xfrm>
-          <a:prstGeom prst="rect">
-            <a:avLst/>
-          </a:prstGeom>
-          <a:noFill/>
-          <a:ln/>
-        </p:spPr>
-        <p:txBody>
-          <a:bodyPr wrap="square" lIns="0" tIns="0" rIns="0" bIns="0" rtlCol="0" anchor="ctr">
-            <a:normAutofit/>
-          </a:bodyPr>
-          <a:lstStyle/>
-          <a:p>
-            <a:pPr indent="0" marL="0">
-              <a:buNone/>
-            </a:pPr>
-            <a:r>
-              <a:rPr lang="en-US" sz="800" i="1" dirty="0">
-                <a:solidFill>
-                  <a:schemeClr val="accent3"/>
-                </a:solidFill>
-              </a:rPr>
-              <a:t>Bồn hóa chất, máy khuấy và hệ màng UF/RO</a:t>
             </a:r>
             <a:endParaRPr lang="en-US" sz="800" dirty="0"/>
           </a:p>
@@ -28920,6 +28796,42 @@
         </p:nvSpPr>
         <p:spPr>
           <a:xfrm>
+            <a:off x="1143000" y="9390888"/>
+            <a:ext cx="4754880" cy="228600"/>
+          </a:xfrm>
+          <a:prstGeom prst="rect">
+            <a:avLst/>
+          </a:prstGeom>
+          <a:noFill/>
+          <a:ln/>
+        </p:spPr>
+        <p:txBody>
+          <a:bodyPr wrap="square" lIns="0" tIns="0" rIns="0" bIns="0" rtlCol="0" anchor="ctr"/>
+          <a:lstStyle/>
+          <a:p>
+            <a:pPr indent="0" marL="0">
+              <a:buNone/>
+            </a:pPr>
+            <a:r>
+              <a:rPr lang="en-US" sz="900" dirty="0">
+                <a:solidFill>
+                  <a:schemeClr val="accent3"/>
+                </a:solidFill>
+              </a:rPr>
+              <a:t>Cam kết chất lượng • Bảo hành • Thông tin liên hệ</a:t>
+            </a:r>
+            <a:endParaRPr lang="en-US" sz="900" dirty="0"/>
+          </a:p>
+        </p:txBody>
+      </p:sp>
+      <p:sp>
+        <p:nvSpPr>
+          <p:cNvPr id="51" name="Text 48"/>
+          <p:cNvSpPr txBox="1"/>
+          <p:nvPr/>
+        </p:nvSpPr>
+        <p:spPr>
+          <a:xfrm>
             <a:off x="5961888" y="9153144"/>
             <a:ext cx="1097280" cy="365760"/>
           </a:xfrm>
@@ -33989,7 +33901,7 @@
       </p:sp>
       <p:pic>
         <p:nvPicPr>
-          <p:cNvPr id="5" name="photo img12.jpg" descr="Ảnh hiện trường BLT">    </p:cNvPr>
+          <p:cNvPr id="5" name="photo img14.jpg" descr="Ảnh hiện trường BLT">    </p:cNvPr>
           <p:cNvPicPr>
             <a:picLocks noChangeAspect="1"/>
           </p:cNvPicPr>
@@ -34237,7 +34149,7 @@
       </p:sp>
       <p:pic>
         <p:nvPicPr>
-          <p:cNvPr id="11" name="photo img15.jpg" descr="Ảnh hiện trường BLT">    </p:cNvPr>
+          <p:cNvPr id="11" name="photo img38.jpg" descr="Ảnh hiện trường BLT">    </p:cNvPr>
           <p:cNvPicPr>
             <a:picLocks noChangeAspect="1"/>
           </p:cNvPicPr>

--- a/ho-so-nang-luc-BLT/HO_SO_NANG_LUC_BLT.pptx
+++ b/ho-so-nang-luc-BLT/HO_SO_NANG_LUC_BLT.pptx
@@ -132,14 +132,14 @@
   <p:extLst>
     <p:ext uri="{521415D9-36F7-43E2-AB2F-B90AF26B5E84}">
       <p14:sectionLst xmlns:p14="http://schemas.microsoft.com/office/powerpoint/2010/main">
-        <p14:section name="Mở đầu" id="{19dfa5f3-b608-e72f-8776-642710ee261e}">
+        <p14:section name="Mở đầu" id="{d2d75668-9e89-8362-847c-447f0a0cab44}">
           <p14:sldIdLst>
             <p14:sldId id="256"/>
             <p14:sldId id="257"/>
             <p14:sldId id="258"/>
           </p14:sldIdLst>
         </p14:section>
-        <p14:section name="01 Tổng quan" id="{e9e5db81-ae41-abed-d305-286ef1f787a3}">
+        <p14:section name="01 Tổng quan" id="{fe2ad2fc-a135-3a79-4a73-5d65b2964f31}">
           <p14:sldIdLst>
             <p14:sldId id="259"/>
             <p14:sldId id="260"/>
@@ -148,39 +148,39 @@
             <p14:sldId id="263"/>
           </p14:sldIdLst>
         </p14:section>
-        <p14:section name="02 Điện nước công trình" id="{8675cc9b-05b1-77c9-ad8d-2067faaa07b4}">
+        <p14:section name="02 Điện nước công trình" id="{4d191460-7e11-0b26-0a27-f80f0164c9ad}">
           <p14:sldIdLst>
             <p14:sldId id="264"/>
             <p14:sldId id="265"/>
             <p14:sldId id="266"/>
           </p14:sldIdLst>
         </p14:section>
-        <p14:section name="03 Hút sương dầu nhà xưởng" id="{fa9cf539-6568-d5a3-4bb7-e67529b179ad}">
+        <p14:section name="03 Hút sương dầu nhà xưởng" id="{f480d4e0-948d-8534-cb8a-c4ec9a9061e3}">
           <p14:sldIdLst>
             <p14:sldId id="267"/>
             <p14:sldId id="268"/>
             <p14:sldId id="269"/>
           </p14:sldIdLst>
         </p14:section>
-        <p14:section name="04 Bơm &amp; xử lý nước" id="{bd7950e4-df5c-8170-02ae-e86ec30d22da}">
+        <p14:section name="04 Bơm &amp; xử lý nước" id="{087c28b5-faf9-6bf3-317a-6aad68f07b4e}">
           <p14:sldIdLst>
             <p14:sldId id="270"/>
           </p14:sldIdLst>
         </p14:section>
-        <p14:section name="05 Quản trị dự án" id="{a268219a-9005-e449-f998-092717f87fff}">
+        <p14:section name="05 Quản trị dự án" id="{a0e624b9-b0e9-6e26-ca07-47cefd2450f1}">
           <p14:sldIdLst>
             <p14:sldId id="271"/>
             <p14:sldId id="272"/>
             <p14:sldId id="273"/>
           </p14:sldIdLst>
         </p14:section>
-        <p14:section name="06 Nguồn lực" id="{82069a71-d559-1cd8-0162-7fba3de01eee}">
+        <p14:section name="06 Nguồn lực" id="{59ba8e18-645e-b90c-d913-2adb7df5b24e}">
           <p14:sldIdLst>
             <p14:sldId id="274"/>
             <p14:sldId id="275"/>
           </p14:sldIdLst>
         </p14:section>
-        <p14:section name="07 Công trình tiêu biểu" id="{6c0a7e47-4f36-a894-e382-c145a6c7b5f5}">
+        <p14:section name="07 Công trình tiêu biểu" id="{50837fe0-90c7-16b4-dd0d-2072709c20ae}">
           <p14:sldIdLst>
             <p14:sldId id="276"/>
             <p14:sldId id="277"/>
@@ -188,7 +188,7 @@
             <p14:sldId id="279"/>
           </p14:sldIdLst>
         </p14:section>
-        <p14:section name="08 Cam kết &amp; liên hệ" id="{cffa540f-d4ce-ff54-b263-6fd1f2b4bccb}">
+        <p14:section name="08 Cam kết &amp; liên hệ" id="{78527d66-43e1-8beb-1b62-108563cb1944}">
           <p14:sldIdLst>
             <p14:sldId id="280"/>
             <p14:sldId id="281"/>
@@ -23013,7 +23013,7 @@
                 <a:gridCol w="2578608"/>
                 <a:gridCol w="960120"/>
               </a:tblGrid>
-              <a:tr h="457200">
+              <a:tr h="502920">
                 <a:tc>
                   <a:txBody>
                     <a:bodyPr/>
@@ -23259,7 +23259,7 @@
                   </a:tcPr>
                 </a:tc>
               </a:tr>
-              <a:tr h="914400">
+              <a:tr h="1097280">
                 <a:tc>
                   <a:txBody>
                     <a:bodyPr/>
@@ -23519,7 +23519,7 @@
                   </a:tcPr>
                 </a:tc>
               </a:tr>
-              <a:tr h="914400">
+              <a:tr h="1097280">
                 <a:tc>
                   <a:txBody>
                     <a:bodyPr/>
@@ -23779,7 +23779,7 @@
                   </a:tcPr>
                 </a:tc>
               </a:tr>
-              <a:tr h="914400">
+              <a:tr h="1097280">
                 <a:tc>
                   <a:txBody>
                     <a:bodyPr/>
@@ -24051,7 +24051,7 @@
         </p:nvSpPr>
         <p:spPr>
           <a:xfrm>
-            <a:off x="502920" y="5120640"/>
+            <a:off x="502920" y="5760720"/>
             <a:ext cx="6556248" cy="228600"/>
           </a:xfrm>
           <a:prstGeom prst="rect">
@@ -24090,8 +24090,8 @@
         </p:nvSpPr>
         <p:spPr>
           <a:xfrm>
-            <a:off x="502920" y="5394960"/>
-            <a:ext cx="2063496" cy="2377440"/>
+            <a:off x="502920" y="6035040"/>
+            <a:ext cx="2063496" cy="3520440"/>
           </a:xfrm>
           <a:prstGeom prst="roundRect">
             <a:avLst>
@@ -24117,8 +24117,8 @@
         </p:nvSpPr>
         <p:spPr>
           <a:xfrm>
-            <a:off x="685800" y="5559552"/>
-            <a:ext cx="411480" cy="411480"/>
+            <a:off x="731520" y="6263640"/>
+            <a:ext cx="502920" cy="502920"/>
           </a:xfrm>
           <a:prstGeom prst="ellipse">
             <a:avLst/>
@@ -24142,8 +24142,8 @@
         </p:nvSpPr>
         <p:spPr>
           <a:xfrm>
-            <a:off x="685800" y="5559552"/>
-            <a:ext cx="411480" cy="411480"/>
+            <a:off x="731520" y="6263640"/>
+            <a:ext cx="502920" cy="502920"/>
           </a:xfrm>
           <a:prstGeom prst="rect">
             <a:avLst/>
@@ -24159,7 +24159,7 @@
               <a:buNone/>
             </a:pPr>
             <a:r>
-              <a:rPr lang="en-US" sz="1050" b="1" dirty="0">
+              <a:rPr lang="en-US" sz="1300" b="1" dirty="0">
                 <a:solidFill>
                   <a:schemeClr val="bg1"/>
                 </a:solidFill>
@@ -24169,7 +24169,7 @@
               </a:rPr>
               <a:t>01</a:t>
             </a:r>
-            <a:endParaRPr lang="en-US" sz="1050" dirty="0"/>
+            <a:endParaRPr lang="en-US" sz="1300" dirty="0"/>
           </a:p>
         </p:txBody>
       </p:sp>
@@ -24181,8 +24181,8 @@
         </p:nvSpPr>
         <p:spPr>
           <a:xfrm>
-            <a:off x="685800" y="6080760"/>
-            <a:ext cx="1697736" cy="365760"/>
+            <a:off x="731520" y="6949440"/>
+            <a:ext cx="1606296" cy="457200"/>
           </a:xfrm>
           <a:prstGeom prst="rect">
             <a:avLst/>
@@ -24198,7 +24198,7 @@
               <a:buNone/>
             </a:pPr>
             <a:r>
-              <a:rPr lang="en-US" sz="1600" b="1" dirty="0">
+              <a:rPr lang="en-US" sz="2000" b="1" dirty="0">
                 <a:solidFill>
                   <a:schemeClr val="accent1"/>
                 </a:solidFill>
@@ -24208,7 +24208,7 @@
               </a:rPr>
               <a:t>NGHỆ AN</a:t>
             </a:r>
-            <a:endParaRPr lang="en-US" sz="1600" dirty="0"/>
+            <a:endParaRPr lang="en-US" sz="2000" dirty="0"/>
           </a:p>
         </p:txBody>
       </p:sp>
@@ -24220,8 +24220,8 @@
         </p:nvSpPr>
         <p:spPr>
           <a:xfrm>
-            <a:off x="685800" y="6492240"/>
-            <a:ext cx="1697736" cy="457200"/>
+            <a:off x="731520" y="7498080"/>
+            <a:ext cx="1606296" cy="594360"/>
           </a:xfrm>
           <a:prstGeom prst="rect">
             <a:avLst/>
@@ -24237,99 +24237,122 @@
               <a:buNone/>
             </a:pPr>
             <a:r>
-              <a:rPr lang="en-US" sz="1050" b="1" dirty="0">
+              <a:rPr lang="en-US" sz="1200" b="1" dirty="0">
                 <a:solidFill>
                   <a:schemeClr val="bg1"/>
                 </a:solidFill>
               </a:rPr>
               <a:t>Nhà xưởng gia công CNC</a:t>
             </a:r>
+            <a:endParaRPr lang="en-US" sz="1200" dirty="0"/>
+          </a:p>
+        </p:txBody>
+      </p:sp>
+      <p:sp>
+        <p:nvSpPr>
+          <p:cNvPr id="11" name="Text 8"/>
+          <p:cNvSpPr txBox="1"/>
+          <p:nvPr/>
+        </p:nvSpPr>
+        <p:spPr>
+          <a:xfrm>
+            <a:off x="731520" y="8183880"/>
+            <a:ext cx="1606296" cy="594360"/>
+          </a:xfrm>
+          <a:prstGeom prst="rect">
+            <a:avLst/>
+          </a:prstGeom>
+          <a:noFill/>
+          <a:ln/>
+        </p:spPr>
+        <p:txBody>
+          <a:bodyPr wrap="square" lIns="0" tIns="0" rIns="0" bIns="0" rtlCol="0" anchor="t"/>
+          <a:lstStyle/>
+          <a:p>
+            <a:pPr indent="0" marL="0">
+              <a:buNone/>
+            </a:pPr>
+            <a:r>
+              <a:rPr lang="en-US" sz="1050" dirty="0">
+                <a:solidFill>
+                  <a:schemeClr val="accent4"/>
+                </a:solidFill>
+              </a:rPr>
+              <a:t>Hút sương dầu, máy lọc, điện</a:t>
+            </a:r>
             <a:endParaRPr lang="en-US" sz="1050" dirty="0"/>
           </a:p>
         </p:txBody>
       </p:sp>
       <p:sp>
         <p:nvSpPr>
-          <p:cNvPr id="11" name="Text 8"/>
-          <p:cNvSpPr txBox="1"/>
-          <p:nvPr/>
-        </p:nvSpPr>
-        <p:spPr>
-          <a:xfrm>
-            <a:off x="685800" y="6949440"/>
-            <a:ext cx="1697736" cy="411480"/>
-          </a:xfrm>
-          <a:prstGeom prst="rect">
-            <a:avLst/>
-          </a:prstGeom>
-          <a:noFill/>
-          <a:ln/>
-        </p:spPr>
-        <p:txBody>
-          <a:bodyPr wrap="square" lIns="0" tIns="0" rIns="0" bIns="0" rtlCol="0" anchor="t"/>
+          <p:cNvPr id="12" name="Shape 9"/>
+          <p:cNvSpPr/>
+          <p:nvPr/>
+        </p:nvSpPr>
+        <p:spPr>
+          <a:xfrm>
+            <a:off x="731520" y="8915400"/>
+            <a:ext cx="1606296" cy="0"/>
+          </a:xfrm>
+          <a:prstGeom prst="line">
+            <a:avLst/>
+          </a:prstGeom>
+          <a:noFill/>
+          <a:ln w="9525">
+            <a:solidFill>
+              <a:schemeClr val="accent3"/>
+            </a:solidFill>
+            <a:prstDash val="solid"/>
+          </a:ln>
+        </p:spPr>
+      </p:sp>
+      <p:sp>
+        <p:nvSpPr>
+          <p:cNvPr id="13" name="Text 10"/>
+          <p:cNvSpPr txBox="1"/>
+          <p:nvPr/>
+        </p:nvSpPr>
+        <p:spPr>
+          <a:xfrm>
+            <a:off x="731520" y="9034272"/>
+            <a:ext cx="1606296" cy="292608"/>
+          </a:xfrm>
+          <a:prstGeom prst="rect">
+            <a:avLst/>
+          </a:prstGeom>
+          <a:noFill/>
+          <a:ln/>
+        </p:spPr>
+        <p:txBody>
+          <a:bodyPr wrap="square" lIns="0" tIns="0" rIns="0" bIns="0" rtlCol="0" anchor="ctr"/>
           <a:lstStyle/>
           <a:p>
             <a:pPr indent="0" marL="0">
               <a:buNone/>
             </a:pPr>
             <a:r>
-              <a:rPr lang="en-US" sz="900" dirty="0">
-                <a:solidFill>
-                  <a:schemeClr val="accent4"/>
-                </a:solidFill>
-              </a:rPr>
-              <a:t>Hút sương dầu, máy lọc, điện</a:t>
-            </a:r>
-            <a:endParaRPr lang="en-US" sz="900" dirty="0"/>
-          </a:p>
-        </p:txBody>
-      </p:sp>
-      <p:sp>
-        <p:nvSpPr>
-          <p:cNvPr id="12" name="Text 9"/>
-          <p:cNvSpPr txBox="1"/>
-          <p:nvPr/>
-        </p:nvSpPr>
-        <p:spPr>
-          <a:xfrm>
-            <a:off x="685800" y="7388352"/>
-            <a:ext cx="1697736" cy="256032"/>
-          </a:xfrm>
-          <a:prstGeom prst="rect">
-            <a:avLst/>
-          </a:prstGeom>
-          <a:noFill/>
-          <a:ln/>
-        </p:spPr>
-        <p:txBody>
-          <a:bodyPr wrap="square" lIns="0" tIns="0" rIns="0" bIns="0" rtlCol="0" anchor="ctr"/>
-          <a:lstStyle/>
-          <a:p>
-            <a:pPr indent="0" marL="0">
-              <a:buNone/>
-            </a:pPr>
-            <a:r>
-              <a:rPr lang="en-US" sz="900" b="1" dirty="0">
+              <a:rPr lang="en-US" sz="1100" b="1" dirty="0">
                 <a:solidFill>
                   <a:schemeClr val="accent6"/>
                 </a:solidFill>
               </a:rPr>
               <a:t>09–10/2026</a:t>
             </a:r>
-            <a:endParaRPr lang="en-US" sz="900" dirty="0"/>
-          </a:p>
-        </p:txBody>
-      </p:sp>
-      <p:sp>
-        <p:nvSpPr>
-          <p:cNvPr id="13" name="Shape 10"/>
+            <a:endParaRPr lang="en-US" sz="1100" dirty="0"/>
+          </a:p>
+        </p:txBody>
+      </p:sp>
+      <p:sp>
+        <p:nvSpPr>
+          <p:cNvPr id="14" name="Shape 11"/>
           <p:cNvSpPr/>
           <p:nvPr/>
         </p:nvSpPr>
         <p:spPr>
           <a:xfrm>
-            <a:off x="2749296" y="5394960"/>
-            <a:ext cx="2063496" cy="2377440"/>
+            <a:off x="2749296" y="6035040"/>
+            <a:ext cx="2063496" cy="3520440"/>
           </a:xfrm>
           <a:prstGeom prst="roundRect">
             <a:avLst>
@@ -24349,14 +24372,14 @@
       </p:sp>
       <p:sp>
         <p:nvSpPr>
-          <p:cNvPr id="14" name="Shape 11"/>
+          <p:cNvPr id="15" name="Shape 12"/>
           <p:cNvSpPr/>
           <p:nvPr/>
         </p:nvSpPr>
         <p:spPr>
           <a:xfrm>
-            <a:off x="2932176" y="5559552"/>
-            <a:ext cx="411480" cy="411480"/>
+            <a:off x="2977896" y="6263640"/>
+            <a:ext cx="502920" cy="502920"/>
           </a:xfrm>
           <a:prstGeom prst="ellipse">
             <a:avLst/>
@@ -24374,14 +24397,14 @@
       </p:sp>
       <p:sp>
         <p:nvSpPr>
-          <p:cNvPr id="15" name="Text 12"/>
-          <p:cNvSpPr txBox="1"/>
-          <p:nvPr/>
-        </p:nvSpPr>
-        <p:spPr>
-          <a:xfrm>
-            <a:off x="2932176" y="5559552"/>
-            <a:ext cx="411480" cy="411480"/>
+          <p:cNvPr id="16" name="Text 13"/>
+          <p:cNvSpPr txBox="1"/>
+          <p:nvPr/>
+        </p:nvSpPr>
+        <p:spPr>
+          <a:xfrm>
+            <a:off x="2977896" y="6263640"/>
+            <a:ext cx="502920" cy="502920"/>
           </a:xfrm>
           <a:prstGeom prst="rect">
             <a:avLst/>
@@ -24397,7 +24420,7 @@
               <a:buNone/>
             </a:pPr>
             <a:r>
-              <a:rPr lang="en-US" sz="1050" b="1" dirty="0">
+              <a:rPr lang="en-US" sz="1300" b="1" dirty="0">
                 <a:solidFill>
                   <a:schemeClr val="bg1"/>
                 </a:solidFill>
@@ -24407,20 +24430,20 @@
               </a:rPr>
               <a:t>02</a:t>
             </a:r>
-            <a:endParaRPr lang="en-US" sz="1050" dirty="0"/>
-          </a:p>
-        </p:txBody>
-      </p:sp>
-      <p:sp>
-        <p:nvSpPr>
-          <p:cNvPr id="16" name="Text 13"/>
-          <p:cNvSpPr txBox="1"/>
-          <p:nvPr/>
-        </p:nvSpPr>
-        <p:spPr>
-          <a:xfrm>
-            <a:off x="2932176" y="6080760"/>
-            <a:ext cx="1697736" cy="365760"/>
+            <a:endParaRPr lang="en-US" sz="1300" dirty="0"/>
+          </a:p>
+        </p:txBody>
+      </p:sp>
+      <p:sp>
+        <p:nvSpPr>
+          <p:cNvPr id="17" name="Text 14"/>
+          <p:cNvSpPr txBox="1"/>
+          <p:nvPr/>
+        </p:nvSpPr>
+        <p:spPr>
+          <a:xfrm>
+            <a:off x="2977896" y="6949440"/>
+            <a:ext cx="1606296" cy="457200"/>
           </a:xfrm>
           <a:prstGeom prst="rect">
             <a:avLst/>
@@ -24436,7 +24459,7 @@
               <a:buNone/>
             </a:pPr>
             <a:r>
-              <a:rPr lang="en-US" sz="1600" b="1" dirty="0">
+              <a:rPr lang="en-US" sz="2000" b="1" dirty="0">
                 <a:solidFill>
                   <a:schemeClr val="accent1"/>
                 </a:solidFill>
@@ -24446,20 +24469,20 @@
               </a:rPr>
               <a:t>NINH BÌNH</a:t>
             </a:r>
-            <a:endParaRPr lang="en-US" sz="1600" dirty="0"/>
-          </a:p>
-        </p:txBody>
-      </p:sp>
-      <p:sp>
-        <p:nvSpPr>
-          <p:cNvPr id="17" name="Text 14"/>
-          <p:cNvSpPr txBox="1"/>
-          <p:nvPr/>
-        </p:nvSpPr>
-        <p:spPr>
-          <a:xfrm>
-            <a:off x="2932176" y="6492240"/>
-            <a:ext cx="1697736" cy="457200"/>
+            <a:endParaRPr lang="en-US" sz="2000" dirty="0"/>
+          </a:p>
+        </p:txBody>
+      </p:sp>
+      <p:sp>
+        <p:nvSpPr>
+          <p:cNvPr id="18" name="Text 15"/>
+          <p:cNvSpPr txBox="1"/>
+          <p:nvPr/>
+        </p:nvSpPr>
+        <p:spPr>
+          <a:xfrm>
+            <a:off x="2977896" y="7498080"/>
+            <a:ext cx="1606296" cy="594360"/>
           </a:xfrm>
           <a:prstGeom prst="rect">
             <a:avLst/>
@@ -24475,86 +24498,50 @@
               <a:buNone/>
             </a:pPr>
             <a:r>
-              <a:rPr lang="en-US" sz="1050" b="1" dirty="0">
+              <a:rPr lang="en-US" sz="1200" b="1" dirty="0">
                 <a:solidFill>
                   <a:schemeClr val="bg1"/>
                 </a:solidFill>
               </a:rPr>
               <a:t>Công trình nhiều tầng</a:t>
             </a:r>
+            <a:endParaRPr lang="en-US" sz="1200" dirty="0"/>
+          </a:p>
+        </p:txBody>
+      </p:sp>
+      <p:sp>
+        <p:nvSpPr>
+          <p:cNvPr id="19" name="Text 16"/>
+          <p:cNvSpPr txBox="1"/>
+          <p:nvPr/>
+        </p:nvSpPr>
+        <p:spPr>
+          <a:xfrm>
+            <a:off x="2977896" y="8183880"/>
+            <a:ext cx="1606296" cy="594360"/>
+          </a:xfrm>
+          <a:prstGeom prst="rect">
+            <a:avLst/>
+          </a:prstGeom>
+          <a:noFill/>
+          <a:ln/>
+        </p:spPr>
+        <p:txBody>
+          <a:bodyPr wrap="square" lIns="0" tIns="0" rIns="0" bIns="0" rtlCol="0" anchor="t"/>
+          <a:lstStyle/>
+          <a:p>
+            <a:pPr indent="0" marL="0">
+              <a:buNone/>
+            </a:pPr>
+            <a:r>
+              <a:rPr lang="en-US" sz="1050" dirty="0">
+                <a:solidFill>
+                  <a:schemeClr val="accent4"/>
+                </a:solidFill>
+              </a:rPr>
+              <a:t>Điện, cấp thoát nước</a:t>
+            </a:r>
             <a:endParaRPr lang="en-US" sz="1050" dirty="0"/>
-          </a:p>
-        </p:txBody>
-      </p:sp>
-      <p:sp>
-        <p:nvSpPr>
-          <p:cNvPr id="18" name="Text 15"/>
-          <p:cNvSpPr txBox="1"/>
-          <p:nvPr/>
-        </p:nvSpPr>
-        <p:spPr>
-          <a:xfrm>
-            <a:off x="2932176" y="6949440"/>
-            <a:ext cx="1697736" cy="411480"/>
-          </a:xfrm>
-          <a:prstGeom prst="rect">
-            <a:avLst/>
-          </a:prstGeom>
-          <a:noFill/>
-          <a:ln/>
-        </p:spPr>
-        <p:txBody>
-          <a:bodyPr wrap="square" lIns="0" tIns="0" rIns="0" bIns="0" rtlCol="0" anchor="t"/>
-          <a:lstStyle/>
-          <a:p>
-            <a:pPr indent="0" marL="0">
-              <a:buNone/>
-            </a:pPr>
-            <a:r>
-              <a:rPr lang="en-US" sz="900" dirty="0">
-                <a:solidFill>
-                  <a:schemeClr val="accent4"/>
-                </a:solidFill>
-              </a:rPr>
-              <a:t>Điện, cấp thoát nước</a:t>
-            </a:r>
-            <a:endParaRPr lang="en-US" sz="900" dirty="0"/>
-          </a:p>
-        </p:txBody>
-      </p:sp>
-      <p:sp>
-        <p:nvSpPr>
-          <p:cNvPr id="19" name="Text 16"/>
-          <p:cNvSpPr txBox="1"/>
-          <p:nvPr/>
-        </p:nvSpPr>
-        <p:spPr>
-          <a:xfrm>
-            <a:off x="2932176" y="7388352"/>
-            <a:ext cx="1697736" cy="256032"/>
-          </a:xfrm>
-          <a:prstGeom prst="rect">
-            <a:avLst/>
-          </a:prstGeom>
-          <a:noFill/>
-          <a:ln/>
-        </p:spPr>
-        <p:txBody>
-          <a:bodyPr wrap="square" lIns="0" tIns="0" rIns="0" bIns="0" rtlCol="0" anchor="ctr"/>
-          <a:lstStyle/>
-          <a:p>
-            <a:pPr indent="0" marL="0">
-              <a:buNone/>
-            </a:pPr>
-            <a:r>
-              <a:rPr lang="en-US" sz="900" b="1" dirty="0">
-                <a:solidFill>
-                  <a:schemeClr val="accent6"/>
-                </a:solidFill>
-              </a:rPr>
-              <a:t>09/2026</a:t>
-            </a:r>
-            <a:endParaRPr lang="en-US" sz="900" dirty="0"/>
           </a:p>
         </p:txBody>
       </p:sp>
@@ -24566,8 +24553,67 @@
         </p:nvSpPr>
         <p:spPr>
           <a:xfrm>
-            <a:off x="4995672" y="5394960"/>
-            <a:ext cx="2063496" cy="2377440"/>
+            <a:off x="2977896" y="8915400"/>
+            <a:ext cx="1606296" cy="0"/>
+          </a:xfrm>
+          <a:prstGeom prst="line">
+            <a:avLst/>
+          </a:prstGeom>
+          <a:noFill/>
+          <a:ln w="9525">
+            <a:solidFill>
+              <a:schemeClr val="accent3"/>
+            </a:solidFill>
+            <a:prstDash val="solid"/>
+          </a:ln>
+        </p:spPr>
+      </p:sp>
+      <p:sp>
+        <p:nvSpPr>
+          <p:cNvPr id="21" name="Text 18"/>
+          <p:cNvSpPr txBox="1"/>
+          <p:nvPr/>
+        </p:nvSpPr>
+        <p:spPr>
+          <a:xfrm>
+            <a:off x="2977896" y="9034272"/>
+            <a:ext cx="1606296" cy="292608"/>
+          </a:xfrm>
+          <a:prstGeom prst="rect">
+            <a:avLst/>
+          </a:prstGeom>
+          <a:noFill/>
+          <a:ln/>
+        </p:spPr>
+        <p:txBody>
+          <a:bodyPr wrap="square" lIns="0" tIns="0" rIns="0" bIns="0" rtlCol="0" anchor="ctr"/>
+          <a:lstStyle/>
+          <a:p>
+            <a:pPr indent="0" marL="0">
+              <a:buNone/>
+            </a:pPr>
+            <a:r>
+              <a:rPr lang="en-US" sz="1100" b="1" dirty="0">
+                <a:solidFill>
+                  <a:schemeClr val="accent6"/>
+                </a:solidFill>
+              </a:rPr>
+              <a:t>09/2026</a:t>
+            </a:r>
+            <a:endParaRPr lang="en-US" sz="1100" dirty="0"/>
+          </a:p>
+        </p:txBody>
+      </p:sp>
+      <p:sp>
+        <p:nvSpPr>
+          <p:cNvPr id="22" name="Shape 19"/>
+          <p:cNvSpPr/>
+          <p:nvPr/>
+        </p:nvSpPr>
+        <p:spPr>
+          <a:xfrm>
+            <a:off x="4995672" y="6035040"/>
+            <a:ext cx="2063496" cy="3520440"/>
           </a:xfrm>
           <a:prstGeom prst="roundRect">
             <a:avLst>
@@ -24587,14 +24633,14 @@
       </p:sp>
       <p:sp>
         <p:nvSpPr>
-          <p:cNvPr id="21" name="Shape 18"/>
+          <p:cNvPr id="23" name="Shape 20"/>
           <p:cNvSpPr/>
           <p:nvPr/>
         </p:nvSpPr>
         <p:spPr>
           <a:xfrm>
-            <a:off x="5178552" y="5559552"/>
-            <a:ext cx="411480" cy="411480"/>
+            <a:off x="5224272" y="6263640"/>
+            <a:ext cx="502920" cy="502920"/>
           </a:xfrm>
           <a:prstGeom prst="ellipse">
             <a:avLst/>
@@ -24612,14 +24658,14 @@
       </p:sp>
       <p:sp>
         <p:nvSpPr>
-          <p:cNvPr id="22" name="Text 19"/>
-          <p:cNvSpPr txBox="1"/>
-          <p:nvPr/>
-        </p:nvSpPr>
-        <p:spPr>
-          <a:xfrm>
-            <a:off x="5178552" y="5559552"/>
-            <a:ext cx="411480" cy="411480"/>
+          <p:cNvPr id="24" name="Text 21"/>
+          <p:cNvSpPr txBox="1"/>
+          <p:nvPr/>
+        </p:nvSpPr>
+        <p:spPr>
+          <a:xfrm>
+            <a:off x="5224272" y="6263640"/>
+            <a:ext cx="502920" cy="502920"/>
           </a:xfrm>
           <a:prstGeom prst="rect">
             <a:avLst/>
@@ -24635,7 +24681,7 @@
               <a:buNone/>
             </a:pPr>
             <a:r>
-              <a:rPr lang="en-US" sz="1050" b="1" dirty="0">
+              <a:rPr lang="en-US" sz="1300" b="1" dirty="0">
                 <a:solidFill>
                   <a:schemeClr val="bg1"/>
                 </a:solidFill>
@@ -24645,20 +24691,20 @@
               </a:rPr>
               <a:t>03</a:t>
             </a:r>
-            <a:endParaRPr lang="en-US" sz="1050" dirty="0"/>
-          </a:p>
-        </p:txBody>
-      </p:sp>
-      <p:sp>
-        <p:nvSpPr>
-          <p:cNvPr id="23" name="Text 20"/>
-          <p:cNvSpPr txBox="1"/>
-          <p:nvPr/>
-        </p:nvSpPr>
-        <p:spPr>
-          <a:xfrm>
-            <a:off x="5178552" y="6080760"/>
-            <a:ext cx="1697736" cy="365760"/>
+            <a:endParaRPr lang="en-US" sz="1300" dirty="0"/>
+          </a:p>
+        </p:txBody>
+      </p:sp>
+      <p:sp>
+        <p:nvSpPr>
+          <p:cNvPr id="25" name="Text 22"/>
+          <p:cNvSpPr txBox="1"/>
+          <p:nvPr/>
+        </p:nvSpPr>
+        <p:spPr>
+          <a:xfrm>
+            <a:off x="5224272" y="6949440"/>
+            <a:ext cx="1606296" cy="457200"/>
           </a:xfrm>
           <a:prstGeom prst="rect">
             <a:avLst/>
@@ -24674,7 +24720,7 @@
               <a:buNone/>
             </a:pPr>
             <a:r>
-              <a:rPr lang="en-US" sz="1600" b="1" dirty="0">
+              <a:rPr lang="en-US" sz="2000" b="1" dirty="0">
                 <a:solidFill>
                   <a:schemeClr val="accent1"/>
                 </a:solidFill>
@@ -24684,20 +24730,20 @@
               </a:rPr>
               <a:t>TP. HUẾ</a:t>
             </a:r>
-            <a:endParaRPr lang="en-US" sz="1600" dirty="0"/>
-          </a:p>
-        </p:txBody>
-      </p:sp>
-      <p:sp>
-        <p:nvSpPr>
-          <p:cNvPr id="24" name="Text 21"/>
-          <p:cNvSpPr txBox="1"/>
-          <p:nvPr/>
-        </p:nvSpPr>
-        <p:spPr>
-          <a:xfrm>
-            <a:off x="5178552" y="6492240"/>
-            <a:ext cx="1697736" cy="457200"/>
+            <a:endParaRPr lang="en-US" sz="2000" dirty="0"/>
+          </a:p>
+        </p:txBody>
+      </p:sp>
+      <p:sp>
+        <p:nvSpPr>
+          <p:cNvPr id="26" name="Text 23"/>
+          <p:cNvSpPr txBox="1"/>
+          <p:nvPr/>
+        </p:nvSpPr>
+        <p:spPr>
+          <a:xfrm>
+            <a:off x="5224272" y="7498080"/>
+            <a:ext cx="1606296" cy="594360"/>
           </a:xfrm>
           <a:prstGeom prst="rect">
             <a:avLst/>
@@ -24713,111 +24759,71 @@
               <a:buNone/>
             </a:pPr>
             <a:r>
-              <a:rPr lang="en-US" sz="1050" b="1" dirty="0">
+              <a:rPr lang="en-US" sz="1200" b="1" dirty="0">
                 <a:solidFill>
                   <a:schemeClr val="bg1"/>
                 </a:solidFill>
               </a:rPr>
               <a:t>Trạm xử lý nước UF/RO</a:t>
             </a:r>
+            <a:endParaRPr lang="en-US" sz="1200" dirty="0"/>
+          </a:p>
+        </p:txBody>
+      </p:sp>
+      <p:sp>
+        <p:nvSpPr>
+          <p:cNvPr id="27" name="Text 24"/>
+          <p:cNvSpPr txBox="1"/>
+          <p:nvPr/>
+        </p:nvSpPr>
+        <p:spPr>
+          <a:xfrm>
+            <a:off x="5224272" y="8183880"/>
+            <a:ext cx="1606296" cy="594360"/>
+          </a:xfrm>
+          <a:prstGeom prst="rect">
+            <a:avLst/>
+          </a:prstGeom>
+          <a:noFill/>
+          <a:ln/>
+        </p:spPr>
+        <p:txBody>
+          <a:bodyPr wrap="square" lIns="0" tIns="0" rIns="0" bIns="0" rtlCol="0" anchor="t"/>
+          <a:lstStyle/>
+          <a:p>
+            <a:pPr indent="0" marL="0">
+              <a:buNone/>
+            </a:pPr>
+            <a:r>
+              <a:rPr lang="en-US" sz="1050" dirty="0">
+                <a:solidFill>
+                  <a:schemeClr val="accent4"/>
+                </a:solidFill>
+              </a:rPr>
+              <a:t>Bơm, bồn lọc, ống công nghệ</a:t>
+            </a:r>
             <a:endParaRPr lang="en-US" sz="1050" dirty="0"/>
           </a:p>
         </p:txBody>
       </p:sp>
       <p:sp>
         <p:nvSpPr>
-          <p:cNvPr id="25" name="Text 22"/>
-          <p:cNvSpPr txBox="1"/>
-          <p:nvPr/>
-        </p:nvSpPr>
-        <p:spPr>
-          <a:xfrm>
-            <a:off x="5178552" y="6949440"/>
-            <a:ext cx="1697736" cy="411480"/>
-          </a:xfrm>
-          <a:prstGeom prst="rect">
-            <a:avLst/>
-          </a:prstGeom>
-          <a:noFill/>
-          <a:ln/>
-        </p:spPr>
-        <p:txBody>
-          <a:bodyPr wrap="square" lIns="0" tIns="0" rIns="0" bIns="0" rtlCol="0" anchor="t"/>
-          <a:lstStyle/>
-          <a:p>
-            <a:pPr indent="0" marL="0">
-              <a:buNone/>
-            </a:pPr>
-            <a:r>
-              <a:rPr lang="en-US" sz="900" dirty="0">
-                <a:solidFill>
-                  <a:schemeClr val="accent4"/>
-                </a:solidFill>
-              </a:rPr>
-              <a:t>Bơm, bồn lọc, ống công nghệ</a:t>
-            </a:r>
-            <a:endParaRPr lang="en-US" sz="900" dirty="0"/>
-          </a:p>
-        </p:txBody>
-      </p:sp>
-      <p:sp>
-        <p:nvSpPr>
-          <p:cNvPr id="26" name="Text 23"/>
-          <p:cNvSpPr txBox="1"/>
-          <p:nvPr/>
-        </p:nvSpPr>
-        <p:spPr>
-          <a:xfrm>
-            <a:off x="5178552" y="7388352"/>
-            <a:ext cx="1697736" cy="256032"/>
-          </a:xfrm>
-          <a:prstGeom prst="rect">
-            <a:avLst/>
-          </a:prstGeom>
-          <a:noFill/>
-          <a:ln/>
-        </p:spPr>
-        <p:txBody>
-          <a:bodyPr wrap="square" lIns="0" tIns="0" rIns="0" bIns="0" rtlCol="0" anchor="ctr"/>
-          <a:lstStyle/>
-          <a:p>
-            <a:pPr indent="0" marL="0">
-              <a:buNone/>
-            </a:pPr>
-            <a:r>
-              <a:rPr lang="en-US" sz="900" b="1" dirty="0">
-                <a:solidFill>
-                  <a:schemeClr val="accent6"/>
-                </a:solidFill>
-              </a:rPr>
-              <a:t>09/2026</a:t>
-            </a:r>
-            <a:endParaRPr lang="en-US" sz="900" dirty="0"/>
-          </a:p>
-        </p:txBody>
-      </p:sp>
-      <p:sp>
-        <p:nvSpPr>
-          <p:cNvPr id="27" name="Shape 24"/>
+          <p:cNvPr id="28" name="Shape 25"/>
           <p:cNvSpPr/>
           <p:nvPr/>
         </p:nvSpPr>
         <p:spPr>
           <a:xfrm>
-            <a:off x="502920" y="8229600"/>
-            <a:ext cx="6556248" cy="1508760"/>
-          </a:xfrm>
-          <a:prstGeom prst="roundRect">
-            <a:avLst>
-              <a:gd name="adj" fmla="val 4848"/>
-            </a:avLst>
-          </a:prstGeom>
-          <a:solidFill>
-            <a:schemeClr val="bg2"/>
-          </a:solidFill>
-          <a:ln w="12700">
+            <a:off x="5224272" y="8915400"/>
+            <a:ext cx="1606296" cy="0"/>
+          </a:xfrm>
+          <a:prstGeom prst="line">
+            <a:avLst/>
+          </a:prstGeom>
+          <a:noFill/>
+          <a:ln w="9525">
             <a:solidFill>
-              <a:schemeClr val="bg2"/>
+              <a:schemeClr val="accent3"/>
             </a:solidFill>
             <a:prstDash val="solid"/>
           </a:ln>
@@ -24825,14 +24831,14 @@
       </p:sp>
       <p:sp>
         <p:nvSpPr>
-          <p:cNvPr id="28" name="Text 25"/>
-          <p:cNvSpPr txBox="1"/>
-          <p:nvPr/>
-        </p:nvSpPr>
-        <p:spPr>
-          <a:xfrm>
-            <a:off x="685800" y="8339328"/>
-            <a:ext cx="6190488" cy="228600"/>
+          <p:cNvPr id="29" name="Text 26"/>
+          <p:cNvSpPr txBox="1"/>
+          <p:nvPr/>
+        </p:nvSpPr>
+        <p:spPr>
+          <a:xfrm>
+            <a:off x="5224272" y="9034272"/>
+            <a:ext cx="1606296" cy="292608"/>
           </a:xfrm>
           <a:prstGeom prst="rect">
             <a:avLst/>
@@ -24848,93 +24854,14 @@
               <a:buNone/>
             </a:pPr>
             <a:r>
-              <a:rPr lang="en-US" sz="900" b="1" spc="200" kern="0" dirty="0">
-                <a:solidFill>
-                  <a:schemeClr val="tx2"/>
-                </a:solidFill>
-                <a:latin typeface="Arial" pitchFamily="34" charset="0"/>
-                <a:ea typeface="Arial" pitchFamily="34" charset="-122"/>
-                <a:cs typeface="Arial" pitchFamily="34" charset="-120"/>
-              </a:rPr>
-              <a:t>HỒ SƠ CUNG CẤP KHI CÓ YÊU CẦU</a:t>
-            </a:r>
-            <a:endParaRPr lang="en-US" sz="900" dirty="0"/>
-          </a:p>
-        </p:txBody>
-      </p:sp>
-      <p:sp>
-        <p:nvSpPr>
-          <p:cNvPr id="29" name="Text 26"/>
-          <p:cNvSpPr txBox="1"/>
-          <p:nvPr/>
-        </p:nvSpPr>
-        <p:spPr>
-          <a:xfrm>
-            <a:off x="685800" y="8613648"/>
-            <a:ext cx="6190488" cy="1051560"/>
-          </a:xfrm>
-          <a:prstGeom prst="rect">
-            <a:avLst/>
-          </a:prstGeom>
-          <a:noFill/>
-          <a:ln/>
-        </p:spPr>
-        <p:txBody>
-          <a:bodyPr wrap="square" lIns="0" tIns="0" rIns="0" bIns="0" rtlCol="0" anchor="t"/>
-          <a:lstStyle/>
-          <a:p>
-            <a:pPr marL="152400" indent="-152400">
-              <a:spcAft>
-                <a:spcPts val="400"/>
-              </a:spcAft>
-              <a:buSzPct val="100000"/>
-              <a:buChar char="•"/>
-            </a:pPr>
-            <a:r>
-              <a:rPr lang="en-US" sz="950" dirty="0">
-                <a:solidFill>
-                  <a:schemeClr val="tx1"/>
-                </a:solidFill>
-              </a:rPr>
-              <a:t>Hợp đồng, biên bản nghiệm thu, thanh lý hợp đồng của các công trình</a:t>
-            </a:r>
-            <a:endParaRPr lang="en-US" sz="950" dirty="0"/>
-          </a:p>
-          <a:p>
-            <a:pPr marL="152400" indent="-152400">
-              <a:spcAft>
-                <a:spcPts val="400"/>
-              </a:spcAft>
-              <a:buSzPct val="100000"/>
-              <a:buChar char="•"/>
-            </a:pPr>
-            <a:r>
-              <a:rPr lang="en-US" sz="950" dirty="0">
-                <a:solidFill>
-                  <a:schemeClr val="tx1"/>
-                </a:solidFill>
-              </a:rPr>
-              <a:t>Thông tin chủ đầu tư, tổng thầu để Quý khách tham khảo, xác minh</a:t>
-            </a:r>
-            <a:endParaRPr lang="en-US" sz="950" dirty="0"/>
-          </a:p>
-          <a:p>
-            <a:pPr marL="152400" indent="-152400">
-              <a:spcAft>
-                <a:spcPts val="400"/>
-              </a:spcAft>
-              <a:buSzPct val="100000"/>
-              <a:buChar char="•"/>
-            </a:pPr>
-            <a:r>
-              <a:rPr lang="en-US" sz="950" dirty="0">
-                <a:solidFill>
-                  <a:schemeClr val="tx1"/>
-                </a:solidFill>
-              </a:rPr>
-              <a:t>Giấy chứng nhận đăng ký doanh nghiệp, chứng chỉ an toàn lao động của nhân sự</a:t>
-            </a:r>
-            <a:endParaRPr lang="en-US" sz="950" dirty="0"/>
+              <a:rPr lang="en-US" sz="1100" b="1" dirty="0">
+                <a:solidFill>
+                  <a:schemeClr val="accent6"/>
+                </a:solidFill>
+              </a:rPr>
+              <a:t>09/2026</a:t>
+            </a:r>
+            <a:endParaRPr lang="en-US" sz="1100" dirty="0"/>
           </a:p>
         </p:txBody>
       </p:sp>

--- a/ho-so-nang-luc-BLT/HO_SO_NANG_LUC_BLT.pptx
+++ b/ho-so-nang-luc-BLT/HO_SO_NANG_LUC_BLT.pptx
@@ -132,14 +132,14 @@
   <p:extLst>
     <p:ext uri="{521415D9-36F7-43E2-AB2F-B90AF26B5E84}">
       <p14:sectionLst xmlns:p14="http://schemas.microsoft.com/office/powerpoint/2010/main">
-        <p14:section name="Mở đầu" id="{d2d75668-9e89-8362-847c-447f0a0cab44}">
+        <p14:section name="Mở đầu" id="{182fa455-e893-9667-dd64-4ab823b804d0}">
           <p14:sldIdLst>
             <p14:sldId id="256"/>
             <p14:sldId id="257"/>
             <p14:sldId id="258"/>
           </p14:sldIdLst>
         </p14:section>
-        <p14:section name="01 Tổng quan" id="{fe2ad2fc-a135-3a79-4a73-5d65b2964f31}">
+        <p14:section name="01 Tổng quan" id="{f3a3533f-b04d-722f-7c62-47dc8145aab4}">
           <p14:sldIdLst>
             <p14:sldId id="259"/>
             <p14:sldId id="260"/>
@@ -148,39 +148,39 @@
             <p14:sldId id="263"/>
           </p14:sldIdLst>
         </p14:section>
-        <p14:section name="02 Điện nước công trình" id="{4d191460-7e11-0b26-0a27-f80f0164c9ad}">
+        <p14:section name="02 Điện nước công trình" id="{1d9649b2-0ff4-a928-228d-ed22c2e5617c}">
           <p14:sldIdLst>
             <p14:sldId id="264"/>
             <p14:sldId id="265"/>
             <p14:sldId id="266"/>
           </p14:sldIdLst>
         </p14:section>
-        <p14:section name="03 Hút sương dầu nhà xưởng" id="{f480d4e0-948d-8534-cb8a-c4ec9a9061e3}">
+        <p14:section name="03 Hút sương dầu nhà xưởng" id="{44cc2189-a476-7a85-fe88-ab68c0f7dc79}">
           <p14:sldIdLst>
             <p14:sldId id="267"/>
             <p14:sldId id="268"/>
             <p14:sldId id="269"/>
           </p14:sldIdLst>
         </p14:section>
-        <p14:section name="04 Bơm &amp; xử lý nước" id="{087c28b5-faf9-6bf3-317a-6aad68f07b4e}">
+        <p14:section name="04 Bơm &amp; xử lý nước" id="{2649f439-536d-7ec4-1543-fb3532078bc7}">
           <p14:sldIdLst>
             <p14:sldId id="270"/>
           </p14:sldIdLst>
         </p14:section>
-        <p14:section name="05 Quản trị dự án" id="{a0e624b9-b0e9-6e26-ca07-47cefd2450f1}">
+        <p14:section name="05 Quản trị dự án" id="{5495e30f-f0d5-b81c-5ac4-0311d703ffd5}">
           <p14:sldIdLst>
             <p14:sldId id="271"/>
             <p14:sldId id="272"/>
             <p14:sldId id="273"/>
           </p14:sldIdLst>
         </p14:section>
-        <p14:section name="06 Nguồn lực" id="{59ba8e18-645e-b90c-d913-2adb7df5b24e}">
+        <p14:section name="06 Nguồn lực" id="{69f901ee-d9fa-55bb-9321-fd85117e12a0}">
           <p14:sldIdLst>
             <p14:sldId id="274"/>
             <p14:sldId id="275"/>
           </p14:sldIdLst>
         </p14:section>
-        <p14:section name="07 Công trình tiêu biểu" id="{50837fe0-90c7-16b4-dd0d-2072709c20ae}">
+        <p14:section name="07 Công trình tiêu biểu" id="{7a1e0bba-9bcc-4c30-8c80-e5beaabc62f3}">
           <p14:sldIdLst>
             <p14:sldId id="276"/>
             <p14:sldId id="277"/>
@@ -188,7 +188,7 @@
             <p14:sldId id="279"/>
           </p14:sldIdLst>
         </p14:section>
-        <p14:section name="08 Cam kết &amp; liên hệ" id="{78527d66-43e1-8beb-1b62-108563cb1944}">
+        <p14:section name="08 Cam kết &amp; liên hệ" id="{08ee5891-be5a-f9b7-774f-d588d144d4a0}">
           <p14:sldIdLst>
             <p14:sldId id="280"/>
             <p14:sldId id="281"/>
@@ -34887,7 +34887,7 @@
       </p:pic>
       <p:pic>
         <p:nvPicPr>
-          <p:cNvPr id="3" name="photo render_nha.jpg" descr="Ảnh hiện trường BLT">    </p:cNvPr>
+          <p:cNvPr id="3" name="photo caotang.jpg" descr="Ảnh hiện trường BLT">    </p:cNvPr>
           <p:cNvPicPr>
             <a:picLocks noChangeAspect="1"/>
           </p:cNvPicPr>
@@ -34911,7 +34911,7 @@
       </p:pic>
       <p:pic>
         <p:nvPicPr>
-          <p:cNvPr id="4" name="photo img08.jpg" descr="Ảnh hiện trường BLT">    </p:cNvPr>
+          <p:cNvPr id="4" name="photo render_nha.jpg" descr="Ảnh hiện trường BLT">    </p:cNvPr>
           <p:cNvPicPr>
             <a:picLocks noChangeAspect="1"/>
           </p:cNvPicPr>
@@ -34942,7 +34942,7 @@
         <p:spPr>
           <a:xfrm>
             <a:off x="4370832" y="2926080"/>
-            <a:ext cx="1600200" cy="274320"/>
+            <a:ext cx="1234440" cy="274320"/>
           </a:xfrm>
           <a:prstGeom prst="roundRect">
             <a:avLst>
@@ -34973,8 +34973,75 @@
         <p:spPr>
           <a:xfrm>
             <a:off x="4370832" y="2926080"/>
+            <a:ext cx="1234440" cy="274320"/>
+          </a:xfrm>
+          <a:prstGeom prst="rect">
+            <a:avLst/>
+          </a:prstGeom>
+          <a:noFill/>
+          <a:ln/>
+        </p:spPr>
+        <p:txBody>
+          <a:bodyPr wrap="square" lIns="0" tIns="0" rIns="0" bIns="0" rtlCol="0" anchor="ctr"/>
+          <a:lstStyle/>
+          <a:p>
+            <a:pPr algn="ctr" indent="0" marL="0">
+              <a:buNone/>
+            </a:pPr>
+            <a:r>
+              <a:rPr lang="en-US" sz="750" b="1" spc="100" kern="0" dirty="0">
+                <a:solidFill>
+                  <a:schemeClr val="bg1"/>
+                </a:solidFill>
+              </a:rPr>
+              <a:t>ẢNH MINH HỌA</a:t>
+            </a:r>
+            <a:endParaRPr lang="en-US" sz="750" dirty="0"/>
+          </a:p>
+        </p:txBody>
+      </p:sp>
+      <p:sp>
+        <p:nvSpPr>
+          <p:cNvPr id="7" name="Shape 2"/>
+          <p:cNvSpPr/>
+          <p:nvPr/>
+        </p:nvSpPr>
+        <p:spPr>
+          <a:xfrm>
+            <a:off x="4370832" y="6345936"/>
             <a:ext cx="1600200" cy="274320"/>
           </a:xfrm>
+          <a:prstGeom prst="roundRect">
+            <a:avLst>
+              <a:gd name="adj" fmla="val 16667"/>
+            </a:avLst>
+          </a:prstGeom>
+          <a:solidFill>
+            <a:schemeClr val="tx2">
+              <a:alpha val="85000"/>
+            </a:schemeClr>
+          </a:solidFill>
+          <a:ln w="12700">
+            <a:solidFill>
+              <a:schemeClr val="tx2">
+                <a:alpha val="0"/>
+              </a:schemeClr>
+            </a:solidFill>
+            <a:prstDash val="solid"/>
+          </a:ln>
+        </p:spPr>
+      </p:sp>
+      <p:sp>
+        <p:nvSpPr>
+          <p:cNvPr id="8" name="Text 3"/>
+          <p:cNvSpPr txBox="1"/>
+          <p:nvPr/>
+        </p:nvSpPr>
+        <p:spPr>
+          <a:xfrm>
+            <a:off x="4370832" y="6345936"/>
+            <a:ext cx="1600200" cy="274320"/>
+          </a:xfrm>
           <a:prstGeom prst="rect">
             <a:avLst/>
           </a:prstGeom>
@@ -35002,7 +35069,7 @@
       </p:sp>
       <p:sp>
         <p:nvSpPr>
-          <p:cNvPr id="7" name="Text 2"/>
+          <p:cNvPr id="9" name="Text 4"/>
           <p:cNvSpPr txBox="1"/>
           <p:nvPr/>
         </p:nvSpPr>
@@ -35038,7 +35105,7 @@
       </p:sp>
       <p:sp>
         <p:nvSpPr>
-          <p:cNvPr id="8" name="Text 3"/>
+          <p:cNvPr id="10" name="Text 5"/>
           <p:cNvSpPr txBox="1"/>
           <p:nvPr/>
         </p:nvSpPr>
@@ -35094,7 +35161,7 @@
       </p:sp>
       <p:sp>
         <p:nvSpPr>
-          <p:cNvPr id="9" name="Text 4"/>
+          <p:cNvPr id="11" name="Text 6"/>
           <p:cNvSpPr txBox="1"/>
           <p:nvPr/>
         </p:nvSpPr>

--- a/ho-so-nang-luc-BLT/HO_SO_NANG_LUC_BLT.pptx
+++ b/ho-so-nang-luc-BLT/HO_SO_NANG_LUC_BLT.pptx
@@ -132,14 +132,14 @@
   <p:extLst>
     <p:ext uri="{521415D9-36F7-43E2-AB2F-B90AF26B5E84}">
       <p14:sectionLst xmlns:p14="http://schemas.microsoft.com/office/powerpoint/2010/main">
-        <p14:section name="Mở đầu" id="{182fa455-e893-9667-dd64-4ab823b804d0}">
+        <p14:section name="Mở đầu" id="{f82367c7-e37b-13b4-9831-0d0c3137cc05}">
           <p14:sldIdLst>
             <p14:sldId id="256"/>
             <p14:sldId id="257"/>
             <p14:sldId id="258"/>
           </p14:sldIdLst>
         </p14:section>
-        <p14:section name="01 Tổng quan" id="{f3a3533f-b04d-722f-7c62-47dc8145aab4}">
+        <p14:section name="01 Tổng quan" id="{71d548a8-3210-6f90-e3aa-0985269bde41}">
           <p14:sldIdLst>
             <p14:sldId id="259"/>
             <p14:sldId id="260"/>
@@ -148,39 +148,39 @@
             <p14:sldId id="263"/>
           </p14:sldIdLst>
         </p14:section>
-        <p14:section name="02 Điện nước công trình" id="{1d9649b2-0ff4-a928-228d-ed22c2e5617c}">
+        <p14:section name="02 Điện nước công trình" id="{9911fe74-6450-1b72-485e-f868bcf873da}">
           <p14:sldIdLst>
             <p14:sldId id="264"/>
             <p14:sldId id="265"/>
             <p14:sldId id="266"/>
           </p14:sldIdLst>
         </p14:section>
-        <p14:section name="03 Hút sương dầu nhà xưởng" id="{44cc2189-a476-7a85-fe88-ab68c0f7dc79}">
+        <p14:section name="03 Hút sương dầu nhà xưởng" id="{340ccb19-beee-fb55-0791-498b7b224688}">
           <p14:sldIdLst>
             <p14:sldId id="267"/>
             <p14:sldId id="268"/>
             <p14:sldId id="269"/>
           </p14:sldIdLst>
         </p14:section>
-        <p14:section name="04 Bơm &amp; xử lý nước" id="{2649f439-536d-7ec4-1543-fb3532078bc7}">
+        <p14:section name="04 Bơm &amp; xử lý nước" id="{d120f84e-0813-8819-65f9-92e5cab694e4}">
           <p14:sldIdLst>
             <p14:sldId id="270"/>
           </p14:sldIdLst>
         </p14:section>
-        <p14:section name="05 Quản trị dự án" id="{5495e30f-f0d5-b81c-5ac4-0311d703ffd5}">
+        <p14:section name="05 Quản trị dự án" id="{ebb497a1-8436-e4c7-70ec-f7622bc3cabf}">
           <p14:sldIdLst>
             <p14:sldId id="271"/>
             <p14:sldId id="272"/>
             <p14:sldId id="273"/>
           </p14:sldIdLst>
         </p14:section>
-        <p14:section name="06 Nguồn lực" id="{69f901ee-d9fa-55bb-9321-fd85117e12a0}">
+        <p14:section name="06 Nguồn lực" id="{03d3f5c6-4d43-3430-21ea-fab15475e993}">
           <p14:sldIdLst>
             <p14:sldId id="274"/>
             <p14:sldId id="275"/>
           </p14:sldIdLst>
         </p14:section>
-        <p14:section name="07 Công trình tiêu biểu" id="{7a1e0bba-9bcc-4c30-8c80-e5beaabc62f3}">
+        <p14:section name="07 Công trình tiêu biểu" id="{1db55b8b-f7cb-6779-aa02-f52273827b50}">
           <p14:sldIdLst>
             <p14:sldId id="276"/>
             <p14:sldId id="277"/>
@@ -188,7 +188,7 @@
             <p14:sldId id="279"/>
           </p14:sldIdLst>
         </p14:section>
-        <p14:section name="08 Cam kết &amp; liên hệ" id="{08ee5891-be5a-f9b7-774f-d588d144d4a0}">
+        <p14:section name="08 Cam kết &amp; liên hệ" id="{818dea26-c9c2-2d94-64d5-bef0131be5f4}">
           <p14:sldIdLst>
             <p14:sldId id="280"/>
             <p14:sldId id="281"/>
@@ -34941,8 +34941,8 @@
         </p:nvSpPr>
         <p:spPr>
           <a:xfrm>
-            <a:off x="4370832" y="2926080"/>
-            <a:ext cx="1234440" cy="274320"/>
+            <a:off x="4370832" y="6345936"/>
+            <a:ext cx="1600200" cy="274320"/>
           </a:xfrm>
           <a:prstGeom prst="roundRect">
             <a:avLst>
@@ -34972,76 +34972,9 @@
         </p:nvSpPr>
         <p:spPr>
           <a:xfrm>
-            <a:off x="4370832" y="2926080"/>
-            <a:ext cx="1234440" cy="274320"/>
-          </a:xfrm>
-          <a:prstGeom prst="rect">
-            <a:avLst/>
-          </a:prstGeom>
-          <a:noFill/>
-          <a:ln/>
-        </p:spPr>
-        <p:txBody>
-          <a:bodyPr wrap="square" lIns="0" tIns="0" rIns="0" bIns="0" rtlCol="0" anchor="ctr"/>
-          <a:lstStyle/>
-          <a:p>
-            <a:pPr algn="ctr" indent="0" marL="0">
-              <a:buNone/>
-            </a:pPr>
-            <a:r>
-              <a:rPr lang="en-US" sz="750" b="1" spc="100" kern="0" dirty="0">
-                <a:solidFill>
-                  <a:schemeClr val="bg1"/>
-                </a:solidFill>
-              </a:rPr>
-              <a:t>ẢNH MINH HỌA</a:t>
-            </a:r>
-            <a:endParaRPr lang="en-US" sz="750" dirty="0"/>
-          </a:p>
-        </p:txBody>
-      </p:sp>
-      <p:sp>
-        <p:nvSpPr>
-          <p:cNvPr id="7" name="Shape 2"/>
-          <p:cNvSpPr/>
-          <p:nvPr/>
-        </p:nvSpPr>
-        <p:spPr>
-          <a:xfrm>
             <a:off x="4370832" y="6345936"/>
             <a:ext cx="1600200" cy="274320"/>
           </a:xfrm>
-          <a:prstGeom prst="roundRect">
-            <a:avLst>
-              <a:gd name="adj" fmla="val 16667"/>
-            </a:avLst>
-          </a:prstGeom>
-          <a:solidFill>
-            <a:schemeClr val="tx2">
-              <a:alpha val="85000"/>
-            </a:schemeClr>
-          </a:solidFill>
-          <a:ln w="12700">
-            <a:solidFill>
-              <a:schemeClr val="tx2">
-                <a:alpha val="0"/>
-              </a:schemeClr>
-            </a:solidFill>
-            <a:prstDash val="solid"/>
-          </a:ln>
-        </p:spPr>
-      </p:sp>
-      <p:sp>
-        <p:nvSpPr>
-          <p:cNvPr id="8" name="Text 3"/>
-          <p:cNvSpPr txBox="1"/>
-          <p:nvPr/>
-        </p:nvSpPr>
-        <p:spPr>
-          <a:xfrm>
-            <a:off x="4370832" y="6345936"/>
-            <a:ext cx="1600200" cy="274320"/>
-          </a:xfrm>
           <a:prstGeom prst="rect">
             <a:avLst/>
           </a:prstGeom>
@@ -35069,7 +35002,7 @@
       </p:sp>
       <p:sp>
         <p:nvSpPr>
-          <p:cNvPr id="9" name="Text 4"/>
+          <p:cNvPr id="7" name="Text 2"/>
           <p:cNvSpPr txBox="1"/>
           <p:nvPr/>
         </p:nvSpPr>
@@ -35105,7 +35038,7 @@
       </p:sp>
       <p:sp>
         <p:nvSpPr>
-          <p:cNvPr id="10" name="Text 5"/>
+          <p:cNvPr id="8" name="Text 3"/>
           <p:cNvSpPr txBox="1"/>
           <p:nvPr/>
         </p:nvSpPr>
@@ -35161,7 +35094,7 @@
       </p:sp>
       <p:sp>
         <p:nvSpPr>
-          <p:cNvPr id="11" name="Text 6"/>
+          <p:cNvPr id="9" name="Text 4"/>
           <p:cNvSpPr txBox="1"/>
           <p:nvPr/>
         </p:nvSpPr>

--- a/ho-so-nang-luc-BLT/HO_SO_NANG_LUC_BLT.pptx
+++ b/ho-so-nang-luc-BLT/HO_SO_NANG_LUC_BLT.pptx
@@ -132,14 +132,14 @@
   <p:extLst>
     <p:ext uri="{521415D9-36F7-43E2-AB2F-B90AF26B5E84}">
       <p14:sectionLst xmlns:p14="http://schemas.microsoft.com/office/powerpoint/2010/main">
-        <p14:section name="Mở đầu" id="{f82367c7-e37b-13b4-9831-0d0c3137cc05}">
+        <p14:section name="Mở đầu" id="{a672791f-3e63-18b1-d181-8550a6f4335d}">
           <p14:sldIdLst>
             <p14:sldId id="256"/>
             <p14:sldId id="257"/>
             <p14:sldId id="258"/>
           </p14:sldIdLst>
         </p14:section>
-        <p14:section name="01 Tổng quan" id="{71d548a8-3210-6f90-e3aa-0985269bde41}">
+        <p14:section name="01 Tổng quan" id="{057f3cac-48f6-e923-2ee9-0faa12c5827f}">
           <p14:sldIdLst>
             <p14:sldId id="259"/>
             <p14:sldId id="260"/>
@@ -148,39 +148,39 @@
             <p14:sldId id="263"/>
           </p14:sldIdLst>
         </p14:section>
-        <p14:section name="02 Điện nước công trình" id="{9911fe74-6450-1b72-485e-f868bcf873da}">
+        <p14:section name="02 Điện nước công trình" id="{efe1aa15-d6cf-95f8-3f57-e5ea369a30ad}">
           <p14:sldIdLst>
             <p14:sldId id="264"/>
             <p14:sldId id="265"/>
             <p14:sldId id="266"/>
           </p14:sldIdLst>
         </p14:section>
-        <p14:section name="03 Hút sương dầu nhà xưởng" id="{340ccb19-beee-fb55-0791-498b7b224688}">
+        <p14:section name="03 Hút sương dầu nhà xưởng" id="{3122b7cf-306a-cead-d22c-e0f8095051a8}">
           <p14:sldIdLst>
             <p14:sldId id="267"/>
             <p14:sldId id="268"/>
             <p14:sldId id="269"/>
           </p14:sldIdLst>
         </p14:section>
-        <p14:section name="04 Bơm &amp; xử lý nước" id="{d120f84e-0813-8819-65f9-92e5cab694e4}">
+        <p14:section name="04 Bơm &amp; xử lý nước" id="{6850763c-4c99-be3a-7280-0d5b27fd17b1}">
           <p14:sldIdLst>
             <p14:sldId id="270"/>
           </p14:sldIdLst>
         </p14:section>
-        <p14:section name="05 Quản trị dự án" id="{ebb497a1-8436-e4c7-70ec-f7622bc3cabf}">
+        <p14:section name="05 Quản trị dự án" id="{cfaef61c-6ae1-297d-ad9a-8c96d9b32f93}">
           <p14:sldIdLst>
             <p14:sldId id="271"/>
             <p14:sldId id="272"/>
             <p14:sldId id="273"/>
           </p14:sldIdLst>
         </p14:section>
-        <p14:section name="06 Nguồn lực" id="{03d3f5c6-4d43-3430-21ea-fab15475e993}">
+        <p14:section name="06 Nguồn lực" id="{cdcd1b45-8fec-ec8a-6062-69e75b221c3c}">
           <p14:sldIdLst>
             <p14:sldId id="274"/>
             <p14:sldId id="275"/>
           </p14:sldIdLst>
         </p14:section>
-        <p14:section name="07 Công trình tiêu biểu" id="{1db55b8b-f7cb-6779-aa02-f52273827b50}">
+        <p14:section name="07 Công trình tiêu biểu" id="{acb63a34-a542-5928-3f7a-2f1c72590bf3}">
           <p14:sldIdLst>
             <p14:sldId id="276"/>
             <p14:sldId id="277"/>
@@ -188,7 +188,7 @@
             <p14:sldId id="279"/>
           </p14:sldIdLst>
         </p14:section>
-        <p14:section name="08 Cam kết &amp; liên hệ" id="{818dea26-c9c2-2d94-64d5-bef0131be5f4}">
+        <p14:section name="08 Cam kết &amp; liên hệ" id="{6c4134ad-eaf4-2cf7-75df-38ee680d9319}">
           <p14:sldIdLst>
             <p14:sldId id="280"/>
             <p14:sldId id="281"/>
@@ -3574,7 +3574,7 @@
       </p:grpSpPr>
       <p:pic>
         <p:nvPicPr>
-          <p:cNvPr id="2" name="cover team img56_cov.jpg" descr="Đội ngũ công nhân BLT">    </p:cNvPr>
+          <p:cNvPr id="2" name="cover team team_hero.jpg" descr="Đội ngũ công nhân BLT">    </p:cNvPr>
           <p:cNvPicPr>
             <a:picLocks noChangeAspect="1"/>
           </p:cNvPicPr>
@@ -3589,7 +3589,7 @@
         <p:spPr>
           <a:xfrm>
             <a:off x="0" y="0"/>
-            <a:ext cx="3749040" cy="6583680"/>
+            <a:ext cx="7562088" cy="4206240"/>
           </a:xfrm>
           <a:prstGeom prst="rect">
             <a:avLst/>
@@ -3598,7 +3598,7 @@
       </p:pic>
       <p:pic>
         <p:nvPicPr>
-          <p:cNvPr id="3" name="cover team img45.jpg" descr="Đội ngũ công nhân BLT">    </p:cNvPr>
+          <p:cNvPr id="3" name="cover team img56.jpg" descr="Đội ngũ công nhân BLT">    </p:cNvPr>
           <p:cNvPicPr>
             <a:picLocks noChangeAspect="1"/>
           </p:cNvPicPr>
@@ -3612,8 +3612,8 @@
         </p:blipFill>
         <p:spPr>
           <a:xfrm>
-            <a:off x="3822192" y="0"/>
-            <a:ext cx="3739896" cy="3255264"/>
+            <a:off x="0" y="4279392"/>
+            <a:ext cx="2471928" cy="2304288"/>
           </a:xfrm>
           <a:prstGeom prst="rect">
             <a:avLst/>
@@ -3622,7 +3622,7 @@
       </p:pic>
       <p:pic>
         <p:nvPicPr>
-          <p:cNvPr id="4" name="cover team qt_team.jpg" descr="Đội ngũ công nhân BLT">    </p:cNvPr>
+          <p:cNvPr id="4" name="cover team img45.jpg" descr="Đội ngũ công nhân BLT">    </p:cNvPr>
           <p:cNvPicPr>
             <a:picLocks noChangeAspect="1"/>
           </p:cNvPicPr>
@@ -3636,17 +3636,41 @@
         </p:blipFill>
         <p:spPr>
           <a:xfrm>
-            <a:off x="3822192" y="3328416"/>
-            <a:ext cx="3739896" cy="3255264"/>
+            <a:off x="2545080" y="4279392"/>
+            <a:ext cx="2471928" cy="2304288"/>
           </a:xfrm>
           <a:prstGeom prst="rect">
             <a:avLst/>
           </a:prstGeom>
         </p:spPr>
       </p:pic>
-      <p:sp>
-        <p:nvSpPr>
-          <p:cNvPr id="5" name="Shape 0"/>
+      <p:pic>
+        <p:nvPicPr>
+          <p:cNvPr id="5" name="cover team qt_team.jpg" descr="Đội ngũ công nhân BLT">    </p:cNvPr>
+          <p:cNvPicPr>
+            <a:picLocks noChangeAspect="1"/>
+          </p:cNvPicPr>
+          <p:nvPr/>
+        </p:nvPicPr>
+        <p:blipFill>
+          <a:blip r:embed="rId4"/>
+          <a:stretch>
+            <a:fillRect/>
+          </a:stretch>
+        </p:blipFill>
+        <p:spPr>
+          <a:xfrm>
+            <a:off x="5090160" y="4279392"/>
+            <a:ext cx="2471928" cy="2304288"/>
+          </a:xfrm>
+          <a:prstGeom prst="rect">
+            <a:avLst/>
+          </a:prstGeom>
+        </p:spPr>
+      </p:pic>
+      <p:sp>
+        <p:nvSpPr>
+          <p:cNvPr id="6" name="Shape 0"/>
           <p:cNvSpPr/>
           <p:nvPr/>
         </p:nvSpPr>
@@ -3671,14 +3695,14 @@
       </p:sp>
       <p:pic>
         <p:nvPicPr>
-          <p:cNvPr id="6" name="logo" descr="preencoded.png">    </p:cNvPr>
+          <p:cNvPr id="7" name="logo" descr="preencoded.png">    </p:cNvPr>
           <p:cNvPicPr>
             <a:picLocks noChangeAspect="1"/>
           </p:cNvPicPr>
           <p:nvPr/>
         </p:nvPicPr>
         <p:blipFill>
-          <a:blip r:embed="rId4"/>
+          <a:blip r:embed="rId5"/>
           <a:stretch>
             <a:fillRect/>
           </a:stretch>
@@ -3695,7 +3719,7 @@
       </p:pic>
       <p:sp>
         <p:nvSpPr>
-          <p:cNvPr id="7" name="Shape 1"/>
+          <p:cNvPr id="8" name="Shape 1"/>
           <p:cNvSpPr/>
           <p:nvPr/>
         </p:nvSpPr>
@@ -3722,7 +3746,7 @@
       </p:sp>
       <p:sp>
         <p:nvSpPr>
-          <p:cNvPr id="8" name="Text 2"/>
+          <p:cNvPr id="9" name="Text 2"/>
           <p:cNvSpPr txBox="1"/>
           <p:nvPr/>
         </p:nvSpPr>
@@ -3761,7 +3785,7 @@
       </p:sp>
       <p:sp>
         <p:nvSpPr>
-          <p:cNvPr id="9" name="Text 3"/>
+          <p:cNvPr id="10" name="Text 3"/>
           <p:cNvSpPr txBox="1"/>
           <p:nvPr/>
         </p:nvSpPr>
@@ -3800,7 +3824,7 @@
       </p:sp>
       <p:sp>
         <p:nvSpPr>
-          <p:cNvPr id="10" name="Text 4"/>
+          <p:cNvPr id="11" name="Text 4"/>
           <p:cNvSpPr txBox="1"/>
           <p:nvPr/>
         </p:nvSpPr>
@@ -3839,7 +3863,7 @@
       </p:sp>
       <p:sp>
         <p:nvSpPr>
-          <p:cNvPr id="11" name="Text 5"/>
+          <p:cNvPr id="12" name="Text 5"/>
           <p:cNvSpPr txBox="1"/>
           <p:nvPr/>
         </p:nvSpPr>
@@ -3892,7 +3916,7 @@
       </p:sp>
       <p:sp>
         <p:nvSpPr>
-          <p:cNvPr id="12" name="Text 6"/>
+          <p:cNvPr id="13" name="Text 6"/>
           <p:cNvSpPr txBox="1"/>
           <p:nvPr/>
         </p:nvSpPr>
@@ -3942,7 +3966,7 @@
       </p:sp>
       <p:sp>
         <p:nvSpPr>
-          <p:cNvPr id="13" name="Text 7"/>
+          <p:cNvPr id="14" name="Text 7"/>
           <p:cNvSpPr txBox="1"/>
           <p:nvPr/>
         </p:nvSpPr>
@@ -3978,7 +4002,7 @@
       </p:sp>
       <p:sp>
         <p:nvSpPr>
-          <p:cNvPr id="14" name="Text 8"/>
+          <p:cNvPr id="15" name="Text 8"/>
           <p:cNvSpPr txBox="1"/>
           <p:nvPr/>
         </p:nvSpPr>
@@ -4014,7 +4038,7 @@
       </p:sp>
       <p:sp>
         <p:nvSpPr>
-          <p:cNvPr id="15" name="Text 9"/>
+          <p:cNvPr id="16" name="Text 9"/>
           <p:cNvSpPr txBox="1"/>
           <p:nvPr/>
         </p:nvSpPr>

--- a/ho-so-nang-luc-BLT/HO_SO_NANG_LUC_BLT.pptx
+++ b/ho-so-nang-luc-BLT/HO_SO_NANG_LUC_BLT.pptx
@@ -132,14 +132,14 @@
   <p:extLst>
     <p:ext uri="{521415D9-36F7-43E2-AB2F-B90AF26B5E84}">
       <p14:sectionLst xmlns:p14="http://schemas.microsoft.com/office/powerpoint/2010/main">
-        <p14:section name="Mở đầu" id="{a672791f-3e63-18b1-d181-8550a6f4335d}">
+        <p14:section name="Mở đầu" id="{dd61e08b-a3e4-8bd7-d9d4-c40118a07ed7}">
           <p14:sldIdLst>
             <p14:sldId id="256"/>
             <p14:sldId id="257"/>
             <p14:sldId id="258"/>
           </p14:sldIdLst>
         </p14:section>
-        <p14:section name="01 Tổng quan" id="{057f3cac-48f6-e923-2ee9-0faa12c5827f}">
+        <p14:section name="01 Tổng quan" id="{3580978b-b44c-f23a-006c-383668f90f20}">
           <p14:sldIdLst>
             <p14:sldId id="259"/>
             <p14:sldId id="260"/>
@@ -148,39 +148,39 @@
             <p14:sldId id="263"/>
           </p14:sldIdLst>
         </p14:section>
-        <p14:section name="02 Điện nước công trình" id="{efe1aa15-d6cf-95f8-3f57-e5ea369a30ad}">
+        <p14:section name="02 Điện nước công trình" id="{5c3ab4fa-2adf-5e56-049a-85a881410975}">
           <p14:sldIdLst>
             <p14:sldId id="264"/>
             <p14:sldId id="265"/>
             <p14:sldId id="266"/>
           </p14:sldIdLst>
         </p14:section>
-        <p14:section name="03 Hút sương dầu nhà xưởng" id="{3122b7cf-306a-cead-d22c-e0f8095051a8}">
+        <p14:section name="03 Hút sương dầu nhà xưởng" id="{d2990a52-2d7f-afc8-a788-585445309780}">
           <p14:sldIdLst>
             <p14:sldId id="267"/>
             <p14:sldId id="268"/>
             <p14:sldId id="269"/>
           </p14:sldIdLst>
         </p14:section>
-        <p14:section name="04 Bơm &amp; xử lý nước" id="{6850763c-4c99-be3a-7280-0d5b27fd17b1}">
+        <p14:section name="04 Bơm &amp; xử lý nước" id="{7f1ccf3e-84fb-be87-afe5-2b16bb180ea0}">
           <p14:sldIdLst>
             <p14:sldId id="270"/>
           </p14:sldIdLst>
         </p14:section>
-        <p14:section name="05 Quản trị dự án" id="{cfaef61c-6ae1-297d-ad9a-8c96d9b32f93}">
+        <p14:section name="05 Quản trị dự án" id="{aab50e06-2728-82ee-9d55-c927d04a0fb1}">
           <p14:sldIdLst>
             <p14:sldId id="271"/>
             <p14:sldId id="272"/>
             <p14:sldId id="273"/>
           </p14:sldIdLst>
         </p14:section>
-        <p14:section name="06 Nguồn lực" id="{cdcd1b45-8fec-ec8a-6062-69e75b221c3c}">
+        <p14:section name="06 Nguồn lực" id="{d5d16c8b-15b5-eb97-e7ee-ecc02bc2307b}">
           <p14:sldIdLst>
             <p14:sldId id="274"/>
             <p14:sldId id="275"/>
           </p14:sldIdLst>
         </p14:section>
-        <p14:section name="07 Công trình tiêu biểu" id="{acb63a34-a542-5928-3f7a-2f1c72590bf3}">
+        <p14:section name="07 Công trình tiêu biểu" id="{c824c9e3-c4bf-a94e-510d-37be04360a7e}">
           <p14:sldIdLst>
             <p14:sldId id="276"/>
             <p14:sldId id="277"/>
@@ -188,7 +188,7 @@
             <p14:sldId id="279"/>
           </p14:sldIdLst>
         </p14:section>
-        <p14:section name="08 Cam kết &amp; liên hệ" id="{6c4134ad-eaf4-2cf7-75df-38ee680d9319}">
+        <p14:section name="08 Cam kết &amp; liên hệ" id="{30284376-5e20-f791-ba1a-6bf5eeebe866}">
           <p14:sldIdLst>
             <p14:sldId id="280"/>
             <p14:sldId id="281"/>
@@ -3589,7 +3589,7 @@
         <p:spPr>
           <a:xfrm>
             <a:off x="0" y="0"/>
-            <a:ext cx="7562088" cy="4206240"/>
+            <a:ext cx="7562088" cy="5041392"/>
           </a:xfrm>
           <a:prstGeom prst="rect">
             <a:avLst/>
@@ -3612,8 +3612,8 @@
         </p:blipFill>
         <p:spPr>
           <a:xfrm>
-            <a:off x="0" y="4279392"/>
-            <a:ext cx="2471928" cy="2304288"/>
+            <a:off x="0" y="5114544"/>
+            <a:ext cx="2471928" cy="1469136"/>
           </a:xfrm>
           <a:prstGeom prst="rect">
             <a:avLst/>
@@ -3636,8 +3636,8 @@
         </p:blipFill>
         <p:spPr>
           <a:xfrm>
-            <a:off x="2545080" y="4279392"/>
-            <a:ext cx="2471928" cy="2304288"/>
+            <a:off x="2545080" y="5114544"/>
+            <a:ext cx="2471928" cy="1469136"/>
           </a:xfrm>
           <a:prstGeom prst="rect">
             <a:avLst/>
@@ -3660,8 +3660,8 @@
         </p:blipFill>
         <p:spPr>
           <a:xfrm>
-            <a:off x="5090160" y="4279392"/>
-            <a:ext cx="2471928" cy="2304288"/>
+            <a:off x="5090160" y="5114544"/>
+            <a:ext cx="2471928" cy="1469136"/>
           </a:xfrm>
           <a:prstGeom prst="rect">
             <a:avLst/>

--- a/ho-so-nang-luc-BLT/HO_SO_NANG_LUC_BLT.pptx
+++ b/ho-so-nang-luc-BLT/HO_SO_NANG_LUC_BLT.pptx
@@ -132,14 +132,14 @@
   <p:extLst>
     <p:ext uri="{521415D9-36F7-43E2-AB2F-B90AF26B5E84}">
       <p14:sectionLst xmlns:p14="http://schemas.microsoft.com/office/powerpoint/2010/main">
-        <p14:section name="Mở đầu" id="{dd61e08b-a3e4-8bd7-d9d4-c40118a07ed7}">
+        <p14:section name="Mở đầu" id="{2a6fcc34-09e9-fbd9-adf6-e0873fc02cf3}">
           <p14:sldIdLst>
             <p14:sldId id="256"/>
             <p14:sldId id="257"/>
             <p14:sldId id="258"/>
           </p14:sldIdLst>
         </p14:section>
-        <p14:section name="01 Tổng quan" id="{3580978b-b44c-f23a-006c-383668f90f20}">
+        <p14:section name="01 Tổng quan" id="{a94057ce-cf9f-82d5-41e1-ae983700efe7}">
           <p14:sldIdLst>
             <p14:sldId id="259"/>
             <p14:sldId id="260"/>
@@ -148,39 +148,39 @@
             <p14:sldId id="263"/>
           </p14:sldIdLst>
         </p14:section>
-        <p14:section name="02 Điện nước công trình" id="{5c3ab4fa-2adf-5e56-049a-85a881410975}">
+        <p14:section name="02 Điện nước công trình" id="{ebb49ce2-94bb-c674-e56d-969abe8e94d3}">
           <p14:sldIdLst>
             <p14:sldId id="264"/>
             <p14:sldId id="265"/>
             <p14:sldId id="266"/>
           </p14:sldIdLst>
         </p14:section>
-        <p14:section name="03 Hút sương dầu nhà xưởng" id="{d2990a52-2d7f-afc8-a788-585445309780}">
+        <p14:section name="03 Hút sương dầu nhà xưởng" id="{5cbf009b-7776-e4dc-05ed-687829378866}">
           <p14:sldIdLst>
             <p14:sldId id="267"/>
             <p14:sldId id="268"/>
             <p14:sldId id="269"/>
           </p14:sldIdLst>
         </p14:section>
-        <p14:section name="04 Bơm &amp; xử lý nước" id="{7f1ccf3e-84fb-be87-afe5-2b16bb180ea0}">
+        <p14:section name="04 Bơm &amp; xử lý nước" id="{7d7c5a59-6da3-b0c4-f327-5835da0aac2d}">
           <p14:sldIdLst>
             <p14:sldId id="270"/>
           </p14:sldIdLst>
         </p14:section>
-        <p14:section name="05 Quản trị dự án" id="{aab50e06-2728-82ee-9d55-c927d04a0fb1}">
+        <p14:section name="05 Quản trị dự án" id="{1837488a-8219-0349-745b-65401d3e21f9}">
           <p14:sldIdLst>
             <p14:sldId id="271"/>
             <p14:sldId id="272"/>
             <p14:sldId id="273"/>
           </p14:sldIdLst>
         </p14:section>
-        <p14:section name="06 Nguồn lực" id="{d5d16c8b-15b5-eb97-e7ee-ecc02bc2307b}">
+        <p14:section name="06 Nguồn lực" id="{4adc0c37-94d1-b061-a281-076cd09e726a}">
           <p14:sldIdLst>
             <p14:sldId id="274"/>
             <p14:sldId id="275"/>
           </p14:sldIdLst>
         </p14:section>
-        <p14:section name="07 Công trình tiêu biểu" id="{c824c9e3-c4bf-a94e-510d-37be04360a7e}">
+        <p14:section name="07 Công trình tiêu biểu" id="{7c0c92b7-ab67-24cd-1097-00a7eae29f6d}">
           <p14:sldIdLst>
             <p14:sldId id="276"/>
             <p14:sldId id="277"/>
@@ -188,7 +188,7 @@
             <p14:sldId id="279"/>
           </p14:sldIdLst>
         </p14:section>
-        <p14:section name="08 Cam kết &amp; liên hệ" id="{30284376-5e20-f791-ba1a-6bf5eeebe866}">
+        <p14:section name="08 Cam kết &amp; liên hệ" id="{5c1a7078-f4cc-f5ec-31de-3dbfcc6c63c2}">
           <p14:sldIdLst>
             <p14:sldId id="280"/>
             <p14:sldId id="281"/>
@@ -3668,9 +3668,33 @@
           </a:prstGeom>
         </p:spPr>
       </p:pic>
-      <p:sp>
-        <p:nvSpPr>
-          <p:cNvPr id="6" name="Shape 0"/>
+      <p:pic>
+        <p:nvPicPr>
+          <p:cNvPr id="6" name="cover logo large" descr="preencoded.png">    </p:cNvPr>
+          <p:cNvPicPr>
+            <a:picLocks noChangeAspect="1"/>
+          </p:cNvPicPr>
+          <p:nvPr/>
+        </p:nvPicPr>
+        <p:blipFill>
+          <a:blip r:embed="rId5"/>
+          <a:stretch>
+            <a:fillRect/>
+          </a:stretch>
+        </p:blipFill>
+        <p:spPr>
+          <a:xfrm>
+            <a:off x="109728" y="109728"/>
+            <a:ext cx="1645920" cy="1645920"/>
+          </a:xfrm>
+          <a:prstGeom prst="rect">
+            <a:avLst/>
+          </a:prstGeom>
+        </p:spPr>
+      </p:pic>
+      <p:sp>
+        <p:nvSpPr>
+          <p:cNvPr id="7" name="Shape 0"/>
           <p:cNvSpPr/>
           <p:nvPr/>
         </p:nvSpPr>
@@ -3695,14 +3719,14 @@
       </p:sp>
       <p:pic>
         <p:nvPicPr>
-          <p:cNvPr id="7" name="logo" descr="preencoded.png">    </p:cNvPr>
+          <p:cNvPr id="8" name="logo" descr="preencoded.png">    </p:cNvPr>
           <p:cNvPicPr>
             <a:picLocks noChangeAspect="1"/>
           </p:cNvPicPr>
           <p:nvPr/>
         </p:nvPicPr>
         <p:blipFill>
-          <a:blip r:embed="rId5"/>
+          <a:blip r:embed="rId6"/>
           <a:stretch>
             <a:fillRect/>
           </a:stretch>
@@ -3719,7 +3743,7 @@
       </p:pic>
       <p:sp>
         <p:nvSpPr>
-          <p:cNvPr id="8" name="Shape 1"/>
+          <p:cNvPr id="9" name="Shape 1"/>
           <p:cNvSpPr/>
           <p:nvPr/>
         </p:nvSpPr>
@@ -3746,7 +3770,7 @@
       </p:sp>
       <p:sp>
         <p:nvSpPr>
-          <p:cNvPr id="9" name="Text 2"/>
+          <p:cNvPr id="10" name="Text 2"/>
           <p:cNvSpPr txBox="1"/>
           <p:nvPr/>
         </p:nvSpPr>
@@ -3785,7 +3809,7 @@
       </p:sp>
       <p:sp>
         <p:nvSpPr>
-          <p:cNvPr id="10" name="Text 3"/>
+          <p:cNvPr id="11" name="Text 3"/>
           <p:cNvSpPr txBox="1"/>
           <p:nvPr/>
         </p:nvSpPr>
@@ -3824,7 +3848,7 @@
       </p:sp>
       <p:sp>
         <p:nvSpPr>
-          <p:cNvPr id="11" name="Text 4"/>
+          <p:cNvPr id="12" name="Text 4"/>
           <p:cNvSpPr txBox="1"/>
           <p:nvPr/>
         </p:nvSpPr>
@@ -3863,7 +3887,7 @@
       </p:sp>
       <p:sp>
         <p:nvSpPr>
-          <p:cNvPr id="12" name="Text 5"/>
+          <p:cNvPr id="13" name="Text 5"/>
           <p:cNvSpPr txBox="1"/>
           <p:nvPr/>
         </p:nvSpPr>
@@ -3916,7 +3940,7 @@
       </p:sp>
       <p:sp>
         <p:nvSpPr>
-          <p:cNvPr id="13" name="Text 6"/>
+          <p:cNvPr id="14" name="Text 6"/>
           <p:cNvSpPr txBox="1"/>
           <p:nvPr/>
         </p:nvSpPr>
@@ -3966,7 +3990,7 @@
       </p:sp>
       <p:sp>
         <p:nvSpPr>
-          <p:cNvPr id="14" name="Text 7"/>
+          <p:cNvPr id="15" name="Text 7"/>
           <p:cNvSpPr txBox="1"/>
           <p:nvPr/>
         </p:nvSpPr>
@@ -4002,7 +4026,7 @@
       </p:sp>
       <p:sp>
         <p:nvSpPr>
-          <p:cNvPr id="15" name="Text 8"/>
+          <p:cNvPr id="16" name="Text 8"/>
           <p:cNvSpPr txBox="1"/>
           <p:nvPr/>
         </p:nvSpPr>
@@ -4038,7 +4062,7 @@
       </p:sp>
       <p:sp>
         <p:nvSpPr>
-          <p:cNvPr id="16" name="Text 9"/>
+          <p:cNvPr id="17" name="Text 9"/>
           <p:cNvSpPr txBox="1"/>
           <p:nvPr/>
         </p:nvSpPr>

--- a/ho-so-nang-luc-BLT/HO_SO_NANG_LUC_BLT.pptx
+++ b/ho-so-nang-luc-BLT/HO_SO_NANG_LUC_BLT.pptx
@@ -132,14 +132,14 @@
   <p:extLst>
     <p:ext uri="{521415D9-36F7-43E2-AB2F-B90AF26B5E84}">
       <p14:sectionLst xmlns:p14="http://schemas.microsoft.com/office/powerpoint/2010/main">
-        <p14:section name="Mở đầu" id="{2a6fcc34-09e9-fbd9-adf6-e0873fc02cf3}">
+        <p14:section name="Mở đầu" id="{7979455f-6809-8233-7528-72119a81b597}">
           <p14:sldIdLst>
             <p14:sldId id="256"/>
             <p14:sldId id="257"/>
             <p14:sldId id="258"/>
           </p14:sldIdLst>
         </p14:section>
-        <p14:section name="01 Tổng quan" id="{a94057ce-cf9f-82d5-41e1-ae983700efe7}">
+        <p14:section name="01 Tổng quan" id="{1c74605e-3c48-0aae-e168-016fb6c7c7e1}">
           <p14:sldIdLst>
             <p14:sldId id="259"/>
             <p14:sldId id="260"/>
@@ -148,39 +148,39 @@
             <p14:sldId id="263"/>
           </p14:sldIdLst>
         </p14:section>
-        <p14:section name="02 Điện nước công trình" id="{ebb49ce2-94bb-c674-e56d-969abe8e94d3}">
+        <p14:section name="02 Điện nước công trình" id="{06664472-a156-6941-4e52-98c0d2926ad7}">
           <p14:sldIdLst>
             <p14:sldId id="264"/>
             <p14:sldId id="265"/>
             <p14:sldId id="266"/>
           </p14:sldIdLst>
         </p14:section>
-        <p14:section name="03 Hút sương dầu nhà xưởng" id="{5cbf009b-7776-e4dc-05ed-687829378866}">
+        <p14:section name="03 Hút sương dầu nhà xưởng" id="{64cfdc03-719d-2b4c-34ef-42a54609c386}">
           <p14:sldIdLst>
             <p14:sldId id="267"/>
             <p14:sldId id="268"/>
             <p14:sldId id="269"/>
           </p14:sldIdLst>
         </p14:section>
-        <p14:section name="04 Bơm &amp; xử lý nước" id="{7d7c5a59-6da3-b0c4-f327-5835da0aac2d}">
+        <p14:section name="04 Bơm &amp; xử lý nước" id="{82f2908f-c7cf-c482-7e3f-b292dfbeaf01}">
           <p14:sldIdLst>
             <p14:sldId id="270"/>
           </p14:sldIdLst>
         </p14:section>
-        <p14:section name="05 Quản trị dự án" id="{1837488a-8219-0349-745b-65401d3e21f9}">
+        <p14:section name="05 Quản trị dự án" id="{9062d297-7bb1-b07d-109c-9b15ebeb20c8}">
           <p14:sldIdLst>
             <p14:sldId id="271"/>
             <p14:sldId id="272"/>
             <p14:sldId id="273"/>
           </p14:sldIdLst>
         </p14:section>
-        <p14:section name="06 Nguồn lực" id="{4adc0c37-94d1-b061-a281-076cd09e726a}">
+        <p14:section name="06 Nguồn lực" id="{9dddf2a3-1206-3baa-1ec9-8626d2b59583}">
           <p14:sldIdLst>
             <p14:sldId id="274"/>
             <p14:sldId id="275"/>
           </p14:sldIdLst>
         </p14:section>
-        <p14:section name="07 Công trình tiêu biểu" id="{7c0c92b7-ab67-24cd-1097-00a7eae29f6d}">
+        <p14:section name="07 Công trình tiêu biểu" id="{08eb6024-a16f-f5ed-23c7-9160f1eecf35}">
           <p14:sldIdLst>
             <p14:sldId id="276"/>
             <p14:sldId id="277"/>
@@ -188,7 +188,7 @@
             <p14:sldId id="279"/>
           </p14:sldIdLst>
         </p14:section>
-        <p14:section name="08 Cam kết &amp; liên hệ" id="{5c1a7078-f4cc-f5ec-31de-3dbfcc6c63c2}">
+        <p14:section name="08 Cam kết &amp; liên hệ" id="{73bb37d9-7a04-cb49-fbc7-bd3e7f975c44}">
           <p14:sldIdLst>
             <p14:sldId id="280"/>
             <p14:sldId id="281"/>
@@ -3801,7 +3801,7 @@
                 <a:ea typeface="Arial" pitchFamily="34" charset="-122"/>
                 <a:cs typeface="Arial" pitchFamily="34" charset="-120"/>
               </a:rPr>
-              <a:t>ĐỘI NGŨ 50 NHÂN SỰ</a:t>
+              <a:t>ĐỘI NGŨ 100 NHÂN SỰ</a:t>
             </a:r>
             <a:endParaRPr lang="en-US" sz="1400" dirty="0"/>
           </a:p>
@@ -14358,7 +14358,7 @@
                 <a:ea typeface="Arial" pitchFamily="34" charset="-122"/>
                 <a:cs typeface="Arial" pitchFamily="34" charset="-120"/>
               </a:rPr>
-              <a:t>50</a:t>
+              <a:t>100</a:t>
             </a:r>
             <a:endParaRPr lang="en-US" sz="4800" dirty="0"/>
           </a:p>
@@ -15890,7 +15890,7 @@
                   <a:schemeClr val="tx1"/>
                 </a:solidFill>
               </a:rPr>
-              <a:t>Đội ngũ 50 người gồm cán bộ kỹ thuật, chỉ huy công trường và công nhân lành nghề, huy động linh hoạt theo tiến độ</a:t>
+              <a:t>Đội ngũ 100 người gồm cán bộ kỹ thuật, chỉ huy công trường và công nhân lành nghề, huy động linh hoạt theo tiến độ</a:t>
             </a:r>
             <a:endParaRPr lang="en-US" sz="950" dirty="0"/>
           </a:p>
@@ -29119,7 +29119,7 @@
                   <a:schemeClr val="tx1"/>
                 </a:solidFill>
               </a:rPr>
-              <a:t>BLT là đơn vị thi công chuyên sâu về hệ thống kỹ thuật công trình: điện, cấp thoát nước, đường ống công nghệ, hệ thống hút sương dầu – lọc khí cho nhà xưởng và hệ thống bơm – xử lý nước. Đội ngũ 50 người của chúng tôi đang trực tiếp thi công tại nhiều công trình ở Nghệ An, Ninh Bình và Thành phố Huế, từ công trình nhiều tầng đến nhà xưởng sản xuất đang vận hành.</a:t>
+              <a:t>BLT là đơn vị thi công chuyên sâu về hệ thống kỹ thuật công trình: điện, cấp thoát nước, đường ống công nghệ, hệ thống hút sương dầu – lọc khí cho nhà xưởng và hệ thống bơm – xử lý nước. Đội ngũ 100 người của chúng tôi đang trực tiếp thi công tại nhiều công trình ở Nghệ An, Ninh Bình và Thành phố Huế, từ công trình nhiều tầng đến nhà xưởng sản xuất đang vận hành.</a:t>
             </a:r>
             <a:endParaRPr lang="en-US" sz="1150" dirty="0"/>
           </a:p>
@@ -29880,7 +29880,7 @@
                 <a:ea typeface="Arial" pitchFamily="34" charset="-122"/>
                 <a:cs typeface="Arial" pitchFamily="34" charset="-120"/>
               </a:rPr>
-              <a:t>50</a:t>
+              <a:t>100</a:t>
             </a:r>
             <a:endParaRPr lang="en-US" sz="3000" dirty="0"/>
           </a:p>

--- a/ho-so-nang-luc-BLT/HO_SO_NANG_LUC_BLT.pptx
+++ b/ho-so-nang-luc-BLT/HO_SO_NANG_LUC_BLT.pptx
@@ -132,14 +132,14 @@
   <p:extLst>
     <p:ext uri="{521415D9-36F7-43E2-AB2F-B90AF26B5E84}">
       <p14:sectionLst xmlns:p14="http://schemas.microsoft.com/office/powerpoint/2010/main">
-        <p14:section name="Mở đầu" id="{7979455f-6809-8233-7528-72119a81b597}">
+        <p14:section name="Mở đầu" id="{cd02a01f-bf07-a852-2f30-0b54d8c88614}">
           <p14:sldIdLst>
             <p14:sldId id="256"/>
             <p14:sldId id="257"/>
             <p14:sldId id="258"/>
           </p14:sldIdLst>
         </p14:section>
-        <p14:section name="01 Tổng quan" id="{1c74605e-3c48-0aae-e168-016fb6c7c7e1}">
+        <p14:section name="01 Tổng quan" id="{a1f89e92-6b47-e5bb-da0b-ec4a60e2a01a}">
           <p14:sldIdLst>
             <p14:sldId id="259"/>
             <p14:sldId id="260"/>
@@ -148,39 +148,39 @@
             <p14:sldId id="263"/>
           </p14:sldIdLst>
         </p14:section>
-        <p14:section name="02 Điện nước công trình" id="{06664472-a156-6941-4e52-98c0d2926ad7}">
+        <p14:section name="02 Điện nước công trình" id="{b42a08a1-5499-d2fd-63ad-f536bb1d8645}">
           <p14:sldIdLst>
             <p14:sldId id="264"/>
             <p14:sldId id="265"/>
             <p14:sldId id="266"/>
           </p14:sldIdLst>
         </p14:section>
-        <p14:section name="03 Hút sương dầu nhà xưởng" id="{64cfdc03-719d-2b4c-34ef-42a54609c386}">
+        <p14:section name="03 Hút sương dầu nhà xưởng" id="{1c52ce9e-6f16-1773-b795-ddd67dcc051b}">
           <p14:sldIdLst>
             <p14:sldId id="267"/>
             <p14:sldId id="268"/>
             <p14:sldId id="269"/>
           </p14:sldIdLst>
         </p14:section>
-        <p14:section name="04 Bơm &amp; xử lý nước" id="{82f2908f-c7cf-c482-7e3f-b292dfbeaf01}">
+        <p14:section name="04 Bơm &amp; xử lý nước" id="{620b43d2-c93a-6db5-6c7e-2ad85e2108fd}">
           <p14:sldIdLst>
             <p14:sldId id="270"/>
           </p14:sldIdLst>
         </p14:section>
-        <p14:section name="05 Quản trị dự án" id="{9062d297-7bb1-b07d-109c-9b15ebeb20c8}">
+        <p14:section name="05 Quản trị dự án" id="{6e02fdd8-c2e1-2504-8028-12de403e24de}">
           <p14:sldIdLst>
             <p14:sldId id="271"/>
             <p14:sldId id="272"/>
             <p14:sldId id="273"/>
           </p14:sldIdLst>
         </p14:section>
-        <p14:section name="06 Nguồn lực" id="{9dddf2a3-1206-3baa-1ec9-8626d2b59583}">
+        <p14:section name="06 Nguồn lực" id="{dab69636-f6d3-0be9-ad96-3d6f4b17e0bd}">
           <p14:sldIdLst>
             <p14:sldId id="274"/>
             <p14:sldId id="275"/>
           </p14:sldIdLst>
         </p14:section>
-        <p14:section name="07 Công trình tiêu biểu" id="{08eb6024-a16f-f5ed-23c7-9160f1eecf35}">
+        <p14:section name="07 Công trình tiêu biểu" id="{4ea2d90b-2650-e631-dafd-1877b6656964}">
           <p14:sldIdLst>
             <p14:sldId id="276"/>
             <p14:sldId id="277"/>
@@ -188,7 +188,7 @@
             <p14:sldId id="279"/>
           </p14:sldIdLst>
         </p14:section>
-        <p14:section name="08 Cam kết &amp; liên hệ" id="{73bb37d9-7a04-cb49-fbc7-bd3e7f975c44}">
+        <p14:section name="08 Cam kết &amp; liên hệ" id="{8e016acf-ed49-7c10-040d-7675272d6ef0}">
           <p14:sldIdLst>
             <p14:sldId id="280"/>
             <p14:sldId id="281"/>
@@ -28981,9 +28981,295 @@
           </a:p>
         </p:txBody>
       </p:sp>
+      <p:sp>
+        <p:nvSpPr>
+          <p:cNvPr id="4" name="Shape 2"/>
+          <p:cNvSpPr/>
+          <p:nvPr/>
+        </p:nvSpPr>
+        <p:spPr>
+          <a:xfrm>
+            <a:off x="502920" y="1463040"/>
+            <a:ext cx="6556248" cy="1600200"/>
+          </a:xfrm>
+          <a:prstGeom prst="roundRect">
+            <a:avLst>
+              <a:gd name="adj" fmla="val 4571"/>
+            </a:avLst>
+          </a:prstGeom>
+          <a:solidFill>
+            <a:schemeClr val="tx2"/>
+          </a:solidFill>
+          <a:ln w="12700">
+            <a:solidFill>
+              <a:schemeClr val="tx2"/>
+            </a:solidFill>
+            <a:prstDash val="solid"/>
+          </a:ln>
+        </p:spPr>
+      </p:sp>
+      <p:sp>
+        <p:nvSpPr>
+          <p:cNvPr id="5" name="Text 3"/>
+          <p:cNvSpPr txBox="1"/>
+          <p:nvPr/>
+        </p:nvSpPr>
+        <p:spPr>
+          <a:xfrm>
+            <a:off x="731520" y="1417320"/>
+            <a:ext cx="731520" cy="914400"/>
+          </a:xfrm>
+          <a:prstGeom prst="rect">
+            <a:avLst/>
+          </a:prstGeom>
+          <a:noFill/>
+          <a:ln/>
+        </p:spPr>
+        <p:txBody>
+          <a:bodyPr wrap="square" lIns="0" tIns="0" rIns="0" bIns="0" rtlCol="0" anchor="t"/>
+          <a:lstStyle/>
+          <a:p>
+            <a:pPr indent="0" marL="0">
+              <a:buNone/>
+            </a:pPr>
+            <a:r>
+              <a:rPr lang="en-US" sz="7200" b="1" dirty="0">
+                <a:solidFill>
+                  <a:schemeClr val="accent1"/>
+                </a:solidFill>
+                <a:latin typeface="Arial" pitchFamily="34" charset="0"/>
+                <a:ea typeface="Arial" pitchFamily="34" charset="-122"/>
+                <a:cs typeface="Arial" pitchFamily="34" charset="-120"/>
+              </a:rPr>
+              <a:t>“</a:t>
+            </a:r>
+            <a:endParaRPr lang="en-US" sz="7200" dirty="0"/>
+          </a:p>
+        </p:txBody>
+      </p:sp>
+      <p:sp>
+        <p:nvSpPr>
+          <p:cNvPr id="6" name="Text 4"/>
+          <p:cNvSpPr txBox="1"/>
+          <p:nvPr/>
+        </p:nvSpPr>
+        <p:spPr>
+          <a:xfrm>
+            <a:off x="1463040" y="1645920"/>
+            <a:ext cx="5321808" cy="914400"/>
+          </a:xfrm>
+          <a:prstGeom prst="rect">
+            <a:avLst/>
+          </a:prstGeom>
+          <a:noFill/>
+          <a:ln/>
+        </p:spPr>
+        <p:txBody>
+          <a:bodyPr wrap="square" lIns="0" tIns="0" rIns="0" bIns="0" rtlCol="0" anchor="ctr"/>
+          <a:lstStyle/>
+          <a:p>
+            <a:pPr indent="0" marL="0">
+              <a:lnSpc>
+                <a:spcPct val="110000"/>
+              </a:lnSpc>
+              <a:buNone/>
+            </a:pPr>
+            <a:r>
+              <a:rPr lang="en-US" sz="1500" b="1" dirty="0">
+                <a:solidFill>
+                  <a:schemeClr val="bg1"/>
+                </a:solidFill>
+                <a:latin typeface="Arial" pitchFamily="34" charset="0"/>
+                <a:ea typeface="Arial" pitchFamily="34" charset="-122"/>
+                <a:cs typeface="Arial" pitchFamily="34" charset="-120"/>
+              </a:rPr>
+              <a:t>Hạng mục điện nước nằm khuất sau trần và trong tường, nhưng quyết định sự an toàn và vận hành lâu dài của mỗi công trình.</a:t>
+            </a:r>
+            <a:endParaRPr lang="en-US" sz="1500" dirty="0"/>
+          </a:p>
+        </p:txBody>
+      </p:sp>
+      <p:sp>
+        <p:nvSpPr>
+          <p:cNvPr id="7" name="Text 5"/>
+          <p:cNvSpPr txBox="1"/>
+          <p:nvPr/>
+        </p:nvSpPr>
+        <p:spPr>
+          <a:xfrm>
+            <a:off x="1463040" y="2606040"/>
+            <a:ext cx="5321808" cy="274320"/>
+          </a:xfrm>
+          <a:prstGeom prst="rect">
+            <a:avLst/>
+          </a:prstGeom>
+          <a:noFill/>
+          <a:ln/>
+        </p:spPr>
+        <p:txBody>
+          <a:bodyPr wrap="square" lIns="0" tIns="0" rIns="0" bIns="0" rtlCol="0" anchor="ctr"/>
+          <a:lstStyle/>
+          <a:p>
+            <a:pPr indent="0" marL="0">
+              <a:buNone/>
+            </a:pPr>
+            <a:r>
+              <a:rPr lang="en-US" sz="950" b="1" spc="150" kern="0" dirty="0">
+                <a:solidFill>
+                  <a:schemeClr val="accent1"/>
+                </a:solidFill>
+              </a:rPr>
+              <a:t>— HỒ VĂN BÌNH, GIÁM ĐỐC</a:t>
+            </a:r>
+            <a:endParaRPr lang="en-US" sz="950" dirty="0"/>
+          </a:p>
+        </p:txBody>
+      </p:sp>
+      <p:sp>
+        <p:nvSpPr>
+          <p:cNvPr id="8" name="Text 6"/>
+          <p:cNvSpPr txBox="1"/>
+          <p:nvPr/>
+        </p:nvSpPr>
+        <p:spPr>
+          <a:xfrm>
+            <a:off x="502920" y="3383280"/>
+            <a:ext cx="6556248" cy="3931920"/>
+          </a:xfrm>
+          <a:prstGeom prst="rect">
+            <a:avLst/>
+          </a:prstGeom>
+          <a:noFill/>
+          <a:ln/>
+        </p:spPr>
+        <p:txBody>
+          <a:bodyPr wrap="square" lIns="0" tIns="0" rIns="0" bIns="0" rtlCol="0" anchor="t"/>
+          <a:lstStyle/>
+          <a:p>
+            <a:pPr indent="0" marL="0">
+              <a:lnSpc>
+                <a:spcPct val="120000"/>
+              </a:lnSpc>
+              <a:spcAft>
+                <a:spcPts val="900"/>
+              </a:spcAft>
+              <a:buNone/>
+            </a:pPr>
+            <a:r>
+              <a:rPr lang="en-US" sz="1150" b="1" dirty="0">
+                <a:solidFill>
+                  <a:schemeClr val="tx2"/>
+                </a:solidFill>
+              </a:rPr>
+              <a:t>Kính gửi Quý Khách hàng và Quý Đối tác,</a:t>
+            </a:r>
+            <a:endParaRPr lang="en-US" sz="1150" dirty="0"/>
+          </a:p>
+          <a:p>
+            <a:pPr indent="0" marL="0">
+              <a:lnSpc>
+                <a:spcPct val="120000"/>
+              </a:lnSpc>
+              <a:spcAft>
+                <a:spcPts val="900"/>
+              </a:spcAft>
+              <a:buNone/>
+            </a:pPr>
+            <a:r>
+              <a:rPr lang="en-US" sz="1150" dirty="0">
+                <a:solidFill>
+                  <a:schemeClr val="tx1"/>
+                </a:solidFill>
+              </a:rPr>
+              <a:t>Thay mặt CÔNG TY TNHH KỸ THUẬT CÔNG TRÌNH BLT, tôi trân trọng cảm ơn Quý vị đã quan tâm tìm hiểu năng lực của chúng tôi.</a:t>
+            </a:r>
+            <a:endParaRPr lang="en-US" sz="1150" dirty="0"/>
+          </a:p>
+          <a:p>
+            <a:pPr indent="0" marL="0">
+              <a:lnSpc>
+                <a:spcPct val="120000"/>
+              </a:lnSpc>
+              <a:spcAft>
+                <a:spcPts val="900"/>
+              </a:spcAft>
+              <a:buNone/>
+            </a:pPr>
+            <a:r>
+              <a:rPr lang="en-US" sz="1150" dirty="0">
+                <a:solidFill>
+                  <a:schemeClr val="tx1"/>
+                </a:solidFill>
+              </a:rPr>
+              <a:t>BLT là đơn vị thi công chuyên sâu về hệ thống kỹ thuật công trình: điện, cấp thoát nước, đường ống công nghệ, hút sương dầu – lọc khí nhà xưởng và bơm – xử lý nước. Đội ngũ 100 người của chúng tôi đang trực tiếp thi công tại Nghệ An, Ninh Bình và Thành phố Huế, từ công trình nhiều tầng đến nhà xưởng sản xuất đang vận hành.</a:t>
+            </a:r>
+            <a:endParaRPr lang="en-US" sz="1150" dirty="0"/>
+          </a:p>
+          <a:p>
+            <a:pPr indent="0" marL="0">
+              <a:lnSpc>
+                <a:spcPct val="120000"/>
+              </a:lnSpc>
+              <a:spcAft>
+                <a:spcPts val="900"/>
+              </a:spcAft>
+              <a:buNone/>
+            </a:pPr>
+            <a:r>
+              <a:rPr lang="en-US" sz="1150" dirty="0">
+                <a:solidFill>
+                  <a:schemeClr val="tx1"/>
+                </a:solidFill>
+              </a:rPr>
+              <a:t>Mỗi công việc tại BLT đều đi theo quy trình: khảo sát, lập phương án, chuẩn bị vật tư, thi công, kiểm tra – thử nghiệm, nghiệm thu và bảo hành. Hình ảnh hiện trường được ghi nhận kèm thời gian và vị trí để minh bạch với khách hàng.</a:t>
+            </a:r>
+            <a:endParaRPr lang="en-US" sz="1150" dirty="0"/>
+          </a:p>
+          <a:p>
+            <a:pPr indent="0" marL="0">
+              <a:lnSpc>
+                <a:spcPct val="120000"/>
+              </a:lnSpc>
+              <a:spcAft>
+                <a:spcPts val="900"/>
+              </a:spcAft>
+              <a:buNone/>
+            </a:pPr>
+            <a:r>
+              <a:rPr lang="en-US" sz="1150" dirty="0">
+                <a:solidFill>
+                  <a:schemeClr val="tx1"/>
+                </a:solidFill>
+              </a:rPr>
+              <a:t>Với phương châm “Giải pháp điện nước – Uy tín &amp; Chất lượng”, BLT mong được đồng hành cùng Quý vị trong các dự án sắp tới.</a:t>
+            </a:r>
+            <a:endParaRPr lang="en-US" sz="1150" dirty="0"/>
+          </a:p>
+          <a:p>
+            <a:pPr indent="0" marL="0">
+              <a:lnSpc>
+                <a:spcPct val="120000"/>
+              </a:lnSpc>
+              <a:spcAft>
+                <a:spcPts val="900"/>
+              </a:spcAft>
+              <a:buNone/>
+            </a:pPr>
+            <a:r>
+              <a:rPr lang="en-US" sz="1150" b="1" dirty="0">
+                <a:solidFill>
+                  <a:schemeClr val="tx2"/>
+                </a:solidFill>
+              </a:rPr>
+              <a:t>Trân trọng!</a:t>
+            </a:r>
+            <a:endParaRPr lang="en-US" sz="1150" dirty="0"/>
+          </a:p>
+        </p:txBody>
+      </p:sp>
       <p:pic>
         <p:nvPicPr>
-          <p:cNvPr id="4" name="photo img79.jpg" descr="Đội thi công BLT tại nhà xưởng gia công CNC – Hưng Nguyên, Nghệ An">    </p:cNvPr>
+          <p:cNvPr id="9" name="photo img79.jpg" descr="Đội thi công BLT tại nhà xưởng gia công CNC – Hưng Nguyên, Nghệ An">    </p:cNvPr>
           <p:cNvPicPr>
             <a:picLocks noChangeAspect="1"/>
           </p:cNvPicPr>
@@ -28997,8 +29283,8 @@
         </p:blipFill>
         <p:spPr>
           <a:xfrm>
-            <a:off x="502920" y="1417320"/>
-            <a:ext cx="6556248" cy="2743200"/>
+            <a:off x="502920" y="7040880"/>
+            <a:ext cx="3566160" cy="2606040"/>
           </a:xfrm>
           <a:prstGeom prst="rect">
             <a:avLst/>
@@ -29007,14 +29293,14 @@
       </p:pic>
       <p:sp>
         <p:nvSpPr>
-          <p:cNvPr id="5" name="Text 2"/>
-          <p:cNvSpPr txBox="1"/>
-          <p:nvPr/>
-        </p:nvSpPr>
-        <p:spPr>
-          <a:xfrm>
-            <a:off x="502920" y="4197096"/>
-            <a:ext cx="6556248" cy="201168"/>
+          <p:cNvPr id="10" name="Text 7"/>
+          <p:cNvSpPr txBox="1"/>
+          <p:nvPr/>
+        </p:nvSpPr>
+        <p:spPr>
+          <a:xfrm>
+            <a:off x="502920" y="9683496"/>
+            <a:ext cx="3566160" cy="201168"/>
           </a:xfrm>
           <a:prstGeom prst="rect">
             <a:avLst/>
@@ -29045,156 +29331,14 @@
       </p:sp>
       <p:sp>
         <p:nvSpPr>
-          <p:cNvPr id="6" name="Text 3"/>
-          <p:cNvSpPr txBox="1"/>
-          <p:nvPr/>
-        </p:nvSpPr>
-        <p:spPr>
-          <a:xfrm>
-            <a:off x="502920" y="4526280"/>
-            <a:ext cx="6556248" cy="4480560"/>
-          </a:xfrm>
-          <a:prstGeom prst="rect">
-            <a:avLst/>
-          </a:prstGeom>
-          <a:noFill/>
-          <a:ln/>
-        </p:spPr>
-        <p:txBody>
-          <a:bodyPr wrap="square" lIns="0" tIns="0" rIns="0" bIns="0" rtlCol="0" anchor="t"/>
-          <a:lstStyle/>
-          <a:p>
-            <a:pPr indent="0" marL="0">
-              <a:lnSpc>
-                <a:spcPct val="115000"/>
-              </a:lnSpc>
-              <a:spcAft>
-                <a:spcPts val="800"/>
-              </a:spcAft>
-              <a:buNone/>
-            </a:pPr>
-            <a:r>
-              <a:rPr lang="en-US" sz="1150" b="1" dirty="0">
-                <a:solidFill>
-                  <a:schemeClr val="tx1"/>
-                </a:solidFill>
-              </a:rPr>
-              <a:t>Kính gửi Quý Khách hàng và Quý Đối tác,</a:t>
-            </a:r>
-            <a:endParaRPr lang="en-US" sz="1150" dirty="0"/>
-          </a:p>
-          <a:p>
-            <a:pPr indent="0" marL="0">
-              <a:lnSpc>
-                <a:spcPct val="115000"/>
-              </a:lnSpc>
-              <a:spcAft>
-                <a:spcPts val="800"/>
-              </a:spcAft>
-              <a:buNone/>
-            </a:pPr>
-            <a:r>
-              <a:rPr lang="en-US" sz="1150" dirty="0">
-                <a:solidFill>
-                  <a:schemeClr val="tx1"/>
-                </a:solidFill>
-              </a:rPr>
-              <a:t>Thay mặt CÔNG TY TNHH KỸ THUẬT CÔNG TRÌNH BLT, tôi trân trọng cảm ơn Quý vị đã quan tâm tìm hiểu năng lực của chúng tôi.</a:t>
-            </a:r>
-            <a:endParaRPr lang="en-US" sz="1150" dirty="0"/>
-          </a:p>
-          <a:p>
-            <a:pPr indent="0" marL="0">
-              <a:lnSpc>
-                <a:spcPct val="115000"/>
-              </a:lnSpc>
-              <a:spcAft>
-                <a:spcPts val="800"/>
-              </a:spcAft>
-              <a:buNone/>
-            </a:pPr>
-            <a:r>
-              <a:rPr lang="en-US" sz="1150" dirty="0">
-                <a:solidFill>
-                  <a:schemeClr val="tx1"/>
-                </a:solidFill>
-              </a:rPr>
-              <a:t>BLT là đơn vị thi công chuyên sâu về hệ thống kỹ thuật công trình: điện, cấp thoát nước, đường ống công nghệ, hệ thống hút sương dầu – lọc khí cho nhà xưởng và hệ thống bơm – xử lý nước. Đội ngũ 100 người của chúng tôi đang trực tiếp thi công tại nhiều công trình ở Nghệ An, Ninh Bình và Thành phố Huế, từ công trình nhiều tầng đến nhà xưởng sản xuất đang vận hành.</a:t>
-            </a:r>
-            <a:endParaRPr lang="en-US" sz="1150" dirty="0"/>
-          </a:p>
-          <a:p>
-            <a:pPr indent="0" marL="0">
-              <a:lnSpc>
-                <a:spcPct val="115000"/>
-              </a:lnSpc>
-              <a:spcAft>
-                <a:spcPts val="800"/>
-              </a:spcAft>
-              <a:buNone/>
-            </a:pPr>
-            <a:r>
-              <a:rPr lang="en-US" sz="1150" dirty="0">
-                <a:solidFill>
-                  <a:schemeClr val="tx1"/>
-                </a:solidFill>
-              </a:rPr>
-              <a:t>Chúng tôi hiểu rằng hạng mục kỹ thuật thường nằm khuất sau trần và trong tường, nhưng lại quyết định sự an toàn và khả năng vận hành lâu dài của công trình. Vì vậy, mỗi công việc tại BLT đều được kiểm soát theo quy trình: khảo sát, lập phương án, chuẩn bị vật tư, thi công, kiểm tra – thử nghiệm, nghiệm thu và bảo hành. Mọi hình ảnh hiện trường đều được ghi nhận kèm thời gian và vị trí để minh bạch với khách hàng.</a:t>
-            </a:r>
-            <a:endParaRPr lang="en-US" sz="1150" dirty="0"/>
-          </a:p>
-          <a:p>
-            <a:pPr indent="0" marL="0">
-              <a:lnSpc>
-                <a:spcPct val="115000"/>
-              </a:lnSpc>
-              <a:spcAft>
-                <a:spcPts val="800"/>
-              </a:spcAft>
-              <a:buNone/>
-            </a:pPr>
-            <a:r>
-              <a:rPr lang="en-US" sz="1150" dirty="0">
-                <a:solidFill>
-                  <a:schemeClr val="tx1"/>
-                </a:solidFill>
-              </a:rPr>
-              <a:t>Với phương châm “Giải pháp điện nước – Uy tín &amp; Chất lượng”, BLT mong muốn được đồng hành cùng Quý vị trong các dự án sắp tới.</a:t>
-            </a:r>
-            <a:endParaRPr lang="en-US" sz="1150" dirty="0"/>
-          </a:p>
-          <a:p>
-            <a:pPr indent="0" marL="0">
-              <a:lnSpc>
-                <a:spcPct val="115000"/>
-              </a:lnSpc>
-              <a:spcAft>
-                <a:spcPts val="800"/>
-              </a:spcAft>
-              <a:buNone/>
-            </a:pPr>
-            <a:r>
-              <a:rPr lang="en-US" sz="1150" b="1" dirty="0">
-                <a:solidFill>
-                  <a:schemeClr val="tx1"/>
-                </a:solidFill>
-              </a:rPr>
-              <a:t>Trân trọng!</a:t>
-            </a:r>
-            <a:endParaRPr lang="en-US" sz="1150" dirty="0"/>
-          </a:p>
-        </p:txBody>
-      </p:sp>
-      <p:sp>
-        <p:nvSpPr>
-          <p:cNvPr id="7" name="Text 4"/>
-          <p:cNvSpPr txBox="1"/>
-          <p:nvPr/>
-        </p:nvSpPr>
-        <p:spPr>
-          <a:xfrm>
-            <a:off x="4315968" y="8321040"/>
-            <a:ext cx="2743200" cy="228600"/>
+          <p:cNvPr id="11" name="Text 8"/>
+          <p:cNvSpPr txBox="1"/>
+          <p:nvPr/>
+        </p:nvSpPr>
+        <p:spPr>
+          <a:xfrm>
+            <a:off x="4343400" y="7086600"/>
+            <a:ext cx="2715768" cy="274320"/>
           </a:xfrm>
           <a:prstGeom prst="rect">
             <a:avLst/>
@@ -29210,27 +29354,27 @@
               <a:buNone/>
             </a:pPr>
             <a:r>
-              <a:rPr lang="en-US" sz="900" b="1" spc="200" kern="0" dirty="0">
+              <a:rPr lang="en-US" sz="1050" i="1" dirty="0">
                 <a:solidFill>
                   <a:schemeClr val="accent3"/>
                 </a:solidFill>
               </a:rPr>
-              <a:t>GIÁM ĐỐC</a:t>
-            </a:r>
-            <a:endParaRPr lang="en-US" sz="900" dirty="0"/>
-          </a:p>
-        </p:txBody>
-      </p:sp>
-      <p:sp>
-        <p:nvSpPr>
-          <p:cNvPr id="8" name="Text 5"/>
-          <p:cNvSpPr txBox="1"/>
-          <p:nvPr/>
-        </p:nvSpPr>
-        <p:spPr>
-          <a:xfrm>
-            <a:off x="4315968" y="9006840"/>
-            <a:ext cx="2743200" cy="320040"/>
+              <a:t>Nghệ An, tháng 10 năm 2026</a:t>
+            </a:r>
+            <a:endParaRPr lang="en-US" sz="1050" dirty="0"/>
+          </a:p>
+        </p:txBody>
+      </p:sp>
+      <p:sp>
+        <p:nvSpPr>
+          <p:cNvPr id="12" name="Text 9"/>
+          <p:cNvSpPr txBox="1"/>
+          <p:nvPr/>
+        </p:nvSpPr>
+        <p:spPr>
+          <a:xfrm>
+            <a:off x="4343400" y="7406640"/>
+            <a:ext cx="2715768" cy="274320"/>
           </a:xfrm>
           <a:prstGeom prst="rect">
             <a:avLst/>
@@ -29246,7 +29390,7 @@
               <a:buNone/>
             </a:pPr>
             <a:r>
-              <a:rPr lang="en-US" sz="1400" b="1" dirty="0">
+              <a:rPr lang="en-US" sz="1100" b="1" spc="200" kern="0" dirty="0">
                 <a:solidFill>
                   <a:schemeClr val="tx2"/>
                 </a:solidFill>
@@ -29254,9 +29398,84 @@
                 <a:ea typeface="Arial" pitchFamily="34" charset="-122"/>
                 <a:cs typeface="Arial" pitchFamily="34" charset="-120"/>
               </a:rPr>
+              <a:t>GIÁM ĐỐC</a:t>
+            </a:r>
+            <a:endParaRPr lang="en-US" sz="1100" dirty="0"/>
+          </a:p>
+        </p:txBody>
+      </p:sp>
+      <p:sp>
+        <p:nvSpPr>
+          <p:cNvPr id="13" name="Text 10"/>
+          <p:cNvSpPr txBox="1"/>
+          <p:nvPr/>
+        </p:nvSpPr>
+        <p:spPr>
+          <a:xfrm>
+            <a:off x="4343400" y="7680960"/>
+            <a:ext cx="2715768" cy="228600"/>
+          </a:xfrm>
+          <a:prstGeom prst="rect">
+            <a:avLst/>
+          </a:prstGeom>
+          <a:noFill/>
+          <a:ln/>
+        </p:spPr>
+        <p:txBody>
+          <a:bodyPr wrap="square" lIns="0" tIns="0" rIns="0" bIns="0" rtlCol="0" anchor="ctr"/>
+          <a:lstStyle/>
+          <a:p>
+            <a:pPr algn="ctr" indent="0" marL="0">
+              <a:buNone/>
+            </a:pPr>
+            <a:r>
+              <a:rPr lang="en-US" sz="900" i="1" dirty="0">
+                <a:solidFill>
+                  <a:schemeClr val="accent3"/>
+                </a:solidFill>
+              </a:rPr>
+              <a:t>(Ký tên, đóng dấu)</a:t>
+            </a:r>
+            <a:endParaRPr lang="en-US" sz="900" dirty="0"/>
+          </a:p>
+        </p:txBody>
+      </p:sp>
+      <p:sp>
+        <p:nvSpPr>
+          <p:cNvPr id="14" name="Text 11"/>
+          <p:cNvSpPr txBox="1"/>
+          <p:nvPr/>
+        </p:nvSpPr>
+        <p:spPr>
+          <a:xfrm>
+            <a:off x="4343400" y="9189720"/>
+            <a:ext cx="2715768" cy="365760"/>
+          </a:xfrm>
+          <a:prstGeom prst="rect">
+            <a:avLst/>
+          </a:prstGeom>
+          <a:noFill/>
+          <a:ln/>
+        </p:spPr>
+        <p:txBody>
+          <a:bodyPr wrap="square" lIns="0" tIns="0" rIns="0" bIns="0" rtlCol="0" anchor="ctr"/>
+          <a:lstStyle/>
+          <a:p>
+            <a:pPr algn="ctr" indent="0" marL="0">
+              <a:buNone/>
+            </a:pPr>
+            <a:r>
+              <a:rPr lang="en-US" sz="1600" b="1" dirty="0">
+                <a:solidFill>
+                  <a:schemeClr val="tx2"/>
+                </a:solidFill>
+                <a:latin typeface="Arial" pitchFamily="34" charset="0"/>
+                <a:ea typeface="Arial" pitchFamily="34" charset="-122"/>
+                <a:cs typeface="Arial" pitchFamily="34" charset="-120"/>
+              </a:rPr>
               <a:t>HỒ VĂN BÌNH</a:t>
             </a:r>
-            <a:endParaRPr lang="en-US" sz="1400" dirty="0"/>
+            <a:endParaRPr lang="en-US" sz="1600" dirty="0"/>
           </a:p>
         </p:txBody>
       </p:sp>

--- a/ho-so-nang-luc-BLT/HO_SO_NANG_LUC_BLT.pptx
+++ b/ho-so-nang-luc-BLT/HO_SO_NANG_LUC_BLT.pptx
@@ -132,14 +132,14 @@
   <p:extLst>
     <p:ext uri="{521415D9-36F7-43E2-AB2F-B90AF26B5E84}">
       <p14:sectionLst xmlns:p14="http://schemas.microsoft.com/office/powerpoint/2010/main">
-        <p14:section name="Mở đầu" id="{cd02a01f-bf07-a852-2f30-0b54d8c88614}">
+        <p14:section name="Mở đầu" id="{a8245867-f327-d094-4925-72a31402470b}">
           <p14:sldIdLst>
             <p14:sldId id="256"/>
             <p14:sldId id="257"/>
             <p14:sldId id="258"/>
           </p14:sldIdLst>
         </p14:section>
-        <p14:section name="01 Tổng quan" id="{a1f89e92-6b47-e5bb-da0b-ec4a60e2a01a}">
+        <p14:section name="01 Tổng quan" id="{a723346e-9b2d-de84-affa-8f0fb62f270d}">
           <p14:sldIdLst>
             <p14:sldId id="259"/>
             <p14:sldId id="260"/>
@@ -148,39 +148,39 @@
             <p14:sldId id="263"/>
           </p14:sldIdLst>
         </p14:section>
-        <p14:section name="02 Điện nước công trình" id="{b42a08a1-5499-d2fd-63ad-f536bb1d8645}">
+        <p14:section name="02 Điện nước công trình" id="{542b40e1-1628-373f-7127-2ad5b9b5454f}">
           <p14:sldIdLst>
             <p14:sldId id="264"/>
             <p14:sldId id="265"/>
             <p14:sldId id="266"/>
           </p14:sldIdLst>
         </p14:section>
-        <p14:section name="03 Hút sương dầu nhà xưởng" id="{1c52ce9e-6f16-1773-b795-ddd67dcc051b}">
+        <p14:section name="03 Hút sương dầu nhà xưởng" id="{8df30eb5-65c1-7565-6025-da539dfe8a54}">
           <p14:sldIdLst>
             <p14:sldId id="267"/>
             <p14:sldId id="268"/>
             <p14:sldId id="269"/>
           </p14:sldIdLst>
         </p14:section>
-        <p14:section name="04 Bơm &amp; xử lý nước" id="{620b43d2-c93a-6db5-6c7e-2ad85e2108fd}">
+        <p14:section name="04 Bơm &amp; xử lý nước" id="{53084246-5de0-14ba-b912-138fd5cf9e6f}">
           <p14:sldIdLst>
             <p14:sldId id="270"/>
           </p14:sldIdLst>
         </p14:section>
-        <p14:section name="05 Quản trị dự án" id="{6e02fdd8-c2e1-2504-8028-12de403e24de}">
+        <p14:section name="05 Quản trị dự án" id="{1275f23a-0c58-dbf4-3bdf-9bd840957d66}">
           <p14:sldIdLst>
             <p14:sldId id="271"/>
             <p14:sldId id="272"/>
             <p14:sldId id="273"/>
           </p14:sldIdLst>
         </p14:section>
-        <p14:section name="06 Nguồn lực" id="{dab69636-f6d3-0be9-ad96-3d6f4b17e0bd}">
+        <p14:section name="06 Nguồn lực" id="{3183c4f5-cb69-4078-3686-ffd834faec2b}">
           <p14:sldIdLst>
             <p14:sldId id="274"/>
             <p14:sldId id="275"/>
           </p14:sldIdLst>
         </p14:section>
-        <p14:section name="07 Công trình tiêu biểu" id="{4ea2d90b-2650-e631-dafd-1877b6656964}">
+        <p14:section name="07 Công trình tiêu biểu" id="{d7a2ddc5-3339-b4a3-a539-41ca02422e5e}">
           <p14:sldIdLst>
             <p14:sldId id="276"/>
             <p14:sldId id="277"/>
@@ -188,7 +188,7 @@
             <p14:sldId id="279"/>
           </p14:sldIdLst>
         </p14:section>
-        <p14:section name="08 Cam kết &amp; liên hệ" id="{8e016acf-ed49-7c10-040d-7675272d6ef0}">
+        <p14:section name="08 Cam kết &amp; liên hệ" id="{fa285568-7996-b853-fff9-f1ea3f925ea8}">
           <p14:sldIdLst>
             <p14:sldId id="280"/>
             <p14:sldId id="281"/>
@@ -29075,7 +29075,7 @@
               <a:buNone/>
             </a:pPr>
             <a:r>
-              <a:rPr lang="en-US" sz="1500" b="1" dirty="0">
+              <a:rPr lang="en-US" sz="1700" b="1" dirty="0">
                 <a:solidFill>
                   <a:schemeClr val="bg1"/>
                 </a:solidFill>
@@ -29083,9 +29083,63 @@
                 <a:ea typeface="Arial" pitchFamily="34" charset="-122"/>
                 <a:cs typeface="Arial" pitchFamily="34" charset="-120"/>
               </a:rPr>
-              <a:t>Hạng mục điện nước nằm khuất sau trần và trong tường, nhưng quyết định sự an toàn và vận hành lâu dài của mỗi công trình.</a:t>
-            </a:r>
-            <a:endParaRPr lang="en-US" sz="1500" dirty="0"/>
+              <a:t>Chúng tôi không chỉ lắp đặt điện nước –</a:t>
+            </a:r>
+            <a:endParaRPr lang="en-US" sz="1700" dirty="0"/>
+          </a:p>
+          <a:p>
+            <a:pPr indent="0" marL="0">
+              <a:lnSpc>
+                <a:spcPct val="110000"/>
+              </a:lnSpc>
+              <a:buNone/>
+            </a:pPr>
+            <a:r>
+              <a:rPr lang="en-US" sz="1700" b="1" dirty="0">
+                <a:solidFill>
+                  <a:schemeClr val="bg1"/>
+                </a:solidFill>
+                <a:latin typeface="Arial" pitchFamily="34" charset="0"/>
+                <a:ea typeface="Arial" pitchFamily="34" charset="-122"/>
+                <a:cs typeface="Arial" pitchFamily="34" charset="-120"/>
+              </a:rPr>
+              <a:t>chúng tôi lắp đặt </a:t>
+            </a:r>
+            <a:pPr indent="0" marL="0">
+              <a:lnSpc>
+                <a:spcPct val="110000"/>
+              </a:lnSpc>
+              <a:buNone/>
+            </a:pPr>
+            <a:r>
+              <a:rPr lang="en-US" sz="1700" b="1" dirty="0">
+                <a:solidFill>
+                  <a:schemeClr val="accent1"/>
+                </a:solidFill>
+                <a:latin typeface="Arial" pitchFamily="34" charset="0"/>
+                <a:ea typeface="Arial" pitchFamily="34" charset="-122"/>
+                <a:cs typeface="Arial" pitchFamily="34" charset="-120"/>
+              </a:rPr>
+              <a:t>sự an tâm</a:t>
+            </a:r>
+            <a:pPr indent="0" marL="0">
+              <a:lnSpc>
+                <a:spcPct val="110000"/>
+              </a:lnSpc>
+              <a:buNone/>
+            </a:pPr>
+            <a:r>
+              <a:rPr lang="en-US" sz="1700" b="1" dirty="0">
+                <a:solidFill>
+                  <a:schemeClr val="bg1"/>
+                </a:solidFill>
+                <a:latin typeface="Arial" pitchFamily="34" charset="0"/>
+                <a:ea typeface="Arial" pitchFamily="34" charset="-122"/>
+                <a:cs typeface="Arial" pitchFamily="34" charset="-120"/>
+              </a:rPr>
+              <a:t> cho từng công trình.</a:t>
+            </a:r>
+            <a:endParaRPr lang="en-US" sz="1700" dirty="0"/>
           </a:p>
         </p:txBody>
       </p:sp>

--- a/ho-so-nang-luc-BLT/HO_SO_NANG_LUC_BLT.pptx
+++ b/ho-so-nang-luc-BLT/HO_SO_NANG_LUC_BLT.pptx
@@ -132,14 +132,14 @@
   <p:extLst>
     <p:ext uri="{521415D9-36F7-43E2-AB2F-B90AF26B5E84}">
       <p14:sectionLst xmlns:p14="http://schemas.microsoft.com/office/powerpoint/2010/main">
-        <p14:section name="Mở đầu" id="{a8245867-f327-d094-4925-72a31402470b}">
+        <p14:section name="Mở đầu" id="{35f7de7a-d3aa-5e6d-8abd-e329c8e493a1}">
           <p14:sldIdLst>
             <p14:sldId id="256"/>
             <p14:sldId id="257"/>
             <p14:sldId id="258"/>
           </p14:sldIdLst>
         </p14:section>
-        <p14:section name="01 Tổng quan" id="{a723346e-9b2d-de84-affa-8f0fb62f270d}">
+        <p14:section name="01 Tổng quan" id="{13a775b4-1674-baf5-5b7f-ae24d97a1941}">
           <p14:sldIdLst>
             <p14:sldId id="259"/>
             <p14:sldId id="260"/>
@@ -148,39 +148,39 @@
             <p14:sldId id="263"/>
           </p14:sldIdLst>
         </p14:section>
-        <p14:section name="02 Điện nước công trình" id="{542b40e1-1628-373f-7127-2ad5b9b5454f}">
+        <p14:section name="02 Điện nước công trình" id="{cce7f6e8-fb4b-3740-c336-af423b1c6f82}">
           <p14:sldIdLst>
             <p14:sldId id="264"/>
             <p14:sldId id="265"/>
             <p14:sldId id="266"/>
           </p14:sldIdLst>
         </p14:section>
-        <p14:section name="03 Hút sương dầu nhà xưởng" id="{8df30eb5-65c1-7565-6025-da539dfe8a54}">
+        <p14:section name="03 Hút sương dầu nhà xưởng" id="{5db836f6-58a9-daf7-cde8-76dfe6c80d9f}">
           <p14:sldIdLst>
             <p14:sldId id="267"/>
             <p14:sldId id="268"/>
             <p14:sldId id="269"/>
           </p14:sldIdLst>
         </p14:section>
-        <p14:section name="04 Bơm &amp; xử lý nước" id="{53084246-5de0-14ba-b912-138fd5cf9e6f}">
+        <p14:section name="04 Bơm &amp; xử lý nước" id="{cf4dc152-2715-20fa-fc82-2a60f496fe5e}">
           <p14:sldIdLst>
             <p14:sldId id="270"/>
           </p14:sldIdLst>
         </p14:section>
-        <p14:section name="05 Quản trị dự án" id="{1275f23a-0c58-dbf4-3bdf-9bd840957d66}">
+        <p14:section name="05 Quản trị dự án" id="{d1542d83-5170-6adf-eab6-bb2be8a54644}">
           <p14:sldIdLst>
             <p14:sldId id="271"/>
             <p14:sldId id="272"/>
             <p14:sldId id="273"/>
           </p14:sldIdLst>
         </p14:section>
-        <p14:section name="06 Nguồn lực" id="{3183c4f5-cb69-4078-3686-ffd834faec2b}">
+        <p14:section name="06 Nguồn lực" id="{85cfb580-4c68-26d2-9cc1-e3231d8b5d65}">
           <p14:sldIdLst>
             <p14:sldId id="274"/>
             <p14:sldId id="275"/>
           </p14:sldIdLst>
         </p14:section>
-        <p14:section name="07 Công trình tiêu biểu" id="{d7a2ddc5-3339-b4a3-a539-41ca02422e5e}">
+        <p14:section name="07 Công trình tiêu biểu" id="{7f7b0a70-08df-98c1-1131-92ccdd61571d}">
           <p14:sldIdLst>
             <p14:sldId id="276"/>
             <p14:sldId id="277"/>
@@ -188,7 +188,7 @@
             <p14:sldId id="279"/>
           </p14:sldIdLst>
         </p14:section>
-        <p14:section name="08 Cam kết &amp; liên hệ" id="{fa285568-7996-b853-fff9-f1ea3f925ea8}">
+        <p14:section name="08 Cam kết &amp; liên hệ" id="{51c459eb-398c-fa46-98b9-37c7aad0005e}">
           <p14:sldIdLst>
             <p14:sldId id="280"/>
             <p14:sldId id="281"/>
@@ -26489,7 +26489,7 @@
       </p:grpSpPr>
       <p:pic>
         <p:nvPicPr>
-          <p:cNvPr id="2" name="logo" descr="preencoded.png">    </p:cNvPr>
+          <p:cNvPr id="2" name="photo img79.jpg" descr="Ảnh hiện trường BLT">    </p:cNvPr>
           <p:cNvPicPr>
             <a:picLocks noChangeAspect="1"/>
           </p:cNvPicPr>
@@ -26503,7 +26503,60 @@
         </p:blipFill>
         <p:spPr>
           <a:xfrm>
-            <a:off x="2775204" y="1371600"/>
+            <a:off x="0" y="0"/>
+            <a:ext cx="7562088" cy="4206240"/>
+          </a:xfrm>
+          <a:prstGeom prst="rect">
+            <a:avLst/>
+          </a:prstGeom>
+        </p:spPr>
+      </p:pic>
+      <p:sp>
+        <p:nvSpPr>
+          <p:cNvPr id="3" name="Shape 0"/>
+          <p:cNvSpPr/>
+          <p:nvPr/>
+        </p:nvSpPr>
+        <p:spPr>
+          <a:xfrm>
+            <a:off x="0" y="0"/>
+            <a:ext cx="7562088" cy="4206240"/>
+          </a:xfrm>
+          <a:prstGeom prst="rect">
+            <a:avLst/>
+          </a:prstGeom>
+          <a:solidFill>
+            <a:schemeClr val="tx2">
+              <a:alpha val="60000"/>
+            </a:schemeClr>
+          </a:solidFill>
+          <a:ln w="12700">
+            <a:solidFill>
+              <a:schemeClr val="tx2">
+                <a:alpha val="0"/>
+              </a:schemeClr>
+            </a:solidFill>
+            <a:prstDash val="solid"/>
+          </a:ln>
+        </p:spPr>
+      </p:sp>
+      <p:pic>
+        <p:nvPicPr>
+          <p:cNvPr id="4" name="logo" descr="preencoded.png">    </p:cNvPr>
+          <p:cNvPicPr>
+            <a:picLocks noChangeAspect="1"/>
+          </p:cNvPicPr>
+          <p:nvPr/>
+        </p:nvPicPr>
+        <p:blipFill>
+          <a:blip r:embed="rId2"/>
+          <a:stretch>
+            <a:fillRect/>
+          </a:stretch>
+        </p:blipFill>
+        <p:spPr>
+          <a:xfrm>
+            <a:off x="2775204" y="1097280"/>
             <a:ext cx="2011680" cy="2011680"/>
           </a:xfrm>
           <a:prstGeom prst="rect">
@@ -26513,7 +26566,7 @@
       </p:pic>
       <p:sp>
         <p:nvSpPr>
-          <p:cNvPr id="3" name="Text 0"/>
+          <p:cNvPr id="5" name="Text 1"/>
           <p:cNvSpPr txBox="1"/>
           <p:nvPr/>
         </p:nvSpPr>
@@ -26552,7 +26605,7 @@
       </p:sp>
       <p:sp>
         <p:nvSpPr>
-          <p:cNvPr id="4" name="Text 1"/>
+          <p:cNvPr id="6" name="Text 2"/>
           <p:cNvSpPr txBox="1"/>
           <p:nvPr/>
         </p:nvSpPr>
@@ -26588,7 +26641,7 @@
       </p:sp>
       <p:sp>
         <p:nvSpPr>
-          <p:cNvPr id="5" name="Text 2"/>
+          <p:cNvPr id="7" name="Text 3"/>
           <p:cNvSpPr txBox="1"/>
           <p:nvPr/>
         </p:nvSpPr>
@@ -26624,7 +26677,7 @@
       </p:sp>
       <p:sp>
         <p:nvSpPr>
-          <p:cNvPr id="6" name="Text 3"/>
+          <p:cNvPr id="8" name="Text 4"/>
           <p:cNvSpPr txBox="1"/>
           <p:nvPr/>
         </p:nvSpPr>
@@ -26660,7 +26713,7 @@
       </p:sp>
       <p:sp>
         <p:nvSpPr>
-          <p:cNvPr id="7" name="Text 4"/>
+          <p:cNvPr id="9" name="Text 5"/>
           <p:cNvSpPr txBox="1"/>
           <p:nvPr/>
         </p:nvSpPr>
@@ -26696,7 +26749,7 @@
       </p:sp>
       <p:sp>
         <p:nvSpPr>
-          <p:cNvPr id="8" name="Text 5"/>
+          <p:cNvPr id="10" name="Text 6"/>
           <p:cNvSpPr txBox="1"/>
           <p:nvPr/>
         </p:nvSpPr>
@@ -26732,7 +26785,7 @@
       </p:sp>
       <p:sp>
         <p:nvSpPr>
-          <p:cNvPr id="9" name="Text 6"/>
+          <p:cNvPr id="11" name="Text 7"/>
           <p:cNvSpPr txBox="1"/>
           <p:nvPr/>
         </p:nvSpPr>
@@ -26768,7 +26821,7 @@
       </p:sp>
       <p:sp>
         <p:nvSpPr>
-          <p:cNvPr id="10" name="Text 7"/>
+          <p:cNvPr id="12" name="Text 8"/>
           <p:cNvSpPr txBox="1"/>
           <p:nvPr/>
         </p:nvSpPr>
@@ -26804,7 +26857,7 @@
       </p:sp>
       <p:sp>
         <p:nvSpPr>
-          <p:cNvPr id="11" name="Text 8"/>
+          <p:cNvPr id="13" name="Text 9"/>
           <p:cNvSpPr txBox="1"/>
           <p:nvPr/>
         </p:nvSpPr>
@@ -26840,7 +26893,7 @@
       </p:sp>
       <p:sp>
         <p:nvSpPr>
-          <p:cNvPr id="12" name="Text 9"/>
+          <p:cNvPr id="14" name="Text 10"/>
           <p:cNvSpPr txBox="1"/>
           <p:nvPr/>
         </p:nvSpPr>
@@ -26876,7 +26929,7 @@
       </p:sp>
       <p:sp>
         <p:nvSpPr>
-          <p:cNvPr id="13" name="Text 10"/>
+          <p:cNvPr id="15" name="Text 11"/>
           <p:cNvSpPr txBox="1"/>
           <p:nvPr/>
         </p:nvSpPr>
@@ -26912,7 +26965,7 @@
       </p:sp>
       <p:sp>
         <p:nvSpPr>
-          <p:cNvPr id="14" name="Text 11"/>
+          <p:cNvPr id="16" name="Text 12"/>
           <p:cNvSpPr txBox="1"/>
           <p:nvPr/>
         </p:nvSpPr>
@@ -26948,7 +27001,7 @@
       </p:sp>
       <p:sp>
         <p:nvSpPr>
-          <p:cNvPr id="15" name="Text 12"/>
+          <p:cNvPr id="17" name="Text 13"/>
           <p:cNvSpPr txBox="1"/>
           <p:nvPr/>
         </p:nvSpPr>
@@ -26984,7 +27037,7 @@
       </p:sp>
       <p:sp>
         <p:nvSpPr>
-          <p:cNvPr id="16" name="Text 13"/>
+          <p:cNvPr id="18" name="Text 14"/>
           <p:cNvSpPr txBox="1"/>
           <p:nvPr/>
         </p:nvSpPr>
@@ -27020,7 +27073,7 @@
       </p:sp>
       <p:sp>
         <p:nvSpPr>
-          <p:cNvPr id="17" name="Text 14"/>
+          <p:cNvPr id="19" name="Text 15"/>
           <p:cNvSpPr txBox="1"/>
           <p:nvPr/>
         </p:nvSpPr>
@@ -27056,7 +27109,7 @@
       </p:sp>
       <p:sp>
         <p:nvSpPr>
-          <p:cNvPr id="18" name="Text 15"/>
+          <p:cNvPr id="20" name="Text 16"/>
           <p:cNvSpPr txBox="1"/>
           <p:nvPr/>
         </p:nvSpPr>
@@ -29321,71 +29374,9 @@
           </a:p>
         </p:txBody>
       </p:sp>
-      <p:pic>
-        <p:nvPicPr>
-          <p:cNvPr id="9" name="photo img79.jpg" descr="Đội thi công BLT tại nhà xưởng gia công CNC – Hưng Nguyên, Nghệ An">    </p:cNvPr>
-          <p:cNvPicPr>
-            <a:picLocks noChangeAspect="1"/>
-          </p:cNvPicPr>
-          <p:nvPr/>
-        </p:nvPicPr>
-        <p:blipFill>
-          <a:blip r:embed="rId1"/>
-          <a:stretch>
-            <a:fillRect/>
-          </a:stretch>
-        </p:blipFill>
-        <p:spPr>
-          <a:xfrm>
-            <a:off x="502920" y="7040880"/>
-            <a:ext cx="3566160" cy="2606040"/>
-          </a:xfrm>
-          <a:prstGeom prst="rect">
-            <a:avLst/>
-          </a:prstGeom>
-        </p:spPr>
-      </p:pic>
-      <p:sp>
-        <p:nvSpPr>
-          <p:cNvPr id="10" name="Text 7"/>
-          <p:cNvSpPr txBox="1"/>
-          <p:nvPr/>
-        </p:nvSpPr>
-        <p:spPr>
-          <a:xfrm>
-            <a:off x="502920" y="9683496"/>
-            <a:ext cx="3566160" cy="201168"/>
-          </a:xfrm>
-          <a:prstGeom prst="rect">
-            <a:avLst/>
-          </a:prstGeom>
-          <a:noFill/>
-          <a:ln/>
-        </p:spPr>
-        <p:txBody>
-          <a:bodyPr wrap="square" lIns="0" tIns="0" rIns="0" bIns="0" rtlCol="0" anchor="ctr">
-            <a:normAutofit/>
-          </a:bodyPr>
-          <a:lstStyle/>
-          <a:p>
-            <a:pPr indent="0" marL="0">
-              <a:buNone/>
-            </a:pPr>
-            <a:r>
-              <a:rPr lang="en-US" sz="800" i="1" dirty="0">
-                <a:solidFill>
-                  <a:schemeClr val="accent3"/>
-                </a:solidFill>
-              </a:rPr>
-              <a:t>Đội thi công BLT tại nhà xưởng gia công CNC – Hưng Nguyên, Nghệ An</a:t>
-            </a:r>
-            <a:endParaRPr lang="en-US" sz="800" dirty="0"/>
-          </a:p>
-        </p:txBody>
-      </p:sp>
-      <p:sp>
-        <p:nvSpPr>
-          <p:cNvPr id="11" name="Text 8"/>
+      <p:sp>
+        <p:nvSpPr>
+          <p:cNvPr id="9" name="Text 7"/>
           <p:cNvSpPr txBox="1"/>
           <p:nvPr/>
         </p:nvSpPr>
@@ -29421,7 +29412,7 @@
       </p:sp>
       <p:sp>
         <p:nvSpPr>
-          <p:cNvPr id="12" name="Text 9"/>
+          <p:cNvPr id="10" name="Text 8"/>
           <p:cNvSpPr txBox="1"/>
           <p:nvPr/>
         </p:nvSpPr>
@@ -29460,7 +29451,7 @@
       </p:sp>
       <p:sp>
         <p:nvSpPr>
-          <p:cNvPr id="13" name="Text 10"/>
+          <p:cNvPr id="11" name="Text 9"/>
           <p:cNvSpPr txBox="1"/>
           <p:nvPr/>
         </p:nvSpPr>
@@ -29496,7 +29487,7 @@
       </p:sp>
       <p:sp>
         <p:nvSpPr>
-          <p:cNvPr id="14" name="Text 11"/>
+          <p:cNvPr id="12" name="Text 10"/>
           <p:cNvSpPr txBox="1"/>
           <p:nvPr/>
         </p:nvSpPr>

--- a/ho-so-nang-luc-BLT/HO_SO_NANG_LUC_BLT.pptx
+++ b/ho-so-nang-luc-BLT/HO_SO_NANG_LUC_BLT.pptx
@@ -132,14 +132,14 @@
   <p:extLst>
     <p:ext uri="{521415D9-36F7-43E2-AB2F-B90AF26B5E84}">
       <p14:sectionLst xmlns:p14="http://schemas.microsoft.com/office/powerpoint/2010/main">
-        <p14:section name="Mở đầu" id="{35f7de7a-d3aa-5e6d-8abd-e329c8e493a1}">
+        <p14:section name="Mở đầu" id="{613efe4e-952f-3095-7e97-1634b52ef755}">
           <p14:sldIdLst>
             <p14:sldId id="256"/>
             <p14:sldId id="257"/>
             <p14:sldId id="258"/>
           </p14:sldIdLst>
         </p14:section>
-        <p14:section name="01 Tổng quan" id="{13a775b4-1674-baf5-5b7f-ae24d97a1941}">
+        <p14:section name="01 Tổng quan" id="{8e56e4c9-61ee-49bc-4beb-dbbc7f943dc0}">
           <p14:sldIdLst>
             <p14:sldId id="259"/>
             <p14:sldId id="260"/>
@@ -148,39 +148,39 @@
             <p14:sldId id="263"/>
           </p14:sldIdLst>
         </p14:section>
-        <p14:section name="02 Điện nước công trình" id="{cce7f6e8-fb4b-3740-c336-af423b1c6f82}">
+        <p14:section name="02 Điện nước công trình" id="{37722329-1041-1cc5-0805-236916ab799a}">
           <p14:sldIdLst>
             <p14:sldId id="264"/>
             <p14:sldId id="265"/>
             <p14:sldId id="266"/>
           </p14:sldIdLst>
         </p14:section>
-        <p14:section name="03 Hút sương dầu nhà xưởng" id="{5db836f6-58a9-daf7-cde8-76dfe6c80d9f}">
+        <p14:section name="03 Hút sương dầu nhà xưởng" id="{015fb9f1-e532-bee4-d21c-4fd07488764a}">
           <p14:sldIdLst>
             <p14:sldId id="267"/>
             <p14:sldId id="268"/>
             <p14:sldId id="269"/>
           </p14:sldIdLst>
         </p14:section>
-        <p14:section name="04 Bơm &amp; xử lý nước" id="{cf4dc152-2715-20fa-fc82-2a60f496fe5e}">
+        <p14:section name="04 Bơm &amp; xử lý nước" id="{c7c0d1fe-ceb6-af1f-f8fe-c1155bb0c9c6}">
           <p14:sldIdLst>
             <p14:sldId id="270"/>
           </p14:sldIdLst>
         </p14:section>
-        <p14:section name="05 Quản trị dự án" id="{d1542d83-5170-6adf-eab6-bb2be8a54644}">
+        <p14:section name="05 Quản trị dự án" id="{d35e3d02-8705-7704-8ed6-3c0d7252a437}">
           <p14:sldIdLst>
             <p14:sldId id="271"/>
             <p14:sldId id="272"/>
             <p14:sldId id="273"/>
           </p14:sldIdLst>
         </p14:section>
-        <p14:section name="06 Nguồn lực" id="{85cfb580-4c68-26d2-9cc1-e3231d8b5d65}">
+        <p14:section name="06 Nguồn lực" id="{c9b8371a-35fa-09ca-2d58-84ecdaefe53d}">
           <p14:sldIdLst>
             <p14:sldId id="274"/>
             <p14:sldId id="275"/>
           </p14:sldIdLst>
         </p14:section>
-        <p14:section name="07 Công trình tiêu biểu" id="{7f7b0a70-08df-98c1-1131-92ccdd61571d}">
+        <p14:section name="07 Công trình tiêu biểu" id="{e053bfed-3ae1-1ffc-b22a-97aefd90ca60}">
           <p14:sldIdLst>
             <p14:sldId id="276"/>
             <p14:sldId id="277"/>
@@ -188,7 +188,7 @@
             <p14:sldId id="279"/>
           </p14:sldIdLst>
         </p14:section>
-        <p14:section name="08 Cam kết &amp; liên hệ" id="{51c459eb-398c-fa46-98b9-37c7aad0005e}">
+        <p14:section name="08 Cam kết &amp; liên hệ" id="{7cf6ea2b-aedc-a59f-f229-fb5fc4930322}">
           <p14:sldIdLst>
             <p14:sldId id="280"/>
             <p14:sldId id="281"/>
@@ -27073,92 +27073,6 @@
       </p:sp>
       <p:sp>
         <p:nvSpPr>
-          <p:cNvPr id="19" name="Text 15"/>
-          <p:cNvSpPr txBox="1"/>
-          <p:nvPr/>
-        </p:nvSpPr>
-        <p:spPr>
-          <a:xfrm>
-            <a:off x="777240" y="8659368"/>
-            <a:ext cx="1463040" cy="548640"/>
-          </a:xfrm>
-          <a:prstGeom prst="rect">
-            <a:avLst/>
-          </a:prstGeom>
-          <a:noFill/>
-          <a:ln/>
-        </p:spPr>
-        <p:txBody>
-          <a:bodyPr wrap="square" lIns="0" tIns="0" rIns="0" bIns="0" rtlCol="0" anchor="t"/>
-          <a:lstStyle/>
-          <a:p>
-            <a:pPr indent="0" marL="0">
-              <a:buNone/>
-            </a:pPr>
-            <a:r>
-              <a:rPr lang="en-US" sz="900" b="1" spc="100" kern="0" dirty="0">
-                <a:solidFill>
-                  <a:schemeClr val="accent1"/>
-                </a:solidFill>
-              </a:rPr>
-              <a:t>TÀI KHOẢN</a:t>
-            </a:r>
-            <a:endParaRPr lang="en-US" sz="900" dirty="0"/>
-          </a:p>
-        </p:txBody>
-      </p:sp>
-      <p:sp>
-        <p:nvSpPr>
-          <p:cNvPr id="20" name="Text 16"/>
-          <p:cNvSpPr txBox="1"/>
-          <p:nvPr/>
-        </p:nvSpPr>
-        <p:spPr>
-          <a:xfrm>
-            <a:off x="2286000" y="8659368"/>
-            <a:ext cx="4498848" cy="548640"/>
-          </a:xfrm>
-          <a:prstGeom prst="rect">
-            <a:avLst/>
-          </a:prstGeom>
-          <a:noFill/>
-          <a:ln/>
-        </p:spPr>
-        <p:txBody>
-          <a:bodyPr wrap="square" lIns="0" tIns="0" rIns="0" bIns="0" rtlCol="0" anchor="t"/>
-          <a:lstStyle/>
-          <a:p>
-            <a:pPr indent="0" marL="0">
-              <a:buNone/>
-            </a:pPr>
-            <a:r>
-              <a:rPr lang="en-US" sz="1050" dirty="0">
-                <a:solidFill>
-                  <a:schemeClr val="bg1"/>
-                </a:solidFill>
-              </a:rPr>
-              <a:t>1066217478 – CT TNHH KY THUAT CONG TRINH BLT</a:t>
-            </a:r>
-            <a:endParaRPr lang="en-US" sz="1050" dirty="0"/>
-          </a:p>
-          <a:p>
-            <a:pPr indent="0" marL="0">
-              <a:buNone/>
-            </a:pPr>
-            <a:r>
-              <a:rPr lang="en-US" sz="1050" dirty="0">
-                <a:solidFill>
-                  <a:schemeClr val="bg1"/>
-                </a:solidFill>
-              </a:rPr>
-              <a:t>Vietcombank – Ngân hàng TMCP Ngoại thương Việt Nam</a:t>
-            </a:r>
-            <a:endParaRPr lang="en-US" sz="1050" dirty="0"/>
-          </a:p>
-        </p:txBody>
-      </p:sp>
-      <p:sp>
-        <p:nvSpPr>
           <p:cNvPr id="25" name="Slide Number Placeholder 0"/>
           <p:cNvSpPr>
             <a:spLocks noGrp="1"/>
@@ -30785,7 +30699,7 @@
                 <a:gridCol w="2194560"/>
                 <a:gridCol w="4361688"/>
               </a:tblGrid>
-              <a:tr h="384048">
+              <a:tr h="548640">
                 <a:tc>
                   <a:txBody>
                     <a:bodyPr/>
@@ -30795,14 +30709,14 @@
                         <a:buNone/>
                       </a:pPr>
                       <a:r>
-                        <a:rPr lang="en-US" sz="1000" b="1" dirty="0">
+                        <a:rPr lang="en-US" sz="1050" b="1" dirty="0">
                           <a:solidFill>
                             <a:schemeClr val="tx2"/>
                           </a:solidFill>
                         </a:rPr>
                         <a:t>Tên doanh nghiệp</a:t>
                       </a:r>
-                      <a:endParaRPr lang="en-US" sz="1000" dirty="0"/>
+                      <a:endParaRPr lang="en-US" sz="1050" dirty="0"/>
                     </a:p>
                   </a:txBody>
                   <a:tcPr marL="109728" marR="109728" marT="64008" marB="64008" anchor="ctr">
@@ -30856,14 +30770,14 @@
                         <a:buNone/>
                       </a:pPr>
                       <a:r>
-                        <a:rPr lang="en-US" sz="1000" dirty="0">
+                        <a:rPr lang="en-US" sz="1050" dirty="0">
                           <a:solidFill>
                             <a:schemeClr val="tx1"/>
                           </a:solidFill>
                         </a:rPr>
                         <a:t>CÔNG TY TNHH KỸ THUẬT CÔNG TRÌNH BLT</a:t>
                       </a:r>
-                      <a:endParaRPr lang="en-US" sz="1000" dirty="0"/>
+                      <a:endParaRPr lang="en-US" sz="1050" dirty="0"/>
                     </a:p>
                   </a:txBody>
                   <a:tcPr marL="109728" marR="109728" marT="64008" marB="64008" anchor="ctr">
@@ -30906,7 +30820,7 @@
                   </a:tcPr>
                 </a:tc>
               </a:tr>
-              <a:tr h="384048">
+              <a:tr h="548640">
                 <a:tc>
                   <a:txBody>
                     <a:bodyPr/>
@@ -30916,14 +30830,14 @@
                         <a:buNone/>
                       </a:pPr>
                       <a:r>
-                        <a:rPr lang="en-US" sz="1000" b="1" dirty="0">
+                        <a:rPr lang="en-US" sz="1050" b="1" dirty="0">
                           <a:solidFill>
                             <a:schemeClr val="tx2"/>
                           </a:solidFill>
                         </a:rPr>
                         <a:t>Tên viết tắt</a:t>
                       </a:r>
-                      <a:endParaRPr lang="en-US" sz="1000" dirty="0"/>
+                      <a:endParaRPr lang="en-US" sz="1050" dirty="0"/>
                     </a:p>
                   </a:txBody>
                   <a:tcPr marL="109728" marR="109728" marT="64008" marB="64008" anchor="ctr">
@@ -30977,14 +30891,14 @@
                         <a:buNone/>
                       </a:pPr>
                       <a:r>
-                        <a:rPr lang="en-US" sz="1000" dirty="0">
+                        <a:rPr lang="en-US" sz="1050" dirty="0">
                           <a:solidFill>
                             <a:schemeClr val="tx1"/>
                           </a:solidFill>
                         </a:rPr>
                         <a:t>BLT  (nhận diện: BLT Điện Nước)</a:t>
                       </a:r>
-                      <a:endParaRPr lang="en-US" sz="1000" dirty="0"/>
+                      <a:endParaRPr lang="en-US" sz="1050" dirty="0"/>
                     </a:p>
                   </a:txBody>
                   <a:tcPr marL="109728" marR="109728" marT="64008" marB="64008" anchor="ctr">
@@ -31027,7 +30941,7 @@
                   </a:tcPr>
                 </a:tc>
               </a:tr>
-              <a:tr h="384048">
+              <a:tr h="548640">
                 <a:tc>
                   <a:txBody>
                     <a:bodyPr/>
@@ -31037,14 +30951,14 @@
                         <a:buNone/>
                       </a:pPr>
                       <a:r>
-                        <a:rPr lang="en-US" sz="1000" b="1" dirty="0">
+                        <a:rPr lang="en-US" sz="1050" b="1" dirty="0">
                           <a:solidFill>
                             <a:schemeClr val="tx2"/>
                           </a:solidFill>
                         </a:rPr>
                         <a:t>Mã số doanh nghiệp / MST</a:t>
                       </a:r>
-                      <a:endParaRPr lang="en-US" sz="1000" dirty="0"/>
+                      <a:endParaRPr lang="en-US" sz="1050" dirty="0"/>
                     </a:p>
                   </a:txBody>
                   <a:tcPr marL="109728" marR="109728" marT="64008" marB="64008" anchor="ctr">
@@ -31098,14 +31012,14 @@
                         <a:buNone/>
                       </a:pPr>
                       <a:r>
-                        <a:rPr lang="en-US" sz="1000" dirty="0">
+                        <a:rPr lang="en-US" sz="1050" dirty="0">
                           <a:solidFill>
                             <a:schemeClr val="tx1"/>
                           </a:solidFill>
                         </a:rPr>
                         <a:t>2902269718</a:t>
                       </a:r>
-                      <a:endParaRPr lang="en-US" sz="1000" dirty="0"/>
+                      <a:endParaRPr lang="en-US" sz="1050" dirty="0"/>
                     </a:p>
                   </a:txBody>
                   <a:tcPr marL="109728" marR="109728" marT="64008" marB="64008" anchor="ctr">
@@ -31148,7 +31062,7 @@
                   </a:tcPr>
                 </a:tc>
               </a:tr>
-              <a:tr h="384048">
+              <a:tr h="548640">
                 <a:tc>
                   <a:txBody>
                     <a:bodyPr/>
@@ -31158,14 +31072,14 @@
                         <a:buNone/>
                       </a:pPr>
                       <a:r>
-                        <a:rPr lang="en-US" sz="1000" b="1" dirty="0">
+                        <a:rPr lang="en-US" sz="1050" b="1" dirty="0">
                           <a:solidFill>
                             <a:schemeClr val="tx2"/>
                           </a:solidFill>
                         </a:rPr>
                         <a:t>Loại hình</a:t>
                       </a:r>
-                      <a:endParaRPr lang="en-US" sz="1000" dirty="0"/>
+                      <a:endParaRPr lang="en-US" sz="1050" dirty="0"/>
                     </a:p>
                   </a:txBody>
                   <a:tcPr marL="109728" marR="109728" marT="64008" marB="64008" anchor="ctr">
@@ -31219,14 +31133,14 @@
                         <a:buNone/>
                       </a:pPr>
                       <a:r>
-                        <a:rPr lang="en-US" sz="1000" dirty="0">
+                        <a:rPr lang="en-US" sz="1050" dirty="0">
                           <a:solidFill>
                             <a:schemeClr val="tx1"/>
                           </a:solidFill>
                         </a:rPr>
                         <a:t>Công ty trách nhiệm hữu hạn</a:t>
                       </a:r>
-                      <a:endParaRPr lang="en-US" sz="1000" dirty="0"/>
+                      <a:endParaRPr lang="en-US" sz="1050" dirty="0"/>
                     </a:p>
                   </a:txBody>
                   <a:tcPr marL="109728" marR="109728" marT="64008" marB="64008" anchor="ctr">
@@ -31269,7 +31183,7 @@
                   </a:tcPr>
                 </a:tc>
               </a:tr>
-              <a:tr h="384048">
+              <a:tr h="548640">
                 <a:tc>
                   <a:txBody>
                     <a:bodyPr/>
@@ -31279,14 +31193,14 @@
                         <a:buNone/>
                       </a:pPr>
                       <a:r>
-                        <a:rPr lang="en-US" sz="1000" b="1" dirty="0">
+                        <a:rPr lang="en-US" sz="1050" b="1" dirty="0">
                           <a:solidFill>
                             <a:schemeClr val="tx2"/>
                           </a:solidFill>
                         </a:rPr>
                         <a:t>Địa chỉ trụ sở</a:t>
                       </a:r>
-                      <a:endParaRPr lang="en-US" sz="1000" dirty="0"/>
+                      <a:endParaRPr lang="en-US" sz="1050" dirty="0"/>
                     </a:p>
                   </a:txBody>
                   <a:tcPr marL="109728" marR="109728" marT="64008" marB="64008" anchor="ctr">
@@ -31340,14 +31254,14 @@
                         <a:buNone/>
                       </a:pPr>
                       <a:r>
-                        <a:rPr lang="en-US" sz="1000" dirty="0">
+                        <a:rPr lang="en-US" sz="1050" dirty="0">
                           <a:solidFill>
                             <a:schemeClr val="tx1"/>
                           </a:solidFill>
                         </a:rPr>
                         <a:t>Số 2A đường Nguyễn Khánh Toàn, khối Trường Phúc, phường Trường Vinh, tỉnh Nghệ An, Việt Nam</a:t>
                       </a:r>
-                      <a:endParaRPr lang="en-US" sz="1000" dirty="0"/>
+                      <a:endParaRPr lang="en-US" sz="1050" dirty="0"/>
                     </a:p>
                   </a:txBody>
                   <a:tcPr marL="109728" marR="109728" marT="64008" marB="64008" anchor="ctr">
@@ -31390,7 +31304,7 @@
                   </a:tcPr>
                 </a:tc>
               </a:tr>
-              <a:tr h="384048">
+              <a:tr h="548640">
                 <a:tc>
                   <a:txBody>
                     <a:bodyPr/>
@@ -31400,14 +31314,14 @@
                         <a:buNone/>
                       </a:pPr>
                       <a:r>
-                        <a:rPr lang="en-US" sz="1000" b="1" dirty="0">
+                        <a:rPr lang="en-US" sz="1050" b="1" dirty="0">
                           <a:solidFill>
                             <a:schemeClr val="tx2"/>
                           </a:solidFill>
                         </a:rPr>
                         <a:t>Chủ sở hữu</a:t>
                       </a:r>
-                      <a:endParaRPr lang="en-US" sz="1000" dirty="0"/>
+                      <a:endParaRPr lang="en-US" sz="1050" dirty="0"/>
                     </a:p>
                   </a:txBody>
                   <a:tcPr marL="109728" marR="109728" marT="64008" marB="64008" anchor="ctr">
@@ -31461,14 +31375,14 @@
                         <a:buNone/>
                       </a:pPr>
                       <a:r>
-                        <a:rPr lang="en-US" sz="1000" dirty="0">
+                        <a:rPr lang="en-US" sz="1050" dirty="0">
                           <a:solidFill>
                             <a:schemeClr val="tx1"/>
                           </a:solidFill>
                         </a:rPr>
                         <a:t>Ông HỒ VĂN BÌNH</a:t>
                       </a:r>
-                      <a:endParaRPr lang="en-US" sz="1000" dirty="0"/>
+                      <a:endParaRPr lang="en-US" sz="1050" dirty="0"/>
                     </a:p>
                   </a:txBody>
                   <a:tcPr marL="109728" marR="109728" marT="64008" marB="64008" anchor="ctr">
@@ -31511,7 +31425,7 @@
                   </a:tcPr>
                 </a:tc>
               </a:tr>
-              <a:tr h="384048">
+              <a:tr h="548640">
                 <a:tc>
                   <a:txBody>
                     <a:bodyPr/>
@@ -31521,14 +31435,14 @@
                         <a:buNone/>
                       </a:pPr>
                       <a:r>
-                        <a:rPr lang="en-US" sz="1000" b="1" dirty="0">
+                        <a:rPr lang="en-US" sz="1050" b="1" dirty="0">
                           <a:solidFill>
                             <a:schemeClr val="tx2"/>
                           </a:solidFill>
                         </a:rPr>
                         <a:t>Người đại diện theo pháp luật</a:t>
                       </a:r>
-                      <a:endParaRPr lang="en-US" sz="1000" dirty="0"/>
+                      <a:endParaRPr lang="en-US" sz="1050" dirty="0"/>
                     </a:p>
                   </a:txBody>
                   <a:tcPr marL="109728" marR="109728" marT="64008" marB="64008" anchor="ctr">
@@ -31582,14 +31496,14 @@
                         <a:buNone/>
                       </a:pPr>
                       <a:r>
-                        <a:rPr lang="en-US" sz="1000" dirty="0">
+                        <a:rPr lang="en-US" sz="1050" dirty="0">
                           <a:solidFill>
                             <a:schemeClr val="tx1"/>
                           </a:solidFill>
                         </a:rPr>
                         <a:t>Ông HỒ VĂN BÌNH – Giám đốc</a:t>
                       </a:r>
-                      <a:endParaRPr lang="en-US" sz="1000" dirty="0"/>
+                      <a:endParaRPr lang="en-US" sz="1050" dirty="0"/>
                     </a:p>
                   </a:txBody>
                   <a:tcPr marL="109728" marR="109728" marT="64008" marB="64008" anchor="ctr">
@@ -31632,7 +31546,7 @@
                   </a:tcPr>
                 </a:tc>
               </a:tr>
-              <a:tr h="384048">
+              <a:tr h="548640">
                 <a:tc>
                   <a:txBody>
                     <a:bodyPr/>
@@ -31642,14 +31556,14 @@
                         <a:buNone/>
                       </a:pPr>
                       <a:r>
-                        <a:rPr lang="en-US" sz="1000" b="1" dirty="0">
+                        <a:rPr lang="en-US" sz="1050" b="1" dirty="0">
                           <a:solidFill>
                             <a:schemeClr val="tx2"/>
                           </a:solidFill>
                         </a:rPr>
                         <a:t>Điện thoại</a:t>
                       </a:r>
-                      <a:endParaRPr lang="en-US" sz="1000" dirty="0"/>
+                      <a:endParaRPr lang="en-US" sz="1050" dirty="0"/>
                     </a:p>
                   </a:txBody>
                   <a:tcPr marL="109728" marR="109728" marT="64008" marB="64008" anchor="ctr">
@@ -31703,14 +31617,14 @@
                         <a:buNone/>
                       </a:pPr>
                       <a:r>
-                        <a:rPr lang="en-US" sz="1000" dirty="0">
+                        <a:rPr lang="en-US" sz="1050" dirty="0">
                           <a:solidFill>
                             <a:schemeClr val="tx1"/>
                           </a:solidFill>
                         </a:rPr>
                         <a:t>0984 586 089</a:t>
                       </a:r>
-                      <a:endParaRPr lang="en-US" sz="1000" dirty="0"/>
+                      <a:endParaRPr lang="en-US" sz="1050" dirty="0"/>
                     </a:p>
                   </a:txBody>
                   <a:tcPr marL="109728" marR="109728" marT="64008" marB="64008" anchor="ctr">
@@ -31753,7 +31667,7 @@
                   </a:tcPr>
                 </a:tc>
               </a:tr>
-              <a:tr h="384048">
+              <a:tr h="548640">
                 <a:tc>
                   <a:txBody>
                     <a:bodyPr/>
@@ -31763,14 +31677,14 @@
                         <a:buNone/>
                       </a:pPr>
                       <a:r>
-                        <a:rPr lang="en-US" sz="1000" b="1" dirty="0">
+                        <a:rPr lang="en-US" sz="1050" b="1" dirty="0">
                           <a:solidFill>
                             <a:schemeClr val="tx2"/>
                           </a:solidFill>
                         </a:rPr>
                         <a:t>Email</a:t>
                       </a:r>
-                      <a:endParaRPr lang="en-US" sz="1000" dirty="0"/>
+                      <a:endParaRPr lang="en-US" sz="1050" dirty="0"/>
                     </a:p>
                   </a:txBody>
                   <a:tcPr marL="109728" marR="109728" marT="64008" marB="64008" anchor="ctr">
@@ -31824,14 +31738,14 @@
                         <a:buNone/>
                       </a:pPr>
                       <a:r>
-                        <a:rPr lang="en-US" sz="1000" dirty="0">
+                        <a:rPr lang="en-US" sz="1050" dirty="0">
                           <a:solidFill>
                             <a:schemeClr val="tx1"/>
                           </a:solidFill>
                         </a:rPr>
                         <a:t>hobinh150589@gmail.com</a:t>
                       </a:r>
-                      <a:endParaRPr lang="en-US" sz="1000" dirty="0"/>
+                      <a:endParaRPr lang="en-US" sz="1050" dirty="0"/>
                     </a:p>
                   </a:txBody>
                   <a:tcPr marL="109728" marR="109728" marT="64008" marB="64008" anchor="ctr">
@@ -31886,7 +31800,7 @@
         </p:nvSpPr>
         <p:spPr>
           <a:xfrm>
-            <a:off x="502920" y="5532120"/>
+            <a:off x="502920" y="6949440"/>
             <a:ext cx="6556248" cy="228600"/>
           </a:xfrm>
           <a:prstGeom prst="rect">
@@ -31911,458 +31825,26 @@
                 <a:ea typeface="Arial" pitchFamily="34" charset="-122"/>
                 <a:cs typeface="Arial" pitchFamily="34" charset="-120"/>
               </a:rPr>
-              <a:t>THÔNG TIN TÀI KHOẢN</a:t>
+              <a:t>LĨNH VỰC HOẠT ĐỘNG CHÍNH</a:t>
             </a:r>
             <a:endParaRPr lang="en-US" sz="900" dirty="0"/>
           </a:p>
         </p:txBody>
       </p:sp>
-      <p:graphicFrame>
-        <p:nvGraphicFramePr>
-          <p:cNvPr id="13" name="Table 1"/>
-          <p:cNvGraphicFramePr>
-            <a:graphicFrameLocks noGrp="1"/>
-          </p:cNvGraphicFramePr>
-          <p:nvPr>
-            <p:extLst>
-              <p:ext uri="{D42A27DB-BD31-4B8C-83A1-F6EECF244321}">
-                <p14:modId xmlns:p14="http://schemas.microsoft.com/office/powerpoint/2010/main" val="1579011935"/>
-              </p:ext>
-            </p:extLst>
-          </p:nvPr>
-        </p:nvGraphicFramePr>
-        <p:xfrm>
-          <a:off x="502920" y="5806440"/>
-          <a:ext cx="6556248" cy="914400"/>
-        </p:xfrm>
-        <a:graphic>
-          <a:graphicData uri="http://schemas.openxmlformats.org/drawingml/2006/table">
-            <a:tbl>
-              <a:tblPr/>
-              <a:tblGrid>
-                <a:gridCol w="2194560"/>
-                <a:gridCol w="4361688"/>
-              </a:tblGrid>
-              <a:tr h="384048">
-                <a:tc>
-                  <a:txBody>
-                    <a:bodyPr/>
-                    <a:lstStyle/>
-                    <a:p>
-                      <a:pPr indent="0" marL="0">
-                        <a:buNone/>
-                      </a:pPr>
-                      <a:r>
-                        <a:rPr lang="en-US" sz="1000" b="1" dirty="0">
-                          <a:solidFill>
-                            <a:schemeClr val="bg1"/>
-                          </a:solidFill>
-                        </a:rPr>
-                        <a:t>Số tài khoản</a:t>
-                      </a:r>
-                      <a:endParaRPr lang="en-US" sz="1000" dirty="0"/>
-                    </a:p>
-                  </a:txBody>
-                  <a:tcPr marL="109728" marR="109728" marT="64008" marB="64008" anchor="ctr">
-                    <a:lnL w="9525" cap="flat" cmpd="sng" algn="ctr">
-                      <a:solidFill>
-                        <a:srgbClr val="C9D5E3"/>
-                      </a:solidFill>
-                      <a:prstDash val="solid"/>
-                      <a:round/>
-                      <a:headEnd type="none" w="med" len="med"/>
-                      <a:tailEnd type="none" w="med" len="med"/>
-                    </a:lnL>
-                    <a:lnR w="9525" cap="flat" cmpd="sng" algn="ctr">
-                      <a:solidFill>
-                        <a:srgbClr val="C9D5E3"/>
-                      </a:solidFill>
-                      <a:prstDash val="solid"/>
-                      <a:round/>
-                      <a:headEnd type="none" w="med" len="med"/>
-                      <a:tailEnd type="none" w="med" len="med"/>
-                    </a:lnR>
-                    <a:lnT w="9525" cap="flat" cmpd="sng" algn="ctr">
-                      <a:solidFill>
-                        <a:srgbClr val="C9D5E3"/>
-                      </a:solidFill>
-                      <a:prstDash val="solid"/>
-                      <a:round/>
-                      <a:headEnd type="none" w="med" len="med"/>
-                      <a:tailEnd type="none" w="med" len="med"/>
-                    </a:lnT>
-                    <a:lnB w="9525" cap="flat" cmpd="sng" algn="ctr">
-                      <a:solidFill>
-                        <a:srgbClr val="C9D5E3"/>
-                      </a:solidFill>
-                      <a:prstDash val="solid"/>
-                      <a:round/>
-                      <a:headEnd type="none" w="med" len="med"/>
-                      <a:tailEnd type="none" w="med" len="med"/>
-                    </a:lnB>
-                    <a:solidFill>
-                      <a:schemeClr val="tx2"/>
-                    </a:solidFill>
-                  </a:tcPr>
-                </a:tc>
-                <a:tc>
-                  <a:txBody>
-                    <a:bodyPr/>
-                    <a:lstStyle/>
-                    <a:p>
-                      <a:pPr indent="0" marL="0">
-                        <a:buNone/>
-                      </a:pPr>
-                      <a:r>
-                        <a:rPr lang="en-US" sz="1000" b="1" dirty="0">
-                          <a:solidFill>
-                            <a:schemeClr val="tx1"/>
-                          </a:solidFill>
-                        </a:rPr>
-                        <a:t>1066217478</a:t>
-                      </a:r>
-                      <a:endParaRPr lang="en-US" sz="1000" dirty="0"/>
-                    </a:p>
-                  </a:txBody>
-                  <a:tcPr marL="109728" marR="109728" marT="64008" marB="64008" anchor="ctr">
-                    <a:lnL w="9525" cap="flat" cmpd="sng" algn="ctr">
-                      <a:solidFill>
-                        <a:srgbClr val="C9D5E3"/>
-                      </a:solidFill>
-                      <a:prstDash val="solid"/>
-                      <a:round/>
-                      <a:headEnd type="none" w="med" len="med"/>
-                      <a:tailEnd type="none" w="med" len="med"/>
-                    </a:lnL>
-                    <a:lnR w="9525" cap="flat" cmpd="sng" algn="ctr">
-                      <a:solidFill>
-                        <a:srgbClr val="C9D5E3"/>
-                      </a:solidFill>
-                      <a:prstDash val="solid"/>
-                      <a:round/>
-                      <a:headEnd type="none" w="med" len="med"/>
-                      <a:tailEnd type="none" w="med" len="med"/>
-                    </a:lnR>
-                    <a:lnT w="9525" cap="flat" cmpd="sng" algn="ctr">
-                      <a:solidFill>
-                        <a:srgbClr val="C9D5E3"/>
-                      </a:solidFill>
-                      <a:prstDash val="solid"/>
-                      <a:round/>
-                      <a:headEnd type="none" w="med" len="med"/>
-                      <a:tailEnd type="none" w="med" len="med"/>
-                    </a:lnT>
-                    <a:lnB w="9525" cap="flat" cmpd="sng" algn="ctr">
-                      <a:solidFill>
-                        <a:srgbClr val="C9D5E3"/>
-                      </a:solidFill>
-                      <a:prstDash val="solid"/>
-                      <a:round/>
-                      <a:headEnd type="none" w="med" len="med"/>
-                      <a:tailEnd type="none" w="med" len="med"/>
-                    </a:lnB>
-                  </a:tcPr>
-                </a:tc>
-              </a:tr>
-              <a:tr h="384048">
-                <a:tc>
-                  <a:txBody>
-                    <a:bodyPr/>
-                    <a:lstStyle/>
-                    <a:p>
-                      <a:pPr indent="0" marL="0">
-                        <a:buNone/>
-                      </a:pPr>
-                      <a:r>
-                        <a:rPr lang="en-US" sz="1000" b="1" dirty="0">
-                          <a:solidFill>
-                            <a:schemeClr val="bg1"/>
-                          </a:solidFill>
-                        </a:rPr>
-                        <a:t>Tên tài khoản</a:t>
-                      </a:r>
-                      <a:endParaRPr lang="en-US" sz="1000" dirty="0"/>
-                    </a:p>
-                  </a:txBody>
-                  <a:tcPr marL="109728" marR="109728" marT="64008" marB="64008" anchor="ctr">
-                    <a:lnL w="9525" cap="flat" cmpd="sng" algn="ctr">
-                      <a:solidFill>
-                        <a:srgbClr val="C9D5E3"/>
-                      </a:solidFill>
-                      <a:prstDash val="solid"/>
-                      <a:round/>
-                      <a:headEnd type="none" w="med" len="med"/>
-                      <a:tailEnd type="none" w="med" len="med"/>
-                    </a:lnL>
-                    <a:lnR w="9525" cap="flat" cmpd="sng" algn="ctr">
-                      <a:solidFill>
-                        <a:srgbClr val="C9D5E3"/>
-                      </a:solidFill>
-                      <a:prstDash val="solid"/>
-                      <a:round/>
-                      <a:headEnd type="none" w="med" len="med"/>
-                      <a:tailEnd type="none" w="med" len="med"/>
-                    </a:lnR>
-                    <a:lnT w="9525" cap="flat" cmpd="sng" algn="ctr">
-                      <a:solidFill>
-                        <a:srgbClr val="C9D5E3"/>
-                      </a:solidFill>
-                      <a:prstDash val="solid"/>
-                      <a:round/>
-                      <a:headEnd type="none" w="med" len="med"/>
-                      <a:tailEnd type="none" w="med" len="med"/>
-                    </a:lnT>
-                    <a:lnB w="9525" cap="flat" cmpd="sng" algn="ctr">
-                      <a:solidFill>
-                        <a:srgbClr val="C9D5E3"/>
-                      </a:solidFill>
-                      <a:prstDash val="solid"/>
-                      <a:round/>
-                      <a:headEnd type="none" w="med" len="med"/>
-                      <a:tailEnd type="none" w="med" len="med"/>
-                    </a:lnB>
-                    <a:solidFill>
-                      <a:schemeClr val="tx2"/>
-                    </a:solidFill>
-                  </a:tcPr>
-                </a:tc>
-                <a:tc>
-                  <a:txBody>
-                    <a:bodyPr/>
-                    <a:lstStyle/>
-                    <a:p>
-                      <a:pPr indent="0" marL="0">
-                        <a:buNone/>
-                      </a:pPr>
-                      <a:r>
-                        <a:rPr lang="en-US" sz="1000" dirty="0">
-                          <a:solidFill>
-                            <a:schemeClr val="tx1"/>
-                          </a:solidFill>
-                        </a:rPr>
-                        <a:t>CT TNHH KY THUAT CONG TRINH BLT</a:t>
-                      </a:r>
-                      <a:endParaRPr lang="en-US" sz="1000" dirty="0"/>
-                    </a:p>
-                  </a:txBody>
-                  <a:tcPr marL="109728" marR="109728" marT="64008" marB="64008" anchor="ctr">
-                    <a:lnL w="9525" cap="flat" cmpd="sng" algn="ctr">
-                      <a:solidFill>
-                        <a:srgbClr val="C9D5E3"/>
-                      </a:solidFill>
-                      <a:prstDash val="solid"/>
-                      <a:round/>
-                      <a:headEnd type="none" w="med" len="med"/>
-                      <a:tailEnd type="none" w="med" len="med"/>
-                    </a:lnL>
-                    <a:lnR w="9525" cap="flat" cmpd="sng" algn="ctr">
-                      <a:solidFill>
-                        <a:srgbClr val="C9D5E3"/>
-                      </a:solidFill>
-                      <a:prstDash val="solid"/>
-                      <a:round/>
-                      <a:headEnd type="none" w="med" len="med"/>
-                      <a:tailEnd type="none" w="med" len="med"/>
-                    </a:lnR>
-                    <a:lnT w="9525" cap="flat" cmpd="sng" algn="ctr">
-                      <a:solidFill>
-                        <a:srgbClr val="C9D5E3"/>
-                      </a:solidFill>
-                      <a:prstDash val="solid"/>
-                      <a:round/>
-                      <a:headEnd type="none" w="med" len="med"/>
-                      <a:tailEnd type="none" w="med" len="med"/>
-                    </a:lnT>
-                    <a:lnB w="9525" cap="flat" cmpd="sng" algn="ctr">
-                      <a:solidFill>
-                        <a:srgbClr val="C9D5E3"/>
-                      </a:solidFill>
-                      <a:prstDash val="solid"/>
-                      <a:round/>
-                      <a:headEnd type="none" w="med" len="med"/>
-                      <a:tailEnd type="none" w="med" len="med"/>
-                    </a:lnB>
-                  </a:tcPr>
-                </a:tc>
-              </a:tr>
-              <a:tr h="384048">
-                <a:tc>
-                  <a:txBody>
-                    <a:bodyPr/>
-                    <a:lstStyle/>
-                    <a:p>
-                      <a:pPr indent="0" marL="0">
-                        <a:buNone/>
-                      </a:pPr>
-                      <a:r>
-                        <a:rPr lang="en-US" sz="1000" b="1" dirty="0">
-                          <a:solidFill>
-                            <a:schemeClr val="bg1"/>
-                          </a:solidFill>
-                        </a:rPr>
-                        <a:t>Ngân hàng</a:t>
-                      </a:r>
-                      <a:endParaRPr lang="en-US" sz="1000" dirty="0"/>
-                    </a:p>
-                  </a:txBody>
-                  <a:tcPr marL="109728" marR="109728" marT="64008" marB="64008" anchor="ctr">
-                    <a:lnL w="9525" cap="flat" cmpd="sng" algn="ctr">
-                      <a:solidFill>
-                        <a:srgbClr val="C9D5E3"/>
-                      </a:solidFill>
-                      <a:prstDash val="solid"/>
-                      <a:round/>
-                      <a:headEnd type="none" w="med" len="med"/>
-                      <a:tailEnd type="none" w="med" len="med"/>
-                    </a:lnL>
-                    <a:lnR w="9525" cap="flat" cmpd="sng" algn="ctr">
-                      <a:solidFill>
-                        <a:srgbClr val="C9D5E3"/>
-                      </a:solidFill>
-                      <a:prstDash val="solid"/>
-                      <a:round/>
-                      <a:headEnd type="none" w="med" len="med"/>
-                      <a:tailEnd type="none" w="med" len="med"/>
-                    </a:lnR>
-                    <a:lnT w="9525" cap="flat" cmpd="sng" algn="ctr">
-                      <a:solidFill>
-                        <a:srgbClr val="C9D5E3"/>
-                      </a:solidFill>
-                      <a:prstDash val="solid"/>
-                      <a:round/>
-                      <a:headEnd type="none" w="med" len="med"/>
-                      <a:tailEnd type="none" w="med" len="med"/>
-                    </a:lnT>
-                    <a:lnB w="9525" cap="flat" cmpd="sng" algn="ctr">
-                      <a:solidFill>
-                        <a:srgbClr val="C9D5E3"/>
-                      </a:solidFill>
-                      <a:prstDash val="solid"/>
-                      <a:round/>
-                      <a:headEnd type="none" w="med" len="med"/>
-                      <a:tailEnd type="none" w="med" len="med"/>
-                    </a:lnB>
-                    <a:solidFill>
-                      <a:schemeClr val="tx2"/>
-                    </a:solidFill>
-                  </a:tcPr>
-                </a:tc>
-                <a:tc>
-                  <a:txBody>
-                    <a:bodyPr/>
-                    <a:lstStyle/>
-                    <a:p>
-                      <a:pPr indent="0" marL="0">
-                        <a:buNone/>
-                      </a:pPr>
-                      <a:r>
-                        <a:rPr lang="en-US" sz="1000" dirty="0">
-                          <a:solidFill>
-                            <a:schemeClr val="tx1"/>
-                          </a:solidFill>
-                        </a:rPr>
-                        <a:t>Ngân hàng TMCP Ngoại thương Việt Nam (Vietcombank)</a:t>
-                      </a:r>
-                      <a:endParaRPr lang="en-US" sz="1000" dirty="0"/>
-                    </a:p>
-                  </a:txBody>
-                  <a:tcPr marL="109728" marR="109728" marT="64008" marB="64008" anchor="ctr">
-                    <a:lnL w="9525" cap="flat" cmpd="sng" algn="ctr">
-                      <a:solidFill>
-                        <a:srgbClr val="C9D5E3"/>
-                      </a:solidFill>
-                      <a:prstDash val="solid"/>
-                      <a:round/>
-                      <a:headEnd type="none" w="med" len="med"/>
-                      <a:tailEnd type="none" w="med" len="med"/>
-                    </a:lnL>
-                    <a:lnR w="9525" cap="flat" cmpd="sng" algn="ctr">
-                      <a:solidFill>
-                        <a:srgbClr val="C9D5E3"/>
-                      </a:solidFill>
-                      <a:prstDash val="solid"/>
-                      <a:round/>
-                      <a:headEnd type="none" w="med" len="med"/>
-                      <a:tailEnd type="none" w="med" len="med"/>
-                    </a:lnR>
-                    <a:lnT w="9525" cap="flat" cmpd="sng" algn="ctr">
-                      <a:solidFill>
-                        <a:srgbClr val="C9D5E3"/>
-                      </a:solidFill>
-                      <a:prstDash val="solid"/>
-                      <a:round/>
-                      <a:headEnd type="none" w="med" len="med"/>
-                      <a:tailEnd type="none" w="med" len="med"/>
-                    </a:lnT>
-                    <a:lnB w="9525" cap="flat" cmpd="sng" algn="ctr">
-                      <a:solidFill>
-                        <a:srgbClr val="C9D5E3"/>
-                      </a:solidFill>
-                      <a:prstDash val="solid"/>
-                      <a:round/>
-                      <a:headEnd type="none" w="med" len="med"/>
-                      <a:tailEnd type="none" w="med" len="med"/>
-                    </a:lnB>
-                  </a:tcPr>
-                </a:tc>
-              </a:tr>
-            </a:tbl>
-          </a:graphicData>
-        </a:graphic>
-      </p:graphicFrame>
-      <p:sp>
-        <p:nvSpPr>
-          <p:cNvPr id="7" name="Text 3"/>
-          <p:cNvSpPr txBox="1"/>
-          <p:nvPr/>
-        </p:nvSpPr>
-        <p:spPr>
-          <a:xfrm>
-            <a:off x="502920" y="7269480"/>
-            <a:ext cx="6556248" cy="228600"/>
-          </a:xfrm>
-          <a:prstGeom prst="rect">
-            <a:avLst/>
-          </a:prstGeom>
-          <a:noFill/>
-          <a:ln/>
-        </p:spPr>
-        <p:txBody>
-          <a:bodyPr wrap="square" lIns="0" tIns="0" rIns="0" bIns="0" rtlCol="0" anchor="ctr"/>
-          <a:lstStyle/>
-          <a:p>
-            <a:pPr indent="0" marL="0">
-              <a:buNone/>
-            </a:pPr>
-            <a:r>
-              <a:rPr lang="en-US" sz="900" b="1" spc="200" kern="0" dirty="0">
-                <a:solidFill>
-                  <a:schemeClr val="accent1"/>
-                </a:solidFill>
-                <a:latin typeface="Arial" pitchFamily="34" charset="0"/>
-                <a:ea typeface="Arial" pitchFamily="34" charset="-122"/>
-                <a:cs typeface="Arial" pitchFamily="34" charset="-120"/>
-              </a:rPr>
-              <a:t>LĨNH VỰC HOẠT ĐỘNG CHÍNH</a:t>
-            </a:r>
-            <a:endParaRPr lang="en-US" sz="900" dirty="0"/>
-          </a:p>
-        </p:txBody>
-      </p:sp>
-      <p:sp>
-        <p:nvSpPr>
-          <p:cNvPr id="8" name="Shape 4"/>
+      <p:sp>
+        <p:nvSpPr>
+          <p:cNvPr id="6" name="Shape 3"/>
           <p:cNvSpPr/>
           <p:nvPr/>
         </p:nvSpPr>
         <p:spPr>
           <a:xfrm>
-            <a:off x="502920" y="7543800"/>
-            <a:ext cx="6556248" cy="2103120"/>
+            <a:off x="502920" y="7223760"/>
+            <a:ext cx="6556248" cy="2377440"/>
           </a:xfrm>
           <a:prstGeom prst="roundRect">
             <a:avLst>
-              <a:gd name="adj" fmla="val 3478"/>
+              <a:gd name="adj" fmla="val 3077"/>
             </a:avLst>
           </a:prstGeom>
           <a:solidFill>
@@ -32378,113 +31860,113 @@
       </p:sp>
       <p:sp>
         <p:nvSpPr>
-          <p:cNvPr id="9" name="Text 5"/>
-          <p:cNvSpPr txBox="1"/>
-          <p:nvPr/>
-        </p:nvSpPr>
-        <p:spPr>
-          <a:xfrm>
-            <a:off x="731520" y="7680960"/>
-            <a:ext cx="6099048" cy="1874520"/>
-          </a:xfrm>
-          <a:prstGeom prst="rect">
-            <a:avLst/>
-          </a:prstGeom>
-          <a:noFill/>
-          <a:ln/>
-        </p:spPr>
-        <p:txBody>
-          <a:bodyPr wrap="square" lIns="0" tIns="0" rIns="0" bIns="0" rtlCol="0" anchor="t"/>
+          <p:cNvPr id="7" name="Text 4"/>
+          <p:cNvSpPr txBox="1"/>
+          <p:nvPr/>
+        </p:nvSpPr>
+        <p:spPr>
+          <a:xfrm>
+            <a:off x="777240" y="7406640"/>
+            <a:ext cx="6007608" cy="2057400"/>
+          </a:xfrm>
+          <a:prstGeom prst="rect">
+            <a:avLst/>
+          </a:prstGeom>
+          <a:noFill/>
+          <a:ln/>
+        </p:spPr>
+        <p:txBody>
+          <a:bodyPr wrap="square" lIns="0" tIns="0" rIns="0" bIns="0" rtlCol="0" anchor="ctr"/>
           <a:lstStyle/>
           <a:p>
             <a:pPr marL="152400" indent="-152400">
               <a:spcAft>
-                <a:spcPts val="500"/>
+                <a:spcPts val="900"/>
               </a:spcAft>
               <a:buSzPct val="100000"/>
               <a:buChar char="•"/>
             </a:pPr>
             <a:r>
-              <a:rPr lang="en-US" sz="1000" dirty="0">
+              <a:rPr lang="en-US" sz="1100" dirty="0">
                 <a:solidFill>
                   <a:schemeClr val="tx1"/>
                 </a:solidFill>
               </a:rPr>
               <a:t>Lắp đặt hệ thống điện động lực, điện chiếu sáng, tủ điện, máng – thang cáp</a:t>
             </a:r>
-            <a:endParaRPr lang="en-US" sz="1000" dirty="0"/>
+            <a:endParaRPr lang="en-US" sz="1100" dirty="0"/>
           </a:p>
           <a:p>
             <a:pPr marL="152400" indent="-152400">
               <a:spcAft>
-                <a:spcPts val="500"/>
+                <a:spcPts val="900"/>
               </a:spcAft>
               <a:buSzPct val="100000"/>
               <a:buChar char="•"/>
             </a:pPr>
             <a:r>
-              <a:rPr lang="en-US" sz="1000" dirty="0">
+              <a:rPr lang="en-US" sz="1100" dirty="0">
                 <a:solidFill>
                   <a:schemeClr val="tx1"/>
                 </a:solidFill>
               </a:rPr>
               <a:t>Lắp đặt hệ thống cấp, thoát nước công trình dân dụng và công nghiệp</a:t>
             </a:r>
-            <a:endParaRPr lang="en-US" sz="1000" dirty="0"/>
+            <a:endParaRPr lang="en-US" sz="1100" dirty="0"/>
           </a:p>
           <a:p>
             <a:pPr marL="152400" indent="-152400">
               <a:spcAft>
-                <a:spcPts val="500"/>
+                <a:spcPts val="900"/>
               </a:spcAft>
               <a:buSzPct val="100000"/>
               <a:buChar char="•"/>
             </a:pPr>
             <a:r>
-              <a:rPr lang="en-US" sz="1000" dirty="0">
+              <a:rPr lang="en-US" sz="1100" dirty="0">
                 <a:solidFill>
                   <a:schemeClr val="tx1"/>
                 </a:solidFill>
               </a:rPr>
               <a:t>Lắp đặt hệ thống đường ống công nghệ, hút sương dầu – lọc khí nhà xưởng</a:t>
             </a:r>
-            <a:endParaRPr lang="en-US" sz="1000" dirty="0"/>
+            <a:endParaRPr lang="en-US" sz="1100" dirty="0"/>
           </a:p>
           <a:p>
             <a:pPr marL="152400" indent="-152400">
               <a:spcAft>
-                <a:spcPts val="500"/>
+                <a:spcPts val="900"/>
               </a:spcAft>
               <a:buSzPct val="100000"/>
               <a:buChar char="•"/>
             </a:pPr>
             <a:r>
-              <a:rPr lang="en-US" sz="1000" dirty="0">
+              <a:rPr lang="en-US" sz="1100" dirty="0">
                 <a:solidFill>
                   <a:schemeClr val="tx1"/>
                 </a:solidFill>
               </a:rPr>
               <a:t>Lắp đặt máy móc, thiết bị công nghiệp: bơm, bồn lọc, thiết bị xử lý nước</a:t>
             </a:r>
-            <a:endParaRPr lang="en-US" sz="1000" dirty="0"/>
+            <a:endParaRPr lang="en-US" sz="1100" dirty="0"/>
           </a:p>
           <a:p>
             <a:pPr marL="152400" indent="-152400">
               <a:spcAft>
-                <a:spcPts val="500"/>
+                <a:spcPts val="900"/>
               </a:spcAft>
               <a:buSzPct val="100000"/>
               <a:buChar char="•"/>
             </a:pPr>
             <a:r>
-              <a:rPr lang="en-US" sz="1000" dirty="0">
+              <a:rPr lang="en-US" sz="1100" dirty="0">
                 <a:solidFill>
                   <a:schemeClr val="tx1"/>
                 </a:solidFill>
               </a:rPr>
               <a:t>Bảo trì, sửa chữa, cải tạo hệ thống kỹ thuật công trình</a:t>
             </a:r>
-            <a:endParaRPr lang="en-US" sz="1000" dirty="0"/>
+            <a:endParaRPr lang="en-US" sz="1100" dirty="0"/>
           </a:p>
         </p:txBody>
       </p:sp>

--- a/ho-so-nang-luc-BLT/HO_SO_NANG_LUC_BLT.pptx
+++ b/ho-so-nang-luc-BLT/HO_SO_NANG_LUC_BLT.pptx
@@ -132,14 +132,14 @@
   <p:extLst>
     <p:ext uri="{521415D9-36F7-43E2-AB2F-B90AF26B5E84}">
       <p14:sectionLst xmlns:p14="http://schemas.microsoft.com/office/powerpoint/2010/main">
-        <p14:section name="Mở đầu" id="{613efe4e-952f-3095-7e97-1634b52ef755}">
+        <p14:section name="Mở đầu" id="{419ec03f-f260-cf16-5d88-46e41138843f}">
           <p14:sldIdLst>
             <p14:sldId id="256"/>
             <p14:sldId id="257"/>
             <p14:sldId id="258"/>
           </p14:sldIdLst>
         </p14:section>
-        <p14:section name="01 Tổng quan" id="{8e56e4c9-61ee-49bc-4beb-dbbc7f943dc0}">
+        <p14:section name="01 Tổng quan" id="{d002e851-f30f-00dc-24d9-438d18ca9cea}">
           <p14:sldIdLst>
             <p14:sldId id="259"/>
             <p14:sldId id="260"/>
@@ -148,39 +148,39 @@
             <p14:sldId id="263"/>
           </p14:sldIdLst>
         </p14:section>
-        <p14:section name="02 Điện nước công trình" id="{37722329-1041-1cc5-0805-236916ab799a}">
+        <p14:section name="02 Điện nước công trình" id="{99e69f19-c0ca-71f0-f694-47a470348328}">
           <p14:sldIdLst>
             <p14:sldId id="264"/>
             <p14:sldId id="265"/>
             <p14:sldId id="266"/>
           </p14:sldIdLst>
         </p14:section>
-        <p14:section name="03 Hút sương dầu nhà xưởng" id="{015fb9f1-e532-bee4-d21c-4fd07488764a}">
+        <p14:section name="03 Hút sương dầu nhà xưởng" id="{36c424ea-5e63-1ea8-0593-a4f41ea623ea}">
           <p14:sldIdLst>
             <p14:sldId id="267"/>
             <p14:sldId id="268"/>
             <p14:sldId id="269"/>
           </p14:sldIdLst>
         </p14:section>
-        <p14:section name="04 Bơm &amp; xử lý nước" id="{c7c0d1fe-ceb6-af1f-f8fe-c1155bb0c9c6}">
+        <p14:section name="04 Bơm &amp; xử lý nước" id="{9cc694c4-0d90-1247-b717-b70bc2409ef4}">
           <p14:sldIdLst>
             <p14:sldId id="270"/>
           </p14:sldIdLst>
         </p14:section>
-        <p14:section name="05 Quản trị dự án" id="{d35e3d02-8705-7704-8ed6-3c0d7252a437}">
+        <p14:section name="05 Quản trị dự án" id="{f3c0da2a-10d8-1778-b8c6-d84e825d457d}">
           <p14:sldIdLst>
             <p14:sldId id="271"/>
             <p14:sldId id="272"/>
             <p14:sldId id="273"/>
           </p14:sldIdLst>
         </p14:section>
-        <p14:section name="06 Nguồn lực" id="{c9b8371a-35fa-09ca-2d58-84ecdaefe53d}">
+        <p14:section name="06 Nguồn lực" id="{4a67c860-a158-45d6-b6be-eef399dc1dcc}">
           <p14:sldIdLst>
             <p14:sldId id="274"/>
             <p14:sldId id="275"/>
           </p14:sldIdLst>
         </p14:section>
-        <p14:section name="07 Công trình tiêu biểu" id="{e053bfed-3ae1-1ffc-b22a-97aefd90ca60}">
+        <p14:section name="07 Công trình tiêu biểu" id="{4fab3385-d8d9-446d-c207-cbe945f0e5d9}">
           <p14:sldIdLst>
             <p14:sldId id="276"/>
             <p14:sldId id="277"/>
@@ -188,7 +188,7 @@
             <p14:sldId id="279"/>
           </p14:sldIdLst>
         </p14:section>
-        <p14:section name="08 Cam kết &amp; liên hệ" id="{7cf6ea2b-aedc-a59f-f229-fb5fc4930322}">
+        <p14:section name="08 Cam kết &amp; liên hệ" id="{ead55641-63a9-0b1a-0477-e5e0c0cae380}">
           <p14:sldIdLst>
             <p14:sldId id="280"/>
             <p14:sldId id="281"/>
@@ -29318,7 +29318,7 @@
                   <a:schemeClr val="accent3"/>
                 </a:solidFill>
               </a:rPr>
-              <a:t>Nghệ An, tháng 10 năm 2026</a:t>
+              <a:t>Nghệ An, ngày 10 tháng 10 năm 2026</a:t>
             </a:r>
             <a:endParaRPr lang="en-US" sz="1050" dirty="0"/>
           </a:p>

--- a/ho-so-nang-luc-BLT/HO_SO_NANG_LUC_BLT.pptx
+++ b/ho-so-nang-luc-BLT/HO_SO_NANG_LUC_BLT.pptx
@@ -132,14 +132,14 @@
   <p:extLst>
     <p:ext uri="{521415D9-36F7-43E2-AB2F-B90AF26B5E84}">
       <p14:sectionLst xmlns:p14="http://schemas.microsoft.com/office/powerpoint/2010/main">
-        <p14:section name="Mở đầu" id="{419ec03f-f260-cf16-5d88-46e41138843f}">
+        <p14:section name="Mở đầu" id="{a14ae725-637d-955e-2323-4c04a89fde60}">
           <p14:sldIdLst>
             <p14:sldId id="256"/>
             <p14:sldId id="257"/>
             <p14:sldId id="258"/>
           </p14:sldIdLst>
         </p14:section>
-        <p14:section name="01 Tổng quan" id="{d002e851-f30f-00dc-24d9-438d18ca9cea}">
+        <p14:section name="01 Tổng quan" id="{9d8464c7-83f6-8261-1fdf-d7c0cc37bbf6}">
           <p14:sldIdLst>
             <p14:sldId id="259"/>
             <p14:sldId id="260"/>
@@ -148,39 +148,39 @@
             <p14:sldId id="263"/>
           </p14:sldIdLst>
         </p14:section>
-        <p14:section name="02 Điện nước công trình" id="{99e69f19-c0ca-71f0-f694-47a470348328}">
+        <p14:section name="02 Điện nước công trình" id="{e03eb78f-b98f-55c8-77a5-70375bc8803e}">
           <p14:sldIdLst>
             <p14:sldId id="264"/>
             <p14:sldId id="265"/>
             <p14:sldId id="266"/>
           </p14:sldIdLst>
         </p14:section>
-        <p14:section name="03 Hút sương dầu nhà xưởng" id="{36c424ea-5e63-1ea8-0593-a4f41ea623ea}">
+        <p14:section name="03 Hút sương dầu nhà xưởng" id="{5061edfa-264d-0006-c5cb-f0a94aa36e97}">
           <p14:sldIdLst>
             <p14:sldId id="267"/>
             <p14:sldId id="268"/>
             <p14:sldId id="269"/>
           </p14:sldIdLst>
         </p14:section>
-        <p14:section name="04 Bơm &amp; xử lý nước" id="{9cc694c4-0d90-1247-b717-b70bc2409ef4}">
+        <p14:section name="04 Bơm &amp; xử lý nước" id="{1a4923f0-22fb-91e7-999a-8c8078be4a88}">
           <p14:sldIdLst>
             <p14:sldId id="270"/>
           </p14:sldIdLst>
         </p14:section>
-        <p14:section name="05 Quản trị dự án" id="{f3c0da2a-10d8-1778-b8c6-d84e825d457d}">
+        <p14:section name="05 Quản trị dự án" id="{f4075100-6fd8-f3f4-9ca6-d866e56f6d90}">
           <p14:sldIdLst>
             <p14:sldId id="271"/>
             <p14:sldId id="272"/>
             <p14:sldId id="273"/>
           </p14:sldIdLst>
         </p14:section>
-        <p14:section name="06 Nguồn lực" id="{4a67c860-a158-45d6-b6be-eef399dc1dcc}">
+        <p14:section name="06 Nguồn lực" id="{8dd10e50-6234-280e-4398-4b391869af30}">
           <p14:sldIdLst>
             <p14:sldId id="274"/>
             <p14:sldId id="275"/>
           </p14:sldIdLst>
         </p14:section>
-        <p14:section name="07 Công trình tiêu biểu" id="{4fab3385-d8d9-446d-c207-cbe945f0e5d9}">
+        <p14:section name="07 Công trình tiêu biểu" id="{4294c1b5-96d0-3a70-8007-0e0c9f2cb4ed}">
           <p14:sldIdLst>
             <p14:sldId id="276"/>
             <p14:sldId id="277"/>
@@ -188,7 +188,7 @@
             <p14:sldId id="279"/>
           </p14:sldIdLst>
         </p14:section>
-        <p14:section name="08 Cam kết &amp; liên hệ" id="{ead55641-63a9-0b1a-0477-e5e0c0cae380}">
+        <p14:section name="08 Cam kết &amp; liên hệ" id="{cf9b5c2e-8f32-63eb-e2ed-a6d93c2b7b50}">
           <p14:sldIdLst>
             <p14:sldId id="280"/>
             <p14:sldId id="281"/>
@@ -29222,7 +29222,7 @@
                   <a:schemeClr val="tx1"/>
                 </a:solidFill>
               </a:rPr>
-              <a:t>BLT là đơn vị thi công chuyên sâu về hệ thống kỹ thuật công trình: điện, cấp thoát nước, đường ống công nghệ, hút sương dầu – lọc khí nhà xưởng và bơm – xử lý nước. Đội ngũ 100 người của chúng tôi đang trực tiếp thi công tại Nghệ An, Ninh Bình và Thành phố Huế, từ công trình nhiều tầng đến nhà xưởng sản xuất đang vận hành.</a:t>
+              <a:t>BLT là đơn vị thi công chuyên sâu về hệ thống kỹ thuật công trình: điện, cấp thoát nước, đường ống công nghệ, hút sương dầu – lọc khí nhà xưởng và bơm – xử lý nước. Đội ngũ 100 người của chúng tôi đang trực tiếp thi công tại Nghệ An, Ninh Bình, Quảng Trị và Thành phố Huế, từ công trình nhiều tầng đến nhà xưởng sản xuất đang vận hành.</a:t>
             </a:r>
             <a:endParaRPr lang="en-US" sz="1150" dirty="0"/>
           </a:p>
@@ -29644,7 +29644,7 @@
                 <a:ea typeface="Arial" pitchFamily="34" charset="-122"/>
                 <a:cs typeface="Arial" pitchFamily="34" charset="-120"/>
               </a:rPr>
-              <a:t>4</a:t>
+              <a:t>6</a:t>
             </a:r>
             <a:endParaRPr lang="en-US" sz="3000" dirty="0"/>
           </a:p>
@@ -29716,7 +29716,7 @@
                   <a:schemeClr val="accent4"/>
                 </a:solidFill>
               </a:rPr>
-              <a:t>Điện • Nước • Hút sương dầu • Xử lý nước</a:t>
+              <a:t>Điện • Nước • Hút sương dầu • Xử lý nước • Bảo trì • Giá đỡ thép</a:t>
             </a:r>
             <a:endParaRPr lang="en-US" sz="800" dirty="0"/>
           </a:p>
@@ -29782,7 +29782,7 @@
                 <a:ea typeface="Arial" pitchFamily="34" charset="-122"/>
                 <a:cs typeface="Arial" pitchFamily="34" charset="-120"/>
               </a:rPr>
-              <a:t>3</a:t>
+              <a:t>4</a:t>
             </a:r>
             <a:endParaRPr lang="en-US" sz="3000" dirty="0"/>
           </a:p>
@@ -29854,7 +29854,7 @@
                   <a:schemeClr val="accent4"/>
                 </a:solidFill>
               </a:rPr>
-              <a:t>Nghệ An • Ninh Bình • Huế (2026)</a:t>
+              <a:t>Nghệ An • Ninh Bình • Quảng Trị • Huế</a:t>
             </a:r>
             <a:endParaRPr lang="en-US" sz="800" dirty="0"/>
           </a:p>
@@ -33587,7 +33587,7 @@
                   <a:schemeClr val="tx2"/>
                 </a:solidFill>
               </a:rPr>
-              <a:t>Bốn nhóm giải pháp của BLT</a:t>
+              <a:t>Các nhóm giải pháp chính của BLT</a:t>
             </a:r>
             <a:endParaRPr lang="en-US" sz="2200" dirty="0"/>
           </a:p>

--- a/ho-so-nang-luc-BLT/HO_SO_NANG_LUC_BLT.pptx
+++ b/ho-so-nang-luc-BLT/HO_SO_NANG_LUC_BLT.pptx
@@ -132,14 +132,14 @@
   <p:extLst>
     <p:ext uri="{521415D9-36F7-43E2-AB2F-B90AF26B5E84}">
       <p14:sectionLst xmlns:p14="http://schemas.microsoft.com/office/powerpoint/2010/main">
-        <p14:section name="Mở đầu" id="{a14ae725-637d-955e-2323-4c04a89fde60}">
+        <p14:section name="Mở đầu" id="{49d3efea-e39f-8db8-b7fb-1fb4f0945ccb}">
           <p14:sldIdLst>
             <p14:sldId id="256"/>
             <p14:sldId id="257"/>
             <p14:sldId id="258"/>
           </p14:sldIdLst>
         </p14:section>
-        <p14:section name="01 Tổng quan" id="{9d8464c7-83f6-8261-1fdf-d7c0cc37bbf6}">
+        <p14:section name="01 Tổng quan" id="{55141d92-9a00-bcde-2d00-510db23e9da0}">
           <p14:sldIdLst>
             <p14:sldId id="259"/>
             <p14:sldId id="260"/>
@@ -148,39 +148,39 @@
             <p14:sldId id="263"/>
           </p14:sldIdLst>
         </p14:section>
-        <p14:section name="02 Điện nước công trình" id="{e03eb78f-b98f-55c8-77a5-70375bc8803e}">
+        <p14:section name="02 Điện nước công trình" id="{48d0fbf7-4b20-aa3c-0a70-aa6c2fb48d5c}">
           <p14:sldIdLst>
             <p14:sldId id="264"/>
             <p14:sldId id="265"/>
             <p14:sldId id="266"/>
           </p14:sldIdLst>
         </p14:section>
-        <p14:section name="03 Hút sương dầu nhà xưởng" id="{5061edfa-264d-0006-c5cb-f0a94aa36e97}">
+        <p14:section name="03 Hút sương dầu nhà xưởng" id="{e37bf8aa-0b61-f4ea-63df-4e08b59c727a}">
           <p14:sldIdLst>
             <p14:sldId id="267"/>
             <p14:sldId id="268"/>
             <p14:sldId id="269"/>
           </p14:sldIdLst>
         </p14:section>
-        <p14:section name="04 Bơm &amp; xử lý nước" id="{1a4923f0-22fb-91e7-999a-8c8078be4a88}">
+        <p14:section name="04 Bơm &amp; xử lý nước" id="{f45ff8bc-c6b8-244c-10e3-6a5d68d938e8}">
           <p14:sldIdLst>
             <p14:sldId id="270"/>
           </p14:sldIdLst>
         </p14:section>
-        <p14:section name="05 Quản trị dự án" id="{f4075100-6fd8-f3f4-9ca6-d866e56f6d90}">
+        <p14:section name="05 Quản trị dự án" id="{f0982bf7-788c-b0f3-666f-ba8c429ea89c}">
           <p14:sldIdLst>
             <p14:sldId id="271"/>
             <p14:sldId id="272"/>
             <p14:sldId id="273"/>
           </p14:sldIdLst>
         </p14:section>
-        <p14:section name="06 Nguồn lực" id="{8dd10e50-6234-280e-4398-4b391869af30}">
+        <p14:section name="06 Nguồn lực" id="{074d94a4-5966-dfa0-9a23-7b142ef996c0}">
           <p14:sldIdLst>
             <p14:sldId id="274"/>
             <p14:sldId id="275"/>
           </p14:sldIdLst>
         </p14:section>
-        <p14:section name="07 Công trình tiêu biểu" id="{4294c1b5-96d0-3a70-8007-0e0c9f2cb4ed}">
+        <p14:section name="07 Công trình tiêu biểu" id="{29065056-0f03-b10e-89d4-d54219fefa3c}">
           <p14:sldIdLst>
             <p14:sldId id="276"/>
             <p14:sldId id="277"/>
@@ -188,7 +188,7 @@
             <p14:sldId id="279"/>
           </p14:sldIdLst>
         </p14:section>
-        <p14:section name="08 Cam kết &amp; liên hệ" id="{cf9b5c2e-8f32-63eb-e2ed-a6d93c2b7b50}">
+        <p14:section name="08 Cam kết &amp; liên hệ" id="{a4e55777-32d7-dd83-27b8-3d1364ee524a}">
           <p14:sldIdLst>
             <p14:sldId id="280"/>
             <p14:sldId id="281"/>
@@ -14433,7 +14433,7 @@
                   <a:schemeClr val="accent4"/>
                 </a:solidFill>
               </a:rPr>
-              <a:t>Cán bộ kỹ thuật, chỉ huy công trường và công nhân lành nghề</a:t>
+              <a:t>Kỹ thuật, văn phòng, chỉ huy công trường và công nhân lành nghề</a:t>
             </a:r>
             <a:endParaRPr lang="en-US" sz="950" dirty="0"/>
           </a:p>
@@ -15890,7 +15890,7 @@
                   <a:schemeClr val="tx1"/>
                 </a:solidFill>
               </a:rPr>
-              <a:t>Đội ngũ 100 người gồm cán bộ kỹ thuật, chỉ huy công trường và công nhân lành nghề, huy động linh hoạt theo tiến độ</a:t>
+              <a:t>Đội ngũ 100 người gồm cán bộ kỹ thuật, nhân viên văn phòng, chỉ huy công trường và công nhân lành nghề, huy động linh hoạt theo tiến độ</a:t>
             </a:r>
             <a:endParaRPr lang="en-US" sz="950" dirty="0"/>
           </a:p>
@@ -30130,7 +30130,7 @@
                   <a:schemeClr val="accent4"/>
                 </a:solidFill>
               </a:rPr>
-              <a:t>kỹ thuật, chỉ huy và công nhân thi công</a:t>
+              <a:t>Kỹ thuật, văn phòng, chỉ huy và công nhân thi công</a:t>
             </a:r>
             <a:endParaRPr lang="en-US" sz="800" dirty="0"/>
           </a:p>

--- a/ho-so-nang-luc-BLT/HO_SO_NANG_LUC_BLT.pptx
+++ b/ho-so-nang-luc-BLT/HO_SO_NANG_LUC_BLT.pptx
@@ -132,14 +132,14 @@
   <p:extLst>
     <p:ext uri="{521415D9-36F7-43E2-AB2F-B90AF26B5E84}">
       <p14:sectionLst xmlns:p14="http://schemas.microsoft.com/office/powerpoint/2010/main">
-        <p14:section name="Mở đầu" id="{49d3efea-e39f-8db8-b7fb-1fb4f0945ccb}">
+        <p14:section name="Mở đầu" id="{b024d04c-1001-cf3a-94ba-9ecdfd9d355d}">
           <p14:sldIdLst>
             <p14:sldId id="256"/>
             <p14:sldId id="257"/>
             <p14:sldId id="258"/>
           </p14:sldIdLst>
         </p14:section>
-        <p14:section name="01 Tổng quan" id="{55141d92-9a00-bcde-2d00-510db23e9da0}">
+        <p14:section name="01 Tổng quan" id="{e04048cd-29dc-3872-111a-87449201e386}">
           <p14:sldIdLst>
             <p14:sldId id="259"/>
             <p14:sldId id="260"/>
@@ -148,39 +148,39 @@
             <p14:sldId id="263"/>
           </p14:sldIdLst>
         </p14:section>
-        <p14:section name="02 Điện nước công trình" id="{48d0fbf7-4b20-aa3c-0a70-aa6c2fb48d5c}">
+        <p14:section name="02 Điện nước công trình" id="{cc66ea0f-3a8f-9186-e201-8177935e29bf}">
           <p14:sldIdLst>
             <p14:sldId id="264"/>
             <p14:sldId id="265"/>
             <p14:sldId id="266"/>
           </p14:sldIdLst>
         </p14:section>
-        <p14:section name="03 Hút sương dầu nhà xưởng" id="{e37bf8aa-0b61-f4ea-63df-4e08b59c727a}">
+        <p14:section name="03 Hút sương dầu nhà xưởng" id="{ba469888-62da-063d-6a7f-c4ed23bbebd4}">
           <p14:sldIdLst>
             <p14:sldId id="267"/>
             <p14:sldId id="268"/>
             <p14:sldId id="269"/>
           </p14:sldIdLst>
         </p14:section>
-        <p14:section name="04 Bơm &amp; xử lý nước" id="{f45ff8bc-c6b8-244c-10e3-6a5d68d938e8}">
+        <p14:section name="04 Bơm &amp; xử lý nước" id="{0c72f5e8-a8e7-37ae-9ed2-d2b1555ceec0}">
           <p14:sldIdLst>
             <p14:sldId id="270"/>
           </p14:sldIdLst>
         </p14:section>
-        <p14:section name="05 Quản trị dự án" id="{f0982bf7-788c-b0f3-666f-ba8c429ea89c}">
+        <p14:section name="05 Quản trị dự án" id="{e39c6a82-5bd8-a22b-968a-56479ff8997f}">
           <p14:sldIdLst>
             <p14:sldId id="271"/>
             <p14:sldId id="272"/>
             <p14:sldId id="273"/>
           </p14:sldIdLst>
         </p14:section>
-        <p14:section name="06 Nguồn lực" id="{074d94a4-5966-dfa0-9a23-7b142ef996c0}">
+        <p14:section name="06 Nguồn lực" id="{2fe94f1e-4364-d7d7-cba9-24002a8d658e}">
           <p14:sldIdLst>
             <p14:sldId id="274"/>
             <p14:sldId id="275"/>
           </p14:sldIdLst>
         </p14:section>
-        <p14:section name="07 Công trình tiêu biểu" id="{29065056-0f03-b10e-89d4-d54219fefa3c}">
+        <p14:section name="07 Công trình tiêu biểu" id="{aa3d0dc7-a056-3393-9058-6df9c8d1fa09}">
           <p14:sldIdLst>
             <p14:sldId id="276"/>
             <p14:sldId id="277"/>
@@ -188,7 +188,7 @@
             <p14:sldId id="279"/>
           </p14:sldIdLst>
         </p14:section>
-        <p14:section name="08 Cam kết &amp; liên hệ" id="{a4e55777-32d7-dd83-27b8-3d1364ee524a}">
+        <p14:section name="08 Cam kết &amp; liên hệ" id="{5256fb0e-9f1d-b6e0-4a35-3f3eb7bcd6c0}">
           <p14:sldIdLst>
             <p14:sldId id="280"/>
             <p14:sldId id="281"/>
@@ -29644,7 +29644,7 @@
                 <a:ea typeface="Arial" pitchFamily="34" charset="-122"/>
                 <a:cs typeface="Arial" pitchFamily="34" charset="-120"/>
               </a:rPr>
-              <a:t>6</a:t>
+              <a:t>4</a:t>
             </a:r>
             <a:endParaRPr lang="en-US" sz="3000" dirty="0"/>
           </a:p>
@@ -29716,7 +29716,7 @@
                   <a:schemeClr val="accent4"/>
                 </a:solidFill>
               </a:rPr>
-              <a:t>Điện • Nước • Hút sương dầu • Xử lý nước • Bảo trì • Giá đỡ thép</a:t>
+              <a:t>Điện • Nước • Hút sương dầu • Xử lý nước</a:t>
             </a:r>
             <a:endParaRPr lang="en-US" sz="800" dirty="0"/>
           </a:p>

--- a/ho-so-nang-luc-BLT/HO_SO_NANG_LUC_BLT.pptx
+++ b/ho-so-nang-luc-BLT/HO_SO_NANG_LUC_BLT.pptx
@@ -132,14 +132,14 @@
   <p:extLst>
     <p:ext uri="{521415D9-36F7-43E2-AB2F-B90AF26B5E84}">
       <p14:sectionLst xmlns:p14="http://schemas.microsoft.com/office/powerpoint/2010/main">
-        <p14:section name="Mở đầu" id="{b024d04c-1001-cf3a-94ba-9ecdfd9d355d}">
+        <p14:section name="Mở đầu" id="{73e069b9-7186-cedc-00fa-c2c4cf52167f}">
           <p14:sldIdLst>
             <p14:sldId id="256"/>
             <p14:sldId id="257"/>
             <p14:sldId id="258"/>
           </p14:sldIdLst>
         </p14:section>
-        <p14:section name="01 Tổng quan" id="{e04048cd-29dc-3872-111a-87449201e386}">
+        <p14:section name="01 Tổng quan" id="{3dbca801-b882-81d2-05d8-db0120258c1d}">
           <p14:sldIdLst>
             <p14:sldId id="259"/>
             <p14:sldId id="260"/>
@@ -148,39 +148,39 @@
             <p14:sldId id="263"/>
           </p14:sldIdLst>
         </p14:section>
-        <p14:section name="02 Điện nước công trình" id="{cc66ea0f-3a8f-9186-e201-8177935e29bf}">
+        <p14:section name="02 Điện nước công trình" id="{ca14664f-04af-4663-510e-87e493af5436}">
           <p14:sldIdLst>
             <p14:sldId id="264"/>
             <p14:sldId id="265"/>
             <p14:sldId id="266"/>
           </p14:sldIdLst>
         </p14:section>
-        <p14:section name="03 Hút sương dầu nhà xưởng" id="{ba469888-62da-063d-6a7f-c4ed23bbebd4}">
+        <p14:section name="03 Hút sương dầu nhà xưởng" id="{3b69e163-4e76-3124-b2ec-6ad30335e34e}">
           <p14:sldIdLst>
             <p14:sldId id="267"/>
             <p14:sldId id="268"/>
             <p14:sldId id="269"/>
           </p14:sldIdLst>
         </p14:section>
-        <p14:section name="04 Bơm &amp; xử lý nước" id="{0c72f5e8-a8e7-37ae-9ed2-d2b1555ceec0}">
+        <p14:section name="04 Bơm &amp; xử lý nước" id="{ba7d8ca2-922c-9ef4-34e9-1e06e1251d98}">
           <p14:sldIdLst>
             <p14:sldId id="270"/>
           </p14:sldIdLst>
         </p14:section>
-        <p14:section name="05 Quản trị dự án" id="{e39c6a82-5bd8-a22b-968a-56479ff8997f}">
+        <p14:section name="05 Quản trị dự án" id="{03e10926-1504-8d2b-0466-449131ceca12}">
           <p14:sldIdLst>
             <p14:sldId id="271"/>
             <p14:sldId id="272"/>
             <p14:sldId id="273"/>
           </p14:sldIdLst>
         </p14:section>
-        <p14:section name="06 Nguồn lực" id="{2fe94f1e-4364-d7d7-cba9-24002a8d658e}">
+        <p14:section name="06 Nguồn lực" id="{8cc68f40-b78a-d0d4-7915-05151147c1f7}">
           <p14:sldIdLst>
             <p14:sldId id="274"/>
             <p14:sldId id="275"/>
           </p14:sldIdLst>
         </p14:section>
-        <p14:section name="07 Công trình tiêu biểu" id="{aa3d0dc7-a056-3393-9058-6df9c8d1fa09}">
+        <p14:section name="07 Công trình tiêu biểu" id="{c3b1f5d6-8160-209f-34f2-70e9612192b1}">
           <p14:sldIdLst>
             <p14:sldId id="276"/>
             <p14:sldId id="277"/>
@@ -188,7 +188,7 @@
             <p14:sldId id="279"/>
           </p14:sldIdLst>
         </p14:section>
-        <p14:section name="08 Cam kết &amp; liên hệ" id="{5256fb0e-9f1d-b6e0-4a35-3f3eb7bcd6c0}">
+        <p14:section name="08 Cam kết &amp; liên hệ" id="{f0b14318-3242-a4e5-04ce-8917b4bab8b7}">
           <p14:sldIdLst>
             <p14:sldId id="280"/>
             <p14:sldId id="281"/>
@@ -30699,7 +30699,7 @@
                 <a:gridCol w="2194560"/>
                 <a:gridCol w="4361688"/>
               </a:tblGrid>
-              <a:tr h="548640">
+              <a:tr h="640080">
                 <a:tc>
                   <a:txBody>
                     <a:bodyPr/>
@@ -30820,128 +30820,7 @@
                   </a:tcPr>
                 </a:tc>
               </a:tr>
-              <a:tr h="548640">
-                <a:tc>
-                  <a:txBody>
-                    <a:bodyPr/>
-                    <a:lstStyle/>
-                    <a:p>
-                      <a:pPr indent="0" marL="0">
-                        <a:buNone/>
-                      </a:pPr>
-                      <a:r>
-                        <a:rPr lang="en-US" sz="1050" b="1" dirty="0">
-                          <a:solidFill>
-                            <a:schemeClr val="tx2"/>
-                          </a:solidFill>
-                        </a:rPr>
-                        <a:t>Tên viết tắt</a:t>
-                      </a:r>
-                      <a:endParaRPr lang="en-US" sz="1050" dirty="0"/>
-                    </a:p>
-                  </a:txBody>
-                  <a:tcPr marL="109728" marR="109728" marT="64008" marB="64008" anchor="ctr">
-                    <a:lnL w="9525" cap="flat" cmpd="sng" algn="ctr">
-                      <a:solidFill>
-                        <a:srgbClr val="C9D5E3"/>
-                      </a:solidFill>
-                      <a:prstDash val="solid"/>
-                      <a:round/>
-                      <a:headEnd type="none" w="med" len="med"/>
-                      <a:tailEnd type="none" w="med" len="med"/>
-                    </a:lnL>
-                    <a:lnR w="9525" cap="flat" cmpd="sng" algn="ctr">
-                      <a:solidFill>
-                        <a:srgbClr val="C9D5E3"/>
-                      </a:solidFill>
-                      <a:prstDash val="solid"/>
-                      <a:round/>
-                      <a:headEnd type="none" w="med" len="med"/>
-                      <a:tailEnd type="none" w="med" len="med"/>
-                    </a:lnR>
-                    <a:lnT w="9525" cap="flat" cmpd="sng" algn="ctr">
-                      <a:solidFill>
-                        <a:srgbClr val="C9D5E3"/>
-                      </a:solidFill>
-                      <a:prstDash val="solid"/>
-                      <a:round/>
-                      <a:headEnd type="none" w="med" len="med"/>
-                      <a:tailEnd type="none" w="med" len="med"/>
-                    </a:lnT>
-                    <a:lnB w="9525" cap="flat" cmpd="sng" algn="ctr">
-                      <a:solidFill>
-                        <a:srgbClr val="C9D5E3"/>
-                      </a:solidFill>
-                      <a:prstDash val="solid"/>
-                      <a:round/>
-                      <a:headEnd type="none" w="med" len="med"/>
-                      <a:tailEnd type="none" w="med" len="med"/>
-                    </a:lnB>
-                    <a:solidFill>
-                      <a:schemeClr val="bg2"/>
-                    </a:solidFill>
-                  </a:tcPr>
-                </a:tc>
-                <a:tc>
-                  <a:txBody>
-                    <a:bodyPr/>
-                    <a:lstStyle/>
-                    <a:p>
-                      <a:pPr indent="0" marL="0">
-                        <a:buNone/>
-                      </a:pPr>
-                      <a:r>
-                        <a:rPr lang="en-US" sz="1050" dirty="0">
-                          <a:solidFill>
-                            <a:schemeClr val="tx1"/>
-                          </a:solidFill>
-                        </a:rPr>
-                        <a:t>BLT  (nhận diện: BLT Điện Nước)</a:t>
-                      </a:r>
-                      <a:endParaRPr lang="en-US" sz="1050" dirty="0"/>
-                    </a:p>
-                  </a:txBody>
-                  <a:tcPr marL="109728" marR="109728" marT="64008" marB="64008" anchor="ctr">
-                    <a:lnL w="9525" cap="flat" cmpd="sng" algn="ctr">
-                      <a:solidFill>
-                        <a:srgbClr val="C9D5E3"/>
-                      </a:solidFill>
-                      <a:prstDash val="solid"/>
-                      <a:round/>
-                      <a:headEnd type="none" w="med" len="med"/>
-                      <a:tailEnd type="none" w="med" len="med"/>
-                    </a:lnL>
-                    <a:lnR w="9525" cap="flat" cmpd="sng" algn="ctr">
-                      <a:solidFill>
-                        <a:srgbClr val="C9D5E3"/>
-                      </a:solidFill>
-                      <a:prstDash val="solid"/>
-                      <a:round/>
-                      <a:headEnd type="none" w="med" len="med"/>
-                      <a:tailEnd type="none" w="med" len="med"/>
-                    </a:lnR>
-                    <a:lnT w="9525" cap="flat" cmpd="sng" algn="ctr">
-                      <a:solidFill>
-                        <a:srgbClr val="C9D5E3"/>
-                      </a:solidFill>
-                      <a:prstDash val="solid"/>
-                      <a:round/>
-                      <a:headEnd type="none" w="med" len="med"/>
-                      <a:tailEnd type="none" w="med" len="med"/>
-                    </a:lnT>
-                    <a:lnB w="9525" cap="flat" cmpd="sng" algn="ctr">
-                      <a:solidFill>
-                        <a:srgbClr val="C9D5E3"/>
-                      </a:solidFill>
-                      <a:prstDash val="solid"/>
-                      <a:round/>
-                      <a:headEnd type="none" w="med" len="med"/>
-                      <a:tailEnd type="none" w="med" len="med"/>
-                    </a:lnB>
-                  </a:tcPr>
-                </a:tc>
-              </a:tr>
-              <a:tr h="548640">
+              <a:tr h="640080">
                 <a:tc>
                   <a:txBody>
                     <a:bodyPr/>
@@ -31062,128 +30941,7 @@
                   </a:tcPr>
                 </a:tc>
               </a:tr>
-              <a:tr h="548640">
-                <a:tc>
-                  <a:txBody>
-                    <a:bodyPr/>
-                    <a:lstStyle/>
-                    <a:p>
-                      <a:pPr indent="0" marL="0">
-                        <a:buNone/>
-                      </a:pPr>
-                      <a:r>
-                        <a:rPr lang="en-US" sz="1050" b="1" dirty="0">
-                          <a:solidFill>
-                            <a:schemeClr val="tx2"/>
-                          </a:solidFill>
-                        </a:rPr>
-                        <a:t>Loại hình</a:t>
-                      </a:r>
-                      <a:endParaRPr lang="en-US" sz="1050" dirty="0"/>
-                    </a:p>
-                  </a:txBody>
-                  <a:tcPr marL="109728" marR="109728" marT="64008" marB="64008" anchor="ctr">
-                    <a:lnL w="9525" cap="flat" cmpd="sng" algn="ctr">
-                      <a:solidFill>
-                        <a:srgbClr val="C9D5E3"/>
-                      </a:solidFill>
-                      <a:prstDash val="solid"/>
-                      <a:round/>
-                      <a:headEnd type="none" w="med" len="med"/>
-                      <a:tailEnd type="none" w="med" len="med"/>
-                    </a:lnL>
-                    <a:lnR w="9525" cap="flat" cmpd="sng" algn="ctr">
-                      <a:solidFill>
-                        <a:srgbClr val="C9D5E3"/>
-                      </a:solidFill>
-                      <a:prstDash val="solid"/>
-                      <a:round/>
-                      <a:headEnd type="none" w="med" len="med"/>
-                      <a:tailEnd type="none" w="med" len="med"/>
-                    </a:lnR>
-                    <a:lnT w="9525" cap="flat" cmpd="sng" algn="ctr">
-                      <a:solidFill>
-                        <a:srgbClr val="C9D5E3"/>
-                      </a:solidFill>
-                      <a:prstDash val="solid"/>
-                      <a:round/>
-                      <a:headEnd type="none" w="med" len="med"/>
-                      <a:tailEnd type="none" w="med" len="med"/>
-                    </a:lnT>
-                    <a:lnB w="9525" cap="flat" cmpd="sng" algn="ctr">
-                      <a:solidFill>
-                        <a:srgbClr val="C9D5E3"/>
-                      </a:solidFill>
-                      <a:prstDash val="solid"/>
-                      <a:round/>
-                      <a:headEnd type="none" w="med" len="med"/>
-                      <a:tailEnd type="none" w="med" len="med"/>
-                    </a:lnB>
-                    <a:solidFill>
-                      <a:schemeClr val="bg2"/>
-                    </a:solidFill>
-                  </a:tcPr>
-                </a:tc>
-                <a:tc>
-                  <a:txBody>
-                    <a:bodyPr/>
-                    <a:lstStyle/>
-                    <a:p>
-                      <a:pPr indent="0" marL="0">
-                        <a:buNone/>
-                      </a:pPr>
-                      <a:r>
-                        <a:rPr lang="en-US" sz="1050" dirty="0">
-                          <a:solidFill>
-                            <a:schemeClr val="tx1"/>
-                          </a:solidFill>
-                        </a:rPr>
-                        <a:t>Công ty trách nhiệm hữu hạn</a:t>
-                      </a:r>
-                      <a:endParaRPr lang="en-US" sz="1050" dirty="0"/>
-                    </a:p>
-                  </a:txBody>
-                  <a:tcPr marL="109728" marR="109728" marT="64008" marB="64008" anchor="ctr">
-                    <a:lnL w="9525" cap="flat" cmpd="sng" algn="ctr">
-                      <a:solidFill>
-                        <a:srgbClr val="C9D5E3"/>
-                      </a:solidFill>
-                      <a:prstDash val="solid"/>
-                      <a:round/>
-                      <a:headEnd type="none" w="med" len="med"/>
-                      <a:tailEnd type="none" w="med" len="med"/>
-                    </a:lnL>
-                    <a:lnR w="9525" cap="flat" cmpd="sng" algn="ctr">
-                      <a:solidFill>
-                        <a:srgbClr val="C9D5E3"/>
-                      </a:solidFill>
-                      <a:prstDash val="solid"/>
-                      <a:round/>
-                      <a:headEnd type="none" w="med" len="med"/>
-                      <a:tailEnd type="none" w="med" len="med"/>
-                    </a:lnR>
-                    <a:lnT w="9525" cap="flat" cmpd="sng" algn="ctr">
-                      <a:solidFill>
-                        <a:srgbClr val="C9D5E3"/>
-                      </a:solidFill>
-                      <a:prstDash val="solid"/>
-                      <a:round/>
-                      <a:headEnd type="none" w="med" len="med"/>
-                      <a:tailEnd type="none" w="med" len="med"/>
-                    </a:lnT>
-                    <a:lnB w="9525" cap="flat" cmpd="sng" algn="ctr">
-                      <a:solidFill>
-                        <a:srgbClr val="C9D5E3"/>
-                      </a:solidFill>
-                      <a:prstDash val="solid"/>
-                      <a:round/>
-                      <a:headEnd type="none" w="med" len="med"/>
-                      <a:tailEnd type="none" w="med" len="med"/>
-                    </a:lnB>
-                  </a:tcPr>
-                </a:tc>
-              </a:tr>
-              <a:tr h="548640">
+              <a:tr h="640080">
                 <a:tc>
                   <a:txBody>
                     <a:bodyPr/>
@@ -31304,7 +31062,7 @@
                   </a:tcPr>
                 </a:tc>
               </a:tr>
-              <a:tr h="548640">
+              <a:tr h="640080">
                 <a:tc>
                   <a:txBody>
                     <a:bodyPr/>
@@ -31425,7 +31183,7 @@
                   </a:tcPr>
                 </a:tc>
               </a:tr>
-              <a:tr h="548640">
+              <a:tr h="640080">
                 <a:tc>
                   <a:txBody>
                     <a:bodyPr/>
@@ -31546,7 +31304,7 @@
                   </a:tcPr>
                 </a:tc>
               </a:tr>
-              <a:tr h="548640">
+              <a:tr h="640080">
                 <a:tc>
                   <a:txBody>
                     <a:bodyPr/>
@@ -31667,7 +31425,7 @@
                   </a:tcPr>
                 </a:tc>
               </a:tr>
-              <a:tr h="548640">
+              <a:tr h="640080">
                 <a:tc>
                   <a:txBody>
                     <a:bodyPr/>
@@ -31800,7 +31558,7 @@
         </p:nvSpPr>
         <p:spPr>
           <a:xfrm>
-            <a:off x="502920" y="6949440"/>
+            <a:off x="502920" y="6446520"/>
             <a:ext cx="6556248" cy="228600"/>
           </a:xfrm>
           <a:prstGeom prst="rect">
@@ -31839,12 +31597,12 @@
         </p:nvSpPr>
         <p:spPr>
           <a:xfrm>
-            <a:off x="502920" y="7223760"/>
-            <a:ext cx="6556248" cy="2377440"/>
+            <a:off x="502920" y="6720840"/>
+            <a:ext cx="6556248" cy="2880360"/>
           </a:xfrm>
           <a:prstGeom prst="roundRect">
             <a:avLst>
-              <a:gd name="adj" fmla="val 3077"/>
+              <a:gd name="adj" fmla="val 2540"/>
             </a:avLst>
           </a:prstGeom>
           <a:solidFill>
@@ -31866,8 +31624,8 @@
         </p:nvSpPr>
         <p:spPr>
           <a:xfrm>
-            <a:off x="777240" y="7406640"/>
-            <a:ext cx="6007608" cy="2057400"/>
+            <a:off x="777240" y="6903720"/>
+            <a:ext cx="6007608" cy="2514600"/>
           </a:xfrm>
           <a:prstGeom prst="rect">
             <a:avLst/>
@@ -31880,6 +31638,9 @@
           <a:lstStyle/>
           <a:p>
             <a:pPr marL="152400" indent="-152400">
+              <a:lnSpc>
+                <a:spcPct val="170000"/>
+              </a:lnSpc>
               <a:spcAft>
                 <a:spcPts val="900"/>
               </a:spcAft>
@@ -31887,17 +31648,20 @@
               <a:buChar char="•"/>
             </a:pPr>
             <a:r>
-              <a:rPr lang="en-US" sz="1100" dirty="0">
+              <a:rPr lang="en-US" sz="1150" dirty="0">
                 <a:solidFill>
                   <a:schemeClr val="tx1"/>
                 </a:solidFill>
               </a:rPr>
               <a:t>Lắp đặt hệ thống điện động lực, điện chiếu sáng, tủ điện, máng – thang cáp</a:t>
             </a:r>
-            <a:endParaRPr lang="en-US" sz="1100" dirty="0"/>
+            <a:endParaRPr lang="en-US" sz="1150" dirty="0"/>
           </a:p>
           <a:p>
             <a:pPr marL="152400" indent="-152400">
+              <a:lnSpc>
+                <a:spcPct val="170000"/>
+              </a:lnSpc>
               <a:spcAft>
                 <a:spcPts val="900"/>
               </a:spcAft>
@@ -31905,17 +31669,20 @@
               <a:buChar char="•"/>
             </a:pPr>
             <a:r>
-              <a:rPr lang="en-US" sz="1100" dirty="0">
+              <a:rPr lang="en-US" sz="1150" dirty="0">
                 <a:solidFill>
                   <a:schemeClr val="tx1"/>
                 </a:solidFill>
               </a:rPr>
               <a:t>Lắp đặt hệ thống cấp, thoát nước công trình dân dụng và công nghiệp</a:t>
             </a:r>
-            <a:endParaRPr lang="en-US" sz="1100" dirty="0"/>
+            <a:endParaRPr lang="en-US" sz="1150" dirty="0"/>
           </a:p>
           <a:p>
             <a:pPr marL="152400" indent="-152400">
+              <a:lnSpc>
+                <a:spcPct val="170000"/>
+              </a:lnSpc>
               <a:spcAft>
                 <a:spcPts val="900"/>
               </a:spcAft>
@@ -31923,17 +31690,20 @@
               <a:buChar char="•"/>
             </a:pPr>
             <a:r>
-              <a:rPr lang="en-US" sz="1100" dirty="0">
+              <a:rPr lang="en-US" sz="1150" dirty="0">
                 <a:solidFill>
                   <a:schemeClr val="tx1"/>
                 </a:solidFill>
               </a:rPr>
               <a:t>Lắp đặt hệ thống đường ống công nghệ, hút sương dầu – lọc khí nhà xưởng</a:t>
             </a:r>
-            <a:endParaRPr lang="en-US" sz="1100" dirty="0"/>
+            <a:endParaRPr lang="en-US" sz="1150" dirty="0"/>
           </a:p>
           <a:p>
             <a:pPr marL="152400" indent="-152400">
+              <a:lnSpc>
+                <a:spcPct val="170000"/>
+              </a:lnSpc>
               <a:spcAft>
                 <a:spcPts val="900"/>
               </a:spcAft>
@@ -31941,17 +31711,20 @@
               <a:buChar char="•"/>
             </a:pPr>
             <a:r>
-              <a:rPr lang="en-US" sz="1100" dirty="0">
+              <a:rPr lang="en-US" sz="1150" dirty="0">
                 <a:solidFill>
                   <a:schemeClr val="tx1"/>
                 </a:solidFill>
               </a:rPr>
               <a:t>Lắp đặt máy móc, thiết bị công nghiệp: bơm, bồn lọc, thiết bị xử lý nước</a:t>
             </a:r>
-            <a:endParaRPr lang="en-US" sz="1100" dirty="0"/>
+            <a:endParaRPr lang="en-US" sz="1150" dirty="0"/>
           </a:p>
           <a:p>
             <a:pPr marL="152400" indent="-152400">
+              <a:lnSpc>
+                <a:spcPct val="170000"/>
+              </a:lnSpc>
               <a:spcAft>
                 <a:spcPts val="900"/>
               </a:spcAft>
@@ -31959,14 +31732,14 @@
               <a:buChar char="•"/>
             </a:pPr>
             <a:r>
-              <a:rPr lang="en-US" sz="1100" dirty="0">
+              <a:rPr lang="en-US" sz="1150" dirty="0">
                 <a:solidFill>
                   <a:schemeClr val="tx1"/>
                 </a:solidFill>
               </a:rPr>
               <a:t>Bảo trì, sửa chữa, cải tạo hệ thống kỹ thuật công trình</a:t>
             </a:r>
-            <a:endParaRPr lang="en-US" sz="1100" dirty="0"/>
+            <a:endParaRPr lang="en-US" sz="1150" dirty="0"/>
           </a:p>
         </p:txBody>
       </p:sp>

--- a/ho-so-nang-luc-BLT/HO_SO_NANG_LUC_BLT.pptx
+++ b/ho-so-nang-luc-BLT/HO_SO_NANG_LUC_BLT.pptx
@@ -132,14 +132,14 @@
   <p:extLst>
     <p:ext uri="{521415D9-36F7-43E2-AB2F-B90AF26B5E84}">
       <p14:sectionLst xmlns:p14="http://schemas.microsoft.com/office/powerpoint/2010/main">
-        <p14:section name="Mở đầu" id="{73e069b9-7186-cedc-00fa-c2c4cf52167f}">
+        <p14:section name="Mở đầu" id="{34839d0d-c6cf-26c3-0cf6-7d07be8038b1}">
           <p14:sldIdLst>
             <p14:sldId id="256"/>
             <p14:sldId id="257"/>
             <p14:sldId id="258"/>
           </p14:sldIdLst>
         </p14:section>
-        <p14:section name="01 Tổng quan" id="{3dbca801-b882-81d2-05d8-db0120258c1d}">
+        <p14:section name="01 Tổng quan" id="{96ec9d0a-8ea1-b24c-bd48-0587e9339bc0}">
           <p14:sldIdLst>
             <p14:sldId id="259"/>
             <p14:sldId id="260"/>
@@ -148,39 +148,39 @@
             <p14:sldId id="263"/>
           </p14:sldIdLst>
         </p14:section>
-        <p14:section name="02 Điện nước công trình" id="{ca14664f-04af-4663-510e-87e493af5436}">
+        <p14:section name="02 Điện nước công trình" id="{e5f81399-cf4e-5c99-95ff-ed097f453cd4}">
           <p14:sldIdLst>
             <p14:sldId id="264"/>
             <p14:sldId id="265"/>
             <p14:sldId id="266"/>
           </p14:sldIdLst>
         </p14:section>
-        <p14:section name="03 Hút sương dầu nhà xưởng" id="{3b69e163-4e76-3124-b2ec-6ad30335e34e}">
+        <p14:section name="03 Hút sương dầu nhà xưởng" id="{d5618fc6-635b-5c2e-622f-b942baba916e}">
           <p14:sldIdLst>
             <p14:sldId id="267"/>
             <p14:sldId id="268"/>
             <p14:sldId id="269"/>
           </p14:sldIdLst>
         </p14:section>
-        <p14:section name="04 Bơm &amp; xử lý nước" id="{ba7d8ca2-922c-9ef4-34e9-1e06e1251d98}">
+        <p14:section name="04 Bơm &amp; xử lý nước" id="{c78bf755-77b4-a6e2-f16f-95a605174a31}">
           <p14:sldIdLst>
             <p14:sldId id="270"/>
           </p14:sldIdLst>
         </p14:section>
-        <p14:section name="05 Quản trị dự án" id="{03e10926-1504-8d2b-0466-449131ceca12}">
+        <p14:section name="05 Quản trị dự án" id="{ba79b9b3-4d5c-9412-e8d1-34a590a5f19d}">
           <p14:sldIdLst>
             <p14:sldId id="271"/>
             <p14:sldId id="272"/>
             <p14:sldId id="273"/>
           </p14:sldIdLst>
         </p14:section>
-        <p14:section name="06 Nguồn lực" id="{8cc68f40-b78a-d0d4-7915-05151147c1f7}">
+        <p14:section name="06 Nguồn lực" id="{63c1fc0b-c402-4f50-c844-16ac448c2c03}">
           <p14:sldIdLst>
             <p14:sldId id="274"/>
             <p14:sldId id="275"/>
           </p14:sldIdLst>
         </p14:section>
-        <p14:section name="07 Công trình tiêu biểu" id="{c3b1f5d6-8160-209f-34f2-70e9612192b1}">
+        <p14:section name="07 Công trình tiêu biểu" id="{90020c5c-f2e6-0fcf-af24-239c173347bd}">
           <p14:sldIdLst>
             <p14:sldId id="276"/>
             <p14:sldId id="277"/>
@@ -188,7 +188,7 @@
             <p14:sldId id="279"/>
           </p14:sldIdLst>
         </p14:section>
-        <p14:section name="08 Cam kết &amp; liên hệ" id="{f0b14318-3242-a4e5-04ce-8917b4bab8b7}">
+        <p14:section name="08 Cam kết &amp; liên hệ" id="{338a00be-480a-45c4-acd8-264fe094cda3}">
           <p14:sldIdLst>
             <p14:sldId id="280"/>
             <p14:sldId id="281"/>
@@ -26527,7 +26527,7 @@
           </a:prstGeom>
           <a:solidFill>
             <a:schemeClr val="tx2">
-              <a:alpha val="60000"/>
+              <a:alpha val="30000"/>
             </a:schemeClr>
           </a:solidFill>
           <a:ln w="12700">
@@ -26556,8 +26556,8 @@
         </p:blipFill>
         <p:spPr>
           <a:xfrm>
-            <a:off x="2775204" y="1097280"/>
-            <a:ext cx="2011680" cy="2011680"/>
+            <a:off x="502920" y="411480"/>
+            <a:ext cx="1280160" cy="1280160"/>
           </a:xfrm>
           <a:prstGeom prst="rect">
             <a:avLst/>

--- a/ho-so-nang-luc-BLT/HO_SO_NANG_LUC_BLT.pptx
+++ b/ho-so-nang-luc-BLT/HO_SO_NANG_LUC_BLT.pptx
@@ -132,14 +132,14 @@
   <p:extLst>
     <p:ext uri="{521415D9-36F7-43E2-AB2F-B90AF26B5E84}">
       <p14:sectionLst xmlns:p14="http://schemas.microsoft.com/office/powerpoint/2010/main">
-        <p14:section name="Mở đầu" id="{34839d0d-c6cf-26c3-0cf6-7d07be8038b1}">
+        <p14:section name="Mở đầu" id="{479003c4-6f34-bf96-3845-18663b46f229}">
           <p14:sldIdLst>
             <p14:sldId id="256"/>
             <p14:sldId id="257"/>
             <p14:sldId id="258"/>
           </p14:sldIdLst>
         </p14:section>
-        <p14:section name="01 Tổng quan" id="{96ec9d0a-8ea1-b24c-bd48-0587e9339bc0}">
+        <p14:section name="01 Tổng quan" id="{0a1c5c49-7dde-9613-b806-8930a260762e}">
           <p14:sldIdLst>
             <p14:sldId id="259"/>
             <p14:sldId id="260"/>
@@ -148,39 +148,39 @@
             <p14:sldId id="263"/>
           </p14:sldIdLst>
         </p14:section>
-        <p14:section name="02 Điện nước công trình" id="{e5f81399-cf4e-5c99-95ff-ed097f453cd4}">
+        <p14:section name="02 Điện nước công trình" id="{a85db3c8-26cb-56c7-e8b8-42e85fd841fb}">
           <p14:sldIdLst>
             <p14:sldId id="264"/>
             <p14:sldId id="265"/>
             <p14:sldId id="266"/>
           </p14:sldIdLst>
         </p14:section>
-        <p14:section name="03 Hút sương dầu nhà xưởng" id="{d5618fc6-635b-5c2e-622f-b942baba916e}">
+        <p14:section name="03 Hút sương dầu nhà xưởng" id="{9f1c3610-f719-a2f1-7a3a-fa089ccb5997}">
           <p14:sldIdLst>
             <p14:sldId id="267"/>
             <p14:sldId id="268"/>
             <p14:sldId id="269"/>
           </p14:sldIdLst>
         </p14:section>
-        <p14:section name="04 Bơm &amp; xử lý nước" id="{c78bf755-77b4-a6e2-f16f-95a605174a31}">
+        <p14:section name="04 Bơm &amp; xử lý nước" id="{6fdd7731-8046-e20f-c1c0-7a0ee682e0e1}">
           <p14:sldIdLst>
             <p14:sldId id="270"/>
           </p14:sldIdLst>
         </p14:section>
-        <p14:section name="05 Quản trị dự án" id="{ba79b9b3-4d5c-9412-e8d1-34a590a5f19d}">
+        <p14:section name="05 Quản trị dự án" id="{81c09eda-362c-b355-9576-58968cc6a37a}">
           <p14:sldIdLst>
             <p14:sldId id="271"/>
             <p14:sldId id="272"/>
             <p14:sldId id="273"/>
           </p14:sldIdLst>
         </p14:section>
-        <p14:section name="06 Nguồn lực" id="{63c1fc0b-c402-4f50-c844-16ac448c2c03}">
+        <p14:section name="06 Nguồn lực" id="{a94ba674-fa7c-e44d-7be4-d814c5e209d8}">
           <p14:sldIdLst>
             <p14:sldId id="274"/>
             <p14:sldId id="275"/>
           </p14:sldIdLst>
         </p14:section>
-        <p14:section name="07 Công trình tiêu biểu" id="{90020c5c-f2e6-0fcf-af24-239c173347bd}">
+        <p14:section name="07 Công trình tiêu biểu" id="{39804bf8-fbe8-6e3e-b8b8-1b4eea5d317a}">
           <p14:sldIdLst>
             <p14:sldId id="276"/>
             <p14:sldId id="277"/>
@@ -188,7 +188,7 @@
             <p14:sldId id="279"/>
           </p14:sldIdLst>
         </p14:section>
-        <p14:section name="08 Cam kết &amp; liên hệ" id="{338a00be-480a-45c4-acd8-264fe094cda3}">
+        <p14:section name="08 Cam kết &amp; liên hệ" id="{b60fd2f7-9467-d1ac-5324-3c1442fc023c}">
           <p14:sldIdLst>
             <p14:sldId id="280"/>
             <p14:sldId id="281"/>
@@ -29363,51 +29363,39 @@
           </a:p>
         </p:txBody>
       </p:sp>
-      <p:sp>
-        <p:nvSpPr>
-          <p:cNvPr id="11" name="Text 9"/>
-          <p:cNvSpPr txBox="1"/>
-          <p:nvPr/>
-        </p:nvSpPr>
-        <p:spPr>
-          <a:xfrm>
-            <a:off x="4343400" y="7680960"/>
-            <a:ext cx="2715768" cy="228600"/>
-          </a:xfrm>
-          <a:prstGeom prst="rect">
-            <a:avLst/>
-          </a:prstGeom>
-          <a:noFill/>
-          <a:ln/>
-        </p:spPr>
-        <p:txBody>
-          <a:bodyPr wrap="square" lIns="0" tIns="0" rIns="0" bIns="0" rtlCol="0" anchor="ctr"/>
-          <a:lstStyle/>
-          <a:p>
-            <a:pPr algn="ctr" indent="0" marL="0">
-              <a:buNone/>
-            </a:pPr>
-            <a:r>
-              <a:rPr lang="en-US" sz="900" i="1" dirty="0">
-                <a:solidFill>
-                  <a:schemeClr val="accent3"/>
-                </a:solidFill>
-              </a:rPr>
-              <a:t>(Ký tên, đóng dấu)</a:t>
-            </a:r>
-            <a:endParaRPr lang="en-US" sz="900" dirty="0"/>
-          </a:p>
-        </p:txBody>
-      </p:sp>
-      <p:sp>
-        <p:nvSpPr>
-          <p:cNvPr id="12" name="Text 10"/>
-          <p:cNvSpPr txBox="1"/>
-          <p:nvPr/>
-        </p:nvSpPr>
-        <p:spPr>
-          <a:xfrm>
-            <a:off x="4343400" y="9189720"/>
+      <p:pic>
+        <p:nvPicPr>
+          <p:cNvPr id="11" name="chu ky va con dau" descr="Chữ ký và con dấu Giám đốc Hồ Văn Bình">    </p:cNvPr>
+          <p:cNvPicPr>
+            <a:picLocks noChangeAspect="1"/>
+          </p:cNvPicPr>
+          <p:nvPr/>
+        </p:nvPicPr>
+        <p:blipFill>
+          <a:blip r:embed="rId1"/>
+          <a:stretch>
+            <a:fillRect/>
+          </a:stretch>
+        </p:blipFill>
+        <p:spPr>
+          <a:xfrm>
+            <a:off x="4489704" y="7699248"/>
+            <a:ext cx="2423160" cy="1474089"/>
+          </a:xfrm>
+          <a:prstGeom prst="rect">
+            <a:avLst/>
+          </a:prstGeom>
+        </p:spPr>
+      </p:pic>
+      <p:sp>
+        <p:nvSpPr>
+          <p:cNvPr id="12" name="Text 9"/>
+          <p:cNvSpPr txBox="1"/>
+          <p:nvPr/>
+        </p:nvSpPr>
+        <p:spPr>
+          <a:xfrm>
+            <a:off x="4343400" y="9253728"/>
             <a:ext cx="2715768" cy="365760"/>
           </a:xfrm>
           <a:prstGeom prst="rect">

--- a/ho-so-nang-luc-BLT/HO_SO_NANG_LUC_BLT.pptx
+++ b/ho-so-nang-luc-BLT/HO_SO_NANG_LUC_BLT.pptx
@@ -132,14 +132,14 @@
   <p:extLst>
     <p:ext uri="{521415D9-36F7-43E2-AB2F-B90AF26B5E84}">
       <p14:sectionLst xmlns:p14="http://schemas.microsoft.com/office/powerpoint/2010/main">
-        <p14:section name="Mở đầu" id="{479003c4-6f34-bf96-3845-18663b46f229}">
+        <p14:section name="Mở đầu" id="{64538fb7-0a3f-d64c-79eb-aaaad36e3f3c}">
           <p14:sldIdLst>
             <p14:sldId id="256"/>
             <p14:sldId id="257"/>
             <p14:sldId id="258"/>
           </p14:sldIdLst>
         </p14:section>
-        <p14:section name="01 Tổng quan" id="{0a1c5c49-7dde-9613-b806-8930a260762e}">
+        <p14:section name="01 Tổng quan" id="{6d0893c6-5e3d-7caa-ebcf-ae776fa63da8}">
           <p14:sldIdLst>
             <p14:sldId id="259"/>
             <p14:sldId id="260"/>
@@ -148,39 +148,39 @@
             <p14:sldId id="263"/>
           </p14:sldIdLst>
         </p14:section>
-        <p14:section name="02 Điện nước công trình" id="{a85db3c8-26cb-56c7-e8b8-42e85fd841fb}">
+        <p14:section name="02 Điện nước công trình" id="{8238293b-adcd-cbb5-2aef-12842f56cf9d}">
           <p14:sldIdLst>
             <p14:sldId id="264"/>
             <p14:sldId id="265"/>
             <p14:sldId id="266"/>
           </p14:sldIdLst>
         </p14:section>
-        <p14:section name="03 Hút sương dầu nhà xưởng" id="{9f1c3610-f719-a2f1-7a3a-fa089ccb5997}">
+        <p14:section name="03 Hút sương dầu nhà xưởng" id="{86fe865f-9474-5215-4dea-5d0400c6a036}">
           <p14:sldIdLst>
             <p14:sldId id="267"/>
             <p14:sldId id="268"/>
             <p14:sldId id="269"/>
           </p14:sldIdLst>
         </p14:section>
-        <p14:section name="04 Bơm &amp; xử lý nước" id="{6fdd7731-8046-e20f-c1c0-7a0ee682e0e1}">
+        <p14:section name="04 Bơm &amp; xử lý nước" id="{323fd865-b6ae-7e2c-fce1-1ae88a165718}">
           <p14:sldIdLst>
             <p14:sldId id="270"/>
           </p14:sldIdLst>
         </p14:section>
-        <p14:section name="05 Quản trị dự án" id="{81c09eda-362c-b355-9576-58968cc6a37a}">
+        <p14:section name="05 Quản trị dự án" id="{db4b06bd-85af-9d18-cc3e-1e08a7a7e7fc}">
           <p14:sldIdLst>
             <p14:sldId id="271"/>
             <p14:sldId id="272"/>
             <p14:sldId id="273"/>
           </p14:sldIdLst>
         </p14:section>
-        <p14:section name="06 Nguồn lực" id="{a94ba674-fa7c-e44d-7be4-d814c5e209d8}">
+        <p14:section name="06 Nguồn lực" id="{198ffc21-b3f2-0fae-8468-83561346dc7d}">
           <p14:sldIdLst>
             <p14:sldId id="274"/>
             <p14:sldId id="275"/>
           </p14:sldIdLst>
         </p14:section>
-        <p14:section name="07 Công trình tiêu biểu" id="{39804bf8-fbe8-6e3e-b8b8-1b4eea5d317a}">
+        <p14:section name="07 Công trình tiêu biểu" id="{e491d38a-24a9-98cb-a3ac-a460ff363f23}">
           <p14:sldIdLst>
             <p14:sldId id="276"/>
             <p14:sldId id="277"/>
@@ -188,7 +188,7 @@
             <p14:sldId id="279"/>
           </p14:sldIdLst>
         </p14:section>
-        <p14:section name="08 Cam kết &amp; liên hệ" id="{b60fd2f7-9467-d1ac-5324-3c1442fc023c}">
+        <p14:section name="08 Cam kết &amp; liên hệ" id="{2c6b1f7b-787e-f47d-9cb2-c234e401173f}">
           <p14:sldIdLst>
             <p14:sldId id="280"/>
             <p14:sldId id="281"/>
@@ -29296,8 +29296,8 @@
         </p:nvSpPr>
         <p:spPr>
           <a:xfrm>
-            <a:off x="4343400" y="7086600"/>
-            <a:ext cx="2715768" cy="274320"/>
+            <a:off x="4069080" y="7086600"/>
+            <a:ext cx="2990088" cy="274320"/>
           </a:xfrm>
           <a:prstGeom prst="rect">
             <a:avLst/>
@@ -29332,8 +29332,8 @@
         </p:nvSpPr>
         <p:spPr>
           <a:xfrm>
-            <a:off x="4343400" y="7406640"/>
-            <a:ext cx="2715768" cy="274320"/>
+            <a:off x="4069080" y="7406640"/>
+            <a:ext cx="2990088" cy="274320"/>
           </a:xfrm>
           <a:prstGeom prst="rect">
             <a:avLst/>
@@ -29379,8 +29379,8 @@
         </p:blipFill>
         <p:spPr>
           <a:xfrm>
-            <a:off x="4489704" y="7699248"/>
-            <a:ext cx="2423160" cy="1474089"/>
+            <a:off x="4871466" y="7726680"/>
+            <a:ext cx="2286000" cy="1390650"/>
           </a:xfrm>
           <a:prstGeom prst="rect">
             <a:avLst/>
@@ -29395,8 +29395,8 @@
         </p:nvSpPr>
         <p:spPr>
           <a:xfrm>
-            <a:off x="4343400" y="9253728"/>
-            <a:ext cx="2715768" cy="365760"/>
+            <a:off x="4069080" y="9253728"/>
+            <a:ext cx="2990088" cy="365760"/>
           </a:xfrm>
           <a:prstGeom prst="rect">
             <a:avLst/>

--- a/ho-so-nang-luc-BLT/HO_SO_NANG_LUC_BLT.pptx
+++ b/ho-so-nang-luc-BLT/HO_SO_NANG_LUC_BLT.pptx
@@ -132,14 +132,14 @@
   <p:extLst>
     <p:ext uri="{521415D9-36F7-43E2-AB2F-B90AF26B5E84}">
       <p14:sectionLst xmlns:p14="http://schemas.microsoft.com/office/powerpoint/2010/main">
-        <p14:section name="Mở đầu" id="{64538fb7-0a3f-d64c-79eb-aaaad36e3f3c}">
+        <p14:section name="Mở đầu" id="{0bbe6c87-0f18-b580-3dcb-9a0b10d2f8fb}">
           <p14:sldIdLst>
             <p14:sldId id="256"/>
             <p14:sldId id="257"/>
             <p14:sldId id="258"/>
           </p14:sldIdLst>
         </p14:section>
-        <p14:section name="01 Tổng quan" id="{6d0893c6-5e3d-7caa-ebcf-ae776fa63da8}">
+        <p14:section name="01 Tổng quan" id="{ac0cc673-32c5-1565-ccf9-766058a62210}">
           <p14:sldIdLst>
             <p14:sldId id="259"/>
             <p14:sldId id="260"/>
@@ -148,39 +148,39 @@
             <p14:sldId id="263"/>
           </p14:sldIdLst>
         </p14:section>
-        <p14:section name="02 Điện nước công trình" id="{8238293b-adcd-cbb5-2aef-12842f56cf9d}">
+        <p14:section name="02 Điện nước công trình" id="{150747eb-7436-4157-338c-226eeb5c80be}">
           <p14:sldIdLst>
             <p14:sldId id="264"/>
             <p14:sldId id="265"/>
             <p14:sldId id="266"/>
           </p14:sldIdLst>
         </p14:section>
-        <p14:section name="03 Hút sương dầu nhà xưởng" id="{86fe865f-9474-5215-4dea-5d0400c6a036}">
+        <p14:section name="03 Hút sương dầu nhà xưởng" id="{79125877-9383-2eae-4e31-ecab98479aa2}">
           <p14:sldIdLst>
             <p14:sldId id="267"/>
             <p14:sldId id="268"/>
             <p14:sldId id="269"/>
           </p14:sldIdLst>
         </p14:section>
-        <p14:section name="04 Bơm &amp; xử lý nước" id="{323fd865-b6ae-7e2c-fce1-1ae88a165718}">
+        <p14:section name="04 Bơm &amp; xử lý nước" id="{a1d8c0b2-ca32-c826-de49-2fbe784e4031}">
           <p14:sldIdLst>
             <p14:sldId id="270"/>
           </p14:sldIdLst>
         </p14:section>
-        <p14:section name="05 Quản trị dự án" id="{db4b06bd-85af-9d18-cc3e-1e08a7a7e7fc}">
+        <p14:section name="05 Quản trị dự án" id="{4b217288-42b1-2982-4f70-0e96ca683951}">
           <p14:sldIdLst>
             <p14:sldId id="271"/>
             <p14:sldId id="272"/>
             <p14:sldId id="273"/>
           </p14:sldIdLst>
         </p14:section>
-        <p14:section name="06 Nguồn lực" id="{198ffc21-b3f2-0fae-8468-83561346dc7d}">
+        <p14:section name="06 Nguồn lực" id="{9c66aa22-187a-de66-ac88-31471de3d4e5}">
           <p14:sldIdLst>
             <p14:sldId id="274"/>
             <p14:sldId id="275"/>
           </p14:sldIdLst>
         </p14:section>
-        <p14:section name="07 Công trình tiêu biểu" id="{e491d38a-24a9-98cb-a3ac-a460ff363f23}">
+        <p14:section name="07 Công trình tiêu biểu" id="{68f5d6a3-e6b4-297d-7316-1d3d24b88726}">
           <p14:sldIdLst>
             <p14:sldId id="276"/>
             <p14:sldId id="277"/>
@@ -188,7 +188,7 @@
             <p14:sldId id="279"/>
           </p14:sldIdLst>
         </p14:section>
-        <p14:section name="08 Cam kết &amp; liên hệ" id="{2c6b1f7b-787e-f47d-9cb2-c234e401173f}">
+        <p14:section name="08 Cam kết &amp; liên hệ" id="{4c77920e-b937-72b3-8290-83ce20eece88}">
           <p14:sldIdLst>
             <p14:sldId id="280"/>
             <p14:sldId id="281"/>
@@ -28904,7 +28904,7 @@
                   <a:schemeClr val="accent1"/>
                 </a:solidFill>
               </a:rPr>
-              <a:t>TỔNG QUAN DOANH NGHIỆP</a:t>
+              <a:t>THÔNG ĐIỆP TỪ GIÁM ĐỐC</a:t>
             </a:r>
             <a:endParaRPr lang="en-US" sz="900" dirty="0"/>
           </a:p>

--- a/ho-so-nang-luc-BLT/HO_SO_NANG_LUC_BLT.pptx
+++ b/ho-so-nang-luc-BLT/HO_SO_NANG_LUC_BLT.pptx
@@ -132,14 +132,14 @@
   <p:extLst>
     <p:ext uri="{521415D9-36F7-43E2-AB2F-B90AF26B5E84}">
       <p14:sectionLst xmlns:p14="http://schemas.microsoft.com/office/powerpoint/2010/main">
-        <p14:section name="Mở đầu" id="{0bbe6c87-0f18-b580-3dcb-9a0b10d2f8fb}">
+        <p14:section name="Mở đầu" id="{5210eb87-2eec-e2b7-0645-4a9a6b3afc3f}">
           <p14:sldIdLst>
             <p14:sldId id="256"/>
             <p14:sldId id="257"/>
             <p14:sldId id="258"/>
           </p14:sldIdLst>
         </p14:section>
-        <p14:section name="01 Tổng quan" id="{ac0cc673-32c5-1565-ccf9-766058a62210}">
+        <p14:section name="01 Tổng quan" id="{e8836b11-c9b5-823c-92a1-685148a11d09}">
           <p14:sldIdLst>
             <p14:sldId id="259"/>
             <p14:sldId id="260"/>
@@ -148,39 +148,39 @@
             <p14:sldId id="263"/>
           </p14:sldIdLst>
         </p14:section>
-        <p14:section name="02 Điện nước công trình" id="{150747eb-7436-4157-338c-226eeb5c80be}">
+        <p14:section name="02 Điện nước công trình" id="{ad650f48-fa47-de60-7f6d-1ebdfa285152}">
           <p14:sldIdLst>
             <p14:sldId id="264"/>
             <p14:sldId id="265"/>
             <p14:sldId id="266"/>
           </p14:sldIdLst>
         </p14:section>
-        <p14:section name="03 Hút sương dầu nhà xưởng" id="{79125877-9383-2eae-4e31-ecab98479aa2}">
+        <p14:section name="03 Hút sương dầu nhà xưởng" id="{aa954143-323b-70a6-42ba-010334ff2c2a}">
           <p14:sldIdLst>
             <p14:sldId id="267"/>
             <p14:sldId id="268"/>
             <p14:sldId id="269"/>
           </p14:sldIdLst>
         </p14:section>
-        <p14:section name="04 Bơm &amp; xử lý nước" id="{a1d8c0b2-ca32-c826-de49-2fbe784e4031}">
+        <p14:section name="04 Bơm &amp; xử lý nước" id="{30d72375-f995-10f6-7aa4-0e32d59d5615}">
           <p14:sldIdLst>
             <p14:sldId id="270"/>
           </p14:sldIdLst>
         </p14:section>
-        <p14:section name="05 Quản trị dự án" id="{4b217288-42b1-2982-4f70-0e96ca683951}">
+        <p14:section name="05 Quản trị dự án" id="{ff1af035-8ac7-0547-8a00-40daa18ed449}">
           <p14:sldIdLst>
             <p14:sldId id="271"/>
             <p14:sldId id="272"/>
             <p14:sldId id="273"/>
           </p14:sldIdLst>
         </p14:section>
-        <p14:section name="06 Nguồn lực" id="{9c66aa22-187a-de66-ac88-31471de3d4e5}">
+        <p14:section name="06 Nguồn lực" id="{7db12cff-9614-0a7f-7e16-5d3d16b7aaf1}">
           <p14:sldIdLst>
             <p14:sldId id="274"/>
             <p14:sldId id="275"/>
           </p14:sldIdLst>
         </p14:section>
-        <p14:section name="07 Công trình tiêu biểu" id="{68f5d6a3-e6b4-297d-7316-1d3d24b88726}">
+        <p14:section name="07 Công trình tiêu biểu" id="{bca997de-3665-3664-f29a-f739d9af7bc8}">
           <p14:sldIdLst>
             <p14:sldId id="276"/>
             <p14:sldId id="277"/>
@@ -188,7 +188,7 @@
             <p14:sldId id="279"/>
           </p14:sldIdLst>
         </p14:section>
-        <p14:section name="08 Cam kết &amp; liên hệ" id="{4c77920e-b937-72b3-8290-83ce20eece88}">
+        <p14:section name="08 Cam kết &amp; liên hệ" id="{84bb1583-8c83-f3a5-e54c-4cd4ab330e43}">
           <p14:sldIdLst>
             <p14:sldId id="280"/>
             <p14:sldId id="281"/>
@@ -3749,7 +3749,7 @@
         </p:nvSpPr>
         <p:spPr>
           <a:xfrm>
-            <a:off x="4544568" y="6355080"/>
+            <a:off x="4773168" y="274320"/>
             <a:ext cx="2514600" cy="457200"/>
           </a:xfrm>
           <a:prstGeom prst="roundRect">
@@ -3776,7 +3776,7 @@
         </p:nvSpPr>
         <p:spPr>
           <a:xfrm>
-            <a:off x="4544568" y="6355080"/>
+            <a:off x="4773168" y="274320"/>
             <a:ext cx="2514600" cy="457200"/>
           </a:xfrm>
           <a:prstGeom prst="rect">
